--- a/Final/Figures/ufig.pptx
+++ b/Final/Figures/ufig.pptx
@@ -2,12 +2,12 @@
 <file path=ppt/presentation.xml><?xml version="1.0" encoding="utf-8"?>
 <p:presentation xmlns:a="http://schemas.openxmlformats.org/drawingml/2006/main" xmlns:r="http://schemas.openxmlformats.org/officeDocument/2006/relationships" xmlns:p="http://schemas.openxmlformats.org/presentationml/2006/main" saveSubsetFonts="1">
   <p:sldMasterIdLst>
-    <p:sldMasterId id="2147483756" r:id="rId1"/>
+    <p:sldMasterId id="2147483792" r:id="rId1"/>
   </p:sldMasterIdLst>
   <p:sldIdLst>
     <p:sldId id="256" r:id="rId2"/>
   </p:sldIdLst>
-  <p:sldSz cx="16200438" cy="7235825"/>
+  <p:sldSz cx="9906000" cy="4679950"/>
   <p:notesSz cx="6858000" cy="9144000"/>
   <p:defaultTextStyle>
     <a:defPPr>
@@ -141,15 +141,15 @@
         </p:nvSpPr>
         <p:spPr>
           <a:xfrm>
-            <a:off x="2025055" y="1184197"/>
-            <a:ext cx="12150329" cy="2519139"/>
+            <a:off x="1238250" y="765909"/>
+            <a:ext cx="7429500" cy="1629316"/>
           </a:xfrm>
         </p:spPr>
         <p:txBody>
           <a:bodyPr anchor="b"/>
           <a:lstStyle>
             <a:lvl1pPr algn="ctr">
-              <a:defRPr sz="6331"/>
+              <a:defRPr sz="4094"/>
             </a:lvl1pPr>
           </a:lstStyle>
           <a:p>
@@ -173,8 +173,8 @@
         </p:nvSpPr>
         <p:spPr>
           <a:xfrm>
-            <a:off x="2025055" y="3800484"/>
-            <a:ext cx="12150329" cy="1746982"/>
+            <a:off x="1238250" y="2458058"/>
+            <a:ext cx="7429500" cy="1129904"/>
           </a:xfrm>
         </p:spPr>
         <p:txBody>
@@ -182,39 +182,39 @@
           <a:lstStyle>
             <a:lvl1pPr marL="0" indent="0" algn="ctr">
               <a:buNone/>
-              <a:defRPr sz="2532"/>
+              <a:defRPr sz="1638"/>
             </a:lvl1pPr>
-            <a:lvl2pPr marL="482392" indent="0" algn="ctr">
+            <a:lvl2pPr marL="311993" indent="0" algn="ctr">
               <a:buNone/>
-              <a:defRPr sz="2110"/>
+              <a:defRPr sz="1365"/>
             </a:lvl2pPr>
-            <a:lvl3pPr marL="964783" indent="0" algn="ctr">
+            <a:lvl3pPr marL="623987" indent="0" algn="ctr">
               <a:buNone/>
-              <a:defRPr sz="1899"/>
+              <a:defRPr sz="1228"/>
             </a:lvl3pPr>
-            <a:lvl4pPr marL="1447175" indent="0" algn="ctr">
+            <a:lvl4pPr marL="935980" indent="0" algn="ctr">
               <a:buNone/>
-              <a:defRPr sz="1688"/>
+              <a:defRPr sz="1092"/>
             </a:lvl4pPr>
-            <a:lvl5pPr marL="1929567" indent="0" algn="ctr">
+            <a:lvl5pPr marL="1247973" indent="0" algn="ctr">
               <a:buNone/>
-              <a:defRPr sz="1688"/>
+              <a:defRPr sz="1092"/>
             </a:lvl5pPr>
-            <a:lvl6pPr marL="2411959" indent="0" algn="ctr">
+            <a:lvl6pPr marL="1559966" indent="0" algn="ctr">
               <a:buNone/>
-              <a:defRPr sz="1688"/>
+              <a:defRPr sz="1092"/>
             </a:lvl6pPr>
-            <a:lvl7pPr marL="2894350" indent="0" algn="ctr">
+            <a:lvl7pPr marL="1871960" indent="0" algn="ctr">
               <a:buNone/>
-              <a:defRPr sz="1688"/>
+              <a:defRPr sz="1092"/>
             </a:lvl7pPr>
-            <a:lvl8pPr marL="3376742" indent="0" algn="ctr">
+            <a:lvl8pPr marL="2183953" indent="0" algn="ctr">
               <a:buNone/>
-              <a:defRPr sz="1688"/>
+              <a:defRPr sz="1092"/>
             </a:lvl8pPr>
-            <a:lvl9pPr marL="3859134" indent="0" algn="ctr">
+            <a:lvl9pPr marL="2495946" indent="0" algn="ctr">
               <a:buNone/>
-              <a:defRPr sz="1688"/>
+              <a:defRPr sz="1092"/>
             </a:lvl9pPr>
           </a:lstStyle>
           <a:p>
@@ -243,7 +243,7 @@
           <a:p>
             <a:fld id="{6A29EBDB-ED21-4F12-8F84-164F28F696EF}" type="datetimeFigureOut">
               <a:rPr lang="zh-TW" altLang="en-US" smtClean="0"/>
-              <a:t>2026/4/22</a:t>
+              <a:t>2026/5/20</a:t>
             </a:fld>
             <a:endParaRPr lang="zh-TW" altLang="en-US"/>
           </a:p>
@@ -294,7 +294,7 @@
     </p:spTree>
     <p:extLst>
       <p:ext uri="{BB962C8B-B14F-4D97-AF65-F5344CB8AC3E}">
-        <p14:creationId xmlns:p14="http://schemas.microsoft.com/office/powerpoint/2010/main" val="2988168547"/>
+        <p14:creationId xmlns:p14="http://schemas.microsoft.com/office/powerpoint/2010/main" val="3299919338"/>
       </p:ext>
     </p:extLst>
   </p:cSld>
@@ -413,7 +413,7 @@
           <a:p>
             <a:fld id="{6A29EBDB-ED21-4F12-8F84-164F28F696EF}" type="datetimeFigureOut">
               <a:rPr lang="zh-TW" altLang="en-US" smtClean="0"/>
-              <a:t>2026/4/22</a:t>
+              <a:t>2026/5/20</a:t>
             </a:fld>
             <a:endParaRPr lang="zh-TW" altLang="en-US"/>
           </a:p>
@@ -464,7 +464,7 @@
     </p:spTree>
     <p:extLst>
       <p:ext uri="{BB962C8B-B14F-4D97-AF65-F5344CB8AC3E}">
-        <p14:creationId xmlns:p14="http://schemas.microsoft.com/office/powerpoint/2010/main" val="310068599"/>
+        <p14:creationId xmlns:p14="http://schemas.microsoft.com/office/powerpoint/2010/main" val="2910169018"/>
       </p:ext>
     </p:extLst>
   </p:cSld>
@@ -503,8 +503,8 @@
         </p:nvSpPr>
         <p:spPr>
           <a:xfrm>
-            <a:off x="11593439" y="385241"/>
-            <a:ext cx="3493219" cy="6132027"/>
+            <a:off x="7088981" y="249164"/>
+            <a:ext cx="2135981" cy="3966041"/>
           </a:xfrm>
         </p:spPr>
         <p:txBody>
@@ -531,8 +531,8 @@
         </p:nvSpPr>
         <p:spPr>
           <a:xfrm>
-            <a:off x="1113780" y="385241"/>
-            <a:ext cx="10277153" cy="6132027"/>
+            <a:off x="681037" y="249164"/>
+            <a:ext cx="6284119" cy="3966041"/>
           </a:xfrm>
         </p:spPr>
         <p:txBody>
@@ -593,7 +593,7 @@
           <a:p>
             <a:fld id="{6A29EBDB-ED21-4F12-8F84-164F28F696EF}" type="datetimeFigureOut">
               <a:rPr lang="zh-TW" altLang="en-US" smtClean="0"/>
-              <a:t>2026/4/22</a:t>
+              <a:t>2026/5/20</a:t>
             </a:fld>
             <a:endParaRPr lang="zh-TW" altLang="en-US"/>
           </a:p>
@@ -644,7 +644,7 @@
     </p:spTree>
     <p:extLst>
       <p:ext uri="{BB962C8B-B14F-4D97-AF65-F5344CB8AC3E}">
-        <p14:creationId xmlns:p14="http://schemas.microsoft.com/office/powerpoint/2010/main" val="588371673"/>
+        <p14:creationId xmlns:p14="http://schemas.microsoft.com/office/powerpoint/2010/main" val="2930708340"/>
       </p:ext>
     </p:extLst>
   </p:cSld>
@@ -763,7 +763,7 @@
           <a:p>
             <a:fld id="{6A29EBDB-ED21-4F12-8F84-164F28F696EF}" type="datetimeFigureOut">
               <a:rPr lang="zh-TW" altLang="en-US" smtClean="0"/>
-              <a:t>2026/4/22</a:t>
+              <a:t>2026/5/20</a:t>
             </a:fld>
             <a:endParaRPr lang="zh-TW" altLang="en-US"/>
           </a:p>
@@ -814,7 +814,7 @@
     </p:spTree>
     <p:extLst>
       <p:ext uri="{BB962C8B-B14F-4D97-AF65-F5344CB8AC3E}">
-        <p14:creationId xmlns:p14="http://schemas.microsoft.com/office/powerpoint/2010/main" val="2457058240"/>
+        <p14:creationId xmlns:p14="http://schemas.microsoft.com/office/powerpoint/2010/main" val="3167116089"/>
       </p:ext>
     </p:extLst>
   </p:cSld>
@@ -853,15 +853,15 @@
         </p:nvSpPr>
         <p:spPr>
           <a:xfrm>
-            <a:off x="1105342" y="1803932"/>
-            <a:ext cx="13972878" cy="3009902"/>
+            <a:off x="675878" y="1166738"/>
+            <a:ext cx="8543925" cy="1946729"/>
           </a:xfrm>
         </p:spPr>
         <p:txBody>
           <a:bodyPr anchor="b"/>
           <a:lstStyle>
             <a:lvl1pPr>
-              <a:defRPr sz="6331"/>
+              <a:defRPr sz="4094"/>
             </a:lvl1pPr>
           </a:lstStyle>
           <a:p>
@@ -885,8 +885,8 @@
         </p:nvSpPr>
         <p:spPr>
           <a:xfrm>
-            <a:off x="1105342" y="4842309"/>
-            <a:ext cx="13972878" cy="1582836"/>
+            <a:off x="675878" y="3131884"/>
+            <a:ext cx="8543925" cy="1023739"/>
           </a:xfrm>
         </p:spPr>
         <p:txBody>
@@ -894,7 +894,7 @@
           <a:lstStyle>
             <a:lvl1pPr marL="0" indent="0">
               <a:buNone/>
-              <a:defRPr sz="2532">
+              <a:defRPr sz="1638">
                 <a:solidFill>
                   <a:schemeClr val="tx1">
                     <a:tint val="75000"/>
@@ -902,9 +902,9 @@
                 </a:solidFill>
               </a:defRPr>
             </a:lvl1pPr>
-            <a:lvl2pPr marL="482392" indent="0">
+            <a:lvl2pPr marL="311993" indent="0">
               <a:buNone/>
-              <a:defRPr sz="2110">
+              <a:defRPr sz="1365">
                 <a:solidFill>
                   <a:schemeClr val="tx1">
                     <a:tint val="75000"/>
@@ -912,9 +912,9 @@
                 </a:solidFill>
               </a:defRPr>
             </a:lvl2pPr>
-            <a:lvl3pPr marL="964783" indent="0">
+            <a:lvl3pPr marL="623987" indent="0">
               <a:buNone/>
-              <a:defRPr sz="1899">
+              <a:defRPr sz="1228">
                 <a:solidFill>
                   <a:schemeClr val="tx1">
                     <a:tint val="75000"/>
@@ -922,9 +922,9 @@
                 </a:solidFill>
               </a:defRPr>
             </a:lvl3pPr>
-            <a:lvl4pPr marL="1447175" indent="0">
+            <a:lvl4pPr marL="935980" indent="0">
               <a:buNone/>
-              <a:defRPr sz="1688">
+              <a:defRPr sz="1092">
                 <a:solidFill>
                   <a:schemeClr val="tx1">
                     <a:tint val="75000"/>
@@ -932,9 +932,9 @@
                 </a:solidFill>
               </a:defRPr>
             </a:lvl4pPr>
-            <a:lvl5pPr marL="1929567" indent="0">
+            <a:lvl5pPr marL="1247973" indent="0">
               <a:buNone/>
-              <a:defRPr sz="1688">
+              <a:defRPr sz="1092">
                 <a:solidFill>
                   <a:schemeClr val="tx1">
                     <a:tint val="75000"/>
@@ -942,9 +942,9 @@
                 </a:solidFill>
               </a:defRPr>
             </a:lvl5pPr>
-            <a:lvl6pPr marL="2411959" indent="0">
+            <a:lvl6pPr marL="1559966" indent="0">
               <a:buNone/>
-              <a:defRPr sz="1688">
+              <a:defRPr sz="1092">
                 <a:solidFill>
                   <a:schemeClr val="tx1">
                     <a:tint val="75000"/>
@@ -952,9 +952,9 @@
                 </a:solidFill>
               </a:defRPr>
             </a:lvl6pPr>
-            <a:lvl7pPr marL="2894350" indent="0">
+            <a:lvl7pPr marL="1871960" indent="0">
               <a:buNone/>
-              <a:defRPr sz="1688">
+              <a:defRPr sz="1092">
                 <a:solidFill>
                   <a:schemeClr val="tx1">
                     <a:tint val="75000"/>
@@ -962,9 +962,9 @@
                 </a:solidFill>
               </a:defRPr>
             </a:lvl7pPr>
-            <a:lvl8pPr marL="3376742" indent="0">
+            <a:lvl8pPr marL="2183953" indent="0">
               <a:buNone/>
-              <a:defRPr sz="1688">
+              <a:defRPr sz="1092">
                 <a:solidFill>
                   <a:schemeClr val="tx1">
                     <a:tint val="75000"/>
@@ -972,9 +972,9 @@
                 </a:solidFill>
               </a:defRPr>
             </a:lvl8pPr>
-            <a:lvl9pPr marL="3859134" indent="0">
+            <a:lvl9pPr marL="2495946" indent="0">
               <a:buNone/>
-              <a:defRPr sz="1688">
+              <a:defRPr sz="1092">
                 <a:solidFill>
                   <a:schemeClr val="tx1">
                     <a:tint val="75000"/>
@@ -1009,7 +1009,7 @@
           <a:p>
             <a:fld id="{6A29EBDB-ED21-4F12-8F84-164F28F696EF}" type="datetimeFigureOut">
               <a:rPr lang="zh-TW" altLang="en-US" smtClean="0"/>
-              <a:t>2026/4/22</a:t>
+              <a:t>2026/5/20</a:t>
             </a:fld>
             <a:endParaRPr lang="zh-TW" altLang="en-US"/>
           </a:p>
@@ -1060,7 +1060,7 @@
     </p:spTree>
     <p:extLst>
       <p:ext uri="{BB962C8B-B14F-4D97-AF65-F5344CB8AC3E}">
-        <p14:creationId xmlns:p14="http://schemas.microsoft.com/office/powerpoint/2010/main" val="1524458049"/>
+        <p14:creationId xmlns:p14="http://schemas.microsoft.com/office/powerpoint/2010/main" val="2806226180"/>
       </p:ext>
     </p:extLst>
   </p:cSld>
@@ -1122,8 +1122,8 @@
         </p:nvSpPr>
         <p:spPr>
           <a:xfrm>
-            <a:off x="1113780" y="1926204"/>
-            <a:ext cx="6885186" cy="4591064"/>
+            <a:off x="681038" y="1245820"/>
+            <a:ext cx="4210050" cy="2969385"/>
           </a:xfrm>
         </p:spPr>
         <p:txBody>
@@ -1179,8 +1179,8 @@
         </p:nvSpPr>
         <p:spPr>
           <a:xfrm>
-            <a:off x="8201472" y="1926204"/>
-            <a:ext cx="6885186" cy="4591064"/>
+            <a:off x="5014913" y="1245820"/>
+            <a:ext cx="4210050" cy="2969385"/>
           </a:xfrm>
         </p:spPr>
         <p:txBody>
@@ -1241,7 +1241,7 @@
           <a:p>
             <a:fld id="{6A29EBDB-ED21-4F12-8F84-164F28F696EF}" type="datetimeFigureOut">
               <a:rPr lang="zh-TW" altLang="en-US" smtClean="0"/>
-              <a:t>2026/4/22</a:t>
+              <a:t>2026/5/20</a:t>
             </a:fld>
             <a:endParaRPr lang="zh-TW" altLang="en-US"/>
           </a:p>
@@ -1292,7 +1292,7 @@
     </p:spTree>
     <p:extLst>
       <p:ext uri="{BB962C8B-B14F-4D97-AF65-F5344CB8AC3E}">
-        <p14:creationId xmlns:p14="http://schemas.microsoft.com/office/powerpoint/2010/main" val="4075746374"/>
+        <p14:creationId xmlns:p14="http://schemas.microsoft.com/office/powerpoint/2010/main" val="2786729316"/>
       </p:ext>
     </p:extLst>
   </p:cSld>
@@ -1331,8 +1331,8 @@
         </p:nvSpPr>
         <p:spPr>
           <a:xfrm>
-            <a:off x="1115890" y="385241"/>
-            <a:ext cx="13972878" cy="1398592"/>
+            <a:off x="682328" y="249164"/>
+            <a:ext cx="8543925" cy="904574"/>
           </a:xfrm>
         </p:spPr>
         <p:txBody>
@@ -1359,8 +1359,8 @@
         </p:nvSpPr>
         <p:spPr>
           <a:xfrm>
-            <a:off x="1115891" y="1773783"/>
-            <a:ext cx="6853544" cy="869303"/>
+            <a:off x="682328" y="1147238"/>
+            <a:ext cx="4190702" cy="562244"/>
           </a:xfrm>
         </p:spPr>
         <p:txBody>
@@ -1368,39 +1368,39 @@
           <a:lstStyle>
             <a:lvl1pPr marL="0" indent="0">
               <a:buNone/>
-              <a:defRPr sz="2532" b="1"/>
+              <a:defRPr sz="1638" b="1"/>
             </a:lvl1pPr>
-            <a:lvl2pPr marL="482392" indent="0">
+            <a:lvl2pPr marL="311993" indent="0">
               <a:buNone/>
-              <a:defRPr sz="2110" b="1"/>
+              <a:defRPr sz="1365" b="1"/>
             </a:lvl2pPr>
-            <a:lvl3pPr marL="964783" indent="0">
+            <a:lvl3pPr marL="623987" indent="0">
               <a:buNone/>
-              <a:defRPr sz="1899" b="1"/>
+              <a:defRPr sz="1228" b="1"/>
             </a:lvl3pPr>
-            <a:lvl4pPr marL="1447175" indent="0">
+            <a:lvl4pPr marL="935980" indent="0">
               <a:buNone/>
-              <a:defRPr sz="1688" b="1"/>
+              <a:defRPr sz="1092" b="1"/>
             </a:lvl4pPr>
-            <a:lvl5pPr marL="1929567" indent="0">
+            <a:lvl5pPr marL="1247973" indent="0">
               <a:buNone/>
-              <a:defRPr sz="1688" b="1"/>
+              <a:defRPr sz="1092" b="1"/>
             </a:lvl5pPr>
-            <a:lvl6pPr marL="2411959" indent="0">
+            <a:lvl6pPr marL="1559966" indent="0">
               <a:buNone/>
-              <a:defRPr sz="1688" b="1"/>
+              <a:defRPr sz="1092" b="1"/>
             </a:lvl6pPr>
-            <a:lvl7pPr marL="2894350" indent="0">
+            <a:lvl7pPr marL="1871960" indent="0">
               <a:buNone/>
-              <a:defRPr sz="1688" b="1"/>
+              <a:defRPr sz="1092" b="1"/>
             </a:lvl7pPr>
-            <a:lvl8pPr marL="3376742" indent="0">
+            <a:lvl8pPr marL="2183953" indent="0">
               <a:buNone/>
-              <a:defRPr sz="1688" b="1"/>
+              <a:defRPr sz="1092" b="1"/>
             </a:lvl8pPr>
-            <a:lvl9pPr marL="3859134" indent="0">
+            <a:lvl9pPr marL="2495946" indent="0">
               <a:buNone/>
-              <a:defRPr sz="1688" b="1"/>
+              <a:defRPr sz="1092" b="1"/>
             </a:lvl9pPr>
           </a:lstStyle>
           <a:p>
@@ -1424,8 +1424,8 @@
         </p:nvSpPr>
         <p:spPr>
           <a:xfrm>
-            <a:off x="1115891" y="2643086"/>
-            <a:ext cx="6853544" cy="3887582"/>
+            <a:off x="682328" y="1709482"/>
+            <a:ext cx="4190702" cy="2514390"/>
           </a:xfrm>
         </p:spPr>
         <p:txBody>
@@ -1481,8 +1481,8 @@
         </p:nvSpPr>
         <p:spPr>
           <a:xfrm>
-            <a:off x="8201472" y="1773783"/>
-            <a:ext cx="6887296" cy="869303"/>
+            <a:off x="5014913" y="1147238"/>
+            <a:ext cx="4211340" cy="562244"/>
           </a:xfrm>
         </p:spPr>
         <p:txBody>
@@ -1490,39 +1490,39 @@
           <a:lstStyle>
             <a:lvl1pPr marL="0" indent="0">
               <a:buNone/>
-              <a:defRPr sz="2532" b="1"/>
+              <a:defRPr sz="1638" b="1"/>
             </a:lvl1pPr>
-            <a:lvl2pPr marL="482392" indent="0">
+            <a:lvl2pPr marL="311993" indent="0">
               <a:buNone/>
-              <a:defRPr sz="2110" b="1"/>
+              <a:defRPr sz="1365" b="1"/>
             </a:lvl2pPr>
-            <a:lvl3pPr marL="964783" indent="0">
+            <a:lvl3pPr marL="623987" indent="0">
               <a:buNone/>
-              <a:defRPr sz="1899" b="1"/>
+              <a:defRPr sz="1228" b="1"/>
             </a:lvl3pPr>
-            <a:lvl4pPr marL="1447175" indent="0">
+            <a:lvl4pPr marL="935980" indent="0">
               <a:buNone/>
-              <a:defRPr sz="1688" b="1"/>
+              <a:defRPr sz="1092" b="1"/>
             </a:lvl4pPr>
-            <a:lvl5pPr marL="1929567" indent="0">
+            <a:lvl5pPr marL="1247973" indent="0">
               <a:buNone/>
-              <a:defRPr sz="1688" b="1"/>
+              <a:defRPr sz="1092" b="1"/>
             </a:lvl5pPr>
-            <a:lvl6pPr marL="2411959" indent="0">
+            <a:lvl6pPr marL="1559966" indent="0">
               <a:buNone/>
-              <a:defRPr sz="1688" b="1"/>
+              <a:defRPr sz="1092" b="1"/>
             </a:lvl6pPr>
-            <a:lvl7pPr marL="2894350" indent="0">
+            <a:lvl7pPr marL="1871960" indent="0">
               <a:buNone/>
-              <a:defRPr sz="1688" b="1"/>
+              <a:defRPr sz="1092" b="1"/>
             </a:lvl7pPr>
-            <a:lvl8pPr marL="3376742" indent="0">
+            <a:lvl8pPr marL="2183953" indent="0">
               <a:buNone/>
-              <a:defRPr sz="1688" b="1"/>
+              <a:defRPr sz="1092" b="1"/>
             </a:lvl8pPr>
-            <a:lvl9pPr marL="3859134" indent="0">
+            <a:lvl9pPr marL="2495946" indent="0">
               <a:buNone/>
-              <a:defRPr sz="1688" b="1"/>
+              <a:defRPr sz="1092" b="1"/>
             </a:lvl9pPr>
           </a:lstStyle>
           <a:p>
@@ -1546,8 +1546,8 @@
         </p:nvSpPr>
         <p:spPr>
           <a:xfrm>
-            <a:off x="8201472" y="2643086"/>
-            <a:ext cx="6887296" cy="3887582"/>
+            <a:off x="5014913" y="1709482"/>
+            <a:ext cx="4211340" cy="2514390"/>
           </a:xfrm>
         </p:spPr>
         <p:txBody>
@@ -1608,7 +1608,7 @@
           <a:p>
             <a:fld id="{6A29EBDB-ED21-4F12-8F84-164F28F696EF}" type="datetimeFigureOut">
               <a:rPr lang="zh-TW" altLang="en-US" smtClean="0"/>
-              <a:t>2026/4/22</a:t>
+              <a:t>2026/5/20</a:t>
             </a:fld>
             <a:endParaRPr lang="zh-TW" altLang="en-US"/>
           </a:p>
@@ -1659,7 +1659,7 @@
     </p:spTree>
     <p:extLst>
       <p:ext uri="{BB962C8B-B14F-4D97-AF65-F5344CB8AC3E}">
-        <p14:creationId xmlns:p14="http://schemas.microsoft.com/office/powerpoint/2010/main" val="408087498"/>
+        <p14:creationId xmlns:p14="http://schemas.microsoft.com/office/powerpoint/2010/main" val="43505934"/>
       </p:ext>
     </p:extLst>
   </p:cSld>
@@ -1726,7 +1726,7 @@
           <a:p>
             <a:fld id="{6A29EBDB-ED21-4F12-8F84-164F28F696EF}" type="datetimeFigureOut">
               <a:rPr lang="zh-TW" altLang="en-US" smtClean="0"/>
-              <a:t>2026/4/22</a:t>
+              <a:t>2026/5/20</a:t>
             </a:fld>
             <a:endParaRPr lang="zh-TW" altLang="en-US"/>
           </a:p>
@@ -1777,7 +1777,7 @@
     </p:spTree>
     <p:extLst>
       <p:ext uri="{BB962C8B-B14F-4D97-AF65-F5344CB8AC3E}">
-        <p14:creationId xmlns:p14="http://schemas.microsoft.com/office/powerpoint/2010/main" val="3776262238"/>
+        <p14:creationId xmlns:p14="http://schemas.microsoft.com/office/powerpoint/2010/main" val="2013262161"/>
       </p:ext>
     </p:extLst>
   </p:cSld>
@@ -1821,7 +1821,7 @@
           <a:p>
             <a:fld id="{6A29EBDB-ED21-4F12-8F84-164F28F696EF}" type="datetimeFigureOut">
               <a:rPr lang="zh-TW" altLang="en-US" smtClean="0"/>
-              <a:t>2026/4/22</a:t>
+              <a:t>2026/5/20</a:t>
             </a:fld>
             <a:endParaRPr lang="zh-TW" altLang="en-US"/>
           </a:p>
@@ -1872,7 +1872,7 @@
     </p:spTree>
     <p:extLst>
       <p:ext uri="{BB962C8B-B14F-4D97-AF65-F5344CB8AC3E}">
-        <p14:creationId xmlns:p14="http://schemas.microsoft.com/office/powerpoint/2010/main" val="1708014924"/>
+        <p14:creationId xmlns:p14="http://schemas.microsoft.com/office/powerpoint/2010/main" val="2576127098"/>
       </p:ext>
     </p:extLst>
   </p:cSld>
@@ -1911,15 +1911,15 @@
         </p:nvSpPr>
         <p:spPr>
           <a:xfrm>
-            <a:off x="1115891" y="482388"/>
-            <a:ext cx="5225062" cy="1688359"/>
+            <a:off x="682328" y="311997"/>
+            <a:ext cx="3194943" cy="1091988"/>
           </a:xfrm>
         </p:spPr>
         <p:txBody>
           <a:bodyPr anchor="b"/>
           <a:lstStyle>
             <a:lvl1pPr>
-              <a:defRPr sz="3376"/>
+              <a:defRPr sz="2184"/>
             </a:lvl1pPr>
           </a:lstStyle>
           <a:p>
@@ -1943,39 +1943,39 @@
         </p:nvSpPr>
         <p:spPr>
           <a:xfrm>
-            <a:off x="6887296" y="1041825"/>
-            <a:ext cx="8201472" cy="5142126"/>
+            <a:off x="4211340" y="673826"/>
+            <a:ext cx="5014913" cy="3325798"/>
           </a:xfrm>
         </p:spPr>
         <p:txBody>
           <a:bodyPr/>
           <a:lstStyle>
             <a:lvl1pPr>
-              <a:defRPr sz="3376"/>
+              <a:defRPr sz="2184"/>
             </a:lvl1pPr>
             <a:lvl2pPr>
-              <a:defRPr sz="2954"/>
+              <a:defRPr sz="1911"/>
             </a:lvl2pPr>
             <a:lvl3pPr>
-              <a:defRPr sz="2532"/>
+              <a:defRPr sz="1638"/>
             </a:lvl3pPr>
             <a:lvl4pPr>
-              <a:defRPr sz="2110"/>
+              <a:defRPr sz="1365"/>
             </a:lvl4pPr>
             <a:lvl5pPr>
-              <a:defRPr sz="2110"/>
+              <a:defRPr sz="1365"/>
             </a:lvl5pPr>
             <a:lvl6pPr>
-              <a:defRPr sz="2110"/>
+              <a:defRPr sz="1365"/>
             </a:lvl6pPr>
             <a:lvl7pPr>
-              <a:defRPr sz="2110"/>
+              <a:defRPr sz="1365"/>
             </a:lvl7pPr>
             <a:lvl8pPr>
-              <a:defRPr sz="2110"/>
+              <a:defRPr sz="1365"/>
             </a:lvl8pPr>
             <a:lvl9pPr>
-              <a:defRPr sz="2110"/>
+              <a:defRPr sz="1365"/>
             </a:lvl9pPr>
           </a:lstStyle>
           <a:p>
@@ -2028,8 +2028,8 @@
         </p:nvSpPr>
         <p:spPr>
           <a:xfrm>
-            <a:off x="1115891" y="2170748"/>
-            <a:ext cx="5225062" cy="4021578"/>
+            <a:off x="682328" y="1403985"/>
+            <a:ext cx="3194943" cy="2601056"/>
           </a:xfrm>
         </p:spPr>
         <p:txBody>
@@ -2037,39 +2037,39 @@
           <a:lstStyle>
             <a:lvl1pPr marL="0" indent="0">
               <a:buNone/>
-              <a:defRPr sz="1688"/>
+              <a:defRPr sz="1092"/>
             </a:lvl1pPr>
-            <a:lvl2pPr marL="482392" indent="0">
+            <a:lvl2pPr marL="311993" indent="0">
               <a:buNone/>
-              <a:defRPr sz="1477"/>
+              <a:defRPr sz="955"/>
             </a:lvl2pPr>
-            <a:lvl3pPr marL="964783" indent="0">
+            <a:lvl3pPr marL="623987" indent="0">
               <a:buNone/>
-              <a:defRPr sz="1266"/>
+              <a:defRPr sz="819"/>
             </a:lvl3pPr>
-            <a:lvl4pPr marL="1447175" indent="0">
+            <a:lvl4pPr marL="935980" indent="0">
               <a:buNone/>
-              <a:defRPr sz="1055"/>
+              <a:defRPr sz="682"/>
             </a:lvl4pPr>
-            <a:lvl5pPr marL="1929567" indent="0">
+            <a:lvl5pPr marL="1247973" indent="0">
               <a:buNone/>
-              <a:defRPr sz="1055"/>
+              <a:defRPr sz="682"/>
             </a:lvl5pPr>
-            <a:lvl6pPr marL="2411959" indent="0">
+            <a:lvl6pPr marL="1559966" indent="0">
               <a:buNone/>
-              <a:defRPr sz="1055"/>
+              <a:defRPr sz="682"/>
             </a:lvl6pPr>
-            <a:lvl7pPr marL="2894350" indent="0">
+            <a:lvl7pPr marL="1871960" indent="0">
               <a:buNone/>
-              <a:defRPr sz="1055"/>
+              <a:defRPr sz="682"/>
             </a:lvl7pPr>
-            <a:lvl8pPr marL="3376742" indent="0">
+            <a:lvl8pPr marL="2183953" indent="0">
               <a:buNone/>
-              <a:defRPr sz="1055"/>
+              <a:defRPr sz="682"/>
             </a:lvl8pPr>
-            <a:lvl9pPr marL="3859134" indent="0">
+            <a:lvl9pPr marL="2495946" indent="0">
               <a:buNone/>
-              <a:defRPr sz="1055"/>
+              <a:defRPr sz="682"/>
             </a:lvl9pPr>
           </a:lstStyle>
           <a:p>
@@ -2098,7 +2098,7 @@
           <a:p>
             <a:fld id="{6A29EBDB-ED21-4F12-8F84-164F28F696EF}" type="datetimeFigureOut">
               <a:rPr lang="zh-TW" altLang="en-US" smtClean="0"/>
-              <a:t>2026/4/22</a:t>
+              <a:t>2026/5/20</a:t>
             </a:fld>
             <a:endParaRPr lang="zh-TW" altLang="en-US"/>
           </a:p>
@@ -2149,7 +2149,7 @@
     </p:spTree>
     <p:extLst>
       <p:ext uri="{BB962C8B-B14F-4D97-AF65-F5344CB8AC3E}">
-        <p14:creationId xmlns:p14="http://schemas.microsoft.com/office/powerpoint/2010/main" val="3111930191"/>
+        <p14:creationId xmlns:p14="http://schemas.microsoft.com/office/powerpoint/2010/main" val="2754012407"/>
       </p:ext>
     </p:extLst>
   </p:cSld>
@@ -2188,15 +2188,15 @@
         </p:nvSpPr>
         <p:spPr>
           <a:xfrm>
-            <a:off x="1115891" y="482388"/>
-            <a:ext cx="5225062" cy="1688359"/>
+            <a:off x="682328" y="311997"/>
+            <a:ext cx="3194943" cy="1091988"/>
           </a:xfrm>
         </p:spPr>
         <p:txBody>
           <a:bodyPr anchor="b"/>
           <a:lstStyle>
             <a:lvl1pPr>
-              <a:defRPr sz="3376"/>
+              <a:defRPr sz="2184"/>
             </a:lvl1pPr>
           </a:lstStyle>
           <a:p>
@@ -2220,8 +2220,8 @@
         </p:nvSpPr>
         <p:spPr>
           <a:xfrm>
-            <a:off x="6887296" y="1041825"/>
-            <a:ext cx="8201472" cy="5142126"/>
+            <a:off x="4211340" y="673826"/>
+            <a:ext cx="5014913" cy="3325798"/>
           </a:xfrm>
         </p:spPr>
         <p:txBody>
@@ -2229,39 +2229,39 @@
           <a:lstStyle>
             <a:lvl1pPr marL="0" indent="0">
               <a:buNone/>
-              <a:defRPr sz="3376"/>
+              <a:defRPr sz="2184"/>
             </a:lvl1pPr>
-            <a:lvl2pPr marL="482392" indent="0">
+            <a:lvl2pPr marL="311993" indent="0">
               <a:buNone/>
-              <a:defRPr sz="2954"/>
+              <a:defRPr sz="1911"/>
             </a:lvl2pPr>
-            <a:lvl3pPr marL="964783" indent="0">
+            <a:lvl3pPr marL="623987" indent="0">
               <a:buNone/>
-              <a:defRPr sz="2532"/>
+              <a:defRPr sz="1638"/>
             </a:lvl3pPr>
-            <a:lvl4pPr marL="1447175" indent="0">
+            <a:lvl4pPr marL="935980" indent="0">
               <a:buNone/>
-              <a:defRPr sz="2110"/>
+              <a:defRPr sz="1365"/>
             </a:lvl4pPr>
-            <a:lvl5pPr marL="1929567" indent="0">
+            <a:lvl5pPr marL="1247973" indent="0">
               <a:buNone/>
-              <a:defRPr sz="2110"/>
+              <a:defRPr sz="1365"/>
             </a:lvl5pPr>
-            <a:lvl6pPr marL="2411959" indent="0">
+            <a:lvl6pPr marL="1559966" indent="0">
               <a:buNone/>
-              <a:defRPr sz="2110"/>
+              <a:defRPr sz="1365"/>
             </a:lvl6pPr>
-            <a:lvl7pPr marL="2894350" indent="0">
+            <a:lvl7pPr marL="1871960" indent="0">
               <a:buNone/>
-              <a:defRPr sz="2110"/>
+              <a:defRPr sz="1365"/>
             </a:lvl7pPr>
-            <a:lvl8pPr marL="3376742" indent="0">
+            <a:lvl8pPr marL="2183953" indent="0">
               <a:buNone/>
-              <a:defRPr sz="2110"/>
+              <a:defRPr sz="1365"/>
             </a:lvl8pPr>
-            <a:lvl9pPr marL="3859134" indent="0">
+            <a:lvl9pPr marL="2495946" indent="0">
               <a:buNone/>
-              <a:defRPr sz="2110"/>
+              <a:defRPr sz="1365"/>
             </a:lvl9pPr>
           </a:lstStyle>
           <a:p>
@@ -2285,8 +2285,8 @@
         </p:nvSpPr>
         <p:spPr>
           <a:xfrm>
-            <a:off x="1115891" y="2170748"/>
-            <a:ext cx="5225062" cy="4021578"/>
+            <a:off x="682328" y="1403985"/>
+            <a:ext cx="3194943" cy="2601056"/>
           </a:xfrm>
         </p:spPr>
         <p:txBody>
@@ -2294,39 +2294,39 @@
           <a:lstStyle>
             <a:lvl1pPr marL="0" indent="0">
               <a:buNone/>
-              <a:defRPr sz="1688"/>
+              <a:defRPr sz="1092"/>
             </a:lvl1pPr>
-            <a:lvl2pPr marL="482392" indent="0">
+            <a:lvl2pPr marL="311993" indent="0">
               <a:buNone/>
-              <a:defRPr sz="1477"/>
+              <a:defRPr sz="955"/>
             </a:lvl2pPr>
-            <a:lvl3pPr marL="964783" indent="0">
+            <a:lvl3pPr marL="623987" indent="0">
               <a:buNone/>
-              <a:defRPr sz="1266"/>
+              <a:defRPr sz="819"/>
             </a:lvl3pPr>
-            <a:lvl4pPr marL="1447175" indent="0">
+            <a:lvl4pPr marL="935980" indent="0">
               <a:buNone/>
-              <a:defRPr sz="1055"/>
+              <a:defRPr sz="682"/>
             </a:lvl4pPr>
-            <a:lvl5pPr marL="1929567" indent="0">
+            <a:lvl5pPr marL="1247973" indent="0">
               <a:buNone/>
-              <a:defRPr sz="1055"/>
+              <a:defRPr sz="682"/>
             </a:lvl5pPr>
-            <a:lvl6pPr marL="2411959" indent="0">
+            <a:lvl6pPr marL="1559966" indent="0">
               <a:buNone/>
-              <a:defRPr sz="1055"/>
+              <a:defRPr sz="682"/>
             </a:lvl6pPr>
-            <a:lvl7pPr marL="2894350" indent="0">
+            <a:lvl7pPr marL="1871960" indent="0">
               <a:buNone/>
-              <a:defRPr sz="1055"/>
+              <a:defRPr sz="682"/>
             </a:lvl7pPr>
-            <a:lvl8pPr marL="3376742" indent="0">
+            <a:lvl8pPr marL="2183953" indent="0">
               <a:buNone/>
-              <a:defRPr sz="1055"/>
+              <a:defRPr sz="682"/>
             </a:lvl8pPr>
-            <a:lvl9pPr marL="3859134" indent="0">
+            <a:lvl9pPr marL="2495946" indent="0">
               <a:buNone/>
-              <a:defRPr sz="1055"/>
+              <a:defRPr sz="682"/>
             </a:lvl9pPr>
           </a:lstStyle>
           <a:p>
@@ -2355,7 +2355,7 @@
           <a:p>
             <a:fld id="{6A29EBDB-ED21-4F12-8F84-164F28F696EF}" type="datetimeFigureOut">
               <a:rPr lang="zh-TW" altLang="en-US" smtClean="0"/>
-              <a:t>2026/4/22</a:t>
+              <a:t>2026/5/20</a:t>
             </a:fld>
             <a:endParaRPr lang="zh-TW" altLang="en-US"/>
           </a:p>
@@ -2406,7 +2406,7 @@
     </p:spTree>
     <p:extLst>
       <p:ext uri="{BB962C8B-B14F-4D97-AF65-F5344CB8AC3E}">
-        <p14:creationId xmlns:p14="http://schemas.microsoft.com/office/powerpoint/2010/main" val="2453776483"/>
+        <p14:creationId xmlns:p14="http://schemas.microsoft.com/office/powerpoint/2010/main" val="70130483"/>
       </p:ext>
     </p:extLst>
   </p:cSld>
@@ -2450,8 +2450,8 @@
         </p:nvSpPr>
         <p:spPr>
           <a:xfrm>
-            <a:off x="1113780" y="385241"/>
-            <a:ext cx="13972878" cy="1398592"/>
+            <a:off x="681038" y="249164"/>
+            <a:ext cx="8543925" cy="904574"/>
           </a:xfrm>
           <a:prstGeom prst="rect">
             <a:avLst/>
@@ -2483,8 +2483,8 @@
         </p:nvSpPr>
         <p:spPr>
           <a:xfrm>
-            <a:off x="1113780" y="1926204"/>
-            <a:ext cx="13972878" cy="4591064"/>
+            <a:off x="681038" y="1245820"/>
+            <a:ext cx="8543925" cy="2969385"/>
           </a:xfrm>
           <a:prstGeom prst="rect">
             <a:avLst/>
@@ -2545,8 +2545,8 @@
         </p:nvSpPr>
         <p:spPr>
           <a:xfrm>
-            <a:off x="1113780" y="6706538"/>
-            <a:ext cx="3645099" cy="385241"/>
+            <a:off x="681038" y="4337621"/>
+            <a:ext cx="2228850" cy="249164"/>
           </a:xfrm>
           <a:prstGeom prst="rect">
             <a:avLst/>
@@ -2556,7 +2556,7 @@
           <a:bodyPr vert="horz" lIns="91440" tIns="45720" rIns="91440" bIns="45720" rtlCol="0" anchor="ctr"/>
           <a:lstStyle>
             <a:lvl1pPr algn="l">
-              <a:defRPr sz="1266">
+              <a:defRPr sz="819">
                 <a:solidFill>
                   <a:schemeClr val="tx1">
                     <a:tint val="75000"/>
@@ -2568,7 +2568,7 @@
           <a:p>
             <a:fld id="{6A29EBDB-ED21-4F12-8F84-164F28F696EF}" type="datetimeFigureOut">
               <a:rPr lang="zh-TW" altLang="en-US" smtClean="0"/>
-              <a:t>2026/4/22</a:t>
+              <a:t>2026/5/20</a:t>
             </a:fld>
             <a:endParaRPr lang="zh-TW" altLang="en-US"/>
           </a:p>
@@ -2586,8 +2586,8 @@
         </p:nvSpPr>
         <p:spPr>
           <a:xfrm>
-            <a:off x="5366395" y="6706538"/>
-            <a:ext cx="5467648" cy="385241"/>
+            <a:off x="3281363" y="4337621"/>
+            <a:ext cx="3343275" cy="249164"/>
           </a:xfrm>
           <a:prstGeom prst="rect">
             <a:avLst/>
@@ -2597,7 +2597,7 @@
           <a:bodyPr vert="horz" lIns="91440" tIns="45720" rIns="91440" bIns="45720" rtlCol="0" anchor="ctr"/>
           <a:lstStyle>
             <a:lvl1pPr algn="ctr">
-              <a:defRPr sz="1266">
+              <a:defRPr sz="819">
                 <a:solidFill>
                   <a:schemeClr val="tx1">
                     <a:tint val="75000"/>
@@ -2623,8 +2623,8 @@
         </p:nvSpPr>
         <p:spPr>
           <a:xfrm>
-            <a:off x="11441559" y="6706538"/>
-            <a:ext cx="3645099" cy="385241"/>
+            <a:off x="6996113" y="4337621"/>
+            <a:ext cx="2228850" cy="249164"/>
           </a:xfrm>
           <a:prstGeom prst="rect">
             <a:avLst/>
@@ -2634,7 +2634,7 @@
           <a:bodyPr vert="horz" lIns="91440" tIns="45720" rIns="91440" bIns="45720" rtlCol="0" anchor="ctr"/>
           <a:lstStyle>
             <a:lvl1pPr algn="r">
-              <a:defRPr sz="1266">
+              <a:defRPr sz="819">
                 <a:solidFill>
                   <a:schemeClr val="tx1">
                     <a:tint val="75000"/>
@@ -2655,27 +2655,27 @@
     </p:spTree>
     <p:extLst>
       <p:ext uri="{BB962C8B-B14F-4D97-AF65-F5344CB8AC3E}">
-        <p14:creationId xmlns:p14="http://schemas.microsoft.com/office/powerpoint/2010/main" val="1071084681"/>
+        <p14:creationId xmlns:p14="http://schemas.microsoft.com/office/powerpoint/2010/main" val="1459150172"/>
       </p:ext>
     </p:extLst>
   </p:cSld>
   <p:clrMap bg1="lt1" tx1="dk1" bg2="lt2" tx2="dk2" accent1="accent1" accent2="accent2" accent3="accent3" accent4="accent4" accent5="accent5" accent6="accent6" hlink="hlink" folHlink="folHlink"/>
   <p:sldLayoutIdLst>
-    <p:sldLayoutId id="2147483757" r:id="rId1"/>
-    <p:sldLayoutId id="2147483758" r:id="rId2"/>
-    <p:sldLayoutId id="2147483759" r:id="rId3"/>
-    <p:sldLayoutId id="2147483760" r:id="rId4"/>
-    <p:sldLayoutId id="2147483761" r:id="rId5"/>
-    <p:sldLayoutId id="2147483762" r:id="rId6"/>
-    <p:sldLayoutId id="2147483763" r:id="rId7"/>
-    <p:sldLayoutId id="2147483764" r:id="rId8"/>
-    <p:sldLayoutId id="2147483765" r:id="rId9"/>
-    <p:sldLayoutId id="2147483766" r:id="rId10"/>
-    <p:sldLayoutId id="2147483767" r:id="rId11"/>
+    <p:sldLayoutId id="2147483793" r:id="rId1"/>
+    <p:sldLayoutId id="2147483794" r:id="rId2"/>
+    <p:sldLayoutId id="2147483795" r:id="rId3"/>
+    <p:sldLayoutId id="2147483796" r:id="rId4"/>
+    <p:sldLayoutId id="2147483797" r:id="rId5"/>
+    <p:sldLayoutId id="2147483798" r:id="rId6"/>
+    <p:sldLayoutId id="2147483799" r:id="rId7"/>
+    <p:sldLayoutId id="2147483800" r:id="rId8"/>
+    <p:sldLayoutId id="2147483801" r:id="rId9"/>
+    <p:sldLayoutId id="2147483802" r:id="rId10"/>
+    <p:sldLayoutId id="2147483803" r:id="rId11"/>
   </p:sldLayoutIdLst>
   <p:txStyles>
     <p:titleStyle>
-      <a:lvl1pPr algn="l" defTabSz="964783" rtl="0" eaLnBrk="1" latinLnBrk="0" hangingPunct="1">
+      <a:lvl1pPr algn="l" defTabSz="623987" rtl="0" eaLnBrk="1" latinLnBrk="0" hangingPunct="1">
         <a:lnSpc>
           <a:spcPct val="90000"/>
         </a:lnSpc>
@@ -2683,7 +2683,7 @@
           <a:spcPct val="0"/>
         </a:spcBef>
         <a:buNone/>
-        <a:defRPr sz="4642" kern="1200">
+        <a:defRPr sz="3003" kern="1200">
           <a:solidFill>
             <a:schemeClr val="tx1"/>
           </a:solidFill>
@@ -2694,16 +2694,16 @@
       </a:lvl1pPr>
     </p:titleStyle>
     <p:bodyStyle>
-      <a:lvl1pPr marL="241196" indent="-241196" algn="l" defTabSz="964783" rtl="0" eaLnBrk="1" latinLnBrk="0" hangingPunct="1">
+      <a:lvl1pPr marL="155997" indent="-155997" algn="l" defTabSz="623987" rtl="0" eaLnBrk="1" latinLnBrk="0" hangingPunct="1">
         <a:lnSpc>
           <a:spcPct val="90000"/>
         </a:lnSpc>
         <a:spcBef>
-          <a:spcPts val="1055"/>
+          <a:spcPts val="682"/>
         </a:spcBef>
         <a:buFont typeface="Arial" panose="020B0604020202020204" pitchFamily="34" charset="0"/>
         <a:buChar char="•"/>
-        <a:defRPr sz="2954" kern="1200">
+        <a:defRPr sz="1911" kern="1200">
           <a:solidFill>
             <a:schemeClr val="tx1"/>
           </a:solidFill>
@@ -2712,16 +2712,16 @@
           <a:cs typeface="+mn-cs"/>
         </a:defRPr>
       </a:lvl1pPr>
-      <a:lvl2pPr marL="723588" indent="-241196" algn="l" defTabSz="964783" rtl="0" eaLnBrk="1" latinLnBrk="0" hangingPunct="1">
+      <a:lvl2pPr marL="467990" indent="-155997" algn="l" defTabSz="623987" rtl="0" eaLnBrk="1" latinLnBrk="0" hangingPunct="1">
         <a:lnSpc>
           <a:spcPct val="90000"/>
         </a:lnSpc>
         <a:spcBef>
-          <a:spcPts val="528"/>
+          <a:spcPts val="341"/>
         </a:spcBef>
         <a:buFont typeface="Arial" panose="020B0604020202020204" pitchFamily="34" charset="0"/>
         <a:buChar char="•"/>
-        <a:defRPr sz="2532" kern="1200">
+        <a:defRPr sz="1638" kern="1200">
           <a:solidFill>
             <a:schemeClr val="tx1"/>
           </a:solidFill>
@@ -2730,16 +2730,16 @@
           <a:cs typeface="+mn-cs"/>
         </a:defRPr>
       </a:lvl2pPr>
-      <a:lvl3pPr marL="1205979" indent="-241196" algn="l" defTabSz="964783" rtl="0" eaLnBrk="1" latinLnBrk="0" hangingPunct="1">
+      <a:lvl3pPr marL="779983" indent="-155997" algn="l" defTabSz="623987" rtl="0" eaLnBrk="1" latinLnBrk="0" hangingPunct="1">
         <a:lnSpc>
           <a:spcPct val="90000"/>
         </a:lnSpc>
         <a:spcBef>
-          <a:spcPts val="528"/>
+          <a:spcPts val="341"/>
         </a:spcBef>
         <a:buFont typeface="Arial" panose="020B0604020202020204" pitchFamily="34" charset="0"/>
         <a:buChar char="•"/>
-        <a:defRPr sz="2110" kern="1200">
+        <a:defRPr sz="1365" kern="1200">
           <a:solidFill>
             <a:schemeClr val="tx1"/>
           </a:solidFill>
@@ -2748,16 +2748,16 @@
           <a:cs typeface="+mn-cs"/>
         </a:defRPr>
       </a:lvl3pPr>
-      <a:lvl4pPr marL="1688371" indent="-241196" algn="l" defTabSz="964783" rtl="0" eaLnBrk="1" latinLnBrk="0" hangingPunct="1">
+      <a:lvl4pPr marL="1091976" indent="-155997" algn="l" defTabSz="623987" rtl="0" eaLnBrk="1" latinLnBrk="0" hangingPunct="1">
         <a:lnSpc>
           <a:spcPct val="90000"/>
         </a:lnSpc>
         <a:spcBef>
-          <a:spcPts val="528"/>
+          <a:spcPts val="341"/>
         </a:spcBef>
         <a:buFont typeface="Arial" panose="020B0604020202020204" pitchFamily="34" charset="0"/>
         <a:buChar char="•"/>
-        <a:defRPr sz="1899" kern="1200">
+        <a:defRPr sz="1228" kern="1200">
           <a:solidFill>
             <a:schemeClr val="tx1"/>
           </a:solidFill>
@@ -2766,16 +2766,16 @@
           <a:cs typeface="+mn-cs"/>
         </a:defRPr>
       </a:lvl4pPr>
-      <a:lvl5pPr marL="2170763" indent="-241196" algn="l" defTabSz="964783" rtl="0" eaLnBrk="1" latinLnBrk="0" hangingPunct="1">
+      <a:lvl5pPr marL="1403970" indent="-155997" algn="l" defTabSz="623987" rtl="0" eaLnBrk="1" latinLnBrk="0" hangingPunct="1">
         <a:lnSpc>
           <a:spcPct val="90000"/>
         </a:lnSpc>
         <a:spcBef>
-          <a:spcPts val="528"/>
+          <a:spcPts val="341"/>
         </a:spcBef>
         <a:buFont typeface="Arial" panose="020B0604020202020204" pitchFamily="34" charset="0"/>
         <a:buChar char="•"/>
-        <a:defRPr sz="1899" kern="1200">
+        <a:defRPr sz="1228" kern="1200">
           <a:solidFill>
             <a:schemeClr val="tx1"/>
           </a:solidFill>
@@ -2784,16 +2784,16 @@
           <a:cs typeface="+mn-cs"/>
         </a:defRPr>
       </a:lvl5pPr>
-      <a:lvl6pPr marL="2653154" indent="-241196" algn="l" defTabSz="964783" rtl="0" eaLnBrk="1" latinLnBrk="0" hangingPunct="1">
+      <a:lvl6pPr marL="1715963" indent="-155997" algn="l" defTabSz="623987" rtl="0" eaLnBrk="1" latinLnBrk="0" hangingPunct="1">
         <a:lnSpc>
           <a:spcPct val="90000"/>
         </a:lnSpc>
         <a:spcBef>
-          <a:spcPts val="528"/>
+          <a:spcPts val="341"/>
         </a:spcBef>
         <a:buFont typeface="Arial" panose="020B0604020202020204" pitchFamily="34" charset="0"/>
         <a:buChar char="•"/>
-        <a:defRPr sz="1899" kern="1200">
+        <a:defRPr sz="1228" kern="1200">
           <a:solidFill>
             <a:schemeClr val="tx1"/>
           </a:solidFill>
@@ -2802,16 +2802,16 @@
           <a:cs typeface="+mn-cs"/>
         </a:defRPr>
       </a:lvl6pPr>
-      <a:lvl7pPr marL="3135546" indent="-241196" algn="l" defTabSz="964783" rtl="0" eaLnBrk="1" latinLnBrk="0" hangingPunct="1">
+      <a:lvl7pPr marL="2027956" indent="-155997" algn="l" defTabSz="623987" rtl="0" eaLnBrk="1" latinLnBrk="0" hangingPunct="1">
         <a:lnSpc>
           <a:spcPct val="90000"/>
         </a:lnSpc>
         <a:spcBef>
-          <a:spcPts val="528"/>
+          <a:spcPts val="341"/>
         </a:spcBef>
         <a:buFont typeface="Arial" panose="020B0604020202020204" pitchFamily="34" charset="0"/>
         <a:buChar char="•"/>
-        <a:defRPr sz="1899" kern="1200">
+        <a:defRPr sz="1228" kern="1200">
           <a:solidFill>
             <a:schemeClr val="tx1"/>
           </a:solidFill>
@@ -2820,16 +2820,16 @@
           <a:cs typeface="+mn-cs"/>
         </a:defRPr>
       </a:lvl7pPr>
-      <a:lvl8pPr marL="3617938" indent="-241196" algn="l" defTabSz="964783" rtl="0" eaLnBrk="1" latinLnBrk="0" hangingPunct="1">
+      <a:lvl8pPr marL="2339950" indent="-155997" algn="l" defTabSz="623987" rtl="0" eaLnBrk="1" latinLnBrk="0" hangingPunct="1">
         <a:lnSpc>
           <a:spcPct val="90000"/>
         </a:lnSpc>
         <a:spcBef>
-          <a:spcPts val="528"/>
+          <a:spcPts val="341"/>
         </a:spcBef>
         <a:buFont typeface="Arial" panose="020B0604020202020204" pitchFamily="34" charset="0"/>
         <a:buChar char="•"/>
-        <a:defRPr sz="1899" kern="1200">
+        <a:defRPr sz="1228" kern="1200">
           <a:solidFill>
             <a:schemeClr val="tx1"/>
           </a:solidFill>
@@ -2838,16 +2838,16 @@
           <a:cs typeface="+mn-cs"/>
         </a:defRPr>
       </a:lvl8pPr>
-      <a:lvl9pPr marL="4100330" indent="-241196" algn="l" defTabSz="964783" rtl="0" eaLnBrk="1" latinLnBrk="0" hangingPunct="1">
+      <a:lvl9pPr marL="2651943" indent="-155997" algn="l" defTabSz="623987" rtl="0" eaLnBrk="1" latinLnBrk="0" hangingPunct="1">
         <a:lnSpc>
           <a:spcPct val="90000"/>
         </a:lnSpc>
         <a:spcBef>
-          <a:spcPts val="528"/>
+          <a:spcPts val="341"/>
         </a:spcBef>
         <a:buFont typeface="Arial" panose="020B0604020202020204" pitchFamily="34" charset="0"/>
         <a:buChar char="•"/>
-        <a:defRPr sz="1899" kern="1200">
+        <a:defRPr sz="1228" kern="1200">
           <a:solidFill>
             <a:schemeClr val="tx1"/>
           </a:solidFill>
@@ -2861,8 +2861,8 @@
       <a:defPPr>
         <a:defRPr lang="en-US"/>
       </a:defPPr>
-      <a:lvl1pPr marL="0" algn="l" defTabSz="964783" rtl="0" eaLnBrk="1" latinLnBrk="0" hangingPunct="1">
-        <a:defRPr sz="1899" kern="1200">
+      <a:lvl1pPr marL="0" algn="l" defTabSz="623987" rtl="0" eaLnBrk="1" latinLnBrk="0" hangingPunct="1">
+        <a:defRPr sz="1228" kern="1200">
           <a:solidFill>
             <a:schemeClr val="tx1"/>
           </a:solidFill>
@@ -2871,8 +2871,8 @@
           <a:cs typeface="+mn-cs"/>
         </a:defRPr>
       </a:lvl1pPr>
-      <a:lvl2pPr marL="482392" algn="l" defTabSz="964783" rtl="0" eaLnBrk="1" latinLnBrk="0" hangingPunct="1">
-        <a:defRPr sz="1899" kern="1200">
+      <a:lvl2pPr marL="311993" algn="l" defTabSz="623987" rtl="0" eaLnBrk="1" latinLnBrk="0" hangingPunct="1">
+        <a:defRPr sz="1228" kern="1200">
           <a:solidFill>
             <a:schemeClr val="tx1"/>
           </a:solidFill>
@@ -2881,8 +2881,8 @@
           <a:cs typeface="+mn-cs"/>
         </a:defRPr>
       </a:lvl2pPr>
-      <a:lvl3pPr marL="964783" algn="l" defTabSz="964783" rtl="0" eaLnBrk="1" latinLnBrk="0" hangingPunct="1">
-        <a:defRPr sz="1899" kern="1200">
+      <a:lvl3pPr marL="623987" algn="l" defTabSz="623987" rtl="0" eaLnBrk="1" latinLnBrk="0" hangingPunct="1">
+        <a:defRPr sz="1228" kern="1200">
           <a:solidFill>
             <a:schemeClr val="tx1"/>
           </a:solidFill>
@@ -2891,8 +2891,8 @@
           <a:cs typeface="+mn-cs"/>
         </a:defRPr>
       </a:lvl3pPr>
-      <a:lvl4pPr marL="1447175" algn="l" defTabSz="964783" rtl="0" eaLnBrk="1" latinLnBrk="0" hangingPunct="1">
-        <a:defRPr sz="1899" kern="1200">
+      <a:lvl4pPr marL="935980" algn="l" defTabSz="623987" rtl="0" eaLnBrk="1" latinLnBrk="0" hangingPunct="1">
+        <a:defRPr sz="1228" kern="1200">
           <a:solidFill>
             <a:schemeClr val="tx1"/>
           </a:solidFill>
@@ -2901,8 +2901,8 @@
           <a:cs typeface="+mn-cs"/>
         </a:defRPr>
       </a:lvl4pPr>
-      <a:lvl5pPr marL="1929567" algn="l" defTabSz="964783" rtl="0" eaLnBrk="1" latinLnBrk="0" hangingPunct="1">
-        <a:defRPr sz="1899" kern="1200">
+      <a:lvl5pPr marL="1247973" algn="l" defTabSz="623987" rtl="0" eaLnBrk="1" latinLnBrk="0" hangingPunct="1">
+        <a:defRPr sz="1228" kern="1200">
           <a:solidFill>
             <a:schemeClr val="tx1"/>
           </a:solidFill>
@@ -2911,8 +2911,8 @@
           <a:cs typeface="+mn-cs"/>
         </a:defRPr>
       </a:lvl5pPr>
-      <a:lvl6pPr marL="2411959" algn="l" defTabSz="964783" rtl="0" eaLnBrk="1" latinLnBrk="0" hangingPunct="1">
-        <a:defRPr sz="1899" kern="1200">
+      <a:lvl6pPr marL="1559966" algn="l" defTabSz="623987" rtl="0" eaLnBrk="1" latinLnBrk="0" hangingPunct="1">
+        <a:defRPr sz="1228" kern="1200">
           <a:solidFill>
             <a:schemeClr val="tx1"/>
           </a:solidFill>
@@ -2921,8 +2921,8 @@
           <a:cs typeface="+mn-cs"/>
         </a:defRPr>
       </a:lvl6pPr>
-      <a:lvl7pPr marL="2894350" algn="l" defTabSz="964783" rtl="0" eaLnBrk="1" latinLnBrk="0" hangingPunct="1">
-        <a:defRPr sz="1899" kern="1200">
+      <a:lvl7pPr marL="1871960" algn="l" defTabSz="623987" rtl="0" eaLnBrk="1" latinLnBrk="0" hangingPunct="1">
+        <a:defRPr sz="1228" kern="1200">
           <a:solidFill>
             <a:schemeClr val="tx1"/>
           </a:solidFill>
@@ -2931,8 +2931,8 @@
           <a:cs typeface="+mn-cs"/>
         </a:defRPr>
       </a:lvl7pPr>
-      <a:lvl8pPr marL="3376742" algn="l" defTabSz="964783" rtl="0" eaLnBrk="1" latinLnBrk="0" hangingPunct="1">
-        <a:defRPr sz="1899" kern="1200">
+      <a:lvl8pPr marL="2183953" algn="l" defTabSz="623987" rtl="0" eaLnBrk="1" latinLnBrk="0" hangingPunct="1">
+        <a:defRPr sz="1228" kern="1200">
           <a:solidFill>
             <a:schemeClr val="tx1"/>
           </a:solidFill>
@@ -2941,8 +2941,8 @@
           <a:cs typeface="+mn-cs"/>
         </a:defRPr>
       </a:lvl8pPr>
-      <a:lvl9pPr marL="3859134" algn="l" defTabSz="964783" rtl="0" eaLnBrk="1" latinLnBrk="0" hangingPunct="1">
-        <a:defRPr sz="1899" kern="1200">
+      <a:lvl9pPr marL="2495946" algn="l" defTabSz="623987" rtl="0" eaLnBrk="1" latinLnBrk="0" hangingPunct="1">
+        <a:defRPr sz="1228" kern="1200">
           <a:solidFill>
             <a:schemeClr val="tx1"/>
           </a:solidFill>
@@ -2975,10 +2975,10 @@
       </p:grpSpPr>
       <p:grpSp>
         <p:nvGrpSpPr>
-          <p:cNvPr id="21" name="群組 20">
+          <p:cNvPr id="8" name="群組 7">
             <a:extLst>
               <a:ext uri="{FF2B5EF4-FFF2-40B4-BE49-F238E27FC236}">
-                <a16:creationId xmlns:a16="http://schemas.microsoft.com/office/drawing/2014/main" id="{F22CA748-B862-45A3-90F2-2C852619F1E8}"/>
+                <a16:creationId xmlns:a16="http://schemas.microsoft.com/office/drawing/2014/main" id="{106CD3D5-42DF-4C48-844E-2598857E5379}"/>
               </a:ext>
             </a:extLst>
           </p:cNvPr>
@@ -2987,71 +2987,12 @@
         </p:nvGrpSpPr>
         <p:grpSpPr>
           <a:xfrm>
-            <a:off x="156287" y="-344688"/>
-            <a:ext cx="15887864" cy="7636444"/>
-            <a:chOff x="-413229" y="-1605596"/>
-            <a:chExt cx="12815534" cy="6159739"/>
+            <a:off x="-28261" y="-128819"/>
+            <a:ext cx="9990016" cy="4832147"/>
+            <a:chOff x="-28261" y="1006009"/>
+            <a:chExt cx="9990016" cy="4832147"/>
           </a:xfrm>
         </p:grpSpPr>
-        <p:sp>
-          <p:nvSpPr>
-            <p:cNvPr id="59" name="矩形 58">
-              <a:extLst>
-                <a:ext uri="{FF2B5EF4-FFF2-40B4-BE49-F238E27FC236}">
-                  <a16:creationId xmlns:a16="http://schemas.microsoft.com/office/drawing/2014/main" id="{370EBDD2-9C03-4813-AA96-58D58F615769}"/>
-                </a:ext>
-              </a:extLst>
-            </p:cNvPr>
-            <p:cNvSpPr/>
-            <p:nvPr/>
-          </p:nvSpPr>
-          <p:spPr>
-            <a:xfrm>
-              <a:off x="-390526" y="-1314623"/>
-              <a:ext cx="12582525" cy="5868766"/>
-            </a:xfrm>
-            <a:prstGeom prst="rect">
-              <a:avLst/>
-            </a:prstGeom>
-            <a:solidFill>
-              <a:schemeClr val="bg1"/>
-            </a:solidFill>
-            <a:ln>
-              <a:solidFill>
-                <a:schemeClr val="bg1"/>
-              </a:solidFill>
-            </a:ln>
-          </p:spPr>
-          <p:style>
-            <a:lnRef idx="2">
-              <a:schemeClr val="accent1">
-                <a:shade val="50000"/>
-              </a:schemeClr>
-            </a:lnRef>
-            <a:fillRef idx="1">
-              <a:schemeClr val="accent1"/>
-            </a:fillRef>
-            <a:effectRef idx="0">
-              <a:schemeClr val="accent1"/>
-            </a:effectRef>
-            <a:fontRef idx="minor">
-              <a:schemeClr val="lt1"/>
-            </a:fontRef>
-          </p:style>
-          <p:txBody>
-            <a:bodyPr rot="0" spcFirstLastPara="0" vertOverflow="overflow" horzOverflow="overflow" vert="horz" wrap="square" lIns="113362" tIns="56681" rIns="113362" bIns="56681" numCol="1" spcCol="0" rtlCol="0" fromWordArt="0" anchor="ctr" anchorCtr="0" forceAA="0" compatLnSpc="1">
-              <a:prstTxWarp prst="textNoShape">
-                <a:avLst/>
-              </a:prstTxWarp>
-              <a:noAutofit/>
-            </a:bodyPr>
-            <a:lstStyle/>
-            <a:p>
-              <a:pPr algn="ctr"/>
-              <a:endParaRPr lang="zh-TW" altLang="en-US" sz="2231" dirty="0"/>
-            </a:p>
-          </p:txBody>
-        </p:sp>
         <p:pic>
           <p:nvPicPr>
             <p:cNvPr id="3" name="圖片 2">
@@ -3089,8 +3030,8 @@
           </p:blipFill>
           <p:spPr>
             <a:xfrm>
-              <a:off x="982870" y="-1605596"/>
-              <a:ext cx="10345530" cy="2030400"/>
+              <a:off x="1407883" y="1006009"/>
+              <a:ext cx="7842475" cy="1539154"/>
             </a:xfrm>
             <a:prstGeom prst="rect">
               <a:avLst/>
@@ -3134,8 +3075,8 @@
           </p:blipFill>
           <p:spPr>
             <a:xfrm>
-              <a:off x="982870" y="2064668"/>
-              <a:ext cx="10401944" cy="2032000"/>
+              <a:off x="1407883" y="3788269"/>
+              <a:ext cx="7885240" cy="1540367"/>
             </a:xfrm>
             <a:prstGeom prst="rect">
               <a:avLst/>
@@ -3156,14 +3097,14 @@
           </p:nvGrpSpPr>
           <p:grpSpPr>
             <a:xfrm>
-              <a:off x="10649234" y="4215589"/>
-              <a:ext cx="1753071" cy="321152"/>
-              <a:chOff x="10569984" y="6399554"/>
-              <a:chExt cx="1753071" cy="321152"/>
+              <a:off x="7897316" y="5494985"/>
+              <a:ext cx="1718308" cy="343171"/>
+              <a:chOff x="10557418" y="6399554"/>
+              <a:chExt cx="2266734" cy="452699"/>
             </a:xfrm>
           </p:grpSpPr>
-          <mc:AlternateContent xmlns:mc="http://schemas.openxmlformats.org/markup-compatibility/2006" xmlns:a14="http://schemas.microsoft.com/office/drawing/2010/main">
-            <mc:Choice Requires="a14">
+          <mc:AlternateContent xmlns:mc="http://schemas.openxmlformats.org/markup-compatibility/2006">
+            <mc:Choice xmlns:a14="http://schemas.microsoft.com/office/drawing/2010/main" Requires="a14">
               <p:sp>
                 <p:nvSpPr>
                   <p:cNvPr id="6" name="矩形 5">
@@ -3178,8 +3119,8 @@
                 </p:nvSpPr>
                 <p:spPr>
                   <a:xfrm>
-                    <a:off x="10995509" y="6399554"/>
-                    <a:ext cx="1327546" cy="321152"/>
+                    <a:off x="10995506" y="6399554"/>
+                    <a:ext cx="1828646" cy="452699"/>
                   </a:xfrm>
                   <a:prstGeom prst="rect">
                     <a:avLst/>
@@ -3201,14 +3142,14 @@
                           <m:sSubSup>
                             <m:sSubSupPr>
                               <m:ctrlPr>
-                                <a:rPr lang="en-US" altLang="zh-TW" sz="1984" i="1">
+                                <a:rPr lang="en-US" altLang="zh-TW" sz="1630" i="1">
                                   <a:latin typeface="Cambria Math" panose="02040503050406030204" pitchFamily="18" charset="0"/>
                                 </a:rPr>
                               </m:ctrlPr>
                             </m:sSubSupPr>
                             <m:e>
                               <m:r>
-                                <a:rPr lang="en-US" altLang="zh-TW" sz="1984" i="1">
+                                <a:rPr lang="en-US" altLang="zh-TW" sz="1630" i="1">
                                   <a:latin typeface="Cambria Math" panose="02040503050406030204" pitchFamily="18" charset="0"/>
                                 </a:rPr>
                                 <m:t>𝑊</m:t>
@@ -3216,7 +3157,7 @@
                             </m:e>
                             <m:sub>
                               <m:r>
-                                <a:rPr lang="en-US" altLang="zh-TW" sz="1984" i="1">
+                                <a:rPr lang="en-US" altLang="zh-TW" sz="1630" i="1">
                                   <a:latin typeface="Cambria Math" panose="02040503050406030204" pitchFamily="18" charset="0"/>
                                 </a:rPr>
                                 <m:t>0</m:t>
@@ -3224,7 +3165,7 @@
                             </m:sub>
                             <m:sup>
                               <m:r>
-                                <a:rPr lang="en-US" altLang="zh-TW" sz="1984" i="1">
+                                <a:rPr lang="en-US" altLang="zh-TW" sz="1630" i="1">
                                   <a:latin typeface="Cambria Math" panose="02040503050406030204" pitchFamily="18" charset="0"/>
                                 </a:rPr>
                                 <m:t> </m:t>
@@ -3232,13 +3173,13 @@
                             </m:sup>
                           </m:sSubSup>
                           <m:r>
-                            <a:rPr lang="en-US" altLang="zh-TW" sz="1984" i="1">
+                            <a:rPr lang="en-US" altLang="zh-TW" sz="1630" i="1">
                               <a:latin typeface="Cambria Math" panose="02040503050406030204" pitchFamily="18" charset="0"/>
                             </a:rPr>
                             <m:t>=1.5 </m:t>
                           </m:r>
                           <m:r>
-                            <a:rPr lang="en-US" altLang="zh-TW" sz="1984" i="1">
+                            <a:rPr lang="en-US" altLang="zh-TW" sz="1630" i="1">
                               <a:latin typeface="Cambria Math" panose="02040503050406030204" pitchFamily="18" charset="0"/>
                             </a:rPr>
                             <m:t>𝜇</m:t>
@@ -3247,7 +3188,7 @@
                             <m:rPr>
                               <m:sty m:val="p"/>
                             </m:rPr>
-                            <a:rPr lang="en-US" altLang="zh-TW" sz="1984">
+                            <a:rPr lang="en-US" altLang="zh-TW" sz="1630">
                               <a:latin typeface="Cambria Math" panose="02040503050406030204" pitchFamily="18" charset="0"/>
                             </a:rPr>
                             <m:t>m</m:t>
@@ -3255,7 +3196,7 @@
                         </m:oMath>
                       </m:oMathPara>
                     </a14:m>
-                    <a:endParaRPr lang="zh-TW" altLang="en-US" sz="1984" dirty="0">
+                    <a:endParaRPr lang="zh-TW" altLang="en-US" sz="1630" dirty="0">
                       <a:latin typeface="Times New Roman" panose="02020603050405020304" pitchFamily="18" charset="0"/>
                       <a:cs typeface="Times New Roman" panose="02020603050405020304" pitchFamily="18" charset="0"/>
                     </a:endParaRPr>
@@ -3263,7 +3204,7 @@
                 </p:txBody>
               </p:sp>
             </mc:Choice>
-            <mc:Fallback xmlns="">
+            <mc:Fallback>
               <p:sp>
                 <p:nvSpPr>
                   <p:cNvPr id="6" name="矩形 5">
@@ -3280,8 +3221,8 @@
                 </p:nvSpPr>
                 <p:spPr>
                   <a:xfrm>
-                    <a:off x="10995509" y="6399554"/>
-                    <a:ext cx="1327546" cy="321152"/>
+                    <a:off x="10995506" y="6399554"/>
+                    <a:ext cx="1828646" cy="452699"/>
                   </a:xfrm>
                   <a:prstGeom prst="rect">
                     <a:avLst/>
@@ -3289,7 +3230,7 @@
                   <a:blipFill>
                     <a:blip r:embed="rId4"/>
                     <a:stretch>
-                      <a:fillRect b="-7692"/>
+                      <a:fillRect b="-5263"/>
                     </a:stretch>
                   </a:blipFill>
                 </p:spPr>
@@ -3341,8 +3282,8 @@
             </p:blipFill>
             <p:spPr>
               <a:xfrm>
-                <a:off x="10569984" y="6506765"/>
-                <a:ext cx="476303" cy="136937"/>
+                <a:off x="10557418" y="6619851"/>
+                <a:ext cx="476304" cy="136937"/>
               </a:xfrm>
               <a:prstGeom prst="rect">
                 <a:avLst/>
@@ -3350,8 +3291,8 @@
             </p:spPr>
           </p:pic>
         </p:grpSp>
-        <mc:AlternateContent xmlns:mc="http://schemas.openxmlformats.org/markup-compatibility/2006" xmlns:a14="http://schemas.microsoft.com/office/drawing/2010/main">
-          <mc:Choice Requires="a14">
+        <mc:AlternateContent xmlns:mc="http://schemas.openxmlformats.org/markup-compatibility/2006">
+          <mc:Choice xmlns:a14="http://schemas.microsoft.com/office/drawing/2010/main" Requires="a14">
             <p:sp>
               <p:nvSpPr>
                 <p:cNvPr id="12" name="矩形 11">
@@ -3366,8 +3307,8 @@
               </p:nvSpPr>
               <p:spPr>
                 <a:xfrm>
-                  <a:off x="1439616" y="3804841"/>
-                  <a:ext cx="754848" cy="351822"/>
+                  <a:off x="1719631" y="5107415"/>
+                  <a:ext cx="733662" cy="343171"/>
                 </a:xfrm>
                 <a:prstGeom prst="rect">
                   <a:avLst/>
@@ -3387,7 +3328,7 @@
                       </m:oMathParaPr>
                       <m:oMath xmlns:m="http://schemas.openxmlformats.org/officeDocument/2006/math">
                         <m:r>
-                          <a:rPr lang="en-US" altLang="zh-TW" sz="2231" i="1">
+                          <a:rPr lang="en-US" altLang="zh-TW" sz="1630" i="1">
                             <a:latin typeface="Cambria Math" panose="02040503050406030204" pitchFamily="18" charset="0"/>
                           </a:rPr>
                           <m:t>ℓ=0</m:t>
@@ -3395,7 +3336,7 @@
                       </m:oMath>
                     </m:oMathPara>
                   </a14:m>
-                  <a:endParaRPr lang="zh-TW" altLang="en-US" sz="2231" dirty="0">
+                  <a:endParaRPr lang="zh-TW" altLang="en-US" sz="1630" dirty="0">
                     <a:latin typeface="Times New Roman" panose="02020603050405020304" pitchFamily="18" charset="0"/>
                     <a:cs typeface="Times New Roman" panose="02020603050405020304" pitchFamily="18" charset="0"/>
                   </a:endParaRPr>
@@ -3403,7 +3344,7 @@
               </p:txBody>
             </p:sp>
           </mc:Choice>
-          <mc:Fallback xmlns="">
+          <mc:Fallback>
             <p:sp>
               <p:nvSpPr>
                 <p:cNvPr id="12" name="矩形 11">
@@ -3420,8 +3361,8 @@
               </p:nvSpPr>
               <p:spPr>
                 <a:xfrm>
-                  <a:off x="1439616" y="3804841"/>
-                  <a:ext cx="754848" cy="351822"/>
+                  <a:off x="1719631" y="5107415"/>
+                  <a:ext cx="733662" cy="343171"/>
                 </a:xfrm>
                 <a:prstGeom prst="rect">
                   <a:avLst/>
@@ -3448,8 +3389,8 @@
             </p:sp>
           </mc:Fallback>
         </mc:AlternateContent>
-        <mc:AlternateContent xmlns:mc="http://schemas.openxmlformats.org/markup-compatibility/2006" xmlns:a14="http://schemas.microsoft.com/office/drawing/2010/main">
-          <mc:Choice Requires="a14">
+        <mc:AlternateContent xmlns:mc="http://schemas.openxmlformats.org/markup-compatibility/2006">
+          <mc:Choice xmlns:a14="http://schemas.microsoft.com/office/drawing/2010/main" Requires="a14">
             <p:sp>
               <p:nvSpPr>
                 <p:cNvPr id="13" name="矩形 12">
@@ -3464,8 +3405,8 @@
               </p:nvSpPr>
               <p:spPr>
                 <a:xfrm>
-                  <a:off x="3194517" y="3804841"/>
-                  <a:ext cx="754848" cy="351822"/>
+                  <a:off x="3049942" y="5107415"/>
+                  <a:ext cx="733662" cy="343171"/>
                 </a:xfrm>
                 <a:prstGeom prst="rect">
                   <a:avLst/>
@@ -3485,7 +3426,7 @@
                       </m:oMathParaPr>
                       <m:oMath xmlns:m="http://schemas.openxmlformats.org/officeDocument/2006/math">
                         <m:r>
-                          <a:rPr lang="en-US" altLang="zh-TW" sz="2231" i="1">
+                          <a:rPr lang="en-US" altLang="zh-TW" sz="1630" i="1">
                             <a:latin typeface="Cambria Math" panose="02040503050406030204" pitchFamily="18" charset="0"/>
                           </a:rPr>
                           <m:t>ℓ=1</m:t>
@@ -3493,7 +3434,7 @@
                       </m:oMath>
                     </m:oMathPara>
                   </a14:m>
-                  <a:endParaRPr lang="zh-TW" altLang="en-US" sz="2231" dirty="0">
+                  <a:endParaRPr lang="zh-TW" altLang="en-US" sz="1630" dirty="0">
                     <a:latin typeface="Times New Roman" panose="02020603050405020304" pitchFamily="18" charset="0"/>
                     <a:cs typeface="Times New Roman" panose="02020603050405020304" pitchFamily="18" charset="0"/>
                   </a:endParaRPr>
@@ -3501,7 +3442,7 @@
               </p:txBody>
             </p:sp>
           </mc:Choice>
-          <mc:Fallback xmlns="">
+          <mc:Fallback>
             <p:sp>
               <p:nvSpPr>
                 <p:cNvPr id="13" name="矩形 12">
@@ -3518,8 +3459,8 @@
               </p:nvSpPr>
               <p:spPr>
                 <a:xfrm>
-                  <a:off x="3194517" y="3804841"/>
-                  <a:ext cx="754848" cy="351822"/>
+                  <a:off x="3049942" y="5107415"/>
+                  <a:ext cx="733662" cy="343171"/>
                 </a:xfrm>
                 <a:prstGeom prst="rect">
                   <a:avLst/>
@@ -3546,8 +3487,8 @@
             </p:sp>
           </mc:Fallback>
         </mc:AlternateContent>
-        <mc:AlternateContent xmlns:mc="http://schemas.openxmlformats.org/markup-compatibility/2006" xmlns:a14="http://schemas.microsoft.com/office/drawing/2010/main">
-          <mc:Choice Requires="a14">
+        <mc:AlternateContent xmlns:mc="http://schemas.openxmlformats.org/markup-compatibility/2006">
+          <mc:Choice xmlns:a14="http://schemas.microsoft.com/office/drawing/2010/main" Requires="a14">
             <p:sp>
               <p:nvSpPr>
                 <p:cNvPr id="14" name="矩形 13">
@@ -3562,8 +3503,8 @@
               </p:nvSpPr>
               <p:spPr>
                 <a:xfrm>
-                  <a:off x="4949418" y="3804841"/>
-                  <a:ext cx="754848" cy="351822"/>
+                  <a:off x="4380253" y="5107415"/>
+                  <a:ext cx="733662" cy="343171"/>
                 </a:xfrm>
                 <a:prstGeom prst="rect">
                   <a:avLst/>
@@ -3583,7 +3524,7 @@
                       </m:oMathParaPr>
                       <m:oMath xmlns:m="http://schemas.openxmlformats.org/officeDocument/2006/math">
                         <m:r>
-                          <a:rPr lang="en-US" altLang="zh-TW" sz="2231" i="1">
+                          <a:rPr lang="en-US" altLang="zh-TW" sz="1630" i="1">
                             <a:latin typeface="Cambria Math" panose="02040503050406030204" pitchFamily="18" charset="0"/>
                           </a:rPr>
                           <m:t>ℓ=2</m:t>
@@ -3591,7 +3532,7 @@
                       </m:oMath>
                     </m:oMathPara>
                   </a14:m>
-                  <a:endParaRPr lang="zh-TW" altLang="en-US" sz="2231" dirty="0">
+                  <a:endParaRPr lang="zh-TW" altLang="en-US" sz="1630" dirty="0">
                     <a:latin typeface="Times New Roman" panose="02020603050405020304" pitchFamily="18" charset="0"/>
                     <a:cs typeface="Times New Roman" panose="02020603050405020304" pitchFamily="18" charset="0"/>
                   </a:endParaRPr>
@@ -3599,7 +3540,7 @@
               </p:txBody>
             </p:sp>
           </mc:Choice>
-          <mc:Fallback xmlns="">
+          <mc:Fallback>
             <p:sp>
               <p:nvSpPr>
                 <p:cNvPr id="14" name="矩形 13">
@@ -3616,8 +3557,8 @@
               </p:nvSpPr>
               <p:spPr>
                 <a:xfrm>
-                  <a:off x="4949418" y="3804841"/>
-                  <a:ext cx="754848" cy="351822"/>
+                  <a:off x="4380253" y="5107415"/>
+                  <a:ext cx="733662" cy="343171"/>
                 </a:xfrm>
                 <a:prstGeom prst="rect">
                   <a:avLst/>
@@ -3644,8 +3585,8 @@
             </p:sp>
           </mc:Fallback>
         </mc:AlternateContent>
-        <mc:AlternateContent xmlns:mc="http://schemas.openxmlformats.org/markup-compatibility/2006" xmlns:a14="http://schemas.microsoft.com/office/drawing/2010/main">
-          <mc:Choice Requires="a14">
+        <mc:AlternateContent xmlns:mc="http://schemas.openxmlformats.org/markup-compatibility/2006">
+          <mc:Choice xmlns:a14="http://schemas.microsoft.com/office/drawing/2010/main" Requires="a14">
             <p:sp>
               <p:nvSpPr>
                 <p:cNvPr id="15" name="矩形 14">
@@ -3660,8 +3601,8 @@
               </p:nvSpPr>
               <p:spPr>
                 <a:xfrm>
-                  <a:off x="6704319" y="3804841"/>
-                  <a:ext cx="754848" cy="351822"/>
+                  <a:off x="5710563" y="5107415"/>
+                  <a:ext cx="733662" cy="343171"/>
                 </a:xfrm>
                 <a:prstGeom prst="rect">
                   <a:avLst/>
@@ -3681,7 +3622,7 @@
                       </m:oMathParaPr>
                       <m:oMath xmlns:m="http://schemas.openxmlformats.org/officeDocument/2006/math">
                         <m:r>
-                          <a:rPr lang="en-US" altLang="zh-TW" sz="2231" i="1">
+                          <a:rPr lang="en-US" altLang="zh-TW" sz="1630" i="1">
                             <a:latin typeface="Cambria Math" panose="02040503050406030204" pitchFamily="18" charset="0"/>
                           </a:rPr>
                           <m:t>ℓ=3</m:t>
@@ -3689,7 +3630,7 @@
                       </m:oMath>
                     </m:oMathPara>
                   </a14:m>
-                  <a:endParaRPr lang="zh-TW" altLang="en-US" sz="2231" dirty="0">
+                  <a:endParaRPr lang="zh-TW" altLang="en-US" sz="1630" dirty="0">
                     <a:latin typeface="Times New Roman" panose="02020603050405020304" pitchFamily="18" charset="0"/>
                     <a:cs typeface="Times New Roman" panose="02020603050405020304" pitchFamily="18" charset="0"/>
                   </a:endParaRPr>
@@ -3697,7 +3638,7 @@
               </p:txBody>
             </p:sp>
           </mc:Choice>
-          <mc:Fallback xmlns="">
+          <mc:Fallback>
             <p:sp>
               <p:nvSpPr>
                 <p:cNvPr id="15" name="矩形 14">
@@ -3714,8 +3655,8 @@
               </p:nvSpPr>
               <p:spPr>
                 <a:xfrm>
-                  <a:off x="6704319" y="3804841"/>
-                  <a:ext cx="754848" cy="351822"/>
+                  <a:off x="5710563" y="5107415"/>
+                  <a:ext cx="733662" cy="343171"/>
                 </a:xfrm>
                 <a:prstGeom prst="rect">
                   <a:avLst/>
@@ -3742,8 +3683,8 @@
             </p:sp>
           </mc:Fallback>
         </mc:AlternateContent>
-        <mc:AlternateContent xmlns:mc="http://schemas.openxmlformats.org/markup-compatibility/2006" xmlns:a14="http://schemas.microsoft.com/office/drawing/2010/main">
-          <mc:Choice Requires="a14">
+        <mc:AlternateContent xmlns:mc="http://schemas.openxmlformats.org/markup-compatibility/2006">
+          <mc:Choice xmlns:a14="http://schemas.microsoft.com/office/drawing/2010/main" Requires="a14">
             <p:sp>
               <p:nvSpPr>
                 <p:cNvPr id="16" name="矩形 15">
@@ -3758,8 +3699,8 @@
               </p:nvSpPr>
               <p:spPr>
                 <a:xfrm>
-                  <a:off x="8459220" y="3804841"/>
-                  <a:ext cx="754848" cy="351822"/>
+                  <a:off x="7040874" y="5107415"/>
+                  <a:ext cx="733662" cy="343171"/>
                 </a:xfrm>
                 <a:prstGeom prst="rect">
                   <a:avLst/>
@@ -3779,7 +3720,7 @@
                       </m:oMathParaPr>
                       <m:oMath xmlns:m="http://schemas.openxmlformats.org/officeDocument/2006/math">
                         <m:r>
-                          <a:rPr lang="en-US" altLang="zh-TW" sz="2231" i="1">
+                          <a:rPr lang="en-US" altLang="zh-TW" sz="1630" i="1">
                             <a:latin typeface="Cambria Math" panose="02040503050406030204" pitchFamily="18" charset="0"/>
                           </a:rPr>
                           <m:t>ℓ=4</m:t>
@@ -3787,7 +3728,7 @@
                       </m:oMath>
                     </m:oMathPara>
                   </a14:m>
-                  <a:endParaRPr lang="zh-TW" altLang="en-US" sz="2231" dirty="0">
+                  <a:endParaRPr lang="zh-TW" altLang="en-US" sz="1630" dirty="0">
                     <a:latin typeface="Times New Roman" panose="02020603050405020304" pitchFamily="18" charset="0"/>
                     <a:cs typeface="Times New Roman" panose="02020603050405020304" pitchFamily="18" charset="0"/>
                   </a:endParaRPr>
@@ -3795,7 +3736,7 @@
               </p:txBody>
             </p:sp>
           </mc:Choice>
-          <mc:Fallback xmlns="">
+          <mc:Fallback>
             <p:sp>
               <p:nvSpPr>
                 <p:cNvPr id="16" name="矩形 15">
@@ -3812,8 +3753,8 @@
               </p:nvSpPr>
               <p:spPr>
                 <a:xfrm>
-                  <a:off x="8459220" y="3804841"/>
-                  <a:ext cx="754848" cy="351822"/>
+                  <a:off x="7040874" y="5107415"/>
+                  <a:ext cx="733662" cy="343171"/>
                 </a:xfrm>
                 <a:prstGeom prst="rect">
                   <a:avLst/>
@@ -3840,8 +3781,8 @@
             </p:sp>
           </mc:Fallback>
         </mc:AlternateContent>
-        <mc:AlternateContent xmlns:mc="http://schemas.openxmlformats.org/markup-compatibility/2006" xmlns:a14="http://schemas.microsoft.com/office/drawing/2010/main">
-          <mc:Choice Requires="a14">
+        <mc:AlternateContent xmlns:mc="http://schemas.openxmlformats.org/markup-compatibility/2006">
+          <mc:Choice xmlns:a14="http://schemas.microsoft.com/office/drawing/2010/main" Requires="a14">
             <p:sp>
               <p:nvSpPr>
                 <p:cNvPr id="17" name="矩形 16">
@@ -3856,8 +3797,8 @@
               </p:nvSpPr>
               <p:spPr>
                 <a:xfrm>
-                  <a:off x="10214122" y="3804841"/>
-                  <a:ext cx="754848" cy="351822"/>
+                  <a:off x="8309800" y="5107415"/>
+                  <a:ext cx="733662" cy="343171"/>
                 </a:xfrm>
                 <a:prstGeom prst="rect">
                   <a:avLst/>
@@ -3877,7 +3818,7 @@
                       </m:oMathParaPr>
                       <m:oMath xmlns:m="http://schemas.openxmlformats.org/officeDocument/2006/math">
                         <m:r>
-                          <a:rPr lang="en-US" altLang="zh-TW" sz="2231" i="1">
+                          <a:rPr lang="en-US" altLang="zh-TW" sz="1630" i="1">
                             <a:latin typeface="Cambria Math" panose="02040503050406030204" pitchFamily="18" charset="0"/>
                           </a:rPr>
                           <m:t>ℓ=5</m:t>
@@ -3885,7 +3826,7 @@
                       </m:oMath>
                     </m:oMathPara>
                   </a14:m>
-                  <a:endParaRPr lang="zh-TW" altLang="en-US" sz="2231" dirty="0">
+                  <a:endParaRPr lang="zh-TW" altLang="en-US" sz="1630" dirty="0">
                     <a:latin typeface="Times New Roman" panose="02020603050405020304" pitchFamily="18" charset="0"/>
                     <a:cs typeface="Times New Roman" panose="02020603050405020304" pitchFamily="18" charset="0"/>
                   </a:endParaRPr>
@@ -3893,7 +3834,7 @@
               </p:txBody>
             </p:sp>
           </mc:Choice>
-          <mc:Fallback xmlns="">
+          <mc:Fallback>
             <p:sp>
               <p:nvSpPr>
                 <p:cNvPr id="17" name="矩形 16">
@@ -3910,8 +3851,8 @@
               </p:nvSpPr>
               <p:spPr>
                 <a:xfrm>
-                  <a:off x="10214122" y="3804841"/>
-                  <a:ext cx="754848" cy="351822"/>
+                  <a:off x="8309800" y="5107415"/>
+                  <a:ext cx="733662" cy="343171"/>
                 </a:xfrm>
                 <a:prstGeom prst="rect">
                   <a:avLst/>
@@ -3938,8 +3879,8 @@
             </p:sp>
           </mc:Fallback>
         </mc:AlternateContent>
-        <mc:AlternateContent xmlns:mc="http://schemas.openxmlformats.org/markup-compatibility/2006" xmlns:a14="http://schemas.microsoft.com/office/drawing/2010/main">
-          <mc:Choice Requires="a14">
+        <mc:AlternateContent xmlns:mc="http://schemas.openxmlformats.org/markup-compatibility/2006">
+          <mc:Choice xmlns:a14="http://schemas.microsoft.com/office/drawing/2010/main" Requires="a14">
             <p:sp>
               <p:nvSpPr>
                 <p:cNvPr id="18" name="矩形 17">
@@ -3954,8 +3895,8 @@
               </p:nvSpPr>
               <p:spPr>
                 <a:xfrm>
-                  <a:off x="-205320" y="2912768"/>
-                  <a:ext cx="1041379" cy="387482"/>
+                  <a:off x="129345" y="4431175"/>
+                  <a:ext cx="1176412" cy="439736"/>
                 </a:xfrm>
                 <a:prstGeom prst="rect">
                   <a:avLst/>
@@ -3978,7 +3919,7 @@
                           <m:rPr>
                             <m:sty m:val="p"/>
                           </m:rPr>
-                          <a:rPr lang="en-US" altLang="zh-TW" sz="2231">
+                          <a:rPr lang="en-US" altLang="zh-TW" sz="2000">
                             <a:latin typeface="Cambria Math" panose="02040503050406030204" pitchFamily="18" charset="0"/>
                           </a:rPr>
                           <m:t>Re</m:t>
@@ -3988,7 +3929,7 @@
                             <m:begChr m:val="["/>
                             <m:endChr m:val="]"/>
                             <m:ctrlPr>
-                              <a:rPr lang="en-US" altLang="zh-TW" sz="2231" i="1">
+                              <a:rPr lang="en-US" altLang="zh-TW" sz="2000" i="1">
                                 <a:latin typeface="Cambria Math" panose="02040503050406030204" pitchFamily="18" charset="0"/>
                               </a:rPr>
                             </m:ctrlPr>
@@ -3997,14 +3938,14 @@
                             <m:sSup>
                               <m:sSupPr>
                                 <m:ctrlPr>
-                                  <a:rPr lang="en-US" altLang="zh-TW" sz="2231" i="1">
+                                  <a:rPr lang="en-US" altLang="zh-TW" sz="2000" i="1">
                                     <a:latin typeface="Cambria Math" panose="02040503050406030204" pitchFamily="18" charset="0"/>
                                   </a:rPr>
                                 </m:ctrlPr>
                               </m:sSupPr>
                               <m:e>
                                 <m:r>
-                                  <a:rPr lang="en-US" altLang="zh-TW" sz="2231" i="1">
+                                  <a:rPr lang="en-US" altLang="zh-TW" sz="2000" i="1">
                                     <a:latin typeface="Cambria Math" panose="02040503050406030204" pitchFamily="18" charset="0"/>
                                   </a:rPr>
                                   <m:t>𝑒</m:t>
@@ -4012,19 +3953,19 @@
                               </m:e>
                               <m:sup>
                                 <m:r>
-                                  <a:rPr lang="en-US" altLang="zh-TW" sz="2231" i="1">
+                                  <a:rPr lang="en-US" altLang="zh-TW" sz="2000" i="1">
                                     <a:latin typeface="Cambria Math" panose="02040503050406030204" pitchFamily="18" charset="0"/>
                                   </a:rPr>
                                   <m:t>𝑖</m:t>
                                 </m:r>
                                 <m:r>
-                                  <a:rPr lang="en-US" altLang="zh-TW" sz="2231" i="1">
+                                  <a:rPr lang="en-US" altLang="zh-TW" sz="2000" i="1">
                                     <a:latin typeface="Cambria Math" panose="02040503050406030204" pitchFamily="18" charset="0"/>
                                   </a:rPr>
                                   <m:t>ℓ</m:t>
                                 </m:r>
                                 <m:r>
-                                  <a:rPr lang="en-US" altLang="zh-TW" sz="2231" i="1">
+                                  <a:rPr lang="en-US" altLang="zh-TW" sz="2000" i="1">
                                     <a:latin typeface="Cambria Math" panose="02040503050406030204" pitchFamily="18" charset="0"/>
                                   </a:rPr>
                                   <m:t>𝜙</m:t>
@@ -4036,7 +3977,7 @@
                       </m:oMath>
                     </m:oMathPara>
                   </a14:m>
-                  <a:endParaRPr lang="zh-TW" altLang="en-US" sz="2231" dirty="0">
+                  <a:endParaRPr lang="zh-TW" altLang="en-US" sz="2000" dirty="0">
                     <a:latin typeface="Times New Roman" panose="02020603050405020304" pitchFamily="18" charset="0"/>
                     <a:cs typeface="Times New Roman" panose="02020603050405020304" pitchFamily="18" charset="0"/>
                   </a:endParaRPr>
@@ -4044,7 +3985,7 @@
               </p:txBody>
             </p:sp>
           </mc:Choice>
-          <mc:Fallback xmlns="">
+          <mc:Fallback>
             <p:sp>
               <p:nvSpPr>
                 <p:cNvPr id="18" name="矩形 17">
@@ -4061,8 +4002,8 @@
               </p:nvSpPr>
               <p:spPr>
                 <a:xfrm>
-                  <a:off x="-205320" y="2912768"/>
-                  <a:ext cx="1041379" cy="387482"/>
+                  <a:off x="129345" y="4431175"/>
+                  <a:ext cx="1176412" cy="439736"/>
                 </a:xfrm>
                 <a:prstGeom prst="rect">
                   <a:avLst/>
@@ -4071,226 +4012,6 @@
                   <a:blip r:embed="rId12"/>
                   <a:stretch>
                     <a:fillRect/>
-                  </a:stretch>
-                </a:blipFill>
-              </p:spPr>
-              <p:txBody>
-                <a:bodyPr/>
-                <a:lstStyle/>
-                <a:p>
-                  <a:r>
-                    <a:rPr lang="zh-TW" altLang="en-US">
-                      <a:noFill/>
-                    </a:rPr>
-                    <a:t> </a:t>
-                  </a:r>
-                </a:p>
-              </p:txBody>
-            </p:sp>
-          </mc:Fallback>
-        </mc:AlternateContent>
-        <mc:AlternateContent xmlns:mc="http://schemas.openxmlformats.org/markup-compatibility/2006" xmlns:a14="http://schemas.microsoft.com/office/drawing/2010/main">
-          <mc:Choice Requires="a14">
-            <p:sp>
-              <p:nvSpPr>
-                <p:cNvPr id="19" name="矩形 18">
-                  <a:extLst>
-                    <a:ext uri="{FF2B5EF4-FFF2-40B4-BE49-F238E27FC236}">
-                      <a16:creationId xmlns:a16="http://schemas.microsoft.com/office/drawing/2014/main" id="{4B47A37E-E9B4-4F85-896D-EDD826A6FF0A}"/>
-                    </a:ext>
-                  </a:extLst>
-                </p:cNvPr>
-                <p:cNvSpPr/>
-                <p:nvPr/>
-              </p:nvSpPr>
-              <p:spPr>
-                <a:xfrm>
-                  <a:off x="838474" y="3465503"/>
-                  <a:ext cx="344648" cy="351822"/>
-                </a:xfrm>
-                <a:prstGeom prst="rect">
-                  <a:avLst/>
-                </a:prstGeom>
-              </p:spPr>
-              <p:txBody>
-                <a:bodyPr wrap="none">
-                  <a:spAutoFit/>
-                </a:bodyPr>
-                <a:lstStyle/>
-                <a:p>
-                  <a:pPr/>
-                  <a14:m>
-                    <m:oMathPara xmlns:m="http://schemas.openxmlformats.org/officeDocument/2006/math">
-                      <m:oMathParaPr>
-                        <m:jc m:val="centerGroup"/>
-                      </m:oMathParaPr>
-                      <m:oMath xmlns:m="http://schemas.openxmlformats.org/officeDocument/2006/math">
-                        <m:acc>
-                          <m:accPr>
-                            <m:chr m:val="̂"/>
-                            <m:ctrlPr>
-                              <a:rPr lang="en-US" altLang="zh-TW" sz="2231" i="1">
-                                <a:latin typeface="Cambria Math" panose="02040503050406030204" pitchFamily="18" charset="0"/>
-                              </a:rPr>
-                            </m:ctrlPr>
-                          </m:accPr>
-                          <m:e>
-                            <m:r>
-                              <a:rPr lang="en-US" altLang="zh-TW" sz="2231" b="1" i="1">
-                                <a:latin typeface="Cambria Math" panose="02040503050406030204" pitchFamily="18" charset="0"/>
-                              </a:rPr>
-                              <m:t>𝒚</m:t>
-                            </m:r>
-                          </m:e>
-                        </m:acc>
-                      </m:oMath>
-                    </m:oMathPara>
-                  </a14:m>
-                  <a:endParaRPr lang="zh-TW" altLang="en-US" sz="2231" dirty="0">
-                    <a:latin typeface="Times New Roman" panose="02020603050405020304" pitchFamily="18" charset="0"/>
-                    <a:cs typeface="Times New Roman" panose="02020603050405020304" pitchFamily="18" charset="0"/>
-                  </a:endParaRPr>
-                </a:p>
-              </p:txBody>
-            </p:sp>
-          </mc:Choice>
-          <mc:Fallback xmlns="">
-            <p:sp>
-              <p:nvSpPr>
-                <p:cNvPr id="19" name="矩形 18">
-                  <a:extLst>
-                    <a:ext uri="{FF2B5EF4-FFF2-40B4-BE49-F238E27FC236}">
-                      <a16:creationId xmlns:a16="http://schemas.microsoft.com/office/drawing/2014/main" id="{4B47A37E-E9B4-4F85-896D-EDD826A6FF0A}"/>
-                    </a:ext>
-                  </a:extLst>
-                </p:cNvPr>
-                <p:cNvSpPr>
-                  <a:spLocks noRot="1" noChangeAspect="1" noMove="1" noResize="1" noEditPoints="1" noAdjustHandles="1" noChangeArrowheads="1" noChangeShapeType="1" noTextEdit="1"/>
-                </p:cNvSpPr>
-                <p:nvPr/>
-              </p:nvSpPr>
-              <p:spPr>
-                <a:xfrm>
-                  <a:off x="838474" y="3465503"/>
-                  <a:ext cx="344648" cy="351822"/>
-                </a:xfrm>
-                <a:prstGeom prst="rect">
-                  <a:avLst/>
-                </a:prstGeom>
-                <a:blipFill>
-                  <a:blip r:embed="rId13"/>
-                  <a:stretch>
-                    <a:fillRect t="-5634" r="-14286" b="-11268"/>
-                  </a:stretch>
-                </a:blipFill>
-              </p:spPr>
-              <p:txBody>
-                <a:bodyPr/>
-                <a:lstStyle/>
-                <a:p>
-                  <a:r>
-                    <a:rPr lang="zh-TW" altLang="en-US">
-                      <a:noFill/>
-                    </a:rPr>
-                    <a:t> </a:t>
-                  </a:r>
-                </a:p>
-              </p:txBody>
-            </p:sp>
-          </mc:Fallback>
-        </mc:AlternateContent>
-        <mc:AlternateContent xmlns:mc="http://schemas.openxmlformats.org/markup-compatibility/2006" xmlns:a14="http://schemas.microsoft.com/office/drawing/2010/main">
-          <mc:Choice Requires="a14">
-            <p:sp>
-              <p:nvSpPr>
-                <p:cNvPr id="20" name="矩形 19">
-                  <a:extLst>
-                    <a:ext uri="{FF2B5EF4-FFF2-40B4-BE49-F238E27FC236}">
-                      <a16:creationId xmlns:a16="http://schemas.microsoft.com/office/drawing/2014/main" id="{3EFB7547-172A-4CFD-954B-6E8F7078CE0E}"/>
-                    </a:ext>
-                  </a:extLst>
-                </p:cNvPr>
-                <p:cNvSpPr/>
-                <p:nvPr/>
-              </p:nvSpPr>
-              <p:spPr>
-                <a:xfrm>
-                  <a:off x="1076025" y="3737134"/>
-                  <a:ext cx="339450" cy="351822"/>
-                </a:xfrm>
-                <a:prstGeom prst="rect">
-                  <a:avLst/>
-                </a:prstGeom>
-              </p:spPr>
-              <p:txBody>
-                <a:bodyPr wrap="none">
-                  <a:spAutoFit/>
-                </a:bodyPr>
-                <a:lstStyle/>
-                <a:p>
-                  <a:pPr/>
-                  <a14:m>
-                    <m:oMathPara xmlns:m="http://schemas.openxmlformats.org/officeDocument/2006/math">
-                      <m:oMathParaPr>
-                        <m:jc m:val="centerGroup"/>
-                      </m:oMathParaPr>
-                      <m:oMath xmlns:m="http://schemas.openxmlformats.org/officeDocument/2006/math">
-                        <m:acc>
-                          <m:accPr>
-                            <m:chr m:val="̂"/>
-                            <m:ctrlPr>
-                              <a:rPr lang="en-US" altLang="zh-TW" sz="2231" i="1">
-                                <a:latin typeface="Cambria Math" panose="02040503050406030204" pitchFamily="18" charset="0"/>
-                              </a:rPr>
-                            </m:ctrlPr>
-                          </m:accPr>
-                          <m:e>
-                            <m:r>
-                              <a:rPr lang="en-US" altLang="zh-TW" sz="2231" b="1" i="1">
-                                <a:latin typeface="Cambria Math" panose="02040503050406030204" pitchFamily="18" charset="0"/>
-                              </a:rPr>
-                              <m:t>𝒙</m:t>
-                            </m:r>
-                          </m:e>
-                        </m:acc>
-                      </m:oMath>
-                    </m:oMathPara>
-                  </a14:m>
-                  <a:endParaRPr lang="zh-TW" altLang="en-US" sz="2231" dirty="0">
-                    <a:latin typeface="Times New Roman" panose="02020603050405020304" pitchFamily="18" charset="0"/>
-                    <a:cs typeface="Times New Roman" panose="02020603050405020304" pitchFamily="18" charset="0"/>
-                  </a:endParaRPr>
-                </a:p>
-              </p:txBody>
-            </p:sp>
-          </mc:Choice>
-          <mc:Fallback xmlns="">
-            <p:sp>
-              <p:nvSpPr>
-                <p:cNvPr id="20" name="矩形 19">
-                  <a:extLst>
-                    <a:ext uri="{FF2B5EF4-FFF2-40B4-BE49-F238E27FC236}">
-                      <a16:creationId xmlns:a16="http://schemas.microsoft.com/office/drawing/2014/main" id="{3EFB7547-172A-4CFD-954B-6E8F7078CE0E}"/>
-                    </a:ext>
-                  </a:extLst>
-                </p:cNvPr>
-                <p:cNvSpPr>
-                  <a:spLocks noRot="1" noChangeAspect="1" noMove="1" noResize="1" noEditPoints="1" noAdjustHandles="1" noChangeArrowheads="1" noChangeShapeType="1" noTextEdit="1"/>
-                </p:cNvSpPr>
-                <p:nvPr/>
-              </p:nvSpPr>
-              <p:spPr>
-                <a:xfrm>
-                  <a:off x="1076025" y="3737134"/>
-                  <a:ext cx="339450" cy="351822"/>
-                </a:xfrm>
-                <a:prstGeom prst="rect">
-                  <a:avLst/>
-                </a:prstGeom>
-                <a:blipFill>
-                  <a:blip r:embed="rId14"/>
-                  <a:stretch>
-                    <a:fillRect t="-5634" r="-14493"/>
                   </a:stretch>
                 </a:blipFill>
               </p:spPr>
@@ -4324,7 +4045,7 @@
             <p:nvPr/>
           </p:nvPicPr>
           <p:blipFill rotWithShape="1">
-            <a:blip r:embed="rId15">
+            <a:blip r:embed="rId13">
               <a:clrChange>
                 <a:clrFrom>
                   <a:srgbClr val="FFFFFF"/>
@@ -4346,16 +4067,16 @@
           </p:blipFill>
           <p:spPr>
             <a:xfrm>
-              <a:off x="982870" y="138508"/>
-              <a:ext cx="10370930" cy="2032000"/>
+              <a:off x="1407883" y="2328135"/>
+              <a:ext cx="7861730" cy="1540367"/>
             </a:xfrm>
             <a:prstGeom prst="rect">
               <a:avLst/>
             </a:prstGeom>
           </p:spPr>
         </p:pic>
-        <mc:AlternateContent xmlns:mc="http://schemas.openxmlformats.org/markup-compatibility/2006" xmlns:a14="http://schemas.microsoft.com/office/drawing/2010/main">
-          <mc:Choice Requires="a14">
+        <mc:AlternateContent xmlns:mc="http://schemas.openxmlformats.org/markup-compatibility/2006">
+          <mc:Choice xmlns:a14="http://schemas.microsoft.com/office/drawing/2010/main" Requires="a14">
             <p:sp>
               <p:nvSpPr>
                 <p:cNvPr id="41" name="矩形 40">
@@ -4370,8 +4091,8 @@
               </p:nvSpPr>
               <p:spPr>
                 <a:xfrm>
-                  <a:off x="-413229" y="-792588"/>
-                  <a:ext cx="1455165" cy="447678"/>
+                  <a:off x="-28261" y="1533413"/>
+                  <a:ext cx="1639295" cy="506677"/>
                 </a:xfrm>
                 <a:prstGeom prst="rect">
                   <a:avLst/>
@@ -4393,7 +4114,7 @@
                         <m:sSup>
                           <m:sSupPr>
                             <m:ctrlPr>
-                              <a:rPr lang="en-US" altLang="zh-TW" sz="2231" i="1">
+                              <a:rPr lang="en-US" altLang="zh-TW" sz="2000" i="1">
                                 <a:latin typeface="Cambria Math" panose="02040503050406030204" pitchFamily="18" charset="0"/>
                               </a:rPr>
                             </m:ctrlPr>
@@ -4404,7 +4125,7 @@
                                 <m:begChr m:val="|"/>
                                 <m:endChr m:val="|"/>
                                 <m:ctrlPr>
-                                  <a:rPr lang="en-US" altLang="zh-TW" sz="2231" i="1">
+                                  <a:rPr lang="en-US" altLang="zh-TW" sz="2000" i="1">
                                     <a:latin typeface="Cambria Math" panose="02040503050406030204" pitchFamily="18" charset="0"/>
                                   </a:rPr>
                                 </m:ctrlPr>
@@ -4413,14 +4134,14 @@
                                 <m:sSub>
                                   <m:sSubPr>
                                     <m:ctrlPr>
-                                      <a:rPr lang="en-US" altLang="zh-TW" sz="2231" i="1">
+                                      <a:rPr lang="en-US" altLang="zh-TW" sz="2000" i="1">
                                         <a:latin typeface="Cambria Math" panose="02040503050406030204" pitchFamily="18" charset="0"/>
                                       </a:rPr>
                                     </m:ctrlPr>
                                   </m:sSubPr>
                                   <m:e>
                                     <m:r>
-                                      <a:rPr lang="en-US" altLang="zh-TW" sz="2231" i="1">
+                                      <a:rPr lang="en-US" altLang="zh-TW" sz="2000" i="1">
                                         <a:latin typeface="Cambria Math" panose="02040503050406030204" pitchFamily="18" charset="0"/>
                                       </a:rPr>
                                       <m:t>𝑢</m:t>
@@ -4428,13 +4149,13 @@
                                   </m:e>
                                   <m:sub>
                                     <m:r>
-                                      <a:rPr lang="en-US" altLang="zh-TW" sz="2231" i="1">
+                                      <a:rPr lang="en-US" altLang="zh-TW" sz="2000" i="1">
                                         <a:latin typeface="Cambria Math" panose="02040503050406030204" pitchFamily="18" charset="0"/>
                                       </a:rPr>
                                       <m:t>ℓ=0,</m:t>
                                     </m:r>
                                     <m:r>
-                                      <a:rPr lang="en-US" altLang="zh-TW" sz="2231" i="1">
+                                      <a:rPr lang="en-US" altLang="zh-TW" sz="2000" i="1">
                                         <a:latin typeface="Cambria Math" panose="02040503050406030204" pitchFamily="18" charset="0"/>
                                       </a:rPr>
                                       <m:t>𝑝</m:t>
@@ -4444,7 +4165,7 @@
                                 <m:d>
                                   <m:dPr>
                                     <m:ctrlPr>
-                                      <a:rPr lang="en-US" altLang="zh-TW" sz="2231" i="1">
+                                      <a:rPr lang="en-US" altLang="zh-TW" sz="2000" i="1">
                                         <a:latin typeface="Cambria Math" panose="02040503050406030204" pitchFamily="18" charset="0"/>
                                       </a:rPr>
                                     </m:ctrlPr>
@@ -4453,14 +4174,14 @@
                                     <m:sSub>
                                       <m:sSubPr>
                                         <m:ctrlPr>
-                                          <a:rPr lang="en-US" altLang="zh-TW" sz="2231" b="1" i="1">
+                                          <a:rPr lang="en-US" altLang="zh-TW" sz="2000" b="1" i="1">
                                             <a:latin typeface="Cambria Math" panose="02040503050406030204" pitchFamily="18" charset="0"/>
                                           </a:rPr>
                                         </m:ctrlPr>
                                       </m:sSubPr>
                                       <m:e>
                                         <m:r>
-                                          <a:rPr lang="en-US" altLang="zh-TW" sz="2231" b="1" i="1">
+                                          <a:rPr lang="en-US" altLang="zh-TW" sz="2000" b="1" i="1">
                                             <a:latin typeface="Cambria Math" panose="02040503050406030204" pitchFamily="18" charset="0"/>
                                           </a:rPr>
                                           <m:t>𝒓</m:t>
@@ -4468,7 +4189,7 @@
                                       </m:e>
                                       <m:sub>
                                         <m:r>
-                                          <a:rPr lang="en-US" altLang="zh-TW" sz="2231" i="1">
+                                          <a:rPr lang="en-US" altLang="zh-TW" sz="2000" i="1">
                                             <a:latin typeface="Cambria Math" panose="02040503050406030204" pitchFamily="18" charset="0"/>
                                           </a:rPr>
                                           <m:t>∥</m:t>
@@ -4482,7 +4203,7 @@
                           </m:e>
                           <m:sup>
                             <m:r>
-                              <a:rPr lang="en-US" altLang="zh-TW" sz="2231" i="1">
+                              <a:rPr lang="en-US" altLang="zh-TW" sz="2000" i="1">
                                 <a:latin typeface="Cambria Math" panose="02040503050406030204" pitchFamily="18" charset="0"/>
                               </a:rPr>
                               <m:t>2</m:t>
@@ -4492,7 +4213,7 @@
                       </m:oMath>
                     </m:oMathPara>
                   </a14:m>
-                  <a:endParaRPr lang="zh-TW" altLang="en-US" sz="2231" dirty="0">
+                  <a:endParaRPr lang="zh-TW" altLang="en-US" sz="2000" dirty="0">
                     <a:latin typeface="Times New Roman" panose="02020603050405020304" pitchFamily="18" charset="0"/>
                     <a:cs typeface="Times New Roman" panose="02020603050405020304" pitchFamily="18" charset="0"/>
                   </a:endParaRPr>
@@ -4500,7 +4221,7 @@
               </p:txBody>
             </p:sp>
           </mc:Choice>
-          <mc:Fallback xmlns="">
+          <mc:Fallback>
             <p:sp>
               <p:nvSpPr>
                 <p:cNvPr id="41" name="矩形 40">
@@ -4517,8 +4238,213 @@
               </p:nvSpPr>
               <p:spPr>
                 <a:xfrm>
-                  <a:off x="-413229" y="-792588"/>
-                  <a:ext cx="1455165" cy="447678"/>
+                  <a:off x="-28261" y="1533413"/>
+                  <a:ext cx="1639295" cy="506677"/>
+                </a:xfrm>
+                <a:prstGeom prst="rect">
+                  <a:avLst/>
+                </a:prstGeom>
+                <a:blipFill>
+                  <a:blip r:embed="rId14"/>
+                  <a:stretch>
+                    <a:fillRect/>
+                  </a:stretch>
+                </a:blipFill>
+              </p:spPr>
+              <p:txBody>
+                <a:bodyPr/>
+                <a:lstStyle/>
+                <a:p>
+                  <a:r>
+                    <a:rPr lang="zh-TW" altLang="en-US">
+                      <a:noFill/>
+                    </a:rPr>
+                    <a:t> </a:t>
+                  </a:r>
+                </a:p>
+              </p:txBody>
+            </p:sp>
+          </mc:Fallback>
+        </mc:AlternateContent>
+        <mc:AlternateContent xmlns:mc="http://schemas.openxmlformats.org/markup-compatibility/2006">
+          <mc:Choice xmlns:a14="http://schemas.microsoft.com/office/drawing/2010/main" Requires="a14">
+            <p:sp>
+              <p:nvSpPr>
+                <p:cNvPr id="46" name="矩形 45">
+                  <a:extLst>
+                    <a:ext uri="{FF2B5EF4-FFF2-40B4-BE49-F238E27FC236}">
+                      <a16:creationId xmlns:a16="http://schemas.microsoft.com/office/drawing/2014/main" id="{2FA73A82-49CB-46EF-B11B-AD4B8F5BF91E}"/>
+                    </a:ext>
+                  </a:extLst>
+                </p:cNvPr>
+                <p:cNvSpPr/>
+                <p:nvPr/>
+              </p:nvSpPr>
+              <p:spPr>
+                <a:xfrm>
+                  <a:off x="1675761" y="3304789"/>
+                  <a:ext cx="688008" cy="343171"/>
+                </a:xfrm>
+                <a:prstGeom prst="rect">
+                  <a:avLst/>
+                </a:prstGeom>
+              </p:spPr>
+              <p:txBody>
+                <a:bodyPr wrap="none">
+                  <a:spAutoFit/>
+                </a:bodyPr>
+                <a:lstStyle/>
+                <a:p>
+                  <a:pPr/>
+                  <a14:m>
+                    <m:oMathPara xmlns:m="http://schemas.openxmlformats.org/officeDocument/2006/math">
+                      <m:oMathParaPr>
+                        <m:jc m:val="centerGroup"/>
+                      </m:oMathParaPr>
+                      <m:oMath xmlns:m="http://schemas.openxmlformats.org/officeDocument/2006/math">
+                        <m:r>
+                          <a:rPr lang="en-US" altLang="zh-TW" sz="1630" i="1">
+                            <a:latin typeface="Cambria Math" panose="02040503050406030204" pitchFamily="18" charset="0"/>
+                          </a:rPr>
+                          <m:t>1 </m:t>
+                        </m:r>
+                        <m:r>
+                          <m:rPr>
+                            <m:sty m:val="p"/>
+                          </m:rPr>
+                          <a:rPr lang="en-US" altLang="zh-TW" sz="1630">
+                            <a:latin typeface="Cambria Math" panose="02040503050406030204" pitchFamily="18" charset="0"/>
+                          </a:rPr>
+                          <m:t>um</m:t>
+                        </m:r>
+                      </m:oMath>
+                    </m:oMathPara>
+                  </a14:m>
+                  <a:endParaRPr lang="zh-TW" altLang="en-US" sz="1630" dirty="0">
+                    <a:latin typeface="Times New Roman" panose="02020603050405020304" pitchFamily="18" charset="0"/>
+                    <a:cs typeface="Times New Roman" panose="02020603050405020304" pitchFamily="18" charset="0"/>
+                  </a:endParaRPr>
+                </a:p>
+              </p:txBody>
+            </p:sp>
+          </mc:Choice>
+          <mc:Fallback>
+            <p:sp>
+              <p:nvSpPr>
+                <p:cNvPr id="46" name="矩形 45">
+                  <a:extLst>
+                    <a:ext uri="{FF2B5EF4-FFF2-40B4-BE49-F238E27FC236}">
+                      <a16:creationId xmlns:a16="http://schemas.microsoft.com/office/drawing/2014/main" id="{2FA73A82-49CB-46EF-B11B-AD4B8F5BF91E}"/>
+                    </a:ext>
+                  </a:extLst>
+                </p:cNvPr>
+                <p:cNvSpPr>
+                  <a:spLocks noRot="1" noChangeAspect="1" noMove="1" noResize="1" noEditPoints="1" noAdjustHandles="1" noChangeArrowheads="1" noChangeShapeType="1" noTextEdit="1"/>
+                </p:cNvSpPr>
+                <p:nvPr/>
+              </p:nvSpPr>
+              <p:spPr>
+                <a:xfrm>
+                  <a:off x="1675761" y="3304789"/>
+                  <a:ext cx="688008" cy="343171"/>
+                </a:xfrm>
+                <a:prstGeom prst="rect">
+                  <a:avLst/>
+                </a:prstGeom>
+                <a:blipFill>
+                  <a:blip r:embed="rId15"/>
+                  <a:stretch>
+                    <a:fillRect/>
+                  </a:stretch>
+                </a:blipFill>
+              </p:spPr>
+              <p:txBody>
+                <a:bodyPr/>
+                <a:lstStyle/>
+                <a:p>
+                  <a:r>
+                    <a:rPr lang="zh-TW" altLang="en-US">
+                      <a:noFill/>
+                    </a:rPr>
+                    <a:t> </a:t>
+                  </a:r>
+                </a:p>
+              </p:txBody>
+            </p:sp>
+          </mc:Fallback>
+        </mc:AlternateContent>
+        <mc:AlternateContent xmlns:mc="http://schemas.openxmlformats.org/markup-compatibility/2006">
+          <mc:Choice xmlns:a14="http://schemas.microsoft.com/office/drawing/2010/main" Requires="a14">
+            <p:sp>
+              <p:nvSpPr>
+                <p:cNvPr id="52" name="矩形 51">
+                  <a:extLst>
+                    <a:ext uri="{FF2B5EF4-FFF2-40B4-BE49-F238E27FC236}">
+                      <a16:creationId xmlns:a16="http://schemas.microsoft.com/office/drawing/2014/main" id="{72145011-9C19-434C-B9F6-F3B5B50A4A17}"/>
+                    </a:ext>
+                  </a:extLst>
+                </p:cNvPr>
+                <p:cNvSpPr/>
+                <p:nvPr/>
+              </p:nvSpPr>
+              <p:spPr>
+                <a:xfrm>
+                  <a:off x="1719631" y="3608665"/>
+                  <a:ext cx="733662" cy="343171"/>
+                </a:xfrm>
+                <a:prstGeom prst="rect">
+                  <a:avLst/>
+                </a:prstGeom>
+              </p:spPr>
+              <p:txBody>
+                <a:bodyPr wrap="none">
+                  <a:spAutoFit/>
+                </a:bodyPr>
+                <a:lstStyle/>
+                <a:p>
+                  <a:pPr/>
+                  <a14:m>
+                    <m:oMathPara xmlns:m="http://schemas.openxmlformats.org/officeDocument/2006/math">
+                      <m:oMathParaPr>
+                        <m:jc m:val="centerGroup"/>
+                      </m:oMathParaPr>
+                      <m:oMath xmlns:m="http://schemas.openxmlformats.org/officeDocument/2006/math">
+                        <m:r>
+                          <a:rPr lang="en-US" altLang="zh-TW" sz="1630" i="1">
+                            <a:latin typeface="Cambria Math" panose="02040503050406030204" pitchFamily="18" charset="0"/>
+                          </a:rPr>
+                          <m:t>ℓ=0</m:t>
+                        </m:r>
+                      </m:oMath>
+                    </m:oMathPara>
+                  </a14:m>
+                  <a:endParaRPr lang="zh-TW" altLang="en-US" sz="1630" dirty="0">
+                    <a:latin typeface="Times New Roman" panose="02020603050405020304" pitchFamily="18" charset="0"/>
+                    <a:cs typeface="Times New Roman" panose="02020603050405020304" pitchFamily="18" charset="0"/>
+                  </a:endParaRPr>
+                </a:p>
+              </p:txBody>
+            </p:sp>
+          </mc:Choice>
+          <mc:Fallback>
+            <p:sp>
+              <p:nvSpPr>
+                <p:cNvPr id="52" name="矩形 51">
+                  <a:extLst>
+                    <a:ext uri="{FF2B5EF4-FFF2-40B4-BE49-F238E27FC236}">
+                      <a16:creationId xmlns:a16="http://schemas.microsoft.com/office/drawing/2014/main" id="{72145011-9C19-434C-B9F6-F3B5B50A4A17}"/>
+                    </a:ext>
+                  </a:extLst>
+                </p:cNvPr>
+                <p:cNvSpPr>
+                  <a:spLocks noRot="1" noChangeAspect="1" noMove="1" noResize="1" noEditPoints="1" noAdjustHandles="1" noChangeArrowheads="1" noChangeShapeType="1" noTextEdit="1"/>
+                </p:cNvSpPr>
+                <p:nvPr/>
+              </p:nvSpPr>
+              <p:spPr>
+                <a:xfrm>
+                  <a:off x="1719631" y="3608665"/>
+                  <a:ext cx="733662" cy="343171"/>
                 </a:xfrm>
                 <a:prstGeom prst="rect">
                   <a:avLst/>
@@ -4545,296 +4471,14 @@
             </p:sp>
           </mc:Fallback>
         </mc:AlternateContent>
-        <p:grpSp>
-          <p:nvGrpSpPr>
-            <p:cNvPr id="45" name="群組 44">
-              <a:extLst>
-                <a:ext uri="{FF2B5EF4-FFF2-40B4-BE49-F238E27FC236}">
-                  <a16:creationId xmlns:a16="http://schemas.microsoft.com/office/drawing/2014/main" id="{2E07EDB2-5056-4EBC-82F5-BE7BDA80DA0C}"/>
-                </a:ext>
-              </a:extLst>
-            </p:cNvPr>
-            <p:cNvGrpSpPr/>
-            <p:nvPr/>
-          </p:nvGrpSpPr>
-          <p:grpSpPr>
-            <a:xfrm>
-              <a:off x="1336246" y="947057"/>
-              <a:ext cx="1160329" cy="891211"/>
-              <a:chOff x="1462169" y="5610979"/>
-              <a:chExt cx="1160329" cy="891211"/>
-            </a:xfrm>
-          </p:grpSpPr>
-          <mc:AlternateContent xmlns:mc="http://schemas.openxmlformats.org/markup-compatibility/2006" xmlns:a14="http://schemas.microsoft.com/office/drawing/2010/main">
-            <mc:Choice Requires="a14">
-              <p:sp>
-                <p:nvSpPr>
-                  <p:cNvPr id="46" name="矩形 45">
-                    <a:extLst>
-                      <a:ext uri="{FF2B5EF4-FFF2-40B4-BE49-F238E27FC236}">
-                        <a16:creationId xmlns:a16="http://schemas.microsoft.com/office/drawing/2014/main" id="{2FA73A82-49CB-46EF-B11B-AD4B8F5BF91E}"/>
-                      </a:ext>
-                    </a:extLst>
-                  </p:cNvPr>
-                  <p:cNvSpPr/>
-                  <p:nvPr/>
-                </p:nvSpPr>
-                <p:spPr>
-                  <a:xfrm>
-                    <a:off x="1462169" y="6150368"/>
-                    <a:ext cx="704632" cy="351822"/>
-                  </a:xfrm>
-                  <a:prstGeom prst="rect">
-                    <a:avLst/>
-                  </a:prstGeom>
-                </p:spPr>
-                <p:txBody>
-                  <a:bodyPr wrap="none">
-                    <a:spAutoFit/>
-                  </a:bodyPr>
-                  <a:lstStyle/>
-                  <a:p>
-                    <a:pPr/>
-                    <a14:m>
-                      <m:oMathPara xmlns:m="http://schemas.openxmlformats.org/officeDocument/2006/math">
-                        <m:oMathParaPr>
-                          <m:jc m:val="centerGroup"/>
-                        </m:oMathParaPr>
-                        <m:oMath xmlns:m="http://schemas.openxmlformats.org/officeDocument/2006/math">
-                          <m:r>
-                            <a:rPr lang="en-US" altLang="zh-TW" sz="2231" i="1">
-                              <a:latin typeface="Cambria Math" panose="02040503050406030204" pitchFamily="18" charset="0"/>
-                            </a:rPr>
-                            <m:t>1 </m:t>
-                          </m:r>
-                          <m:r>
-                            <m:rPr>
-                              <m:sty m:val="p"/>
-                            </m:rPr>
-                            <a:rPr lang="en-US" altLang="zh-TW" sz="2231">
-                              <a:latin typeface="Cambria Math" panose="02040503050406030204" pitchFamily="18" charset="0"/>
-                            </a:rPr>
-                            <m:t>um</m:t>
-                          </m:r>
-                        </m:oMath>
-                      </m:oMathPara>
-                    </a14:m>
-                    <a:endParaRPr lang="zh-TW" altLang="en-US" sz="2231" dirty="0">
-                      <a:latin typeface="Times New Roman" panose="02020603050405020304" pitchFamily="18" charset="0"/>
-                      <a:cs typeface="Times New Roman" panose="02020603050405020304" pitchFamily="18" charset="0"/>
-                    </a:endParaRPr>
-                  </a:p>
-                </p:txBody>
-              </p:sp>
-            </mc:Choice>
-            <mc:Fallback xmlns="">
-              <p:sp>
-                <p:nvSpPr>
-                  <p:cNvPr id="46" name="矩形 45">
-                    <a:extLst>
-                      <a:ext uri="{FF2B5EF4-FFF2-40B4-BE49-F238E27FC236}">
-                        <a16:creationId xmlns:a16="http://schemas.microsoft.com/office/drawing/2014/main" id="{2FA73A82-49CB-46EF-B11B-AD4B8F5BF91E}"/>
-                      </a:ext>
-                    </a:extLst>
-                  </p:cNvPr>
-                  <p:cNvSpPr>
-                    <a:spLocks noRot="1" noChangeAspect="1" noMove="1" noResize="1" noEditPoints="1" noAdjustHandles="1" noChangeArrowheads="1" noChangeShapeType="1" noTextEdit="1"/>
-                  </p:cNvSpPr>
-                  <p:nvPr/>
-                </p:nvSpPr>
-                <p:spPr>
-                  <a:xfrm>
-                    <a:off x="1462169" y="6150368"/>
-                    <a:ext cx="704632" cy="351822"/>
-                  </a:xfrm>
-                  <a:prstGeom prst="rect">
-                    <a:avLst/>
-                  </a:prstGeom>
-                  <a:blipFill>
-                    <a:blip r:embed="rId17"/>
-                    <a:stretch>
-                      <a:fillRect/>
-                    </a:stretch>
-                  </a:blipFill>
-                </p:spPr>
-                <p:txBody>
-                  <a:bodyPr/>
-                  <a:lstStyle/>
-                  <a:p>
-                    <a:r>
-                      <a:rPr lang="zh-TW" altLang="en-US">
-                        <a:noFill/>
-                      </a:rPr>
-                      <a:t> </a:t>
-                    </a:r>
-                  </a:p>
-                </p:txBody>
-              </p:sp>
-            </mc:Fallback>
-          </mc:AlternateContent>
-          <p:sp>
-            <p:nvSpPr>
-              <p:cNvPr id="47" name="矩形 46">
-                <a:extLst>
-                  <a:ext uri="{FF2B5EF4-FFF2-40B4-BE49-F238E27FC236}">
-                    <a16:creationId xmlns:a16="http://schemas.microsoft.com/office/drawing/2014/main" id="{6947CC5F-1B4B-41A6-B5BD-9966D208BF90}"/>
-                  </a:ext>
-                </a:extLst>
-              </p:cNvPr>
-              <p:cNvSpPr/>
-              <p:nvPr/>
-            </p:nvSpPr>
-            <p:spPr>
-              <a:xfrm>
-                <a:off x="1812604" y="5610979"/>
-                <a:ext cx="553100" cy="351822"/>
-              </a:xfrm>
-              <a:prstGeom prst="rect">
-                <a:avLst/>
-              </a:prstGeom>
-            </p:spPr>
-            <p:txBody>
-              <a:bodyPr wrap="none">
-                <a:spAutoFit/>
-              </a:bodyPr>
-              <a:lstStyle/>
-              <a:p>
-                <a:pPr marL="425098" indent="-425098">
-                  <a:buFont typeface="Arial" panose="020B0604020202020204" pitchFamily="34" charset="0"/>
-                  <a:buChar char="•"/>
-                </a:pPr>
-                <a:r>
-                  <a:rPr lang="en-US" altLang="zh-TW" sz="2231" dirty="0">
-                    <a:latin typeface="Times New Roman" panose="02020603050405020304" pitchFamily="18" charset="0"/>
-                    <a:cs typeface="Times New Roman" panose="02020603050405020304" pitchFamily="18" charset="0"/>
-                  </a:rPr>
-                  <a:t> </a:t>
-                </a:r>
-                <a:endParaRPr lang="zh-TW" altLang="en-US" sz="2231" dirty="0">
-                  <a:latin typeface="Times New Roman" panose="02020603050405020304" pitchFamily="18" charset="0"/>
-                  <a:cs typeface="Times New Roman" panose="02020603050405020304" pitchFamily="18" charset="0"/>
-                </a:endParaRPr>
-              </a:p>
-            </p:txBody>
-          </p:sp>
-          <mc:AlternateContent xmlns:mc="http://schemas.openxmlformats.org/markup-compatibility/2006" xmlns:a14="http://schemas.microsoft.com/office/drawing/2010/main">
-            <mc:Choice Requires="a14">
-              <p:sp>
-                <p:nvSpPr>
-                  <p:cNvPr id="48" name="矩形 47">
-                    <a:extLst>
-                      <a:ext uri="{FF2B5EF4-FFF2-40B4-BE49-F238E27FC236}">
-                        <a16:creationId xmlns:a16="http://schemas.microsoft.com/office/drawing/2014/main" id="{7EE1129B-C1E9-4939-8E4A-022A742D1E06}"/>
-                      </a:ext>
-                    </a:extLst>
-                  </p:cNvPr>
-                  <p:cNvSpPr/>
-                  <p:nvPr/>
-                </p:nvSpPr>
-                <p:spPr>
-                  <a:xfrm>
-                    <a:off x="1884026" y="5705594"/>
-                    <a:ext cx="738472" cy="351822"/>
-                  </a:xfrm>
-                  <a:prstGeom prst="rect">
-                    <a:avLst/>
-                  </a:prstGeom>
-                </p:spPr>
-                <p:txBody>
-                  <a:bodyPr wrap="none">
-                    <a:spAutoFit/>
-                  </a:bodyPr>
-                  <a:lstStyle/>
-                  <a:p>
-                    <a:pPr/>
-                    <a14:m>
-                      <m:oMathPara xmlns:m="http://schemas.openxmlformats.org/officeDocument/2006/math">
-                        <m:oMathParaPr>
-                          <m:jc m:val="centerGroup"/>
-                        </m:oMathParaPr>
-                        <m:oMath xmlns:m="http://schemas.openxmlformats.org/officeDocument/2006/math">
-                          <m:d>
-                            <m:dPr>
-                              <m:ctrlPr>
-                                <a:rPr lang="en-US" altLang="zh-TW" sz="2231" i="1">
-                                  <a:latin typeface="Cambria Math" panose="02040503050406030204" pitchFamily="18" charset="0"/>
-                                </a:rPr>
-                              </m:ctrlPr>
-                            </m:dPr>
-                            <m:e>
-                              <m:r>
-                                <a:rPr lang="en-US" altLang="zh-TW" sz="2231" i="1">
-                                  <a:latin typeface="Cambria Math" panose="02040503050406030204" pitchFamily="18" charset="0"/>
-                                </a:rPr>
-                                <m:t>0, 0</m:t>
-                              </m:r>
-                            </m:e>
-                          </m:d>
-                        </m:oMath>
-                      </m:oMathPara>
-                    </a14:m>
-                    <a:endParaRPr lang="zh-TW" altLang="en-US" sz="2231" dirty="0">
-                      <a:latin typeface="Times New Roman" panose="02020603050405020304" pitchFamily="18" charset="0"/>
-                      <a:cs typeface="Times New Roman" panose="02020603050405020304" pitchFamily="18" charset="0"/>
-                    </a:endParaRPr>
-                  </a:p>
-                </p:txBody>
-              </p:sp>
-            </mc:Choice>
-            <mc:Fallback xmlns="">
-              <p:sp>
-                <p:nvSpPr>
-                  <p:cNvPr id="48" name="矩形 47">
-                    <a:extLst>
-                      <a:ext uri="{FF2B5EF4-FFF2-40B4-BE49-F238E27FC236}">
-                        <a16:creationId xmlns:a16="http://schemas.microsoft.com/office/drawing/2014/main" id="{7EE1129B-C1E9-4939-8E4A-022A742D1E06}"/>
-                      </a:ext>
-                    </a:extLst>
-                  </p:cNvPr>
-                  <p:cNvSpPr>
-                    <a:spLocks noRot="1" noChangeAspect="1" noMove="1" noResize="1" noEditPoints="1" noAdjustHandles="1" noChangeArrowheads="1" noChangeShapeType="1" noTextEdit="1"/>
-                  </p:cNvSpPr>
-                  <p:nvPr/>
-                </p:nvSpPr>
-                <p:spPr>
-                  <a:xfrm>
-                    <a:off x="1884026" y="5705594"/>
-                    <a:ext cx="738472" cy="351822"/>
-                  </a:xfrm>
-                  <a:prstGeom prst="rect">
-                    <a:avLst/>
-                  </a:prstGeom>
-                  <a:blipFill>
-                    <a:blip r:embed="rId18"/>
-                    <a:stretch>
-                      <a:fillRect/>
-                    </a:stretch>
-                  </a:blipFill>
-                </p:spPr>
-                <p:txBody>
-                  <a:bodyPr/>
-                  <a:lstStyle/>
-                  <a:p>
-                    <a:r>
-                      <a:rPr lang="zh-TW" altLang="en-US">
-                        <a:noFill/>
-                      </a:rPr>
-                      <a:t> </a:t>
-                    </a:r>
-                  </a:p>
-                </p:txBody>
-              </p:sp>
-            </mc:Fallback>
-          </mc:AlternateContent>
-        </p:grpSp>
-        <mc:AlternateContent xmlns:mc="http://schemas.openxmlformats.org/markup-compatibility/2006" xmlns:a14="http://schemas.microsoft.com/office/drawing/2010/main">
-          <mc:Choice Requires="a14">
+        <mc:AlternateContent xmlns:mc="http://schemas.openxmlformats.org/markup-compatibility/2006">
+          <mc:Choice xmlns:a14="http://schemas.microsoft.com/office/drawing/2010/main" Requires="a14">
             <p:sp>
               <p:nvSpPr>
-                <p:cNvPr id="50" name="矩形 49">
+                <p:cNvPr id="53" name="矩形 52">
                   <a:extLst>
                     <a:ext uri="{FF2B5EF4-FFF2-40B4-BE49-F238E27FC236}">
-                      <a16:creationId xmlns:a16="http://schemas.microsoft.com/office/drawing/2014/main" id="{999FDC40-9DEB-4ECA-9036-B7980D9B6909}"/>
+                      <a16:creationId xmlns:a16="http://schemas.microsoft.com/office/drawing/2014/main" id="{51A98744-65F5-4C06-9B03-D3E237E6DBD1}"/>
                     </a:ext>
                   </a:extLst>
                 </p:cNvPr>
@@ -4843,228 +4487,8 @@
               </p:nvSpPr>
               <p:spPr>
                 <a:xfrm>
-                  <a:off x="838474" y="1515554"/>
-                  <a:ext cx="344648" cy="351822"/>
-                </a:xfrm>
-                <a:prstGeom prst="rect">
-                  <a:avLst/>
-                </a:prstGeom>
-              </p:spPr>
-              <p:txBody>
-                <a:bodyPr wrap="none">
-                  <a:spAutoFit/>
-                </a:bodyPr>
-                <a:lstStyle/>
-                <a:p>
-                  <a:pPr/>
-                  <a14:m>
-                    <m:oMathPara xmlns:m="http://schemas.openxmlformats.org/officeDocument/2006/math">
-                      <m:oMathParaPr>
-                        <m:jc m:val="centerGroup"/>
-                      </m:oMathParaPr>
-                      <m:oMath xmlns:m="http://schemas.openxmlformats.org/officeDocument/2006/math">
-                        <m:acc>
-                          <m:accPr>
-                            <m:chr m:val="̂"/>
-                            <m:ctrlPr>
-                              <a:rPr lang="en-US" altLang="zh-TW" sz="2231" i="1">
-                                <a:latin typeface="Cambria Math" panose="02040503050406030204" pitchFamily="18" charset="0"/>
-                              </a:rPr>
-                            </m:ctrlPr>
-                          </m:accPr>
-                          <m:e>
-                            <m:r>
-                              <a:rPr lang="en-US" altLang="zh-TW" sz="2231" b="1" i="1">
-                                <a:latin typeface="Cambria Math" panose="02040503050406030204" pitchFamily="18" charset="0"/>
-                              </a:rPr>
-                              <m:t>𝒚</m:t>
-                            </m:r>
-                          </m:e>
-                        </m:acc>
-                      </m:oMath>
-                    </m:oMathPara>
-                  </a14:m>
-                  <a:endParaRPr lang="zh-TW" altLang="en-US" sz="2231" dirty="0">
-                    <a:latin typeface="Times New Roman" panose="02020603050405020304" pitchFamily="18" charset="0"/>
-                    <a:cs typeface="Times New Roman" panose="02020603050405020304" pitchFamily="18" charset="0"/>
-                  </a:endParaRPr>
-                </a:p>
-              </p:txBody>
-            </p:sp>
-          </mc:Choice>
-          <mc:Fallback xmlns="">
-            <p:sp>
-              <p:nvSpPr>
-                <p:cNvPr id="50" name="矩形 49">
-                  <a:extLst>
-                    <a:ext uri="{FF2B5EF4-FFF2-40B4-BE49-F238E27FC236}">
-                      <a16:creationId xmlns:a16="http://schemas.microsoft.com/office/drawing/2014/main" id="{999FDC40-9DEB-4ECA-9036-B7980D9B6909}"/>
-                    </a:ext>
-                  </a:extLst>
-                </p:cNvPr>
-                <p:cNvSpPr>
-                  <a:spLocks noRot="1" noChangeAspect="1" noMove="1" noResize="1" noEditPoints="1" noAdjustHandles="1" noChangeArrowheads="1" noChangeShapeType="1" noTextEdit="1"/>
-                </p:cNvSpPr>
-                <p:nvPr/>
-              </p:nvSpPr>
-              <p:spPr>
-                <a:xfrm>
-                  <a:off x="838474" y="1515554"/>
-                  <a:ext cx="344648" cy="351822"/>
-                </a:xfrm>
-                <a:prstGeom prst="rect">
-                  <a:avLst/>
-                </a:prstGeom>
-                <a:blipFill>
-                  <a:blip r:embed="rId19"/>
-                  <a:stretch>
-                    <a:fillRect t="-5634" r="-14286" b="-12676"/>
-                  </a:stretch>
-                </a:blipFill>
-              </p:spPr>
-              <p:txBody>
-                <a:bodyPr/>
-                <a:lstStyle/>
-                <a:p>
-                  <a:r>
-                    <a:rPr lang="zh-TW" altLang="en-US">
-                      <a:noFill/>
-                    </a:rPr>
-                    <a:t> </a:t>
-                  </a:r>
-                </a:p>
-              </p:txBody>
-            </p:sp>
-          </mc:Fallback>
-        </mc:AlternateContent>
-        <mc:AlternateContent xmlns:mc="http://schemas.openxmlformats.org/markup-compatibility/2006" xmlns:a14="http://schemas.microsoft.com/office/drawing/2010/main">
-          <mc:Choice Requires="a14">
-            <p:sp>
-              <p:nvSpPr>
-                <p:cNvPr id="51" name="矩形 50">
-                  <a:extLst>
-                    <a:ext uri="{FF2B5EF4-FFF2-40B4-BE49-F238E27FC236}">
-                      <a16:creationId xmlns:a16="http://schemas.microsoft.com/office/drawing/2014/main" id="{8994A547-5966-4209-8712-F5A623692E36}"/>
-                    </a:ext>
-                  </a:extLst>
-                </p:cNvPr>
-                <p:cNvSpPr/>
-                <p:nvPr/>
-              </p:nvSpPr>
-              <p:spPr>
-                <a:xfrm>
-                  <a:off x="1076025" y="1787185"/>
-                  <a:ext cx="339450" cy="351822"/>
-                </a:xfrm>
-                <a:prstGeom prst="rect">
-                  <a:avLst/>
-                </a:prstGeom>
-              </p:spPr>
-              <p:txBody>
-                <a:bodyPr wrap="none">
-                  <a:spAutoFit/>
-                </a:bodyPr>
-                <a:lstStyle/>
-                <a:p>
-                  <a:pPr/>
-                  <a14:m>
-                    <m:oMathPara xmlns:m="http://schemas.openxmlformats.org/officeDocument/2006/math">
-                      <m:oMathParaPr>
-                        <m:jc m:val="centerGroup"/>
-                      </m:oMathParaPr>
-                      <m:oMath xmlns:m="http://schemas.openxmlformats.org/officeDocument/2006/math">
-                        <m:acc>
-                          <m:accPr>
-                            <m:chr m:val="̂"/>
-                            <m:ctrlPr>
-                              <a:rPr lang="en-US" altLang="zh-TW" sz="2231" i="1">
-                                <a:latin typeface="Cambria Math" panose="02040503050406030204" pitchFamily="18" charset="0"/>
-                              </a:rPr>
-                            </m:ctrlPr>
-                          </m:accPr>
-                          <m:e>
-                            <m:r>
-                              <a:rPr lang="en-US" altLang="zh-TW" sz="2231" b="1" i="1">
-                                <a:latin typeface="Cambria Math" panose="02040503050406030204" pitchFamily="18" charset="0"/>
-                              </a:rPr>
-                              <m:t>𝒙</m:t>
-                            </m:r>
-                          </m:e>
-                        </m:acc>
-                      </m:oMath>
-                    </m:oMathPara>
-                  </a14:m>
-                  <a:endParaRPr lang="zh-TW" altLang="en-US" sz="2231" dirty="0">
-                    <a:latin typeface="Times New Roman" panose="02020603050405020304" pitchFamily="18" charset="0"/>
-                    <a:cs typeface="Times New Roman" panose="02020603050405020304" pitchFamily="18" charset="0"/>
-                  </a:endParaRPr>
-                </a:p>
-              </p:txBody>
-            </p:sp>
-          </mc:Choice>
-          <mc:Fallback xmlns="">
-            <p:sp>
-              <p:nvSpPr>
-                <p:cNvPr id="51" name="矩形 50">
-                  <a:extLst>
-                    <a:ext uri="{FF2B5EF4-FFF2-40B4-BE49-F238E27FC236}">
-                      <a16:creationId xmlns:a16="http://schemas.microsoft.com/office/drawing/2014/main" id="{8994A547-5966-4209-8712-F5A623692E36}"/>
-                    </a:ext>
-                  </a:extLst>
-                </p:cNvPr>
-                <p:cNvSpPr>
-                  <a:spLocks noRot="1" noChangeAspect="1" noMove="1" noResize="1" noEditPoints="1" noAdjustHandles="1" noChangeArrowheads="1" noChangeShapeType="1" noTextEdit="1"/>
-                </p:cNvSpPr>
-                <p:nvPr/>
-              </p:nvSpPr>
-              <p:spPr>
-                <a:xfrm>
-                  <a:off x="1076025" y="1787185"/>
-                  <a:ext cx="339450" cy="351822"/>
-                </a:xfrm>
-                <a:prstGeom prst="rect">
-                  <a:avLst/>
-                </a:prstGeom>
-                <a:blipFill>
-                  <a:blip r:embed="rId20"/>
-                  <a:stretch>
-                    <a:fillRect t="-5634" r="-14493"/>
-                  </a:stretch>
-                </a:blipFill>
-              </p:spPr>
-              <p:txBody>
-                <a:bodyPr/>
-                <a:lstStyle/>
-                <a:p>
-                  <a:r>
-                    <a:rPr lang="zh-TW" altLang="en-US">
-                      <a:noFill/>
-                    </a:rPr>
-                    <a:t> </a:t>
-                  </a:r>
-                </a:p>
-              </p:txBody>
-            </p:sp>
-          </mc:Fallback>
-        </mc:AlternateContent>
-        <mc:AlternateContent xmlns:mc="http://schemas.openxmlformats.org/markup-compatibility/2006" xmlns:a14="http://schemas.microsoft.com/office/drawing/2010/main">
-          <mc:Choice Requires="a14">
-            <p:sp>
-              <p:nvSpPr>
-                <p:cNvPr id="52" name="矩形 51">
-                  <a:extLst>
-                    <a:ext uri="{FF2B5EF4-FFF2-40B4-BE49-F238E27FC236}">
-                      <a16:creationId xmlns:a16="http://schemas.microsoft.com/office/drawing/2014/main" id="{72145011-9C19-434C-B9F6-F3B5B50A4A17}"/>
-                    </a:ext>
-                  </a:extLst>
-                </p:cNvPr>
-                <p:cNvSpPr/>
-                <p:nvPr/>
-              </p:nvSpPr>
-              <p:spPr>
-                <a:xfrm>
-                  <a:off x="1439616" y="1827740"/>
-                  <a:ext cx="754848" cy="351822"/>
+                  <a:off x="3049942" y="3608665"/>
+                  <a:ext cx="733662" cy="343171"/>
                 </a:xfrm>
                 <a:prstGeom prst="rect">
                   <a:avLst/>
@@ -5084,15 +4508,15 @@
                       </m:oMathParaPr>
                       <m:oMath xmlns:m="http://schemas.openxmlformats.org/officeDocument/2006/math">
                         <m:r>
-                          <a:rPr lang="en-US" altLang="zh-TW" sz="2231" i="1">
+                          <a:rPr lang="en-US" altLang="zh-TW" sz="1630" i="1">
                             <a:latin typeface="Cambria Math" panose="02040503050406030204" pitchFamily="18" charset="0"/>
                           </a:rPr>
-                          <m:t>ℓ=0</m:t>
+                          <m:t>ℓ=1</m:t>
                         </m:r>
                       </m:oMath>
                     </m:oMathPara>
                   </a14:m>
-                  <a:endParaRPr lang="zh-TW" altLang="en-US" sz="2231" dirty="0">
+                  <a:endParaRPr lang="zh-TW" altLang="en-US" sz="1630" dirty="0">
                     <a:latin typeface="Times New Roman" panose="02020603050405020304" pitchFamily="18" charset="0"/>
                     <a:cs typeface="Times New Roman" panose="02020603050405020304" pitchFamily="18" charset="0"/>
                   </a:endParaRPr>
@@ -5100,13 +4524,13 @@
               </p:txBody>
             </p:sp>
           </mc:Choice>
-          <mc:Fallback xmlns="">
+          <mc:Fallback>
             <p:sp>
               <p:nvSpPr>
-                <p:cNvPr id="52" name="矩形 51">
+                <p:cNvPr id="53" name="矩形 52">
                   <a:extLst>
                     <a:ext uri="{FF2B5EF4-FFF2-40B4-BE49-F238E27FC236}">
-                      <a16:creationId xmlns:a16="http://schemas.microsoft.com/office/drawing/2014/main" id="{72145011-9C19-434C-B9F6-F3B5B50A4A17}"/>
+                      <a16:creationId xmlns:a16="http://schemas.microsoft.com/office/drawing/2014/main" id="{51A98744-65F5-4C06-9B03-D3E237E6DBD1}"/>
                     </a:ext>
                   </a:extLst>
                 </p:cNvPr>
@@ -5117,14 +4541,14 @@
               </p:nvSpPr>
               <p:spPr>
                 <a:xfrm>
-                  <a:off x="1439616" y="1827740"/>
-                  <a:ext cx="754848" cy="351822"/>
+                  <a:off x="3049942" y="3608665"/>
+                  <a:ext cx="733662" cy="343171"/>
                 </a:xfrm>
                 <a:prstGeom prst="rect">
                   <a:avLst/>
                 </a:prstGeom>
                 <a:blipFill>
-                  <a:blip r:embed="rId21"/>
+                  <a:blip r:embed="rId17"/>
                   <a:stretch>
                     <a:fillRect/>
                   </a:stretch>
@@ -5145,14 +4569,14 @@
             </p:sp>
           </mc:Fallback>
         </mc:AlternateContent>
-        <mc:AlternateContent xmlns:mc="http://schemas.openxmlformats.org/markup-compatibility/2006" xmlns:a14="http://schemas.microsoft.com/office/drawing/2010/main">
-          <mc:Choice Requires="a14">
+        <mc:AlternateContent xmlns:mc="http://schemas.openxmlformats.org/markup-compatibility/2006">
+          <mc:Choice xmlns:a14="http://schemas.microsoft.com/office/drawing/2010/main" Requires="a14">
             <p:sp>
               <p:nvSpPr>
-                <p:cNvPr id="53" name="矩形 52">
+                <p:cNvPr id="54" name="矩形 53">
                   <a:extLst>
                     <a:ext uri="{FF2B5EF4-FFF2-40B4-BE49-F238E27FC236}">
-                      <a16:creationId xmlns:a16="http://schemas.microsoft.com/office/drawing/2014/main" id="{51A98744-65F5-4C06-9B03-D3E237E6DBD1}"/>
+                      <a16:creationId xmlns:a16="http://schemas.microsoft.com/office/drawing/2014/main" id="{C446FAC2-67E8-4C03-93C3-6298390A7774}"/>
                     </a:ext>
                   </a:extLst>
                 </p:cNvPr>
@@ -5161,8 +4585,8 @@
               </p:nvSpPr>
               <p:spPr>
                 <a:xfrm>
-                  <a:off x="3194517" y="1827740"/>
-                  <a:ext cx="754848" cy="351822"/>
+                  <a:off x="4380253" y="3608665"/>
+                  <a:ext cx="733662" cy="343171"/>
                 </a:xfrm>
                 <a:prstGeom prst="rect">
                   <a:avLst/>
@@ -5182,15 +4606,15 @@
                       </m:oMathParaPr>
                       <m:oMath xmlns:m="http://schemas.openxmlformats.org/officeDocument/2006/math">
                         <m:r>
-                          <a:rPr lang="en-US" altLang="zh-TW" sz="2231" i="1">
+                          <a:rPr lang="en-US" altLang="zh-TW" sz="1630" i="1">
                             <a:latin typeface="Cambria Math" panose="02040503050406030204" pitchFamily="18" charset="0"/>
                           </a:rPr>
-                          <m:t>ℓ=1</m:t>
+                          <m:t>ℓ=2</m:t>
                         </m:r>
                       </m:oMath>
                     </m:oMathPara>
                   </a14:m>
-                  <a:endParaRPr lang="zh-TW" altLang="en-US" sz="2231" dirty="0">
+                  <a:endParaRPr lang="zh-TW" altLang="en-US" sz="1630" dirty="0">
                     <a:latin typeface="Times New Roman" panose="02020603050405020304" pitchFamily="18" charset="0"/>
                     <a:cs typeface="Times New Roman" panose="02020603050405020304" pitchFamily="18" charset="0"/>
                   </a:endParaRPr>
@@ -5198,13 +4622,13 @@
               </p:txBody>
             </p:sp>
           </mc:Choice>
-          <mc:Fallback xmlns="">
+          <mc:Fallback>
             <p:sp>
               <p:nvSpPr>
-                <p:cNvPr id="53" name="矩形 52">
+                <p:cNvPr id="54" name="矩形 53">
                   <a:extLst>
                     <a:ext uri="{FF2B5EF4-FFF2-40B4-BE49-F238E27FC236}">
-                      <a16:creationId xmlns:a16="http://schemas.microsoft.com/office/drawing/2014/main" id="{51A98744-65F5-4C06-9B03-D3E237E6DBD1}"/>
+                      <a16:creationId xmlns:a16="http://schemas.microsoft.com/office/drawing/2014/main" id="{C446FAC2-67E8-4C03-93C3-6298390A7774}"/>
                     </a:ext>
                   </a:extLst>
                 </p:cNvPr>
@@ -5215,14 +4639,14 @@
               </p:nvSpPr>
               <p:spPr>
                 <a:xfrm>
-                  <a:off x="3194517" y="1827740"/>
-                  <a:ext cx="754848" cy="351822"/>
+                  <a:off x="4380253" y="3608665"/>
+                  <a:ext cx="733662" cy="343171"/>
                 </a:xfrm>
                 <a:prstGeom prst="rect">
                   <a:avLst/>
                 </a:prstGeom>
                 <a:blipFill>
-                  <a:blip r:embed="rId22"/>
+                  <a:blip r:embed="rId18"/>
                   <a:stretch>
                     <a:fillRect/>
                   </a:stretch>
@@ -5243,14 +4667,14 @@
             </p:sp>
           </mc:Fallback>
         </mc:AlternateContent>
-        <mc:AlternateContent xmlns:mc="http://schemas.openxmlformats.org/markup-compatibility/2006" xmlns:a14="http://schemas.microsoft.com/office/drawing/2010/main">
-          <mc:Choice Requires="a14">
+        <mc:AlternateContent xmlns:mc="http://schemas.openxmlformats.org/markup-compatibility/2006">
+          <mc:Choice xmlns:a14="http://schemas.microsoft.com/office/drawing/2010/main" Requires="a14">
             <p:sp>
               <p:nvSpPr>
-                <p:cNvPr id="54" name="矩形 53">
+                <p:cNvPr id="55" name="矩形 54">
                   <a:extLst>
                     <a:ext uri="{FF2B5EF4-FFF2-40B4-BE49-F238E27FC236}">
-                      <a16:creationId xmlns:a16="http://schemas.microsoft.com/office/drawing/2014/main" id="{C446FAC2-67E8-4C03-93C3-6298390A7774}"/>
+                      <a16:creationId xmlns:a16="http://schemas.microsoft.com/office/drawing/2014/main" id="{67202EA3-53E5-4F3E-889C-2AC54F8106DC}"/>
                     </a:ext>
                   </a:extLst>
                 </p:cNvPr>
@@ -5259,8 +4683,8 @@
               </p:nvSpPr>
               <p:spPr>
                 <a:xfrm>
-                  <a:off x="4949418" y="1827740"/>
-                  <a:ext cx="754848" cy="351822"/>
+                  <a:off x="5710563" y="3608665"/>
+                  <a:ext cx="733662" cy="343171"/>
                 </a:xfrm>
                 <a:prstGeom prst="rect">
                   <a:avLst/>
@@ -5280,15 +4704,15 @@
                       </m:oMathParaPr>
                       <m:oMath xmlns:m="http://schemas.openxmlformats.org/officeDocument/2006/math">
                         <m:r>
-                          <a:rPr lang="en-US" altLang="zh-TW" sz="2231" i="1">
+                          <a:rPr lang="en-US" altLang="zh-TW" sz="1630" i="1">
                             <a:latin typeface="Cambria Math" panose="02040503050406030204" pitchFamily="18" charset="0"/>
                           </a:rPr>
-                          <m:t>ℓ=2</m:t>
+                          <m:t>ℓ=3</m:t>
                         </m:r>
                       </m:oMath>
                     </m:oMathPara>
                   </a14:m>
-                  <a:endParaRPr lang="zh-TW" altLang="en-US" sz="2231" dirty="0">
+                  <a:endParaRPr lang="zh-TW" altLang="en-US" sz="1630" dirty="0">
                     <a:latin typeface="Times New Roman" panose="02020603050405020304" pitchFamily="18" charset="0"/>
                     <a:cs typeface="Times New Roman" panose="02020603050405020304" pitchFamily="18" charset="0"/>
                   </a:endParaRPr>
@@ -5296,13 +4720,13 @@
               </p:txBody>
             </p:sp>
           </mc:Choice>
-          <mc:Fallback xmlns="">
+          <mc:Fallback>
             <p:sp>
               <p:nvSpPr>
-                <p:cNvPr id="54" name="矩形 53">
+                <p:cNvPr id="55" name="矩形 54">
                   <a:extLst>
                     <a:ext uri="{FF2B5EF4-FFF2-40B4-BE49-F238E27FC236}">
-                      <a16:creationId xmlns:a16="http://schemas.microsoft.com/office/drawing/2014/main" id="{C446FAC2-67E8-4C03-93C3-6298390A7774}"/>
+                      <a16:creationId xmlns:a16="http://schemas.microsoft.com/office/drawing/2014/main" id="{67202EA3-53E5-4F3E-889C-2AC54F8106DC}"/>
                     </a:ext>
                   </a:extLst>
                 </p:cNvPr>
@@ -5313,14 +4737,14 @@
               </p:nvSpPr>
               <p:spPr>
                 <a:xfrm>
-                  <a:off x="4949418" y="1827740"/>
-                  <a:ext cx="754848" cy="351822"/>
+                  <a:off x="5710563" y="3608665"/>
+                  <a:ext cx="733662" cy="343171"/>
                 </a:xfrm>
                 <a:prstGeom prst="rect">
                   <a:avLst/>
                 </a:prstGeom>
                 <a:blipFill>
-                  <a:blip r:embed="rId23"/>
+                  <a:blip r:embed="rId19"/>
                   <a:stretch>
                     <a:fillRect/>
                   </a:stretch>
@@ -5341,14 +4765,14 @@
             </p:sp>
           </mc:Fallback>
         </mc:AlternateContent>
-        <mc:AlternateContent xmlns:mc="http://schemas.openxmlformats.org/markup-compatibility/2006" xmlns:a14="http://schemas.microsoft.com/office/drawing/2010/main">
-          <mc:Choice Requires="a14">
+        <mc:AlternateContent xmlns:mc="http://schemas.openxmlformats.org/markup-compatibility/2006">
+          <mc:Choice xmlns:a14="http://schemas.microsoft.com/office/drawing/2010/main" Requires="a14">
             <p:sp>
               <p:nvSpPr>
-                <p:cNvPr id="55" name="矩形 54">
+                <p:cNvPr id="56" name="矩形 55">
                   <a:extLst>
                     <a:ext uri="{FF2B5EF4-FFF2-40B4-BE49-F238E27FC236}">
-                      <a16:creationId xmlns:a16="http://schemas.microsoft.com/office/drawing/2014/main" id="{67202EA3-53E5-4F3E-889C-2AC54F8106DC}"/>
+                      <a16:creationId xmlns:a16="http://schemas.microsoft.com/office/drawing/2014/main" id="{623241AD-4218-4CDF-83BC-3256437AFA5E}"/>
                     </a:ext>
                   </a:extLst>
                 </p:cNvPr>
@@ -5357,8 +4781,8 @@
               </p:nvSpPr>
               <p:spPr>
                 <a:xfrm>
-                  <a:off x="6704319" y="1827740"/>
-                  <a:ext cx="754848" cy="351822"/>
+                  <a:off x="7040874" y="3608665"/>
+                  <a:ext cx="733662" cy="343171"/>
                 </a:xfrm>
                 <a:prstGeom prst="rect">
                   <a:avLst/>
@@ -5378,15 +4802,15 @@
                       </m:oMathParaPr>
                       <m:oMath xmlns:m="http://schemas.openxmlformats.org/officeDocument/2006/math">
                         <m:r>
-                          <a:rPr lang="en-US" altLang="zh-TW" sz="2231" i="1">
+                          <a:rPr lang="en-US" altLang="zh-TW" sz="1630" i="1">
                             <a:latin typeface="Cambria Math" panose="02040503050406030204" pitchFamily="18" charset="0"/>
                           </a:rPr>
-                          <m:t>ℓ=3</m:t>
+                          <m:t>ℓ=4</m:t>
                         </m:r>
                       </m:oMath>
                     </m:oMathPara>
                   </a14:m>
-                  <a:endParaRPr lang="zh-TW" altLang="en-US" sz="2231" dirty="0">
+                  <a:endParaRPr lang="zh-TW" altLang="en-US" sz="1630" dirty="0">
                     <a:latin typeface="Times New Roman" panose="02020603050405020304" pitchFamily="18" charset="0"/>
                     <a:cs typeface="Times New Roman" panose="02020603050405020304" pitchFamily="18" charset="0"/>
                   </a:endParaRPr>
@@ -5394,13 +4818,13 @@
               </p:txBody>
             </p:sp>
           </mc:Choice>
-          <mc:Fallback xmlns="">
+          <mc:Fallback>
             <p:sp>
               <p:nvSpPr>
-                <p:cNvPr id="55" name="矩形 54">
+                <p:cNvPr id="56" name="矩形 55">
                   <a:extLst>
                     <a:ext uri="{FF2B5EF4-FFF2-40B4-BE49-F238E27FC236}">
-                      <a16:creationId xmlns:a16="http://schemas.microsoft.com/office/drawing/2014/main" id="{67202EA3-53E5-4F3E-889C-2AC54F8106DC}"/>
+                      <a16:creationId xmlns:a16="http://schemas.microsoft.com/office/drawing/2014/main" id="{623241AD-4218-4CDF-83BC-3256437AFA5E}"/>
                     </a:ext>
                   </a:extLst>
                 </p:cNvPr>
@@ -5411,14 +4835,14 @@
               </p:nvSpPr>
               <p:spPr>
                 <a:xfrm>
-                  <a:off x="6704319" y="1827740"/>
-                  <a:ext cx="754848" cy="351822"/>
+                  <a:off x="7040874" y="3608665"/>
+                  <a:ext cx="733662" cy="343171"/>
                 </a:xfrm>
                 <a:prstGeom prst="rect">
                   <a:avLst/>
                 </a:prstGeom>
                 <a:blipFill>
-                  <a:blip r:embed="rId24"/>
+                  <a:blip r:embed="rId20"/>
                   <a:stretch>
                     <a:fillRect/>
                   </a:stretch>
@@ -5439,14 +4863,14 @@
             </p:sp>
           </mc:Fallback>
         </mc:AlternateContent>
-        <mc:AlternateContent xmlns:mc="http://schemas.openxmlformats.org/markup-compatibility/2006" xmlns:a14="http://schemas.microsoft.com/office/drawing/2010/main">
-          <mc:Choice Requires="a14">
+        <mc:AlternateContent xmlns:mc="http://schemas.openxmlformats.org/markup-compatibility/2006">
+          <mc:Choice xmlns:a14="http://schemas.microsoft.com/office/drawing/2010/main" Requires="a14">
             <p:sp>
               <p:nvSpPr>
-                <p:cNvPr id="56" name="矩形 55">
+                <p:cNvPr id="57" name="矩形 56">
                   <a:extLst>
                     <a:ext uri="{FF2B5EF4-FFF2-40B4-BE49-F238E27FC236}">
-                      <a16:creationId xmlns:a16="http://schemas.microsoft.com/office/drawing/2014/main" id="{623241AD-4218-4CDF-83BC-3256437AFA5E}"/>
+                      <a16:creationId xmlns:a16="http://schemas.microsoft.com/office/drawing/2014/main" id="{3ABC0B3B-CCB7-4FA5-9BCF-295D0E5F1BD2}"/>
                     </a:ext>
                   </a:extLst>
                 </p:cNvPr>
@@ -5455,8 +4879,8 @@
               </p:nvSpPr>
               <p:spPr>
                 <a:xfrm>
-                  <a:off x="8459220" y="1827740"/>
-                  <a:ext cx="754848" cy="351822"/>
+                  <a:off x="8309800" y="3608665"/>
+                  <a:ext cx="733662" cy="343171"/>
                 </a:xfrm>
                 <a:prstGeom prst="rect">
                   <a:avLst/>
@@ -5476,15 +4900,15 @@
                       </m:oMathParaPr>
                       <m:oMath xmlns:m="http://schemas.openxmlformats.org/officeDocument/2006/math">
                         <m:r>
-                          <a:rPr lang="en-US" altLang="zh-TW" sz="2231" i="1">
+                          <a:rPr lang="en-US" altLang="zh-TW" sz="1630" i="1">
                             <a:latin typeface="Cambria Math" panose="02040503050406030204" pitchFamily="18" charset="0"/>
                           </a:rPr>
-                          <m:t>ℓ=4</m:t>
+                          <m:t>ℓ=5</m:t>
                         </m:r>
                       </m:oMath>
                     </m:oMathPara>
                   </a14:m>
-                  <a:endParaRPr lang="zh-TW" altLang="en-US" sz="2231" dirty="0">
+                  <a:endParaRPr lang="zh-TW" altLang="en-US" sz="1630" dirty="0">
                     <a:latin typeface="Times New Roman" panose="02020603050405020304" pitchFamily="18" charset="0"/>
                     <a:cs typeface="Times New Roman" panose="02020603050405020304" pitchFamily="18" charset="0"/>
                   </a:endParaRPr>
@@ -5492,105 +4916,7 @@
               </p:txBody>
             </p:sp>
           </mc:Choice>
-          <mc:Fallback xmlns="">
-            <p:sp>
-              <p:nvSpPr>
-                <p:cNvPr id="56" name="矩形 55">
-                  <a:extLst>
-                    <a:ext uri="{FF2B5EF4-FFF2-40B4-BE49-F238E27FC236}">
-                      <a16:creationId xmlns:a16="http://schemas.microsoft.com/office/drawing/2014/main" id="{623241AD-4218-4CDF-83BC-3256437AFA5E}"/>
-                    </a:ext>
-                  </a:extLst>
-                </p:cNvPr>
-                <p:cNvSpPr>
-                  <a:spLocks noRot="1" noChangeAspect="1" noMove="1" noResize="1" noEditPoints="1" noAdjustHandles="1" noChangeArrowheads="1" noChangeShapeType="1" noTextEdit="1"/>
-                </p:cNvSpPr>
-                <p:nvPr/>
-              </p:nvSpPr>
-              <p:spPr>
-                <a:xfrm>
-                  <a:off x="8459220" y="1827740"/>
-                  <a:ext cx="754848" cy="351822"/>
-                </a:xfrm>
-                <a:prstGeom prst="rect">
-                  <a:avLst/>
-                </a:prstGeom>
-                <a:blipFill>
-                  <a:blip r:embed="rId25"/>
-                  <a:stretch>
-                    <a:fillRect/>
-                  </a:stretch>
-                </a:blipFill>
-              </p:spPr>
-              <p:txBody>
-                <a:bodyPr/>
-                <a:lstStyle/>
-                <a:p>
-                  <a:r>
-                    <a:rPr lang="zh-TW" altLang="en-US">
-                      <a:noFill/>
-                    </a:rPr>
-                    <a:t> </a:t>
-                  </a:r>
-                </a:p>
-              </p:txBody>
-            </p:sp>
-          </mc:Fallback>
-        </mc:AlternateContent>
-        <mc:AlternateContent xmlns:mc="http://schemas.openxmlformats.org/markup-compatibility/2006" xmlns:a14="http://schemas.microsoft.com/office/drawing/2010/main">
-          <mc:Choice Requires="a14">
-            <p:sp>
-              <p:nvSpPr>
-                <p:cNvPr id="57" name="矩形 56">
-                  <a:extLst>
-                    <a:ext uri="{FF2B5EF4-FFF2-40B4-BE49-F238E27FC236}">
-                      <a16:creationId xmlns:a16="http://schemas.microsoft.com/office/drawing/2014/main" id="{3ABC0B3B-CCB7-4FA5-9BCF-295D0E5F1BD2}"/>
-                    </a:ext>
-                  </a:extLst>
-                </p:cNvPr>
-                <p:cNvSpPr/>
-                <p:nvPr/>
-              </p:nvSpPr>
-              <p:spPr>
-                <a:xfrm>
-                  <a:off x="10214122" y="1827740"/>
-                  <a:ext cx="754848" cy="351822"/>
-                </a:xfrm>
-                <a:prstGeom prst="rect">
-                  <a:avLst/>
-                </a:prstGeom>
-              </p:spPr>
-              <p:txBody>
-                <a:bodyPr wrap="none">
-                  <a:spAutoFit/>
-                </a:bodyPr>
-                <a:lstStyle/>
-                <a:p>
-                  <a:pPr/>
-                  <a14:m>
-                    <m:oMathPara xmlns:m="http://schemas.openxmlformats.org/officeDocument/2006/math">
-                      <m:oMathParaPr>
-                        <m:jc m:val="centerGroup"/>
-                      </m:oMathParaPr>
-                      <m:oMath xmlns:m="http://schemas.openxmlformats.org/officeDocument/2006/math">
-                        <m:r>
-                          <a:rPr lang="en-US" altLang="zh-TW" sz="2231" i="1">
-                            <a:latin typeface="Cambria Math" panose="02040503050406030204" pitchFamily="18" charset="0"/>
-                          </a:rPr>
-                          <m:t>ℓ=5</m:t>
-                        </m:r>
-                      </m:oMath>
-                    </m:oMathPara>
-                  </a14:m>
-                  <a:endParaRPr lang="zh-TW" altLang="en-US" sz="2231" dirty="0">
-                    <a:latin typeface="Times New Roman" panose="02020603050405020304" pitchFamily="18" charset="0"/>
-                    <a:cs typeface="Times New Roman" panose="02020603050405020304" pitchFamily="18" charset="0"/>
-                  </a:endParaRPr>
-                </a:p>
-              </p:txBody>
-            </p:sp>
-          </mc:Choice>
-          <mc:Fallback xmlns="">
+          <mc:Fallback>
             <p:sp>
               <p:nvSpPr>
                 <p:cNvPr id="57" name="矩形 56">
@@ -5607,14 +4933,14 @@
               </p:nvSpPr>
               <p:spPr>
                 <a:xfrm>
-                  <a:off x="10214122" y="1827740"/>
-                  <a:ext cx="754848" cy="351822"/>
+                  <a:off x="8309800" y="3608665"/>
+                  <a:ext cx="733662" cy="343171"/>
                 </a:xfrm>
                 <a:prstGeom prst="rect">
                   <a:avLst/>
                 </a:prstGeom>
                 <a:blipFill>
-                  <a:blip r:embed="rId26"/>
+                  <a:blip r:embed="rId21"/>
                   <a:stretch>
                     <a:fillRect/>
                   </a:stretch>
@@ -5650,7 +4976,7 @@
             <p:nvPr/>
           </p:nvPicPr>
           <p:blipFill rotWithShape="1">
-            <a:blip r:embed="rId27">
+            <a:blip r:embed="rId22">
               <a:clrChange>
                 <a:clrFrom>
                   <a:srgbClr val="FFFFFF"/>
@@ -5672,8 +4998,8 @@
           </p:blipFill>
           <p:spPr>
             <a:xfrm>
-              <a:off x="11274545" y="2064668"/>
-              <a:ext cx="791532" cy="2032000"/>
+              <a:off x="9209533" y="3788269"/>
+              <a:ext cx="600024" cy="1540367"/>
             </a:xfrm>
             <a:prstGeom prst="rect">
               <a:avLst/>
@@ -5694,8 +5020,8 @@
           </p:nvSpPr>
           <p:spPr>
             <a:xfrm rot="5400000">
-              <a:off x="11386683" y="-25243"/>
-              <a:ext cx="1307636" cy="321152"/>
+              <a:off x="9110336" y="2154143"/>
+              <a:ext cx="1359668" cy="343171"/>
             </a:xfrm>
             <a:prstGeom prst="rect">
               <a:avLst/>
@@ -5708,13 +5034,13 @@
             <a:lstStyle/>
             <a:p>
               <a:r>
-                <a:rPr lang="en-US" altLang="zh-TW" sz="1984" dirty="0">
+                <a:rPr lang="en-US" altLang="zh-TW" sz="1630" dirty="0">
                   <a:latin typeface="Times New Roman" panose="02020603050405020304" pitchFamily="18" charset="0"/>
                   <a:cs typeface="Times New Roman" panose="02020603050405020304" pitchFamily="18" charset="0"/>
                 </a:rPr>
                 <a:t>arbitrary units</a:t>
               </a:r>
-              <a:endParaRPr lang="zh-TW" altLang="en-US" sz="1984" dirty="0">
+              <a:endParaRPr lang="zh-TW" altLang="en-US" sz="1630" dirty="0">
                 <a:latin typeface="Times New Roman" panose="02020603050405020304" pitchFamily="18" charset="0"/>
                 <a:cs typeface="Times New Roman" panose="02020603050405020304" pitchFamily="18" charset="0"/>
               </a:endParaRPr>
@@ -5735,8 +5061,8 @@
           </p:nvSpPr>
           <p:spPr>
             <a:xfrm rot="5400000">
-              <a:off x="11386683" y="2920090"/>
-              <a:ext cx="1307636" cy="321152"/>
+              <a:off x="9110336" y="4386865"/>
+              <a:ext cx="1359668" cy="343171"/>
             </a:xfrm>
             <a:prstGeom prst="rect">
               <a:avLst/>
@@ -5749,13 +5075,13 @@
             <a:lstStyle/>
             <a:p>
               <a:r>
-                <a:rPr lang="en-US" altLang="zh-TW" sz="1984" dirty="0">
+                <a:rPr lang="en-US" altLang="zh-TW" sz="1630" dirty="0">
                   <a:latin typeface="Times New Roman" panose="02020603050405020304" pitchFamily="18" charset="0"/>
                   <a:cs typeface="Times New Roman" panose="02020603050405020304" pitchFamily="18" charset="0"/>
                 </a:rPr>
                 <a:t>arbitrary units</a:t>
               </a:r>
-              <a:endParaRPr lang="zh-TW" altLang="en-US" sz="1984" dirty="0">
+              <a:endParaRPr lang="zh-TW" altLang="en-US" sz="1630" dirty="0">
                 <a:latin typeface="Times New Roman" panose="02020603050405020304" pitchFamily="18" charset="0"/>
                 <a:cs typeface="Times New Roman" panose="02020603050405020304" pitchFamily="18" charset="0"/>
               </a:endParaRPr>
@@ -5777,7 +5103,7 @@
             <p:nvPr/>
           </p:nvPicPr>
           <p:blipFill rotWithShape="1">
-            <a:blip r:embed="rId15">
+            <a:blip r:embed="rId13">
               <a:clrChange>
                 <a:clrFrom>
                   <a:srgbClr val="FFFFFF"/>
@@ -5799,16 +5125,16 @@
           </p:blipFill>
           <p:spPr>
             <a:xfrm>
-              <a:off x="11360270" y="-817167"/>
-              <a:ext cx="601742" cy="2032000"/>
+              <a:off x="9274518" y="1603681"/>
+              <a:ext cx="456153" cy="1540367"/>
             </a:xfrm>
             <a:prstGeom prst="rect">
               <a:avLst/>
             </a:prstGeom>
           </p:spPr>
         </p:pic>
-        <mc:AlternateContent xmlns:mc="http://schemas.openxmlformats.org/markup-compatibility/2006" xmlns:a14="http://schemas.microsoft.com/office/drawing/2010/main">
-          <mc:Choice Requires="a14">
+        <mc:AlternateContent xmlns:mc="http://schemas.openxmlformats.org/markup-compatibility/2006">
+          <mc:Choice xmlns:a14="http://schemas.microsoft.com/office/drawing/2010/main" Requires="a14">
             <p:sp>
               <p:nvSpPr>
                 <p:cNvPr id="43" name="矩形 42">
@@ -5823,8 +5149,8 @@
               </p:nvSpPr>
               <p:spPr>
                 <a:xfrm>
-                  <a:off x="-413229" y="921001"/>
-                  <a:ext cx="1455165" cy="447678"/>
+                  <a:off x="-28261" y="2921307"/>
+                  <a:ext cx="1639295" cy="506677"/>
                 </a:xfrm>
                 <a:prstGeom prst="rect">
                   <a:avLst/>
@@ -5846,7 +5172,7 @@
                         <m:sSup>
                           <m:sSupPr>
                             <m:ctrlPr>
-                              <a:rPr lang="en-US" altLang="zh-TW" sz="2231" i="1">
+                              <a:rPr lang="en-US" altLang="zh-TW" sz="2000" i="1">
                                 <a:latin typeface="Cambria Math" panose="02040503050406030204" pitchFamily="18" charset="0"/>
                               </a:rPr>
                             </m:ctrlPr>
@@ -5857,7 +5183,7 @@
                                 <m:begChr m:val="|"/>
                                 <m:endChr m:val="|"/>
                                 <m:ctrlPr>
-                                  <a:rPr lang="en-US" altLang="zh-TW" sz="2231" i="1">
+                                  <a:rPr lang="en-US" altLang="zh-TW" sz="2000" i="1">
                                     <a:latin typeface="Cambria Math" panose="02040503050406030204" pitchFamily="18" charset="0"/>
                                   </a:rPr>
                                 </m:ctrlPr>
@@ -5866,14 +5192,14 @@
                                 <m:sSub>
                                   <m:sSubPr>
                                     <m:ctrlPr>
-                                      <a:rPr lang="en-US" altLang="zh-TW" sz="2231" i="1">
+                                      <a:rPr lang="en-US" altLang="zh-TW" sz="2000" i="1">
                                         <a:latin typeface="Cambria Math" panose="02040503050406030204" pitchFamily="18" charset="0"/>
                                       </a:rPr>
                                     </m:ctrlPr>
                                   </m:sSubPr>
                                   <m:e>
                                     <m:r>
-                                      <a:rPr lang="en-US" altLang="zh-TW" sz="2231" i="1">
+                                      <a:rPr lang="en-US" altLang="zh-TW" sz="2000" i="1">
                                         <a:latin typeface="Cambria Math" panose="02040503050406030204" pitchFamily="18" charset="0"/>
                                       </a:rPr>
                                       <m:t>𝑢</m:t>
@@ -5881,19 +5207,19 @@
                                   </m:e>
                                   <m:sub>
                                     <m:r>
-                                      <a:rPr lang="en-US" altLang="zh-TW" sz="2231" i="1">
+                                      <a:rPr lang="en-US" altLang="zh-TW" sz="2000" i="1">
                                         <a:latin typeface="Cambria Math" panose="02040503050406030204" pitchFamily="18" charset="0"/>
                                       </a:rPr>
                                       <m:t>ℓ,</m:t>
                                     </m:r>
                                     <m:r>
-                                      <a:rPr lang="en-US" altLang="zh-TW" sz="2231" i="1">
+                                      <a:rPr lang="en-US" altLang="zh-TW" sz="2000" i="1">
                                         <a:latin typeface="Cambria Math" panose="02040503050406030204" pitchFamily="18" charset="0"/>
                                       </a:rPr>
                                       <m:t>𝑝</m:t>
                                     </m:r>
                                     <m:r>
-                                      <a:rPr lang="en-US" altLang="zh-TW" sz="2231" i="1">
+                                      <a:rPr lang="en-US" altLang="zh-TW" sz="2000" i="1">
                                         <a:latin typeface="Cambria Math" panose="02040503050406030204" pitchFamily="18" charset="0"/>
                                       </a:rPr>
                                       <m:t>=0</m:t>
@@ -5903,7 +5229,7 @@
                                 <m:d>
                                   <m:dPr>
                                     <m:ctrlPr>
-                                      <a:rPr lang="en-US" altLang="zh-TW" sz="2231" i="1">
+                                      <a:rPr lang="en-US" altLang="zh-TW" sz="2000" i="1">
                                         <a:latin typeface="Cambria Math" panose="02040503050406030204" pitchFamily="18" charset="0"/>
                                       </a:rPr>
                                     </m:ctrlPr>
@@ -5912,14 +5238,14 @@
                                     <m:sSub>
                                       <m:sSubPr>
                                         <m:ctrlPr>
-                                          <a:rPr lang="en-US" altLang="zh-TW" sz="2231" b="1" i="1">
+                                          <a:rPr lang="en-US" altLang="zh-TW" sz="2000" b="1" i="1">
                                             <a:latin typeface="Cambria Math" panose="02040503050406030204" pitchFamily="18" charset="0"/>
                                           </a:rPr>
                                         </m:ctrlPr>
                                       </m:sSubPr>
                                       <m:e>
                                         <m:r>
-                                          <a:rPr lang="en-US" altLang="zh-TW" sz="2231" b="1" i="1">
+                                          <a:rPr lang="en-US" altLang="zh-TW" sz="2000" b="1" i="1">
                                             <a:latin typeface="Cambria Math" panose="02040503050406030204" pitchFamily="18" charset="0"/>
                                           </a:rPr>
                                           <m:t>𝒓</m:t>
@@ -5927,7 +5253,7 @@
                                       </m:e>
                                       <m:sub>
                                         <m:r>
-                                          <a:rPr lang="en-US" altLang="zh-TW" sz="2231" i="1">
+                                          <a:rPr lang="en-US" altLang="zh-TW" sz="2000" i="1">
                                             <a:latin typeface="Cambria Math" panose="02040503050406030204" pitchFamily="18" charset="0"/>
                                           </a:rPr>
                                           <m:t>∥</m:t>
@@ -5941,7 +5267,7 @@
                           </m:e>
                           <m:sup>
                             <m:r>
-                              <a:rPr lang="en-US" altLang="zh-TW" sz="2231" i="1">
+                              <a:rPr lang="en-US" altLang="zh-TW" sz="2000" i="1">
                                 <a:latin typeface="Cambria Math" panose="02040503050406030204" pitchFamily="18" charset="0"/>
                               </a:rPr>
                               <m:t>2</m:t>
@@ -5951,7 +5277,7 @@
                       </m:oMath>
                     </m:oMathPara>
                   </a14:m>
-                  <a:endParaRPr lang="zh-TW" altLang="en-US" sz="2231" dirty="0">
+                  <a:endParaRPr lang="zh-TW" altLang="en-US" sz="2000" dirty="0">
                     <a:latin typeface="Times New Roman" panose="02020603050405020304" pitchFamily="18" charset="0"/>
                     <a:cs typeface="Times New Roman" panose="02020603050405020304" pitchFamily="18" charset="0"/>
                   </a:endParaRPr>
@@ -5959,7 +5285,7 @@
               </p:txBody>
             </p:sp>
           </mc:Choice>
-          <mc:Fallback xmlns="">
+          <mc:Fallback>
             <p:sp>
               <p:nvSpPr>
                 <p:cNvPr id="43" name="矩形 42">
@@ -5976,14 +5302,14 @@
               </p:nvSpPr>
               <p:spPr>
                 <a:xfrm>
-                  <a:off x="-413229" y="921001"/>
-                  <a:ext cx="1455165" cy="447678"/>
+                  <a:off x="-28261" y="2921307"/>
+                  <a:ext cx="1639295" cy="506677"/>
                 </a:xfrm>
                 <a:prstGeom prst="rect">
                   <a:avLst/>
                 </a:prstGeom>
                 <a:blipFill>
-                  <a:blip r:embed="rId28"/>
+                  <a:blip r:embed="rId23"/>
                   <a:stretch>
                     <a:fillRect/>
                   </a:stretch>
@@ -6004,12 +5330,743 @@
             </p:sp>
           </mc:Fallback>
         </mc:AlternateContent>
+        <mc:AlternateContent xmlns:mc="http://schemas.openxmlformats.org/markup-compatibility/2006">
+          <mc:Choice xmlns:a14="http://schemas.microsoft.com/office/drawing/2010/main" Requires="a14">
+            <p:sp>
+              <p:nvSpPr>
+                <p:cNvPr id="49" name="矩形 48">
+                  <a:extLst>
+                    <a:ext uri="{FF2B5EF4-FFF2-40B4-BE49-F238E27FC236}">
+                      <a16:creationId xmlns:a16="http://schemas.microsoft.com/office/drawing/2014/main" id="{017FDA99-C49A-49EA-B20A-89AE98B6A3F3}"/>
+                    </a:ext>
+                  </a:extLst>
+                </p:cNvPr>
+                <p:cNvSpPr/>
+                <p:nvPr/>
+              </p:nvSpPr>
+              <p:spPr>
+                <a:xfrm>
+                  <a:off x="2969131" y="4804998"/>
+                  <a:ext cx="688009" cy="343171"/>
+                </a:xfrm>
+                <a:prstGeom prst="rect">
+                  <a:avLst/>
+                </a:prstGeom>
+              </p:spPr>
+              <p:txBody>
+                <a:bodyPr wrap="none">
+                  <a:spAutoFit/>
+                </a:bodyPr>
+                <a:lstStyle/>
+                <a:p>
+                  <a:pPr/>
+                  <a14:m>
+                    <m:oMathPara xmlns:m="http://schemas.openxmlformats.org/officeDocument/2006/math">
+                      <m:oMathParaPr>
+                        <m:jc m:val="centerGroup"/>
+                      </m:oMathParaPr>
+                      <m:oMath xmlns:m="http://schemas.openxmlformats.org/officeDocument/2006/math">
+                        <m:r>
+                          <a:rPr lang="en-US" altLang="zh-TW" sz="1630" i="1">
+                            <a:latin typeface="Cambria Math" panose="02040503050406030204" pitchFamily="18" charset="0"/>
+                          </a:rPr>
+                          <m:t>1 </m:t>
+                        </m:r>
+                        <m:r>
+                          <m:rPr>
+                            <m:sty m:val="p"/>
+                          </m:rPr>
+                          <a:rPr lang="en-US" altLang="zh-TW" sz="1630">
+                            <a:latin typeface="Cambria Math" panose="02040503050406030204" pitchFamily="18" charset="0"/>
+                          </a:rPr>
+                          <m:t>um</m:t>
+                        </m:r>
+                      </m:oMath>
+                    </m:oMathPara>
+                  </a14:m>
+                  <a:endParaRPr lang="zh-TW" altLang="en-US" sz="1630" dirty="0">
+                    <a:latin typeface="Times New Roman" panose="02020603050405020304" pitchFamily="18" charset="0"/>
+                    <a:cs typeface="Times New Roman" panose="02020603050405020304" pitchFamily="18" charset="0"/>
+                  </a:endParaRPr>
+                </a:p>
+              </p:txBody>
+            </p:sp>
+          </mc:Choice>
+          <mc:Fallback>
+            <p:sp>
+              <p:nvSpPr>
+                <p:cNvPr id="49" name="矩形 48">
+                  <a:extLst>
+                    <a:ext uri="{FF2B5EF4-FFF2-40B4-BE49-F238E27FC236}">
+                      <a16:creationId xmlns:a16="http://schemas.microsoft.com/office/drawing/2014/main" id="{017FDA99-C49A-49EA-B20A-89AE98B6A3F3}"/>
+                    </a:ext>
+                  </a:extLst>
+                </p:cNvPr>
+                <p:cNvSpPr>
+                  <a:spLocks noRot="1" noChangeAspect="1" noMove="1" noResize="1" noEditPoints="1" noAdjustHandles="1" noChangeArrowheads="1" noChangeShapeType="1" noTextEdit="1"/>
+                </p:cNvSpPr>
+                <p:nvPr/>
+              </p:nvSpPr>
+              <p:spPr>
+                <a:xfrm>
+                  <a:off x="2969131" y="4804998"/>
+                  <a:ext cx="688009" cy="343171"/>
+                </a:xfrm>
+                <a:prstGeom prst="rect">
+                  <a:avLst/>
+                </a:prstGeom>
+                <a:blipFill>
+                  <a:blip r:embed="rId24"/>
+                  <a:stretch>
+                    <a:fillRect/>
+                  </a:stretch>
+                </a:blipFill>
+              </p:spPr>
+              <p:txBody>
+                <a:bodyPr/>
+                <a:lstStyle/>
+                <a:p>
+                  <a:r>
+                    <a:rPr lang="zh-TW" altLang="en-US">
+                      <a:noFill/>
+                    </a:rPr>
+                    <a:t> </a:t>
+                  </a:r>
+                </a:p>
+              </p:txBody>
+            </p:sp>
+          </mc:Fallback>
+        </mc:AlternateContent>
+        <mc:AlternateContent xmlns:mc="http://schemas.openxmlformats.org/markup-compatibility/2006">
+          <mc:Choice xmlns:a14="http://schemas.microsoft.com/office/drawing/2010/main" Requires="a14">
+            <p:sp>
+              <p:nvSpPr>
+                <p:cNvPr id="64" name="矩形 63">
+                  <a:extLst>
+                    <a:ext uri="{FF2B5EF4-FFF2-40B4-BE49-F238E27FC236}">
+                      <a16:creationId xmlns:a16="http://schemas.microsoft.com/office/drawing/2014/main" id="{22366571-D267-4A4E-8455-280441D87E57}"/>
+                    </a:ext>
+                  </a:extLst>
+                </p:cNvPr>
+                <p:cNvSpPr/>
+                <p:nvPr/>
+              </p:nvSpPr>
+              <p:spPr>
+                <a:xfrm>
+                  <a:off x="1714341" y="2189458"/>
+                  <a:ext cx="744243" cy="343171"/>
+                </a:xfrm>
+                <a:prstGeom prst="rect">
+                  <a:avLst/>
+                </a:prstGeom>
+              </p:spPr>
+              <p:txBody>
+                <a:bodyPr wrap="none">
+                  <a:spAutoFit/>
+                </a:bodyPr>
+                <a:lstStyle/>
+                <a:p>
+                  <a:pPr/>
+                  <a14:m>
+                    <m:oMathPara xmlns:m="http://schemas.openxmlformats.org/officeDocument/2006/math">
+                      <m:oMathParaPr>
+                        <m:jc m:val="centerGroup"/>
+                      </m:oMathParaPr>
+                      <m:oMath xmlns:m="http://schemas.openxmlformats.org/officeDocument/2006/math">
+                        <m:r>
+                          <a:rPr lang="en-US" altLang="zh-TW" sz="1630" i="1">
+                            <a:latin typeface="Cambria Math" panose="02040503050406030204" pitchFamily="18" charset="0"/>
+                          </a:rPr>
+                          <m:t>𝑝</m:t>
+                        </m:r>
+                        <m:r>
+                          <a:rPr lang="en-US" altLang="zh-TW" sz="1630" i="1">
+                            <a:latin typeface="Cambria Math" panose="02040503050406030204" pitchFamily="18" charset="0"/>
+                          </a:rPr>
+                          <m:t>=0</m:t>
+                        </m:r>
+                      </m:oMath>
+                    </m:oMathPara>
+                  </a14:m>
+                  <a:endParaRPr lang="zh-TW" altLang="en-US" sz="1630" dirty="0">
+                    <a:latin typeface="Times New Roman" panose="02020603050405020304" pitchFamily="18" charset="0"/>
+                    <a:cs typeface="Times New Roman" panose="02020603050405020304" pitchFamily="18" charset="0"/>
+                  </a:endParaRPr>
+                </a:p>
+              </p:txBody>
+            </p:sp>
+          </mc:Choice>
+          <mc:Fallback>
+            <p:sp>
+              <p:nvSpPr>
+                <p:cNvPr id="64" name="矩形 63">
+                  <a:extLst>
+                    <a:ext uri="{FF2B5EF4-FFF2-40B4-BE49-F238E27FC236}">
+                      <a16:creationId xmlns:a16="http://schemas.microsoft.com/office/drawing/2014/main" id="{22366571-D267-4A4E-8455-280441D87E57}"/>
+                    </a:ext>
+                  </a:extLst>
+                </p:cNvPr>
+                <p:cNvSpPr>
+                  <a:spLocks noRot="1" noChangeAspect="1" noMove="1" noResize="1" noEditPoints="1" noAdjustHandles="1" noChangeArrowheads="1" noChangeShapeType="1" noTextEdit="1"/>
+                </p:cNvSpPr>
+                <p:nvPr/>
+              </p:nvSpPr>
+              <p:spPr>
+                <a:xfrm>
+                  <a:off x="1714341" y="2189458"/>
+                  <a:ext cx="744243" cy="343171"/>
+                </a:xfrm>
+                <a:prstGeom prst="rect">
+                  <a:avLst/>
+                </a:prstGeom>
+                <a:blipFill>
+                  <a:blip r:embed="rId25"/>
+                  <a:stretch>
+                    <a:fillRect b="-7143"/>
+                  </a:stretch>
+                </a:blipFill>
+              </p:spPr>
+              <p:txBody>
+                <a:bodyPr/>
+                <a:lstStyle/>
+                <a:p>
+                  <a:r>
+                    <a:rPr lang="zh-TW" altLang="en-US">
+                      <a:noFill/>
+                    </a:rPr>
+                    <a:t> </a:t>
+                  </a:r>
+                </a:p>
+              </p:txBody>
+            </p:sp>
+          </mc:Fallback>
+        </mc:AlternateContent>
+        <mc:AlternateContent xmlns:mc="http://schemas.openxmlformats.org/markup-compatibility/2006">
+          <mc:Choice xmlns:a14="http://schemas.microsoft.com/office/drawing/2010/main" Requires="a14">
+            <p:sp>
+              <p:nvSpPr>
+                <p:cNvPr id="66" name="矩形 65">
+                  <a:extLst>
+                    <a:ext uri="{FF2B5EF4-FFF2-40B4-BE49-F238E27FC236}">
+                      <a16:creationId xmlns:a16="http://schemas.microsoft.com/office/drawing/2014/main" id="{80E0EFB3-F881-4F03-9E3C-0009C6DA8E6F}"/>
+                    </a:ext>
+                  </a:extLst>
+                </p:cNvPr>
+                <p:cNvSpPr/>
+                <p:nvPr/>
+              </p:nvSpPr>
+              <p:spPr>
+                <a:xfrm>
+                  <a:off x="3044652" y="2189458"/>
+                  <a:ext cx="744243" cy="343171"/>
+                </a:xfrm>
+                <a:prstGeom prst="rect">
+                  <a:avLst/>
+                </a:prstGeom>
+              </p:spPr>
+              <p:txBody>
+                <a:bodyPr wrap="none">
+                  <a:spAutoFit/>
+                </a:bodyPr>
+                <a:lstStyle/>
+                <a:p>
+                  <a:pPr/>
+                  <a14:m>
+                    <m:oMathPara xmlns:m="http://schemas.openxmlformats.org/officeDocument/2006/math">
+                      <m:oMathParaPr>
+                        <m:jc m:val="centerGroup"/>
+                      </m:oMathParaPr>
+                      <m:oMath xmlns:m="http://schemas.openxmlformats.org/officeDocument/2006/math">
+                        <m:r>
+                          <a:rPr lang="en-US" altLang="zh-TW" sz="1630" i="1">
+                            <a:latin typeface="Cambria Math" panose="02040503050406030204" pitchFamily="18" charset="0"/>
+                          </a:rPr>
+                          <m:t>𝑝</m:t>
+                        </m:r>
+                        <m:r>
+                          <a:rPr lang="en-US" altLang="zh-TW" sz="1630" i="1">
+                            <a:latin typeface="Cambria Math" panose="02040503050406030204" pitchFamily="18" charset="0"/>
+                          </a:rPr>
+                          <m:t>=1</m:t>
+                        </m:r>
+                      </m:oMath>
+                    </m:oMathPara>
+                  </a14:m>
+                  <a:endParaRPr lang="zh-TW" altLang="en-US" sz="1630" dirty="0">
+                    <a:latin typeface="Times New Roman" panose="02020603050405020304" pitchFamily="18" charset="0"/>
+                    <a:cs typeface="Times New Roman" panose="02020603050405020304" pitchFamily="18" charset="0"/>
+                  </a:endParaRPr>
+                </a:p>
+              </p:txBody>
+            </p:sp>
+          </mc:Choice>
+          <mc:Fallback>
+            <p:sp>
+              <p:nvSpPr>
+                <p:cNvPr id="66" name="矩形 65">
+                  <a:extLst>
+                    <a:ext uri="{FF2B5EF4-FFF2-40B4-BE49-F238E27FC236}">
+                      <a16:creationId xmlns:a16="http://schemas.microsoft.com/office/drawing/2014/main" id="{80E0EFB3-F881-4F03-9E3C-0009C6DA8E6F}"/>
+                    </a:ext>
+                  </a:extLst>
+                </p:cNvPr>
+                <p:cNvSpPr>
+                  <a:spLocks noRot="1" noChangeAspect="1" noMove="1" noResize="1" noEditPoints="1" noAdjustHandles="1" noChangeArrowheads="1" noChangeShapeType="1" noTextEdit="1"/>
+                </p:cNvSpPr>
+                <p:nvPr/>
+              </p:nvSpPr>
+              <p:spPr>
+                <a:xfrm>
+                  <a:off x="3044652" y="2189458"/>
+                  <a:ext cx="744243" cy="343171"/>
+                </a:xfrm>
+                <a:prstGeom prst="rect">
+                  <a:avLst/>
+                </a:prstGeom>
+                <a:blipFill>
+                  <a:blip r:embed="rId26"/>
+                  <a:stretch>
+                    <a:fillRect b="-7143"/>
+                  </a:stretch>
+                </a:blipFill>
+              </p:spPr>
+              <p:txBody>
+                <a:bodyPr/>
+                <a:lstStyle/>
+                <a:p>
+                  <a:r>
+                    <a:rPr lang="zh-TW" altLang="en-US">
+                      <a:noFill/>
+                    </a:rPr>
+                    <a:t> </a:t>
+                  </a:r>
+                </a:p>
+              </p:txBody>
+            </p:sp>
+          </mc:Fallback>
+        </mc:AlternateContent>
+        <mc:AlternateContent xmlns:mc="http://schemas.openxmlformats.org/markup-compatibility/2006">
+          <mc:Choice xmlns:a14="http://schemas.microsoft.com/office/drawing/2010/main" Requires="a14">
+            <p:sp>
+              <p:nvSpPr>
+                <p:cNvPr id="67" name="矩形 66">
+                  <a:extLst>
+                    <a:ext uri="{FF2B5EF4-FFF2-40B4-BE49-F238E27FC236}">
+                      <a16:creationId xmlns:a16="http://schemas.microsoft.com/office/drawing/2014/main" id="{51FFC70D-FFDA-4575-A614-B952968DC375}"/>
+                    </a:ext>
+                  </a:extLst>
+                </p:cNvPr>
+                <p:cNvSpPr/>
+                <p:nvPr/>
+              </p:nvSpPr>
+              <p:spPr>
+                <a:xfrm>
+                  <a:off x="4374963" y="2189458"/>
+                  <a:ext cx="744243" cy="343171"/>
+                </a:xfrm>
+                <a:prstGeom prst="rect">
+                  <a:avLst/>
+                </a:prstGeom>
+              </p:spPr>
+              <p:txBody>
+                <a:bodyPr wrap="none">
+                  <a:spAutoFit/>
+                </a:bodyPr>
+                <a:lstStyle/>
+                <a:p>
+                  <a:pPr/>
+                  <a14:m>
+                    <m:oMathPara xmlns:m="http://schemas.openxmlformats.org/officeDocument/2006/math">
+                      <m:oMathParaPr>
+                        <m:jc m:val="centerGroup"/>
+                      </m:oMathParaPr>
+                      <m:oMath xmlns:m="http://schemas.openxmlformats.org/officeDocument/2006/math">
+                        <m:r>
+                          <a:rPr lang="en-US" altLang="zh-TW" sz="1630" i="1">
+                            <a:latin typeface="Cambria Math" panose="02040503050406030204" pitchFamily="18" charset="0"/>
+                          </a:rPr>
+                          <m:t>𝑝</m:t>
+                        </m:r>
+                        <m:r>
+                          <a:rPr lang="en-US" altLang="zh-TW" sz="1630" i="1">
+                            <a:latin typeface="Cambria Math" panose="02040503050406030204" pitchFamily="18" charset="0"/>
+                          </a:rPr>
+                          <m:t>=2</m:t>
+                        </m:r>
+                      </m:oMath>
+                    </m:oMathPara>
+                  </a14:m>
+                  <a:endParaRPr lang="zh-TW" altLang="en-US" sz="1630" dirty="0">
+                    <a:latin typeface="Times New Roman" panose="02020603050405020304" pitchFamily="18" charset="0"/>
+                    <a:cs typeface="Times New Roman" panose="02020603050405020304" pitchFamily="18" charset="0"/>
+                  </a:endParaRPr>
+                </a:p>
+              </p:txBody>
+            </p:sp>
+          </mc:Choice>
+          <mc:Fallback>
+            <p:sp>
+              <p:nvSpPr>
+                <p:cNvPr id="67" name="矩形 66">
+                  <a:extLst>
+                    <a:ext uri="{FF2B5EF4-FFF2-40B4-BE49-F238E27FC236}">
+                      <a16:creationId xmlns:a16="http://schemas.microsoft.com/office/drawing/2014/main" id="{51FFC70D-FFDA-4575-A614-B952968DC375}"/>
+                    </a:ext>
+                  </a:extLst>
+                </p:cNvPr>
+                <p:cNvSpPr>
+                  <a:spLocks noRot="1" noChangeAspect="1" noMove="1" noResize="1" noEditPoints="1" noAdjustHandles="1" noChangeArrowheads="1" noChangeShapeType="1" noTextEdit="1"/>
+                </p:cNvSpPr>
+                <p:nvPr/>
+              </p:nvSpPr>
+              <p:spPr>
+                <a:xfrm>
+                  <a:off x="4374963" y="2189458"/>
+                  <a:ext cx="744243" cy="343171"/>
+                </a:xfrm>
+                <a:prstGeom prst="rect">
+                  <a:avLst/>
+                </a:prstGeom>
+                <a:blipFill>
+                  <a:blip r:embed="rId27"/>
+                  <a:stretch>
+                    <a:fillRect b="-7143"/>
+                  </a:stretch>
+                </a:blipFill>
+              </p:spPr>
+              <p:txBody>
+                <a:bodyPr/>
+                <a:lstStyle/>
+                <a:p>
+                  <a:r>
+                    <a:rPr lang="zh-TW" altLang="en-US">
+                      <a:noFill/>
+                    </a:rPr>
+                    <a:t> </a:t>
+                  </a:r>
+                </a:p>
+              </p:txBody>
+            </p:sp>
+          </mc:Fallback>
+        </mc:AlternateContent>
+        <mc:AlternateContent xmlns:mc="http://schemas.openxmlformats.org/markup-compatibility/2006">
+          <mc:Choice xmlns:a14="http://schemas.microsoft.com/office/drawing/2010/main" Requires="a14">
+            <p:sp>
+              <p:nvSpPr>
+                <p:cNvPr id="68" name="矩形 67">
+                  <a:extLst>
+                    <a:ext uri="{FF2B5EF4-FFF2-40B4-BE49-F238E27FC236}">
+                      <a16:creationId xmlns:a16="http://schemas.microsoft.com/office/drawing/2014/main" id="{FCC1FD34-DEE6-48AB-A294-7F7DFEFB7842}"/>
+                    </a:ext>
+                  </a:extLst>
+                </p:cNvPr>
+                <p:cNvSpPr/>
+                <p:nvPr/>
+              </p:nvSpPr>
+              <p:spPr>
+                <a:xfrm>
+                  <a:off x="5705273" y="2189458"/>
+                  <a:ext cx="744243" cy="343171"/>
+                </a:xfrm>
+                <a:prstGeom prst="rect">
+                  <a:avLst/>
+                </a:prstGeom>
+              </p:spPr>
+              <p:txBody>
+                <a:bodyPr wrap="none">
+                  <a:spAutoFit/>
+                </a:bodyPr>
+                <a:lstStyle/>
+                <a:p>
+                  <a:pPr/>
+                  <a14:m>
+                    <m:oMathPara xmlns:m="http://schemas.openxmlformats.org/officeDocument/2006/math">
+                      <m:oMathParaPr>
+                        <m:jc m:val="centerGroup"/>
+                      </m:oMathParaPr>
+                      <m:oMath xmlns:m="http://schemas.openxmlformats.org/officeDocument/2006/math">
+                        <m:r>
+                          <a:rPr lang="en-US" altLang="zh-TW" sz="1630" i="1">
+                            <a:latin typeface="Cambria Math" panose="02040503050406030204" pitchFamily="18" charset="0"/>
+                          </a:rPr>
+                          <m:t>𝑝</m:t>
+                        </m:r>
+                        <m:r>
+                          <a:rPr lang="en-US" altLang="zh-TW" sz="1630" i="1">
+                            <a:latin typeface="Cambria Math" panose="02040503050406030204" pitchFamily="18" charset="0"/>
+                          </a:rPr>
+                          <m:t>=3</m:t>
+                        </m:r>
+                      </m:oMath>
+                    </m:oMathPara>
+                  </a14:m>
+                  <a:endParaRPr lang="zh-TW" altLang="en-US" sz="1630" dirty="0">
+                    <a:latin typeface="Times New Roman" panose="02020603050405020304" pitchFamily="18" charset="0"/>
+                    <a:cs typeface="Times New Roman" panose="02020603050405020304" pitchFamily="18" charset="0"/>
+                  </a:endParaRPr>
+                </a:p>
+              </p:txBody>
+            </p:sp>
+          </mc:Choice>
+          <mc:Fallback>
+            <p:sp>
+              <p:nvSpPr>
+                <p:cNvPr id="68" name="矩形 67">
+                  <a:extLst>
+                    <a:ext uri="{FF2B5EF4-FFF2-40B4-BE49-F238E27FC236}">
+                      <a16:creationId xmlns:a16="http://schemas.microsoft.com/office/drawing/2014/main" id="{FCC1FD34-DEE6-48AB-A294-7F7DFEFB7842}"/>
+                    </a:ext>
+                  </a:extLst>
+                </p:cNvPr>
+                <p:cNvSpPr>
+                  <a:spLocks noRot="1" noChangeAspect="1" noMove="1" noResize="1" noEditPoints="1" noAdjustHandles="1" noChangeArrowheads="1" noChangeShapeType="1" noTextEdit="1"/>
+                </p:cNvSpPr>
+                <p:nvPr/>
+              </p:nvSpPr>
+              <p:spPr>
+                <a:xfrm>
+                  <a:off x="5705273" y="2189458"/>
+                  <a:ext cx="744243" cy="343171"/>
+                </a:xfrm>
+                <a:prstGeom prst="rect">
+                  <a:avLst/>
+                </a:prstGeom>
+                <a:blipFill>
+                  <a:blip r:embed="rId28"/>
+                  <a:stretch>
+                    <a:fillRect b="-7143"/>
+                  </a:stretch>
+                </a:blipFill>
+              </p:spPr>
+              <p:txBody>
+                <a:bodyPr/>
+                <a:lstStyle/>
+                <a:p>
+                  <a:r>
+                    <a:rPr lang="zh-TW" altLang="en-US">
+                      <a:noFill/>
+                    </a:rPr>
+                    <a:t> </a:t>
+                  </a:r>
+                </a:p>
+              </p:txBody>
+            </p:sp>
+          </mc:Fallback>
+        </mc:AlternateContent>
+        <mc:AlternateContent xmlns:mc="http://schemas.openxmlformats.org/markup-compatibility/2006">
+          <mc:Choice xmlns:a14="http://schemas.microsoft.com/office/drawing/2010/main" Requires="a14">
+            <p:sp>
+              <p:nvSpPr>
+                <p:cNvPr id="69" name="矩形 68">
+                  <a:extLst>
+                    <a:ext uri="{FF2B5EF4-FFF2-40B4-BE49-F238E27FC236}">
+                      <a16:creationId xmlns:a16="http://schemas.microsoft.com/office/drawing/2014/main" id="{25B3698F-4959-4B2F-8395-34499219BCC3}"/>
+                    </a:ext>
+                  </a:extLst>
+                </p:cNvPr>
+                <p:cNvSpPr/>
+                <p:nvPr/>
+              </p:nvSpPr>
+              <p:spPr>
+                <a:xfrm>
+                  <a:off x="7035584" y="2189458"/>
+                  <a:ext cx="744243" cy="343171"/>
+                </a:xfrm>
+                <a:prstGeom prst="rect">
+                  <a:avLst/>
+                </a:prstGeom>
+              </p:spPr>
+              <p:txBody>
+                <a:bodyPr wrap="none">
+                  <a:spAutoFit/>
+                </a:bodyPr>
+                <a:lstStyle/>
+                <a:p>
+                  <a:pPr/>
+                  <a14:m>
+                    <m:oMathPara xmlns:m="http://schemas.openxmlformats.org/officeDocument/2006/math">
+                      <m:oMathParaPr>
+                        <m:jc m:val="centerGroup"/>
+                      </m:oMathParaPr>
+                      <m:oMath xmlns:m="http://schemas.openxmlformats.org/officeDocument/2006/math">
+                        <m:r>
+                          <a:rPr lang="en-US" altLang="zh-TW" sz="1630" i="1">
+                            <a:latin typeface="Cambria Math" panose="02040503050406030204" pitchFamily="18" charset="0"/>
+                          </a:rPr>
+                          <m:t>𝑝</m:t>
+                        </m:r>
+                        <m:r>
+                          <a:rPr lang="en-US" altLang="zh-TW" sz="1630" i="1">
+                            <a:latin typeface="Cambria Math" panose="02040503050406030204" pitchFamily="18" charset="0"/>
+                          </a:rPr>
+                          <m:t>=4</m:t>
+                        </m:r>
+                      </m:oMath>
+                    </m:oMathPara>
+                  </a14:m>
+                  <a:endParaRPr lang="zh-TW" altLang="en-US" sz="1630" dirty="0">
+                    <a:latin typeface="Times New Roman" panose="02020603050405020304" pitchFamily="18" charset="0"/>
+                    <a:cs typeface="Times New Roman" panose="02020603050405020304" pitchFamily="18" charset="0"/>
+                  </a:endParaRPr>
+                </a:p>
+              </p:txBody>
+            </p:sp>
+          </mc:Choice>
+          <mc:Fallback>
+            <p:sp>
+              <p:nvSpPr>
+                <p:cNvPr id="69" name="矩形 68">
+                  <a:extLst>
+                    <a:ext uri="{FF2B5EF4-FFF2-40B4-BE49-F238E27FC236}">
+                      <a16:creationId xmlns:a16="http://schemas.microsoft.com/office/drawing/2014/main" id="{25B3698F-4959-4B2F-8395-34499219BCC3}"/>
+                    </a:ext>
+                  </a:extLst>
+                </p:cNvPr>
+                <p:cNvSpPr>
+                  <a:spLocks noRot="1" noChangeAspect="1" noMove="1" noResize="1" noEditPoints="1" noAdjustHandles="1" noChangeArrowheads="1" noChangeShapeType="1" noTextEdit="1"/>
+                </p:cNvSpPr>
+                <p:nvPr/>
+              </p:nvSpPr>
+              <p:spPr>
+                <a:xfrm>
+                  <a:off x="7035584" y="2189458"/>
+                  <a:ext cx="744243" cy="343171"/>
+                </a:xfrm>
+                <a:prstGeom prst="rect">
+                  <a:avLst/>
+                </a:prstGeom>
+                <a:blipFill>
+                  <a:blip r:embed="rId29"/>
+                  <a:stretch>
+                    <a:fillRect b="-7143"/>
+                  </a:stretch>
+                </a:blipFill>
+              </p:spPr>
+              <p:txBody>
+                <a:bodyPr/>
+                <a:lstStyle/>
+                <a:p>
+                  <a:r>
+                    <a:rPr lang="zh-TW" altLang="en-US">
+                      <a:noFill/>
+                    </a:rPr>
+                    <a:t> </a:t>
+                  </a:r>
+                </a:p>
+              </p:txBody>
+            </p:sp>
+          </mc:Fallback>
+        </mc:AlternateContent>
+        <mc:AlternateContent xmlns:mc="http://schemas.openxmlformats.org/markup-compatibility/2006">
+          <mc:Choice xmlns:a14="http://schemas.microsoft.com/office/drawing/2010/main" Requires="a14">
+            <p:sp>
+              <p:nvSpPr>
+                <p:cNvPr id="70" name="矩形 69">
+                  <a:extLst>
+                    <a:ext uri="{FF2B5EF4-FFF2-40B4-BE49-F238E27FC236}">
+                      <a16:creationId xmlns:a16="http://schemas.microsoft.com/office/drawing/2014/main" id="{F353A4B0-F2A1-4538-B322-C7E20F44CBE6}"/>
+                    </a:ext>
+                  </a:extLst>
+                </p:cNvPr>
+                <p:cNvSpPr/>
+                <p:nvPr/>
+              </p:nvSpPr>
+              <p:spPr>
+                <a:xfrm>
+                  <a:off x="8304510" y="2189458"/>
+                  <a:ext cx="744243" cy="343171"/>
+                </a:xfrm>
+                <a:prstGeom prst="rect">
+                  <a:avLst/>
+                </a:prstGeom>
+              </p:spPr>
+              <p:txBody>
+                <a:bodyPr wrap="none">
+                  <a:spAutoFit/>
+                </a:bodyPr>
+                <a:lstStyle/>
+                <a:p>
+                  <a:pPr/>
+                  <a14:m>
+                    <m:oMathPara xmlns:m="http://schemas.openxmlformats.org/officeDocument/2006/math">
+                      <m:oMathParaPr>
+                        <m:jc m:val="centerGroup"/>
+                      </m:oMathParaPr>
+                      <m:oMath xmlns:m="http://schemas.openxmlformats.org/officeDocument/2006/math">
+                        <m:r>
+                          <a:rPr lang="en-US" altLang="zh-TW" sz="1630" i="1">
+                            <a:latin typeface="Cambria Math" panose="02040503050406030204" pitchFamily="18" charset="0"/>
+                          </a:rPr>
+                          <m:t>𝑝</m:t>
+                        </m:r>
+                        <m:r>
+                          <a:rPr lang="en-US" altLang="zh-TW" sz="1630" i="1">
+                            <a:latin typeface="Cambria Math" panose="02040503050406030204" pitchFamily="18" charset="0"/>
+                          </a:rPr>
+                          <m:t>=5</m:t>
+                        </m:r>
+                      </m:oMath>
+                    </m:oMathPara>
+                  </a14:m>
+                  <a:endParaRPr lang="zh-TW" altLang="en-US" sz="1630" dirty="0">
+                    <a:latin typeface="Times New Roman" panose="02020603050405020304" pitchFamily="18" charset="0"/>
+                    <a:cs typeface="Times New Roman" panose="02020603050405020304" pitchFamily="18" charset="0"/>
+                  </a:endParaRPr>
+                </a:p>
+              </p:txBody>
+            </p:sp>
+          </mc:Choice>
+          <mc:Fallback>
+            <p:sp>
+              <p:nvSpPr>
+                <p:cNvPr id="70" name="矩形 69">
+                  <a:extLst>
+                    <a:ext uri="{FF2B5EF4-FFF2-40B4-BE49-F238E27FC236}">
+                      <a16:creationId xmlns:a16="http://schemas.microsoft.com/office/drawing/2014/main" id="{F353A4B0-F2A1-4538-B322-C7E20F44CBE6}"/>
+                    </a:ext>
+                  </a:extLst>
+                </p:cNvPr>
+                <p:cNvSpPr>
+                  <a:spLocks noRot="1" noChangeAspect="1" noMove="1" noResize="1" noEditPoints="1" noAdjustHandles="1" noChangeArrowheads="1" noChangeShapeType="1" noTextEdit="1"/>
+                </p:cNvSpPr>
+                <p:nvPr/>
+              </p:nvSpPr>
+              <p:spPr>
+                <a:xfrm>
+                  <a:off x="8304510" y="2189458"/>
+                  <a:ext cx="744243" cy="343171"/>
+                </a:xfrm>
+                <a:prstGeom prst="rect">
+                  <a:avLst/>
+                </a:prstGeom>
+                <a:blipFill>
+                  <a:blip r:embed="rId30"/>
+                  <a:stretch>
+                    <a:fillRect b="-7143"/>
+                  </a:stretch>
+                </a:blipFill>
+              </p:spPr>
+              <p:txBody>
+                <a:bodyPr/>
+                <a:lstStyle/>
+                <a:p>
+                  <a:r>
+                    <a:rPr lang="zh-TW" altLang="en-US">
+                      <a:noFill/>
+                    </a:rPr>
+                    <a:t> </a:t>
+                  </a:r>
+                </a:p>
+              </p:txBody>
+            </p:sp>
+          </mc:Fallback>
+        </mc:AlternateContent>
         <p:grpSp>
           <p:nvGrpSpPr>
-            <p:cNvPr id="44" name="群組 43">
+            <p:cNvPr id="2" name="群組 1">
               <a:extLst>
                 <a:ext uri="{FF2B5EF4-FFF2-40B4-BE49-F238E27FC236}">
-                  <a16:creationId xmlns:a16="http://schemas.microsoft.com/office/drawing/2014/main" id="{A1FB2D32-9A76-4604-A670-C21FC738A5C4}"/>
+                  <a16:creationId xmlns:a16="http://schemas.microsoft.com/office/drawing/2014/main" id="{F917B3C8-7974-41B3-89B3-E20F77E896EA}"/>
                 </a:ext>
               </a:extLst>
             </p:cNvPr>
@@ -6018,37 +6075,38 @@
           </p:nvGrpSpPr>
           <p:grpSpPr>
             <a:xfrm>
-              <a:off x="2877454" y="2926082"/>
-              <a:ext cx="1128066" cy="891211"/>
-              <a:chOff x="1237639" y="5610979"/>
-              <a:chExt cx="1128066" cy="891211"/>
+              <a:off x="1901162" y="4136585"/>
+              <a:ext cx="550009" cy="592612"/>
+              <a:chOff x="-988088" y="945710"/>
+              <a:chExt cx="550009" cy="592612"/>
             </a:xfrm>
           </p:grpSpPr>
-          <mc:AlternateContent xmlns:mc="http://schemas.openxmlformats.org/markup-compatibility/2006" xmlns:a14="http://schemas.microsoft.com/office/drawing/2010/main">
-            <mc:Choice Requires="a14">
+          <mc:AlternateContent xmlns:mc="http://schemas.openxmlformats.org/markup-compatibility/2006">
+            <mc:Choice xmlns:a14="http://schemas.microsoft.com/office/drawing/2010/main" Requires="a14">
               <p:sp>
                 <p:nvSpPr>
-                  <p:cNvPr id="49" name="矩形 48">
+                  <p:cNvPr id="73" name="文字方塊 72">
                     <a:extLst>
                       <a:ext uri="{FF2B5EF4-FFF2-40B4-BE49-F238E27FC236}">
-                        <a16:creationId xmlns:a16="http://schemas.microsoft.com/office/drawing/2014/main" id="{017FDA99-C49A-49EA-B20A-89AE98B6A3F3}"/>
+                        <a16:creationId xmlns:a16="http://schemas.microsoft.com/office/drawing/2014/main" id="{FF452286-0809-4E40-8493-F6210A0C50E4}"/>
                       </a:ext>
                     </a:extLst>
                   </p:cNvPr>
-                  <p:cNvSpPr/>
+                  <p:cNvSpPr txBox="1"/>
                   <p:nvPr/>
                 </p:nvSpPr>
                 <p:spPr>
                   <a:xfrm>
-                    <a:off x="1462169" y="6150368"/>
-                    <a:ext cx="704632" cy="351822"/>
+                    <a:off x="-988088" y="945710"/>
+                    <a:ext cx="323386" cy="343171"/>
                   </a:xfrm>
                   <a:prstGeom prst="rect">
                     <a:avLst/>
                   </a:prstGeom>
+                  <a:noFill/>
                 </p:spPr>
                 <p:txBody>
-                  <a:bodyPr wrap="none">
+                  <a:bodyPr wrap="square" rtlCol="0">
                     <a:spAutoFit/>
                   </a:bodyPr>
                   <a:lstStyle/>
@@ -6060,25 +6118,37 @@
                           <m:jc m:val="centerGroup"/>
                         </m:oMathParaPr>
                         <m:oMath xmlns:m="http://schemas.openxmlformats.org/officeDocument/2006/math">
-                          <m:r>
-                            <a:rPr lang="en-US" altLang="zh-TW" sz="2231" i="1">
-                              <a:latin typeface="Cambria Math" panose="02040503050406030204" pitchFamily="18" charset="0"/>
-                            </a:rPr>
-                            <m:t>1 </m:t>
-                          </m:r>
-                          <m:r>
-                            <m:rPr>
-                              <m:sty m:val="p"/>
-                            </m:rPr>
-                            <a:rPr lang="en-US" altLang="zh-TW" sz="2231">
-                              <a:latin typeface="Cambria Math" panose="02040503050406030204" pitchFamily="18" charset="0"/>
-                            </a:rPr>
-                            <m:t>um</m:t>
-                          </m:r>
+                          <m:acc>
+                            <m:accPr>
+                              <m:chr m:val="̂"/>
+                              <m:ctrlPr>
+                                <a:rPr lang="en-US" altLang="zh-TW" sz="1630" i="1">
+                                  <a:solidFill>
+                                    <a:schemeClr val="bg1"/>
+                                  </a:solidFill>
+                                  <a:latin typeface="Cambria Math" panose="02040503050406030204" pitchFamily="18" charset="0"/>
+                                </a:rPr>
+                              </m:ctrlPr>
+                            </m:accPr>
+                            <m:e>
+                              <m:r>
+                                <a:rPr lang="en-US" altLang="zh-TW" sz="1630" b="1" i="1">
+                                  <a:solidFill>
+                                    <a:schemeClr val="bg1"/>
+                                  </a:solidFill>
+                                  <a:latin typeface="Cambria Math" panose="02040503050406030204" pitchFamily="18" charset="0"/>
+                                </a:rPr>
+                                <m:t>𝒚</m:t>
+                              </m:r>
+                            </m:e>
+                          </m:acc>
                         </m:oMath>
                       </m:oMathPara>
                     </a14:m>
-                    <a:endParaRPr lang="zh-TW" altLang="en-US" sz="2231" dirty="0">
+                    <a:endParaRPr lang="en-US" altLang="zh-TW" sz="1630" dirty="0">
+                      <a:solidFill>
+                        <a:schemeClr val="bg1"/>
+                      </a:solidFill>
                       <a:latin typeface="Times New Roman" panose="02020603050405020304" pitchFamily="18" charset="0"/>
                       <a:cs typeface="Times New Roman" panose="02020603050405020304" pitchFamily="18" charset="0"/>
                     </a:endParaRPr>
@@ -6086,33 +6156,153 @@
                 </p:txBody>
               </p:sp>
             </mc:Choice>
-            <mc:Fallback xmlns="">
+            <mc:Fallback>
               <p:sp>
                 <p:nvSpPr>
-                  <p:cNvPr id="49" name="矩形 48">
+                  <p:cNvPr id="73" name="文字方塊 72">
                     <a:extLst>
                       <a:ext uri="{FF2B5EF4-FFF2-40B4-BE49-F238E27FC236}">
-                        <a16:creationId xmlns:a16="http://schemas.microsoft.com/office/drawing/2014/main" id="{017FDA99-C49A-49EA-B20A-89AE98B6A3F3}"/>
+                        <a16:creationId xmlns:a16="http://schemas.microsoft.com/office/drawing/2014/main" id="{FF452286-0809-4E40-8493-F6210A0C50E4}"/>
                       </a:ext>
                     </a:extLst>
                   </p:cNvPr>
-                  <p:cNvSpPr>
+                  <p:cNvSpPr txBox="1">
                     <a:spLocks noRot="1" noChangeAspect="1" noMove="1" noResize="1" noEditPoints="1" noAdjustHandles="1" noChangeArrowheads="1" noChangeShapeType="1" noTextEdit="1"/>
                   </p:cNvSpPr>
                   <p:nvPr/>
                 </p:nvSpPr>
                 <p:spPr>
                   <a:xfrm>
-                    <a:off x="1462169" y="6150368"/>
-                    <a:ext cx="704632" cy="351822"/>
+                    <a:off x="-988088" y="945710"/>
+                    <a:ext cx="323386" cy="343171"/>
                   </a:xfrm>
                   <a:prstGeom prst="rect">
                     <a:avLst/>
                   </a:prstGeom>
                   <a:blipFill>
-                    <a:blip r:embed="rId29"/>
+                    <a:blip r:embed="rId31"/>
                     <a:stretch>
-                      <a:fillRect/>
+                      <a:fillRect b="-5263"/>
+                    </a:stretch>
+                  </a:blipFill>
+                </p:spPr>
+                <p:txBody>
+                  <a:bodyPr/>
+                  <a:lstStyle/>
+                  <a:p>
+                    <a:r>
+                      <a:rPr lang="zh-TW" altLang="en-US">
+                        <a:noFill/>
+                      </a:rPr>
+                      <a:t> </a:t>
+                    </a:r>
+                  </a:p>
+                </p:txBody>
+              </p:sp>
+            </mc:Fallback>
+          </mc:AlternateContent>
+          <mc:AlternateContent xmlns:mc="http://schemas.openxmlformats.org/markup-compatibility/2006">
+            <mc:Choice xmlns:a14="http://schemas.microsoft.com/office/drawing/2010/main" Requires="a14">
+              <p:sp>
+                <p:nvSpPr>
+                  <p:cNvPr id="74" name="文字方塊 73">
+                    <a:extLst>
+                      <a:ext uri="{FF2B5EF4-FFF2-40B4-BE49-F238E27FC236}">
+                        <a16:creationId xmlns:a16="http://schemas.microsoft.com/office/drawing/2014/main" id="{28FE260A-9C2E-4F16-97D7-9392FA7EC71D}"/>
+                      </a:ext>
+                    </a:extLst>
+                  </p:cNvPr>
+                  <p:cNvSpPr txBox="1"/>
+                  <p:nvPr/>
+                </p:nvSpPr>
+                <p:spPr>
+                  <a:xfrm>
+                    <a:off x="-844998" y="1195151"/>
+                    <a:ext cx="406919" cy="343171"/>
+                  </a:xfrm>
+                  <a:prstGeom prst="rect">
+                    <a:avLst/>
+                  </a:prstGeom>
+                  <a:noFill/>
+                </p:spPr>
+                <p:txBody>
+                  <a:bodyPr wrap="square" rtlCol="0">
+                    <a:spAutoFit/>
+                  </a:bodyPr>
+                  <a:lstStyle/>
+                  <a:p>
+                    <a:pPr/>
+                    <a14:m>
+                      <m:oMathPara xmlns:m="http://schemas.openxmlformats.org/officeDocument/2006/math">
+                        <m:oMathParaPr>
+                          <m:jc m:val="centerGroup"/>
+                        </m:oMathParaPr>
+                        <m:oMath xmlns:m="http://schemas.openxmlformats.org/officeDocument/2006/math">
+                          <m:acc>
+                            <m:accPr>
+                              <m:chr m:val="̂"/>
+                              <m:ctrlPr>
+                                <a:rPr lang="en-US" altLang="zh-TW" sz="1630" i="1">
+                                  <a:solidFill>
+                                    <a:schemeClr val="bg1"/>
+                                  </a:solidFill>
+                                  <a:latin typeface="Cambria Math" panose="02040503050406030204" pitchFamily="18" charset="0"/>
+                                </a:rPr>
+                              </m:ctrlPr>
+                            </m:accPr>
+                            <m:e>
+                              <m:r>
+                                <a:rPr lang="en-US" altLang="zh-TW" sz="1630" b="1" i="1">
+                                  <a:solidFill>
+                                    <a:schemeClr val="bg1"/>
+                                  </a:solidFill>
+                                  <a:latin typeface="Cambria Math" panose="02040503050406030204" pitchFamily="18" charset="0"/>
+                                </a:rPr>
+                                <m:t>𝒙</m:t>
+                              </m:r>
+                            </m:e>
+                          </m:acc>
+                        </m:oMath>
+                      </m:oMathPara>
+                    </a14:m>
+                    <a:endParaRPr lang="en-US" altLang="zh-TW" sz="1630" dirty="0">
+                      <a:solidFill>
+                        <a:schemeClr val="bg1"/>
+                      </a:solidFill>
+                      <a:latin typeface="Times New Roman" panose="02020603050405020304" pitchFamily="18" charset="0"/>
+                      <a:cs typeface="Times New Roman" panose="02020603050405020304" pitchFamily="18" charset="0"/>
+                    </a:endParaRPr>
+                  </a:p>
+                </p:txBody>
+              </p:sp>
+            </mc:Choice>
+            <mc:Fallback>
+              <p:sp>
+                <p:nvSpPr>
+                  <p:cNvPr id="74" name="文字方塊 73">
+                    <a:extLst>
+                      <a:ext uri="{FF2B5EF4-FFF2-40B4-BE49-F238E27FC236}">
+                        <a16:creationId xmlns:a16="http://schemas.microsoft.com/office/drawing/2014/main" id="{28FE260A-9C2E-4F16-97D7-9392FA7EC71D}"/>
+                      </a:ext>
+                    </a:extLst>
+                  </p:cNvPr>
+                  <p:cNvSpPr txBox="1">
+                    <a:spLocks noRot="1" noChangeAspect="1" noMove="1" noResize="1" noEditPoints="1" noAdjustHandles="1" noChangeArrowheads="1" noChangeShapeType="1" noTextEdit="1"/>
+                  </p:cNvSpPr>
+                  <p:nvPr/>
+                </p:nvSpPr>
+                <p:spPr>
+                  <a:xfrm>
+                    <a:off x="-844998" y="1195151"/>
+                    <a:ext cx="406919" cy="343171"/>
+                  </a:xfrm>
+                  <a:prstGeom prst="rect">
+                    <a:avLst/>
+                  </a:prstGeom>
+                  <a:blipFill>
+                    <a:blip r:embed="rId32"/>
+                    <a:stretch>
+                      <a:fillRect r="-11940"/>
                     </a:stretch>
                   </a:blipFill>
                 </p:spPr>
@@ -6133,10 +6323,10 @@
           </mc:AlternateContent>
           <p:sp>
             <p:nvSpPr>
-              <p:cNvPr id="60" name="矩形 59">
+              <p:cNvPr id="71" name="箭號: 向右 70">
                 <a:extLst>
                   <a:ext uri="{FF2B5EF4-FFF2-40B4-BE49-F238E27FC236}">
-                    <a16:creationId xmlns:a16="http://schemas.microsoft.com/office/drawing/2014/main" id="{1D29E6D7-0355-4035-9B5B-38ABBAC64022}"/>
+                    <a16:creationId xmlns:a16="http://schemas.microsoft.com/office/drawing/2014/main" id="{61F190B9-89A0-4699-AC6A-1C549C337EBB}"/>
                   </a:ext>
                 </a:extLst>
               </p:cNvPr>
@@ -6145,62 +6335,165 @@
             </p:nvSpPr>
             <p:spPr>
               <a:xfrm>
-                <a:off x="1812604" y="5610979"/>
-                <a:ext cx="553101" cy="351822"/>
+                <a:off x="-837092" y="1356364"/>
+                <a:ext cx="92654" cy="27541"/>
               </a:xfrm>
-              <a:prstGeom prst="rect">
-                <a:avLst/>
+              <a:prstGeom prst="rightArrow">
+                <a:avLst>
+                  <a:gd name="adj1" fmla="val 50000"/>
+                  <a:gd name="adj2" fmla="val 99023"/>
+                </a:avLst>
               </a:prstGeom>
+              <a:solidFill>
+                <a:schemeClr val="bg1"/>
+              </a:solidFill>
+              <a:ln>
+                <a:solidFill>
+                  <a:schemeClr val="bg1"/>
+                </a:solidFill>
+              </a:ln>
             </p:spPr>
+            <p:style>
+              <a:lnRef idx="2">
+                <a:schemeClr val="dk1">
+                  <a:shade val="50000"/>
+                </a:schemeClr>
+              </a:lnRef>
+              <a:fillRef idx="1">
+                <a:schemeClr val="dk1"/>
+              </a:fillRef>
+              <a:effectRef idx="0">
+                <a:schemeClr val="dk1"/>
+              </a:effectRef>
+              <a:fontRef idx="minor">
+                <a:schemeClr val="lt1"/>
+              </a:fontRef>
+            </p:style>
             <p:txBody>
-              <a:bodyPr wrap="none">
-                <a:spAutoFit/>
-              </a:bodyPr>
+              <a:bodyPr rtlCol="0" anchor="ctr"/>
               <a:lstStyle/>
               <a:p>
-                <a:pPr marL="425098" indent="-425098">
-                  <a:buFont typeface="Arial" panose="020B0604020202020204" pitchFamily="34" charset="0"/>
-                  <a:buChar char="•"/>
-                </a:pPr>
-                <a:r>
-                  <a:rPr lang="en-US" altLang="zh-TW" sz="2231" dirty="0">
-                    <a:latin typeface="Times New Roman" panose="02020603050405020304" pitchFamily="18" charset="0"/>
-                    <a:cs typeface="Times New Roman" panose="02020603050405020304" pitchFamily="18" charset="0"/>
-                  </a:rPr>
-                  <a:t> </a:t>
-                </a:r>
-                <a:endParaRPr lang="zh-TW" altLang="en-US" sz="2231" dirty="0">
+                <a:pPr algn="ctr"/>
+                <a:endParaRPr lang="zh-TW" altLang="en-US" sz="1630">
+                  <a:solidFill>
+                    <a:schemeClr val="tx1"/>
+                  </a:solidFill>
                   <a:latin typeface="Times New Roman" panose="02020603050405020304" pitchFamily="18" charset="0"/>
                   <a:cs typeface="Times New Roman" panose="02020603050405020304" pitchFamily="18" charset="0"/>
                 </a:endParaRPr>
               </a:p>
             </p:txBody>
           </p:sp>
-          <mc:AlternateContent xmlns:mc="http://schemas.openxmlformats.org/markup-compatibility/2006" xmlns:a14="http://schemas.microsoft.com/office/drawing/2010/main">
-            <mc:Choice Requires="a14">
+          <p:sp>
+            <p:nvSpPr>
+              <p:cNvPr id="72" name="箭號: 向右 71">
+                <a:extLst>
+                  <a:ext uri="{FF2B5EF4-FFF2-40B4-BE49-F238E27FC236}">
+                    <a16:creationId xmlns:a16="http://schemas.microsoft.com/office/drawing/2014/main" id="{0CC6A15D-E42F-4DA8-8A3E-49AA25BBC55B}"/>
+                  </a:ext>
+                </a:extLst>
+              </p:cNvPr>
+              <p:cNvSpPr/>
+              <p:nvPr/>
+            </p:nvSpPr>
+            <p:spPr>
+              <a:xfrm rot="16200000">
+                <a:off x="-877012" y="1316853"/>
+                <a:ext cx="91764" cy="27808"/>
+              </a:xfrm>
+              <a:prstGeom prst="rightArrow">
+                <a:avLst>
+                  <a:gd name="adj1" fmla="val 50000"/>
+                  <a:gd name="adj2" fmla="val 99023"/>
+                </a:avLst>
+              </a:prstGeom>
+              <a:solidFill>
+                <a:schemeClr val="bg1"/>
+              </a:solidFill>
+              <a:ln>
+                <a:solidFill>
+                  <a:schemeClr val="bg1"/>
+                </a:solidFill>
+              </a:ln>
+            </p:spPr>
+            <p:style>
+              <a:lnRef idx="2">
+                <a:schemeClr val="dk1">
+                  <a:shade val="50000"/>
+                </a:schemeClr>
+              </a:lnRef>
+              <a:fillRef idx="1">
+                <a:schemeClr val="dk1"/>
+              </a:fillRef>
+              <a:effectRef idx="0">
+                <a:schemeClr val="dk1"/>
+              </a:effectRef>
+              <a:fontRef idx="minor">
+                <a:schemeClr val="lt1"/>
+              </a:fontRef>
+            </p:style>
+            <p:txBody>
+              <a:bodyPr rtlCol="0" anchor="ctr"/>
+              <a:lstStyle/>
+              <a:p>
+                <a:pPr algn="ctr"/>
+                <a:endParaRPr lang="zh-TW" altLang="en-US" sz="1630" dirty="0">
+                  <a:solidFill>
+                    <a:schemeClr val="tx1"/>
+                  </a:solidFill>
+                  <a:latin typeface="Times New Roman" panose="02020603050405020304" pitchFamily="18" charset="0"/>
+                  <a:cs typeface="Times New Roman" panose="02020603050405020304" pitchFamily="18" charset="0"/>
+                </a:endParaRPr>
+              </a:p>
+            </p:txBody>
+          </p:sp>
+        </p:grpSp>
+        <p:grpSp>
+          <p:nvGrpSpPr>
+            <p:cNvPr id="75" name="群組 74">
+              <a:extLst>
+                <a:ext uri="{FF2B5EF4-FFF2-40B4-BE49-F238E27FC236}">
+                  <a16:creationId xmlns:a16="http://schemas.microsoft.com/office/drawing/2014/main" id="{BA17BC9E-340F-411F-8219-44CD12C95AA9}"/>
+                </a:ext>
+              </a:extLst>
+            </p:cNvPr>
+            <p:cNvGrpSpPr/>
+            <p:nvPr/>
+          </p:nvGrpSpPr>
+          <p:grpSpPr>
+            <a:xfrm>
+              <a:off x="1901162" y="2662115"/>
+              <a:ext cx="550009" cy="592612"/>
+              <a:chOff x="-988088" y="945710"/>
+              <a:chExt cx="550009" cy="592612"/>
+            </a:xfrm>
+          </p:grpSpPr>
+          <mc:AlternateContent xmlns:mc="http://schemas.openxmlformats.org/markup-compatibility/2006">
+            <mc:Choice xmlns:a14="http://schemas.microsoft.com/office/drawing/2010/main" Requires="a14">
               <p:sp>
                 <p:nvSpPr>
-                  <p:cNvPr id="61" name="矩形 60">
+                  <p:cNvPr id="76" name="文字方塊 75">
                     <a:extLst>
                       <a:ext uri="{FF2B5EF4-FFF2-40B4-BE49-F238E27FC236}">
-                        <a16:creationId xmlns:a16="http://schemas.microsoft.com/office/drawing/2014/main" id="{E97D2739-BF9C-468F-A455-A2BF5259A5BA}"/>
+                        <a16:creationId xmlns:a16="http://schemas.microsoft.com/office/drawing/2014/main" id="{DA635BAA-EFD7-435B-BCE4-F0FC3026F2A5}"/>
                       </a:ext>
                     </a:extLst>
                   </p:cNvPr>
-                  <p:cNvSpPr/>
+                  <p:cNvSpPr txBox="1"/>
                   <p:nvPr/>
                 </p:nvSpPr>
                 <p:spPr>
                   <a:xfrm>
-                    <a:off x="1237639" y="5705594"/>
-                    <a:ext cx="738472" cy="351822"/>
+                    <a:off x="-988088" y="945710"/>
+                    <a:ext cx="323386" cy="343171"/>
                   </a:xfrm>
                   <a:prstGeom prst="rect">
                     <a:avLst/>
                   </a:prstGeom>
+                  <a:noFill/>
                 </p:spPr>
                 <p:txBody>
-                  <a:bodyPr wrap="none">
+                  <a:bodyPr wrap="square" rtlCol="0">
                     <a:spAutoFit/>
                   </a:bodyPr>
                   <a:lstStyle/>
@@ -6212,27 +6505,28 @@
                           <m:jc m:val="centerGroup"/>
                         </m:oMathParaPr>
                         <m:oMath xmlns:m="http://schemas.openxmlformats.org/officeDocument/2006/math">
-                          <m:d>
-                            <m:dPr>
+                          <m:acc>
+                            <m:accPr>
+                              <m:chr m:val="̂"/>
                               <m:ctrlPr>
-                                <a:rPr lang="en-US" altLang="zh-TW" sz="2231" i="1">
+                                <a:rPr lang="en-US" altLang="zh-TW" sz="1630" i="1">
                                   <a:latin typeface="Cambria Math" panose="02040503050406030204" pitchFamily="18" charset="0"/>
                                 </a:rPr>
                               </m:ctrlPr>
-                            </m:dPr>
+                            </m:accPr>
                             <m:e>
                               <m:r>
-                                <a:rPr lang="en-US" altLang="zh-TW" sz="2231" i="1">
+                                <a:rPr lang="en-US" altLang="zh-TW" sz="1630" b="1" i="1">
                                   <a:latin typeface="Cambria Math" panose="02040503050406030204" pitchFamily="18" charset="0"/>
                                 </a:rPr>
-                                <m:t>0, 0</m:t>
+                                <m:t>𝒚</m:t>
                               </m:r>
                             </m:e>
-                          </m:d>
+                          </m:acc>
                         </m:oMath>
                       </m:oMathPara>
                     </a14:m>
-                    <a:endParaRPr lang="zh-TW" altLang="en-US" sz="2231" dirty="0">
+                    <a:endParaRPr lang="en-US" altLang="zh-TW" sz="1630" dirty="0">
                       <a:latin typeface="Times New Roman" panose="02020603050405020304" pitchFamily="18" charset="0"/>
                       <a:cs typeface="Times New Roman" panose="02020603050405020304" pitchFamily="18" charset="0"/>
                     </a:endParaRPr>
@@ -6240,33 +6534,33 @@
                 </p:txBody>
               </p:sp>
             </mc:Choice>
-            <mc:Fallback xmlns="">
+            <mc:Fallback>
               <p:sp>
                 <p:nvSpPr>
-                  <p:cNvPr id="61" name="矩形 60">
+                  <p:cNvPr id="76" name="文字方塊 75">
                     <a:extLst>
                       <a:ext uri="{FF2B5EF4-FFF2-40B4-BE49-F238E27FC236}">
-                        <a16:creationId xmlns:a16="http://schemas.microsoft.com/office/drawing/2014/main" id="{E97D2739-BF9C-468F-A455-A2BF5259A5BA}"/>
+                        <a16:creationId xmlns:a16="http://schemas.microsoft.com/office/drawing/2014/main" id="{DA635BAA-EFD7-435B-BCE4-F0FC3026F2A5}"/>
                       </a:ext>
                     </a:extLst>
                   </p:cNvPr>
-                  <p:cNvSpPr>
+                  <p:cNvSpPr txBox="1">
                     <a:spLocks noRot="1" noChangeAspect="1" noMove="1" noResize="1" noEditPoints="1" noAdjustHandles="1" noChangeArrowheads="1" noChangeShapeType="1" noTextEdit="1"/>
                   </p:cNvSpPr>
                   <p:nvPr/>
                 </p:nvSpPr>
                 <p:spPr>
                   <a:xfrm>
-                    <a:off x="1237639" y="5705594"/>
-                    <a:ext cx="738472" cy="351822"/>
+                    <a:off x="-988088" y="945710"/>
+                    <a:ext cx="323386" cy="343171"/>
                   </a:xfrm>
                   <a:prstGeom prst="rect">
                     <a:avLst/>
                   </a:prstGeom>
                   <a:blipFill>
-                    <a:blip r:embed="rId30"/>
+                    <a:blip r:embed="rId33"/>
                     <a:stretch>
-                      <a:fillRect/>
+                      <a:fillRect b="-7143"/>
                     </a:stretch>
                   </a:blipFill>
                 </p:spPr>
@@ -6285,631 +6579,244 @@
               </p:sp>
             </mc:Fallback>
           </mc:AlternateContent>
+          <mc:AlternateContent xmlns:mc="http://schemas.openxmlformats.org/markup-compatibility/2006">
+            <mc:Choice xmlns:a14="http://schemas.microsoft.com/office/drawing/2010/main" Requires="a14">
+              <p:sp>
+                <p:nvSpPr>
+                  <p:cNvPr id="77" name="文字方塊 76">
+                    <a:extLst>
+                      <a:ext uri="{FF2B5EF4-FFF2-40B4-BE49-F238E27FC236}">
+                        <a16:creationId xmlns:a16="http://schemas.microsoft.com/office/drawing/2014/main" id="{70E789C9-D068-48AA-8926-92B85661596A}"/>
+                      </a:ext>
+                    </a:extLst>
+                  </p:cNvPr>
+                  <p:cNvSpPr txBox="1"/>
+                  <p:nvPr/>
+                </p:nvSpPr>
+                <p:spPr>
+                  <a:xfrm>
+                    <a:off x="-844998" y="1195151"/>
+                    <a:ext cx="406919" cy="343171"/>
+                  </a:xfrm>
+                  <a:prstGeom prst="rect">
+                    <a:avLst/>
+                  </a:prstGeom>
+                  <a:noFill/>
+                </p:spPr>
+                <p:txBody>
+                  <a:bodyPr wrap="square" rtlCol="0">
+                    <a:spAutoFit/>
+                  </a:bodyPr>
+                  <a:lstStyle/>
+                  <a:p>
+                    <a:pPr/>
+                    <a14:m>
+                      <m:oMathPara xmlns:m="http://schemas.openxmlformats.org/officeDocument/2006/math">
+                        <m:oMathParaPr>
+                          <m:jc m:val="centerGroup"/>
+                        </m:oMathParaPr>
+                        <m:oMath xmlns:m="http://schemas.openxmlformats.org/officeDocument/2006/math">
+                          <m:acc>
+                            <m:accPr>
+                              <m:chr m:val="̂"/>
+                              <m:ctrlPr>
+                                <a:rPr lang="en-US" altLang="zh-TW" sz="1630" i="1">
+                                  <a:latin typeface="Cambria Math" panose="02040503050406030204" pitchFamily="18" charset="0"/>
+                                </a:rPr>
+                              </m:ctrlPr>
+                            </m:accPr>
+                            <m:e>
+                              <m:r>
+                                <a:rPr lang="en-US" altLang="zh-TW" sz="1630" b="1" i="1">
+                                  <a:latin typeface="Cambria Math" panose="02040503050406030204" pitchFamily="18" charset="0"/>
+                                </a:rPr>
+                                <m:t>𝒙</m:t>
+                              </m:r>
+                            </m:e>
+                          </m:acc>
+                        </m:oMath>
+                      </m:oMathPara>
+                    </a14:m>
+                    <a:endParaRPr lang="en-US" altLang="zh-TW" sz="1630" dirty="0">
+                      <a:latin typeface="Times New Roman" panose="02020603050405020304" pitchFamily="18" charset="0"/>
+                      <a:cs typeface="Times New Roman" panose="02020603050405020304" pitchFamily="18" charset="0"/>
+                    </a:endParaRPr>
+                  </a:p>
+                </p:txBody>
+              </p:sp>
+            </mc:Choice>
+            <mc:Fallback>
+              <p:sp>
+                <p:nvSpPr>
+                  <p:cNvPr id="77" name="文字方塊 76">
+                    <a:extLst>
+                      <a:ext uri="{FF2B5EF4-FFF2-40B4-BE49-F238E27FC236}">
+                        <a16:creationId xmlns:a16="http://schemas.microsoft.com/office/drawing/2014/main" id="{70E789C9-D068-48AA-8926-92B85661596A}"/>
+                      </a:ext>
+                    </a:extLst>
+                  </p:cNvPr>
+                  <p:cNvSpPr txBox="1">
+                    <a:spLocks noRot="1" noChangeAspect="1" noMove="1" noResize="1" noEditPoints="1" noAdjustHandles="1" noChangeArrowheads="1" noChangeShapeType="1" noTextEdit="1"/>
+                  </p:cNvSpPr>
+                  <p:nvPr/>
+                </p:nvSpPr>
+                <p:spPr>
+                  <a:xfrm>
+                    <a:off x="-844998" y="1195151"/>
+                    <a:ext cx="406919" cy="343171"/>
+                  </a:xfrm>
+                  <a:prstGeom prst="rect">
+                    <a:avLst/>
+                  </a:prstGeom>
+                  <a:blipFill>
+                    <a:blip r:embed="rId34"/>
+                    <a:stretch>
+                      <a:fillRect r="-11940"/>
+                    </a:stretch>
+                  </a:blipFill>
+                </p:spPr>
+                <p:txBody>
+                  <a:bodyPr/>
+                  <a:lstStyle/>
+                  <a:p>
+                    <a:r>
+                      <a:rPr lang="zh-TW" altLang="en-US">
+                        <a:noFill/>
+                      </a:rPr>
+                      <a:t> </a:t>
+                    </a:r>
+                  </a:p>
+                </p:txBody>
+              </p:sp>
+            </mc:Fallback>
+          </mc:AlternateContent>
+          <p:sp>
+            <p:nvSpPr>
+              <p:cNvPr id="78" name="箭號: 向右 77">
+                <a:extLst>
+                  <a:ext uri="{FF2B5EF4-FFF2-40B4-BE49-F238E27FC236}">
+                    <a16:creationId xmlns:a16="http://schemas.microsoft.com/office/drawing/2014/main" id="{A1080908-0FA7-4EF2-BE0B-B9D643A593EF}"/>
+                  </a:ext>
+                </a:extLst>
+              </p:cNvPr>
+              <p:cNvSpPr/>
+              <p:nvPr/>
+            </p:nvSpPr>
+            <p:spPr>
+              <a:xfrm>
+                <a:off x="-837092" y="1356364"/>
+                <a:ext cx="92654" cy="27541"/>
+              </a:xfrm>
+              <a:prstGeom prst="rightArrow">
+                <a:avLst>
+                  <a:gd name="adj1" fmla="val 50000"/>
+                  <a:gd name="adj2" fmla="val 99023"/>
+                </a:avLst>
+              </a:prstGeom>
+              <a:solidFill>
+                <a:schemeClr val="tx1"/>
+              </a:solidFill>
+              <a:ln>
+                <a:solidFill>
+                  <a:schemeClr val="tx1"/>
+                </a:solidFill>
+              </a:ln>
+            </p:spPr>
+            <p:style>
+              <a:lnRef idx="2">
+                <a:schemeClr val="dk1">
+                  <a:shade val="50000"/>
+                </a:schemeClr>
+              </a:lnRef>
+              <a:fillRef idx="1">
+                <a:schemeClr val="dk1"/>
+              </a:fillRef>
+              <a:effectRef idx="0">
+                <a:schemeClr val="dk1"/>
+              </a:effectRef>
+              <a:fontRef idx="minor">
+                <a:schemeClr val="lt1"/>
+              </a:fontRef>
+            </p:style>
+            <p:txBody>
+              <a:bodyPr rtlCol="0" anchor="ctr"/>
+              <a:lstStyle/>
+              <a:p>
+                <a:pPr algn="ctr"/>
+                <a:endParaRPr lang="zh-TW" altLang="en-US" sz="1630">
+                  <a:solidFill>
+                    <a:schemeClr val="tx1"/>
+                  </a:solidFill>
+                  <a:latin typeface="Times New Roman" panose="02020603050405020304" pitchFamily="18" charset="0"/>
+                  <a:cs typeface="Times New Roman" panose="02020603050405020304" pitchFamily="18" charset="0"/>
+                </a:endParaRPr>
+              </a:p>
+            </p:txBody>
+          </p:sp>
+          <p:sp>
+            <p:nvSpPr>
+              <p:cNvPr id="79" name="箭號: 向右 78">
+                <a:extLst>
+                  <a:ext uri="{FF2B5EF4-FFF2-40B4-BE49-F238E27FC236}">
+                    <a16:creationId xmlns:a16="http://schemas.microsoft.com/office/drawing/2014/main" id="{0775EE79-5E54-4546-8BC1-969299132A5F}"/>
+                  </a:ext>
+                </a:extLst>
+              </p:cNvPr>
+              <p:cNvSpPr/>
+              <p:nvPr/>
+            </p:nvSpPr>
+            <p:spPr>
+              <a:xfrm rot="16200000">
+                <a:off x="-877012" y="1316853"/>
+                <a:ext cx="91764" cy="27808"/>
+              </a:xfrm>
+              <a:prstGeom prst="rightArrow">
+                <a:avLst>
+                  <a:gd name="adj1" fmla="val 50000"/>
+                  <a:gd name="adj2" fmla="val 99023"/>
+                </a:avLst>
+              </a:prstGeom>
+              <a:solidFill>
+                <a:schemeClr val="tx1"/>
+              </a:solidFill>
+              <a:ln>
+                <a:solidFill>
+                  <a:schemeClr val="tx1"/>
+                </a:solidFill>
+              </a:ln>
+            </p:spPr>
+            <p:style>
+              <a:lnRef idx="2">
+                <a:schemeClr val="dk1">
+                  <a:shade val="50000"/>
+                </a:schemeClr>
+              </a:lnRef>
+              <a:fillRef idx="1">
+                <a:schemeClr val="dk1"/>
+              </a:fillRef>
+              <a:effectRef idx="0">
+                <a:schemeClr val="dk1"/>
+              </a:effectRef>
+              <a:fontRef idx="minor">
+                <a:schemeClr val="lt1"/>
+              </a:fontRef>
+            </p:style>
+            <p:txBody>
+              <a:bodyPr rtlCol="0" anchor="ctr"/>
+              <a:lstStyle/>
+              <a:p>
+                <a:pPr algn="ctr"/>
+                <a:endParaRPr lang="zh-TW" altLang="en-US" sz="1630" dirty="0">
+                  <a:solidFill>
+                    <a:schemeClr val="tx1"/>
+                  </a:solidFill>
+                  <a:latin typeface="Times New Roman" panose="02020603050405020304" pitchFamily="18" charset="0"/>
+                  <a:cs typeface="Times New Roman" panose="02020603050405020304" pitchFamily="18" charset="0"/>
+                </a:endParaRPr>
+              </a:p>
+            </p:txBody>
+          </p:sp>
         </p:grpSp>
-        <mc:AlternateContent xmlns:mc="http://schemas.openxmlformats.org/markup-compatibility/2006" xmlns:a14="http://schemas.microsoft.com/office/drawing/2010/main">
-          <mc:Choice Requires="a14">
-            <p:sp>
-              <p:nvSpPr>
-                <p:cNvPr id="64" name="矩形 63">
-                  <a:extLst>
-                    <a:ext uri="{FF2B5EF4-FFF2-40B4-BE49-F238E27FC236}">
-                      <a16:creationId xmlns:a16="http://schemas.microsoft.com/office/drawing/2014/main" id="{22366571-D267-4A4E-8455-280441D87E57}"/>
-                    </a:ext>
-                  </a:extLst>
-                </p:cNvPr>
-                <p:cNvSpPr/>
-                <p:nvPr/>
-              </p:nvSpPr>
-              <p:spPr>
-                <a:xfrm>
-                  <a:off x="1449141" y="56090"/>
-                  <a:ext cx="766752" cy="351822"/>
-                </a:xfrm>
-                <a:prstGeom prst="rect">
-                  <a:avLst/>
-                </a:prstGeom>
-              </p:spPr>
-              <p:txBody>
-                <a:bodyPr wrap="none">
-                  <a:spAutoFit/>
-                </a:bodyPr>
-                <a:lstStyle/>
-                <a:p>
-                  <a:pPr/>
-                  <a14:m>
-                    <m:oMathPara xmlns:m="http://schemas.openxmlformats.org/officeDocument/2006/math">
-                      <m:oMathParaPr>
-                        <m:jc m:val="centerGroup"/>
-                      </m:oMathParaPr>
-                      <m:oMath xmlns:m="http://schemas.openxmlformats.org/officeDocument/2006/math">
-                        <m:r>
-                          <a:rPr lang="en-US" altLang="zh-TW" sz="2231" i="1">
-                            <a:latin typeface="Cambria Math" panose="02040503050406030204" pitchFamily="18" charset="0"/>
-                          </a:rPr>
-                          <m:t>𝑝</m:t>
-                        </m:r>
-                        <m:r>
-                          <a:rPr lang="en-US" altLang="zh-TW" sz="2231" i="1">
-                            <a:latin typeface="Cambria Math" panose="02040503050406030204" pitchFamily="18" charset="0"/>
-                          </a:rPr>
-                          <m:t>=0</m:t>
-                        </m:r>
-                      </m:oMath>
-                    </m:oMathPara>
-                  </a14:m>
-                  <a:endParaRPr lang="zh-TW" altLang="en-US" sz="2231" dirty="0">
-                    <a:latin typeface="Times New Roman" panose="02020603050405020304" pitchFamily="18" charset="0"/>
-                    <a:cs typeface="Times New Roman" panose="02020603050405020304" pitchFamily="18" charset="0"/>
-                  </a:endParaRPr>
-                </a:p>
-              </p:txBody>
-            </p:sp>
-          </mc:Choice>
-          <mc:Fallback xmlns="">
-            <p:sp>
-              <p:nvSpPr>
-                <p:cNvPr id="64" name="矩形 63">
-                  <a:extLst>
-                    <a:ext uri="{FF2B5EF4-FFF2-40B4-BE49-F238E27FC236}">
-                      <a16:creationId xmlns:a16="http://schemas.microsoft.com/office/drawing/2014/main" id="{22366571-D267-4A4E-8455-280441D87E57}"/>
-                    </a:ext>
-                  </a:extLst>
-                </p:cNvPr>
-                <p:cNvSpPr>
-                  <a:spLocks noRot="1" noChangeAspect="1" noMove="1" noResize="1" noEditPoints="1" noAdjustHandles="1" noChangeArrowheads="1" noChangeShapeType="1" noTextEdit="1"/>
-                </p:cNvSpPr>
-                <p:nvPr/>
-              </p:nvSpPr>
-              <p:spPr>
-                <a:xfrm>
-                  <a:off x="1449141" y="56090"/>
-                  <a:ext cx="766752" cy="351822"/>
-                </a:xfrm>
-                <a:prstGeom prst="rect">
-                  <a:avLst/>
-                </a:prstGeom>
-                <a:blipFill>
-                  <a:blip r:embed="rId31"/>
-                  <a:stretch>
-                    <a:fillRect b="-11268"/>
-                  </a:stretch>
-                </a:blipFill>
-              </p:spPr>
-              <p:txBody>
-                <a:bodyPr/>
-                <a:lstStyle/>
-                <a:p>
-                  <a:r>
-                    <a:rPr lang="zh-TW" altLang="en-US">
-                      <a:noFill/>
-                    </a:rPr>
-                    <a:t> </a:t>
-                  </a:r>
-                </a:p>
-              </p:txBody>
-            </p:sp>
-          </mc:Fallback>
-        </mc:AlternateContent>
-        <mc:AlternateContent xmlns:mc="http://schemas.openxmlformats.org/markup-compatibility/2006" xmlns:a14="http://schemas.microsoft.com/office/drawing/2010/main">
-          <mc:Choice Requires="a14">
-            <p:sp>
-              <p:nvSpPr>
-                <p:cNvPr id="66" name="矩形 65">
-                  <a:extLst>
-                    <a:ext uri="{FF2B5EF4-FFF2-40B4-BE49-F238E27FC236}">
-                      <a16:creationId xmlns:a16="http://schemas.microsoft.com/office/drawing/2014/main" id="{80E0EFB3-F881-4F03-9E3C-0009C6DA8E6F}"/>
-                    </a:ext>
-                  </a:extLst>
-                </p:cNvPr>
-                <p:cNvSpPr/>
-                <p:nvPr/>
-              </p:nvSpPr>
-              <p:spPr>
-                <a:xfrm>
-                  <a:off x="3204042" y="56090"/>
-                  <a:ext cx="766752" cy="351822"/>
-                </a:xfrm>
-                <a:prstGeom prst="rect">
-                  <a:avLst/>
-                </a:prstGeom>
-              </p:spPr>
-              <p:txBody>
-                <a:bodyPr wrap="none">
-                  <a:spAutoFit/>
-                </a:bodyPr>
-                <a:lstStyle/>
-                <a:p>
-                  <a:pPr/>
-                  <a14:m>
-                    <m:oMathPara xmlns:m="http://schemas.openxmlformats.org/officeDocument/2006/math">
-                      <m:oMathParaPr>
-                        <m:jc m:val="centerGroup"/>
-                      </m:oMathParaPr>
-                      <m:oMath xmlns:m="http://schemas.openxmlformats.org/officeDocument/2006/math">
-                        <m:r>
-                          <a:rPr lang="en-US" altLang="zh-TW" sz="2231" i="1">
-                            <a:latin typeface="Cambria Math" panose="02040503050406030204" pitchFamily="18" charset="0"/>
-                          </a:rPr>
-                          <m:t>𝑝</m:t>
-                        </m:r>
-                        <m:r>
-                          <a:rPr lang="en-US" altLang="zh-TW" sz="2231" i="1">
-                            <a:latin typeface="Cambria Math" panose="02040503050406030204" pitchFamily="18" charset="0"/>
-                          </a:rPr>
-                          <m:t>=1</m:t>
-                        </m:r>
-                      </m:oMath>
-                    </m:oMathPara>
-                  </a14:m>
-                  <a:endParaRPr lang="zh-TW" altLang="en-US" sz="2231" dirty="0">
-                    <a:latin typeface="Times New Roman" panose="02020603050405020304" pitchFamily="18" charset="0"/>
-                    <a:cs typeface="Times New Roman" panose="02020603050405020304" pitchFamily="18" charset="0"/>
-                  </a:endParaRPr>
-                </a:p>
-              </p:txBody>
-            </p:sp>
-          </mc:Choice>
-          <mc:Fallback xmlns="">
-            <p:sp>
-              <p:nvSpPr>
-                <p:cNvPr id="66" name="矩形 65">
-                  <a:extLst>
-                    <a:ext uri="{FF2B5EF4-FFF2-40B4-BE49-F238E27FC236}">
-                      <a16:creationId xmlns:a16="http://schemas.microsoft.com/office/drawing/2014/main" id="{80E0EFB3-F881-4F03-9E3C-0009C6DA8E6F}"/>
-                    </a:ext>
-                  </a:extLst>
-                </p:cNvPr>
-                <p:cNvSpPr>
-                  <a:spLocks noRot="1" noChangeAspect="1" noMove="1" noResize="1" noEditPoints="1" noAdjustHandles="1" noChangeArrowheads="1" noChangeShapeType="1" noTextEdit="1"/>
-                </p:cNvSpPr>
-                <p:nvPr/>
-              </p:nvSpPr>
-              <p:spPr>
-                <a:xfrm>
-                  <a:off x="3204042" y="56090"/>
-                  <a:ext cx="766752" cy="351822"/>
-                </a:xfrm>
-                <a:prstGeom prst="rect">
-                  <a:avLst/>
-                </a:prstGeom>
-                <a:blipFill>
-                  <a:blip r:embed="rId32"/>
-                  <a:stretch>
-                    <a:fillRect b="-11268"/>
-                  </a:stretch>
-                </a:blipFill>
-              </p:spPr>
-              <p:txBody>
-                <a:bodyPr/>
-                <a:lstStyle/>
-                <a:p>
-                  <a:r>
-                    <a:rPr lang="zh-TW" altLang="en-US">
-                      <a:noFill/>
-                    </a:rPr>
-                    <a:t> </a:t>
-                  </a:r>
-                </a:p>
-              </p:txBody>
-            </p:sp>
-          </mc:Fallback>
-        </mc:AlternateContent>
-        <mc:AlternateContent xmlns:mc="http://schemas.openxmlformats.org/markup-compatibility/2006" xmlns:a14="http://schemas.microsoft.com/office/drawing/2010/main">
-          <mc:Choice Requires="a14">
-            <p:sp>
-              <p:nvSpPr>
-                <p:cNvPr id="67" name="矩形 66">
-                  <a:extLst>
-                    <a:ext uri="{FF2B5EF4-FFF2-40B4-BE49-F238E27FC236}">
-                      <a16:creationId xmlns:a16="http://schemas.microsoft.com/office/drawing/2014/main" id="{51FFC70D-FFDA-4575-A614-B952968DC375}"/>
-                    </a:ext>
-                  </a:extLst>
-                </p:cNvPr>
-                <p:cNvSpPr/>
-                <p:nvPr/>
-              </p:nvSpPr>
-              <p:spPr>
-                <a:xfrm>
-                  <a:off x="4958943" y="56090"/>
-                  <a:ext cx="766752" cy="351822"/>
-                </a:xfrm>
-                <a:prstGeom prst="rect">
-                  <a:avLst/>
-                </a:prstGeom>
-              </p:spPr>
-              <p:txBody>
-                <a:bodyPr wrap="none">
-                  <a:spAutoFit/>
-                </a:bodyPr>
-                <a:lstStyle/>
-                <a:p>
-                  <a:pPr/>
-                  <a14:m>
-                    <m:oMathPara xmlns:m="http://schemas.openxmlformats.org/officeDocument/2006/math">
-                      <m:oMathParaPr>
-                        <m:jc m:val="centerGroup"/>
-                      </m:oMathParaPr>
-                      <m:oMath xmlns:m="http://schemas.openxmlformats.org/officeDocument/2006/math">
-                        <m:r>
-                          <a:rPr lang="en-US" altLang="zh-TW" sz="2231" i="1">
-                            <a:latin typeface="Cambria Math" panose="02040503050406030204" pitchFamily="18" charset="0"/>
-                          </a:rPr>
-                          <m:t>𝑝</m:t>
-                        </m:r>
-                        <m:r>
-                          <a:rPr lang="en-US" altLang="zh-TW" sz="2231" i="1">
-                            <a:latin typeface="Cambria Math" panose="02040503050406030204" pitchFamily="18" charset="0"/>
-                          </a:rPr>
-                          <m:t>=2</m:t>
-                        </m:r>
-                      </m:oMath>
-                    </m:oMathPara>
-                  </a14:m>
-                  <a:endParaRPr lang="zh-TW" altLang="en-US" sz="2231" dirty="0">
-                    <a:latin typeface="Times New Roman" panose="02020603050405020304" pitchFamily="18" charset="0"/>
-                    <a:cs typeface="Times New Roman" panose="02020603050405020304" pitchFamily="18" charset="0"/>
-                  </a:endParaRPr>
-                </a:p>
-              </p:txBody>
-            </p:sp>
-          </mc:Choice>
-          <mc:Fallback xmlns="">
-            <p:sp>
-              <p:nvSpPr>
-                <p:cNvPr id="67" name="矩形 66">
-                  <a:extLst>
-                    <a:ext uri="{FF2B5EF4-FFF2-40B4-BE49-F238E27FC236}">
-                      <a16:creationId xmlns:a16="http://schemas.microsoft.com/office/drawing/2014/main" id="{51FFC70D-FFDA-4575-A614-B952968DC375}"/>
-                    </a:ext>
-                  </a:extLst>
-                </p:cNvPr>
-                <p:cNvSpPr>
-                  <a:spLocks noRot="1" noChangeAspect="1" noMove="1" noResize="1" noEditPoints="1" noAdjustHandles="1" noChangeArrowheads="1" noChangeShapeType="1" noTextEdit="1"/>
-                </p:cNvSpPr>
-                <p:nvPr/>
-              </p:nvSpPr>
-              <p:spPr>
-                <a:xfrm>
-                  <a:off x="4958943" y="56090"/>
-                  <a:ext cx="766752" cy="351822"/>
-                </a:xfrm>
-                <a:prstGeom prst="rect">
-                  <a:avLst/>
-                </a:prstGeom>
-                <a:blipFill>
-                  <a:blip r:embed="rId33"/>
-                  <a:stretch>
-                    <a:fillRect b="-11268"/>
-                  </a:stretch>
-                </a:blipFill>
-              </p:spPr>
-              <p:txBody>
-                <a:bodyPr/>
-                <a:lstStyle/>
-                <a:p>
-                  <a:r>
-                    <a:rPr lang="zh-TW" altLang="en-US">
-                      <a:noFill/>
-                    </a:rPr>
-                    <a:t> </a:t>
-                  </a:r>
-                </a:p>
-              </p:txBody>
-            </p:sp>
-          </mc:Fallback>
-        </mc:AlternateContent>
-        <mc:AlternateContent xmlns:mc="http://schemas.openxmlformats.org/markup-compatibility/2006" xmlns:a14="http://schemas.microsoft.com/office/drawing/2010/main">
-          <mc:Choice Requires="a14">
-            <p:sp>
-              <p:nvSpPr>
-                <p:cNvPr id="68" name="矩形 67">
-                  <a:extLst>
-                    <a:ext uri="{FF2B5EF4-FFF2-40B4-BE49-F238E27FC236}">
-                      <a16:creationId xmlns:a16="http://schemas.microsoft.com/office/drawing/2014/main" id="{FCC1FD34-DEE6-48AB-A294-7F7DFEFB7842}"/>
-                    </a:ext>
-                  </a:extLst>
-                </p:cNvPr>
-                <p:cNvSpPr/>
-                <p:nvPr/>
-              </p:nvSpPr>
-              <p:spPr>
-                <a:xfrm>
-                  <a:off x="6713844" y="56090"/>
-                  <a:ext cx="766752" cy="351822"/>
-                </a:xfrm>
-                <a:prstGeom prst="rect">
-                  <a:avLst/>
-                </a:prstGeom>
-              </p:spPr>
-              <p:txBody>
-                <a:bodyPr wrap="none">
-                  <a:spAutoFit/>
-                </a:bodyPr>
-                <a:lstStyle/>
-                <a:p>
-                  <a:pPr/>
-                  <a14:m>
-                    <m:oMathPara xmlns:m="http://schemas.openxmlformats.org/officeDocument/2006/math">
-                      <m:oMathParaPr>
-                        <m:jc m:val="centerGroup"/>
-                      </m:oMathParaPr>
-                      <m:oMath xmlns:m="http://schemas.openxmlformats.org/officeDocument/2006/math">
-                        <m:r>
-                          <a:rPr lang="en-US" altLang="zh-TW" sz="2231" i="1">
-                            <a:latin typeface="Cambria Math" panose="02040503050406030204" pitchFamily="18" charset="0"/>
-                          </a:rPr>
-                          <m:t>𝑝</m:t>
-                        </m:r>
-                        <m:r>
-                          <a:rPr lang="en-US" altLang="zh-TW" sz="2231" i="1">
-                            <a:latin typeface="Cambria Math" panose="02040503050406030204" pitchFamily="18" charset="0"/>
-                          </a:rPr>
-                          <m:t>=3</m:t>
-                        </m:r>
-                      </m:oMath>
-                    </m:oMathPara>
-                  </a14:m>
-                  <a:endParaRPr lang="zh-TW" altLang="en-US" sz="2231" dirty="0">
-                    <a:latin typeface="Times New Roman" panose="02020603050405020304" pitchFamily="18" charset="0"/>
-                    <a:cs typeface="Times New Roman" panose="02020603050405020304" pitchFamily="18" charset="0"/>
-                  </a:endParaRPr>
-                </a:p>
-              </p:txBody>
-            </p:sp>
-          </mc:Choice>
-          <mc:Fallback xmlns="">
-            <p:sp>
-              <p:nvSpPr>
-                <p:cNvPr id="68" name="矩形 67">
-                  <a:extLst>
-                    <a:ext uri="{FF2B5EF4-FFF2-40B4-BE49-F238E27FC236}">
-                      <a16:creationId xmlns:a16="http://schemas.microsoft.com/office/drawing/2014/main" id="{FCC1FD34-DEE6-48AB-A294-7F7DFEFB7842}"/>
-                    </a:ext>
-                  </a:extLst>
-                </p:cNvPr>
-                <p:cNvSpPr>
-                  <a:spLocks noRot="1" noChangeAspect="1" noMove="1" noResize="1" noEditPoints="1" noAdjustHandles="1" noChangeArrowheads="1" noChangeShapeType="1" noTextEdit="1"/>
-                </p:cNvSpPr>
-                <p:nvPr/>
-              </p:nvSpPr>
-              <p:spPr>
-                <a:xfrm>
-                  <a:off x="6713844" y="56090"/>
-                  <a:ext cx="766752" cy="351822"/>
-                </a:xfrm>
-                <a:prstGeom prst="rect">
-                  <a:avLst/>
-                </a:prstGeom>
-                <a:blipFill>
-                  <a:blip r:embed="rId34"/>
-                  <a:stretch>
-                    <a:fillRect b="-11268"/>
-                  </a:stretch>
-                </a:blipFill>
-              </p:spPr>
-              <p:txBody>
-                <a:bodyPr/>
-                <a:lstStyle/>
-                <a:p>
-                  <a:r>
-                    <a:rPr lang="zh-TW" altLang="en-US">
-                      <a:noFill/>
-                    </a:rPr>
-                    <a:t> </a:t>
-                  </a:r>
-                </a:p>
-              </p:txBody>
-            </p:sp>
-          </mc:Fallback>
-        </mc:AlternateContent>
-        <mc:AlternateContent xmlns:mc="http://schemas.openxmlformats.org/markup-compatibility/2006" xmlns:a14="http://schemas.microsoft.com/office/drawing/2010/main">
-          <mc:Choice Requires="a14">
-            <p:sp>
-              <p:nvSpPr>
-                <p:cNvPr id="69" name="矩形 68">
-                  <a:extLst>
-                    <a:ext uri="{FF2B5EF4-FFF2-40B4-BE49-F238E27FC236}">
-                      <a16:creationId xmlns:a16="http://schemas.microsoft.com/office/drawing/2014/main" id="{25B3698F-4959-4B2F-8395-34499219BCC3}"/>
-                    </a:ext>
-                  </a:extLst>
-                </p:cNvPr>
-                <p:cNvSpPr/>
-                <p:nvPr/>
-              </p:nvSpPr>
-              <p:spPr>
-                <a:xfrm>
-                  <a:off x="8468745" y="56090"/>
-                  <a:ext cx="766752" cy="351822"/>
-                </a:xfrm>
-                <a:prstGeom prst="rect">
-                  <a:avLst/>
-                </a:prstGeom>
-              </p:spPr>
-              <p:txBody>
-                <a:bodyPr wrap="none">
-                  <a:spAutoFit/>
-                </a:bodyPr>
-                <a:lstStyle/>
-                <a:p>
-                  <a:pPr/>
-                  <a14:m>
-                    <m:oMathPara xmlns:m="http://schemas.openxmlformats.org/officeDocument/2006/math">
-                      <m:oMathParaPr>
-                        <m:jc m:val="centerGroup"/>
-                      </m:oMathParaPr>
-                      <m:oMath xmlns:m="http://schemas.openxmlformats.org/officeDocument/2006/math">
-                        <m:r>
-                          <a:rPr lang="en-US" altLang="zh-TW" sz="2231" i="1">
-                            <a:latin typeface="Cambria Math" panose="02040503050406030204" pitchFamily="18" charset="0"/>
-                          </a:rPr>
-                          <m:t>𝑝</m:t>
-                        </m:r>
-                        <m:r>
-                          <a:rPr lang="en-US" altLang="zh-TW" sz="2231" i="1">
-                            <a:latin typeface="Cambria Math" panose="02040503050406030204" pitchFamily="18" charset="0"/>
-                          </a:rPr>
-                          <m:t>=4</m:t>
-                        </m:r>
-                      </m:oMath>
-                    </m:oMathPara>
-                  </a14:m>
-                  <a:endParaRPr lang="zh-TW" altLang="en-US" sz="2231" dirty="0">
-                    <a:latin typeface="Times New Roman" panose="02020603050405020304" pitchFamily="18" charset="0"/>
-                    <a:cs typeface="Times New Roman" panose="02020603050405020304" pitchFamily="18" charset="0"/>
-                  </a:endParaRPr>
-                </a:p>
-              </p:txBody>
-            </p:sp>
-          </mc:Choice>
-          <mc:Fallback xmlns="">
-            <p:sp>
-              <p:nvSpPr>
-                <p:cNvPr id="69" name="矩形 68">
-                  <a:extLst>
-                    <a:ext uri="{FF2B5EF4-FFF2-40B4-BE49-F238E27FC236}">
-                      <a16:creationId xmlns:a16="http://schemas.microsoft.com/office/drawing/2014/main" id="{25B3698F-4959-4B2F-8395-34499219BCC3}"/>
-                    </a:ext>
-                  </a:extLst>
-                </p:cNvPr>
-                <p:cNvSpPr>
-                  <a:spLocks noRot="1" noChangeAspect="1" noMove="1" noResize="1" noEditPoints="1" noAdjustHandles="1" noChangeArrowheads="1" noChangeShapeType="1" noTextEdit="1"/>
-                </p:cNvSpPr>
-                <p:nvPr/>
-              </p:nvSpPr>
-              <p:spPr>
-                <a:xfrm>
-                  <a:off x="8468745" y="56090"/>
-                  <a:ext cx="766752" cy="351822"/>
-                </a:xfrm>
-                <a:prstGeom prst="rect">
-                  <a:avLst/>
-                </a:prstGeom>
-                <a:blipFill>
-                  <a:blip r:embed="rId35"/>
-                  <a:stretch>
-                    <a:fillRect b="-11268"/>
-                  </a:stretch>
-                </a:blipFill>
-              </p:spPr>
-              <p:txBody>
-                <a:bodyPr/>
-                <a:lstStyle/>
-                <a:p>
-                  <a:r>
-                    <a:rPr lang="zh-TW" altLang="en-US">
-                      <a:noFill/>
-                    </a:rPr>
-                    <a:t> </a:t>
-                  </a:r>
-                </a:p>
-              </p:txBody>
-            </p:sp>
-          </mc:Fallback>
-        </mc:AlternateContent>
-        <mc:AlternateContent xmlns:mc="http://schemas.openxmlformats.org/markup-compatibility/2006" xmlns:a14="http://schemas.microsoft.com/office/drawing/2010/main">
-          <mc:Choice Requires="a14">
-            <p:sp>
-              <p:nvSpPr>
-                <p:cNvPr id="70" name="矩形 69">
-                  <a:extLst>
-                    <a:ext uri="{FF2B5EF4-FFF2-40B4-BE49-F238E27FC236}">
-                      <a16:creationId xmlns:a16="http://schemas.microsoft.com/office/drawing/2014/main" id="{F353A4B0-F2A1-4538-B322-C7E20F44CBE6}"/>
-                    </a:ext>
-                  </a:extLst>
-                </p:cNvPr>
-                <p:cNvSpPr/>
-                <p:nvPr/>
-              </p:nvSpPr>
-              <p:spPr>
-                <a:xfrm>
-                  <a:off x="10223647" y="56090"/>
-                  <a:ext cx="766752" cy="351822"/>
-                </a:xfrm>
-                <a:prstGeom prst="rect">
-                  <a:avLst/>
-                </a:prstGeom>
-              </p:spPr>
-              <p:txBody>
-                <a:bodyPr wrap="none">
-                  <a:spAutoFit/>
-                </a:bodyPr>
-                <a:lstStyle/>
-                <a:p>
-                  <a:pPr/>
-                  <a14:m>
-                    <m:oMathPara xmlns:m="http://schemas.openxmlformats.org/officeDocument/2006/math">
-                      <m:oMathParaPr>
-                        <m:jc m:val="centerGroup"/>
-                      </m:oMathParaPr>
-                      <m:oMath xmlns:m="http://schemas.openxmlformats.org/officeDocument/2006/math">
-                        <m:r>
-                          <a:rPr lang="en-US" altLang="zh-TW" sz="2231" i="1">
-                            <a:latin typeface="Cambria Math" panose="02040503050406030204" pitchFamily="18" charset="0"/>
-                          </a:rPr>
-                          <m:t>𝑝</m:t>
-                        </m:r>
-                        <m:r>
-                          <a:rPr lang="en-US" altLang="zh-TW" sz="2231" i="1">
-                            <a:latin typeface="Cambria Math" panose="02040503050406030204" pitchFamily="18" charset="0"/>
-                          </a:rPr>
-                          <m:t>=5</m:t>
-                        </m:r>
-                      </m:oMath>
-                    </m:oMathPara>
-                  </a14:m>
-                  <a:endParaRPr lang="zh-TW" altLang="en-US" sz="2231" dirty="0">
-                    <a:latin typeface="Times New Roman" panose="02020603050405020304" pitchFamily="18" charset="0"/>
-                    <a:cs typeface="Times New Roman" panose="02020603050405020304" pitchFamily="18" charset="0"/>
-                  </a:endParaRPr>
-                </a:p>
-              </p:txBody>
-            </p:sp>
-          </mc:Choice>
-          <mc:Fallback xmlns="">
-            <p:sp>
-              <p:nvSpPr>
-                <p:cNvPr id="70" name="矩形 69">
-                  <a:extLst>
-                    <a:ext uri="{FF2B5EF4-FFF2-40B4-BE49-F238E27FC236}">
-                      <a16:creationId xmlns:a16="http://schemas.microsoft.com/office/drawing/2014/main" id="{F353A4B0-F2A1-4538-B322-C7E20F44CBE6}"/>
-                    </a:ext>
-                  </a:extLst>
-                </p:cNvPr>
-                <p:cNvSpPr>
-                  <a:spLocks noRot="1" noChangeAspect="1" noMove="1" noResize="1" noEditPoints="1" noAdjustHandles="1" noChangeArrowheads="1" noChangeShapeType="1" noTextEdit="1"/>
-                </p:cNvSpPr>
-                <p:nvPr/>
-              </p:nvSpPr>
-              <p:spPr>
-                <a:xfrm>
-                  <a:off x="10223647" y="56090"/>
-                  <a:ext cx="766752" cy="351822"/>
-                </a:xfrm>
-                <a:prstGeom prst="rect">
-                  <a:avLst/>
-                </a:prstGeom>
-                <a:blipFill>
-                  <a:blip r:embed="rId36"/>
-                  <a:stretch>
-                    <a:fillRect b="-11268"/>
-                  </a:stretch>
-                </a:blipFill>
-              </p:spPr>
-              <p:txBody>
-                <a:bodyPr/>
-                <a:lstStyle/>
-                <a:p>
-                  <a:r>
-                    <a:rPr lang="zh-TW" altLang="en-US">
-                      <a:noFill/>
-                    </a:rPr>
-                    <a:t> </a:t>
-                  </a:r>
-                </a:p>
-              </p:txBody>
-            </p:sp>
-          </mc:Fallback>
-        </mc:AlternateContent>
       </p:grpSp>
     </p:spTree>
     <p:extLst>

--- a/Final/Figures/ufig.pptx
+++ b/Final/Figures/ufig.pptx
@@ -6,7 +6,6 @@
   </p:sldMasterIdLst>
   <p:sldIdLst>
     <p:sldId id="256" r:id="rId2"/>
-    <p:sldId id="257" r:id="rId3"/>
   </p:sldIdLst>
   <p:sldSz cx="9906000" cy="6480175"/>
   <p:notesSz cx="6858000" cy="9144000"/>
@@ -244,7 +243,7 @@
           <a:p>
             <a:fld id="{6A29EBDB-ED21-4F12-8F84-164F28F696EF}" type="datetimeFigureOut">
               <a:rPr lang="zh-TW" altLang="en-US" smtClean="0"/>
-              <a:t>2026/6/18</a:t>
+              <a:t>2026/6/19</a:t>
             </a:fld>
             <a:endParaRPr lang="zh-TW" altLang="en-US"/>
           </a:p>
@@ -414,7 +413,7 @@
           <a:p>
             <a:fld id="{6A29EBDB-ED21-4F12-8F84-164F28F696EF}" type="datetimeFigureOut">
               <a:rPr lang="zh-TW" altLang="en-US" smtClean="0"/>
-              <a:t>2026/6/18</a:t>
+              <a:t>2026/6/19</a:t>
             </a:fld>
             <a:endParaRPr lang="zh-TW" altLang="en-US"/>
           </a:p>
@@ -594,7 +593,7 @@
           <a:p>
             <a:fld id="{6A29EBDB-ED21-4F12-8F84-164F28F696EF}" type="datetimeFigureOut">
               <a:rPr lang="zh-TW" altLang="en-US" smtClean="0"/>
-              <a:t>2026/6/18</a:t>
+              <a:t>2026/6/19</a:t>
             </a:fld>
             <a:endParaRPr lang="zh-TW" altLang="en-US"/>
           </a:p>
@@ -764,7 +763,7 @@
           <a:p>
             <a:fld id="{6A29EBDB-ED21-4F12-8F84-164F28F696EF}" type="datetimeFigureOut">
               <a:rPr lang="zh-TW" altLang="en-US" smtClean="0"/>
-              <a:t>2026/6/18</a:t>
+              <a:t>2026/6/19</a:t>
             </a:fld>
             <a:endParaRPr lang="zh-TW" altLang="en-US"/>
           </a:p>
@@ -1008,7 +1007,7 @@
           <a:p>
             <a:fld id="{6A29EBDB-ED21-4F12-8F84-164F28F696EF}" type="datetimeFigureOut">
               <a:rPr lang="zh-TW" altLang="en-US" smtClean="0"/>
-              <a:t>2026/6/18</a:t>
+              <a:t>2026/6/19</a:t>
             </a:fld>
             <a:endParaRPr lang="zh-TW" altLang="en-US"/>
           </a:p>
@@ -1240,7 +1239,7 @@
           <a:p>
             <a:fld id="{6A29EBDB-ED21-4F12-8F84-164F28F696EF}" type="datetimeFigureOut">
               <a:rPr lang="zh-TW" altLang="en-US" smtClean="0"/>
-              <a:t>2026/6/18</a:t>
+              <a:t>2026/6/19</a:t>
             </a:fld>
             <a:endParaRPr lang="zh-TW" altLang="en-US"/>
           </a:p>
@@ -1607,7 +1606,7 @@
           <a:p>
             <a:fld id="{6A29EBDB-ED21-4F12-8F84-164F28F696EF}" type="datetimeFigureOut">
               <a:rPr lang="zh-TW" altLang="en-US" smtClean="0"/>
-              <a:t>2026/6/18</a:t>
+              <a:t>2026/6/19</a:t>
             </a:fld>
             <a:endParaRPr lang="zh-TW" altLang="en-US"/>
           </a:p>
@@ -1725,7 +1724,7 @@
           <a:p>
             <a:fld id="{6A29EBDB-ED21-4F12-8F84-164F28F696EF}" type="datetimeFigureOut">
               <a:rPr lang="zh-TW" altLang="en-US" smtClean="0"/>
-              <a:t>2026/6/18</a:t>
+              <a:t>2026/6/19</a:t>
             </a:fld>
             <a:endParaRPr lang="zh-TW" altLang="en-US"/>
           </a:p>
@@ -1820,7 +1819,7 @@
           <a:p>
             <a:fld id="{6A29EBDB-ED21-4F12-8F84-164F28F696EF}" type="datetimeFigureOut">
               <a:rPr lang="zh-TW" altLang="en-US" smtClean="0"/>
-              <a:t>2026/6/18</a:t>
+              <a:t>2026/6/19</a:t>
             </a:fld>
             <a:endParaRPr lang="zh-TW" altLang="en-US"/>
           </a:p>
@@ -2097,7 +2096,7 @@
           <a:p>
             <a:fld id="{6A29EBDB-ED21-4F12-8F84-164F28F696EF}" type="datetimeFigureOut">
               <a:rPr lang="zh-TW" altLang="en-US" smtClean="0"/>
-              <a:t>2026/6/18</a:t>
+              <a:t>2026/6/19</a:t>
             </a:fld>
             <a:endParaRPr lang="zh-TW" altLang="en-US"/>
           </a:p>
@@ -2354,7 +2353,7 @@
           <a:p>
             <a:fld id="{6A29EBDB-ED21-4F12-8F84-164F28F696EF}" type="datetimeFigureOut">
               <a:rPr lang="zh-TW" altLang="en-US" smtClean="0"/>
-              <a:t>2026/6/18</a:t>
+              <a:t>2026/6/19</a:t>
             </a:fld>
             <a:endParaRPr lang="zh-TW" altLang="en-US"/>
           </a:p>
@@ -2567,7 +2566,7 @@
           <a:p>
             <a:fld id="{6A29EBDB-ED21-4F12-8F84-164F28F696EF}" type="datetimeFigureOut">
               <a:rPr lang="zh-TW" altLang="en-US" smtClean="0"/>
-              <a:t>2026/6/18</a:t>
+              <a:t>2026/6/19</a:t>
             </a:fld>
             <a:endParaRPr lang="zh-TW" altLang="en-US"/>
           </a:p>
@@ -3453,8 +3452,8 @@
             </p:spPr>
           </p:pic>
         </p:grpSp>
-        <mc:AlternateContent xmlns:mc="http://schemas.openxmlformats.org/markup-compatibility/2006">
-          <mc:Choice xmlns:a14="http://schemas.microsoft.com/office/drawing/2010/main" Requires="a14">
+        <mc:AlternateContent xmlns:mc="http://schemas.openxmlformats.org/markup-compatibility/2006" xmlns:a14="http://schemas.microsoft.com/office/drawing/2010/main">
+          <mc:Choice Requires="a14">
             <p:sp>
               <p:nvSpPr>
                 <p:cNvPr id="59" name="矩形 58">
@@ -3578,7 +3577,7 @@
               </p:txBody>
             </p:sp>
           </mc:Choice>
-          <mc:Fallback>
+          <mc:Fallback xmlns="">
             <p:sp>
               <p:nvSpPr>
                 <p:cNvPr id="59" name="矩形 58">
@@ -3623,8 +3622,8 @@
             </p:sp>
           </mc:Fallback>
         </mc:AlternateContent>
-        <mc:AlternateContent xmlns:mc="http://schemas.openxmlformats.org/markup-compatibility/2006">
-          <mc:Choice xmlns:a14="http://schemas.microsoft.com/office/drawing/2010/main" Requires="a14">
+        <mc:AlternateContent xmlns:mc="http://schemas.openxmlformats.org/markup-compatibility/2006" xmlns:a14="http://schemas.microsoft.com/office/drawing/2010/main">
+          <mc:Choice Requires="a14">
             <p:sp>
               <p:nvSpPr>
                 <p:cNvPr id="60" name="矩形 59">
@@ -3676,7 +3675,7 @@
               </p:txBody>
             </p:sp>
           </mc:Choice>
-          <mc:Fallback>
+          <mc:Fallback xmlns="">
             <p:sp>
               <p:nvSpPr>
                 <p:cNvPr id="60" name="矩形 59">
@@ -3721,8 +3720,8 @@
             </p:sp>
           </mc:Fallback>
         </mc:AlternateContent>
-        <mc:AlternateContent xmlns:mc="http://schemas.openxmlformats.org/markup-compatibility/2006">
-          <mc:Choice xmlns:a14="http://schemas.microsoft.com/office/drawing/2010/main" Requires="a14">
+        <mc:AlternateContent xmlns:mc="http://schemas.openxmlformats.org/markup-compatibility/2006" xmlns:a14="http://schemas.microsoft.com/office/drawing/2010/main">
+          <mc:Choice Requires="a14">
             <p:sp>
               <p:nvSpPr>
                 <p:cNvPr id="61" name="矩形 60">
@@ -3789,7 +3788,7 @@
               </p:txBody>
             </p:sp>
           </mc:Choice>
-          <mc:Fallback>
+          <mc:Fallback xmlns="">
             <p:sp>
               <p:nvSpPr>
                 <p:cNvPr id="61" name="矩形 60">
@@ -3834,8 +3833,8 @@
             </p:sp>
           </mc:Fallback>
         </mc:AlternateContent>
-        <mc:AlternateContent xmlns:mc="http://schemas.openxmlformats.org/markup-compatibility/2006">
-          <mc:Choice xmlns:a14="http://schemas.microsoft.com/office/drawing/2010/main" Requires="a14">
+        <mc:AlternateContent xmlns:mc="http://schemas.openxmlformats.org/markup-compatibility/2006" xmlns:a14="http://schemas.microsoft.com/office/drawing/2010/main">
+          <mc:Choice Requires="a14">
             <p:sp>
               <p:nvSpPr>
                 <p:cNvPr id="62" name="矩形 61">
@@ -3887,7 +3886,7 @@
               </p:txBody>
             </p:sp>
           </mc:Choice>
-          <mc:Fallback>
+          <mc:Fallback xmlns="">
             <p:sp>
               <p:nvSpPr>
                 <p:cNvPr id="62" name="矩形 61">
@@ -3932,8 +3931,8 @@
             </p:sp>
           </mc:Fallback>
         </mc:AlternateContent>
-        <mc:AlternateContent xmlns:mc="http://schemas.openxmlformats.org/markup-compatibility/2006">
-          <mc:Choice xmlns:a14="http://schemas.microsoft.com/office/drawing/2010/main" Requires="a14">
+        <mc:AlternateContent xmlns:mc="http://schemas.openxmlformats.org/markup-compatibility/2006" xmlns:a14="http://schemas.microsoft.com/office/drawing/2010/main">
+          <mc:Choice Requires="a14">
             <p:sp>
               <p:nvSpPr>
                 <p:cNvPr id="63" name="矩形 62">
@@ -3972,13 +3971,7 @@
                           <a:rPr lang="en-US" altLang="zh-TW" sz="1630" i="1">
                             <a:latin typeface="Cambria Math" panose="02040503050406030204" pitchFamily="18" charset="0"/>
                           </a:rPr>
-                          <m:t>ℓ=−</m:t>
-                        </m:r>
-                        <m:r>
-                          <a:rPr lang="en-US" altLang="zh-TW" sz="1630" i="1">
-                            <a:latin typeface="Cambria Math" panose="02040503050406030204" pitchFamily="18" charset="0"/>
-                          </a:rPr>
-                          <m:t>1</m:t>
+                          <m:t>ℓ=−1</m:t>
                         </m:r>
                       </m:oMath>
                     </m:oMathPara>
@@ -3991,7 +3984,7 @@
               </p:txBody>
             </p:sp>
           </mc:Choice>
-          <mc:Fallback>
+          <mc:Fallback xmlns="">
             <p:sp>
               <p:nvSpPr>
                 <p:cNvPr id="63" name="矩形 62">
@@ -4036,8 +4029,8 @@
             </p:sp>
           </mc:Fallback>
         </mc:AlternateContent>
-        <mc:AlternateContent xmlns:mc="http://schemas.openxmlformats.org/markup-compatibility/2006">
-          <mc:Choice xmlns:a14="http://schemas.microsoft.com/office/drawing/2010/main" Requires="a14">
+        <mc:AlternateContent xmlns:mc="http://schemas.openxmlformats.org/markup-compatibility/2006" xmlns:a14="http://schemas.microsoft.com/office/drawing/2010/main">
+          <mc:Choice Requires="a14">
             <p:sp>
               <p:nvSpPr>
                 <p:cNvPr id="64" name="矩形 63">
@@ -4089,7 +4082,7 @@
               </p:txBody>
             </p:sp>
           </mc:Choice>
-          <mc:Fallback>
+          <mc:Fallback xmlns="">
             <p:sp>
               <p:nvSpPr>
                 <p:cNvPr id="64" name="矩形 63">
@@ -4134,8 +4127,8 @@
             </p:sp>
           </mc:Fallback>
         </mc:AlternateContent>
-        <mc:AlternateContent xmlns:mc="http://schemas.openxmlformats.org/markup-compatibility/2006">
-          <mc:Choice xmlns:a14="http://schemas.microsoft.com/office/drawing/2010/main" Requires="a14">
+        <mc:AlternateContent xmlns:mc="http://schemas.openxmlformats.org/markup-compatibility/2006" xmlns:a14="http://schemas.microsoft.com/office/drawing/2010/main">
+          <mc:Choice Requires="a14">
             <p:sp>
               <p:nvSpPr>
                 <p:cNvPr id="65" name="矩形 64">
@@ -4187,7 +4180,7 @@
               </p:txBody>
             </p:sp>
           </mc:Choice>
-          <mc:Fallback>
+          <mc:Fallback xmlns="">
             <p:sp>
               <p:nvSpPr>
                 <p:cNvPr id="65" name="矩形 64">
@@ -4232,8 +4225,8 @@
             </p:sp>
           </mc:Fallback>
         </mc:AlternateContent>
-        <mc:AlternateContent xmlns:mc="http://schemas.openxmlformats.org/markup-compatibility/2006">
-          <mc:Choice xmlns:a14="http://schemas.microsoft.com/office/drawing/2010/main" Requires="a14">
+        <mc:AlternateContent xmlns:mc="http://schemas.openxmlformats.org/markup-compatibility/2006" xmlns:a14="http://schemas.microsoft.com/office/drawing/2010/main">
+          <mc:Choice Requires="a14">
             <p:sp>
               <p:nvSpPr>
                 <p:cNvPr id="66" name="矩形 65">
@@ -4285,7 +4278,7 @@
               </p:txBody>
             </p:sp>
           </mc:Choice>
-          <mc:Fallback>
+          <mc:Fallback xmlns="">
             <p:sp>
               <p:nvSpPr>
                 <p:cNvPr id="66" name="矩形 65">
@@ -4416,8 +4409,8 @@
             </a:prstGeom>
           </p:spPr>
         </p:pic>
-        <mc:AlternateContent xmlns:mc="http://schemas.openxmlformats.org/markup-compatibility/2006">
-          <mc:Choice xmlns:a14="http://schemas.microsoft.com/office/drawing/2010/main" Requires="a14">
+        <mc:AlternateContent xmlns:mc="http://schemas.openxmlformats.org/markup-compatibility/2006" xmlns:a14="http://schemas.microsoft.com/office/drawing/2010/main">
+          <mc:Choice Requires="a14">
             <p:sp>
               <p:nvSpPr>
                 <p:cNvPr id="70" name="矩形 69">
@@ -4551,7 +4544,7 @@
               </p:txBody>
             </p:sp>
           </mc:Choice>
-          <mc:Fallback>
+          <mc:Fallback xmlns="">
             <p:sp>
               <p:nvSpPr>
                 <p:cNvPr id="70" name="矩形 69">
@@ -4596,8 +4589,8 @@
             </p:sp>
           </mc:Fallback>
         </mc:AlternateContent>
-        <mc:AlternateContent xmlns:mc="http://schemas.openxmlformats.org/markup-compatibility/2006">
-          <mc:Choice xmlns:a14="http://schemas.microsoft.com/office/drawing/2010/main" Requires="a14">
+        <mc:AlternateContent xmlns:mc="http://schemas.openxmlformats.org/markup-compatibility/2006" xmlns:a14="http://schemas.microsoft.com/office/drawing/2010/main">
+          <mc:Choice Requires="a14">
             <p:sp>
               <p:nvSpPr>
                 <p:cNvPr id="71" name="矩形 70">
@@ -4655,7 +4648,7 @@
               </p:txBody>
             </p:sp>
           </mc:Choice>
-          <mc:Fallback>
+          <mc:Fallback xmlns="">
             <p:sp>
               <p:nvSpPr>
                 <p:cNvPr id="71" name="矩形 70">
@@ -4700,8 +4693,8 @@
             </p:sp>
           </mc:Fallback>
         </mc:AlternateContent>
-        <mc:AlternateContent xmlns:mc="http://schemas.openxmlformats.org/markup-compatibility/2006">
-          <mc:Choice xmlns:a14="http://schemas.microsoft.com/office/drawing/2010/main" Requires="a14">
+        <mc:AlternateContent xmlns:mc="http://schemas.openxmlformats.org/markup-compatibility/2006" xmlns:a14="http://schemas.microsoft.com/office/drawing/2010/main">
+          <mc:Choice Requires="a14">
             <p:sp>
               <p:nvSpPr>
                 <p:cNvPr id="72" name="矩形 71">
@@ -4759,7 +4752,7 @@
               </p:txBody>
             </p:sp>
           </mc:Choice>
-          <mc:Fallback>
+          <mc:Fallback xmlns="">
             <p:sp>
               <p:nvSpPr>
                 <p:cNvPr id="72" name="矩形 71">
@@ -4804,8 +4797,8 @@
             </p:sp>
           </mc:Fallback>
         </mc:AlternateContent>
-        <mc:AlternateContent xmlns:mc="http://schemas.openxmlformats.org/markup-compatibility/2006">
-          <mc:Choice xmlns:a14="http://schemas.microsoft.com/office/drawing/2010/main" Requires="a14">
+        <mc:AlternateContent xmlns:mc="http://schemas.openxmlformats.org/markup-compatibility/2006" xmlns:a14="http://schemas.microsoft.com/office/drawing/2010/main">
+          <mc:Choice Requires="a14">
             <p:sp>
               <p:nvSpPr>
                 <p:cNvPr id="73" name="矩形 72">
@@ -4863,7 +4856,7 @@
               </p:txBody>
             </p:sp>
           </mc:Choice>
-          <mc:Fallback>
+          <mc:Fallback xmlns="">
             <p:sp>
               <p:nvSpPr>
                 <p:cNvPr id="73" name="矩形 72">
@@ -4908,8 +4901,8 @@
             </p:sp>
           </mc:Fallback>
         </mc:AlternateContent>
-        <mc:AlternateContent xmlns:mc="http://schemas.openxmlformats.org/markup-compatibility/2006">
-          <mc:Choice xmlns:a14="http://schemas.microsoft.com/office/drawing/2010/main" Requires="a14">
+        <mc:AlternateContent xmlns:mc="http://schemas.openxmlformats.org/markup-compatibility/2006" xmlns:a14="http://schemas.microsoft.com/office/drawing/2010/main">
+          <mc:Choice Requires="a14">
             <p:sp>
               <p:nvSpPr>
                 <p:cNvPr id="74" name="矩形 73">
@@ -4967,7 +4960,7 @@
               </p:txBody>
             </p:sp>
           </mc:Choice>
-          <mc:Fallback>
+          <mc:Fallback xmlns="">
             <p:sp>
               <p:nvSpPr>
                 <p:cNvPr id="74" name="矩形 73">
@@ -5012,8 +5005,8 @@
             </p:sp>
           </mc:Fallback>
         </mc:AlternateContent>
-        <mc:AlternateContent xmlns:mc="http://schemas.openxmlformats.org/markup-compatibility/2006">
-          <mc:Choice xmlns:a14="http://schemas.microsoft.com/office/drawing/2010/main" Requires="a14">
+        <mc:AlternateContent xmlns:mc="http://schemas.openxmlformats.org/markup-compatibility/2006" xmlns:a14="http://schemas.microsoft.com/office/drawing/2010/main">
+          <mc:Choice Requires="a14">
             <p:sp>
               <p:nvSpPr>
                 <p:cNvPr id="75" name="矩形 74">
@@ -5071,7 +5064,7 @@
               </p:txBody>
             </p:sp>
           </mc:Choice>
-          <mc:Fallback>
+          <mc:Fallback xmlns="">
             <p:sp>
               <p:nvSpPr>
                 <p:cNvPr id="75" name="矩形 74">
@@ -5485,8 +5478,8 @@
             </p:txBody>
           </p:sp>
         </p:grpSp>
-        <mc:AlternateContent xmlns:mc="http://schemas.openxmlformats.org/markup-compatibility/2006">
-          <mc:Choice xmlns:a14="http://schemas.microsoft.com/office/drawing/2010/main" Requires="a14">
+        <mc:AlternateContent xmlns:mc="http://schemas.openxmlformats.org/markup-compatibility/2006" xmlns:a14="http://schemas.microsoft.com/office/drawing/2010/main">
+          <mc:Choice Requires="a14">
             <p:sp>
               <p:nvSpPr>
                 <p:cNvPr id="82" name="矩形 81">
@@ -5544,7 +5537,7 @@
               </p:txBody>
             </p:sp>
           </mc:Choice>
-          <mc:Fallback>
+          <mc:Fallback xmlns="">
             <p:sp>
               <p:nvSpPr>
                 <p:cNvPr id="82" name="矩形 81">
@@ -5589,8 +5582,8 @@
             </p:sp>
           </mc:Fallback>
         </mc:AlternateContent>
-        <mc:AlternateContent xmlns:mc="http://schemas.openxmlformats.org/markup-compatibility/2006">
-          <mc:Choice xmlns:a14="http://schemas.microsoft.com/office/drawing/2010/main" Requires="a14">
+        <mc:AlternateContent xmlns:mc="http://schemas.openxmlformats.org/markup-compatibility/2006" xmlns:a14="http://schemas.microsoft.com/office/drawing/2010/main">
+          <mc:Choice Requires="a14">
             <p:sp>
               <p:nvSpPr>
                 <p:cNvPr id="83" name="矩形 82">
@@ -5648,7 +5641,7 @@
               </p:txBody>
             </p:sp>
           </mc:Choice>
-          <mc:Fallback>
+          <mc:Fallback xmlns="">
             <p:sp>
               <p:nvSpPr>
                 <p:cNvPr id="83" name="矩形 82">
@@ -5693,8 +5686,8 @@
             </p:sp>
           </mc:Fallback>
         </mc:AlternateContent>
-        <mc:AlternateContent xmlns:mc="http://schemas.openxmlformats.org/markup-compatibility/2006">
-          <mc:Choice xmlns:a14="http://schemas.microsoft.com/office/drawing/2010/main" Requires="a14">
+        <mc:AlternateContent xmlns:mc="http://schemas.openxmlformats.org/markup-compatibility/2006" xmlns:a14="http://schemas.microsoft.com/office/drawing/2010/main">
+          <mc:Choice Requires="a14">
             <p:sp>
               <p:nvSpPr>
                 <p:cNvPr id="84" name="矩形 83">
@@ -5761,7 +5754,7 @@
               </p:txBody>
             </p:sp>
           </mc:Choice>
-          <mc:Fallback>
+          <mc:Fallback xmlns="">
             <p:sp>
               <p:nvSpPr>
                 <p:cNvPr id="84" name="矩形 83">
@@ -6469,8 +6462,8 @@
             </a:prstGeom>
           </p:spPr>
         </p:pic>
-        <mc:AlternateContent xmlns:mc="http://schemas.openxmlformats.org/markup-compatibility/2006">
-          <mc:Choice xmlns:a14="http://schemas.microsoft.com/office/drawing/2010/main" Requires="a14">
+        <mc:AlternateContent xmlns:mc="http://schemas.openxmlformats.org/markup-compatibility/2006" xmlns:a14="http://schemas.microsoft.com/office/drawing/2010/main">
+          <mc:Choice Requires="a14">
             <p:sp>
               <p:nvSpPr>
                 <p:cNvPr id="148" name="矩形 147">
@@ -6522,7 +6515,7 @@
               </p:txBody>
             </p:sp>
           </mc:Choice>
-          <mc:Fallback>
+          <mc:Fallback xmlns="">
             <p:sp>
               <p:nvSpPr>
                 <p:cNvPr id="148" name="矩形 147">
@@ -6567,8 +6560,8 @@
             </p:sp>
           </mc:Fallback>
         </mc:AlternateContent>
-        <mc:AlternateContent xmlns:mc="http://schemas.openxmlformats.org/markup-compatibility/2006">
-          <mc:Choice xmlns:a14="http://schemas.microsoft.com/office/drawing/2010/main" Requires="a14">
+        <mc:AlternateContent xmlns:mc="http://schemas.openxmlformats.org/markup-compatibility/2006" xmlns:a14="http://schemas.microsoft.com/office/drawing/2010/main">
+          <mc:Choice Requires="a14">
             <p:sp>
               <p:nvSpPr>
                 <p:cNvPr id="149" name="矩形 148">
@@ -6607,13 +6600,7 @@
                           <a:rPr lang="en-US" altLang="zh-TW" sz="1630" i="1">
                             <a:latin typeface="Cambria Math" panose="02040503050406030204" pitchFamily="18" charset="0"/>
                           </a:rPr>
-                          <m:t>ℓ=−</m:t>
-                        </m:r>
-                        <m:r>
-                          <a:rPr lang="en-US" altLang="zh-TW" sz="1630" i="1">
-                            <a:latin typeface="Cambria Math" panose="02040503050406030204" pitchFamily="18" charset="0"/>
-                          </a:rPr>
-                          <m:t>1</m:t>
+                          <m:t>ℓ=−1</m:t>
                         </m:r>
                       </m:oMath>
                     </m:oMathPara>
@@ -6626,7 +6613,7 @@
               </p:txBody>
             </p:sp>
           </mc:Choice>
-          <mc:Fallback>
+          <mc:Fallback xmlns="">
             <p:sp>
               <p:nvSpPr>
                 <p:cNvPr id="149" name="矩形 148">
@@ -6671,8 +6658,8 @@
             </p:sp>
           </mc:Fallback>
         </mc:AlternateContent>
-        <mc:AlternateContent xmlns:mc="http://schemas.openxmlformats.org/markup-compatibility/2006">
-          <mc:Choice xmlns:a14="http://schemas.microsoft.com/office/drawing/2010/main" Requires="a14">
+        <mc:AlternateContent xmlns:mc="http://schemas.openxmlformats.org/markup-compatibility/2006" xmlns:a14="http://schemas.microsoft.com/office/drawing/2010/main">
+          <mc:Choice Requires="a14">
             <p:sp>
               <p:nvSpPr>
                 <p:cNvPr id="150" name="矩形 149">
@@ -6724,7 +6711,7 @@
               </p:txBody>
             </p:sp>
           </mc:Choice>
-          <mc:Fallback>
+          <mc:Fallback xmlns="">
             <p:sp>
               <p:nvSpPr>
                 <p:cNvPr id="150" name="矩形 149">
@@ -6769,8 +6756,8 @@
             </p:sp>
           </mc:Fallback>
         </mc:AlternateContent>
-        <mc:AlternateContent xmlns:mc="http://schemas.openxmlformats.org/markup-compatibility/2006">
-          <mc:Choice xmlns:a14="http://schemas.microsoft.com/office/drawing/2010/main" Requires="a14">
+        <mc:AlternateContent xmlns:mc="http://schemas.openxmlformats.org/markup-compatibility/2006" xmlns:a14="http://schemas.microsoft.com/office/drawing/2010/main">
+          <mc:Choice Requires="a14">
             <p:sp>
               <p:nvSpPr>
                 <p:cNvPr id="151" name="矩形 150">
@@ -6822,7 +6809,7 @@
               </p:txBody>
             </p:sp>
           </mc:Choice>
-          <mc:Fallback>
+          <mc:Fallback xmlns="">
             <p:sp>
               <p:nvSpPr>
                 <p:cNvPr id="151" name="矩形 150">
@@ -6867,8 +6854,8 @@
             </p:sp>
           </mc:Fallback>
         </mc:AlternateContent>
-        <mc:AlternateContent xmlns:mc="http://schemas.openxmlformats.org/markup-compatibility/2006">
-          <mc:Choice xmlns:a14="http://schemas.microsoft.com/office/drawing/2010/main" Requires="a14">
+        <mc:AlternateContent xmlns:mc="http://schemas.openxmlformats.org/markup-compatibility/2006" xmlns:a14="http://schemas.microsoft.com/office/drawing/2010/main">
+          <mc:Choice Requires="a14">
             <p:sp>
               <p:nvSpPr>
                 <p:cNvPr id="152" name="矩形 151">
@@ -6920,7 +6907,7 @@
               </p:txBody>
             </p:sp>
           </mc:Choice>
-          <mc:Fallback>
+          <mc:Fallback xmlns="">
             <p:sp>
               <p:nvSpPr>
                 <p:cNvPr id="152" name="矩形 151">
@@ -6970,3605 +6957,6 @@
     <p:extLst>
       <p:ext uri="{BB962C8B-B14F-4D97-AF65-F5344CB8AC3E}">
         <p14:creationId xmlns:p14="http://schemas.microsoft.com/office/powerpoint/2010/main" val="3058068254"/>
-      </p:ext>
-    </p:extLst>
-  </p:cSld>
-  <p:clrMapOvr>
-    <a:masterClrMapping/>
-  </p:clrMapOvr>
-</p:sld>
-</file>
-
-<file path=ppt/slides/slide2.xml><?xml version="1.0" encoding="utf-8"?>
-<p:sld xmlns:a="http://schemas.openxmlformats.org/drawingml/2006/main" xmlns:r="http://schemas.openxmlformats.org/officeDocument/2006/relationships" xmlns:p="http://schemas.openxmlformats.org/presentationml/2006/main">
-  <p:cSld>
-    <p:spTree>
-      <p:nvGrpSpPr>
-        <p:cNvPr id="1" name=""/>
-        <p:cNvGrpSpPr/>
-        <p:nvPr/>
-      </p:nvGrpSpPr>
-      <p:grpSpPr>
-        <a:xfrm>
-          <a:off x="0" y="0"/>
-          <a:ext cx="0" cy="0"/>
-          <a:chOff x="0" y="0"/>
-          <a:chExt cx="0" cy="0"/>
-        </a:xfrm>
-      </p:grpSpPr>
-      <p:pic>
-        <p:nvPicPr>
-          <p:cNvPr id="7" name="圖片 6">
-            <a:extLst>
-              <a:ext uri="{FF2B5EF4-FFF2-40B4-BE49-F238E27FC236}">
-                <a16:creationId xmlns:a16="http://schemas.microsoft.com/office/drawing/2014/main" id="{BA35AA70-FA23-48E2-82B5-4403B1DDB74C}"/>
-              </a:ext>
-            </a:extLst>
-          </p:cNvPr>
-          <p:cNvPicPr>
-            <a:picLocks noChangeAspect="1"/>
-          </p:cNvPicPr>
-          <p:nvPr/>
-        </p:nvPicPr>
-        <p:blipFill rotWithShape="1">
-          <a:blip r:embed="rId2">
-            <a:clrChange>
-              <a:clrFrom>
-                <a:srgbClr val="FFFFFF"/>
-              </a:clrFrom>
-              <a:clrTo>
-                <a:srgbClr val="FFFFFF">
-                  <a:alpha val="0"/>
-                </a:srgbClr>
-              </a:clrTo>
-            </a:clrChange>
-            <a:extLst>
-              <a:ext uri="{28A0092B-C50C-407E-A947-70E740481C1C}">
-                <a14:useLocalDpi xmlns:a14="http://schemas.microsoft.com/office/drawing/2010/main" val="0"/>
-              </a:ext>
-            </a:extLst>
-          </a:blip>
-          <a:srcRect r="17051"/>
-          <a:stretch/>
-        </p:blipFill>
-        <p:spPr>
-          <a:xfrm>
-            <a:off x="930791" y="2251095"/>
-            <a:ext cx="7937195" cy="1594800"/>
-          </a:xfrm>
-          <a:prstGeom prst="rect">
-            <a:avLst/>
-          </a:prstGeom>
-        </p:spPr>
-      </p:pic>
-      <p:pic>
-        <p:nvPicPr>
-          <p:cNvPr id="9" name="圖片 8">
-            <a:extLst>
-              <a:ext uri="{FF2B5EF4-FFF2-40B4-BE49-F238E27FC236}">
-                <a16:creationId xmlns:a16="http://schemas.microsoft.com/office/drawing/2014/main" id="{9E2CEEFC-EB1F-4232-89C9-D8854B65D16A}"/>
-              </a:ext>
-            </a:extLst>
-          </p:cNvPr>
-          <p:cNvPicPr>
-            <a:picLocks noChangeAspect="1"/>
-          </p:cNvPicPr>
-          <p:nvPr/>
-        </p:nvPicPr>
-        <p:blipFill rotWithShape="1">
-          <a:blip r:embed="rId3">
-            <a:clrChange>
-              <a:clrFrom>
-                <a:srgbClr val="FFFFFF"/>
-              </a:clrFrom>
-              <a:clrTo>
-                <a:srgbClr val="FFFFFF">
-                  <a:alpha val="0"/>
-                </a:srgbClr>
-              </a:clrTo>
-            </a:clrChange>
-            <a:extLst>
-              <a:ext uri="{28A0092B-C50C-407E-A947-70E740481C1C}">
-                <a14:useLocalDpi xmlns:a14="http://schemas.microsoft.com/office/drawing/2010/main" val="0"/>
-              </a:ext>
-            </a:extLst>
-          </a:blip>
-          <a:srcRect r="17223"/>
-          <a:stretch/>
-        </p:blipFill>
-        <p:spPr>
-          <a:xfrm>
-            <a:off x="930791" y="4927745"/>
-            <a:ext cx="7920807" cy="1594800"/>
-          </a:xfrm>
-          <a:prstGeom prst="rect">
-            <a:avLst/>
-          </a:prstGeom>
-        </p:spPr>
-      </p:pic>
-      <p:pic>
-        <p:nvPicPr>
-          <p:cNvPr id="11" name="圖片 10">
-            <a:extLst>
-              <a:ext uri="{FF2B5EF4-FFF2-40B4-BE49-F238E27FC236}">
-                <a16:creationId xmlns:a16="http://schemas.microsoft.com/office/drawing/2014/main" id="{A91246B0-6793-4A42-BD59-084A6D23E970}"/>
-              </a:ext>
-            </a:extLst>
-          </p:cNvPr>
-          <p:cNvPicPr>
-            <a:picLocks noChangeAspect="1"/>
-          </p:cNvPicPr>
-          <p:nvPr/>
-        </p:nvPicPr>
-        <p:blipFill rotWithShape="1">
-          <a:blip r:embed="rId4">
-            <a:extLst>
-              <a:ext uri="{28A0092B-C50C-407E-A947-70E740481C1C}">
-                <a14:useLocalDpi xmlns:a14="http://schemas.microsoft.com/office/drawing/2010/main" val="0"/>
-              </a:ext>
-            </a:extLst>
-          </a:blip>
-          <a:srcRect r="17169"/>
-          <a:stretch/>
-        </p:blipFill>
-        <p:spPr>
-          <a:xfrm>
-            <a:off x="930790" y="639564"/>
-            <a:ext cx="7925854" cy="1594800"/>
-          </a:xfrm>
-          <a:prstGeom prst="rect">
-            <a:avLst/>
-          </a:prstGeom>
-        </p:spPr>
-      </p:pic>
-      <p:sp>
-        <p:nvSpPr>
-          <p:cNvPr id="54" name="矩形: 圓角 53">
-            <a:extLst>
-              <a:ext uri="{FF2B5EF4-FFF2-40B4-BE49-F238E27FC236}">
-                <a16:creationId xmlns:a16="http://schemas.microsoft.com/office/drawing/2014/main" id="{288E9896-9E4F-4C2C-A911-7FEF0722013B}"/>
-              </a:ext>
-            </a:extLst>
-          </p:cNvPr>
-          <p:cNvSpPr/>
-          <p:nvPr/>
-        </p:nvSpPr>
-        <p:spPr>
-          <a:xfrm>
-            <a:off x="285634" y="4626038"/>
-            <a:ext cx="8726400" cy="1640371"/>
-          </a:xfrm>
-          <a:prstGeom prst="roundRect">
-            <a:avLst>
-              <a:gd name="adj" fmla="val 6163"/>
-            </a:avLst>
-          </a:prstGeom>
-          <a:noFill/>
-          <a:ln w="9525" cap="flat" cmpd="sng" algn="ctr">
-            <a:solidFill>
-              <a:schemeClr val="accent2"/>
-            </a:solidFill>
-            <a:prstDash val="solid"/>
-            <a:round/>
-            <a:headEnd type="none" w="med" len="med"/>
-            <a:tailEnd type="none" w="med" len="med"/>
-          </a:ln>
-        </p:spPr>
-        <p:style>
-          <a:lnRef idx="0">
-            <a:scrgbClr r="0" g="0" b="0"/>
-          </a:lnRef>
-          <a:fillRef idx="0">
-            <a:scrgbClr r="0" g="0" b="0"/>
-          </a:fillRef>
-          <a:effectRef idx="0">
-            <a:scrgbClr r="0" g="0" b="0"/>
-          </a:effectRef>
-          <a:fontRef idx="minor">
-            <a:schemeClr val="accent2"/>
-          </a:fontRef>
-        </p:style>
-        <p:txBody>
-          <a:bodyPr rot="0" spcFirstLastPara="0" vertOverflow="overflow" horzOverflow="overflow" vert="horz" wrap="square" lIns="91440" tIns="45720" rIns="91440" bIns="45720" numCol="1" spcCol="0" rtlCol="0" fromWordArt="0" anchor="ctr" anchorCtr="0" forceAA="0" compatLnSpc="1">
-            <a:prstTxWarp prst="textNoShape">
-              <a:avLst/>
-            </a:prstTxWarp>
-            <a:noAutofit/>
-          </a:bodyPr>
-          <a:lstStyle/>
-          <a:p>
-            <a:pPr algn="ctr"/>
-            <a:endParaRPr lang="zh-TW" altLang="en-US" sz="1900" dirty="0">
-              <a:latin typeface="Times New Roman" panose="02020603050405020304" pitchFamily="18" charset="0"/>
-              <a:cs typeface="Times New Roman" panose="02020603050405020304" pitchFamily="18" charset="0"/>
-            </a:endParaRPr>
-          </a:p>
-        </p:txBody>
-      </p:sp>
-      <p:sp>
-        <p:nvSpPr>
-          <p:cNvPr id="55" name="矩形: 圓角 54">
-            <a:extLst>
-              <a:ext uri="{FF2B5EF4-FFF2-40B4-BE49-F238E27FC236}">
-                <a16:creationId xmlns:a16="http://schemas.microsoft.com/office/drawing/2014/main" id="{7BFE40E8-D447-4A65-A047-52809FD40D23}"/>
-              </a:ext>
-            </a:extLst>
-          </p:cNvPr>
-          <p:cNvSpPr/>
-          <p:nvPr/>
-        </p:nvSpPr>
-        <p:spPr>
-          <a:xfrm>
-            <a:off x="285635" y="675807"/>
-            <a:ext cx="8726557" cy="3300880"/>
-          </a:xfrm>
-          <a:prstGeom prst="roundRect">
-            <a:avLst>
-              <a:gd name="adj" fmla="val 6163"/>
-            </a:avLst>
-          </a:prstGeom>
-          <a:noFill/>
-          <a:ln w="9525" cap="flat" cmpd="sng" algn="ctr">
-            <a:solidFill>
-              <a:schemeClr val="accent1"/>
-            </a:solidFill>
-            <a:prstDash val="solid"/>
-            <a:round/>
-            <a:headEnd type="none" w="med" len="med"/>
-            <a:tailEnd type="none" w="med" len="med"/>
-          </a:ln>
-        </p:spPr>
-        <p:style>
-          <a:lnRef idx="0">
-            <a:scrgbClr r="0" g="0" b="0"/>
-          </a:lnRef>
-          <a:fillRef idx="0">
-            <a:scrgbClr r="0" g="0" b="0"/>
-          </a:fillRef>
-          <a:effectRef idx="0">
-            <a:scrgbClr r="0" g="0" b="0"/>
-          </a:effectRef>
-          <a:fontRef idx="minor">
-            <a:schemeClr val="accent1"/>
-          </a:fontRef>
-        </p:style>
-        <p:txBody>
-          <a:bodyPr rot="0" spcFirstLastPara="0" vertOverflow="overflow" horzOverflow="overflow" vert="horz" wrap="square" lIns="91440" tIns="45720" rIns="91440" bIns="45720" numCol="1" spcCol="0" rtlCol="0" fromWordArt="0" anchor="ctr" anchorCtr="0" forceAA="0" compatLnSpc="1">
-            <a:prstTxWarp prst="textNoShape">
-              <a:avLst/>
-            </a:prstTxWarp>
-            <a:noAutofit/>
-          </a:bodyPr>
-          <a:lstStyle/>
-          <a:p>
-            <a:pPr algn="ctr"/>
-            <a:endParaRPr lang="zh-TW" altLang="en-US" sz="1900" dirty="0">
-              <a:latin typeface="Times New Roman" panose="02020603050405020304" pitchFamily="18" charset="0"/>
-              <a:cs typeface="Times New Roman" panose="02020603050405020304" pitchFamily="18" charset="0"/>
-            </a:endParaRPr>
-          </a:p>
-        </p:txBody>
-      </p:sp>
-      <p:grpSp>
-        <p:nvGrpSpPr>
-          <p:cNvPr id="56" name="群組 55">
-            <a:extLst>
-              <a:ext uri="{FF2B5EF4-FFF2-40B4-BE49-F238E27FC236}">
-                <a16:creationId xmlns:a16="http://schemas.microsoft.com/office/drawing/2014/main" id="{16FEC379-B580-4556-AB9A-6B9F500A38DB}"/>
-              </a:ext>
-            </a:extLst>
-          </p:cNvPr>
-          <p:cNvGrpSpPr/>
-          <p:nvPr/>
-        </p:nvGrpSpPr>
-        <p:grpSpPr>
-          <a:xfrm>
-            <a:off x="7328737" y="6283167"/>
-            <a:ext cx="1718308" cy="343171"/>
-            <a:chOff x="10557418" y="6399554"/>
-            <a:chExt cx="2266734" cy="452699"/>
-          </a:xfrm>
-        </p:grpSpPr>
-        <mc:AlternateContent xmlns:mc="http://schemas.openxmlformats.org/markup-compatibility/2006" xmlns:a14="http://schemas.microsoft.com/office/drawing/2010/main">
-          <mc:Choice Requires="a14">
-            <p:sp>
-              <p:nvSpPr>
-                <p:cNvPr id="57" name="矩形 56">
-                  <a:extLst>
-                    <a:ext uri="{FF2B5EF4-FFF2-40B4-BE49-F238E27FC236}">
-                      <a16:creationId xmlns:a16="http://schemas.microsoft.com/office/drawing/2014/main" id="{6D3AE693-FAE4-4477-9E97-B705D2E634A1}"/>
-                    </a:ext>
-                  </a:extLst>
-                </p:cNvPr>
-                <p:cNvSpPr/>
-                <p:nvPr/>
-              </p:nvSpPr>
-              <p:spPr>
-                <a:xfrm>
-                  <a:off x="10995506" y="6399554"/>
-                  <a:ext cx="1828646" cy="452699"/>
-                </a:xfrm>
-                <a:prstGeom prst="rect">
-                  <a:avLst/>
-                </a:prstGeom>
-              </p:spPr>
-              <p:txBody>
-                <a:bodyPr wrap="none">
-                  <a:spAutoFit/>
-                </a:bodyPr>
-                <a:lstStyle/>
-                <a:p>
-                  <a:pPr/>
-                  <a14:m>
-                    <m:oMathPara xmlns:m="http://schemas.openxmlformats.org/officeDocument/2006/math">
-                      <m:oMathParaPr>
-                        <m:jc m:val="centerGroup"/>
-                      </m:oMathParaPr>
-                      <m:oMath xmlns:m="http://schemas.openxmlformats.org/officeDocument/2006/math">
-                        <m:sSubSup>
-                          <m:sSubSupPr>
-                            <m:ctrlPr>
-                              <a:rPr lang="en-US" altLang="zh-TW" sz="1630" i="1">
-                                <a:latin typeface="Cambria Math" panose="02040503050406030204" pitchFamily="18" charset="0"/>
-                              </a:rPr>
-                            </m:ctrlPr>
-                          </m:sSubSupPr>
-                          <m:e>
-                            <m:r>
-                              <a:rPr lang="en-US" altLang="zh-TW" sz="1630" i="1">
-                                <a:latin typeface="Cambria Math" panose="02040503050406030204" pitchFamily="18" charset="0"/>
-                              </a:rPr>
-                              <m:t>𝑊</m:t>
-                            </m:r>
-                          </m:e>
-                          <m:sub>
-                            <m:r>
-                              <a:rPr lang="en-US" altLang="zh-TW" sz="1630" i="1">
-                                <a:latin typeface="Cambria Math" panose="02040503050406030204" pitchFamily="18" charset="0"/>
-                              </a:rPr>
-                              <m:t>0</m:t>
-                            </m:r>
-                          </m:sub>
-                          <m:sup>
-                            <m:r>
-                              <a:rPr lang="en-US" altLang="zh-TW" sz="1630" i="1">
-                                <a:latin typeface="Cambria Math" panose="02040503050406030204" pitchFamily="18" charset="0"/>
-                              </a:rPr>
-                              <m:t> </m:t>
-                            </m:r>
-                          </m:sup>
-                        </m:sSubSup>
-                        <m:r>
-                          <a:rPr lang="en-US" altLang="zh-TW" sz="1630" i="1">
-                            <a:latin typeface="Cambria Math" panose="02040503050406030204" pitchFamily="18" charset="0"/>
-                          </a:rPr>
-                          <m:t>=1.5 </m:t>
-                        </m:r>
-                        <m:r>
-                          <a:rPr lang="en-US" altLang="zh-TW" sz="1630" i="1">
-                            <a:latin typeface="Cambria Math" panose="02040503050406030204" pitchFamily="18" charset="0"/>
-                          </a:rPr>
-                          <m:t>𝜇</m:t>
-                        </m:r>
-                        <m:r>
-                          <m:rPr>
-                            <m:sty m:val="p"/>
-                          </m:rPr>
-                          <a:rPr lang="en-US" altLang="zh-TW" sz="1630">
-                            <a:latin typeface="Cambria Math" panose="02040503050406030204" pitchFamily="18" charset="0"/>
-                          </a:rPr>
-                          <m:t>m</m:t>
-                        </m:r>
-                      </m:oMath>
-                    </m:oMathPara>
-                  </a14:m>
-                  <a:endParaRPr lang="zh-TW" altLang="en-US" sz="1630" dirty="0">
-                    <a:latin typeface="Times New Roman" panose="02020603050405020304" pitchFamily="18" charset="0"/>
-                    <a:cs typeface="Times New Roman" panose="02020603050405020304" pitchFamily="18" charset="0"/>
-                  </a:endParaRPr>
-                </a:p>
-              </p:txBody>
-            </p:sp>
-          </mc:Choice>
-          <mc:Fallback xmlns="">
-            <p:sp>
-              <p:nvSpPr>
-                <p:cNvPr id="6" name="矩形 5">
-                  <a:extLst>
-                    <a:ext uri="{FF2B5EF4-FFF2-40B4-BE49-F238E27FC236}">
-                      <a16:creationId xmlns:a16="http://schemas.microsoft.com/office/drawing/2014/main" id="{33615A92-2488-4DAF-823B-7ACEF3923D24}"/>
-                    </a:ext>
-                  </a:extLst>
-                </p:cNvPr>
-                <p:cNvSpPr>
-                  <a:spLocks noRot="1" noChangeAspect="1" noMove="1" noResize="1" noEditPoints="1" noAdjustHandles="1" noChangeArrowheads="1" noChangeShapeType="1" noTextEdit="1"/>
-                </p:cNvSpPr>
-                <p:nvPr/>
-              </p:nvSpPr>
-              <p:spPr>
-                <a:xfrm>
-                  <a:off x="10995506" y="6399554"/>
-                  <a:ext cx="1828646" cy="452699"/>
-                </a:xfrm>
-                <a:prstGeom prst="rect">
-                  <a:avLst/>
-                </a:prstGeom>
-                <a:blipFill>
-                  <a:blip r:embed="rId5"/>
-                  <a:stretch>
-                    <a:fillRect b="-5263"/>
-                  </a:stretch>
-                </a:blipFill>
-              </p:spPr>
-              <p:txBody>
-                <a:bodyPr/>
-                <a:lstStyle/>
-                <a:p>
-                  <a:r>
-                    <a:rPr lang="zh-TW" altLang="en-US">
-                      <a:noFill/>
-                    </a:rPr>
-                    <a:t> </a:t>
-                  </a:r>
-                </a:p>
-              </p:txBody>
-            </p:sp>
-          </mc:Fallback>
-        </mc:AlternateContent>
-        <p:pic>
-          <p:nvPicPr>
-            <p:cNvPr id="58" name="圖片 57">
-              <a:extLst>
-                <a:ext uri="{FF2B5EF4-FFF2-40B4-BE49-F238E27FC236}">
-                  <a16:creationId xmlns:a16="http://schemas.microsoft.com/office/drawing/2014/main" id="{302A021D-6B28-487B-B28E-B5D67657CE5B}"/>
-                </a:ext>
-              </a:extLst>
-            </p:cNvPr>
-            <p:cNvPicPr>
-              <a:picLocks noChangeAspect="1"/>
-            </p:cNvPicPr>
-            <p:nvPr/>
-          </p:nvPicPr>
-          <p:blipFill>
-            <a:blip r:embed="rId6">
-              <a:clrChange>
-                <a:clrFrom>
-                  <a:srgbClr val="FFFFFF"/>
-                </a:clrFrom>
-                <a:clrTo>
-                  <a:srgbClr val="FFFFFF">
-                    <a:alpha val="0"/>
-                  </a:srgbClr>
-                </a:clrTo>
-              </a:clrChange>
-            </a:blip>
-            <a:stretch>
-              <a:fillRect/>
-            </a:stretch>
-          </p:blipFill>
-          <p:spPr>
-            <a:xfrm>
-              <a:off x="10557418" y="6619851"/>
-              <a:ext cx="476304" cy="136937"/>
-            </a:xfrm>
-            <a:prstGeom prst="rect">
-              <a:avLst/>
-            </a:prstGeom>
-          </p:spPr>
-        </p:pic>
-      </p:grpSp>
-      <mc:AlternateContent xmlns:mc="http://schemas.openxmlformats.org/markup-compatibility/2006">
-        <mc:Choice xmlns:a14="http://schemas.microsoft.com/office/drawing/2010/main" Requires="a14">
-          <p:sp>
-            <p:nvSpPr>
-              <p:cNvPr id="59" name="矩形 58">
-                <a:extLst>
-                  <a:ext uri="{FF2B5EF4-FFF2-40B4-BE49-F238E27FC236}">
-                    <a16:creationId xmlns:a16="http://schemas.microsoft.com/office/drawing/2014/main" id="{4EE619D1-FE5A-4904-9EF9-812D48C58D84}"/>
-                  </a:ext>
-                </a:extLst>
-              </p:cNvPr>
-              <p:cNvSpPr/>
-              <p:nvPr/>
-            </p:nvSpPr>
-            <p:spPr>
-              <a:xfrm>
-                <a:off x="178759" y="4175195"/>
-                <a:ext cx="1495601" cy="456728"/>
-              </a:xfrm>
-              <a:prstGeom prst="rect">
-                <a:avLst/>
-              </a:prstGeom>
-            </p:spPr>
-            <p:txBody>
-              <a:bodyPr wrap="none">
-                <a:spAutoFit/>
-              </a:bodyPr>
-              <a:lstStyle/>
-              <a:p>
-                <a:pPr/>
-                <a14:m>
-                  <m:oMathPara xmlns:m="http://schemas.openxmlformats.org/officeDocument/2006/math">
-                    <m:oMathParaPr>
-                      <m:jc m:val="centerGroup"/>
-                    </m:oMathParaPr>
-                    <m:oMath xmlns:m="http://schemas.openxmlformats.org/officeDocument/2006/math">
-                      <m:r>
-                        <m:rPr>
-                          <m:sty m:val="p"/>
-                        </m:rPr>
-                        <a:rPr lang="en-US" altLang="zh-TW" sz="2000">
-                          <a:latin typeface="Cambria Math" panose="02040503050406030204" pitchFamily="18" charset="0"/>
-                        </a:rPr>
-                        <m:t>Re</m:t>
-                      </m:r>
-                      <m:d>
-                        <m:dPr>
-                          <m:begChr m:val="["/>
-                          <m:endChr m:val="]"/>
-                          <m:ctrlPr>
-                            <a:rPr lang="en-US" altLang="zh-TW" sz="2000" i="1">
-                              <a:latin typeface="Cambria Math" panose="02040503050406030204" pitchFamily="18" charset="0"/>
-                            </a:rPr>
-                          </m:ctrlPr>
-                        </m:dPr>
-                        <m:e>
-                          <m:sSubSup>
-                            <m:sSubSupPr>
-                              <m:ctrlPr>
-                                <a:rPr lang="en-US" altLang="zh-TW" sz="2000" i="1">
-                                  <a:latin typeface="Cambria Math" panose="02040503050406030204" pitchFamily="18" charset="0"/>
-                                </a:rPr>
-                              </m:ctrlPr>
-                            </m:sSubSupPr>
-                            <m:e>
-                              <m:r>
-                                <a:rPr lang="en-US" altLang="zh-TW" sz="2000" i="1">
-                                  <a:latin typeface="Cambria Math" panose="02040503050406030204" pitchFamily="18" charset="0"/>
-                                </a:rPr>
-                                <m:t>𝐴</m:t>
-                              </m:r>
-                            </m:e>
-                            <m:sub>
-                              <m:r>
-                                <a:rPr lang="en-US" altLang="zh-TW" sz="2000" i="1">
-                                  <a:latin typeface="Cambria Math" panose="02040503050406030204" pitchFamily="18" charset="0"/>
-                                </a:rPr>
-                                <m:t>ℓ,</m:t>
-                              </m:r>
-                              <m:r>
-                                <a:rPr lang="en-US" altLang="zh-TW" sz="2000" i="1">
-                                  <a:latin typeface="Cambria Math" panose="02040503050406030204" pitchFamily="18" charset="0"/>
-                                </a:rPr>
-                                <m:t>𝑝</m:t>
-                              </m:r>
-                            </m:sub>
-                            <m:sup>
-                              <m:r>
-                                <a:rPr lang="en-US" altLang="zh-TW" sz="2000" i="1">
-                                  <a:latin typeface="Cambria Math" panose="02040503050406030204" pitchFamily="18" charset="0"/>
-                                </a:rPr>
-                                <m:t>𝐿</m:t>
-                              </m:r>
-                            </m:sup>
-                          </m:sSubSup>
-                          <m:d>
-                            <m:dPr>
-                              <m:ctrlPr>
-                                <a:rPr lang="en-US" altLang="zh-TW" sz="2000" i="1">
-                                  <a:latin typeface="Cambria Math" panose="02040503050406030204" pitchFamily="18" charset="0"/>
-                                </a:rPr>
-                              </m:ctrlPr>
-                            </m:dPr>
-                            <m:e>
-                              <m:r>
-                                <a:rPr lang="en-US" altLang="zh-TW" sz="2000" b="1" i="1">
-                                  <a:latin typeface="Cambria Math" panose="02040503050406030204" pitchFamily="18" charset="0"/>
-                                </a:rPr>
-                                <m:t>𝒓</m:t>
-                              </m:r>
-                            </m:e>
-                          </m:d>
-                        </m:e>
-                      </m:d>
-                    </m:oMath>
-                  </m:oMathPara>
-                </a14:m>
-                <a:endParaRPr lang="zh-TW" altLang="en-US" sz="2000" dirty="0">
-                  <a:latin typeface="Times New Roman" panose="02020603050405020304" pitchFamily="18" charset="0"/>
-                  <a:cs typeface="Times New Roman" panose="02020603050405020304" pitchFamily="18" charset="0"/>
-                </a:endParaRPr>
-              </a:p>
-            </p:txBody>
-          </p:sp>
-        </mc:Choice>
-        <mc:Fallback>
-          <p:sp>
-            <p:nvSpPr>
-              <p:cNvPr id="59" name="矩形 58">
-                <a:extLst>
-                  <a:ext uri="{FF2B5EF4-FFF2-40B4-BE49-F238E27FC236}">
-                    <a16:creationId xmlns:a16="http://schemas.microsoft.com/office/drawing/2014/main" id="{4EE619D1-FE5A-4904-9EF9-812D48C58D84}"/>
-                  </a:ext>
-                </a:extLst>
-              </p:cNvPr>
-              <p:cNvSpPr>
-                <a:spLocks noRot="1" noChangeAspect="1" noMove="1" noResize="1" noEditPoints="1" noAdjustHandles="1" noChangeArrowheads="1" noChangeShapeType="1" noTextEdit="1"/>
-              </p:cNvSpPr>
-              <p:nvPr/>
-            </p:nvSpPr>
-            <p:spPr>
-              <a:xfrm>
-                <a:off x="178759" y="4175195"/>
-                <a:ext cx="1495601" cy="456728"/>
-              </a:xfrm>
-              <a:prstGeom prst="rect">
-                <a:avLst/>
-              </a:prstGeom>
-              <a:blipFill>
-                <a:blip r:embed="rId7"/>
-                <a:stretch>
-                  <a:fillRect b="-4000"/>
-                </a:stretch>
-              </a:blipFill>
-            </p:spPr>
-            <p:txBody>
-              <a:bodyPr/>
-              <a:lstStyle/>
-              <a:p>
-                <a:r>
-                  <a:rPr lang="zh-TW" altLang="en-US">
-                    <a:noFill/>
-                  </a:rPr>
-                  <a:t> </a:t>
-                </a:r>
-              </a:p>
-            </p:txBody>
-          </p:sp>
-        </mc:Fallback>
-      </mc:AlternateContent>
-      <mc:AlternateContent xmlns:mc="http://schemas.openxmlformats.org/markup-compatibility/2006">
-        <mc:Choice xmlns:a14="http://schemas.microsoft.com/office/drawing/2010/main" Requires="a14">
-          <p:sp>
-            <p:nvSpPr>
-              <p:cNvPr id="60" name="矩形 59">
-                <a:extLst>
-                  <a:ext uri="{FF2B5EF4-FFF2-40B4-BE49-F238E27FC236}">
-                    <a16:creationId xmlns:a16="http://schemas.microsoft.com/office/drawing/2014/main" id="{F16C610F-D114-49B6-AA8F-93D1163DC516}"/>
-                  </a:ext>
-                </a:extLst>
-              </p:cNvPr>
-              <p:cNvSpPr/>
-              <p:nvPr/>
-            </p:nvSpPr>
-            <p:spPr>
-              <a:xfrm>
-                <a:off x="302388" y="1193662"/>
-                <a:ext cx="792204" cy="369332"/>
-              </a:xfrm>
-              <a:prstGeom prst="rect">
-                <a:avLst/>
-              </a:prstGeom>
-            </p:spPr>
-            <p:txBody>
-              <a:bodyPr wrap="none">
-                <a:spAutoFit/>
-              </a:bodyPr>
-              <a:lstStyle/>
-              <a:p>
-                <a:pPr/>
-                <a14:m>
-                  <m:oMathPara xmlns:m="http://schemas.openxmlformats.org/officeDocument/2006/math">
-                    <m:oMathParaPr>
-                      <m:jc m:val="centerGroup"/>
-                    </m:oMathParaPr>
-                    <m:oMath xmlns:m="http://schemas.openxmlformats.org/officeDocument/2006/math">
-                      <m:r>
-                        <a:rPr lang="en-US" altLang="zh-TW" i="1">
-                          <a:latin typeface="Cambria Math" panose="02040503050406030204" pitchFamily="18" charset="0"/>
-                        </a:rPr>
-                        <m:t>ℓ=0</m:t>
-                      </m:r>
-                    </m:oMath>
-                  </m:oMathPara>
-                </a14:m>
-                <a:endParaRPr lang="zh-TW" altLang="en-US" dirty="0">
-                  <a:latin typeface="Times New Roman" panose="02020603050405020304" pitchFamily="18" charset="0"/>
-                  <a:cs typeface="Times New Roman" panose="02020603050405020304" pitchFamily="18" charset="0"/>
-                </a:endParaRPr>
-              </a:p>
-            </p:txBody>
-          </p:sp>
-        </mc:Choice>
-        <mc:Fallback>
-          <p:sp>
-            <p:nvSpPr>
-              <p:cNvPr id="60" name="矩形 59">
-                <a:extLst>
-                  <a:ext uri="{FF2B5EF4-FFF2-40B4-BE49-F238E27FC236}">
-                    <a16:creationId xmlns:a16="http://schemas.microsoft.com/office/drawing/2014/main" id="{F16C610F-D114-49B6-AA8F-93D1163DC516}"/>
-                  </a:ext>
-                </a:extLst>
-              </p:cNvPr>
-              <p:cNvSpPr>
-                <a:spLocks noRot="1" noChangeAspect="1" noMove="1" noResize="1" noEditPoints="1" noAdjustHandles="1" noChangeArrowheads="1" noChangeShapeType="1" noTextEdit="1"/>
-              </p:cNvSpPr>
-              <p:nvPr/>
-            </p:nvSpPr>
-            <p:spPr>
-              <a:xfrm>
-                <a:off x="302388" y="1193662"/>
-                <a:ext cx="792204" cy="369332"/>
-              </a:xfrm>
-              <a:prstGeom prst="rect">
-                <a:avLst/>
-              </a:prstGeom>
-              <a:blipFill>
-                <a:blip r:embed="rId8"/>
-                <a:stretch>
-                  <a:fillRect/>
-                </a:stretch>
-              </a:blipFill>
-            </p:spPr>
-            <p:txBody>
-              <a:bodyPr/>
-              <a:lstStyle/>
-              <a:p>
-                <a:r>
-                  <a:rPr lang="zh-TW" altLang="en-US">
-                    <a:noFill/>
-                  </a:rPr>
-                  <a:t> </a:t>
-                </a:r>
-              </a:p>
-            </p:txBody>
-          </p:sp>
-        </mc:Fallback>
-      </mc:AlternateContent>
-      <mc:AlternateContent xmlns:mc="http://schemas.openxmlformats.org/markup-compatibility/2006">
-        <mc:Choice xmlns:a14="http://schemas.microsoft.com/office/drawing/2010/main" Requires="a14">
-          <p:sp>
-            <p:nvSpPr>
-              <p:cNvPr id="61" name="矩形 60">
-                <a:extLst>
-                  <a:ext uri="{FF2B5EF4-FFF2-40B4-BE49-F238E27FC236}">
-                    <a16:creationId xmlns:a16="http://schemas.microsoft.com/office/drawing/2014/main" id="{9FCF0267-AF69-408E-83CF-E40240898E3F}"/>
-                  </a:ext>
-                </a:extLst>
-              </p:cNvPr>
-              <p:cNvSpPr/>
-              <p:nvPr/>
-            </p:nvSpPr>
-            <p:spPr>
-              <a:xfrm>
-                <a:off x="1325290" y="2945160"/>
-                <a:ext cx="641522" cy="343171"/>
-              </a:xfrm>
-              <a:prstGeom prst="rect">
-                <a:avLst/>
-              </a:prstGeom>
-            </p:spPr>
-            <p:txBody>
-              <a:bodyPr wrap="none">
-                <a:spAutoFit/>
-              </a:bodyPr>
-              <a:lstStyle/>
-              <a:p>
-                <a:pPr/>
-                <a14:m>
-                  <m:oMathPara xmlns:m="http://schemas.openxmlformats.org/officeDocument/2006/math">
-                    <m:oMathParaPr>
-                      <m:jc m:val="centerGroup"/>
-                    </m:oMathParaPr>
-                    <m:oMath xmlns:m="http://schemas.openxmlformats.org/officeDocument/2006/math">
-                      <m:r>
-                        <a:rPr lang="en-US" altLang="zh-TW" sz="1630" i="1">
-                          <a:latin typeface="Cambria Math" panose="02040503050406030204" pitchFamily="18" charset="0"/>
-                        </a:rPr>
-                        <m:t>1</m:t>
-                      </m:r>
-                      <m:r>
-                        <a:rPr lang="en-US" altLang="zh-TW" sz="1630" i="1">
-                          <a:latin typeface="Cambria Math" panose="02040503050406030204" pitchFamily="18" charset="0"/>
-                        </a:rPr>
-                        <m:t>𝜇</m:t>
-                      </m:r>
-                      <m:r>
-                        <m:rPr>
-                          <m:sty m:val="p"/>
-                        </m:rPr>
-                        <a:rPr lang="en-US" altLang="zh-TW" sz="1630">
-                          <a:latin typeface="Cambria Math" panose="02040503050406030204" pitchFamily="18" charset="0"/>
-                        </a:rPr>
-                        <m:t>m</m:t>
-                      </m:r>
-                    </m:oMath>
-                  </m:oMathPara>
-                </a14:m>
-                <a:endParaRPr lang="zh-TW" altLang="en-US" sz="1630" dirty="0">
-                  <a:latin typeface="Times New Roman" panose="02020603050405020304" pitchFamily="18" charset="0"/>
-                  <a:cs typeface="Times New Roman" panose="02020603050405020304" pitchFamily="18" charset="0"/>
-                </a:endParaRPr>
-              </a:p>
-            </p:txBody>
-          </p:sp>
-        </mc:Choice>
-        <mc:Fallback>
-          <p:sp>
-            <p:nvSpPr>
-              <p:cNvPr id="61" name="矩形 60">
-                <a:extLst>
-                  <a:ext uri="{FF2B5EF4-FFF2-40B4-BE49-F238E27FC236}">
-                    <a16:creationId xmlns:a16="http://schemas.microsoft.com/office/drawing/2014/main" id="{9FCF0267-AF69-408E-83CF-E40240898E3F}"/>
-                  </a:ext>
-                </a:extLst>
-              </p:cNvPr>
-              <p:cNvSpPr>
-                <a:spLocks noRot="1" noChangeAspect="1" noMove="1" noResize="1" noEditPoints="1" noAdjustHandles="1" noChangeArrowheads="1" noChangeShapeType="1" noTextEdit="1"/>
-              </p:cNvSpPr>
-              <p:nvPr/>
-            </p:nvSpPr>
-            <p:spPr>
-              <a:xfrm>
-                <a:off x="1325290" y="2945160"/>
-                <a:ext cx="641522" cy="343171"/>
-              </a:xfrm>
-              <a:prstGeom prst="rect">
-                <a:avLst/>
-              </a:prstGeom>
-              <a:blipFill>
-                <a:blip r:embed="rId9"/>
-                <a:stretch>
-                  <a:fillRect b="-12500"/>
-                </a:stretch>
-              </a:blipFill>
-            </p:spPr>
-            <p:txBody>
-              <a:bodyPr/>
-              <a:lstStyle/>
-              <a:p>
-                <a:r>
-                  <a:rPr lang="zh-TW" altLang="en-US">
-                    <a:noFill/>
-                  </a:rPr>
-                  <a:t> </a:t>
-                </a:r>
-              </a:p>
-            </p:txBody>
-          </p:sp>
-        </mc:Fallback>
-      </mc:AlternateContent>
-      <p:sp>
-        <p:nvSpPr>
-          <p:cNvPr id="68" name="矩形 67">
-            <a:extLst>
-              <a:ext uri="{FF2B5EF4-FFF2-40B4-BE49-F238E27FC236}">
-                <a16:creationId xmlns:a16="http://schemas.microsoft.com/office/drawing/2014/main" id="{8528E9D6-6595-4C2C-8910-534DECC142AE}"/>
-              </a:ext>
-            </a:extLst>
-          </p:cNvPr>
-          <p:cNvSpPr/>
-          <p:nvPr/>
-        </p:nvSpPr>
-        <p:spPr>
-          <a:xfrm rot="5400000">
-            <a:off x="8875823" y="2682963"/>
-            <a:ext cx="1359668" cy="343171"/>
-          </a:xfrm>
-          <a:prstGeom prst="rect">
-            <a:avLst/>
-          </a:prstGeom>
-        </p:spPr>
-        <p:txBody>
-          <a:bodyPr wrap="none">
-            <a:spAutoFit/>
-          </a:bodyPr>
-          <a:lstStyle/>
-          <a:p>
-            <a:r>
-              <a:rPr lang="en-US" altLang="zh-TW" sz="1630" dirty="0">
-                <a:latin typeface="Times New Roman" panose="02020603050405020304" pitchFamily="18" charset="0"/>
-                <a:cs typeface="Times New Roman" panose="02020603050405020304" pitchFamily="18" charset="0"/>
-              </a:rPr>
-              <a:t>arbitrary units</a:t>
-            </a:r>
-            <a:endParaRPr lang="zh-TW" altLang="en-US" sz="1630" dirty="0">
-              <a:latin typeface="Times New Roman" panose="02020603050405020304" pitchFamily="18" charset="0"/>
-              <a:cs typeface="Times New Roman" panose="02020603050405020304" pitchFamily="18" charset="0"/>
-            </a:endParaRPr>
-          </a:p>
-        </p:txBody>
-      </p:sp>
-      <p:pic>
-        <p:nvPicPr>
-          <p:cNvPr id="69" name="圖片 68">
-            <a:extLst>
-              <a:ext uri="{FF2B5EF4-FFF2-40B4-BE49-F238E27FC236}">
-                <a16:creationId xmlns:a16="http://schemas.microsoft.com/office/drawing/2014/main" id="{01C039CF-7E75-48C6-AE99-5CDFFCE59650}"/>
-              </a:ext>
-            </a:extLst>
-          </p:cNvPr>
-          <p:cNvPicPr>
-            <a:picLocks noChangeAspect="1"/>
-          </p:cNvPicPr>
-          <p:nvPr/>
-        </p:nvPicPr>
-        <p:blipFill rotWithShape="1">
-          <a:blip r:embed="rId10">
-            <a:clrChange>
-              <a:clrFrom>
-                <a:srgbClr val="FFFFFF"/>
-              </a:clrFrom>
-              <a:clrTo>
-                <a:srgbClr val="FFFFFF">
-                  <a:alpha val="0"/>
-                </a:srgbClr>
-              </a:clrTo>
-            </a:clrChange>
-            <a:extLst>
-              <a:ext uri="{28A0092B-C50C-407E-A947-70E740481C1C}">
-                <a14:useLocalDpi xmlns:a14="http://schemas.microsoft.com/office/drawing/2010/main" val="0"/>
-              </a:ext>
-            </a:extLst>
-          </a:blip>
-          <a:srcRect l="85240" r="9825"/>
-          <a:stretch/>
-        </p:blipFill>
-        <p:spPr>
-          <a:xfrm>
-            <a:off x="9040006" y="2132501"/>
-            <a:ext cx="456153" cy="1540367"/>
-          </a:xfrm>
-          <a:prstGeom prst="rect">
-            <a:avLst/>
-          </a:prstGeom>
-        </p:spPr>
-      </p:pic>
-      <mc:AlternateContent xmlns:mc="http://schemas.openxmlformats.org/markup-compatibility/2006">
-        <mc:Choice xmlns:a14="http://schemas.microsoft.com/office/drawing/2010/main" Requires="a14">
-          <p:sp>
-            <p:nvSpPr>
-              <p:cNvPr id="70" name="矩形 69">
-                <a:extLst>
-                  <a:ext uri="{FF2B5EF4-FFF2-40B4-BE49-F238E27FC236}">
-                    <a16:creationId xmlns:a16="http://schemas.microsoft.com/office/drawing/2014/main" id="{9AA7DB4D-008D-4D94-A265-1F97D8FAF1FD}"/>
-                  </a:ext>
-                </a:extLst>
-              </p:cNvPr>
-              <p:cNvSpPr/>
-              <p:nvPr/>
-            </p:nvSpPr>
-            <p:spPr>
-              <a:xfrm>
-                <a:off x="241755" y="166346"/>
-                <a:ext cx="1311256" cy="517514"/>
-              </a:xfrm>
-              <a:prstGeom prst="rect">
-                <a:avLst/>
-              </a:prstGeom>
-            </p:spPr>
-            <p:txBody>
-              <a:bodyPr wrap="none">
-                <a:spAutoFit/>
-              </a:bodyPr>
-              <a:lstStyle/>
-              <a:p>
-                <a:pPr/>
-                <a14:m>
-                  <m:oMathPara xmlns:m="http://schemas.openxmlformats.org/officeDocument/2006/math">
-                    <m:oMathParaPr>
-                      <m:jc m:val="centerGroup"/>
-                    </m:oMathParaPr>
-                    <m:oMath xmlns:m="http://schemas.openxmlformats.org/officeDocument/2006/math">
-                      <m:sSup>
-                        <m:sSupPr>
-                          <m:ctrlPr>
-                            <a:rPr lang="en-US" altLang="zh-TW" sz="2000" i="1">
-                              <a:latin typeface="Cambria Math" panose="02040503050406030204" pitchFamily="18" charset="0"/>
-                            </a:rPr>
-                          </m:ctrlPr>
-                        </m:sSupPr>
-                        <m:e>
-                          <m:d>
-                            <m:dPr>
-                              <m:begChr m:val="|"/>
-                              <m:endChr m:val="|"/>
-                              <m:ctrlPr>
-                                <a:rPr lang="en-US" altLang="zh-TW" sz="2000" i="1">
-                                  <a:latin typeface="Cambria Math" panose="02040503050406030204" pitchFamily="18" charset="0"/>
-                                </a:rPr>
-                              </m:ctrlPr>
-                            </m:dPr>
-                            <m:e>
-                              <m:sSubSup>
-                                <m:sSubSupPr>
-                                  <m:ctrlPr>
-                                    <a:rPr lang="en-US" altLang="zh-TW" sz="2000" i="1">
-                                      <a:latin typeface="Cambria Math" panose="02040503050406030204" pitchFamily="18" charset="0"/>
-                                    </a:rPr>
-                                  </m:ctrlPr>
-                                </m:sSubSupPr>
-                                <m:e>
-                                  <m:r>
-                                    <a:rPr lang="en-US" altLang="zh-TW" sz="2000" i="1">
-                                      <a:latin typeface="Cambria Math" panose="02040503050406030204" pitchFamily="18" charset="0"/>
-                                    </a:rPr>
-                                    <m:t>𝐴</m:t>
-                                  </m:r>
-                                </m:e>
-                                <m:sub>
-                                  <m:r>
-                                    <a:rPr lang="en-US" altLang="zh-TW" sz="2000" i="1">
-                                      <a:latin typeface="Cambria Math" panose="02040503050406030204" pitchFamily="18" charset="0"/>
-                                    </a:rPr>
-                                    <m:t>ℓ,</m:t>
-                                  </m:r>
-                                  <m:r>
-                                    <a:rPr lang="en-US" altLang="zh-TW" sz="2000" i="1">
-                                      <a:latin typeface="Cambria Math" panose="02040503050406030204" pitchFamily="18" charset="0"/>
-                                    </a:rPr>
-                                    <m:t>𝑝</m:t>
-                                  </m:r>
-                                </m:sub>
-                                <m:sup>
-                                  <m:r>
-                                    <a:rPr lang="en-US" altLang="zh-TW" sz="2000" i="1">
-                                      <a:latin typeface="Cambria Math" panose="02040503050406030204" pitchFamily="18" charset="0"/>
-                                    </a:rPr>
-                                    <m:t>𝐿</m:t>
-                                  </m:r>
-                                </m:sup>
-                              </m:sSubSup>
-                              <m:d>
-                                <m:dPr>
-                                  <m:ctrlPr>
-                                    <a:rPr lang="en-US" altLang="zh-TW" sz="2000" i="1">
-                                      <a:latin typeface="Cambria Math" panose="02040503050406030204" pitchFamily="18" charset="0"/>
-                                    </a:rPr>
-                                  </m:ctrlPr>
-                                </m:dPr>
-                                <m:e>
-                                  <m:r>
-                                    <a:rPr lang="en-US" altLang="zh-TW" sz="2000" b="1" i="1">
-                                      <a:latin typeface="Cambria Math" panose="02040503050406030204" pitchFamily="18" charset="0"/>
-                                    </a:rPr>
-                                    <m:t>𝒓</m:t>
-                                  </m:r>
-                                </m:e>
-                              </m:d>
-                            </m:e>
-                          </m:d>
-                        </m:e>
-                        <m:sup>
-                          <m:r>
-                            <a:rPr lang="en-US" altLang="zh-TW" sz="2000" i="1">
-                              <a:latin typeface="Cambria Math" panose="02040503050406030204" pitchFamily="18" charset="0"/>
-                            </a:rPr>
-                            <m:t>2</m:t>
-                          </m:r>
-                        </m:sup>
-                      </m:sSup>
-                    </m:oMath>
-                  </m:oMathPara>
-                </a14:m>
-                <a:endParaRPr lang="zh-TW" altLang="en-US" sz="2000" dirty="0">
-                  <a:latin typeface="Times New Roman" panose="02020603050405020304" pitchFamily="18" charset="0"/>
-                  <a:cs typeface="Times New Roman" panose="02020603050405020304" pitchFamily="18" charset="0"/>
-                </a:endParaRPr>
-              </a:p>
-            </p:txBody>
-          </p:sp>
-        </mc:Choice>
-        <mc:Fallback>
-          <p:sp>
-            <p:nvSpPr>
-              <p:cNvPr id="70" name="矩形 69">
-                <a:extLst>
-                  <a:ext uri="{FF2B5EF4-FFF2-40B4-BE49-F238E27FC236}">
-                    <a16:creationId xmlns:a16="http://schemas.microsoft.com/office/drawing/2014/main" id="{9AA7DB4D-008D-4D94-A265-1F97D8FAF1FD}"/>
-                  </a:ext>
-                </a:extLst>
-              </p:cNvPr>
-              <p:cNvSpPr>
-                <a:spLocks noRot="1" noChangeAspect="1" noMove="1" noResize="1" noEditPoints="1" noAdjustHandles="1" noChangeArrowheads="1" noChangeShapeType="1" noTextEdit="1"/>
-              </p:cNvSpPr>
-              <p:nvPr/>
-            </p:nvSpPr>
-            <p:spPr>
-              <a:xfrm>
-                <a:off x="241755" y="166346"/>
-                <a:ext cx="1311256" cy="517514"/>
-              </a:xfrm>
-              <a:prstGeom prst="rect">
-                <a:avLst/>
-              </a:prstGeom>
-              <a:blipFill>
-                <a:blip r:embed="rId11"/>
-                <a:stretch>
-                  <a:fillRect/>
-                </a:stretch>
-              </a:blipFill>
-            </p:spPr>
-            <p:txBody>
-              <a:bodyPr/>
-              <a:lstStyle/>
-              <a:p>
-                <a:r>
-                  <a:rPr lang="zh-TW" altLang="en-US">
-                    <a:noFill/>
-                  </a:rPr>
-                  <a:t> </a:t>
-                </a:r>
-              </a:p>
-            </p:txBody>
-          </p:sp>
-        </mc:Fallback>
-      </mc:AlternateContent>
-      <mc:AlternateContent xmlns:mc="http://schemas.openxmlformats.org/markup-compatibility/2006">
-        <mc:Choice xmlns:a14="http://schemas.microsoft.com/office/drawing/2010/main" Requires="a14">
-          <p:sp>
-            <p:nvSpPr>
-              <p:cNvPr id="71" name="矩形 70">
-                <a:extLst>
-                  <a:ext uri="{FF2B5EF4-FFF2-40B4-BE49-F238E27FC236}">
-                    <a16:creationId xmlns:a16="http://schemas.microsoft.com/office/drawing/2014/main" id="{828A5EB9-9DE5-40C8-9CDD-B9ACC7FA4D60}"/>
-                  </a:ext>
-                </a:extLst>
-              </p:cNvPr>
-              <p:cNvSpPr/>
-              <p:nvPr/>
-            </p:nvSpPr>
-            <p:spPr>
-              <a:xfrm>
-                <a:off x="1363871" y="1991165"/>
-                <a:ext cx="744243" cy="343171"/>
-              </a:xfrm>
-              <a:prstGeom prst="rect">
-                <a:avLst/>
-              </a:prstGeom>
-            </p:spPr>
-            <p:txBody>
-              <a:bodyPr wrap="none">
-                <a:spAutoFit/>
-              </a:bodyPr>
-              <a:lstStyle/>
-              <a:p>
-                <a:pPr/>
-                <a14:m>
-                  <m:oMathPara xmlns:m="http://schemas.openxmlformats.org/officeDocument/2006/math">
-                    <m:oMathParaPr>
-                      <m:jc m:val="centerGroup"/>
-                    </m:oMathParaPr>
-                    <m:oMath xmlns:m="http://schemas.openxmlformats.org/officeDocument/2006/math">
-                      <m:r>
-                        <a:rPr lang="en-US" altLang="zh-TW" sz="1630" i="1">
-                          <a:latin typeface="Cambria Math" panose="02040503050406030204" pitchFamily="18" charset="0"/>
-                        </a:rPr>
-                        <m:t>𝑝</m:t>
-                      </m:r>
-                      <m:r>
-                        <a:rPr lang="en-US" altLang="zh-TW" sz="1630" i="1">
-                          <a:latin typeface="Cambria Math" panose="02040503050406030204" pitchFamily="18" charset="0"/>
-                        </a:rPr>
-                        <m:t>=0</m:t>
-                      </m:r>
-                    </m:oMath>
-                  </m:oMathPara>
-                </a14:m>
-                <a:endParaRPr lang="zh-TW" altLang="en-US" sz="1630" dirty="0">
-                  <a:latin typeface="Times New Roman" panose="02020603050405020304" pitchFamily="18" charset="0"/>
-                  <a:cs typeface="Times New Roman" panose="02020603050405020304" pitchFamily="18" charset="0"/>
-                </a:endParaRPr>
-              </a:p>
-            </p:txBody>
-          </p:sp>
-        </mc:Choice>
-        <mc:Fallback>
-          <p:sp>
-            <p:nvSpPr>
-              <p:cNvPr id="71" name="矩形 70">
-                <a:extLst>
-                  <a:ext uri="{FF2B5EF4-FFF2-40B4-BE49-F238E27FC236}">
-                    <a16:creationId xmlns:a16="http://schemas.microsoft.com/office/drawing/2014/main" id="{828A5EB9-9DE5-40C8-9CDD-B9ACC7FA4D60}"/>
-                  </a:ext>
-                </a:extLst>
-              </p:cNvPr>
-              <p:cNvSpPr>
-                <a:spLocks noRot="1" noChangeAspect="1" noMove="1" noResize="1" noEditPoints="1" noAdjustHandles="1" noChangeArrowheads="1" noChangeShapeType="1" noTextEdit="1"/>
-              </p:cNvSpPr>
-              <p:nvPr/>
-            </p:nvSpPr>
-            <p:spPr>
-              <a:xfrm>
-                <a:off x="1363871" y="1991165"/>
-                <a:ext cx="744243" cy="343171"/>
-              </a:xfrm>
-              <a:prstGeom prst="rect">
-                <a:avLst/>
-              </a:prstGeom>
-              <a:blipFill>
-                <a:blip r:embed="rId12"/>
-                <a:stretch>
-                  <a:fillRect b="-5357"/>
-                </a:stretch>
-              </a:blipFill>
-            </p:spPr>
-            <p:txBody>
-              <a:bodyPr/>
-              <a:lstStyle/>
-              <a:p>
-                <a:r>
-                  <a:rPr lang="zh-TW" altLang="en-US">
-                    <a:noFill/>
-                  </a:rPr>
-                  <a:t> </a:t>
-                </a:r>
-              </a:p>
-            </p:txBody>
-          </p:sp>
-        </mc:Fallback>
-      </mc:AlternateContent>
-      <mc:AlternateContent xmlns:mc="http://schemas.openxmlformats.org/markup-compatibility/2006">
-        <mc:Choice xmlns:a14="http://schemas.microsoft.com/office/drawing/2010/main" Requires="a14">
-          <p:sp>
-            <p:nvSpPr>
-              <p:cNvPr id="72" name="矩形 71">
-                <a:extLst>
-                  <a:ext uri="{FF2B5EF4-FFF2-40B4-BE49-F238E27FC236}">
-                    <a16:creationId xmlns:a16="http://schemas.microsoft.com/office/drawing/2014/main" id="{F32EE6FA-1AD1-4016-BD95-6900EA5B5573}"/>
-                  </a:ext>
-                </a:extLst>
-              </p:cNvPr>
-              <p:cNvSpPr/>
-              <p:nvPr/>
-            </p:nvSpPr>
-            <p:spPr>
-              <a:xfrm>
-                <a:off x="2952800" y="1991165"/>
-                <a:ext cx="744243" cy="343171"/>
-              </a:xfrm>
-              <a:prstGeom prst="rect">
-                <a:avLst/>
-              </a:prstGeom>
-            </p:spPr>
-            <p:txBody>
-              <a:bodyPr wrap="none">
-                <a:spAutoFit/>
-              </a:bodyPr>
-              <a:lstStyle/>
-              <a:p>
-                <a:pPr/>
-                <a14:m>
-                  <m:oMathPara xmlns:m="http://schemas.openxmlformats.org/officeDocument/2006/math">
-                    <m:oMathParaPr>
-                      <m:jc m:val="centerGroup"/>
-                    </m:oMathParaPr>
-                    <m:oMath xmlns:m="http://schemas.openxmlformats.org/officeDocument/2006/math">
-                      <m:r>
-                        <a:rPr lang="en-US" altLang="zh-TW" sz="1630" i="1">
-                          <a:latin typeface="Cambria Math" panose="02040503050406030204" pitchFamily="18" charset="0"/>
-                        </a:rPr>
-                        <m:t>𝑝</m:t>
-                      </m:r>
-                      <m:r>
-                        <a:rPr lang="en-US" altLang="zh-TW" sz="1630" i="1">
-                          <a:latin typeface="Cambria Math" panose="02040503050406030204" pitchFamily="18" charset="0"/>
-                        </a:rPr>
-                        <m:t>=1</m:t>
-                      </m:r>
-                    </m:oMath>
-                  </m:oMathPara>
-                </a14:m>
-                <a:endParaRPr lang="zh-TW" altLang="en-US" sz="1630" dirty="0">
-                  <a:latin typeface="Times New Roman" panose="02020603050405020304" pitchFamily="18" charset="0"/>
-                  <a:cs typeface="Times New Roman" panose="02020603050405020304" pitchFamily="18" charset="0"/>
-                </a:endParaRPr>
-              </a:p>
-            </p:txBody>
-          </p:sp>
-        </mc:Choice>
-        <mc:Fallback>
-          <p:sp>
-            <p:nvSpPr>
-              <p:cNvPr id="72" name="矩形 71">
-                <a:extLst>
-                  <a:ext uri="{FF2B5EF4-FFF2-40B4-BE49-F238E27FC236}">
-                    <a16:creationId xmlns:a16="http://schemas.microsoft.com/office/drawing/2014/main" id="{F32EE6FA-1AD1-4016-BD95-6900EA5B5573}"/>
-                  </a:ext>
-                </a:extLst>
-              </p:cNvPr>
-              <p:cNvSpPr>
-                <a:spLocks noRot="1" noChangeAspect="1" noMove="1" noResize="1" noEditPoints="1" noAdjustHandles="1" noChangeArrowheads="1" noChangeShapeType="1" noTextEdit="1"/>
-              </p:cNvSpPr>
-              <p:nvPr/>
-            </p:nvSpPr>
-            <p:spPr>
-              <a:xfrm>
-                <a:off x="2952800" y="1991165"/>
-                <a:ext cx="744243" cy="343171"/>
-              </a:xfrm>
-              <a:prstGeom prst="rect">
-                <a:avLst/>
-              </a:prstGeom>
-              <a:blipFill>
-                <a:blip r:embed="rId13"/>
-                <a:stretch>
-                  <a:fillRect b="-5357"/>
-                </a:stretch>
-              </a:blipFill>
-            </p:spPr>
-            <p:txBody>
-              <a:bodyPr/>
-              <a:lstStyle/>
-              <a:p>
-                <a:r>
-                  <a:rPr lang="zh-TW" altLang="en-US">
-                    <a:noFill/>
-                  </a:rPr>
-                  <a:t> </a:t>
-                </a:r>
-              </a:p>
-            </p:txBody>
-          </p:sp>
-        </mc:Fallback>
-      </mc:AlternateContent>
-      <mc:AlternateContent xmlns:mc="http://schemas.openxmlformats.org/markup-compatibility/2006">
-        <mc:Choice xmlns:a14="http://schemas.microsoft.com/office/drawing/2010/main" Requires="a14">
-          <p:sp>
-            <p:nvSpPr>
-              <p:cNvPr id="73" name="矩形 72">
-                <a:extLst>
-                  <a:ext uri="{FF2B5EF4-FFF2-40B4-BE49-F238E27FC236}">
-                    <a16:creationId xmlns:a16="http://schemas.microsoft.com/office/drawing/2014/main" id="{3A529BC5-5052-446D-8C8C-9BC5C653DB64}"/>
-                  </a:ext>
-                </a:extLst>
-              </p:cNvPr>
-              <p:cNvSpPr/>
-              <p:nvPr/>
-            </p:nvSpPr>
-            <p:spPr>
-              <a:xfrm>
-                <a:off x="4541729" y="1991165"/>
-                <a:ext cx="744243" cy="343171"/>
-              </a:xfrm>
-              <a:prstGeom prst="rect">
-                <a:avLst/>
-              </a:prstGeom>
-            </p:spPr>
-            <p:txBody>
-              <a:bodyPr wrap="none">
-                <a:spAutoFit/>
-              </a:bodyPr>
-              <a:lstStyle/>
-              <a:p>
-                <a:pPr/>
-                <a14:m>
-                  <m:oMathPara xmlns:m="http://schemas.openxmlformats.org/officeDocument/2006/math">
-                    <m:oMathParaPr>
-                      <m:jc m:val="centerGroup"/>
-                    </m:oMathParaPr>
-                    <m:oMath xmlns:m="http://schemas.openxmlformats.org/officeDocument/2006/math">
-                      <m:r>
-                        <a:rPr lang="en-US" altLang="zh-TW" sz="1630" i="1">
-                          <a:latin typeface="Cambria Math" panose="02040503050406030204" pitchFamily="18" charset="0"/>
-                        </a:rPr>
-                        <m:t>𝑝</m:t>
-                      </m:r>
-                      <m:r>
-                        <a:rPr lang="en-US" altLang="zh-TW" sz="1630" i="1">
-                          <a:latin typeface="Cambria Math" panose="02040503050406030204" pitchFamily="18" charset="0"/>
-                        </a:rPr>
-                        <m:t>=2</m:t>
-                      </m:r>
-                    </m:oMath>
-                  </m:oMathPara>
-                </a14:m>
-                <a:endParaRPr lang="zh-TW" altLang="en-US" sz="1630" dirty="0">
-                  <a:latin typeface="Times New Roman" panose="02020603050405020304" pitchFamily="18" charset="0"/>
-                  <a:cs typeface="Times New Roman" panose="02020603050405020304" pitchFamily="18" charset="0"/>
-                </a:endParaRPr>
-              </a:p>
-            </p:txBody>
-          </p:sp>
-        </mc:Choice>
-        <mc:Fallback>
-          <p:sp>
-            <p:nvSpPr>
-              <p:cNvPr id="73" name="矩形 72">
-                <a:extLst>
-                  <a:ext uri="{FF2B5EF4-FFF2-40B4-BE49-F238E27FC236}">
-                    <a16:creationId xmlns:a16="http://schemas.microsoft.com/office/drawing/2014/main" id="{3A529BC5-5052-446D-8C8C-9BC5C653DB64}"/>
-                  </a:ext>
-                </a:extLst>
-              </p:cNvPr>
-              <p:cNvSpPr>
-                <a:spLocks noRot="1" noChangeAspect="1" noMove="1" noResize="1" noEditPoints="1" noAdjustHandles="1" noChangeArrowheads="1" noChangeShapeType="1" noTextEdit="1"/>
-              </p:cNvSpPr>
-              <p:nvPr/>
-            </p:nvSpPr>
-            <p:spPr>
-              <a:xfrm>
-                <a:off x="4541729" y="1991165"/>
-                <a:ext cx="744243" cy="343171"/>
-              </a:xfrm>
-              <a:prstGeom prst="rect">
-                <a:avLst/>
-              </a:prstGeom>
-              <a:blipFill>
-                <a:blip r:embed="rId14"/>
-                <a:stretch>
-                  <a:fillRect b="-5357"/>
-                </a:stretch>
-              </a:blipFill>
-            </p:spPr>
-            <p:txBody>
-              <a:bodyPr/>
-              <a:lstStyle/>
-              <a:p>
-                <a:r>
-                  <a:rPr lang="zh-TW" altLang="en-US">
-                    <a:noFill/>
-                  </a:rPr>
-                  <a:t> </a:t>
-                </a:r>
-              </a:p>
-            </p:txBody>
-          </p:sp>
-        </mc:Fallback>
-      </mc:AlternateContent>
-      <mc:AlternateContent xmlns:mc="http://schemas.openxmlformats.org/markup-compatibility/2006">
-        <mc:Choice xmlns:a14="http://schemas.microsoft.com/office/drawing/2010/main" Requires="a14">
-          <p:sp>
-            <p:nvSpPr>
-              <p:cNvPr id="74" name="矩形 73">
-                <a:extLst>
-                  <a:ext uri="{FF2B5EF4-FFF2-40B4-BE49-F238E27FC236}">
-                    <a16:creationId xmlns:a16="http://schemas.microsoft.com/office/drawing/2014/main" id="{6CD9DE1A-C7D0-4B39-AC88-51776198DF4F}"/>
-                  </a:ext>
-                </a:extLst>
-              </p:cNvPr>
-              <p:cNvSpPr/>
-              <p:nvPr/>
-            </p:nvSpPr>
-            <p:spPr>
-              <a:xfrm>
-                <a:off x="6130658" y="1991165"/>
-                <a:ext cx="744243" cy="343171"/>
-              </a:xfrm>
-              <a:prstGeom prst="rect">
-                <a:avLst/>
-              </a:prstGeom>
-            </p:spPr>
-            <p:txBody>
-              <a:bodyPr wrap="none">
-                <a:spAutoFit/>
-              </a:bodyPr>
-              <a:lstStyle/>
-              <a:p>
-                <a:pPr/>
-                <a14:m>
-                  <m:oMathPara xmlns:m="http://schemas.openxmlformats.org/officeDocument/2006/math">
-                    <m:oMathParaPr>
-                      <m:jc m:val="centerGroup"/>
-                    </m:oMathParaPr>
-                    <m:oMath xmlns:m="http://schemas.openxmlformats.org/officeDocument/2006/math">
-                      <m:r>
-                        <a:rPr lang="en-US" altLang="zh-TW" sz="1630" i="1">
-                          <a:latin typeface="Cambria Math" panose="02040503050406030204" pitchFamily="18" charset="0"/>
-                        </a:rPr>
-                        <m:t>𝑝</m:t>
-                      </m:r>
-                      <m:r>
-                        <a:rPr lang="en-US" altLang="zh-TW" sz="1630" i="1">
-                          <a:latin typeface="Cambria Math" panose="02040503050406030204" pitchFamily="18" charset="0"/>
-                        </a:rPr>
-                        <m:t>=3</m:t>
-                      </m:r>
-                    </m:oMath>
-                  </m:oMathPara>
-                </a14:m>
-                <a:endParaRPr lang="zh-TW" altLang="en-US" sz="1630" dirty="0">
-                  <a:latin typeface="Times New Roman" panose="02020603050405020304" pitchFamily="18" charset="0"/>
-                  <a:cs typeface="Times New Roman" panose="02020603050405020304" pitchFamily="18" charset="0"/>
-                </a:endParaRPr>
-              </a:p>
-            </p:txBody>
-          </p:sp>
-        </mc:Choice>
-        <mc:Fallback>
-          <p:sp>
-            <p:nvSpPr>
-              <p:cNvPr id="74" name="矩形 73">
-                <a:extLst>
-                  <a:ext uri="{FF2B5EF4-FFF2-40B4-BE49-F238E27FC236}">
-                    <a16:creationId xmlns:a16="http://schemas.microsoft.com/office/drawing/2014/main" id="{6CD9DE1A-C7D0-4B39-AC88-51776198DF4F}"/>
-                  </a:ext>
-                </a:extLst>
-              </p:cNvPr>
-              <p:cNvSpPr>
-                <a:spLocks noRot="1" noChangeAspect="1" noMove="1" noResize="1" noEditPoints="1" noAdjustHandles="1" noChangeArrowheads="1" noChangeShapeType="1" noTextEdit="1"/>
-              </p:cNvSpPr>
-              <p:nvPr/>
-            </p:nvSpPr>
-            <p:spPr>
-              <a:xfrm>
-                <a:off x="6130658" y="1991165"/>
-                <a:ext cx="744243" cy="343171"/>
-              </a:xfrm>
-              <a:prstGeom prst="rect">
-                <a:avLst/>
-              </a:prstGeom>
-              <a:blipFill>
-                <a:blip r:embed="rId15"/>
-                <a:stretch>
-                  <a:fillRect b="-5357"/>
-                </a:stretch>
-              </a:blipFill>
-            </p:spPr>
-            <p:txBody>
-              <a:bodyPr/>
-              <a:lstStyle/>
-              <a:p>
-                <a:r>
-                  <a:rPr lang="zh-TW" altLang="en-US">
-                    <a:noFill/>
-                  </a:rPr>
-                  <a:t> </a:t>
-                </a:r>
-              </a:p>
-            </p:txBody>
-          </p:sp>
-        </mc:Fallback>
-      </mc:AlternateContent>
-      <mc:AlternateContent xmlns:mc="http://schemas.openxmlformats.org/markup-compatibility/2006">
-        <mc:Choice xmlns:a14="http://schemas.microsoft.com/office/drawing/2010/main" Requires="a14">
-          <p:sp>
-            <p:nvSpPr>
-              <p:cNvPr id="75" name="矩形 74">
-                <a:extLst>
-                  <a:ext uri="{FF2B5EF4-FFF2-40B4-BE49-F238E27FC236}">
-                    <a16:creationId xmlns:a16="http://schemas.microsoft.com/office/drawing/2014/main" id="{AF090529-51DA-4CEB-A8A7-EF1B88A1CED7}"/>
-                  </a:ext>
-                </a:extLst>
-              </p:cNvPr>
-              <p:cNvSpPr/>
-              <p:nvPr/>
-            </p:nvSpPr>
-            <p:spPr>
-              <a:xfrm>
-                <a:off x="7719587" y="1991165"/>
-                <a:ext cx="744243" cy="343171"/>
-              </a:xfrm>
-              <a:prstGeom prst="rect">
-                <a:avLst/>
-              </a:prstGeom>
-            </p:spPr>
-            <p:txBody>
-              <a:bodyPr wrap="none">
-                <a:spAutoFit/>
-              </a:bodyPr>
-              <a:lstStyle/>
-              <a:p>
-                <a:pPr/>
-                <a14:m>
-                  <m:oMathPara xmlns:m="http://schemas.openxmlformats.org/officeDocument/2006/math">
-                    <m:oMathParaPr>
-                      <m:jc m:val="centerGroup"/>
-                    </m:oMathParaPr>
-                    <m:oMath xmlns:m="http://schemas.openxmlformats.org/officeDocument/2006/math">
-                      <m:r>
-                        <a:rPr lang="en-US" altLang="zh-TW" sz="1630" i="1">
-                          <a:latin typeface="Cambria Math" panose="02040503050406030204" pitchFamily="18" charset="0"/>
-                        </a:rPr>
-                        <m:t>𝑝</m:t>
-                      </m:r>
-                      <m:r>
-                        <a:rPr lang="en-US" altLang="zh-TW" sz="1630" i="1">
-                          <a:latin typeface="Cambria Math" panose="02040503050406030204" pitchFamily="18" charset="0"/>
-                        </a:rPr>
-                        <m:t>=4</m:t>
-                      </m:r>
-                    </m:oMath>
-                  </m:oMathPara>
-                </a14:m>
-                <a:endParaRPr lang="zh-TW" altLang="en-US" sz="1630" dirty="0">
-                  <a:latin typeface="Times New Roman" panose="02020603050405020304" pitchFamily="18" charset="0"/>
-                  <a:cs typeface="Times New Roman" panose="02020603050405020304" pitchFamily="18" charset="0"/>
-                </a:endParaRPr>
-              </a:p>
-            </p:txBody>
-          </p:sp>
-        </mc:Choice>
-        <mc:Fallback>
-          <p:sp>
-            <p:nvSpPr>
-              <p:cNvPr id="75" name="矩形 74">
-                <a:extLst>
-                  <a:ext uri="{FF2B5EF4-FFF2-40B4-BE49-F238E27FC236}">
-                    <a16:creationId xmlns:a16="http://schemas.microsoft.com/office/drawing/2014/main" id="{AF090529-51DA-4CEB-A8A7-EF1B88A1CED7}"/>
-                  </a:ext>
-                </a:extLst>
-              </p:cNvPr>
-              <p:cNvSpPr>
-                <a:spLocks noRot="1" noChangeAspect="1" noMove="1" noResize="1" noEditPoints="1" noAdjustHandles="1" noChangeArrowheads="1" noChangeShapeType="1" noTextEdit="1"/>
-              </p:cNvSpPr>
-              <p:nvPr/>
-            </p:nvSpPr>
-            <p:spPr>
-              <a:xfrm>
-                <a:off x="7719587" y="1991165"/>
-                <a:ext cx="744243" cy="343171"/>
-              </a:xfrm>
-              <a:prstGeom prst="rect">
-                <a:avLst/>
-              </a:prstGeom>
-              <a:blipFill>
-                <a:blip r:embed="rId16"/>
-                <a:stretch>
-                  <a:fillRect b="-5357"/>
-                </a:stretch>
-              </a:blipFill>
-            </p:spPr>
-            <p:txBody>
-              <a:bodyPr/>
-              <a:lstStyle/>
-              <a:p>
-                <a:r>
-                  <a:rPr lang="zh-TW" altLang="en-US">
-                    <a:noFill/>
-                  </a:rPr>
-                  <a:t> </a:t>
-                </a:r>
-              </a:p>
-            </p:txBody>
-          </p:sp>
-        </mc:Fallback>
-      </mc:AlternateContent>
-      <p:grpSp>
-        <p:nvGrpSpPr>
-          <p:cNvPr id="77" name="群組 76">
-            <a:extLst>
-              <a:ext uri="{FF2B5EF4-FFF2-40B4-BE49-F238E27FC236}">
-                <a16:creationId xmlns:a16="http://schemas.microsoft.com/office/drawing/2014/main" id="{F9A72FEA-E719-4DA3-B473-7A60CB359938}"/>
-              </a:ext>
-            </a:extLst>
-          </p:cNvPr>
-          <p:cNvGrpSpPr/>
-          <p:nvPr/>
-        </p:nvGrpSpPr>
-        <p:grpSpPr>
-          <a:xfrm>
-            <a:off x="1550692" y="2302485"/>
-            <a:ext cx="550009" cy="592612"/>
-            <a:chOff x="-988088" y="945710"/>
-            <a:chExt cx="550009" cy="592612"/>
-          </a:xfrm>
-        </p:grpSpPr>
-        <mc:AlternateContent xmlns:mc="http://schemas.openxmlformats.org/markup-compatibility/2006" xmlns:a14="http://schemas.microsoft.com/office/drawing/2010/main">
-          <mc:Choice Requires="a14">
-            <p:sp>
-              <p:nvSpPr>
-                <p:cNvPr id="78" name="文字方塊 77">
-                  <a:extLst>
-                    <a:ext uri="{FF2B5EF4-FFF2-40B4-BE49-F238E27FC236}">
-                      <a16:creationId xmlns:a16="http://schemas.microsoft.com/office/drawing/2014/main" id="{EDEB094F-393C-43F0-B603-2E7016A0DB05}"/>
-                    </a:ext>
-                  </a:extLst>
-                </p:cNvPr>
-                <p:cNvSpPr txBox="1"/>
-                <p:nvPr/>
-              </p:nvSpPr>
-              <p:spPr>
-                <a:xfrm>
-                  <a:off x="-988088" y="945710"/>
-                  <a:ext cx="323386" cy="343171"/>
-                </a:xfrm>
-                <a:prstGeom prst="rect">
-                  <a:avLst/>
-                </a:prstGeom>
-                <a:noFill/>
-              </p:spPr>
-              <p:txBody>
-                <a:bodyPr wrap="square" rtlCol="0">
-                  <a:spAutoFit/>
-                </a:bodyPr>
-                <a:lstStyle/>
-                <a:p>
-                  <a:pPr/>
-                  <a14:m>
-                    <m:oMathPara xmlns:m="http://schemas.openxmlformats.org/officeDocument/2006/math">
-                      <m:oMathParaPr>
-                        <m:jc m:val="centerGroup"/>
-                      </m:oMathParaPr>
-                      <m:oMath xmlns:m="http://schemas.openxmlformats.org/officeDocument/2006/math">
-                        <m:acc>
-                          <m:accPr>
-                            <m:chr m:val="̂"/>
-                            <m:ctrlPr>
-                              <a:rPr lang="en-US" altLang="zh-TW" sz="1630" i="1">
-                                <a:latin typeface="Cambria Math" panose="02040503050406030204" pitchFamily="18" charset="0"/>
-                              </a:rPr>
-                            </m:ctrlPr>
-                          </m:accPr>
-                          <m:e>
-                            <m:r>
-                              <a:rPr lang="en-US" altLang="zh-TW" sz="1630" b="1" i="1">
-                                <a:latin typeface="Cambria Math" panose="02040503050406030204" pitchFamily="18" charset="0"/>
-                              </a:rPr>
-                              <m:t>𝒚</m:t>
-                            </m:r>
-                          </m:e>
-                        </m:acc>
-                      </m:oMath>
-                    </m:oMathPara>
-                  </a14:m>
-                  <a:endParaRPr lang="en-US" altLang="zh-TW" sz="1630" dirty="0">
-                    <a:latin typeface="Times New Roman" panose="02020603050405020304" pitchFamily="18" charset="0"/>
-                    <a:cs typeface="Times New Roman" panose="02020603050405020304" pitchFamily="18" charset="0"/>
-                  </a:endParaRPr>
-                </a:p>
-              </p:txBody>
-            </p:sp>
-          </mc:Choice>
-          <mc:Fallback xmlns="">
-            <p:sp>
-              <p:nvSpPr>
-                <p:cNvPr id="76" name="文字方塊 75">
-                  <a:extLst>
-                    <a:ext uri="{FF2B5EF4-FFF2-40B4-BE49-F238E27FC236}">
-                      <a16:creationId xmlns:a16="http://schemas.microsoft.com/office/drawing/2014/main" id="{DA635BAA-EFD7-435B-BCE4-F0FC3026F2A5}"/>
-                    </a:ext>
-                  </a:extLst>
-                </p:cNvPr>
-                <p:cNvSpPr txBox="1">
-                  <a:spLocks noRot="1" noChangeAspect="1" noMove="1" noResize="1" noEditPoints="1" noAdjustHandles="1" noChangeArrowheads="1" noChangeShapeType="1" noTextEdit="1"/>
-                </p:cNvSpPr>
-                <p:nvPr/>
-              </p:nvSpPr>
-              <p:spPr>
-                <a:xfrm>
-                  <a:off x="-988088" y="945710"/>
-                  <a:ext cx="323386" cy="343171"/>
-                </a:xfrm>
-                <a:prstGeom prst="rect">
-                  <a:avLst/>
-                </a:prstGeom>
-                <a:blipFill>
-                  <a:blip r:embed="rId33"/>
-                  <a:stretch>
-                    <a:fillRect b="-7143"/>
-                  </a:stretch>
-                </a:blipFill>
-              </p:spPr>
-              <p:txBody>
-                <a:bodyPr/>
-                <a:lstStyle/>
-                <a:p>
-                  <a:r>
-                    <a:rPr lang="zh-TW" altLang="en-US">
-                      <a:noFill/>
-                    </a:rPr>
-                    <a:t> </a:t>
-                  </a:r>
-                </a:p>
-              </p:txBody>
-            </p:sp>
-          </mc:Fallback>
-        </mc:AlternateContent>
-        <mc:AlternateContent xmlns:mc="http://schemas.openxmlformats.org/markup-compatibility/2006" xmlns:a14="http://schemas.microsoft.com/office/drawing/2010/main">
-          <mc:Choice Requires="a14">
-            <p:sp>
-              <p:nvSpPr>
-                <p:cNvPr id="79" name="文字方塊 78">
-                  <a:extLst>
-                    <a:ext uri="{FF2B5EF4-FFF2-40B4-BE49-F238E27FC236}">
-                      <a16:creationId xmlns:a16="http://schemas.microsoft.com/office/drawing/2014/main" id="{8A92889A-0FBC-4115-AD7E-E858414A4C33}"/>
-                    </a:ext>
-                  </a:extLst>
-                </p:cNvPr>
-                <p:cNvSpPr txBox="1"/>
-                <p:nvPr/>
-              </p:nvSpPr>
-              <p:spPr>
-                <a:xfrm>
-                  <a:off x="-844998" y="1195151"/>
-                  <a:ext cx="406919" cy="343171"/>
-                </a:xfrm>
-                <a:prstGeom prst="rect">
-                  <a:avLst/>
-                </a:prstGeom>
-                <a:noFill/>
-              </p:spPr>
-              <p:txBody>
-                <a:bodyPr wrap="square" rtlCol="0">
-                  <a:spAutoFit/>
-                </a:bodyPr>
-                <a:lstStyle/>
-                <a:p>
-                  <a:pPr/>
-                  <a14:m>
-                    <m:oMathPara xmlns:m="http://schemas.openxmlformats.org/officeDocument/2006/math">
-                      <m:oMathParaPr>
-                        <m:jc m:val="centerGroup"/>
-                      </m:oMathParaPr>
-                      <m:oMath xmlns:m="http://schemas.openxmlformats.org/officeDocument/2006/math">
-                        <m:acc>
-                          <m:accPr>
-                            <m:chr m:val="̂"/>
-                            <m:ctrlPr>
-                              <a:rPr lang="en-US" altLang="zh-TW" sz="1630" i="1">
-                                <a:latin typeface="Cambria Math" panose="02040503050406030204" pitchFamily="18" charset="0"/>
-                              </a:rPr>
-                            </m:ctrlPr>
-                          </m:accPr>
-                          <m:e>
-                            <m:r>
-                              <a:rPr lang="en-US" altLang="zh-TW" sz="1630" b="1" i="1">
-                                <a:latin typeface="Cambria Math" panose="02040503050406030204" pitchFamily="18" charset="0"/>
-                              </a:rPr>
-                              <m:t>𝒙</m:t>
-                            </m:r>
-                          </m:e>
-                        </m:acc>
-                      </m:oMath>
-                    </m:oMathPara>
-                  </a14:m>
-                  <a:endParaRPr lang="en-US" altLang="zh-TW" sz="1630" dirty="0">
-                    <a:latin typeface="Times New Roman" panose="02020603050405020304" pitchFamily="18" charset="0"/>
-                    <a:cs typeface="Times New Roman" panose="02020603050405020304" pitchFamily="18" charset="0"/>
-                  </a:endParaRPr>
-                </a:p>
-              </p:txBody>
-            </p:sp>
-          </mc:Choice>
-          <mc:Fallback xmlns="">
-            <p:sp>
-              <p:nvSpPr>
-                <p:cNvPr id="77" name="文字方塊 76">
-                  <a:extLst>
-                    <a:ext uri="{FF2B5EF4-FFF2-40B4-BE49-F238E27FC236}">
-                      <a16:creationId xmlns:a16="http://schemas.microsoft.com/office/drawing/2014/main" id="{70E789C9-D068-48AA-8926-92B85661596A}"/>
-                    </a:ext>
-                  </a:extLst>
-                </p:cNvPr>
-                <p:cNvSpPr txBox="1">
-                  <a:spLocks noRot="1" noChangeAspect="1" noMove="1" noResize="1" noEditPoints="1" noAdjustHandles="1" noChangeArrowheads="1" noChangeShapeType="1" noTextEdit="1"/>
-                </p:cNvSpPr>
-                <p:nvPr/>
-              </p:nvSpPr>
-              <p:spPr>
-                <a:xfrm>
-                  <a:off x="-844998" y="1195151"/>
-                  <a:ext cx="406919" cy="343171"/>
-                </a:xfrm>
-                <a:prstGeom prst="rect">
-                  <a:avLst/>
-                </a:prstGeom>
-                <a:blipFill>
-                  <a:blip r:embed="rId34"/>
-                  <a:stretch>
-                    <a:fillRect r="-11940"/>
-                  </a:stretch>
-                </a:blipFill>
-              </p:spPr>
-              <p:txBody>
-                <a:bodyPr/>
-                <a:lstStyle/>
-                <a:p>
-                  <a:r>
-                    <a:rPr lang="zh-TW" altLang="en-US">
-                      <a:noFill/>
-                    </a:rPr>
-                    <a:t> </a:t>
-                  </a:r>
-                </a:p>
-              </p:txBody>
-            </p:sp>
-          </mc:Fallback>
-        </mc:AlternateContent>
-        <p:sp>
-          <p:nvSpPr>
-            <p:cNvPr id="80" name="箭號: 向右 79">
-              <a:extLst>
-                <a:ext uri="{FF2B5EF4-FFF2-40B4-BE49-F238E27FC236}">
-                  <a16:creationId xmlns:a16="http://schemas.microsoft.com/office/drawing/2014/main" id="{F32A89A1-E095-4210-B194-1EC0B4AD3DA8}"/>
-                </a:ext>
-              </a:extLst>
-            </p:cNvPr>
-            <p:cNvSpPr/>
-            <p:nvPr/>
-          </p:nvSpPr>
-          <p:spPr>
-            <a:xfrm>
-              <a:off x="-837092" y="1356364"/>
-              <a:ext cx="92654" cy="27541"/>
-            </a:xfrm>
-            <a:prstGeom prst="rightArrow">
-              <a:avLst>
-                <a:gd name="adj1" fmla="val 50000"/>
-                <a:gd name="adj2" fmla="val 99023"/>
-              </a:avLst>
-            </a:prstGeom>
-            <a:solidFill>
-              <a:schemeClr val="tx1"/>
-            </a:solidFill>
-            <a:ln>
-              <a:solidFill>
-                <a:schemeClr val="tx1"/>
-              </a:solidFill>
-            </a:ln>
-          </p:spPr>
-          <p:style>
-            <a:lnRef idx="2">
-              <a:schemeClr val="dk1">
-                <a:shade val="50000"/>
-              </a:schemeClr>
-            </a:lnRef>
-            <a:fillRef idx="1">
-              <a:schemeClr val="dk1"/>
-            </a:fillRef>
-            <a:effectRef idx="0">
-              <a:schemeClr val="dk1"/>
-            </a:effectRef>
-            <a:fontRef idx="minor">
-              <a:schemeClr val="lt1"/>
-            </a:fontRef>
-          </p:style>
-          <p:txBody>
-            <a:bodyPr rtlCol="0" anchor="ctr"/>
-            <a:lstStyle/>
-            <a:p>
-              <a:pPr algn="ctr"/>
-              <a:endParaRPr lang="zh-TW" altLang="en-US" sz="1630">
-                <a:solidFill>
-                  <a:schemeClr val="tx1"/>
-                </a:solidFill>
-                <a:latin typeface="Times New Roman" panose="02020603050405020304" pitchFamily="18" charset="0"/>
-                <a:cs typeface="Times New Roman" panose="02020603050405020304" pitchFamily="18" charset="0"/>
-              </a:endParaRPr>
-            </a:p>
-          </p:txBody>
-        </p:sp>
-        <p:sp>
-          <p:nvSpPr>
-            <p:cNvPr id="81" name="箭號: 向右 80">
-              <a:extLst>
-                <a:ext uri="{FF2B5EF4-FFF2-40B4-BE49-F238E27FC236}">
-                  <a16:creationId xmlns:a16="http://schemas.microsoft.com/office/drawing/2014/main" id="{E42CAD77-BEA0-4CB1-B01D-A8A1D4284141}"/>
-                </a:ext>
-              </a:extLst>
-            </p:cNvPr>
-            <p:cNvSpPr/>
-            <p:nvPr/>
-          </p:nvSpPr>
-          <p:spPr>
-            <a:xfrm rot="16200000">
-              <a:off x="-877012" y="1316853"/>
-              <a:ext cx="91764" cy="27808"/>
-            </a:xfrm>
-            <a:prstGeom prst="rightArrow">
-              <a:avLst>
-                <a:gd name="adj1" fmla="val 50000"/>
-                <a:gd name="adj2" fmla="val 99023"/>
-              </a:avLst>
-            </a:prstGeom>
-            <a:solidFill>
-              <a:schemeClr val="tx1"/>
-            </a:solidFill>
-            <a:ln>
-              <a:solidFill>
-                <a:schemeClr val="tx1"/>
-              </a:solidFill>
-            </a:ln>
-          </p:spPr>
-          <p:style>
-            <a:lnRef idx="2">
-              <a:schemeClr val="dk1">
-                <a:shade val="50000"/>
-              </a:schemeClr>
-            </a:lnRef>
-            <a:fillRef idx="1">
-              <a:schemeClr val="dk1"/>
-            </a:fillRef>
-            <a:effectRef idx="0">
-              <a:schemeClr val="dk1"/>
-            </a:effectRef>
-            <a:fontRef idx="minor">
-              <a:schemeClr val="lt1"/>
-            </a:fontRef>
-          </p:style>
-          <p:txBody>
-            <a:bodyPr rtlCol="0" anchor="ctr"/>
-            <a:lstStyle/>
-            <a:p>
-              <a:pPr algn="ctr"/>
-              <a:endParaRPr lang="zh-TW" altLang="en-US" sz="1630" dirty="0">
-                <a:solidFill>
-                  <a:schemeClr val="tx1"/>
-                </a:solidFill>
-                <a:latin typeface="Times New Roman" panose="02020603050405020304" pitchFamily="18" charset="0"/>
-                <a:cs typeface="Times New Roman" panose="02020603050405020304" pitchFamily="18" charset="0"/>
-              </a:endParaRPr>
-            </a:p>
-          </p:txBody>
-        </p:sp>
-      </p:grpSp>
-      <mc:AlternateContent xmlns:mc="http://schemas.openxmlformats.org/markup-compatibility/2006">
-        <mc:Choice xmlns:a14="http://schemas.microsoft.com/office/drawing/2010/main" Requires="a14">
-          <p:sp>
-            <p:nvSpPr>
-              <p:cNvPr id="82" name="矩形 81">
-                <a:extLst>
-                  <a:ext uri="{FF2B5EF4-FFF2-40B4-BE49-F238E27FC236}">
-                    <a16:creationId xmlns:a16="http://schemas.microsoft.com/office/drawing/2014/main" id="{240CA1BD-0A6B-483E-82FB-D0031F2E5140}"/>
-                  </a:ext>
-                </a:extLst>
-              </p:cNvPr>
-              <p:cNvSpPr/>
-              <p:nvPr/>
-            </p:nvSpPr>
-            <p:spPr>
-              <a:xfrm>
-                <a:off x="296970" y="2706067"/>
-                <a:ext cx="803040" cy="369332"/>
-              </a:xfrm>
-              <a:prstGeom prst="rect">
-                <a:avLst/>
-              </a:prstGeom>
-            </p:spPr>
-            <p:txBody>
-              <a:bodyPr wrap="none">
-                <a:spAutoFit/>
-              </a:bodyPr>
-              <a:lstStyle/>
-              <a:p>
-                <a:pPr/>
-                <a14:m>
-                  <m:oMathPara xmlns:m="http://schemas.openxmlformats.org/officeDocument/2006/math">
-                    <m:oMathParaPr>
-                      <m:jc m:val="centerGroup"/>
-                    </m:oMathParaPr>
-                    <m:oMath xmlns:m="http://schemas.openxmlformats.org/officeDocument/2006/math">
-                      <m:r>
-                        <a:rPr lang="en-US" altLang="zh-TW" i="1">
-                          <a:latin typeface="Cambria Math" panose="02040503050406030204" pitchFamily="18" charset="0"/>
-                        </a:rPr>
-                        <m:t>𝑝</m:t>
-                      </m:r>
-                      <m:r>
-                        <a:rPr lang="en-US" altLang="zh-TW" i="1">
-                          <a:latin typeface="Cambria Math" panose="02040503050406030204" pitchFamily="18" charset="0"/>
-                        </a:rPr>
-                        <m:t>=0</m:t>
-                      </m:r>
-                    </m:oMath>
-                  </m:oMathPara>
-                </a14:m>
-                <a:endParaRPr lang="zh-TW" altLang="en-US" dirty="0">
-                  <a:latin typeface="Times New Roman" panose="02020603050405020304" pitchFamily="18" charset="0"/>
-                  <a:cs typeface="Times New Roman" panose="02020603050405020304" pitchFamily="18" charset="0"/>
-                </a:endParaRPr>
-              </a:p>
-            </p:txBody>
-          </p:sp>
-        </mc:Choice>
-        <mc:Fallback>
-          <p:sp>
-            <p:nvSpPr>
-              <p:cNvPr id="82" name="矩形 81">
-                <a:extLst>
-                  <a:ext uri="{FF2B5EF4-FFF2-40B4-BE49-F238E27FC236}">
-                    <a16:creationId xmlns:a16="http://schemas.microsoft.com/office/drawing/2014/main" id="{240CA1BD-0A6B-483E-82FB-D0031F2E5140}"/>
-                  </a:ext>
-                </a:extLst>
-              </p:cNvPr>
-              <p:cNvSpPr>
-                <a:spLocks noRot="1" noChangeAspect="1" noMove="1" noResize="1" noEditPoints="1" noAdjustHandles="1" noChangeArrowheads="1" noChangeShapeType="1" noTextEdit="1"/>
-              </p:cNvSpPr>
-              <p:nvPr/>
-            </p:nvSpPr>
-            <p:spPr>
-              <a:xfrm>
-                <a:off x="296970" y="2706067"/>
-                <a:ext cx="803040" cy="369332"/>
-              </a:xfrm>
-              <a:prstGeom prst="rect">
-                <a:avLst/>
-              </a:prstGeom>
-              <a:blipFill>
-                <a:blip r:embed="rId35"/>
-                <a:stretch>
-                  <a:fillRect b="-8333"/>
-                </a:stretch>
-              </a:blipFill>
-            </p:spPr>
-            <p:txBody>
-              <a:bodyPr/>
-              <a:lstStyle/>
-              <a:p>
-                <a:r>
-                  <a:rPr lang="zh-TW" altLang="en-US">
-                    <a:noFill/>
-                  </a:rPr>
-                  <a:t> </a:t>
-                </a:r>
-              </a:p>
-            </p:txBody>
-          </p:sp>
-        </mc:Fallback>
-      </mc:AlternateContent>
-      <mc:AlternateContent xmlns:mc="http://schemas.openxmlformats.org/markup-compatibility/2006">
-        <mc:Choice xmlns:a14="http://schemas.microsoft.com/office/drawing/2010/main" Requires="a14">
-          <p:sp>
-            <p:nvSpPr>
-              <p:cNvPr id="83" name="矩形 82">
-                <a:extLst>
-                  <a:ext uri="{FF2B5EF4-FFF2-40B4-BE49-F238E27FC236}">
-                    <a16:creationId xmlns:a16="http://schemas.microsoft.com/office/drawing/2014/main" id="{287FE308-8D4D-42B7-B8A9-E8CDF97468FD}"/>
-                  </a:ext>
-                </a:extLst>
-              </p:cNvPr>
-              <p:cNvSpPr/>
-              <p:nvPr/>
-            </p:nvSpPr>
-            <p:spPr>
-              <a:xfrm>
-                <a:off x="296980" y="5416867"/>
-                <a:ext cx="803040" cy="369332"/>
-              </a:xfrm>
-              <a:prstGeom prst="rect">
-                <a:avLst/>
-              </a:prstGeom>
-            </p:spPr>
-            <p:txBody>
-              <a:bodyPr wrap="none">
-                <a:spAutoFit/>
-              </a:bodyPr>
-              <a:lstStyle/>
-              <a:p>
-                <a:pPr/>
-                <a14:m>
-                  <m:oMathPara xmlns:m="http://schemas.openxmlformats.org/officeDocument/2006/math">
-                    <m:oMathParaPr>
-                      <m:jc m:val="centerGroup"/>
-                    </m:oMathParaPr>
-                    <m:oMath xmlns:m="http://schemas.openxmlformats.org/officeDocument/2006/math">
-                      <m:r>
-                        <a:rPr lang="en-US" altLang="zh-TW" i="1">
-                          <a:latin typeface="Cambria Math" panose="02040503050406030204" pitchFamily="18" charset="0"/>
-                        </a:rPr>
-                        <m:t>𝑝</m:t>
-                      </m:r>
-                      <m:r>
-                        <a:rPr lang="en-US" altLang="zh-TW" i="1">
-                          <a:latin typeface="Cambria Math" panose="02040503050406030204" pitchFamily="18" charset="0"/>
-                        </a:rPr>
-                        <m:t>=0</m:t>
-                      </m:r>
-                    </m:oMath>
-                  </m:oMathPara>
-                </a14:m>
-                <a:endParaRPr lang="zh-TW" altLang="en-US" dirty="0">
-                  <a:latin typeface="Times New Roman" panose="02020603050405020304" pitchFamily="18" charset="0"/>
-                  <a:cs typeface="Times New Roman" panose="02020603050405020304" pitchFamily="18" charset="0"/>
-                </a:endParaRPr>
-              </a:p>
-            </p:txBody>
-          </p:sp>
-        </mc:Choice>
-        <mc:Fallback>
-          <p:sp>
-            <p:nvSpPr>
-              <p:cNvPr id="83" name="矩形 82">
-                <a:extLst>
-                  <a:ext uri="{FF2B5EF4-FFF2-40B4-BE49-F238E27FC236}">
-                    <a16:creationId xmlns:a16="http://schemas.microsoft.com/office/drawing/2014/main" id="{287FE308-8D4D-42B7-B8A9-E8CDF97468FD}"/>
-                  </a:ext>
-                </a:extLst>
-              </p:cNvPr>
-              <p:cNvSpPr>
-                <a:spLocks noRot="1" noChangeAspect="1" noMove="1" noResize="1" noEditPoints="1" noAdjustHandles="1" noChangeArrowheads="1" noChangeShapeType="1" noTextEdit="1"/>
-              </p:cNvSpPr>
-              <p:nvPr/>
-            </p:nvSpPr>
-            <p:spPr>
-              <a:xfrm>
-                <a:off x="296980" y="5416867"/>
-                <a:ext cx="803040" cy="369332"/>
-              </a:xfrm>
-              <a:prstGeom prst="rect">
-                <a:avLst/>
-              </a:prstGeom>
-              <a:blipFill>
-                <a:blip r:embed="rId36"/>
-                <a:stretch>
-                  <a:fillRect b="-8333"/>
-                </a:stretch>
-              </a:blipFill>
-            </p:spPr>
-            <p:txBody>
-              <a:bodyPr/>
-              <a:lstStyle/>
-              <a:p>
-                <a:r>
-                  <a:rPr lang="zh-TW" altLang="en-US">
-                    <a:noFill/>
-                  </a:rPr>
-                  <a:t> </a:t>
-                </a:r>
-              </a:p>
-            </p:txBody>
-          </p:sp>
-        </mc:Fallback>
-      </mc:AlternateContent>
-      <mc:AlternateContent xmlns:mc="http://schemas.openxmlformats.org/markup-compatibility/2006">
-        <mc:Choice xmlns:a14="http://schemas.microsoft.com/office/drawing/2010/main" Requires="a14">
-          <p:sp>
-            <p:nvSpPr>
-              <p:cNvPr id="84" name="矩形 83">
-                <a:extLst>
-                  <a:ext uri="{FF2B5EF4-FFF2-40B4-BE49-F238E27FC236}">
-                    <a16:creationId xmlns:a16="http://schemas.microsoft.com/office/drawing/2014/main" id="{65E3A63F-4D89-41B4-B9E7-ED2A3B2D83B3}"/>
-                  </a:ext>
-                </a:extLst>
-              </p:cNvPr>
-              <p:cNvSpPr/>
-              <p:nvPr/>
-            </p:nvSpPr>
-            <p:spPr>
-              <a:xfrm>
-                <a:off x="1325291" y="5623001"/>
-                <a:ext cx="688009" cy="343171"/>
-              </a:xfrm>
-              <a:prstGeom prst="rect">
-                <a:avLst/>
-              </a:prstGeom>
-            </p:spPr>
-            <p:txBody>
-              <a:bodyPr wrap="none">
-                <a:spAutoFit/>
-              </a:bodyPr>
-              <a:lstStyle/>
-              <a:p>
-                <a:pPr/>
-                <a14:m>
-                  <m:oMathPara xmlns:m="http://schemas.openxmlformats.org/officeDocument/2006/math">
-                    <m:oMathParaPr>
-                      <m:jc m:val="centerGroup"/>
-                    </m:oMathParaPr>
-                    <m:oMath xmlns:m="http://schemas.openxmlformats.org/officeDocument/2006/math">
-                      <m:r>
-                        <a:rPr lang="en-US" altLang="zh-TW" sz="1630" i="1">
-                          <a:latin typeface="Cambria Math" panose="02040503050406030204" pitchFamily="18" charset="0"/>
-                        </a:rPr>
-                        <m:t>1 </m:t>
-                      </m:r>
-                      <m:r>
-                        <a:rPr lang="en-US" altLang="zh-TW" sz="1630" i="1">
-                          <a:latin typeface="Cambria Math" panose="02040503050406030204" pitchFamily="18" charset="0"/>
-                        </a:rPr>
-                        <m:t>𝜇</m:t>
-                      </m:r>
-                      <m:r>
-                        <m:rPr>
-                          <m:sty m:val="p"/>
-                        </m:rPr>
-                        <a:rPr lang="en-US" altLang="zh-TW" sz="1630">
-                          <a:latin typeface="Cambria Math" panose="02040503050406030204" pitchFamily="18" charset="0"/>
-                        </a:rPr>
-                        <m:t>m</m:t>
-                      </m:r>
-                    </m:oMath>
-                  </m:oMathPara>
-                </a14:m>
-                <a:endParaRPr lang="zh-TW" altLang="en-US" sz="1630" dirty="0">
-                  <a:latin typeface="Times New Roman" panose="02020603050405020304" pitchFamily="18" charset="0"/>
-                  <a:cs typeface="Times New Roman" panose="02020603050405020304" pitchFamily="18" charset="0"/>
-                </a:endParaRPr>
-              </a:p>
-            </p:txBody>
-          </p:sp>
-        </mc:Choice>
-        <mc:Fallback>
-          <p:sp>
-            <p:nvSpPr>
-              <p:cNvPr id="84" name="矩形 83">
-                <a:extLst>
-                  <a:ext uri="{FF2B5EF4-FFF2-40B4-BE49-F238E27FC236}">
-                    <a16:creationId xmlns:a16="http://schemas.microsoft.com/office/drawing/2014/main" id="{65E3A63F-4D89-41B4-B9E7-ED2A3B2D83B3}"/>
-                  </a:ext>
-                </a:extLst>
-              </p:cNvPr>
-              <p:cNvSpPr>
-                <a:spLocks noRot="1" noChangeAspect="1" noMove="1" noResize="1" noEditPoints="1" noAdjustHandles="1" noChangeArrowheads="1" noChangeShapeType="1" noTextEdit="1"/>
-              </p:cNvSpPr>
-              <p:nvPr/>
-            </p:nvSpPr>
-            <p:spPr>
-              <a:xfrm>
-                <a:off x="1325291" y="5623001"/>
-                <a:ext cx="688009" cy="343171"/>
-              </a:xfrm>
-              <a:prstGeom prst="rect">
-                <a:avLst/>
-              </a:prstGeom>
-              <a:blipFill>
-                <a:blip r:embed="rId37"/>
-                <a:stretch>
-                  <a:fillRect b="-5263"/>
-                </a:stretch>
-              </a:blipFill>
-            </p:spPr>
-            <p:txBody>
-              <a:bodyPr/>
-              <a:lstStyle/>
-              <a:p>
-                <a:r>
-                  <a:rPr lang="zh-TW" altLang="en-US">
-                    <a:noFill/>
-                  </a:rPr>
-                  <a:t> </a:t>
-                </a:r>
-              </a:p>
-            </p:txBody>
-          </p:sp>
-        </mc:Fallback>
-      </mc:AlternateContent>
-      <mc:AlternateContent xmlns:mc="http://schemas.openxmlformats.org/markup-compatibility/2006">
-        <mc:Choice xmlns:a14="http://schemas.microsoft.com/office/drawing/2010/main" Requires="a14">
-          <p:sp>
-            <p:nvSpPr>
-              <p:cNvPr id="85" name="矩形 84">
-                <a:extLst>
-                  <a:ext uri="{FF2B5EF4-FFF2-40B4-BE49-F238E27FC236}">
-                    <a16:creationId xmlns:a16="http://schemas.microsoft.com/office/drawing/2014/main" id="{64AB2B82-A8A6-437F-A032-ED9FB3F2F711}"/>
-                  </a:ext>
-                </a:extLst>
-              </p:cNvPr>
-              <p:cNvSpPr/>
-              <p:nvPr/>
-            </p:nvSpPr>
-            <p:spPr>
-              <a:xfrm>
-                <a:off x="1369160" y="5926877"/>
-                <a:ext cx="733662" cy="343171"/>
-              </a:xfrm>
-              <a:prstGeom prst="rect">
-                <a:avLst/>
-              </a:prstGeom>
-            </p:spPr>
-            <p:txBody>
-              <a:bodyPr wrap="none">
-                <a:spAutoFit/>
-              </a:bodyPr>
-              <a:lstStyle/>
-              <a:p>
-                <a:pPr/>
-                <a14:m>
-                  <m:oMathPara xmlns:m="http://schemas.openxmlformats.org/officeDocument/2006/math">
-                    <m:oMathParaPr>
-                      <m:jc m:val="centerGroup"/>
-                    </m:oMathParaPr>
-                    <m:oMath xmlns:m="http://schemas.openxmlformats.org/officeDocument/2006/math">
-                      <m:r>
-                        <a:rPr lang="en-US" altLang="zh-TW" sz="1630" i="1">
-                          <a:latin typeface="Cambria Math" panose="02040503050406030204" pitchFamily="18" charset="0"/>
-                        </a:rPr>
-                        <m:t>ℓ=0</m:t>
-                      </m:r>
-                    </m:oMath>
-                  </m:oMathPara>
-                </a14:m>
-                <a:endParaRPr lang="zh-TW" altLang="en-US" sz="1630" dirty="0">
-                  <a:latin typeface="Times New Roman" panose="02020603050405020304" pitchFamily="18" charset="0"/>
-                  <a:cs typeface="Times New Roman" panose="02020603050405020304" pitchFamily="18" charset="0"/>
-                </a:endParaRPr>
-              </a:p>
-            </p:txBody>
-          </p:sp>
-        </mc:Choice>
-        <mc:Fallback>
-          <p:sp>
-            <p:nvSpPr>
-              <p:cNvPr id="85" name="矩形 84">
-                <a:extLst>
-                  <a:ext uri="{FF2B5EF4-FFF2-40B4-BE49-F238E27FC236}">
-                    <a16:creationId xmlns:a16="http://schemas.microsoft.com/office/drawing/2014/main" id="{64AB2B82-A8A6-437F-A032-ED9FB3F2F711}"/>
-                  </a:ext>
-                </a:extLst>
-              </p:cNvPr>
-              <p:cNvSpPr>
-                <a:spLocks noRot="1" noChangeAspect="1" noMove="1" noResize="1" noEditPoints="1" noAdjustHandles="1" noChangeArrowheads="1" noChangeShapeType="1" noTextEdit="1"/>
-              </p:cNvSpPr>
-              <p:nvPr/>
-            </p:nvSpPr>
-            <p:spPr>
-              <a:xfrm>
-                <a:off x="1369160" y="5926877"/>
-                <a:ext cx="733662" cy="343171"/>
-              </a:xfrm>
-              <a:prstGeom prst="rect">
-                <a:avLst/>
-              </a:prstGeom>
-              <a:blipFill>
-                <a:blip r:embed="rId38"/>
-                <a:stretch>
-                  <a:fillRect/>
-                </a:stretch>
-              </a:blipFill>
-            </p:spPr>
-            <p:txBody>
-              <a:bodyPr/>
-              <a:lstStyle/>
-              <a:p>
-                <a:r>
-                  <a:rPr lang="zh-TW" altLang="en-US">
-                    <a:noFill/>
-                  </a:rPr>
-                  <a:t> </a:t>
-                </a:r>
-              </a:p>
-            </p:txBody>
-          </p:sp>
-        </mc:Fallback>
-      </mc:AlternateContent>
-      <mc:AlternateContent xmlns:mc="http://schemas.openxmlformats.org/markup-compatibility/2006">
-        <mc:Choice xmlns:a14="http://schemas.microsoft.com/office/drawing/2010/main" Requires="a14">
-          <p:sp>
-            <p:nvSpPr>
-              <p:cNvPr id="86" name="矩形 85">
-                <a:extLst>
-                  <a:ext uri="{FF2B5EF4-FFF2-40B4-BE49-F238E27FC236}">
-                    <a16:creationId xmlns:a16="http://schemas.microsoft.com/office/drawing/2014/main" id="{07AE37D6-3F51-4720-948D-B2DED8F98B9E}"/>
-                  </a:ext>
-                </a:extLst>
-              </p:cNvPr>
-              <p:cNvSpPr/>
-              <p:nvPr/>
-            </p:nvSpPr>
-            <p:spPr>
-              <a:xfrm>
-                <a:off x="2699471" y="5926877"/>
-                <a:ext cx="733662" cy="343171"/>
-              </a:xfrm>
-              <a:prstGeom prst="rect">
-                <a:avLst/>
-              </a:prstGeom>
-            </p:spPr>
-            <p:txBody>
-              <a:bodyPr wrap="none">
-                <a:spAutoFit/>
-              </a:bodyPr>
-              <a:lstStyle/>
-              <a:p>
-                <a:pPr/>
-                <a14:m>
-                  <m:oMathPara xmlns:m="http://schemas.openxmlformats.org/officeDocument/2006/math">
-                    <m:oMathParaPr>
-                      <m:jc m:val="centerGroup"/>
-                    </m:oMathParaPr>
-                    <m:oMath xmlns:m="http://schemas.openxmlformats.org/officeDocument/2006/math">
-                      <m:r>
-                        <a:rPr lang="en-US" altLang="zh-TW" sz="1630" i="1">
-                          <a:latin typeface="Cambria Math" panose="02040503050406030204" pitchFamily="18" charset="0"/>
-                        </a:rPr>
-                        <m:t>ℓ=1</m:t>
-                      </m:r>
-                    </m:oMath>
-                  </m:oMathPara>
-                </a14:m>
-                <a:endParaRPr lang="zh-TW" altLang="en-US" sz="1630" dirty="0">
-                  <a:latin typeface="Times New Roman" panose="02020603050405020304" pitchFamily="18" charset="0"/>
-                  <a:cs typeface="Times New Roman" panose="02020603050405020304" pitchFamily="18" charset="0"/>
-                </a:endParaRPr>
-              </a:p>
-            </p:txBody>
-          </p:sp>
-        </mc:Choice>
-        <mc:Fallback>
-          <p:sp>
-            <p:nvSpPr>
-              <p:cNvPr id="86" name="矩形 85">
-                <a:extLst>
-                  <a:ext uri="{FF2B5EF4-FFF2-40B4-BE49-F238E27FC236}">
-                    <a16:creationId xmlns:a16="http://schemas.microsoft.com/office/drawing/2014/main" id="{07AE37D6-3F51-4720-948D-B2DED8F98B9E}"/>
-                  </a:ext>
-                </a:extLst>
-              </p:cNvPr>
-              <p:cNvSpPr>
-                <a:spLocks noRot="1" noChangeAspect="1" noMove="1" noResize="1" noEditPoints="1" noAdjustHandles="1" noChangeArrowheads="1" noChangeShapeType="1" noTextEdit="1"/>
-              </p:cNvSpPr>
-              <p:nvPr/>
-            </p:nvSpPr>
-            <p:spPr>
-              <a:xfrm>
-                <a:off x="2699471" y="5926877"/>
-                <a:ext cx="733662" cy="343171"/>
-              </a:xfrm>
-              <a:prstGeom prst="rect">
-                <a:avLst/>
-              </a:prstGeom>
-              <a:blipFill>
-                <a:blip r:embed="rId39"/>
-                <a:stretch>
-                  <a:fillRect/>
-                </a:stretch>
-              </a:blipFill>
-            </p:spPr>
-            <p:txBody>
-              <a:bodyPr/>
-              <a:lstStyle/>
-              <a:p>
-                <a:r>
-                  <a:rPr lang="zh-TW" altLang="en-US">
-                    <a:noFill/>
-                  </a:rPr>
-                  <a:t> </a:t>
-                </a:r>
-              </a:p>
-            </p:txBody>
-          </p:sp>
-        </mc:Fallback>
-      </mc:AlternateContent>
-      <mc:AlternateContent xmlns:mc="http://schemas.openxmlformats.org/markup-compatibility/2006">
-        <mc:Choice xmlns:a14="http://schemas.microsoft.com/office/drawing/2010/main" Requires="a14">
-          <p:sp>
-            <p:nvSpPr>
-              <p:cNvPr id="87" name="矩形 86">
-                <a:extLst>
-                  <a:ext uri="{FF2B5EF4-FFF2-40B4-BE49-F238E27FC236}">
-                    <a16:creationId xmlns:a16="http://schemas.microsoft.com/office/drawing/2014/main" id="{77649220-E0E6-4321-A42E-D79265FC9B0C}"/>
-                  </a:ext>
-                </a:extLst>
-              </p:cNvPr>
-              <p:cNvSpPr/>
-              <p:nvPr/>
-            </p:nvSpPr>
-            <p:spPr>
-              <a:xfrm>
-                <a:off x="4029782" y="5926877"/>
-                <a:ext cx="733662" cy="343171"/>
-              </a:xfrm>
-              <a:prstGeom prst="rect">
-                <a:avLst/>
-              </a:prstGeom>
-            </p:spPr>
-            <p:txBody>
-              <a:bodyPr wrap="none">
-                <a:spAutoFit/>
-              </a:bodyPr>
-              <a:lstStyle/>
-              <a:p>
-                <a:pPr/>
-                <a14:m>
-                  <m:oMathPara xmlns:m="http://schemas.openxmlformats.org/officeDocument/2006/math">
-                    <m:oMathParaPr>
-                      <m:jc m:val="centerGroup"/>
-                    </m:oMathParaPr>
-                    <m:oMath xmlns:m="http://schemas.openxmlformats.org/officeDocument/2006/math">
-                      <m:r>
-                        <a:rPr lang="en-US" altLang="zh-TW" sz="1630" i="1">
-                          <a:latin typeface="Cambria Math" panose="02040503050406030204" pitchFamily="18" charset="0"/>
-                        </a:rPr>
-                        <m:t>ℓ=2</m:t>
-                      </m:r>
-                    </m:oMath>
-                  </m:oMathPara>
-                </a14:m>
-                <a:endParaRPr lang="zh-TW" altLang="en-US" sz="1630" dirty="0">
-                  <a:latin typeface="Times New Roman" panose="02020603050405020304" pitchFamily="18" charset="0"/>
-                  <a:cs typeface="Times New Roman" panose="02020603050405020304" pitchFamily="18" charset="0"/>
-                </a:endParaRPr>
-              </a:p>
-            </p:txBody>
-          </p:sp>
-        </mc:Choice>
-        <mc:Fallback>
-          <p:sp>
-            <p:nvSpPr>
-              <p:cNvPr id="87" name="矩形 86">
-                <a:extLst>
-                  <a:ext uri="{FF2B5EF4-FFF2-40B4-BE49-F238E27FC236}">
-                    <a16:creationId xmlns:a16="http://schemas.microsoft.com/office/drawing/2014/main" id="{77649220-E0E6-4321-A42E-D79265FC9B0C}"/>
-                  </a:ext>
-                </a:extLst>
-              </p:cNvPr>
-              <p:cNvSpPr>
-                <a:spLocks noRot="1" noChangeAspect="1" noMove="1" noResize="1" noEditPoints="1" noAdjustHandles="1" noChangeArrowheads="1" noChangeShapeType="1" noTextEdit="1"/>
-              </p:cNvSpPr>
-              <p:nvPr/>
-            </p:nvSpPr>
-            <p:spPr>
-              <a:xfrm>
-                <a:off x="4029782" y="5926877"/>
-                <a:ext cx="733662" cy="343171"/>
-              </a:xfrm>
-              <a:prstGeom prst="rect">
-                <a:avLst/>
-              </a:prstGeom>
-              <a:blipFill>
-                <a:blip r:embed="rId40"/>
-                <a:stretch>
-                  <a:fillRect/>
-                </a:stretch>
-              </a:blipFill>
-            </p:spPr>
-            <p:txBody>
-              <a:bodyPr/>
-              <a:lstStyle/>
-              <a:p>
-                <a:r>
-                  <a:rPr lang="zh-TW" altLang="en-US">
-                    <a:noFill/>
-                  </a:rPr>
-                  <a:t> </a:t>
-                </a:r>
-              </a:p>
-            </p:txBody>
-          </p:sp>
-        </mc:Fallback>
-      </mc:AlternateContent>
-      <mc:AlternateContent xmlns:mc="http://schemas.openxmlformats.org/markup-compatibility/2006">
-        <mc:Choice xmlns:a14="http://schemas.microsoft.com/office/drawing/2010/main" Requires="a14">
-          <p:sp>
-            <p:nvSpPr>
-              <p:cNvPr id="88" name="矩形 87">
-                <a:extLst>
-                  <a:ext uri="{FF2B5EF4-FFF2-40B4-BE49-F238E27FC236}">
-                    <a16:creationId xmlns:a16="http://schemas.microsoft.com/office/drawing/2014/main" id="{740E9BDB-A55F-4B43-B564-FBE299BC3554}"/>
-                  </a:ext>
-                </a:extLst>
-              </p:cNvPr>
-              <p:cNvSpPr/>
-              <p:nvPr/>
-            </p:nvSpPr>
-            <p:spPr>
-              <a:xfrm>
-                <a:off x="5360092" y="5926877"/>
-                <a:ext cx="733662" cy="343171"/>
-              </a:xfrm>
-              <a:prstGeom prst="rect">
-                <a:avLst/>
-              </a:prstGeom>
-            </p:spPr>
-            <p:txBody>
-              <a:bodyPr wrap="none">
-                <a:spAutoFit/>
-              </a:bodyPr>
-              <a:lstStyle/>
-              <a:p>
-                <a:pPr/>
-                <a14:m>
-                  <m:oMathPara xmlns:m="http://schemas.openxmlformats.org/officeDocument/2006/math">
-                    <m:oMathParaPr>
-                      <m:jc m:val="centerGroup"/>
-                    </m:oMathParaPr>
-                    <m:oMath xmlns:m="http://schemas.openxmlformats.org/officeDocument/2006/math">
-                      <m:r>
-                        <a:rPr lang="en-US" altLang="zh-TW" sz="1630" i="1">
-                          <a:latin typeface="Cambria Math" panose="02040503050406030204" pitchFamily="18" charset="0"/>
-                        </a:rPr>
-                        <m:t>ℓ=3</m:t>
-                      </m:r>
-                    </m:oMath>
-                  </m:oMathPara>
-                </a14:m>
-                <a:endParaRPr lang="zh-TW" altLang="en-US" sz="1630" dirty="0">
-                  <a:latin typeface="Times New Roman" panose="02020603050405020304" pitchFamily="18" charset="0"/>
-                  <a:cs typeface="Times New Roman" panose="02020603050405020304" pitchFamily="18" charset="0"/>
-                </a:endParaRPr>
-              </a:p>
-            </p:txBody>
-          </p:sp>
-        </mc:Choice>
-        <mc:Fallback>
-          <p:sp>
-            <p:nvSpPr>
-              <p:cNvPr id="88" name="矩形 87">
-                <a:extLst>
-                  <a:ext uri="{FF2B5EF4-FFF2-40B4-BE49-F238E27FC236}">
-                    <a16:creationId xmlns:a16="http://schemas.microsoft.com/office/drawing/2014/main" id="{740E9BDB-A55F-4B43-B564-FBE299BC3554}"/>
-                  </a:ext>
-                </a:extLst>
-              </p:cNvPr>
-              <p:cNvSpPr>
-                <a:spLocks noRot="1" noChangeAspect="1" noMove="1" noResize="1" noEditPoints="1" noAdjustHandles="1" noChangeArrowheads="1" noChangeShapeType="1" noTextEdit="1"/>
-              </p:cNvSpPr>
-              <p:nvPr/>
-            </p:nvSpPr>
-            <p:spPr>
-              <a:xfrm>
-                <a:off x="5360092" y="5926877"/>
-                <a:ext cx="733662" cy="343171"/>
-              </a:xfrm>
-              <a:prstGeom prst="rect">
-                <a:avLst/>
-              </a:prstGeom>
-              <a:blipFill>
-                <a:blip r:embed="rId41"/>
-                <a:stretch>
-                  <a:fillRect/>
-                </a:stretch>
-              </a:blipFill>
-            </p:spPr>
-            <p:txBody>
-              <a:bodyPr/>
-              <a:lstStyle/>
-              <a:p>
-                <a:r>
-                  <a:rPr lang="zh-TW" altLang="en-US">
-                    <a:noFill/>
-                  </a:rPr>
-                  <a:t> </a:t>
-                </a:r>
-              </a:p>
-            </p:txBody>
-          </p:sp>
-        </mc:Fallback>
-      </mc:AlternateContent>
-      <mc:AlternateContent xmlns:mc="http://schemas.openxmlformats.org/markup-compatibility/2006">
-        <mc:Choice xmlns:a14="http://schemas.microsoft.com/office/drawing/2010/main" Requires="a14">
-          <p:sp>
-            <p:nvSpPr>
-              <p:cNvPr id="89" name="矩形 88">
-                <a:extLst>
-                  <a:ext uri="{FF2B5EF4-FFF2-40B4-BE49-F238E27FC236}">
-                    <a16:creationId xmlns:a16="http://schemas.microsoft.com/office/drawing/2014/main" id="{0EA96164-B0C0-4072-B490-80B8393F7375}"/>
-                  </a:ext>
-                </a:extLst>
-              </p:cNvPr>
-              <p:cNvSpPr/>
-              <p:nvPr/>
-            </p:nvSpPr>
-            <p:spPr>
-              <a:xfrm>
-                <a:off x="6690403" y="5926877"/>
-                <a:ext cx="733662" cy="343171"/>
-              </a:xfrm>
-              <a:prstGeom prst="rect">
-                <a:avLst/>
-              </a:prstGeom>
-            </p:spPr>
-            <p:txBody>
-              <a:bodyPr wrap="none">
-                <a:spAutoFit/>
-              </a:bodyPr>
-              <a:lstStyle/>
-              <a:p>
-                <a:pPr/>
-                <a14:m>
-                  <m:oMathPara xmlns:m="http://schemas.openxmlformats.org/officeDocument/2006/math">
-                    <m:oMathParaPr>
-                      <m:jc m:val="centerGroup"/>
-                    </m:oMathParaPr>
-                    <m:oMath xmlns:m="http://schemas.openxmlformats.org/officeDocument/2006/math">
-                      <m:r>
-                        <a:rPr lang="en-US" altLang="zh-TW" sz="1630" i="1">
-                          <a:latin typeface="Cambria Math" panose="02040503050406030204" pitchFamily="18" charset="0"/>
-                        </a:rPr>
-                        <m:t>ℓ=4</m:t>
-                      </m:r>
-                    </m:oMath>
-                  </m:oMathPara>
-                </a14:m>
-                <a:endParaRPr lang="zh-TW" altLang="en-US" sz="1630" dirty="0">
-                  <a:latin typeface="Times New Roman" panose="02020603050405020304" pitchFamily="18" charset="0"/>
-                  <a:cs typeface="Times New Roman" panose="02020603050405020304" pitchFamily="18" charset="0"/>
-                </a:endParaRPr>
-              </a:p>
-            </p:txBody>
-          </p:sp>
-        </mc:Choice>
-        <mc:Fallback>
-          <p:sp>
-            <p:nvSpPr>
-              <p:cNvPr id="89" name="矩形 88">
-                <a:extLst>
-                  <a:ext uri="{FF2B5EF4-FFF2-40B4-BE49-F238E27FC236}">
-                    <a16:creationId xmlns:a16="http://schemas.microsoft.com/office/drawing/2014/main" id="{0EA96164-B0C0-4072-B490-80B8393F7375}"/>
-                  </a:ext>
-                </a:extLst>
-              </p:cNvPr>
-              <p:cNvSpPr>
-                <a:spLocks noRot="1" noChangeAspect="1" noMove="1" noResize="1" noEditPoints="1" noAdjustHandles="1" noChangeArrowheads="1" noChangeShapeType="1" noTextEdit="1"/>
-              </p:cNvSpPr>
-              <p:nvPr/>
-            </p:nvSpPr>
-            <p:spPr>
-              <a:xfrm>
-                <a:off x="6690403" y="5926877"/>
-                <a:ext cx="733662" cy="343171"/>
-              </a:xfrm>
-              <a:prstGeom prst="rect">
-                <a:avLst/>
-              </a:prstGeom>
-              <a:blipFill>
-                <a:blip r:embed="rId42"/>
-                <a:stretch>
-                  <a:fillRect/>
-                </a:stretch>
-              </a:blipFill>
-            </p:spPr>
-            <p:txBody>
-              <a:bodyPr/>
-              <a:lstStyle/>
-              <a:p>
-                <a:r>
-                  <a:rPr lang="zh-TW" altLang="en-US">
-                    <a:noFill/>
-                  </a:rPr>
-                  <a:t> </a:t>
-                </a:r>
-              </a:p>
-            </p:txBody>
-          </p:sp>
-        </mc:Fallback>
-      </mc:AlternateContent>
-      <mc:AlternateContent xmlns:mc="http://schemas.openxmlformats.org/markup-compatibility/2006">
-        <mc:Choice xmlns:a14="http://schemas.microsoft.com/office/drawing/2010/main" Requires="a14">
-          <p:sp>
-            <p:nvSpPr>
-              <p:cNvPr id="90" name="矩形 89">
-                <a:extLst>
-                  <a:ext uri="{FF2B5EF4-FFF2-40B4-BE49-F238E27FC236}">
-                    <a16:creationId xmlns:a16="http://schemas.microsoft.com/office/drawing/2014/main" id="{DCD1A786-7253-4336-8E36-2604F976B9F6}"/>
-                  </a:ext>
-                </a:extLst>
-              </p:cNvPr>
-              <p:cNvSpPr/>
-              <p:nvPr/>
-            </p:nvSpPr>
-            <p:spPr>
-              <a:xfrm>
-                <a:off x="7959329" y="5926877"/>
-                <a:ext cx="733662" cy="343171"/>
-              </a:xfrm>
-              <a:prstGeom prst="rect">
-                <a:avLst/>
-              </a:prstGeom>
-            </p:spPr>
-            <p:txBody>
-              <a:bodyPr wrap="none">
-                <a:spAutoFit/>
-              </a:bodyPr>
-              <a:lstStyle/>
-              <a:p>
-                <a:pPr/>
-                <a14:m>
-                  <m:oMathPara xmlns:m="http://schemas.openxmlformats.org/officeDocument/2006/math">
-                    <m:oMathParaPr>
-                      <m:jc m:val="centerGroup"/>
-                    </m:oMathParaPr>
-                    <m:oMath xmlns:m="http://schemas.openxmlformats.org/officeDocument/2006/math">
-                      <m:r>
-                        <a:rPr lang="en-US" altLang="zh-TW" sz="1630" i="1">
-                          <a:latin typeface="Cambria Math" panose="02040503050406030204" pitchFamily="18" charset="0"/>
-                        </a:rPr>
-                        <m:t>ℓ=5</m:t>
-                      </m:r>
-                    </m:oMath>
-                  </m:oMathPara>
-                </a14:m>
-                <a:endParaRPr lang="zh-TW" altLang="en-US" sz="1630" dirty="0">
-                  <a:latin typeface="Times New Roman" panose="02020603050405020304" pitchFamily="18" charset="0"/>
-                  <a:cs typeface="Times New Roman" panose="02020603050405020304" pitchFamily="18" charset="0"/>
-                </a:endParaRPr>
-              </a:p>
-            </p:txBody>
-          </p:sp>
-        </mc:Choice>
-        <mc:Fallback>
-          <p:sp>
-            <p:nvSpPr>
-              <p:cNvPr id="90" name="矩形 89">
-                <a:extLst>
-                  <a:ext uri="{FF2B5EF4-FFF2-40B4-BE49-F238E27FC236}">
-                    <a16:creationId xmlns:a16="http://schemas.microsoft.com/office/drawing/2014/main" id="{DCD1A786-7253-4336-8E36-2604F976B9F6}"/>
-                  </a:ext>
-                </a:extLst>
-              </p:cNvPr>
-              <p:cNvSpPr>
-                <a:spLocks noRot="1" noChangeAspect="1" noMove="1" noResize="1" noEditPoints="1" noAdjustHandles="1" noChangeArrowheads="1" noChangeShapeType="1" noTextEdit="1"/>
-              </p:cNvSpPr>
-              <p:nvPr/>
-            </p:nvSpPr>
-            <p:spPr>
-              <a:xfrm>
-                <a:off x="7959329" y="5926877"/>
-                <a:ext cx="733662" cy="343171"/>
-              </a:xfrm>
-              <a:prstGeom prst="rect">
-                <a:avLst/>
-              </a:prstGeom>
-              <a:blipFill>
-                <a:blip r:embed="rId43"/>
-                <a:stretch>
-                  <a:fillRect/>
-                </a:stretch>
-              </a:blipFill>
-            </p:spPr>
-            <p:txBody>
-              <a:bodyPr/>
-              <a:lstStyle/>
-              <a:p>
-                <a:r>
-                  <a:rPr lang="zh-TW" altLang="en-US">
-                    <a:noFill/>
-                  </a:rPr>
-                  <a:t> </a:t>
-                </a:r>
-              </a:p>
-            </p:txBody>
-          </p:sp>
-        </mc:Fallback>
-      </mc:AlternateContent>
-      <p:grpSp>
-        <p:nvGrpSpPr>
-          <p:cNvPr id="91" name="群組 90">
-            <a:extLst>
-              <a:ext uri="{FF2B5EF4-FFF2-40B4-BE49-F238E27FC236}">
-                <a16:creationId xmlns:a16="http://schemas.microsoft.com/office/drawing/2014/main" id="{3A0BB8D0-0BD8-440C-854D-8B897490D785}"/>
-              </a:ext>
-            </a:extLst>
-          </p:cNvPr>
-          <p:cNvGrpSpPr/>
-          <p:nvPr/>
-        </p:nvGrpSpPr>
-        <p:grpSpPr>
-          <a:xfrm>
-            <a:off x="1550692" y="4980326"/>
-            <a:ext cx="550009" cy="592612"/>
-            <a:chOff x="-988088" y="945710"/>
-            <a:chExt cx="550009" cy="592612"/>
-          </a:xfrm>
-        </p:grpSpPr>
-        <mc:AlternateContent xmlns:mc="http://schemas.openxmlformats.org/markup-compatibility/2006" xmlns:a14="http://schemas.microsoft.com/office/drawing/2010/main">
-          <mc:Choice Requires="a14">
-            <p:sp>
-              <p:nvSpPr>
-                <p:cNvPr id="92" name="文字方塊 91">
-                  <a:extLst>
-                    <a:ext uri="{FF2B5EF4-FFF2-40B4-BE49-F238E27FC236}">
-                      <a16:creationId xmlns:a16="http://schemas.microsoft.com/office/drawing/2014/main" id="{A535CFE8-1251-45EE-BB8B-E1894B468772}"/>
-                    </a:ext>
-                  </a:extLst>
-                </p:cNvPr>
-                <p:cNvSpPr txBox="1"/>
-                <p:nvPr/>
-              </p:nvSpPr>
-              <p:spPr>
-                <a:xfrm>
-                  <a:off x="-988088" y="945710"/>
-                  <a:ext cx="323386" cy="343171"/>
-                </a:xfrm>
-                <a:prstGeom prst="rect">
-                  <a:avLst/>
-                </a:prstGeom>
-                <a:noFill/>
-              </p:spPr>
-              <p:txBody>
-                <a:bodyPr wrap="square" rtlCol="0">
-                  <a:spAutoFit/>
-                </a:bodyPr>
-                <a:lstStyle/>
-                <a:p>
-                  <a:pPr/>
-                  <a14:m>
-                    <m:oMathPara xmlns:m="http://schemas.openxmlformats.org/officeDocument/2006/math">
-                      <m:oMathParaPr>
-                        <m:jc m:val="centerGroup"/>
-                      </m:oMathParaPr>
-                      <m:oMath xmlns:m="http://schemas.openxmlformats.org/officeDocument/2006/math">
-                        <m:acc>
-                          <m:accPr>
-                            <m:chr m:val="̂"/>
-                            <m:ctrlPr>
-                              <a:rPr lang="en-US" altLang="zh-TW" sz="1630" i="1">
-                                <a:latin typeface="Cambria Math" panose="02040503050406030204" pitchFamily="18" charset="0"/>
-                              </a:rPr>
-                            </m:ctrlPr>
-                          </m:accPr>
-                          <m:e>
-                            <m:r>
-                              <a:rPr lang="en-US" altLang="zh-TW" sz="1630" b="1" i="1">
-                                <a:latin typeface="Cambria Math" panose="02040503050406030204" pitchFamily="18" charset="0"/>
-                              </a:rPr>
-                              <m:t>𝒚</m:t>
-                            </m:r>
-                          </m:e>
-                        </m:acc>
-                      </m:oMath>
-                    </m:oMathPara>
-                  </a14:m>
-                  <a:endParaRPr lang="en-US" altLang="zh-TW" sz="1630" dirty="0">
-                    <a:latin typeface="Times New Roman" panose="02020603050405020304" pitchFamily="18" charset="0"/>
-                    <a:cs typeface="Times New Roman" panose="02020603050405020304" pitchFamily="18" charset="0"/>
-                  </a:endParaRPr>
-                </a:p>
-              </p:txBody>
-            </p:sp>
-          </mc:Choice>
-          <mc:Fallback xmlns="">
-            <p:sp>
-              <p:nvSpPr>
-                <p:cNvPr id="76" name="文字方塊 75">
-                  <a:extLst>
-                    <a:ext uri="{FF2B5EF4-FFF2-40B4-BE49-F238E27FC236}">
-                      <a16:creationId xmlns:a16="http://schemas.microsoft.com/office/drawing/2014/main" id="{DA635BAA-EFD7-435B-BCE4-F0FC3026F2A5}"/>
-                    </a:ext>
-                  </a:extLst>
-                </p:cNvPr>
-                <p:cNvSpPr txBox="1">
-                  <a:spLocks noRot="1" noChangeAspect="1" noMove="1" noResize="1" noEditPoints="1" noAdjustHandles="1" noChangeArrowheads="1" noChangeShapeType="1" noTextEdit="1"/>
-                </p:cNvSpPr>
-                <p:nvPr/>
-              </p:nvSpPr>
-              <p:spPr>
-                <a:xfrm>
-                  <a:off x="-988088" y="945710"/>
-                  <a:ext cx="323386" cy="343171"/>
-                </a:xfrm>
-                <a:prstGeom prst="rect">
-                  <a:avLst/>
-                </a:prstGeom>
-                <a:blipFill>
-                  <a:blip r:embed="rId33"/>
-                  <a:stretch>
-                    <a:fillRect b="-7143"/>
-                  </a:stretch>
-                </a:blipFill>
-              </p:spPr>
-              <p:txBody>
-                <a:bodyPr/>
-                <a:lstStyle/>
-                <a:p>
-                  <a:r>
-                    <a:rPr lang="zh-TW" altLang="en-US">
-                      <a:noFill/>
-                    </a:rPr>
-                    <a:t> </a:t>
-                  </a:r>
-                </a:p>
-              </p:txBody>
-            </p:sp>
-          </mc:Fallback>
-        </mc:AlternateContent>
-        <mc:AlternateContent xmlns:mc="http://schemas.openxmlformats.org/markup-compatibility/2006" xmlns:a14="http://schemas.microsoft.com/office/drawing/2010/main">
-          <mc:Choice Requires="a14">
-            <p:sp>
-              <p:nvSpPr>
-                <p:cNvPr id="95" name="文字方塊 94">
-                  <a:extLst>
-                    <a:ext uri="{FF2B5EF4-FFF2-40B4-BE49-F238E27FC236}">
-                      <a16:creationId xmlns:a16="http://schemas.microsoft.com/office/drawing/2014/main" id="{463C40B9-DE99-4F6D-882C-ECBE1952202D}"/>
-                    </a:ext>
-                  </a:extLst>
-                </p:cNvPr>
-                <p:cNvSpPr txBox="1"/>
-                <p:nvPr/>
-              </p:nvSpPr>
-              <p:spPr>
-                <a:xfrm>
-                  <a:off x="-844998" y="1195151"/>
-                  <a:ext cx="406919" cy="343171"/>
-                </a:xfrm>
-                <a:prstGeom prst="rect">
-                  <a:avLst/>
-                </a:prstGeom>
-                <a:noFill/>
-              </p:spPr>
-              <p:txBody>
-                <a:bodyPr wrap="square" rtlCol="0">
-                  <a:spAutoFit/>
-                </a:bodyPr>
-                <a:lstStyle/>
-                <a:p>
-                  <a:pPr/>
-                  <a14:m>
-                    <m:oMathPara xmlns:m="http://schemas.openxmlformats.org/officeDocument/2006/math">
-                      <m:oMathParaPr>
-                        <m:jc m:val="centerGroup"/>
-                      </m:oMathParaPr>
-                      <m:oMath xmlns:m="http://schemas.openxmlformats.org/officeDocument/2006/math">
-                        <m:acc>
-                          <m:accPr>
-                            <m:chr m:val="̂"/>
-                            <m:ctrlPr>
-                              <a:rPr lang="en-US" altLang="zh-TW" sz="1630" i="1">
-                                <a:latin typeface="Cambria Math" panose="02040503050406030204" pitchFamily="18" charset="0"/>
-                              </a:rPr>
-                            </m:ctrlPr>
-                          </m:accPr>
-                          <m:e>
-                            <m:r>
-                              <a:rPr lang="en-US" altLang="zh-TW" sz="1630" b="1" i="1">
-                                <a:latin typeface="Cambria Math" panose="02040503050406030204" pitchFamily="18" charset="0"/>
-                              </a:rPr>
-                              <m:t>𝒙</m:t>
-                            </m:r>
-                          </m:e>
-                        </m:acc>
-                      </m:oMath>
-                    </m:oMathPara>
-                  </a14:m>
-                  <a:endParaRPr lang="en-US" altLang="zh-TW" sz="1630" dirty="0">
-                    <a:latin typeface="Times New Roman" panose="02020603050405020304" pitchFamily="18" charset="0"/>
-                    <a:cs typeface="Times New Roman" panose="02020603050405020304" pitchFamily="18" charset="0"/>
-                  </a:endParaRPr>
-                </a:p>
-              </p:txBody>
-            </p:sp>
-          </mc:Choice>
-          <mc:Fallback xmlns="">
-            <p:sp>
-              <p:nvSpPr>
-                <p:cNvPr id="77" name="文字方塊 76">
-                  <a:extLst>
-                    <a:ext uri="{FF2B5EF4-FFF2-40B4-BE49-F238E27FC236}">
-                      <a16:creationId xmlns:a16="http://schemas.microsoft.com/office/drawing/2014/main" id="{70E789C9-D068-48AA-8926-92B85661596A}"/>
-                    </a:ext>
-                  </a:extLst>
-                </p:cNvPr>
-                <p:cNvSpPr txBox="1">
-                  <a:spLocks noRot="1" noChangeAspect="1" noMove="1" noResize="1" noEditPoints="1" noAdjustHandles="1" noChangeArrowheads="1" noChangeShapeType="1" noTextEdit="1"/>
-                </p:cNvSpPr>
-                <p:nvPr/>
-              </p:nvSpPr>
-              <p:spPr>
-                <a:xfrm>
-                  <a:off x="-844998" y="1195151"/>
-                  <a:ext cx="406919" cy="343171"/>
-                </a:xfrm>
-                <a:prstGeom prst="rect">
-                  <a:avLst/>
-                </a:prstGeom>
-                <a:blipFill>
-                  <a:blip r:embed="rId34"/>
-                  <a:stretch>
-                    <a:fillRect r="-11940"/>
-                  </a:stretch>
-                </a:blipFill>
-              </p:spPr>
-              <p:txBody>
-                <a:bodyPr/>
-                <a:lstStyle/>
-                <a:p>
-                  <a:r>
-                    <a:rPr lang="zh-TW" altLang="en-US">
-                      <a:noFill/>
-                    </a:rPr>
-                    <a:t> </a:t>
-                  </a:r>
-                </a:p>
-              </p:txBody>
-            </p:sp>
-          </mc:Fallback>
-        </mc:AlternateContent>
-        <p:sp>
-          <p:nvSpPr>
-            <p:cNvPr id="100" name="箭號: 向右 99">
-              <a:extLst>
-                <a:ext uri="{FF2B5EF4-FFF2-40B4-BE49-F238E27FC236}">
-                  <a16:creationId xmlns:a16="http://schemas.microsoft.com/office/drawing/2014/main" id="{B3AB2D38-FC86-4126-A3D7-6A0087F848FE}"/>
-                </a:ext>
-              </a:extLst>
-            </p:cNvPr>
-            <p:cNvSpPr/>
-            <p:nvPr/>
-          </p:nvSpPr>
-          <p:spPr>
-            <a:xfrm>
-              <a:off x="-837092" y="1356364"/>
-              <a:ext cx="92654" cy="27541"/>
-            </a:xfrm>
-            <a:prstGeom prst="rightArrow">
-              <a:avLst>
-                <a:gd name="adj1" fmla="val 50000"/>
-                <a:gd name="adj2" fmla="val 99023"/>
-              </a:avLst>
-            </a:prstGeom>
-            <a:solidFill>
-              <a:schemeClr val="tx1"/>
-            </a:solidFill>
-            <a:ln>
-              <a:solidFill>
-                <a:schemeClr val="tx1"/>
-              </a:solidFill>
-            </a:ln>
-          </p:spPr>
-          <p:style>
-            <a:lnRef idx="2">
-              <a:schemeClr val="dk1">
-                <a:shade val="50000"/>
-              </a:schemeClr>
-            </a:lnRef>
-            <a:fillRef idx="1">
-              <a:schemeClr val="dk1"/>
-            </a:fillRef>
-            <a:effectRef idx="0">
-              <a:schemeClr val="dk1"/>
-            </a:effectRef>
-            <a:fontRef idx="minor">
-              <a:schemeClr val="lt1"/>
-            </a:fontRef>
-          </p:style>
-          <p:txBody>
-            <a:bodyPr rtlCol="0" anchor="ctr"/>
-            <a:lstStyle/>
-            <a:p>
-              <a:pPr algn="ctr"/>
-              <a:endParaRPr lang="zh-TW" altLang="en-US" sz="1630">
-                <a:solidFill>
-                  <a:schemeClr val="tx1"/>
-                </a:solidFill>
-                <a:latin typeface="Times New Roman" panose="02020603050405020304" pitchFamily="18" charset="0"/>
-                <a:cs typeface="Times New Roman" panose="02020603050405020304" pitchFamily="18" charset="0"/>
-              </a:endParaRPr>
-            </a:p>
-          </p:txBody>
-        </p:sp>
-        <p:sp>
-          <p:nvSpPr>
-            <p:cNvPr id="118" name="箭號: 向右 117">
-              <a:extLst>
-                <a:ext uri="{FF2B5EF4-FFF2-40B4-BE49-F238E27FC236}">
-                  <a16:creationId xmlns:a16="http://schemas.microsoft.com/office/drawing/2014/main" id="{B3462263-DD9C-42BC-B36A-8B9B88B1A8C8}"/>
-                </a:ext>
-              </a:extLst>
-            </p:cNvPr>
-            <p:cNvSpPr/>
-            <p:nvPr/>
-          </p:nvSpPr>
-          <p:spPr>
-            <a:xfrm rot="16200000">
-              <a:off x="-877012" y="1316853"/>
-              <a:ext cx="91764" cy="27808"/>
-            </a:xfrm>
-            <a:prstGeom prst="rightArrow">
-              <a:avLst>
-                <a:gd name="adj1" fmla="val 50000"/>
-                <a:gd name="adj2" fmla="val 99023"/>
-              </a:avLst>
-            </a:prstGeom>
-            <a:solidFill>
-              <a:schemeClr val="tx1"/>
-            </a:solidFill>
-            <a:ln>
-              <a:solidFill>
-                <a:schemeClr val="tx1"/>
-              </a:solidFill>
-            </a:ln>
-          </p:spPr>
-          <p:style>
-            <a:lnRef idx="2">
-              <a:schemeClr val="dk1">
-                <a:shade val="50000"/>
-              </a:schemeClr>
-            </a:lnRef>
-            <a:fillRef idx="1">
-              <a:schemeClr val="dk1"/>
-            </a:fillRef>
-            <a:effectRef idx="0">
-              <a:schemeClr val="dk1"/>
-            </a:effectRef>
-            <a:fontRef idx="minor">
-              <a:schemeClr val="lt1"/>
-            </a:fontRef>
-          </p:style>
-          <p:txBody>
-            <a:bodyPr rtlCol="0" anchor="ctr"/>
-            <a:lstStyle/>
-            <a:p>
-              <a:pPr algn="ctr"/>
-              <a:endParaRPr lang="zh-TW" altLang="en-US" sz="1630" dirty="0">
-                <a:solidFill>
-                  <a:schemeClr val="tx1"/>
-                </a:solidFill>
-                <a:latin typeface="Times New Roman" panose="02020603050405020304" pitchFamily="18" charset="0"/>
-                <a:cs typeface="Times New Roman" panose="02020603050405020304" pitchFamily="18" charset="0"/>
-              </a:endParaRPr>
-            </a:p>
-          </p:txBody>
-        </p:sp>
-      </p:grpSp>
-      <p:sp>
-        <p:nvSpPr>
-          <p:cNvPr id="119" name="矩形 118">
-            <a:extLst>
-              <a:ext uri="{FF2B5EF4-FFF2-40B4-BE49-F238E27FC236}">
-                <a16:creationId xmlns:a16="http://schemas.microsoft.com/office/drawing/2014/main" id="{4DFBEE7D-1A45-46FE-8255-F523F7D876CA}"/>
-              </a:ext>
-            </a:extLst>
-          </p:cNvPr>
-          <p:cNvSpPr/>
-          <p:nvPr/>
-        </p:nvSpPr>
-        <p:spPr>
-          <a:xfrm rot="5400000">
-            <a:off x="9002823" y="5313853"/>
-            <a:ext cx="1359668" cy="343171"/>
-          </a:xfrm>
-          <a:prstGeom prst="rect">
-            <a:avLst/>
-          </a:prstGeom>
-        </p:spPr>
-        <p:txBody>
-          <a:bodyPr wrap="none">
-            <a:spAutoFit/>
-          </a:bodyPr>
-          <a:lstStyle/>
-          <a:p>
-            <a:r>
-              <a:rPr lang="en-US" altLang="zh-TW" sz="1630" dirty="0">
-                <a:latin typeface="Times New Roman" panose="02020603050405020304" pitchFamily="18" charset="0"/>
-                <a:cs typeface="Times New Roman" panose="02020603050405020304" pitchFamily="18" charset="0"/>
-              </a:rPr>
-              <a:t>arbitrary units</a:t>
-            </a:r>
-            <a:endParaRPr lang="zh-TW" altLang="en-US" sz="1630" dirty="0">
-              <a:latin typeface="Times New Roman" panose="02020603050405020304" pitchFamily="18" charset="0"/>
-              <a:cs typeface="Times New Roman" panose="02020603050405020304" pitchFamily="18" charset="0"/>
-            </a:endParaRPr>
-          </a:p>
-        </p:txBody>
-      </p:sp>
-      <p:grpSp>
-        <p:nvGrpSpPr>
-          <p:cNvPr id="120" name="群組 119">
-            <a:extLst>
-              <a:ext uri="{FF2B5EF4-FFF2-40B4-BE49-F238E27FC236}">
-                <a16:creationId xmlns:a16="http://schemas.microsoft.com/office/drawing/2014/main" id="{335F656F-FA50-472B-B729-81BF2650313C}"/>
-              </a:ext>
-            </a:extLst>
-          </p:cNvPr>
-          <p:cNvGrpSpPr/>
-          <p:nvPr/>
-        </p:nvGrpSpPr>
-        <p:grpSpPr>
-          <a:xfrm>
-            <a:off x="7328737" y="3949337"/>
-            <a:ext cx="1718308" cy="343171"/>
-            <a:chOff x="10557418" y="6399554"/>
-            <a:chExt cx="2266734" cy="452699"/>
-          </a:xfrm>
-        </p:grpSpPr>
-        <mc:AlternateContent xmlns:mc="http://schemas.openxmlformats.org/markup-compatibility/2006" xmlns:a14="http://schemas.microsoft.com/office/drawing/2010/main">
-          <mc:Choice Requires="a14">
-            <p:sp>
-              <p:nvSpPr>
-                <p:cNvPr id="121" name="矩形 120">
-                  <a:extLst>
-                    <a:ext uri="{FF2B5EF4-FFF2-40B4-BE49-F238E27FC236}">
-                      <a16:creationId xmlns:a16="http://schemas.microsoft.com/office/drawing/2014/main" id="{BF324142-26FB-4303-A2B5-0000DAE79927}"/>
-                    </a:ext>
-                  </a:extLst>
-                </p:cNvPr>
-                <p:cNvSpPr/>
-                <p:nvPr/>
-              </p:nvSpPr>
-              <p:spPr>
-                <a:xfrm>
-                  <a:off x="10995506" y="6399554"/>
-                  <a:ext cx="1828646" cy="452699"/>
-                </a:xfrm>
-                <a:prstGeom prst="rect">
-                  <a:avLst/>
-                </a:prstGeom>
-              </p:spPr>
-              <p:txBody>
-                <a:bodyPr wrap="none">
-                  <a:spAutoFit/>
-                </a:bodyPr>
-                <a:lstStyle/>
-                <a:p>
-                  <a:pPr/>
-                  <a14:m>
-                    <m:oMathPara xmlns:m="http://schemas.openxmlformats.org/officeDocument/2006/math">
-                      <m:oMathParaPr>
-                        <m:jc m:val="centerGroup"/>
-                      </m:oMathParaPr>
-                      <m:oMath xmlns:m="http://schemas.openxmlformats.org/officeDocument/2006/math">
-                        <m:sSubSup>
-                          <m:sSubSupPr>
-                            <m:ctrlPr>
-                              <a:rPr lang="en-US" altLang="zh-TW" sz="1630" i="1">
-                                <a:latin typeface="Cambria Math" panose="02040503050406030204" pitchFamily="18" charset="0"/>
-                              </a:rPr>
-                            </m:ctrlPr>
-                          </m:sSubSupPr>
-                          <m:e>
-                            <m:r>
-                              <a:rPr lang="en-US" altLang="zh-TW" sz="1630" i="1">
-                                <a:latin typeface="Cambria Math" panose="02040503050406030204" pitchFamily="18" charset="0"/>
-                              </a:rPr>
-                              <m:t>𝑊</m:t>
-                            </m:r>
-                          </m:e>
-                          <m:sub>
-                            <m:r>
-                              <a:rPr lang="en-US" altLang="zh-TW" sz="1630" i="1">
-                                <a:latin typeface="Cambria Math" panose="02040503050406030204" pitchFamily="18" charset="0"/>
-                              </a:rPr>
-                              <m:t>0</m:t>
-                            </m:r>
-                          </m:sub>
-                          <m:sup>
-                            <m:r>
-                              <a:rPr lang="en-US" altLang="zh-TW" sz="1630" i="1">
-                                <a:latin typeface="Cambria Math" panose="02040503050406030204" pitchFamily="18" charset="0"/>
-                              </a:rPr>
-                              <m:t> </m:t>
-                            </m:r>
-                          </m:sup>
-                        </m:sSubSup>
-                        <m:r>
-                          <a:rPr lang="en-US" altLang="zh-TW" sz="1630" i="1">
-                            <a:latin typeface="Cambria Math" panose="02040503050406030204" pitchFamily="18" charset="0"/>
-                          </a:rPr>
-                          <m:t>=1.5 </m:t>
-                        </m:r>
-                        <m:r>
-                          <a:rPr lang="en-US" altLang="zh-TW" sz="1630" i="1">
-                            <a:latin typeface="Cambria Math" panose="02040503050406030204" pitchFamily="18" charset="0"/>
-                          </a:rPr>
-                          <m:t>𝜇</m:t>
-                        </m:r>
-                        <m:r>
-                          <m:rPr>
-                            <m:sty m:val="p"/>
-                          </m:rPr>
-                          <a:rPr lang="en-US" altLang="zh-TW" sz="1630">
-                            <a:latin typeface="Cambria Math" panose="02040503050406030204" pitchFamily="18" charset="0"/>
-                          </a:rPr>
-                          <m:t>m</m:t>
-                        </m:r>
-                      </m:oMath>
-                    </m:oMathPara>
-                  </a14:m>
-                  <a:endParaRPr lang="zh-TW" altLang="en-US" sz="1630" dirty="0">
-                    <a:latin typeface="Times New Roman" panose="02020603050405020304" pitchFamily="18" charset="0"/>
-                    <a:cs typeface="Times New Roman" panose="02020603050405020304" pitchFamily="18" charset="0"/>
-                  </a:endParaRPr>
-                </a:p>
-              </p:txBody>
-            </p:sp>
-          </mc:Choice>
-          <mc:Fallback xmlns="">
-            <p:sp>
-              <p:nvSpPr>
-                <p:cNvPr id="6" name="矩形 5">
-                  <a:extLst>
-                    <a:ext uri="{FF2B5EF4-FFF2-40B4-BE49-F238E27FC236}">
-                      <a16:creationId xmlns:a16="http://schemas.microsoft.com/office/drawing/2014/main" id="{33615A92-2488-4DAF-823B-7ACEF3923D24}"/>
-                    </a:ext>
-                  </a:extLst>
-                </p:cNvPr>
-                <p:cNvSpPr>
-                  <a:spLocks noRot="1" noChangeAspect="1" noMove="1" noResize="1" noEditPoints="1" noAdjustHandles="1" noChangeArrowheads="1" noChangeShapeType="1" noTextEdit="1"/>
-                </p:cNvSpPr>
-                <p:nvPr/>
-              </p:nvSpPr>
-              <p:spPr>
-                <a:xfrm>
-                  <a:off x="10995506" y="6399554"/>
-                  <a:ext cx="1828646" cy="452699"/>
-                </a:xfrm>
-                <a:prstGeom prst="rect">
-                  <a:avLst/>
-                </a:prstGeom>
-                <a:blipFill>
-                  <a:blip r:embed="rId5"/>
-                  <a:stretch>
-                    <a:fillRect b="-5263"/>
-                  </a:stretch>
-                </a:blipFill>
-              </p:spPr>
-              <p:txBody>
-                <a:bodyPr/>
-                <a:lstStyle/>
-                <a:p>
-                  <a:r>
-                    <a:rPr lang="zh-TW" altLang="en-US">
-                      <a:noFill/>
-                    </a:rPr>
-                    <a:t> </a:t>
-                  </a:r>
-                </a:p>
-              </p:txBody>
-            </p:sp>
-          </mc:Fallback>
-        </mc:AlternateContent>
-        <p:pic>
-          <p:nvPicPr>
-            <p:cNvPr id="122" name="圖片 121">
-              <a:extLst>
-                <a:ext uri="{FF2B5EF4-FFF2-40B4-BE49-F238E27FC236}">
-                  <a16:creationId xmlns:a16="http://schemas.microsoft.com/office/drawing/2014/main" id="{2611E32E-A1A0-4605-A171-F58183CFCAA7}"/>
-                </a:ext>
-              </a:extLst>
-            </p:cNvPr>
-            <p:cNvPicPr>
-              <a:picLocks noChangeAspect="1"/>
-            </p:cNvPicPr>
-            <p:nvPr/>
-          </p:nvPicPr>
-          <p:blipFill>
-            <a:blip r:embed="rId6">
-              <a:clrChange>
-                <a:clrFrom>
-                  <a:srgbClr val="FFFFFF"/>
-                </a:clrFrom>
-                <a:clrTo>
-                  <a:srgbClr val="FFFFFF">
-                    <a:alpha val="0"/>
-                  </a:srgbClr>
-                </a:clrTo>
-              </a:clrChange>
-            </a:blip>
-            <a:stretch>
-              <a:fillRect/>
-            </a:stretch>
-          </p:blipFill>
-          <p:spPr>
-            <a:xfrm>
-              <a:off x="10557418" y="6619851"/>
-              <a:ext cx="476304" cy="136937"/>
-            </a:xfrm>
-            <a:prstGeom prst="rect">
-              <a:avLst/>
-            </a:prstGeom>
-          </p:spPr>
-        </p:pic>
-      </p:grpSp>
-      <p:pic>
-        <p:nvPicPr>
-          <p:cNvPr id="130" name="圖片 129">
-            <a:extLst>
-              <a:ext uri="{FF2B5EF4-FFF2-40B4-BE49-F238E27FC236}">
-                <a16:creationId xmlns:a16="http://schemas.microsoft.com/office/drawing/2014/main" id="{F555AF0C-3810-4679-8E01-402637068956}"/>
-              </a:ext>
-            </a:extLst>
-          </p:cNvPr>
-          <p:cNvPicPr>
-            <a:picLocks noChangeAspect="1"/>
-          </p:cNvPicPr>
-          <p:nvPr/>
-        </p:nvPicPr>
-        <p:blipFill rotWithShape="1">
-          <a:blip r:embed="rId44">
-            <a:clrChange>
-              <a:clrFrom>
-                <a:srgbClr val="FFFFFF"/>
-              </a:clrFrom>
-              <a:clrTo>
-                <a:srgbClr val="FFFFFF">
-                  <a:alpha val="0"/>
-                </a:srgbClr>
-              </a:clrTo>
-            </a:clrChange>
-            <a:extLst>
-              <a:ext uri="{28A0092B-C50C-407E-A947-70E740481C1C}">
-                <a14:useLocalDpi xmlns:a14="http://schemas.microsoft.com/office/drawing/2010/main" val="0"/>
-              </a:ext>
-            </a:extLst>
-          </a:blip>
-          <a:srcRect l="85053" r="8793"/>
-          <a:stretch/>
-        </p:blipFill>
-        <p:spPr>
-          <a:xfrm>
-            <a:off x="9017000" y="4645804"/>
-            <a:ext cx="609601" cy="1651000"/>
-          </a:xfrm>
-          <a:prstGeom prst="rect">
-            <a:avLst/>
-          </a:prstGeom>
-        </p:spPr>
-      </p:pic>
-    </p:spTree>
-    <p:extLst>
-      <p:ext uri="{BB962C8B-B14F-4D97-AF65-F5344CB8AC3E}">
-        <p14:creationId xmlns:p14="http://schemas.microsoft.com/office/powerpoint/2010/main" val="1540917787"/>
       </p:ext>
     </p:extLst>
   </p:cSld>

--- a/Final/Figures/ufig.pptx
+++ b/Final/Figures/ufig.pptx
@@ -6,6 +6,7 @@
   </p:sldMasterIdLst>
   <p:sldIdLst>
     <p:sldId id="256" r:id="rId2"/>
+    <p:sldId id="257" r:id="rId3"/>
   </p:sldIdLst>
   <p:sldSz cx="9906000" cy="6480175"/>
   <p:notesSz cx="6858000" cy="9144000"/>
@@ -243,7 +244,7 @@
           <a:p>
             <a:fld id="{6A29EBDB-ED21-4F12-8F84-164F28F696EF}" type="datetimeFigureOut">
               <a:rPr lang="zh-TW" altLang="en-US" smtClean="0"/>
-              <a:t>2026/6/19</a:t>
+              <a:t>2026/6/30</a:t>
             </a:fld>
             <a:endParaRPr lang="zh-TW" altLang="en-US"/>
           </a:p>
@@ -413,7 +414,7 @@
           <a:p>
             <a:fld id="{6A29EBDB-ED21-4F12-8F84-164F28F696EF}" type="datetimeFigureOut">
               <a:rPr lang="zh-TW" altLang="en-US" smtClean="0"/>
-              <a:t>2026/6/19</a:t>
+              <a:t>2026/6/30</a:t>
             </a:fld>
             <a:endParaRPr lang="zh-TW" altLang="en-US"/>
           </a:p>
@@ -593,7 +594,7 @@
           <a:p>
             <a:fld id="{6A29EBDB-ED21-4F12-8F84-164F28F696EF}" type="datetimeFigureOut">
               <a:rPr lang="zh-TW" altLang="en-US" smtClean="0"/>
-              <a:t>2026/6/19</a:t>
+              <a:t>2026/6/30</a:t>
             </a:fld>
             <a:endParaRPr lang="zh-TW" altLang="en-US"/>
           </a:p>
@@ -763,7 +764,7 @@
           <a:p>
             <a:fld id="{6A29EBDB-ED21-4F12-8F84-164F28F696EF}" type="datetimeFigureOut">
               <a:rPr lang="zh-TW" altLang="en-US" smtClean="0"/>
-              <a:t>2026/6/19</a:t>
+              <a:t>2026/6/30</a:t>
             </a:fld>
             <a:endParaRPr lang="zh-TW" altLang="en-US"/>
           </a:p>
@@ -1007,7 +1008,7 @@
           <a:p>
             <a:fld id="{6A29EBDB-ED21-4F12-8F84-164F28F696EF}" type="datetimeFigureOut">
               <a:rPr lang="zh-TW" altLang="en-US" smtClean="0"/>
-              <a:t>2026/6/19</a:t>
+              <a:t>2026/6/30</a:t>
             </a:fld>
             <a:endParaRPr lang="zh-TW" altLang="en-US"/>
           </a:p>
@@ -1239,7 +1240,7 @@
           <a:p>
             <a:fld id="{6A29EBDB-ED21-4F12-8F84-164F28F696EF}" type="datetimeFigureOut">
               <a:rPr lang="zh-TW" altLang="en-US" smtClean="0"/>
-              <a:t>2026/6/19</a:t>
+              <a:t>2026/6/30</a:t>
             </a:fld>
             <a:endParaRPr lang="zh-TW" altLang="en-US"/>
           </a:p>
@@ -1606,7 +1607,7 @@
           <a:p>
             <a:fld id="{6A29EBDB-ED21-4F12-8F84-164F28F696EF}" type="datetimeFigureOut">
               <a:rPr lang="zh-TW" altLang="en-US" smtClean="0"/>
-              <a:t>2026/6/19</a:t>
+              <a:t>2026/6/30</a:t>
             </a:fld>
             <a:endParaRPr lang="zh-TW" altLang="en-US"/>
           </a:p>
@@ -1724,7 +1725,7 @@
           <a:p>
             <a:fld id="{6A29EBDB-ED21-4F12-8F84-164F28F696EF}" type="datetimeFigureOut">
               <a:rPr lang="zh-TW" altLang="en-US" smtClean="0"/>
-              <a:t>2026/6/19</a:t>
+              <a:t>2026/6/30</a:t>
             </a:fld>
             <a:endParaRPr lang="zh-TW" altLang="en-US"/>
           </a:p>
@@ -1819,7 +1820,7 @@
           <a:p>
             <a:fld id="{6A29EBDB-ED21-4F12-8F84-164F28F696EF}" type="datetimeFigureOut">
               <a:rPr lang="zh-TW" altLang="en-US" smtClean="0"/>
-              <a:t>2026/6/19</a:t>
+              <a:t>2026/6/30</a:t>
             </a:fld>
             <a:endParaRPr lang="zh-TW" altLang="en-US"/>
           </a:p>
@@ -2096,7 +2097,7 @@
           <a:p>
             <a:fld id="{6A29EBDB-ED21-4F12-8F84-164F28F696EF}" type="datetimeFigureOut">
               <a:rPr lang="zh-TW" altLang="en-US" smtClean="0"/>
-              <a:t>2026/6/19</a:t>
+              <a:t>2026/6/30</a:t>
             </a:fld>
             <a:endParaRPr lang="zh-TW" altLang="en-US"/>
           </a:p>
@@ -2353,7 +2354,7 @@
           <a:p>
             <a:fld id="{6A29EBDB-ED21-4F12-8F84-164F28F696EF}" type="datetimeFigureOut">
               <a:rPr lang="zh-TW" altLang="en-US" smtClean="0"/>
-              <a:t>2026/6/19</a:t>
+              <a:t>2026/6/30</a:t>
             </a:fld>
             <a:endParaRPr lang="zh-TW" altLang="en-US"/>
           </a:p>
@@ -2566,7 +2567,7 @@
           <a:p>
             <a:fld id="{6A29EBDB-ED21-4F12-8F84-164F28F696EF}" type="datetimeFigureOut">
               <a:rPr lang="zh-TW" altLang="en-US" smtClean="0"/>
-              <a:t>2026/6/19</a:t>
+              <a:t>2026/6/30</a:t>
             </a:fld>
             <a:endParaRPr lang="zh-TW" altLang="en-US"/>
           </a:p>
@@ -6966,6 +6967,4787 @@
 </p:sld>
 </file>
 
+<file path=ppt/slides/slide2.xml><?xml version="1.0" encoding="utf-8"?>
+<p:sld xmlns:a="http://schemas.openxmlformats.org/drawingml/2006/main" xmlns:r="http://schemas.openxmlformats.org/officeDocument/2006/relationships" xmlns:p="http://schemas.openxmlformats.org/presentationml/2006/main" show="0">
+  <p:cSld>
+    <p:spTree>
+      <p:nvGrpSpPr>
+        <p:cNvPr id="1" name=""/>
+        <p:cNvGrpSpPr/>
+        <p:nvPr/>
+      </p:nvGrpSpPr>
+      <p:grpSpPr>
+        <a:xfrm>
+          <a:off x="0" y="0"/>
+          <a:ext cx="0" cy="0"/>
+          <a:chOff x="0" y="0"/>
+          <a:chExt cx="0" cy="0"/>
+        </a:xfrm>
+      </p:grpSpPr>
+      <p:pic>
+        <p:nvPicPr>
+          <p:cNvPr id="7" name="圖片 6">
+            <a:extLst>
+              <a:ext uri="{FF2B5EF4-FFF2-40B4-BE49-F238E27FC236}">
+                <a16:creationId xmlns:a16="http://schemas.microsoft.com/office/drawing/2014/main" id="{BA35AA70-FA23-48E2-82B5-4403B1DDB74C}"/>
+              </a:ext>
+            </a:extLst>
+          </p:cNvPr>
+          <p:cNvPicPr>
+            <a:picLocks noChangeAspect="1"/>
+          </p:cNvPicPr>
+          <p:nvPr/>
+        </p:nvPicPr>
+        <p:blipFill rotWithShape="1">
+          <a:blip r:embed="rId2">
+            <a:clrChange>
+              <a:clrFrom>
+                <a:srgbClr val="FDFDFD"/>
+              </a:clrFrom>
+              <a:clrTo>
+                <a:srgbClr val="FDFDFD">
+                  <a:alpha val="0"/>
+                </a:srgbClr>
+              </a:clrTo>
+            </a:clrChange>
+            <a:extLst>
+              <a:ext uri="{28A0092B-C50C-407E-A947-70E740481C1C}">
+                <a14:useLocalDpi xmlns:a14="http://schemas.microsoft.com/office/drawing/2010/main" val="0"/>
+              </a:ext>
+            </a:extLst>
+          </a:blip>
+          <a:srcRect r="84386"/>
+          <a:stretch/>
+        </p:blipFill>
+        <p:spPr>
+          <a:xfrm>
+            <a:off x="1842366" y="1967580"/>
+            <a:ext cx="1587970" cy="1695009"/>
+          </a:xfrm>
+          <a:prstGeom prst="rect">
+            <a:avLst/>
+          </a:prstGeom>
+        </p:spPr>
+      </p:pic>
+      <p:pic>
+        <p:nvPicPr>
+          <p:cNvPr id="9" name="圖片 8">
+            <a:extLst>
+              <a:ext uri="{FF2B5EF4-FFF2-40B4-BE49-F238E27FC236}">
+                <a16:creationId xmlns:a16="http://schemas.microsoft.com/office/drawing/2014/main" id="{9E2CEEFC-EB1F-4232-89C9-D8854B65D16A}"/>
+              </a:ext>
+            </a:extLst>
+          </p:cNvPr>
+          <p:cNvPicPr>
+            <a:picLocks noChangeAspect="1"/>
+          </p:cNvPicPr>
+          <p:nvPr/>
+        </p:nvPicPr>
+        <p:blipFill rotWithShape="1">
+          <a:blip r:embed="rId3">
+            <a:clrChange>
+              <a:clrFrom>
+                <a:srgbClr val="FFFFFF"/>
+              </a:clrFrom>
+              <a:clrTo>
+                <a:srgbClr val="FFFFFF">
+                  <a:alpha val="0"/>
+                </a:srgbClr>
+              </a:clrTo>
+            </a:clrChange>
+            <a:extLst>
+              <a:ext uri="{28A0092B-C50C-407E-A947-70E740481C1C}">
+                <a14:useLocalDpi xmlns:a14="http://schemas.microsoft.com/office/drawing/2010/main" val="0"/>
+              </a:ext>
+            </a:extLst>
+          </a:blip>
+          <a:srcRect r="84278"/>
+          <a:stretch/>
+        </p:blipFill>
+        <p:spPr>
+          <a:xfrm>
+            <a:off x="1949389" y="4392014"/>
+            <a:ext cx="1504364" cy="1594800"/>
+          </a:xfrm>
+          <a:prstGeom prst="rect">
+            <a:avLst/>
+          </a:prstGeom>
+        </p:spPr>
+      </p:pic>
+      <p:pic>
+        <p:nvPicPr>
+          <p:cNvPr id="11" name="圖片 10">
+            <a:extLst>
+              <a:ext uri="{FF2B5EF4-FFF2-40B4-BE49-F238E27FC236}">
+                <a16:creationId xmlns:a16="http://schemas.microsoft.com/office/drawing/2014/main" id="{A91246B0-6793-4A42-BD59-084A6D23E970}"/>
+              </a:ext>
+            </a:extLst>
+          </p:cNvPr>
+          <p:cNvPicPr>
+            <a:picLocks noChangeAspect="1"/>
+          </p:cNvPicPr>
+          <p:nvPr/>
+        </p:nvPicPr>
+        <p:blipFill rotWithShape="1">
+          <a:blip r:embed="rId4">
+            <a:clrChange>
+              <a:clrFrom>
+                <a:srgbClr val="FDFDFD"/>
+              </a:clrFrom>
+              <a:clrTo>
+                <a:srgbClr val="FDFDFD">
+                  <a:alpha val="0"/>
+                </a:srgbClr>
+              </a:clrTo>
+            </a:clrChange>
+            <a:extLst>
+              <a:ext uri="{28A0092B-C50C-407E-A947-70E740481C1C}">
+                <a14:useLocalDpi xmlns:a14="http://schemas.microsoft.com/office/drawing/2010/main" val="0"/>
+              </a:ext>
+            </a:extLst>
+          </a:blip>
+          <a:srcRect r="84708"/>
+          <a:stretch/>
+        </p:blipFill>
+        <p:spPr>
+          <a:xfrm>
+            <a:off x="1842366" y="356049"/>
+            <a:ext cx="1555211" cy="1695009"/>
+          </a:xfrm>
+          <a:prstGeom prst="rect">
+            <a:avLst/>
+          </a:prstGeom>
+        </p:spPr>
+      </p:pic>
+      <p:sp>
+        <p:nvSpPr>
+          <p:cNvPr id="54" name="矩形: 圓角 53">
+            <a:extLst>
+              <a:ext uri="{FF2B5EF4-FFF2-40B4-BE49-F238E27FC236}">
+                <a16:creationId xmlns:a16="http://schemas.microsoft.com/office/drawing/2014/main" id="{288E9896-9E4F-4C2C-A911-7FEF0722013B}"/>
+              </a:ext>
+            </a:extLst>
+          </p:cNvPr>
+          <p:cNvSpPr/>
+          <p:nvPr/>
+        </p:nvSpPr>
+        <p:spPr>
+          <a:xfrm>
+            <a:off x="1278832" y="4357006"/>
+            <a:ext cx="7555750" cy="1827150"/>
+          </a:xfrm>
+          <a:prstGeom prst="roundRect">
+            <a:avLst>
+              <a:gd name="adj" fmla="val 6163"/>
+            </a:avLst>
+          </a:prstGeom>
+          <a:noFill/>
+          <a:ln w="9525" cap="flat" cmpd="sng" algn="ctr">
+            <a:solidFill>
+              <a:schemeClr val="accent2"/>
+            </a:solidFill>
+            <a:prstDash val="solid"/>
+            <a:round/>
+            <a:headEnd type="none" w="med" len="med"/>
+            <a:tailEnd type="none" w="med" len="med"/>
+          </a:ln>
+        </p:spPr>
+        <p:style>
+          <a:lnRef idx="0">
+            <a:scrgbClr r="0" g="0" b="0"/>
+          </a:lnRef>
+          <a:fillRef idx="0">
+            <a:scrgbClr r="0" g="0" b="0"/>
+          </a:fillRef>
+          <a:effectRef idx="0">
+            <a:scrgbClr r="0" g="0" b="0"/>
+          </a:effectRef>
+          <a:fontRef idx="minor">
+            <a:schemeClr val="accent2"/>
+          </a:fontRef>
+        </p:style>
+        <p:txBody>
+          <a:bodyPr rot="0" spcFirstLastPara="0" vertOverflow="overflow" horzOverflow="overflow" vert="horz" wrap="square" lIns="91440" tIns="45720" rIns="91440" bIns="45720" numCol="1" spcCol="0" rtlCol="0" fromWordArt="0" anchor="ctr" anchorCtr="0" forceAA="0" compatLnSpc="1">
+            <a:prstTxWarp prst="textNoShape">
+              <a:avLst/>
+            </a:prstTxWarp>
+            <a:noAutofit/>
+          </a:bodyPr>
+          <a:lstStyle/>
+          <a:p>
+            <a:pPr algn="ctr"/>
+            <a:endParaRPr lang="zh-TW" altLang="en-US" sz="1900" dirty="0">
+              <a:latin typeface="Times New Roman" panose="02020603050405020304" pitchFamily="18" charset="0"/>
+              <a:cs typeface="Times New Roman" panose="02020603050405020304" pitchFamily="18" charset="0"/>
+            </a:endParaRPr>
+          </a:p>
+        </p:txBody>
+      </p:sp>
+      <p:sp>
+        <p:nvSpPr>
+          <p:cNvPr id="55" name="矩形: 圓角 54">
+            <a:extLst>
+              <a:ext uri="{FF2B5EF4-FFF2-40B4-BE49-F238E27FC236}">
+                <a16:creationId xmlns:a16="http://schemas.microsoft.com/office/drawing/2014/main" id="{7BFE40E8-D447-4A65-A047-52809FD40D23}"/>
+              </a:ext>
+            </a:extLst>
+          </p:cNvPr>
+          <p:cNvSpPr/>
+          <p:nvPr/>
+        </p:nvSpPr>
+        <p:spPr>
+          <a:xfrm>
+            <a:off x="1278833" y="492501"/>
+            <a:ext cx="7555886" cy="3300880"/>
+          </a:xfrm>
+          <a:prstGeom prst="roundRect">
+            <a:avLst>
+              <a:gd name="adj" fmla="val 6163"/>
+            </a:avLst>
+          </a:prstGeom>
+          <a:noFill/>
+          <a:ln w="9525" cap="flat" cmpd="sng" algn="ctr">
+            <a:solidFill>
+              <a:schemeClr val="accent1"/>
+            </a:solidFill>
+            <a:prstDash val="solid"/>
+            <a:round/>
+            <a:headEnd type="none" w="med" len="med"/>
+            <a:tailEnd type="none" w="med" len="med"/>
+          </a:ln>
+        </p:spPr>
+        <p:style>
+          <a:lnRef idx="0">
+            <a:scrgbClr r="0" g="0" b="0"/>
+          </a:lnRef>
+          <a:fillRef idx="0">
+            <a:scrgbClr r="0" g="0" b="0"/>
+          </a:fillRef>
+          <a:effectRef idx="0">
+            <a:scrgbClr r="0" g="0" b="0"/>
+          </a:effectRef>
+          <a:fontRef idx="minor">
+            <a:schemeClr val="accent1"/>
+          </a:fontRef>
+        </p:style>
+        <p:txBody>
+          <a:bodyPr rot="0" spcFirstLastPara="0" vertOverflow="overflow" horzOverflow="overflow" vert="horz" wrap="square" lIns="91440" tIns="45720" rIns="91440" bIns="45720" numCol="1" spcCol="0" rtlCol="0" fromWordArt="0" anchor="ctr" anchorCtr="0" forceAA="0" compatLnSpc="1">
+            <a:prstTxWarp prst="textNoShape">
+              <a:avLst/>
+            </a:prstTxWarp>
+            <a:noAutofit/>
+          </a:bodyPr>
+          <a:lstStyle/>
+          <a:p>
+            <a:pPr algn="ctr"/>
+            <a:endParaRPr lang="zh-TW" altLang="en-US" sz="1900" dirty="0">
+              <a:latin typeface="Times New Roman" panose="02020603050405020304" pitchFamily="18" charset="0"/>
+              <a:cs typeface="Times New Roman" panose="02020603050405020304" pitchFamily="18" charset="0"/>
+            </a:endParaRPr>
+          </a:p>
+        </p:txBody>
+      </p:sp>
+      <p:grpSp>
+        <p:nvGrpSpPr>
+          <p:cNvPr id="56" name="群組 55">
+            <a:extLst>
+              <a:ext uri="{FF2B5EF4-FFF2-40B4-BE49-F238E27FC236}">
+                <a16:creationId xmlns:a16="http://schemas.microsoft.com/office/drawing/2014/main" id="{16FEC379-B580-4556-AB9A-6B9F500A38DB}"/>
+              </a:ext>
+            </a:extLst>
+          </p:cNvPr>
+          <p:cNvGrpSpPr/>
+          <p:nvPr/>
+        </p:nvGrpSpPr>
+        <p:grpSpPr>
+          <a:xfrm>
+            <a:off x="7121208" y="6153964"/>
+            <a:ext cx="1718308" cy="343171"/>
+            <a:chOff x="10557418" y="6399554"/>
+            <a:chExt cx="2266734" cy="452699"/>
+          </a:xfrm>
+        </p:grpSpPr>
+        <mc:AlternateContent xmlns:mc="http://schemas.openxmlformats.org/markup-compatibility/2006" xmlns:a14="http://schemas.microsoft.com/office/drawing/2010/main">
+          <mc:Choice Requires="a14">
+            <p:sp>
+              <p:nvSpPr>
+                <p:cNvPr id="57" name="矩形 56">
+                  <a:extLst>
+                    <a:ext uri="{FF2B5EF4-FFF2-40B4-BE49-F238E27FC236}">
+                      <a16:creationId xmlns:a16="http://schemas.microsoft.com/office/drawing/2014/main" id="{6D3AE693-FAE4-4477-9E97-B705D2E634A1}"/>
+                    </a:ext>
+                  </a:extLst>
+                </p:cNvPr>
+                <p:cNvSpPr/>
+                <p:nvPr/>
+              </p:nvSpPr>
+              <p:spPr>
+                <a:xfrm>
+                  <a:off x="10995506" y="6399554"/>
+                  <a:ext cx="1828646" cy="452699"/>
+                </a:xfrm>
+                <a:prstGeom prst="rect">
+                  <a:avLst/>
+                </a:prstGeom>
+              </p:spPr>
+              <p:txBody>
+                <a:bodyPr wrap="none">
+                  <a:spAutoFit/>
+                </a:bodyPr>
+                <a:lstStyle/>
+                <a:p>
+                  <a:pPr/>
+                  <a14:m>
+                    <m:oMathPara xmlns:m="http://schemas.openxmlformats.org/officeDocument/2006/math">
+                      <m:oMathParaPr>
+                        <m:jc m:val="centerGroup"/>
+                      </m:oMathParaPr>
+                      <m:oMath xmlns:m="http://schemas.openxmlformats.org/officeDocument/2006/math">
+                        <m:sSubSup>
+                          <m:sSubSupPr>
+                            <m:ctrlPr>
+                              <a:rPr lang="en-US" altLang="zh-TW" sz="1630" i="1">
+                                <a:latin typeface="Cambria Math" panose="02040503050406030204" pitchFamily="18" charset="0"/>
+                              </a:rPr>
+                            </m:ctrlPr>
+                          </m:sSubSupPr>
+                          <m:e>
+                            <m:r>
+                              <a:rPr lang="en-US" altLang="zh-TW" sz="1630" i="1">
+                                <a:latin typeface="Cambria Math" panose="02040503050406030204" pitchFamily="18" charset="0"/>
+                              </a:rPr>
+                              <m:t>𝑊</m:t>
+                            </m:r>
+                          </m:e>
+                          <m:sub>
+                            <m:r>
+                              <a:rPr lang="en-US" altLang="zh-TW" sz="1630" i="1">
+                                <a:latin typeface="Cambria Math" panose="02040503050406030204" pitchFamily="18" charset="0"/>
+                              </a:rPr>
+                              <m:t>0</m:t>
+                            </m:r>
+                          </m:sub>
+                          <m:sup>
+                            <m:r>
+                              <a:rPr lang="en-US" altLang="zh-TW" sz="1630" i="1">
+                                <a:latin typeface="Cambria Math" panose="02040503050406030204" pitchFamily="18" charset="0"/>
+                              </a:rPr>
+                              <m:t> </m:t>
+                            </m:r>
+                          </m:sup>
+                        </m:sSubSup>
+                        <m:r>
+                          <a:rPr lang="en-US" altLang="zh-TW" sz="1630" i="1">
+                            <a:latin typeface="Cambria Math" panose="02040503050406030204" pitchFamily="18" charset="0"/>
+                          </a:rPr>
+                          <m:t>=</m:t>
+                        </m:r>
+                        <m:r>
+                          <a:rPr lang="en-US" altLang="zh-TW" sz="1630" i="1">
+                            <a:latin typeface="Cambria Math" panose="02040503050406030204" pitchFamily="18" charset="0"/>
+                          </a:rPr>
+                          <m:t>1</m:t>
+                        </m:r>
+                        <m:r>
+                          <a:rPr lang="en-US" altLang="zh-TW" sz="1630" i="1">
+                            <a:latin typeface="Cambria Math" panose="02040503050406030204" pitchFamily="18" charset="0"/>
+                          </a:rPr>
+                          <m:t>.</m:t>
+                        </m:r>
+                        <m:r>
+                          <a:rPr lang="en-US" altLang="zh-TW" sz="1630" i="1">
+                            <a:latin typeface="Cambria Math" panose="02040503050406030204" pitchFamily="18" charset="0"/>
+                          </a:rPr>
+                          <m:t>5</m:t>
+                        </m:r>
+                        <m:r>
+                          <a:rPr lang="en-US" altLang="zh-TW" sz="1630" i="1">
+                            <a:latin typeface="Cambria Math" panose="02040503050406030204" pitchFamily="18" charset="0"/>
+                          </a:rPr>
+                          <m:t> </m:t>
+                        </m:r>
+                        <m:r>
+                          <a:rPr lang="en-US" altLang="zh-TW" sz="1630" i="1">
+                            <a:latin typeface="Cambria Math" panose="02040503050406030204" pitchFamily="18" charset="0"/>
+                          </a:rPr>
+                          <m:t>𝜇</m:t>
+                        </m:r>
+                        <m:r>
+                          <m:rPr>
+                            <m:sty m:val="p"/>
+                          </m:rPr>
+                          <a:rPr lang="en-US" altLang="zh-TW" sz="1630">
+                            <a:latin typeface="Cambria Math" panose="02040503050406030204" pitchFamily="18" charset="0"/>
+                          </a:rPr>
+                          <m:t>m</m:t>
+                        </m:r>
+                      </m:oMath>
+                    </m:oMathPara>
+                  </a14:m>
+                  <a:endParaRPr lang="zh-TW" altLang="en-US" sz="1630" dirty="0">
+                    <a:latin typeface="Times New Roman" panose="02020603050405020304" pitchFamily="18" charset="0"/>
+                    <a:cs typeface="Times New Roman" panose="02020603050405020304" pitchFamily="18" charset="0"/>
+                  </a:endParaRPr>
+                </a:p>
+              </p:txBody>
+            </p:sp>
+          </mc:Choice>
+          <mc:Fallback xmlns="">
+            <p:sp>
+              <p:nvSpPr>
+                <p:cNvPr id="6" name="矩形 5">
+                  <a:extLst>
+                    <a:ext uri="{FF2B5EF4-FFF2-40B4-BE49-F238E27FC236}">
+                      <a16:creationId xmlns:a16="http://schemas.microsoft.com/office/drawing/2014/main" id="{33615A92-2488-4DAF-823B-7ACEF3923D24}"/>
+                    </a:ext>
+                  </a:extLst>
+                </p:cNvPr>
+                <p:cNvSpPr>
+                  <a:spLocks noRot="1" noChangeAspect="1" noMove="1" noResize="1" noEditPoints="1" noAdjustHandles="1" noChangeArrowheads="1" noChangeShapeType="1" noTextEdit="1"/>
+                </p:cNvSpPr>
+                <p:nvPr/>
+              </p:nvSpPr>
+              <p:spPr>
+                <a:xfrm>
+                  <a:off x="10995506" y="6399554"/>
+                  <a:ext cx="1828646" cy="452699"/>
+                </a:xfrm>
+                <a:prstGeom prst="rect">
+                  <a:avLst/>
+                </a:prstGeom>
+                <a:blipFill>
+                  <a:blip r:embed="rId5"/>
+                  <a:stretch>
+                    <a:fillRect b="-5263"/>
+                  </a:stretch>
+                </a:blipFill>
+              </p:spPr>
+              <p:txBody>
+                <a:bodyPr/>
+                <a:lstStyle/>
+                <a:p>
+                  <a:r>
+                    <a:rPr lang="zh-TW" altLang="en-US">
+                      <a:noFill/>
+                    </a:rPr>
+                    <a:t> </a:t>
+                  </a:r>
+                </a:p>
+              </p:txBody>
+            </p:sp>
+          </mc:Fallback>
+        </mc:AlternateContent>
+        <p:pic>
+          <p:nvPicPr>
+            <p:cNvPr id="58" name="圖片 57">
+              <a:extLst>
+                <a:ext uri="{FF2B5EF4-FFF2-40B4-BE49-F238E27FC236}">
+                  <a16:creationId xmlns:a16="http://schemas.microsoft.com/office/drawing/2014/main" id="{302A021D-6B28-487B-B28E-B5D67657CE5B}"/>
+                </a:ext>
+              </a:extLst>
+            </p:cNvPr>
+            <p:cNvPicPr>
+              <a:picLocks noChangeAspect="1"/>
+            </p:cNvPicPr>
+            <p:nvPr/>
+          </p:nvPicPr>
+          <p:blipFill>
+            <a:blip r:embed="rId6">
+              <a:clrChange>
+                <a:clrFrom>
+                  <a:srgbClr val="FFFFFF"/>
+                </a:clrFrom>
+                <a:clrTo>
+                  <a:srgbClr val="FFFFFF">
+                    <a:alpha val="0"/>
+                  </a:srgbClr>
+                </a:clrTo>
+              </a:clrChange>
+            </a:blip>
+            <a:stretch>
+              <a:fillRect/>
+            </a:stretch>
+          </p:blipFill>
+          <p:spPr>
+            <a:xfrm>
+              <a:off x="10557418" y="6619851"/>
+              <a:ext cx="476304" cy="136937"/>
+            </a:xfrm>
+            <a:prstGeom prst="rect">
+              <a:avLst/>
+            </a:prstGeom>
+          </p:spPr>
+        </p:pic>
+      </p:grpSp>
+      <mc:AlternateContent xmlns:mc="http://schemas.openxmlformats.org/markup-compatibility/2006">
+        <mc:Choice xmlns:a14="http://schemas.microsoft.com/office/drawing/2010/main" Requires="a14">
+          <p:sp>
+            <p:nvSpPr>
+              <p:cNvPr id="59" name="矩形 58">
+                <a:extLst>
+                  <a:ext uri="{FF2B5EF4-FFF2-40B4-BE49-F238E27FC236}">
+                    <a16:creationId xmlns:a16="http://schemas.microsoft.com/office/drawing/2014/main" id="{4EE619D1-FE5A-4904-9EF9-812D48C58D84}"/>
+                  </a:ext>
+                </a:extLst>
+              </p:cNvPr>
+              <p:cNvSpPr/>
+              <p:nvPr/>
+            </p:nvSpPr>
+            <p:spPr>
+              <a:xfrm>
+                <a:off x="1121156" y="3906164"/>
+                <a:ext cx="1495601" cy="456728"/>
+              </a:xfrm>
+              <a:prstGeom prst="rect">
+                <a:avLst/>
+              </a:prstGeom>
+            </p:spPr>
+            <p:txBody>
+              <a:bodyPr wrap="none">
+                <a:spAutoFit/>
+              </a:bodyPr>
+              <a:lstStyle/>
+              <a:p>
+                <a:pPr/>
+                <a14:m>
+                  <m:oMathPara xmlns:m="http://schemas.openxmlformats.org/officeDocument/2006/math">
+                    <m:oMathParaPr>
+                      <m:jc m:val="centerGroup"/>
+                    </m:oMathParaPr>
+                    <m:oMath xmlns:m="http://schemas.openxmlformats.org/officeDocument/2006/math">
+                      <m:r>
+                        <m:rPr>
+                          <m:sty m:val="p"/>
+                        </m:rPr>
+                        <a:rPr lang="en-US" altLang="zh-TW" sz="2000">
+                          <a:latin typeface="Cambria Math" panose="02040503050406030204" pitchFamily="18" charset="0"/>
+                        </a:rPr>
+                        <m:t>Re</m:t>
+                      </m:r>
+                      <m:d>
+                        <m:dPr>
+                          <m:begChr m:val="["/>
+                          <m:endChr m:val="]"/>
+                          <m:ctrlPr>
+                            <a:rPr lang="en-US" altLang="zh-TW" sz="2000" i="1">
+                              <a:latin typeface="Cambria Math" panose="02040503050406030204" pitchFamily="18" charset="0"/>
+                            </a:rPr>
+                          </m:ctrlPr>
+                        </m:dPr>
+                        <m:e>
+                          <m:sSubSup>
+                            <m:sSubSupPr>
+                              <m:ctrlPr>
+                                <a:rPr lang="en-US" altLang="zh-TW" sz="2000" i="1">
+                                  <a:latin typeface="Cambria Math" panose="02040503050406030204" pitchFamily="18" charset="0"/>
+                                </a:rPr>
+                              </m:ctrlPr>
+                            </m:sSubSupPr>
+                            <m:e>
+                              <m:r>
+                                <a:rPr lang="en-US" altLang="zh-TW" sz="2000" i="1">
+                                  <a:latin typeface="Cambria Math" panose="02040503050406030204" pitchFamily="18" charset="0"/>
+                                </a:rPr>
+                                <m:t>𝐴</m:t>
+                              </m:r>
+                            </m:e>
+                            <m:sub>
+                              <m:r>
+                                <a:rPr lang="en-US" altLang="zh-TW" sz="2000" i="1">
+                                  <a:latin typeface="Cambria Math" panose="02040503050406030204" pitchFamily="18" charset="0"/>
+                                </a:rPr>
+                                <m:t>ℓ</m:t>
+                              </m:r>
+                              <m:r>
+                                <a:rPr lang="en-US" altLang="zh-TW" sz="2000" i="1">
+                                  <a:latin typeface="Cambria Math" panose="02040503050406030204" pitchFamily="18" charset="0"/>
+                                </a:rPr>
+                                <m:t>,</m:t>
+                              </m:r>
+                              <m:r>
+                                <a:rPr lang="en-US" altLang="zh-TW" sz="2000" i="1">
+                                  <a:latin typeface="Cambria Math" panose="02040503050406030204" pitchFamily="18" charset="0"/>
+                                </a:rPr>
+                                <m:t>𝑝</m:t>
+                              </m:r>
+                            </m:sub>
+                            <m:sup>
+                              <m:r>
+                                <a:rPr lang="en-US" altLang="zh-TW" sz="2000" i="1">
+                                  <a:latin typeface="Cambria Math" panose="02040503050406030204" pitchFamily="18" charset="0"/>
+                                </a:rPr>
+                                <m:t>𝐿</m:t>
+                              </m:r>
+                            </m:sup>
+                          </m:sSubSup>
+                          <m:d>
+                            <m:dPr>
+                              <m:ctrlPr>
+                                <a:rPr lang="en-US" altLang="zh-TW" sz="2000" i="1">
+                                  <a:latin typeface="Cambria Math" panose="02040503050406030204" pitchFamily="18" charset="0"/>
+                                </a:rPr>
+                              </m:ctrlPr>
+                            </m:dPr>
+                            <m:e>
+                              <m:r>
+                                <a:rPr lang="en-US" altLang="zh-TW" sz="2000" b="1" i="1">
+                                  <a:latin typeface="Cambria Math" panose="02040503050406030204" pitchFamily="18" charset="0"/>
+                                </a:rPr>
+                                <m:t>𝒓</m:t>
+                              </m:r>
+                            </m:e>
+                          </m:d>
+                        </m:e>
+                      </m:d>
+                    </m:oMath>
+                  </m:oMathPara>
+                </a14:m>
+                <a:endParaRPr lang="zh-TW" altLang="en-US" sz="2000" dirty="0">
+                  <a:latin typeface="Times New Roman" panose="02020603050405020304" pitchFamily="18" charset="0"/>
+                  <a:cs typeface="Times New Roman" panose="02020603050405020304" pitchFamily="18" charset="0"/>
+                </a:endParaRPr>
+              </a:p>
+            </p:txBody>
+          </p:sp>
+        </mc:Choice>
+        <mc:Fallback>
+          <p:sp>
+            <p:nvSpPr>
+              <p:cNvPr id="59" name="矩形 58">
+                <a:extLst>
+                  <a:ext uri="{FF2B5EF4-FFF2-40B4-BE49-F238E27FC236}">
+                    <a16:creationId xmlns:a16="http://schemas.microsoft.com/office/drawing/2014/main" id="{4EE619D1-FE5A-4904-9EF9-812D48C58D84}"/>
+                  </a:ext>
+                </a:extLst>
+              </p:cNvPr>
+              <p:cNvSpPr>
+                <a:spLocks noRot="1" noChangeAspect="1" noMove="1" noResize="1" noEditPoints="1" noAdjustHandles="1" noChangeArrowheads="1" noChangeShapeType="1" noTextEdit="1"/>
+              </p:cNvSpPr>
+              <p:nvPr/>
+            </p:nvSpPr>
+            <p:spPr>
+              <a:xfrm>
+                <a:off x="1121156" y="3906164"/>
+                <a:ext cx="1495601" cy="456728"/>
+              </a:xfrm>
+              <a:prstGeom prst="rect">
+                <a:avLst/>
+              </a:prstGeom>
+              <a:blipFill>
+                <a:blip r:embed="rId7"/>
+                <a:stretch>
+                  <a:fillRect b="-4000"/>
+                </a:stretch>
+              </a:blipFill>
+            </p:spPr>
+            <p:txBody>
+              <a:bodyPr/>
+              <a:lstStyle/>
+              <a:p>
+                <a:r>
+                  <a:rPr lang="zh-TW" altLang="en-US">
+                    <a:noFill/>
+                  </a:rPr>
+                  <a:t> </a:t>
+                </a:r>
+              </a:p>
+            </p:txBody>
+          </p:sp>
+        </mc:Fallback>
+      </mc:AlternateContent>
+      <mc:AlternateContent xmlns:mc="http://schemas.openxmlformats.org/markup-compatibility/2006">
+        <mc:Choice xmlns:a14="http://schemas.microsoft.com/office/drawing/2010/main" Requires="a14">
+          <p:sp>
+            <p:nvSpPr>
+              <p:cNvPr id="60" name="矩形 59">
+                <a:extLst>
+                  <a:ext uri="{FF2B5EF4-FFF2-40B4-BE49-F238E27FC236}">
+                    <a16:creationId xmlns:a16="http://schemas.microsoft.com/office/drawing/2014/main" id="{F16C610F-D114-49B6-AA8F-93D1163DC516}"/>
+                  </a:ext>
+                </a:extLst>
+              </p:cNvPr>
+              <p:cNvSpPr/>
+              <p:nvPr/>
+            </p:nvSpPr>
+            <p:spPr>
+              <a:xfrm>
+                <a:off x="1244786" y="1010356"/>
+                <a:ext cx="792204" cy="369332"/>
+              </a:xfrm>
+              <a:prstGeom prst="rect">
+                <a:avLst/>
+              </a:prstGeom>
+            </p:spPr>
+            <p:txBody>
+              <a:bodyPr wrap="none">
+                <a:spAutoFit/>
+              </a:bodyPr>
+              <a:lstStyle/>
+              <a:p>
+                <a:pPr/>
+                <a14:m>
+                  <m:oMathPara xmlns:m="http://schemas.openxmlformats.org/officeDocument/2006/math">
+                    <m:oMathParaPr>
+                      <m:jc m:val="centerGroup"/>
+                    </m:oMathParaPr>
+                    <m:oMath xmlns:m="http://schemas.openxmlformats.org/officeDocument/2006/math">
+                      <m:r>
+                        <a:rPr lang="en-US" altLang="zh-TW" i="1">
+                          <a:latin typeface="Cambria Math" panose="02040503050406030204" pitchFamily="18" charset="0"/>
+                        </a:rPr>
+                        <m:t>ℓ</m:t>
+                      </m:r>
+                      <m:r>
+                        <a:rPr lang="en-US" altLang="zh-TW" i="1">
+                          <a:latin typeface="Cambria Math" panose="02040503050406030204" pitchFamily="18" charset="0"/>
+                        </a:rPr>
+                        <m:t>=</m:t>
+                      </m:r>
+                      <m:r>
+                        <a:rPr lang="en-US" altLang="zh-TW" i="1">
+                          <a:latin typeface="Cambria Math" panose="02040503050406030204" pitchFamily="18" charset="0"/>
+                        </a:rPr>
+                        <m:t>0</m:t>
+                      </m:r>
+                    </m:oMath>
+                  </m:oMathPara>
+                </a14:m>
+                <a:endParaRPr lang="zh-TW" altLang="en-US" dirty="0">
+                  <a:latin typeface="Times New Roman" panose="02020603050405020304" pitchFamily="18" charset="0"/>
+                  <a:cs typeface="Times New Roman" panose="02020603050405020304" pitchFamily="18" charset="0"/>
+                </a:endParaRPr>
+              </a:p>
+            </p:txBody>
+          </p:sp>
+        </mc:Choice>
+        <mc:Fallback>
+          <p:sp>
+            <p:nvSpPr>
+              <p:cNvPr id="60" name="矩形 59">
+                <a:extLst>
+                  <a:ext uri="{FF2B5EF4-FFF2-40B4-BE49-F238E27FC236}">
+                    <a16:creationId xmlns:a16="http://schemas.microsoft.com/office/drawing/2014/main" id="{F16C610F-D114-49B6-AA8F-93D1163DC516}"/>
+                  </a:ext>
+                </a:extLst>
+              </p:cNvPr>
+              <p:cNvSpPr>
+                <a:spLocks noRot="1" noChangeAspect="1" noMove="1" noResize="1" noEditPoints="1" noAdjustHandles="1" noChangeArrowheads="1" noChangeShapeType="1" noTextEdit="1"/>
+              </p:cNvSpPr>
+              <p:nvPr/>
+            </p:nvSpPr>
+            <p:spPr>
+              <a:xfrm>
+                <a:off x="1244786" y="1010356"/>
+                <a:ext cx="792204" cy="369332"/>
+              </a:xfrm>
+              <a:prstGeom prst="rect">
+                <a:avLst/>
+              </a:prstGeom>
+              <a:blipFill>
+                <a:blip r:embed="rId8"/>
+                <a:stretch>
+                  <a:fillRect/>
+                </a:stretch>
+              </a:blipFill>
+            </p:spPr>
+            <p:txBody>
+              <a:bodyPr/>
+              <a:lstStyle/>
+              <a:p>
+                <a:r>
+                  <a:rPr lang="zh-TW" altLang="en-US">
+                    <a:noFill/>
+                  </a:rPr>
+                  <a:t> </a:t>
+                </a:r>
+              </a:p>
+            </p:txBody>
+          </p:sp>
+        </mc:Fallback>
+      </mc:AlternateContent>
+      <mc:AlternateContent xmlns:mc="http://schemas.openxmlformats.org/markup-compatibility/2006">
+        <mc:Choice xmlns:a14="http://schemas.microsoft.com/office/drawing/2010/main" Requires="a14">
+          <p:sp>
+            <p:nvSpPr>
+              <p:cNvPr id="61" name="矩形 60">
+                <a:extLst>
+                  <a:ext uri="{FF2B5EF4-FFF2-40B4-BE49-F238E27FC236}">
+                    <a16:creationId xmlns:a16="http://schemas.microsoft.com/office/drawing/2014/main" id="{9FCF0267-AF69-408E-83CF-E40240898E3F}"/>
+                  </a:ext>
+                </a:extLst>
+              </p:cNvPr>
+              <p:cNvSpPr/>
+              <p:nvPr/>
+            </p:nvSpPr>
+            <p:spPr>
+              <a:xfrm>
+                <a:off x="2176248" y="3180953"/>
+                <a:ext cx="641522" cy="343171"/>
+              </a:xfrm>
+              <a:prstGeom prst="rect">
+                <a:avLst/>
+              </a:prstGeom>
+            </p:spPr>
+            <p:txBody>
+              <a:bodyPr wrap="none">
+                <a:spAutoFit/>
+              </a:bodyPr>
+              <a:lstStyle/>
+              <a:p>
+                <a:pPr/>
+                <a14:m>
+                  <m:oMathPara xmlns:m="http://schemas.openxmlformats.org/officeDocument/2006/math">
+                    <m:oMathParaPr>
+                      <m:jc m:val="centerGroup"/>
+                    </m:oMathParaPr>
+                    <m:oMath xmlns:m="http://schemas.openxmlformats.org/officeDocument/2006/math">
+                      <m:r>
+                        <a:rPr lang="en-US" altLang="zh-TW" sz="1630" i="1">
+                          <a:latin typeface="Cambria Math" panose="02040503050406030204" pitchFamily="18" charset="0"/>
+                        </a:rPr>
+                        <m:t>1</m:t>
+                      </m:r>
+                      <m:r>
+                        <a:rPr lang="en-US" altLang="zh-TW" sz="1630" i="1">
+                          <a:latin typeface="Cambria Math" panose="02040503050406030204" pitchFamily="18" charset="0"/>
+                        </a:rPr>
+                        <m:t>𝜇</m:t>
+                      </m:r>
+                      <m:r>
+                        <m:rPr>
+                          <m:sty m:val="p"/>
+                        </m:rPr>
+                        <a:rPr lang="en-US" altLang="zh-TW" sz="1630">
+                          <a:latin typeface="Cambria Math" panose="02040503050406030204" pitchFamily="18" charset="0"/>
+                        </a:rPr>
+                        <m:t>m</m:t>
+                      </m:r>
+                    </m:oMath>
+                  </m:oMathPara>
+                </a14:m>
+                <a:endParaRPr lang="zh-TW" altLang="en-US" sz="1630" dirty="0">
+                  <a:latin typeface="Times New Roman" panose="02020603050405020304" pitchFamily="18" charset="0"/>
+                  <a:cs typeface="Times New Roman" panose="02020603050405020304" pitchFamily="18" charset="0"/>
+                </a:endParaRPr>
+              </a:p>
+            </p:txBody>
+          </p:sp>
+        </mc:Choice>
+        <mc:Fallback>
+          <p:sp>
+            <p:nvSpPr>
+              <p:cNvPr id="61" name="矩形 60">
+                <a:extLst>
+                  <a:ext uri="{FF2B5EF4-FFF2-40B4-BE49-F238E27FC236}">
+                    <a16:creationId xmlns:a16="http://schemas.microsoft.com/office/drawing/2014/main" id="{9FCF0267-AF69-408E-83CF-E40240898E3F}"/>
+                  </a:ext>
+                </a:extLst>
+              </p:cNvPr>
+              <p:cNvSpPr>
+                <a:spLocks noRot="1" noChangeAspect="1" noMove="1" noResize="1" noEditPoints="1" noAdjustHandles="1" noChangeArrowheads="1" noChangeShapeType="1" noTextEdit="1"/>
+              </p:cNvSpPr>
+              <p:nvPr/>
+            </p:nvSpPr>
+            <p:spPr>
+              <a:xfrm>
+                <a:off x="2176248" y="3180953"/>
+                <a:ext cx="641522" cy="343171"/>
+              </a:xfrm>
+              <a:prstGeom prst="rect">
+                <a:avLst/>
+              </a:prstGeom>
+              <a:blipFill>
+                <a:blip r:embed="rId9"/>
+                <a:stretch>
+                  <a:fillRect b="-12500"/>
+                </a:stretch>
+              </a:blipFill>
+            </p:spPr>
+            <p:txBody>
+              <a:bodyPr/>
+              <a:lstStyle/>
+              <a:p>
+                <a:r>
+                  <a:rPr lang="zh-TW" altLang="en-US">
+                    <a:noFill/>
+                  </a:rPr>
+                  <a:t> </a:t>
+                </a:r>
+              </a:p>
+            </p:txBody>
+          </p:sp>
+        </mc:Fallback>
+      </mc:AlternateContent>
+      <mc:AlternateContent xmlns:mc="http://schemas.openxmlformats.org/markup-compatibility/2006">
+        <mc:Choice xmlns:a14="http://schemas.microsoft.com/office/drawing/2010/main" Requires="a14">
+          <p:sp>
+            <p:nvSpPr>
+              <p:cNvPr id="62" name="矩形 61">
+                <a:extLst>
+                  <a:ext uri="{FF2B5EF4-FFF2-40B4-BE49-F238E27FC236}">
+                    <a16:creationId xmlns:a16="http://schemas.microsoft.com/office/drawing/2014/main" id="{7D2BA6ED-F3F6-4E48-8797-E5C62278738A}"/>
+                  </a:ext>
+                </a:extLst>
+              </p:cNvPr>
+              <p:cNvSpPr/>
+              <p:nvPr/>
+            </p:nvSpPr>
+            <p:spPr>
+              <a:xfrm>
+                <a:off x="2311558" y="3407474"/>
+                <a:ext cx="889154" cy="343171"/>
+              </a:xfrm>
+              <a:prstGeom prst="rect">
+                <a:avLst/>
+              </a:prstGeom>
+            </p:spPr>
+            <p:txBody>
+              <a:bodyPr wrap="none">
+                <a:spAutoFit/>
+              </a:bodyPr>
+              <a:lstStyle/>
+              <a:p>
+                <a:pPr/>
+                <a14:m>
+                  <m:oMathPara xmlns:m="http://schemas.openxmlformats.org/officeDocument/2006/math">
+                    <m:oMathParaPr>
+                      <m:jc m:val="centerGroup"/>
+                    </m:oMathParaPr>
+                    <m:oMath xmlns:m="http://schemas.openxmlformats.org/officeDocument/2006/math">
+                      <m:r>
+                        <a:rPr lang="en-US" altLang="zh-TW" sz="1630" i="1">
+                          <a:latin typeface="Cambria Math" panose="02040503050406030204" pitchFamily="18" charset="0"/>
+                        </a:rPr>
+                        <m:t>ℓ</m:t>
+                      </m:r>
+                      <m:r>
+                        <a:rPr lang="en-US" altLang="zh-TW" sz="1630" i="1">
+                          <a:latin typeface="Cambria Math" panose="02040503050406030204" pitchFamily="18" charset="0"/>
+                        </a:rPr>
+                        <m:t>=−</m:t>
+                      </m:r>
+                      <m:r>
+                        <a:rPr lang="en-US" altLang="zh-TW" sz="1630" i="1">
+                          <a:latin typeface="Cambria Math" panose="02040503050406030204" pitchFamily="18" charset="0"/>
+                        </a:rPr>
+                        <m:t>2</m:t>
+                      </m:r>
+                    </m:oMath>
+                  </m:oMathPara>
+                </a14:m>
+                <a:endParaRPr lang="zh-TW" altLang="en-US" sz="1630" dirty="0">
+                  <a:latin typeface="Times New Roman" panose="02020603050405020304" pitchFamily="18" charset="0"/>
+                  <a:cs typeface="Times New Roman" panose="02020603050405020304" pitchFamily="18" charset="0"/>
+                </a:endParaRPr>
+              </a:p>
+            </p:txBody>
+          </p:sp>
+        </mc:Choice>
+        <mc:Fallback>
+          <p:sp>
+            <p:nvSpPr>
+              <p:cNvPr id="62" name="矩形 61">
+                <a:extLst>
+                  <a:ext uri="{FF2B5EF4-FFF2-40B4-BE49-F238E27FC236}">
+                    <a16:creationId xmlns:a16="http://schemas.microsoft.com/office/drawing/2014/main" id="{7D2BA6ED-F3F6-4E48-8797-E5C62278738A}"/>
+                  </a:ext>
+                </a:extLst>
+              </p:cNvPr>
+              <p:cNvSpPr>
+                <a:spLocks noRot="1" noChangeAspect="1" noMove="1" noResize="1" noEditPoints="1" noAdjustHandles="1" noChangeArrowheads="1" noChangeShapeType="1" noTextEdit="1"/>
+              </p:cNvSpPr>
+              <p:nvPr/>
+            </p:nvSpPr>
+            <p:spPr>
+              <a:xfrm>
+                <a:off x="2311558" y="3407474"/>
+                <a:ext cx="889154" cy="343171"/>
+              </a:xfrm>
+              <a:prstGeom prst="rect">
+                <a:avLst/>
+              </a:prstGeom>
+              <a:blipFill>
+                <a:blip r:embed="rId10"/>
+                <a:stretch>
+                  <a:fillRect/>
+                </a:stretch>
+              </a:blipFill>
+            </p:spPr>
+            <p:txBody>
+              <a:bodyPr/>
+              <a:lstStyle/>
+              <a:p>
+                <a:r>
+                  <a:rPr lang="zh-TW" altLang="en-US">
+                    <a:noFill/>
+                  </a:rPr>
+                  <a:t> </a:t>
+                </a:r>
+              </a:p>
+            </p:txBody>
+          </p:sp>
+        </mc:Fallback>
+      </mc:AlternateContent>
+      <mc:AlternateContent xmlns:mc="http://schemas.openxmlformats.org/markup-compatibility/2006">
+        <mc:Choice xmlns:a14="http://schemas.microsoft.com/office/drawing/2010/main" Requires="a14">
+          <p:sp>
+            <p:nvSpPr>
+              <p:cNvPr id="63" name="矩形 62">
+                <a:extLst>
+                  <a:ext uri="{FF2B5EF4-FFF2-40B4-BE49-F238E27FC236}">
+                    <a16:creationId xmlns:a16="http://schemas.microsoft.com/office/drawing/2014/main" id="{4318D726-0C1E-4335-AC86-FC2D896A545D}"/>
+                  </a:ext>
+                </a:extLst>
+              </p:cNvPr>
+              <p:cNvSpPr/>
+              <p:nvPr/>
+            </p:nvSpPr>
+            <p:spPr>
+              <a:xfrm>
+                <a:off x="3724233" y="3407474"/>
+                <a:ext cx="889154" cy="343171"/>
+              </a:xfrm>
+              <a:prstGeom prst="rect">
+                <a:avLst/>
+              </a:prstGeom>
+            </p:spPr>
+            <p:txBody>
+              <a:bodyPr wrap="none">
+                <a:spAutoFit/>
+              </a:bodyPr>
+              <a:lstStyle/>
+              <a:p>
+                <a:pPr/>
+                <a14:m>
+                  <m:oMathPara xmlns:m="http://schemas.openxmlformats.org/officeDocument/2006/math">
+                    <m:oMathParaPr>
+                      <m:jc m:val="centerGroup"/>
+                    </m:oMathParaPr>
+                    <m:oMath xmlns:m="http://schemas.openxmlformats.org/officeDocument/2006/math">
+                      <m:r>
+                        <a:rPr lang="en-US" altLang="zh-TW" sz="1630" i="1">
+                          <a:latin typeface="Cambria Math" panose="02040503050406030204" pitchFamily="18" charset="0"/>
+                        </a:rPr>
+                        <m:t>ℓ</m:t>
+                      </m:r>
+                      <m:r>
+                        <a:rPr lang="en-US" altLang="zh-TW" sz="1630" i="1">
+                          <a:latin typeface="Cambria Math" panose="02040503050406030204" pitchFamily="18" charset="0"/>
+                        </a:rPr>
+                        <m:t>=−</m:t>
+                      </m:r>
+                      <m:r>
+                        <a:rPr lang="en-US" altLang="zh-TW" sz="1630" i="1">
+                          <a:latin typeface="Cambria Math" panose="02040503050406030204" pitchFamily="18" charset="0"/>
+                        </a:rPr>
+                        <m:t>1</m:t>
+                      </m:r>
+                    </m:oMath>
+                  </m:oMathPara>
+                </a14:m>
+                <a:endParaRPr lang="zh-TW" altLang="en-US" sz="1630" dirty="0">
+                  <a:latin typeface="Times New Roman" panose="02020603050405020304" pitchFamily="18" charset="0"/>
+                  <a:cs typeface="Times New Roman" panose="02020603050405020304" pitchFamily="18" charset="0"/>
+                </a:endParaRPr>
+              </a:p>
+            </p:txBody>
+          </p:sp>
+        </mc:Choice>
+        <mc:Fallback>
+          <p:sp>
+            <p:nvSpPr>
+              <p:cNvPr id="63" name="矩形 62">
+                <a:extLst>
+                  <a:ext uri="{FF2B5EF4-FFF2-40B4-BE49-F238E27FC236}">
+                    <a16:creationId xmlns:a16="http://schemas.microsoft.com/office/drawing/2014/main" id="{4318D726-0C1E-4335-AC86-FC2D896A545D}"/>
+                  </a:ext>
+                </a:extLst>
+              </p:cNvPr>
+              <p:cNvSpPr>
+                <a:spLocks noRot="1" noChangeAspect="1" noMove="1" noResize="1" noEditPoints="1" noAdjustHandles="1" noChangeArrowheads="1" noChangeShapeType="1" noTextEdit="1"/>
+              </p:cNvSpPr>
+              <p:nvPr/>
+            </p:nvSpPr>
+            <p:spPr>
+              <a:xfrm>
+                <a:off x="3724233" y="3407474"/>
+                <a:ext cx="889154" cy="343171"/>
+              </a:xfrm>
+              <a:prstGeom prst="rect">
+                <a:avLst/>
+              </a:prstGeom>
+              <a:blipFill>
+                <a:blip r:embed="rId11"/>
+                <a:stretch>
+                  <a:fillRect/>
+                </a:stretch>
+              </a:blipFill>
+            </p:spPr>
+            <p:txBody>
+              <a:bodyPr/>
+              <a:lstStyle/>
+              <a:p>
+                <a:r>
+                  <a:rPr lang="zh-TW" altLang="en-US">
+                    <a:noFill/>
+                  </a:rPr>
+                  <a:t> </a:t>
+                </a:r>
+              </a:p>
+            </p:txBody>
+          </p:sp>
+        </mc:Fallback>
+      </mc:AlternateContent>
+      <mc:AlternateContent xmlns:mc="http://schemas.openxmlformats.org/markup-compatibility/2006">
+        <mc:Choice xmlns:a14="http://schemas.microsoft.com/office/drawing/2010/main" Requires="a14">
+          <p:sp>
+            <p:nvSpPr>
+              <p:cNvPr id="64" name="矩形 63">
+                <a:extLst>
+                  <a:ext uri="{FF2B5EF4-FFF2-40B4-BE49-F238E27FC236}">
+                    <a16:creationId xmlns:a16="http://schemas.microsoft.com/office/drawing/2014/main" id="{7DB720B7-D574-4D15-8E19-7228E0981AF0}"/>
+                  </a:ext>
+                </a:extLst>
+              </p:cNvPr>
+              <p:cNvSpPr/>
+              <p:nvPr/>
+            </p:nvSpPr>
+            <p:spPr>
+              <a:xfrm>
+                <a:off x="5136908" y="3407474"/>
+                <a:ext cx="733662" cy="343171"/>
+              </a:xfrm>
+              <a:prstGeom prst="rect">
+                <a:avLst/>
+              </a:prstGeom>
+            </p:spPr>
+            <p:txBody>
+              <a:bodyPr wrap="none">
+                <a:spAutoFit/>
+              </a:bodyPr>
+              <a:lstStyle/>
+              <a:p>
+                <a:pPr/>
+                <a14:m>
+                  <m:oMathPara xmlns:m="http://schemas.openxmlformats.org/officeDocument/2006/math">
+                    <m:oMathParaPr>
+                      <m:jc m:val="centerGroup"/>
+                    </m:oMathParaPr>
+                    <m:oMath xmlns:m="http://schemas.openxmlformats.org/officeDocument/2006/math">
+                      <m:r>
+                        <a:rPr lang="en-US" altLang="zh-TW" sz="1630" i="1">
+                          <a:latin typeface="Cambria Math" panose="02040503050406030204" pitchFamily="18" charset="0"/>
+                        </a:rPr>
+                        <m:t>ℓ</m:t>
+                      </m:r>
+                      <m:r>
+                        <a:rPr lang="en-US" altLang="zh-TW" sz="1630" i="1">
+                          <a:latin typeface="Cambria Math" panose="02040503050406030204" pitchFamily="18" charset="0"/>
+                        </a:rPr>
+                        <m:t>=</m:t>
+                      </m:r>
+                      <m:r>
+                        <a:rPr lang="en-US" altLang="zh-TW" sz="1630" i="1">
+                          <a:latin typeface="Cambria Math" panose="02040503050406030204" pitchFamily="18" charset="0"/>
+                        </a:rPr>
+                        <m:t>0</m:t>
+                      </m:r>
+                    </m:oMath>
+                  </m:oMathPara>
+                </a14:m>
+                <a:endParaRPr lang="zh-TW" altLang="en-US" sz="1630" dirty="0">
+                  <a:latin typeface="Times New Roman" panose="02020603050405020304" pitchFamily="18" charset="0"/>
+                  <a:cs typeface="Times New Roman" panose="02020603050405020304" pitchFamily="18" charset="0"/>
+                </a:endParaRPr>
+              </a:p>
+            </p:txBody>
+          </p:sp>
+        </mc:Choice>
+        <mc:Fallback>
+          <p:sp>
+            <p:nvSpPr>
+              <p:cNvPr id="64" name="矩形 63">
+                <a:extLst>
+                  <a:ext uri="{FF2B5EF4-FFF2-40B4-BE49-F238E27FC236}">
+                    <a16:creationId xmlns:a16="http://schemas.microsoft.com/office/drawing/2014/main" id="{7DB720B7-D574-4D15-8E19-7228E0981AF0}"/>
+                  </a:ext>
+                </a:extLst>
+              </p:cNvPr>
+              <p:cNvSpPr>
+                <a:spLocks noRot="1" noChangeAspect="1" noMove="1" noResize="1" noEditPoints="1" noAdjustHandles="1" noChangeArrowheads="1" noChangeShapeType="1" noTextEdit="1"/>
+              </p:cNvSpPr>
+              <p:nvPr/>
+            </p:nvSpPr>
+            <p:spPr>
+              <a:xfrm>
+                <a:off x="5136908" y="3407474"/>
+                <a:ext cx="733662" cy="343171"/>
+              </a:xfrm>
+              <a:prstGeom prst="rect">
+                <a:avLst/>
+              </a:prstGeom>
+              <a:blipFill>
+                <a:blip r:embed="rId12"/>
+                <a:stretch>
+                  <a:fillRect/>
+                </a:stretch>
+              </a:blipFill>
+            </p:spPr>
+            <p:txBody>
+              <a:bodyPr/>
+              <a:lstStyle/>
+              <a:p>
+                <a:r>
+                  <a:rPr lang="zh-TW" altLang="en-US">
+                    <a:noFill/>
+                  </a:rPr>
+                  <a:t> </a:t>
+                </a:r>
+              </a:p>
+            </p:txBody>
+          </p:sp>
+        </mc:Fallback>
+      </mc:AlternateContent>
+      <mc:AlternateContent xmlns:mc="http://schemas.openxmlformats.org/markup-compatibility/2006">
+        <mc:Choice xmlns:a14="http://schemas.microsoft.com/office/drawing/2010/main" Requires="a14">
+          <p:sp>
+            <p:nvSpPr>
+              <p:cNvPr id="65" name="矩形 64">
+                <a:extLst>
+                  <a:ext uri="{FF2B5EF4-FFF2-40B4-BE49-F238E27FC236}">
+                    <a16:creationId xmlns:a16="http://schemas.microsoft.com/office/drawing/2014/main" id="{223FB366-A8D4-4B76-B8D8-D9A4CC5F9B70}"/>
+                  </a:ext>
+                </a:extLst>
+              </p:cNvPr>
+              <p:cNvSpPr/>
+              <p:nvPr/>
+            </p:nvSpPr>
+            <p:spPr>
+              <a:xfrm>
+                <a:off x="6394091" y="3407474"/>
+                <a:ext cx="733662" cy="343171"/>
+              </a:xfrm>
+              <a:prstGeom prst="rect">
+                <a:avLst/>
+              </a:prstGeom>
+            </p:spPr>
+            <p:txBody>
+              <a:bodyPr wrap="none">
+                <a:spAutoFit/>
+              </a:bodyPr>
+              <a:lstStyle/>
+              <a:p>
+                <a:pPr/>
+                <a14:m>
+                  <m:oMathPara xmlns:m="http://schemas.openxmlformats.org/officeDocument/2006/math">
+                    <m:oMathParaPr>
+                      <m:jc m:val="centerGroup"/>
+                    </m:oMathParaPr>
+                    <m:oMath xmlns:m="http://schemas.openxmlformats.org/officeDocument/2006/math">
+                      <m:r>
+                        <a:rPr lang="en-US" altLang="zh-TW" sz="1630" i="1">
+                          <a:latin typeface="Cambria Math" panose="02040503050406030204" pitchFamily="18" charset="0"/>
+                        </a:rPr>
+                        <m:t>ℓ</m:t>
+                      </m:r>
+                      <m:r>
+                        <a:rPr lang="en-US" altLang="zh-TW" sz="1630" i="1">
+                          <a:latin typeface="Cambria Math" panose="02040503050406030204" pitchFamily="18" charset="0"/>
+                        </a:rPr>
+                        <m:t>=</m:t>
+                      </m:r>
+                      <m:r>
+                        <a:rPr lang="en-US" altLang="zh-TW" sz="1630" i="1">
+                          <a:latin typeface="Cambria Math" panose="02040503050406030204" pitchFamily="18" charset="0"/>
+                        </a:rPr>
+                        <m:t>1</m:t>
+                      </m:r>
+                    </m:oMath>
+                  </m:oMathPara>
+                </a14:m>
+                <a:endParaRPr lang="zh-TW" altLang="en-US" sz="1630" dirty="0">
+                  <a:latin typeface="Times New Roman" panose="02020603050405020304" pitchFamily="18" charset="0"/>
+                  <a:cs typeface="Times New Roman" panose="02020603050405020304" pitchFamily="18" charset="0"/>
+                </a:endParaRPr>
+              </a:p>
+            </p:txBody>
+          </p:sp>
+        </mc:Choice>
+        <mc:Fallback>
+          <p:sp>
+            <p:nvSpPr>
+              <p:cNvPr id="65" name="矩形 64">
+                <a:extLst>
+                  <a:ext uri="{FF2B5EF4-FFF2-40B4-BE49-F238E27FC236}">
+                    <a16:creationId xmlns:a16="http://schemas.microsoft.com/office/drawing/2014/main" id="{223FB366-A8D4-4B76-B8D8-D9A4CC5F9B70}"/>
+                  </a:ext>
+                </a:extLst>
+              </p:cNvPr>
+              <p:cNvSpPr>
+                <a:spLocks noRot="1" noChangeAspect="1" noMove="1" noResize="1" noEditPoints="1" noAdjustHandles="1" noChangeArrowheads="1" noChangeShapeType="1" noTextEdit="1"/>
+              </p:cNvSpPr>
+              <p:nvPr/>
+            </p:nvSpPr>
+            <p:spPr>
+              <a:xfrm>
+                <a:off x="6394091" y="3407474"/>
+                <a:ext cx="733662" cy="343171"/>
+              </a:xfrm>
+              <a:prstGeom prst="rect">
+                <a:avLst/>
+              </a:prstGeom>
+              <a:blipFill>
+                <a:blip r:embed="rId13"/>
+                <a:stretch>
+                  <a:fillRect/>
+                </a:stretch>
+              </a:blipFill>
+            </p:spPr>
+            <p:txBody>
+              <a:bodyPr/>
+              <a:lstStyle/>
+              <a:p>
+                <a:r>
+                  <a:rPr lang="zh-TW" altLang="en-US">
+                    <a:noFill/>
+                  </a:rPr>
+                  <a:t> </a:t>
+                </a:r>
+              </a:p>
+            </p:txBody>
+          </p:sp>
+        </mc:Fallback>
+      </mc:AlternateContent>
+      <mc:AlternateContent xmlns:mc="http://schemas.openxmlformats.org/markup-compatibility/2006">
+        <mc:Choice xmlns:a14="http://schemas.microsoft.com/office/drawing/2010/main" Requires="a14">
+          <p:sp>
+            <p:nvSpPr>
+              <p:cNvPr id="66" name="矩形 65">
+                <a:extLst>
+                  <a:ext uri="{FF2B5EF4-FFF2-40B4-BE49-F238E27FC236}">
+                    <a16:creationId xmlns:a16="http://schemas.microsoft.com/office/drawing/2014/main" id="{C3C5C89E-1517-4044-84F9-4A556E673FCF}"/>
+                  </a:ext>
+                </a:extLst>
+              </p:cNvPr>
+              <p:cNvSpPr/>
+              <p:nvPr/>
+            </p:nvSpPr>
+            <p:spPr>
+              <a:xfrm>
+                <a:off x="7651274" y="3407474"/>
+                <a:ext cx="733662" cy="343171"/>
+              </a:xfrm>
+              <a:prstGeom prst="rect">
+                <a:avLst/>
+              </a:prstGeom>
+            </p:spPr>
+            <p:txBody>
+              <a:bodyPr wrap="none">
+                <a:spAutoFit/>
+              </a:bodyPr>
+              <a:lstStyle/>
+              <a:p>
+                <a:pPr/>
+                <a14:m>
+                  <m:oMathPara xmlns:m="http://schemas.openxmlformats.org/officeDocument/2006/math">
+                    <m:oMathParaPr>
+                      <m:jc m:val="centerGroup"/>
+                    </m:oMathParaPr>
+                    <m:oMath xmlns:m="http://schemas.openxmlformats.org/officeDocument/2006/math">
+                      <m:r>
+                        <a:rPr lang="en-US" altLang="zh-TW" sz="1630" i="1">
+                          <a:latin typeface="Cambria Math" panose="02040503050406030204" pitchFamily="18" charset="0"/>
+                        </a:rPr>
+                        <m:t>ℓ</m:t>
+                      </m:r>
+                      <m:r>
+                        <a:rPr lang="en-US" altLang="zh-TW" sz="1630" i="1">
+                          <a:latin typeface="Cambria Math" panose="02040503050406030204" pitchFamily="18" charset="0"/>
+                        </a:rPr>
+                        <m:t>=</m:t>
+                      </m:r>
+                      <m:r>
+                        <a:rPr lang="en-US" altLang="zh-TW" sz="1630" i="1">
+                          <a:latin typeface="Cambria Math" panose="02040503050406030204" pitchFamily="18" charset="0"/>
+                        </a:rPr>
+                        <m:t>2</m:t>
+                      </m:r>
+                    </m:oMath>
+                  </m:oMathPara>
+                </a14:m>
+                <a:endParaRPr lang="zh-TW" altLang="en-US" sz="1630" dirty="0">
+                  <a:latin typeface="Times New Roman" panose="02020603050405020304" pitchFamily="18" charset="0"/>
+                  <a:cs typeface="Times New Roman" panose="02020603050405020304" pitchFamily="18" charset="0"/>
+                </a:endParaRPr>
+              </a:p>
+            </p:txBody>
+          </p:sp>
+        </mc:Choice>
+        <mc:Fallback>
+          <p:sp>
+            <p:nvSpPr>
+              <p:cNvPr id="66" name="矩形 65">
+                <a:extLst>
+                  <a:ext uri="{FF2B5EF4-FFF2-40B4-BE49-F238E27FC236}">
+                    <a16:creationId xmlns:a16="http://schemas.microsoft.com/office/drawing/2014/main" id="{C3C5C89E-1517-4044-84F9-4A556E673FCF}"/>
+                  </a:ext>
+                </a:extLst>
+              </p:cNvPr>
+              <p:cNvSpPr>
+                <a:spLocks noRot="1" noChangeAspect="1" noMove="1" noResize="1" noEditPoints="1" noAdjustHandles="1" noChangeArrowheads="1" noChangeShapeType="1" noTextEdit="1"/>
+              </p:cNvSpPr>
+              <p:nvPr/>
+            </p:nvSpPr>
+            <p:spPr>
+              <a:xfrm>
+                <a:off x="7651274" y="3407474"/>
+                <a:ext cx="733662" cy="343171"/>
+              </a:xfrm>
+              <a:prstGeom prst="rect">
+                <a:avLst/>
+              </a:prstGeom>
+              <a:blipFill>
+                <a:blip r:embed="rId14"/>
+                <a:stretch>
+                  <a:fillRect/>
+                </a:stretch>
+              </a:blipFill>
+            </p:spPr>
+            <p:txBody>
+              <a:bodyPr/>
+              <a:lstStyle/>
+              <a:p>
+                <a:r>
+                  <a:rPr lang="zh-TW" altLang="en-US">
+                    <a:noFill/>
+                  </a:rPr>
+                  <a:t> </a:t>
+                </a:r>
+              </a:p>
+            </p:txBody>
+          </p:sp>
+        </mc:Fallback>
+      </mc:AlternateContent>
+      <p:sp>
+        <p:nvSpPr>
+          <p:cNvPr id="68" name="矩形 67">
+            <a:extLst>
+              <a:ext uri="{FF2B5EF4-FFF2-40B4-BE49-F238E27FC236}">
+                <a16:creationId xmlns:a16="http://schemas.microsoft.com/office/drawing/2014/main" id="{8528E9D6-6595-4C2C-8910-534DECC142AE}"/>
+              </a:ext>
+            </a:extLst>
+          </p:cNvPr>
+          <p:cNvSpPr/>
+          <p:nvPr/>
+        </p:nvSpPr>
+        <p:spPr>
+          <a:xfrm rot="5400000">
+            <a:off x="8736989" y="2613957"/>
+            <a:ext cx="1359668" cy="343171"/>
+          </a:xfrm>
+          <a:prstGeom prst="rect">
+            <a:avLst/>
+          </a:prstGeom>
+        </p:spPr>
+        <p:txBody>
+          <a:bodyPr wrap="none">
+            <a:spAutoFit/>
+          </a:bodyPr>
+          <a:lstStyle/>
+          <a:p>
+            <a:r>
+              <a:rPr lang="en-US" altLang="zh-TW" sz="1630" dirty="0">
+                <a:latin typeface="Times New Roman" panose="02020603050405020304" pitchFamily="18" charset="0"/>
+                <a:cs typeface="Times New Roman" panose="02020603050405020304" pitchFamily="18" charset="0"/>
+              </a:rPr>
+              <a:t>arbitrary units</a:t>
+            </a:r>
+            <a:endParaRPr lang="zh-TW" altLang="en-US" sz="1630" dirty="0">
+              <a:latin typeface="Times New Roman" panose="02020603050405020304" pitchFamily="18" charset="0"/>
+              <a:cs typeface="Times New Roman" panose="02020603050405020304" pitchFamily="18" charset="0"/>
+            </a:endParaRPr>
+          </a:p>
+        </p:txBody>
+      </p:sp>
+      <p:pic>
+        <p:nvPicPr>
+          <p:cNvPr id="69" name="圖片 68">
+            <a:extLst>
+              <a:ext uri="{FF2B5EF4-FFF2-40B4-BE49-F238E27FC236}">
+                <a16:creationId xmlns:a16="http://schemas.microsoft.com/office/drawing/2014/main" id="{01C039CF-7E75-48C6-AE99-5CDFFCE59650}"/>
+              </a:ext>
+            </a:extLst>
+          </p:cNvPr>
+          <p:cNvPicPr>
+            <a:picLocks noChangeAspect="1"/>
+          </p:cNvPicPr>
+          <p:nvPr/>
+        </p:nvPicPr>
+        <p:blipFill rotWithShape="1">
+          <a:blip r:embed="rId15">
+            <a:clrChange>
+              <a:clrFrom>
+                <a:srgbClr val="FFFFFF"/>
+              </a:clrFrom>
+              <a:clrTo>
+                <a:srgbClr val="FFFFFF">
+                  <a:alpha val="0"/>
+                </a:srgbClr>
+              </a:clrTo>
+            </a:clrChange>
+            <a:extLst>
+              <a:ext uri="{28A0092B-C50C-407E-A947-70E740481C1C}">
+                <a14:useLocalDpi xmlns:a14="http://schemas.microsoft.com/office/drawing/2010/main" val="0"/>
+              </a:ext>
+            </a:extLst>
+          </a:blip>
+          <a:srcRect l="85240" r="9825"/>
+          <a:stretch/>
+        </p:blipFill>
+        <p:spPr>
+          <a:xfrm>
+            <a:off x="8801638" y="2006147"/>
+            <a:ext cx="490120" cy="1655064"/>
+          </a:xfrm>
+          <a:prstGeom prst="rect">
+            <a:avLst/>
+          </a:prstGeom>
+        </p:spPr>
+      </p:pic>
+      <mc:AlternateContent xmlns:mc="http://schemas.openxmlformats.org/markup-compatibility/2006">
+        <mc:Choice xmlns:a14="http://schemas.microsoft.com/office/drawing/2010/main" Requires="a14">
+          <p:sp>
+            <p:nvSpPr>
+              <p:cNvPr id="70" name="矩形 69">
+                <a:extLst>
+                  <a:ext uri="{FF2B5EF4-FFF2-40B4-BE49-F238E27FC236}">
+                    <a16:creationId xmlns:a16="http://schemas.microsoft.com/office/drawing/2014/main" id="{9AA7DB4D-008D-4D94-A265-1F97D8FAF1FD}"/>
+                  </a:ext>
+                </a:extLst>
+              </p:cNvPr>
+              <p:cNvSpPr/>
+              <p:nvPr/>
+            </p:nvSpPr>
+            <p:spPr>
+              <a:xfrm>
+                <a:off x="1184153" y="-16960"/>
+                <a:ext cx="1311256" cy="517514"/>
+              </a:xfrm>
+              <a:prstGeom prst="rect">
+                <a:avLst/>
+              </a:prstGeom>
+            </p:spPr>
+            <p:txBody>
+              <a:bodyPr wrap="none">
+                <a:spAutoFit/>
+              </a:bodyPr>
+              <a:lstStyle/>
+              <a:p>
+                <a:pPr/>
+                <a14:m>
+                  <m:oMathPara xmlns:m="http://schemas.openxmlformats.org/officeDocument/2006/math">
+                    <m:oMathParaPr>
+                      <m:jc m:val="centerGroup"/>
+                    </m:oMathParaPr>
+                    <m:oMath xmlns:m="http://schemas.openxmlformats.org/officeDocument/2006/math">
+                      <m:sSup>
+                        <m:sSupPr>
+                          <m:ctrlPr>
+                            <a:rPr lang="en-US" altLang="zh-TW" sz="2000" i="1">
+                              <a:latin typeface="Cambria Math" panose="02040503050406030204" pitchFamily="18" charset="0"/>
+                            </a:rPr>
+                          </m:ctrlPr>
+                        </m:sSupPr>
+                        <m:e>
+                          <m:d>
+                            <m:dPr>
+                              <m:begChr m:val="|"/>
+                              <m:endChr m:val="|"/>
+                              <m:ctrlPr>
+                                <a:rPr lang="en-US" altLang="zh-TW" sz="2000" i="1">
+                                  <a:latin typeface="Cambria Math" panose="02040503050406030204" pitchFamily="18" charset="0"/>
+                                </a:rPr>
+                              </m:ctrlPr>
+                            </m:dPr>
+                            <m:e>
+                              <m:sSubSup>
+                                <m:sSubSupPr>
+                                  <m:ctrlPr>
+                                    <a:rPr lang="en-US" altLang="zh-TW" sz="2000" i="1">
+                                      <a:latin typeface="Cambria Math" panose="02040503050406030204" pitchFamily="18" charset="0"/>
+                                    </a:rPr>
+                                  </m:ctrlPr>
+                                </m:sSubSupPr>
+                                <m:e>
+                                  <m:r>
+                                    <a:rPr lang="en-US" altLang="zh-TW" sz="2000" i="1">
+                                      <a:latin typeface="Cambria Math" panose="02040503050406030204" pitchFamily="18" charset="0"/>
+                                    </a:rPr>
+                                    <m:t>𝐴</m:t>
+                                  </m:r>
+                                </m:e>
+                                <m:sub>
+                                  <m:r>
+                                    <a:rPr lang="en-US" altLang="zh-TW" sz="2000" i="1">
+                                      <a:latin typeface="Cambria Math" panose="02040503050406030204" pitchFamily="18" charset="0"/>
+                                    </a:rPr>
+                                    <m:t>ℓ</m:t>
+                                  </m:r>
+                                  <m:r>
+                                    <a:rPr lang="en-US" altLang="zh-TW" sz="2000" i="1">
+                                      <a:latin typeface="Cambria Math" panose="02040503050406030204" pitchFamily="18" charset="0"/>
+                                    </a:rPr>
+                                    <m:t>,</m:t>
+                                  </m:r>
+                                  <m:r>
+                                    <a:rPr lang="en-US" altLang="zh-TW" sz="2000" i="1">
+                                      <a:latin typeface="Cambria Math" panose="02040503050406030204" pitchFamily="18" charset="0"/>
+                                    </a:rPr>
+                                    <m:t>𝑝</m:t>
+                                  </m:r>
+                                </m:sub>
+                                <m:sup>
+                                  <m:r>
+                                    <a:rPr lang="en-US" altLang="zh-TW" sz="2000" i="1">
+                                      <a:latin typeface="Cambria Math" panose="02040503050406030204" pitchFamily="18" charset="0"/>
+                                    </a:rPr>
+                                    <m:t>𝐿</m:t>
+                                  </m:r>
+                                </m:sup>
+                              </m:sSubSup>
+                              <m:d>
+                                <m:dPr>
+                                  <m:ctrlPr>
+                                    <a:rPr lang="en-US" altLang="zh-TW" sz="2000" i="1">
+                                      <a:latin typeface="Cambria Math" panose="02040503050406030204" pitchFamily="18" charset="0"/>
+                                    </a:rPr>
+                                  </m:ctrlPr>
+                                </m:dPr>
+                                <m:e>
+                                  <m:r>
+                                    <a:rPr lang="en-US" altLang="zh-TW" sz="2000" b="1" i="1">
+                                      <a:latin typeface="Cambria Math" panose="02040503050406030204" pitchFamily="18" charset="0"/>
+                                    </a:rPr>
+                                    <m:t>𝒓</m:t>
+                                  </m:r>
+                                </m:e>
+                              </m:d>
+                            </m:e>
+                          </m:d>
+                        </m:e>
+                        <m:sup>
+                          <m:r>
+                            <a:rPr lang="en-US" altLang="zh-TW" sz="2000" i="1">
+                              <a:latin typeface="Cambria Math" panose="02040503050406030204" pitchFamily="18" charset="0"/>
+                            </a:rPr>
+                            <m:t>2</m:t>
+                          </m:r>
+                        </m:sup>
+                      </m:sSup>
+                    </m:oMath>
+                  </m:oMathPara>
+                </a14:m>
+                <a:endParaRPr lang="zh-TW" altLang="en-US" sz="2000" dirty="0">
+                  <a:latin typeface="Times New Roman" panose="02020603050405020304" pitchFamily="18" charset="0"/>
+                  <a:cs typeface="Times New Roman" panose="02020603050405020304" pitchFamily="18" charset="0"/>
+                </a:endParaRPr>
+              </a:p>
+            </p:txBody>
+          </p:sp>
+        </mc:Choice>
+        <mc:Fallback>
+          <p:sp>
+            <p:nvSpPr>
+              <p:cNvPr id="70" name="矩形 69">
+                <a:extLst>
+                  <a:ext uri="{FF2B5EF4-FFF2-40B4-BE49-F238E27FC236}">
+                    <a16:creationId xmlns:a16="http://schemas.microsoft.com/office/drawing/2014/main" id="{9AA7DB4D-008D-4D94-A265-1F97D8FAF1FD}"/>
+                  </a:ext>
+                </a:extLst>
+              </p:cNvPr>
+              <p:cNvSpPr>
+                <a:spLocks noRot="1" noChangeAspect="1" noMove="1" noResize="1" noEditPoints="1" noAdjustHandles="1" noChangeArrowheads="1" noChangeShapeType="1" noTextEdit="1"/>
+              </p:cNvSpPr>
+              <p:nvPr/>
+            </p:nvSpPr>
+            <p:spPr>
+              <a:xfrm>
+                <a:off x="1184153" y="-16960"/>
+                <a:ext cx="1311256" cy="517514"/>
+              </a:xfrm>
+              <a:prstGeom prst="rect">
+                <a:avLst/>
+              </a:prstGeom>
+              <a:blipFill>
+                <a:blip r:embed="rId16"/>
+                <a:stretch>
+                  <a:fillRect/>
+                </a:stretch>
+              </a:blipFill>
+            </p:spPr>
+            <p:txBody>
+              <a:bodyPr/>
+              <a:lstStyle/>
+              <a:p>
+                <a:r>
+                  <a:rPr lang="zh-TW" altLang="en-US">
+                    <a:noFill/>
+                  </a:rPr>
+                  <a:t> </a:t>
+                </a:r>
+              </a:p>
+            </p:txBody>
+          </p:sp>
+        </mc:Fallback>
+      </mc:AlternateContent>
+      <mc:AlternateContent xmlns:mc="http://schemas.openxmlformats.org/markup-compatibility/2006">
+        <mc:Choice xmlns:a14="http://schemas.microsoft.com/office/drawing/2010/main" Requires="a14">
+          <p:sp>
+            <p:nvSpPr>
+              <p:cNvPr id="71" name="矩形 70">
+                <a:extLst>
+                  <a:ext uri="{FF2B5EF4-FFF2-40B4-BE49-F238E27FC236}">
+                    <a16:creationId xmlns:a16="http://schemas.microsoft.com/office/drawing/2014/main" id="{828A5EB9-9DE5-40C8-9CDD-B9ACC7FA4D60}"/>
+                  </a:ext>
+                </a:extLst>
+              </p:cNvPr>
+              <p:cNvSpPr/>
+              <p:nvPr/>
+            </p:nvSpPr>
+            <p:spPr>
+              <a:xfrm>
+                <a:off x="2306268" y="1807858"/>
+                <a:ext cx="744243" cy="343171"/>
+              </a:xfrm>
+              <a:prstGeom prst="rect">
+                <a:avLst/>
+              </a:prstGeom>
+            </p:spPr>
+            <p:txBody>
+              <a:bodyPr wrap="none">
+                <a:spAutoFit/>
+              </a:bodyPr>
+              <a:lstStyle/>
+              <a:p>
+                <a:pPr/>
+                <a14:m>
+                  <m:oMathPara xmlns:m="http://schemas.openxmlformats.org/officeDocument/2006/math">
+                    <m:oMathParaPr>
+                      <m:jc m:val="centerGroup"/>
+                    </m:oMathParaPr>
+                    <m:oMath xmlns:m="http://schemas.openxmlformats.org/officeDocument/2006/math">
+                      <m:r>
+                        <a:rPr lang="en-US" altLang="zh-TW" sz="1630" i="1">
+                          <a:latin typeface="Cambria Math" panose="02040503050406030204" pitchFamily="18" charset="0"/>
+                        </a:rPr>
+                        <m:t>𝑝</m:t>
+                      </m:r>
+                      <m:r>
+                        <a:rPr lang="en-US" altLang="zh-TW" sz="1630" i="1">
+                          <a:latin typeface="Cambria Math" panose="02040503050406030204" pitchFamily="18" charset="0"/>
+                        </a:rPr>
+                        <m:t>=</m:t>
+                      </m:r>
+                      <m:r>
+                        <a:rPr lang="en-US" altLang="zh-TW" sz="1630" i="1">
+                          <a:latin typeface="Cambria Math" panose="02040503050406030204" pitchFamily="18" charset="0"/>
+                        </a:rPr>
+                        <m:t>0</m:t>
+                      </m:r>
+                    </m:oMath>
+                  </m:oMathPara>
+                </a14:m>
+                <a:endParaRPr lang="zh-TW" altLang="en-US" sz="1630" dirty="0">
+                  <a:latin typeface="Times New Roman" panose="02020603050405020304" pitchFamily="18" charset="0"/>
+                  <a:cs typeface="Times New Roman" panose="02020603050405020304" pitchFamily="18" charset="0"/>
+                </a:endParaRPr>
+              </a:p>
+            </p:txBody>
+          </p:sp>
+        </mc:Choice>
+        <mc:Fallback>
+          <p:sp>
+            <p:nvSpPr>
+              <p:cNvPr id="71" name="矩形 70">
+                <a:extLst>
+                  <a:ext uri="{FF2B5EF4-FFF2-40B4-BE49-F238E27FC236}">
+                    <a16:creationId xmlns:a16="http://schemas.microsoft.com/office/drawing/2014/main" id="{828A5EB9-9DE5-40C8-9CDD-B9ACC7FA4D60}"/>
+                  </a:ext>
+                </a:extLst>
+              </p:cNvPr>
+              <p:cNvSpPr>
+                <a:spLocks noRot="1" noChangeAspect="1" noMove="1" noResize="1" noEditPoints="1" noAdjustHandles="1" noChangeArrowheads="1" noChangeShapeType="1" noTextEdit="1"/>
+              </p:cNvSpPr>
+              <p:nvPr/>
+            </p:nvSpPr>
+            <p:spPr>
+              <a:xfrm>
+                <a:off x="2306268" y="1807858"/>
+                <a:ext cx="744243" cy="343171"/>
+              </a:xfrm>
+              <a:prstGeom prst="rect">
+                <a:avLst/>
+              </a:prstGeom>
+              <a:blipFill>
+                <a:blip r:embed="rId17"/>
+                <a:stretch>
+                  <a:fillRect b="-5357"/>
+                </a:stretch>
+              </a:blipFill>
+            </p:spPr>
+            <p:txBody>
+              <a:bodyPr/>
+              <a:lstStyle/>
+              <a:p>
+                <a:r>
+                  <a:rPr lang="zh-TW" altLang="en-US">
+                    <a:noFill/>
+                  </a:rPr>
+                  <a:t> </a:t>
+                </a:r>
+              </a:p>
+            </p:txBody>
+          </p:sp>
+        </mc:Fallback>
+      </mc:AlternateContent>
+      <mc:AlternateContent xmlns:mc="http://schemas.openxmlformats.org/markup-compatibility/2006">
+        <mc:Choice xmlns:a14="http://schemas.microsoft.com/office/drawing/2010/main" Requires="a14">
+          <p:sp>
+            <p:nvSpPr>
+              <p:cNvPr id="72" name="矩形 71">
+                <a:extLst>
+                  <a:ext uri="{FF2B5EF4-FFF2-40B4-BE49-F238E27FC236}">
+                    <a16:creationId xmlns:a16="http://schemas.microsoft.com/office/drawing/2014/main" id="{F32EE6FA-1AD1-4016-BD95-6900EA5B5573}"/>
+                  </a:ext>
+                </a:extLst>
+              </p:cNvPr>
+              <p:cNvSpPr/>
+              <p:nvPr/>
+            </p:nvSpPr>
+            <p:spPr>
+              <a:xfrm>
+                <a:off x="3641197" y="1807858"/>
+                <a:ext cx="744243" cy="343171"/>
+              </a:xfrm>
+              <a:prstGeom prst="rect">
+                <a:avLst/>
+              </a:prstGeom>
+            </p:spPr>
+            <p:txBody>
+              <a:bodyPr wrap="none">
+                <a:spAutoFit/>
+              </a:bodyPr>
+              <a:lstStyle/>
+              <a:p>
+                <a:pPr/>
+                <a14:m>
+                  <m:oMathPara xmlns:m="http://schemas.openxmlformats.org/officeDocument/2006/math">
+                    <m:oMathParaPr>
+                      <m:jc m:val="centerGroup"/>
+                    </m:oMathParaPr>
+                    <m:oMath xmlns:m="http://schemas.openxmlformats.org/officeDocument/2006/math">
+                      <m:r>
+                        <a:rPr lang="en-US" altLang="zh-TW" sz="1630" i="1">
+                          <a:latin typeface="Cambria Math" panose="02040503050406030204" pitchFamily="18" charset="0"/>
+                        </a:rPr>
+                        <m:t>𝑝</m:t>
+                      </m:r>
+                      <m:r>
+                        <a:rPr lang="en-US" altLang="zh-TW" sz="1630" i="1">
+                          <a:latin typeface="Cambria Math" panose="02040503050406030204" pitchFamily="18" charset="0"/>
+                        </a:rPr>
+                        <m:t>=</m:t>
+                      </m:r>
+                      <m:r>
+                        <a:rPr lang="en-US" altLang="zh-TW" sz="1630" i="1">
+                          <a:latin typeface="Cambria Math" panose="02040503050406030204" pitchFamily="18" charset="0"/>
+                        </a:rPr>
+                        <m:t>1</m:t>
+                      </m:r>
+                    </m:oMath>
+                  </m:oMathPara>
+                </a14:m>
+                <a:endParaRPr lang="zh-TW" altLang="en-US" sz="1630" dirty="0">
+                  <a:latin typeface="Times New Roman" panose="02020603050405020304" pitchFamily="18" charset="0"/>
+                  <a:cs typeface="Times New Roman" panose="02020603050405020304" pitchFamily="18" charset="0"/>
+                </a:endParaRPr>
+              </a:p>
+            </p:txBody>
+          </p:sp>
+        </mc:Choice>
+        <mc:Fallback>
+          <p:sp>
+            <p:nvSpPr>
+              <p:cNvPr id="72" name="矩形 71">
+                <a:extLst>
+                  <a:ext uri="{FF2B5EF4-FFF2-40B4-BE49-F238E27FC236}">
+                    <a16:creationId xmlns:a16="http://schemas.microsoft.com/office/drawing/2014/main" id="{F32EE6FA-1AD1-4016-BD95-6900EA5B5573}"/>
+                  </a:ext>
+                </a:extLst>
+              </p:cNvPr>
+              <p:cNvSpPr>
+                <a:spLocks noRot="1" noChangeAspect="1" noMove="1" noResize="1" noEditPoints="1" noAdjustHandles="1" noChangeArrowheads="1" noChangeShapeType="1" noTextEdit="1"/>
+              </p:cNvSpPr>
+              <p:nvPr/>
+            </p:nvSpPr>
+            <p:spPr>
+              <a:xfrm>
+                <a:off x="3641197" y="1807858"/>
+                <a:ext cx="744243" cy="343171"/>
+              </a:xfrm>
+              <a:prstGeom prst="rect">
+                <a:avLst/>
+              </a:prstGeom>
+              <a:blipFill>
+                <a:blip r:embed="rId18"/>
+                <a:stretch>
+                  <a:fillRect b="-5357"/>
+                </a:stretch>
+              </a:blipFill>
+            </p:spPr>
+            <p:txBody>
+              <a:bodyPr/>
+              <a:lstStyle/>
+              <a:p>
+                <a:r>
+                  <a:rPr lang="zh-TW" altLang="en-US">
+                    <a:noFill/>
+                  </a:rPr>
+                  <a:t> </a:t>
+                </a:r>
+              </a:p>
+            </p:txBody>
+          </p:sp>
+        </mc:Fallback>
+      </mc:AlternateContent>
+      <mc:AlternateContent xmlns:mc="http://schemas.openxmlformats.org/markup-compatibility/2006">
+        <mc:Choice xmlns:a14="http://schemas.microsoft.com/office/drawing/2010/main" Requires="a14">
+          <p:sp>
+            <p:nvSpPr>
+              <p:cNvPr id="73" name="矩形 72">
+                <a:extLst>
+                  <a:ext uri="{FF2B5EF4-FFF2-40B4-BE49-F238E27FC236}">
+                    <a16:creationId xmlns:a16="http://schemas.microsoft.com/office/drawing/2014/main" id="{3A529BC5-5052-446D-8C8C-9BC5C653DB64}"/>
+                  </a:ext>
+                </a:extLst>
+              </p:cNvPr>
+              <p:cNvSpPr/>
+              <p:nvPr/>
+            </p:nvSpPr>
+            <p:spPr>
+              <a:xfrm>
+                <a:off x="4976126" y="1807858"/>
+                <a:ext cx="744243" cy="343171"/>
+              </a:xfrm>
+              <a:prstGeom prst="rect">
+                <a:avLst/>
+              </a:prstGeom>
+            </p:spPr>
+            <p:txBody>
+              <a:bodyPr wrap="none">
+                <a:spAutoFit/>
+              </a:bodyPr>
+              <a:lstStyle/>
+              <a:p>
+                <a:pPr/>
+                <a14:m>
+                  <m:oMathPara xmlns:m="http://schemas.openxmlformats.org/officeDocument/2006/math">
+                    <m:oMathParaPr>
+                      <m:jc m:val="centerGroup"/>
+                    </m:oMathParaPr>
+                    <m:oMath xmlns:m="http://schemas.openxmlformats.org/officeDocument/2006/math">
+                      <m:r>
+                        <a:rPr lang="en-US" altLang="zh-TW" sz="1630" i="1">
+                          <a:latin typeface="Cambria Math" panose="02040503050406030204" pitchFamily="18" charset="0"/>
+                        </a:rPr>
+                        <m:t>𝑝</m:t>
+                      </m:r>
+                      <m:r>
+                        <a:rPr lang="en-US" altLang="zh-TW" sz="1630" i="1">
+                          <a:latin typeface="Cambria Math" panose="02040503050406030204" pitchFamily="18" charset="0"/>
+                        </a:rPr>
+                        <m:t>=</m:t>
+                      </m:r>
+                      <m:r>
+                        <a:rPr lang="en-US" altLang="zh-TW" sz="1630" i="1">
+                          <a:latin typeface="Cambria Math" panose="02040503050406030204" pitchFamily="18" charset="0"/>
+                        </a:rPr>
+                        <m:t>2</m:t>
+                      </m:r>
+                    </m:oMath>
+                  </m:oMathPara>
+                </a14:m>
+                <a:endParaRPr lang="zh-TW" altLang="en-US" sz="1630" dirty="0">
+                  <a:latin typeface="Times New Roman" panose="02020603050405020304" pitchFamily="18" charset="0"/>
+                  <a:cs typeface="Times New Roman" panose="02020603050405020304" pitchFamily="18" charset="0"/>
+                </a:endParaRPr>
+              </a:p>
+            </p:txBody>
+          </p:sp>
+        </mc:Choice>
+        <mc:Fallback>
+          <p:sp>
+            <p:nvSpPr>
+              <p:cNvPr id="73" name="矩形 72">
+                <a:extLst>
+                  <a:ext uri="{FF2B5EF4-FFF2-40B4-BE49-F238E27FC236}">
+                    <a16:creationId xmlns:a16="http://schemas.microsoft.com/office/drawing/2014/main" id="{3A529BC5-5052-446D-8C8C-9BC5C653DB64}"/>
+                  </a:ext>
+                </a:extLst>
+              </p:cNvPr>
+              <p:cNvSpPr>
+                <a:spLocks noRot="1" noChangeAspect="1" noMove="1" noResize="1" noEditPoints="1" noAdjustHandles="1" noChangeArrowheads="1" noChangeShapeType="1" noTextEdit="1"/>
+              </p:cNvSpPr>
+              <p:nvPr/>
+            </p:nvSpPr>
+            <p:spPr>
+              <a:xfrm>
+                <a:off x="4976126" y="1807858"/>
+                <a:ext cx="744243" cy="343171"/>
+              </a:xfrm>
+              <a:prstGeom prst="rect">
+                <a:avLst/>
+              </a:prstGeom>
+              <a:blipFill>
+                <a:blip r:embed="rId19"/>
+                <a:stretch>
+                  <a:fillRect b="-5357"/>
+                </a:stretch>
+              </a:blipFill>
+            </p:spPr>
+            <p:txBody>
+              <a:bodyPr/>
+              <a:lstStyle/>
+              <a:p>
+                <a:r>
+                  <a:rPr lang="zh-TW" altLang="en-US">
+                    <a:noFill/>
+                  </a:rPr>
+                  <a:t> </a:t>
+                </a:r>
+              </a:p>
+            </p:txBody>
+          </p:sp>
+        </mc:Fallback>
+      </mc:AlternateContent>
+      <mc:AlternateContent xmlns:mc="http://schemas.openxmlformats.org/markup-compatibility/2006">
+        <mc:Choice xmlns:a14="http://schemas.microsoft.com/office/drawing/2010/main" Requires="a14">
+          <p:sp>
+            <p:nvSpPr>
+              <p:cNvPr id="74" name="矩形 73">
+                <a:extLst>
+                  <a:ext uri="{FF2B5EF4-FFF2-40B4-BE49-F238E27FC236}">
+                    <a16:creationId xmlns:a16="http://schemas.microsoft.com/office/drawing/2014/main" id="{6CD9DE1A-C7D0-4B39-AC88-51776198DF4F}"/>
+                  </a:ext>
+                </a:extLst>
+              </p:cNvPr>
+              <p:cNvSpPr/>
+              <p:nvPr/>
+            </p:nvSpPr>
+            <p:spPr>
+              <a:xfrm>
+                <a:off x="6311055" y="1807858"/>
+                <a:ext cx="744243" cy="343171"/>
+              </a:xfrm>
+              <a:prstGeom prst="rect">
+                <a:avLst/>
+              </a:prstGeom>
+            </p:spPr>
+            <p:txBody>
+              <a:bodyPr wrap="none">
+                <a:spAutoFit/>
+              </a:bodyPr>
+              <a:lstStyle/>
+              <a:p>
+                <a:pPr/>
+                <a14:m>
+                  <m:oMathPara xmlns:m="http://schemas.openxmlformats.org/officeDocument/2006/math">
+                    <m:oMathParaPr>
+                      <m:jc m:val="centerGroup"/>
+                    </m:oMathParaPr>
+                    <m:oMath xmlns:m="http://schemas.openxmlformats.org/officeDocument/2006/math">
+                      <m:r>
+                        <a:rPr lang="en-US" altLang="zh-TW" sz="1630" i="1">
+                          <a:latin typeface="Cambria Math" panose="02040503050406030204" pitchFamily="18" charset="0"/>
+                        </a:rPr>
+                        <m:t>𝑝</m:t>
+                      </m:r>
+                      <m:r>
+                        <a:rPr lang="en-US" altLang="zh-TW" sz="1630" i="1">
+                          <a:latin typeface="Cambria Math" panose="02040503050406030204" pitchFamily="18" charset="0"/>
+                        </a:rPr>
+                        <m:t>=</m:t>
+                      </m:r>
+                      <m:r>
+                        <a:rPr lang="en-US" altLang="zh-TW" sz="1630" i="1">
+                          <a:latin typeface="Cambria Math" panose="02040503050406030204" pitchFamily="18" charset="0"/>
+                        </a:rPr>
+                        <m:t>3</m:t>
+                      </m:r>
+                    </m:oMath>
+                  </m:oMathPara>
+                </a14:m>
+                <a:endParaRPr lang="zh-TW" altLang="en-US" sz="1630" dirty="0">
+                  <a:latin typeface="Times New Roman" panose="02020603050405020304" pitchFamily="18" charset="0"/>
+                  <a:cs typeface="Times New Roman" panose="02020603050405020304" pitchFamily="18" charset="0"/>
+                </a:endParaRPr>
+              </a:p>
+            </p:txBody>
+          </p:sp>
+        </mc:Choice>
+        <mc:Fallback>
+          <p:sp>
+            <p:nvSpPr>
+              <p:cNvPr id="74" name="矩形 73">
+                <a:extLst>
+                  <a:ext uri="{FF2B5EF4-FFF2-40B4-BE49-F238E27FC236}">
+                    <a16:creationId xmlns:a16="http://schemas.microsoft.com/office/drawing/2014/main" id="{6CD9DE1A-C7D0-4B39-AC88-51776198DF4F}"/>
+                  </a:ext>
+                </a:extLst>
+              </p:cNvPr>
+              <p:cNvSpPr>
+                <a:spLocks noRot="1" noChangeAspect="1" noMove="1" noResize="1" noEditPoints="1" noAdjustHandles="1" noChangeArrowheads="1" noChangeShapeType="1" noTextEdit="1"/>
+              </p:cNvSpPr>
+              <p:nvPr/>
+            </p:nvSpPr>
+            <p:spPr>
+              <a:xfrm>
+                <a:off x="6311055" y="1807858"/>
+                <a:ext cx="744243" cy="343171"/>
+              </a:xfrm>
+              <a:prstGeom prst="rect">
+                <a:avLst/>
+              </a:prstGeom>
+              <a:blipFill>
+                <a:blip r:embed="rId20"/>
+                <a:stretch>
+                  <a:fillRect b="-5357"/>
+                </a:stretch>
+              </a:blipFill>
+            </p:spPr>
+            <p:txBody>
+              <a:bodyPr/>
+              <a:lstStyle/>
+              <a:p>
+                <a:r>
+                  <a:rPr lang="zh-TW" altLang="en-US">
+                    <a:noFill/>
+                  </a:rPr>
+                  <a:t> </a:t>
+                </a:r>
+              </a:p>
+            </p:txBody>
+          </p:sp>
+        </mc:Fallback>
+      </mc:AlternateContent>
+      <mc:AlternateContent xmlns:mc="http://schemas.openxmlformats.org/markup-compatibility/2006">
+        <mc:Choice xmlns:a14="http://schemas.microsoft.com/office/drawing/2010/main" Requires="a14">
+          <p:sp>
+            <p:nvSpPr>
+              <p:cNvPr id="75" name="矩形 74">
+                <a:extLst>
+                  <a:ext uri="{FF2B5EF4-FFF2-40B4-BE49-F238E27FC236}">
+                    <a16:creationId xmlns:a16="http://schemas.microsoft.com/office/drawing/2014/main" id="{AF090529-51DA-4CEB-A8A7-EF1B88A1CED7}"/>
+                  </a:ext>
+                </a:extLst>
+              </p:cNvPr>
+              <p:cNvSpPr/>
+              <p:nvPr/>
+            </p:nvSpPr>
+            <p:spPr>
+              <a:xfrm>
+                <a:off x="7645984" y="1807858"/>
+                <a:ext cx="744243" cy="343171"/>
+              </a:xfrm>
+              <a:prstGeom prst="rect">
+                <a:avLst/>
+              </a:prstGeom>
+            </p:spPr>
+            <p:txBody>
+              <a:bodyPr wrap="none">
+                <a:spAutoFit/>
+              </a:bodyPr>
+              <a:lstStyle/>
+              <a:p>
+                <a:pPr/>
+                <a14:m>
+                  <m:oMathPara xmlns:m="http://schemas.openxmlformats.org/officeDocument/2006/math">
+                    <m:oMathParaPr>
+                      <m:jc m:val="centerGroup"/>
+                    </m:oMathParaPr>
+                    <m:oMath xmlns:m="http://schemas.openxmlformats.org/officeDocument/2006/math">
+                      <m:r>
+                        <a:rPr lang="en-US" altLang="zh-TW" sz="1630" i="1">
+                          <a:latin typeface="Cambria Math" panose="02040503050406030204" pitchFamily="18" charset="0"/>
+                        </a:rPr>
+                        <m:t>𝑝</m:t>
+                      </m:r>
+                      <m:r>
+                        <a:rPr lang="en-US" altLang="zh-TW" sz="1630" i="1">
+                          <a:latin typeface="Cambria Math" panose="02040503050406030204" pitchFamily="18" charset="0"/>
+                        </a:rPr>
+                        <m:t>=</m:t>
+                      </m:r>
+                      <m:r>
+                        <a:rPr lang="en-US" altLang="zh-TW" sz="1630" i="1">
+                          <a:latin typeface="Cambria Math" panose="02040503050406030204" pitchFamily="18" charset="0"/>
+                        </a:rPr>
+                        <m:t>4</m:t>
+                      </m:r>
+                    </m:oMath>
+                  </m:oMathPara>
+                </a14:m>
+                <a:endParaRPr lang="zh-TW" altLang="en-US" sz="1630" dirty="0">
+                  <a:latin typeface="Times New Roman" panose="02020603050405020304" pitchFamily="18" charset="0"/>
+                  <a:cs typeface="Times New Roman" panose="02020603050405020304" pitchFamily="18" charset="0"/>
+                </a:endParaRPr>
+              </a:p>
+            </p:txBody>
+          </p:sp>
+        </mc:Choice>
+        <mc:Fallback>
+          <p:sp>
+            <p:nvSpPr>
+              <p:cNvPr id="75" name="矩形 74">
+                <a:extLst>
+                  <a:ext uri="{FF2B5EF4-FFF2-40B4-BE49-F238E27FC236}">
+                    <a16:creationId xmlns:a16="http://schemas.microsoft.com/office/drawing/2014/main" id="{AF090529-51DA-4CEB-A8A7-EF1B88A1CED7}"/>
+                  </a:ext>
+                </a:extLst>
+              </p:cNvPr>
+              <p:cNvSpPr>
+                <a:spLocks noRot="1" noChangeAspect="1" noMove="1" noResize="1" noEditPoints="1" noAdjustHandles="1" noChangeArrowheads="1" noChangeShapeType="1" noTextEdit="1"/>
+              </p:cNvSpPr>
+              <p:nvPr/>
+            </p:nvSpPr>
+            <p:spPr>
+              <a:xfrm>
+                <a:off x="7645984" y="1807858"/>
+                <a:ext cx="744243" cy="343171"/>
+              </a:xfrm>
+              <a:prstGeom prst="rect">
+                <a:avLst/>
+              </a:prstGeom>
+              <a:blipFill>
+                <a:blip r:embed="rId21"/>
+                <a:stretch>
+                  <a:fillRect b="-5357"/>
+                </a:stretch>
+              </a:blipFill>
+            </p:spPr>
+            <p:txBody>
+              <a:bodyPr/>
+              <a:lstStyle/>
+              <a:p>
+                <a:r>
+                  <a:rPr lang="zh-TW" altLang="en-US">
+                    <a:noFill/>
+                  </a:rPr>
+                  <a:t> </a:t>
+                </a:r>
+              </a:p>
+            </p:txBody>
+          </p:sp>
+        </mc:Fallback>
+      </mc:AlternateContent>
+      <p:grpSp>
+        <p:nvGrpSpPr>
+          <p:cNvPr id="77" name="群組 76">
+            <a:extLst>
+              <a:ext uri="{FF2B5EF4-FFF2-40B4-BE49-F238E27FC236}">
+                <a16:creationId xmlns:a16="http://schemas.microsoft.com/office/drawing/2014/main" id="{F9A72FEA-E719-4DA3-B473-7A60CB359938}"/>
+              </a:ext>
+            </a:extLst>
+          </p:cNvPr>
+          <p:cNvGrpSpPr/>
+          <p:nvPr/>
+        </p:nvGrpSpPr>
+        <p:grpSpPr>
+          <a:xfrm>
+            <a:off x="2493089" y="2431599"/>
+            <a:ext cx="550009" cy="592612"/>
+            <a:chOff x="-988088" y="945710"/>
+            <a:chExt cx="550009" cy="592612"/>
+          </a:xfrm>
+        </p:grpSpPr>
+        <mc:AlternateContent xmlns:mc="http://schemas.openxmlformats.org/markup-compatibility/2006" xmlns:a14="http://schemas.microsoft.com/office/drawing/2010/main">
+          <mc:Choice Requires="a14">
+            <p:sp>
+              <p:nvSpPr>
+                <p:cNvPr id="78" name="文字方塊 77">
+                  <a:extLst>
+                    <a:ext uri="{FF2B5EF4-FFF2-40B4-BE49-F238E27FC236}">
+                      <a16:creationId xmlns:a16="http://schemas.microsoft.com/office/drawing/2014/main" id="{EDEB094F-393C-43F0-B603-2E7016A0DB05}"/>
+                    </a:ext>
+                  </a:extLst>
+                </p:cNvPr>
+                <p:cNvSpPr txBox="1"/>
+                <p:nvPr/>
+              </p:nvSpPr>
+              <p:spPr>
+                <a:xfrm>
+                  <a:off x="-988088" y="945710"/>
+                  <a:ext cx="323386" cy="343171"/>
+                </a:xfrm>
+                <a:prstGeom prst="rect">
+                  <a:avLst/>
+                </a:prstGeom>
+                <a:noFill/>
+              </p:spPr>
+              <p:txBody>
+                <a:bodyPr wrap="square" rtlCol="0">
+                  <a:spAutoFit/>
+                </a:bodyPr>
+                <a:lstStyle/>
+                <a:p>
+                  <a:pPr/>
+                  <a14:m>
+                    <m:oMathPara xmlns:m="http://schemas.openxmlformats.org/officeDocument/2006/math">
+                      <m:oMathParaPr>
+                        <m:jc m:val="centerGroup"/>
+                      </m:oMathParaPr>
+                      <m:oMath xmlns:m="http://schemas.openxmlformats.org/officeDocument/2006/math">
+                        <m:acc>
+                          <m:accPr>
+                            <m:chr m:val="̂"/>
+                            <m:ctrlPr>
+                              <a:rPr lang="en-US" altLang="zh-TW" sz="1630" i="1">
+                                <a:latin typeface="Cambria Math" panose="02040503050406030204" pitchFamily="18" charset="0"/>
+                              </a:rPr>
+                            </m:ctrlPr>
+                          </m:accPr>
+                          <m:e>
+                            <m:r>
+                              <a:rPr lang="en-US" altLang="zh-TW" sz="1630" b="1" i="1">
+                                <a:latin typeface="Cambria Math" panose="02040503050406030204" pitchFamily="18" charset="0"/>
+                              </a:rPr>
+                              <m:t>𝒚</m:t>
+                            </m:r>
+                          </m:e>
+                        </m:acc>
+                      </m:oMath>
+                    </m:oMathPara>
+                  </a14:m>
+                  <a:endParaRPr lang="en-US" altLang="zh-TW" sz="1630" dirty="0">
+                    <a:latin typeface="Times New Roman" panose="02020603050405020304" pitchFamily="18" charset="0"/>
+                    <a:cs typeface="Times New Roman" panose="02020603050405020304" pitchFamily="18" charset="0"/>
+                  </a:endParaRPr>
+                </a:p>
+              </p:txBody>
+            </p:sp>
+          </mc:Choice>
+          <mc:Fallback xmlns="">
+            <p:sp>
+              <p:nvSpPr>
+                <p:cNvPr id="76" name="文字方塊 75">
+                  <a:extLst>
+                    <a:ext uri="{FF2B5EF4-FFF2-40B4-BE49-F238E27FC236}">
+                      <a16:creationId xmlns:a16="http://schemas.microsoft.com/office/drawing/2014/main" id="{DA635BAA-EFD7-435B-BCE4-F0FC3026F2A5}"/>
+                    </a:ext>
+                  </a:extLst>
+                </p:cNvPr>
+                <p:cNvSpPr txBox="1">
+                  <a:spLocks noRot="1" noChangeAspect="1" noMove="1" noResize="1" noEditPoints="1" noAdjustHandles="1" noChangeArrowheads="1" noChangeShapeType="1" noTextEdit="1"/>
+                </p:cNvSpPr>
+                <p:nvPr/>
+              </p:nvSpPr>
+              <p:spPr>
+                <a:xfrm>
+                  <a:off x="-988088" y="945710"/>
+                  <a:ext cx="323386" cy="343171"/>
+                </a:xfrm>
+                <a:prstGeom prst="rect">
+                  <a:avLst/>
+                </a:prstGeom>
+                <a:blipFill>
+                  <a:blip r:embed="rId33"/>
+                  <a:stretch>
+                    <a:fillRect b="-7143"/>
+                  </a:stretch>
+                </a:blipFill>
+              </p:spPr>
+              <p:txBody>
+                <a:bodyPr/>
+                <a:lstStyle/>
+                <a:p>
+                  <a:r>
+                    <a:rPr lang="zh-TW" altLang="en-US">
+                      <a:noFill/>
+                    </a:rPr>
+                    <a:t> </a:t>
+                  </a:r>
+                </a:p>
+              </p:txBody>
+            </p:sp>
+          </mc:Fallback>
+        </mc:AlternateContent>
+        <mc:AlternateContent xmlns:mc="http://schemas.openxmlformats.org/markup-compatibility/2006" xmlns:a14="http://schemas.microsoft.com/office/drawing/2010/main">
+          <mc:Choice Requires="a14">
+            <p:sp>
+              <p:nvSpPr>
+                <p:cNvPr id="79" name="文字方塊 78">
+                  <a:extLst>
+                    <a:ext uri="{FF2B5EF4-FFF2-40B4-BE49-F238E27FC236}">
+                      <a16:creationId xmlns:a16="http://schemas.microsoft.com/office/drawing/2014/main" id="{8A92889A-0FBC-4115-AD7E-E858414A4C33}"/>
+                    </a:ext>
+                  </a:extLst>
+                </p:cNvPr>
+                <p:cNvSpPr txBox="1"/>
+                <p:nvPr/>
+              </p:nvSpPr>
+              <p:spPr>
+                <a:xfrm>
+                  <a:off x="-844998" y="1195151"/>
+                  <a:ext cx="406919" cy="343171"/>
+                </a:xfrm>
+                <a:prstGeom prst="rect">
+                  <a:avLst/>
+                </a:prstGeom>
+                <a:noFill/>
+              </p:spPr>
+              <p:txBody>
+                <a:bodyPr wrap="square" rtlCol="0">
+                  <a:spAutoFit/>
+                </a:bodyPr>
+                <a:lstStyle/>
+                <a:p>
+                  <a:pPr/>
+                  <a14:m>
+                    <m:oMathPara xmlns:m="http://schemas.openxmlformats.org/officeDocument/2006/math">
+                      <m:oMathParaPr>
+                        <m:jc m:val="centerGroup"/>
+                      </m:oMathParaPr>
+                      <m:oMath xmlns:m="http://schemas.openxmlformats.org/officeDocument/2006/math">
+                        <m:acc>
+                          <m:accPr>
+                            <m:chr m:val="̂"/>
+                            <m:ctrlPr>
+                              <a:rPr lang="en-US" altLang="zh-TW" sz="1630" i="1">
+                                <a:latin typeface="Cambria Math" panose="02040503050406030204" pitchFamily="18" charset="0"/>
+                              </a:rPr>
+                            </m:ctrlPr>
+                          </m:accPr>
+                          <m:e>
+                            <m:r>
+                              <a:rPr lang="en-US" altLang="zh-TW" sz="1630" b="1" i="1">
+                                <a:latin typeface="Cambria Math" panose="02040503050406030204" pitchFamily="18" charset="0"/>
+                              </a:rPr>
+                              <m:t>𝒙</m:t>
+                            </m:r>
+                          </m:e>
+                        </m:acc>
+                      </m:oMath>
+                    </m:oMathPara>
+                  </a14:m>
+                  <a:endParaRPr lang="en-US" altLang="zh-TW" sz="1630" dirty="0">
+                    <a:latin typeface="Times New Roman" panose="02020603050405020304" pitchFamily="18" charset="0"/>
+                    <a:cs typeface="Times New Roman" panose="02020603050405020304" pitchFamily="18" charset="0"/>
+                  </a:endParaRPr>
+                </a:p>
+              </p:txBody>
+            </p:sp>
+          </mc:Choice>
+          <mc:Fallback xmlns="">
+            <p:sp>
+              <p:nvSpPr>
+                <p:cNvPr id="77" name="文字方塊 76">
+                  <a:extLst>
+                    <a:ext uri="{FF2B5EF4-FFF2-40B4-BE49-F238E27FC236}">
+                      <a16:creationId xmlns:a16="http://schemas.microsoft.com/office/drawing/2014/main" id="{70E789C9-D068-48AA-8926-92B85661596A}"/>
+                    </a:ext>
+                  </a:extLst>
+                </p:cNvPr>
+                <p:cNvSpPr txBox="1">
+                  <a:spLocks noRot="1" noChangeAspect="1" noMove="1" noResize="1" noEditPoints="1" noAdjustHandles="1" noChangeArrowheads="1" noChangeShapeType="1" noTextEdit="1"/>
+                </p:cNvSpPr>
+                <p:nvPr/>
+              </p:nvSpPr>
+              <p:spPr>
+                <a:xfrm>
+                  <a:off x="-844998" y="1195151"/>
+                  <a:ext cx="406919" cy="343171"/>
+                </a:xfrm>
+                <a:prstGeom prst="rect">
+                  <a:avLst/>
+                </a:prstGeom>
+                <a:blipFill>
+                  <a:blip r:embed="rId34"/>
+                  <a:stretch>
+                    <a:fillRect r="-11940"/>
+                  </a:stretch>
+                </a:blipFill>
+              </p:spPr>
+              <p:txBody>
+                <a:bodyPr/>
+                <a:lstStyle/>
+                <a:p>
+                  <a:r>
+                    <a:rPr lang="zh-TW" altLang="en-US">
+                      <a:noFill/>
+                    </a:rPr>
+                    <a:t> </a:t>
+                  </a:r>
+                </a:p>
+              </p:txBody>
+            </p:sp>
+          </mc:Fallback>
+        </mc:AlternateContent>
+        <p:sp>
+          <p:nvSpPr>
+            <p:cNvPr id="80" name="箭號: 向右 79">
+              <a:extLst>
+                <a:ext uri="{FF2B5EF4-FFF2-40B4-BE49-F238E27FC236}">
+                  <a16:creationId xmlns:a16="http://schemas.microsoft.com/office/drawing/2014/main" id="{F32A89A1-E095-4210-B194-1EC0B4AD3DA8}"/>
+                </a:ext>
+              </a:extLst>
+            </p:cNvPr>
+            <p:cNvSpPr/>
+            <p:nvPr/>
+          </p:nvSpPr>
+          <p:spPr>
+            <a:xfrm>
+              <a:off x="-837092" y="1356364"/>
+              <a:ext cx="92654" cy="27541"/>
+            </a:xfrm>
+            <a:prstGeom prst="rightArrow">
+              <a:avLst>
+                <a:gd name="adj1" fmla="val 50000"/>
+                <a:gd name="adj2" fmla="val 99023"/>
+              </a:avLst>
+            </a:prstGeom>
+            <a:solidFill>
+              <a:schemeClr val="tx1"/>
+            </a:solidFill>
+            <a:ln>
+              <a:solidFill>
+                <a:schemeClr val="tx1"/>
+              </a:solidFill>
+            </a:ln>
+          </p:spPr>
+          <p:style>
+            <a:lnRef idx="2">
+              <a:schemeClr val="dk1">
+                <a:shade val="50000"/>
+              </a:schemeClr>
+            </a:lnRef>
+            <a:fillRef idx="1">
+              <a:schemeClr val="dk1"/>
+            </a:fillRef>
+            <a:effectRef idx="0">
+              <a:schemeClr val="dk1"/>
+            </a:effectRef>
+            <a:fontRef idx="minor">
+              <a:schemeClr val="lt1"/>
+            </a:fontRef>
+          </p:style>
+          <p:txBody>
+            <a:bodyPr rtlCol="0" anchor="ctr"/>
+            <a:lstStyle/>
+            <a:p>
+              <a:pPr algn="ctr"/>
+              <a:endParaRPr lang="zh-TW" altLang="en-US" sz="1630">
+                <a:solidFill>
+                  <a:schemeClr val="tx1"/>
+                </a:solidFill>
+                <a:latin typeface="Times New Roman" panose="02020603050405020304" pitchFamily="18" charset="0"/>
+                <a:cs typeface="Times New Roman" panose="02020603050405020304" pitchFamily="18" charset="0"/>
+              </a:endParaRPr>
+            </a:p>
+          </p:txBody>
+        </p:sp>
+        <p:sp>
+          <p:nvSpPr>
+            <p:cNvPr id="81" name="箭號: 向右 80">
+              <a:extLst>
+                <a:ext uri="{FF2B5EF4-FFF2-40B4-BE49-F238E27FC236}">
+                  <a16:creationId xmlns:a16="http://schemas.microsoft.com/office/drawing/2014/main" id="{E42CAD77-BEA0-4CB1-B01D-A8A1D4284141}"/>
+                </a:ext>
+              </a:extLst>
+            </p:cNvPr>
+            <p:cNvSpPr/>
+            <p:nvPr/>
+          </p:nvSpPr>
+          <p:spPr>
+            <a:xfrm rot="16200000">
+              <a:off x="-877012" y="1316853"/>
+              <a:ext cx="91764" cy="27808"/>
+            </a:xfrm>
+            <a:prstGeom prst="rightArrow">
+              <a:avLst>
+                <a:gd name="adj1" fmla="val 50000"/>
+                <a:gd name="adj2" fmla="val 99023"/>
+              </a:avLst>
+            </a:prstGeom>
+            <a:solidFill>
+              <a:schemeClr val="tx1"/>
+            </a:solidFill>
+            <a:ln>
+              <a:solidFill>
+                <a:schemeClr val="tx1"/>
+              </a:solidFill>
+            </a:ln>
+          </p:spPr>
+          <p:style>
+            <a:lnRef idx="2">
+              <a:schemeClr val="dk1">
+                <a:shade val="50000"/>
+              </a:schemeClr>
+            </a:lnRef>
+            <a:fillRef idx="1">
+              <a:schemeClr val="dk1"/>
+            </a:fillRef>
+            <a:effectRef idx="0">
+              <a:schemeClr val="dk1"/>
+            </a:effectRef>
+            <a:fontRef idx="minor">
+              <a:schemeClr val="lt1"/>
+            </a:fontRef>
+          </p:style>
+          <p:txBody>
+            <a:bodyPr rtlCol="0" anchor="ctr"/>
+            <a:lstStyle/>
+            <a:p>
+              <a:pPr algn="ctr"/>
+              <a:endParaRPr lang="zh-TW" altLang="en-US" sz="1630" dirty="0">
+                <a:solidFill>
+                  <a:schemeClr val="tx1"/>
+                </a:solidFill>
+                <a:latin typeface="Times New Roman" panose="02020603050405020304" pitchFamily="18" charset="0"/>
+                <a:cs typeface="Times New Roman" panose="02020603050405020304" pitchFamily="18" charset="0"/>
+              </a:endParaRPr>
+            </a:p>
+          </p:txBody>
+        </p:sp>
+      </p:grpSp>
+      <mc:AlternateContent xmlns:mc="http://schemas.openxmlformats.org/markup-compatibility/2006">
+        <mc:Choice xmlns:a14="http://schemas.microsoft.com/office/drawing/2010/main" Requires="a14">
+          <p:sp>
+            <p:nvSpPr>
+              <p:cNvPr id="82" name="矩形 81">
+                <a:extLst>
+                  <a:ext uri="{FF2B5EF4-FFF2-40B4-BE49-F238E27FC236}">
+                    <a16:creationId xmlns:a16="http://schemas.microsoft.com/office/drawing/2014/main" id="{240CA1BD-0A6B-483E-82FB-D0031F2E5140}"/>
+                  </a:ext>
+                </a:extLst>
+              </p:cNvPr>
+              <p:cNvSpPr/>
+              <p:nvPr/>
+            </p:nvSpPr>
+            <p:spPr>
+              <a:xfrm>
+                <a:off x="1239368" y="2522761"/>
+                <a:ext cx="803040" cy="369332"/>
+              </a:xfrm>
+              <a:prstGeom prst="rect">
+                <a:avLst/>
+              </a:prstGeom>
+            </p:spPr>
+            <p:txBody>
+              <a:bodyPr wrap="none">
+                <a:spAutoFit/>
+              </a:bodyPr>
+              <a:lstStyle/>
+              <a:p>
+                <a:pPr/>
+                <a14:m>
+                  <m:oMathPara xmlns:m="http://schemas.openxmlformats.org/officeDocument/2006/math">
+                    <m:oMathParaPr>
+                      <m:jc m:val="centerGroup"/>
+                    </m:oMathParaPr>
+                    <m:oMath xmlns:m="http://schemas.openxmlformats.org/officeDocument/2006/math">
+                      <m:r>
+                        <a:rPr lang="en-US" altLang="zh-TW" i="1">
+                          <a:latin typeface="Cambria Math" panose="02040503050406030204" pitchFamily="18" charset="0"/>
+                        </a:rPr>
+                        <m:t>𝑝</m:t>
+                      </m:r>
+                      <m:r>
+                        <a:rPr lang="en-US" altLang="zh-TW" i="1">
+                          <a:latin typeface="Cambria Math" panose="02040503050406030204" pitchFamily="18" charset="0"/>
+                        </a:rPr>
+                        <m:t>=</m:t>
+                      </m:r>
+                      <m:r>
+                        <a:rPr lang="en-US" altLang="zh-TW" i="1">
+                          <a:latin typeface="Cambria Math" panose="02040503050406030204" pitchFamily="18" charset="0"/>
+                        </a:rPr>
+                        <m:t>0</m:t>
+                      </m:r>
+                    </m:oMath>
+                  </m:oMathPara>
+                </a14:m>
+                <a:endParaRPr lang="zh-TW" altLang="en-US" dirty="0">
+                  <a:latin typeface="Times New Roman" panose="02020603050405020304" pitchFamily="18" charset="0"/>
+                  <a:cs typeface="Times New Roman" panose="02020603050405020304" pitchFamily="18" charset="0"/>
+                </a:endParaRPr>
+              </a:p>
+            </p:txBody>
+          </p:sp>
+        </mc:Choice>
+        <mc:Fallback>
+          <p:sp>
+            <p:nvSpPr>
+              <p:cNvPr id="82" name="矩形 81">
+                <a:extLst>
+                  <a:ext uri="{FF2B5EF4-FFF2-40B4-BE49-F238E27FC236}">
+                    <a16:creationId xmlns:a16="http://schemas.microsoft.com/office/drawing/2014/main" id="{240CA1BD-0A6B-483E-82FB-D0031F2E5140}"/>
+                  </a:ext>
+                </a:extLst>
+              </p:cNvPr>
+              <p:cNvSpPr>
+                <a:spLocks noRot="1" noChangeAspect="1" noMove="1" noResize="1" noEditPoints="1" noAdjustHandles="1" noChangeArrowheads="1" noChangeShapeType="1" noTextEdit="1"/>
+              </p:cNvSpPr>
+              <p:nvPr/>
+            </p:nvSpPr>
+            <p:spPr>
+              <a:xfrm>
+                <a:off x="1239368" y="2522761"/>
+                <a:ext cx="803040" cy="369332"/>
+              </a:xfrm>
+              <a:prstGeom prst="rect">
+                <a:avLst/>
+              </a:prstGeom>
+              <a:blipFill>
+                <a:blip r:embed="rId35"/>
+                <a:stretch>
+                  <a:fillRect b="-8333"/>
+                </a:stretch>
+              </a:blipFill>
+            </p:spPr>
+            <p:txBody>
+              <a:bodyPr/>
+              <a:lstStyle/>
+              <a:p>
+                <a:r>
+                  <a:rPr lang="zh-TW" altLang="en-US">
+                    <a:noFill/>
+                  </a:rPr>
+                  <a:t> </a:t>
+                </a:r>
+              </a:p>
+            </p:txBody>
+          </p:sp>
+        </mc:Fallback>
+      </mc:AlternateContent>
+      <mc:AlternateContent xmlns:mc="http://schemas.openxmlformats.org/markup-compatibility/2006">
+        <mc:Choice xmlns:a14="http://schemas.microsoft.com/office/drawing/2010/main" Requires="a14">
+          <p:sp>
+            <p:nvSpPr>
+              <p:cNvPr id="83" name="矩形 82">
+                <a:extLst>
+                  <a:ext uri="{FF2B5EF4-FFF2-40B4-BE49-F238E27FC236}">
+                    <a16:creationId xmlns:a16="http://schemas.microsoft.com/office/drawing/2014/main" id="{287FE308-8D4D-42B7-B8A9-E8CDF97468FD}"/>
+                  </a:ext>
+                </a:extLst>
+              </p:cNvPr>
+              <p:cNvSpPr/>
+              <p:nvPr/>
+            </p:nvSpPr>
+            <p:spPr>
+              <a:xfrm>
+                <a:off x="1239378" y="5147836"/>
+                <a:ext cx="803040" cy="369332"/>
+              </a:xfrm>
+              <a:prstGeom prst="rect">
+                <a:avLst/>
+              </a:prstGeom>
+            </p:spPr>
+            <p:txBody>
+              <a:bodyPr wrap="none">
+                <a:spAutoFit/>
+              </a:bodyPr>
+              <a:lstStyle/>
+              <a:p>
+                <a:pPr/>
+                <a14:m>
+                  <m:oMathPara xmlns:m="http://schemas.openxmlformats.org/officeDocument/2006/math">
+                    <m:oMathParaPr>
+                      <m:jc m:val="centerGroup"/>
+                    </m:oMathParaPr>
+                    <m:oMath xmlns:m="http://schemas.openxmlformats.org/officeDocument/2006/math">
+                      <m:r>
+                        <a:rPr lang="en-US" altLang="zh-TW" i="1">
+                          <a:latin typeface="Cambria Math" panose="02040503050406030204" pitchFamily="18" charset="0"/>
+                        </a:rPr>
+                        <m:t>𝑝</m:t>
+                      </m:r>
+                      <m:r>
+                        <a:rPr lang="en-US" altLang="zh-TW" i="1">
+                          <a:latin typeface="Cambria Math" panose="02040503050406030204" pitchFamily="18" charset="0"/>
+                        </a:rPr>
+                        <m:t>=</m:t>
+                      </m:r>
+                      <m:r>
+                        <a:rPr lang="en-US" altLang="zh-TW" i="1">
+                          <a:latin typeface="Cambria Math" panose="02040503050406030204" pitchFamily="18" charset="0"/>
+                        </a:rPr>
+                        <m:t>0</m:t>
+                      </m:r>
+                    </m:oMath>
+                  </m:oMathPara>
+                </a14:m>
+                <a:endParaRPr lang="zh-TW" altLang="en-US" dirty="0">
+                  <a:latin typeface="Times New Roman" panose="02020603050405020304" pitchFamily="18" charset="0"/>
+                  <a:cs typeface="Times New Roman" panose="02020603050405020304" pitchFamily="18" charset="0"/>
+                </a:endParaRPr>
+              </a:p>
+            </p:txBody>
+          </p:sp>
+        </mc:Choice>
+        <mc:Fallback>
+          <p:sp>
+            <p:nvSpPr>
+              <p:cNvPr id="83" name="矩形 82">
+                <a:extLst>
+                  <a:ext uri="{FF2B5EF4-FFF2-40B4-BE49-F238E27FC236}">
+                    <a16:creationId xmlns:a16="http://schemas.microsoft.com/office/drawing/2014/main" id="{287FE308-8D4D-42B7-B8A9-E8CDF97468FD}"/>
+                  </a:ext>
+                </a:extLst>
+              </p:cNvPr>
+              <p:cNvSpPr>
+                <a:spLocks noRot="1" noChangeAspect="1" noMove="1" noResize="1" noEditPoints="1" noAdjustHandles="1" noChangeArrowheads="1" noChangeShapeType="1" noTextEdit="1"/>
+              </p:cNvSpPr>
+              <p:nvPr/>
+            </p:nvSpPr>
+            <p:spPr>
+              <a:xfrm>
+                <a:off x="1239378" y="5147836"/>
+                <a:ext cx="803040" cy="369332"/>
+              </a:xfrm>
+              <a:prstGeom prst="rect">
+                <a:avLst/>
+              </a:prstGeom>
+              <a:blipFill>
+                <a:blip r:embed="rId36"/>
+                <a:stretch>
+                  <a:fillRect b="-8197"/>
+                </a:stretch>
+              </a:blipFill>
+            </p:spPr>
+            <p:txBody>
+              <a:bodyPr/>
+              <a:lstStyle/>
+              <a:p>
+                <a:r>
+                  <a:rPr lang="zh-TW" altLang="en-US">
+                    <a:noFill/>
+                  </a:rPr>
+                  <a:t> </a:t>
+                </a:r>
+              </a:p>
+            </p:txBody>
+          </p:sp>
+        </mc:Fallback>
+      </mc:AlternateContent>
+      <mc:AlternateContent xmlns:mc="http://schemas.openxmlformats.org/markup-compatibility/2006">
+        <mc:Choice xmlns:a14="http://schemas.microsoft.com/office/drawing/2010/main" Requires="a14">
+          <p:sp>
+            <p:nvSpPr>
+              <p:cNvPr id="84" name="矩形 83">
+                <a:extLst>
+                  <a:ext uri="{FF2B5EF4-FFF2-40B4-BE49-F238E27FC236}">
+                    <a16:creationId xmlns:a16="http://schemas.microsoft.com/office/drawing/2014/main" id="{65E3A63F-4D89-41B4-B9E7-ED2A3B2D83B3}"/>
+                  </a:ext>
+                </a:extLst>
+              </p:cNvPr>
+              <p:cNvSpPr/>
+              <p:nvPr/>
+            </p:nvSpPr>
+            <p:spPr>
+              <a:xfrm>
+                <a:off x="2252448" y="5567329"/>
+                <a:ext cx="688009" cy="343171"/>
+              </a:xfrm>
+              <a:prstGeom prst="rect">
+                <a:avLst/>
+              </a:prstGeom>
+            </p:spPr>
+            <p:txBody>
+              <a:bodyPr wrap="none">
+                <a:spAutoFit/>
+              </a:bodyPr>
+              <a:lstStyle/>
+              <a:p>
+                <a:pPr/>
+                <a14:m>
+                  <m:oMathPara xmlns:m="http://schemas.openxmlformats.org/officeDocument/2006/math">
+                    <m:oMathParaPr>
+                      <m:jc m:val="centerGroup"/>
+                    </m:oMathParaPr>
+                    <m:oMath xmlns:m="http://schemas.openxmlformats.org/officeDocument/2006/math">
+                      <m:r>
+                        <a:rPr lang="en-US" altLang="zh-TW" sz="1630" i="1">
+                          <a:latin typeface="Cambria Math" panose="02040503050406030204" pitchFamily="18" charset="0"/>
+                        </a:rPr>
+                        <m:t>1</m:t>
+                      </m:r>
+                      <m:r>
+                        <a:rPr lang="en-US" altLang="zh-TW" sz="1630" i="1">
+                          <a:latin typeface="Cambria Math" panose="02040503050406030204" pitchFamily="18" charset="0"/>
+                        </a:rPr>
+                        <m:t> </m:t>
+                      </m:r>
+                      <m:r>
+                        <a:rPr lang="en-US" altLang="zh-TW" sz="1630" i="1">
+                          <a:latin typeface="Cambria Math" panose="02040503050406030204" pitchFamily="18" charset="0"/>
+                        </a:rPr>
+                        <m:t>𝜇</m:t>
+                      </m:r>
+                      <m:r>
+                        <m:rPr>
+                          <m:sty m:val="p"/>
+                        </m:rPr>
+                        <a:rPr lang="en-US" altLang="zh-TW" sz="1630">
+                          <a:latin typeface="Cambria Math" panose="02040503050406030204" pitchFamily="18" charset="0"/>
+                        </a:rPr>
+                        <m:t>m</m:t>
+                      </m:r>
+                    </m:oMath>
+                  </m:oMathPara>
+                </a14:m>
+                <a:endParaRPr lang="zh-TW" altLang="en-US" sz="1630" dirty="0">
+                  <a:latin typeface="Times New Roman" panose="02020603050405020304" pitchFamily="18" charset="0"/>
+                  <a:cs typeface="Times New Roman" panose="02020603050405020304" pitchFamily="18" charset="0"/>
+                </a:endParaRPr>
+              </a:p>
+            </p:txBody>
+          </p:sp>
+        </mc:Choice>
+        <mc:Fallback>
+          <p:sp>
+            <p:nvSpPr>
+              <p:cNvPr id="84" name="矩形 83">
+                <a:extLst>
+                  <a:ext uri="{FF2B5EF4-FFF2-40B4-BE49-F238E27FC236}">
+                    <a16:creationId xmlns:a16="http://schemas.microsoft.com/office/drawing/2014/main" id="{65E3A63F-4D89-41B4-B9E7-ED2A3B2D83B3}"/>
+                  </a:ext>
+                </a:extLst>
+              </p:cNvPr>
+              <p:cNvSpPr>
+                <a:spLocks noRot="1" noChangeAspect="1" noMove="1" noResize="1" noEditPoints="1" noAdjustHandles="1" noChangeArrowheads="1" noChangeShapeType="1" noTextEdit="1"/>
+              </p:cNvSpPr>
+              <p:nvPr/>
+            </p:nvSpPr>
+            <p:spPr>
+              <a:xfrm>
+                <a:off x="2252448" y="5567329"/>
+                <a:ext cx="688009" cy="343171"/>
+              </a:xfrm>
+              <a:prstGeom prst="rect">
+                <a:avLst/>
+              </a:prstGeom>
+              <a:blipFill>
+                <a:blip r:embed="rId37"/>
+                <a:stretch>
+                  <a:fillRect b="-5263"/>
+                </a:stretch>
+              </a:blipFill>
+            </p:spPr>
+            <p:txBody>
+              <a:bodyPr/>
+              <a:lstStyle/>
+              <a:p>
+                <a:r>
+                  <a:rPr lang="zh-TW" altLang="en-US">
+                    <a:noFill/>
+                  </a:rPr>
+                  <a:t> </a:t>
+                </a:r>
+              </a:p>
+            </p:txBody>
+          </p:sp>
+        </mc:Fallback>
+      </mc:AlternateContent>
+      <p:grpSp>
+        <p:nvGrpSpPr>
+          <p:cNvPr id="91" name="群組 90">
+            <a:extLst>
+              <a:ext uri="{FF2B5EF4-FFF2-40B4-BE49-F238E27FC236}">
+                <a16:creationId xmlns:a16="http://schemas.microsoft.com/office/drawing/2014/main" id="{3A0BB8D0-0BD8-440C-854D-8B897490D785}"/>
+              </a:ext>
+            </a:extLst>
+          </p:cNvPr>
+          <p:cNvGrpSpPr/>
+          <p:nvPr/>
+        </p:nvGrpSpPr>
+        <p:grpSpPr>
+          <a:xfrm>
+            <a:off x="2569289" y="4711295"/>
+            <a:ext cx="550009" cy="592612"/>
+            <a:chOff x="-988088" y="945710"/>
+            <a:chExt cx="550009" cy="592612"/>
+          </a:xfrm>
+        </p:grpSpPr>
+        <mc:AlternateContent xmlns:mc="http://schemas.openxmlformats.org/markup-compatibility/2006" xmlns:a14="http://schemas.microsoft.com/office/drawing/2010/main">
+          <mc:Choice Requires="a14">
+            <p:sp>
+              <p:nvSpPr>
+                <p:cNvPr id="92" name="文字方塊 91">
+                  <a:extLst>
+                    <a:ext uri="{FF2B5EF4-FFF2-40B4-BE49-F238E27FC236}">
+                      <a16:creationId xmlns:a16="http://schemas.microsoft.com/office/drawing/2014/main" id="{A535CFE8-1251-45EE-BB8B-E1894B468772}"/>
+                    </a:ext>
+                  </a:extLst>
+                </p:cNvPr>
+                <p:cNvSpPr txBox="1"/>
+                <p:nvPr/>
+              </p:nvSpPr>
+              <p:spPr>
+                <a:xfrm>
+                  <a:off x="-988088" y="945710"/>
+                  <a:ext cx="323386" cy="343171"/>
+                </a:xfrm>
+                <a:prstGeom prst="rect">
+                  <a:avLst/>
+                </a:prstGeom>
+                <a:noFill/>
+              </p:spPr>
+              <p:txBody>
+                <a:bodyPr wrap="square" rtlCol="0">
+                  <a:spAutoFit/>
+                </a:bodyPr>
+                <a:lstStyle/>
+                <a:p>
+                  <a:pPr/>
+                  <a14:m>
+                    <m:oMathPara xmlns:m="http://schemas.openxmlformats.org/officeDocument/2006/math">
+                      <m:oMathParaPr>
+                        <m:jc m:val="centerGroup"/>
+                      </m:oMathParaPr>
+                      <m:oMath xmlns:m="http://schemas.openxmlformats.org/officeDocument/2006/math">
+                        <m:acc>
+                          <m:accPr>
+                            <m:chr m:val="̂"/>
+                            <m:ctrlPr>
+                              <a:rPr lang="en-US" altLang="zh-TW" sz="1630" i="1">
+                                <a:latin typeface="Cambria Math" panose="02040503050406030204" pitchFamily="18" charset="0"/>
+                              </a:rPr>
+                            </m:ctrlPr>
+                          </m:accPr>
+                          <m:e>
+                            <m:r>
+                              <a:rPr lang="en-US" altLang="zh-TW" sz="1630" b="1" i="1">
+                                <a:latin typeface="Cambria Math" panose="02040503050406030204" pitchFamily="18" charset="0"/>
+                              </a:rPr>
+                              <m:t>𝒚</m:t>
+                            </m:r>
+                          </m:e>
+                        </m:acc>
+                      </m:oMath>
+                    </m:oMathPara>
+                  </a14:m>
+                  <a:endParaRPr lang="en-US" altLang="zh-TW" sz="1630" dirty="0">
+                    <a:latin typeface="Times New Roman" panose="02020603050405020304" pitchFamily="18" charset="0"/>
+                    <a:cs typeface="Times New Roman" panose="02020603050405020304" pitchFamily="18" charset="0"/>
+                  </a:endParaRPr>
+                </a:p>
+              </p:txBody>
+            </p:sp>
+          </mc:Choice>
+          <mc:Fallback xmlns="">
+            <p:sp>
+              <p:nvSpPr>
+                <p:cNvPr id="76" name="文字方塊 75">
+                  <a:extLst>
+                    <a:ext uri="{FF2B5EF4-FFF2-40B4-BE49-F238E27FC236}">
+                      <a16:creationId xmlns:a16="http://schemas.microsoft.com/office/drawing/2014/main" id="{DA635BAA-EFD7-435B-BCE4-F0FC3026F2A5}"/>
+                    </a:ext>
+                  </a:extLst>
+                </p:cNvPr>
+                <p:cNvSpPr txBox="1">
+                  <a:spLocks noRot="1" noChangeAspect="1" noMove="1" noResize="1" noEditPoints="1" noAdjustHandles="1" noChangeArrowheads="1" noChangeShapeType="1" noTextEdit="1"/>
+                </p:cNvSpPr>
+                <p:nvPr/>
+              </p:nvSpPr>
+              <p:spPr>
+                <a:xfrm>
+                  <a:off x="-988088" y="945710"/>
+                  <a:ext cx="323386" cy="343171"/>
+                </a:xfrm>
+                <a:prstGeom prst="rect">
+                  <a:avLst/>
+                </a:prstGeom>
+                <a:blipFill>
+                  <a:blip r:embed="rId33"/>
+                  <a:stretch>
+                    <a:fillRect b="-7143"/>
+                  </a:stretch>
+                </a:blipFill>
+              </p:spPr>
+              <p:txBody>
+                <a:bodyPr/>
+                <a:lstStyle/>
+                <a:p>
+                  <a:r>
+                    <a:rPr lang="zh-TW" altLang="en-US">
+                      <a:noFill/>
+                    </a:rPr>
+                    <a:t> </a:t>
+                  </a:r>
+                </a:p>
+              </p:txBody>
+            </p:sp>
+          </mc:Fallback>
+        </mc:AlternateContent>
+        <mc:AlternateContent xmlns:mc="http://schemas.openxmlformats.org/markup-compatibility/2006" xmlns:a14="http://schemas.microsoft.com/office/drawing/2010/main">
+          <mc:Choice Requires="a14">
+            <p:sp>
+              <p:nvSpPr>
+                <p:cNvPr id="95" name="文字方塊 94">
+                  <a:extLst>
+                    <a:ext uri="{FF2B5EF4-FFF2-40B4-BE49-F238E27FC236}">
+                      <a16:creationId xmlns:a16="http://schemas.microsoft.com/office/drawing/2014/main" id="{463C40B9-DE99-4F6D-882C-ECBE1952202D}"/>
+                    </a:ext>
+                  </a:extLst>
+                </p:cNvPr>
+                <p:cNvSpPr txBox="1"/>
+                <p:nvPr/>
+              </p:nvSpPr>
+              <p:spPr>
+                <a:xfrm>
+                  <a:off x="-844998" y="1195151"/>
+                  <a:ext cx="406919" cy="343171"/>
+                </a:xfrm>
+                <a:prstGeom prst="rect">
+                  <a:avLst/>
+                </a:prstGeom>
+                <a:noFill/>
+              </p:spPr>
+              <p:txBody>
+                <a:bodyPr wrap="square" rtlCol="0">
+                  <a:spAutoFit/>
+                </a:bodyPr>
+                <a:lstStyle/>
+                <a:p>
+                  <a:pPr/>
+                  <a14:m>
+                    <m:oMathPara xmlns:m="http://schemas.openxmlformats.org/officeDocument/2006/math">
+                      <m:oMathParaPr>
+                        <m:jc m:val="centerGroup"/>
+                      </m:oMathParaPr>
+                      <m:oMath xmlns:m="http://schemas.openxmlformats.org/officeDocument/2006/math">
+                        <m:acc>
+                          <m:accPr>
+                            <m:chr m:val="̂"/>
+                            <m:ctrlPr>
+                              <a:rPr lang="en-US" altLang="zh-TW" sz="1630" i="1">
+                                <a:latin typeface="Cambria Math" panose="02040503050406030204" pitchFamily="18" charset="0"/>
+                              </a:rPr>
+                            </m:ctrlPr>
+                          </m:accPr>
+                          <m:e>
+                            <m:r>
+                              <a:rPr lang="en-US" altLang="zh-TW" sz="1630" b="1" i="1">
+                                <a:latin typeface="Cambria Math" panose="02040503050406030204" pitchFamily="18" charset="0"/>
+                              </a:rPr>
+                              <m:t>𝒙</m:t>
+                            </m:r>
+                          </m:e>
+                        </m:acc>
+                      </m:oMath>
+                    </m:oMathPara>
+                  </a14:m>
+                  <a:endParaRPr lang="en-US" altLang="zh-TW" sz="1630" dirty="0">
+                    <a:latin typeface="Times New Roman" panose="02020603050405020304" pitchFamily="18" charset="0"/>
+                    <a:cs typeface="Times New Roman" panose="02020603050405020304" pitchFamily="18" charset="0"/>
+                  </a:endParaRPr>
+                </a:p>
+              </p:txBody>
+            </p:sp>
+          </mc:Choice>
+          <mc:Fallback xmlns="">
+            <p:sp>
+              <p:nvSpPr>
+                <p:cNvPr id="77" name="文字方塊 76">
+                  <a:extLst>
+                    <a:ext uri="{FF2B5EF4-FFF2-40B4-BE49-F238E27FC236}">
+                      <a16:creationId xmlns:a16="http://schemas.microsoft.com/office/drawing/2014/main" id="{70E789C9-D068-48AA-8926-92B85661596A}"/>
+                    </a:ext>
+                  </a:extLst>
+                </p:cNvPr>
+                <p:cNvSpPr txBox="1">
+                  <a:spLocks noRot="1" noChangeAspect="1" noMove="1" noResize="1" noEditPoints="1" noAdjustHandles="1" noChangeArrowheads="1" noChangeShapeType="1" noTextEdit="1"/>
+                </p:cNvSpPr>
+                <p:nvPr/>
+              </p:nvSpPr>
+              <p:spPr>
+                <a:xfrm>
+                  <a:off x="-844998" y="1195151"/>
+                  <a:ext cx="406919" cy="343171"/>
+                </a:xfrm>
+                <a:prstGeom prst="rect">
+                  <a:avLst/>
+                </a:prstGeom>
+                <a:blipFill>
+                  <a:blip r:embed="rId34"/>
+                  <a:stretch>
+                    <a:fillRect r="-11940"/>
+                  </a:stretch>
+                </a:blipFill>
+              </p:spPr>
+              <p:txBody>
+                <a:bodyPr/>
+                <a:lstStyle/>
+                <a:p>
+                  <a:r>
+                    <a:rPr lang="zh-TW" altLang="en-US">
+                      <a:noFill/>
+                    </a:rPr>
+                    <a:t> </a:t>
+                  </a:r>
+                </a:p>
+              </p:txBody>
+            </p:sp>
+          </mc:Fallback>
+        </mc:AlternateContent>
+        <p:sp>
+          <p:nvSpPr>
+            <p:cNvPr id="100" name="箭號: 向右 99">
+              <a:extLst>
+                <a:ext uri="{FF2B5EF4-FFF2-40B4-BE49-F238E27FC236}">
+                  <a16:creationId xmlns:a16="http://schemas.microsoft.com/office/drawing/2014/main" id="{B3AB2D38-FC86-4126-A3D7-6A0087F848FE}"/>
+                </a:ext>
+              </a:extLst>
+            </p:cNvPr>
+            <p:cNvSpPr/>
+            <p:nvPr/>
+          </p:nvSpPr>
+          <p:spPr>
+            <a:xfrm>
+              <a:off x="-837092" y="1356364"/>
+              <a:ext cx="92654" cy="27541"/>
+            </a:xfrm>
+            <a:prstGeom prst="rightArrow">
+              <a:avLst>
+                <a:gd name="adj1" fmla="val 50000"/>
+                <a:gd name="adj2" fmla="val 99023"/>
+              </a:avLst>
+            </a:prstGeom>
+            <a:solidFill>
+              <a:schemeClr val="tx1"/>
+            </a:solidFill>
+            <a:ln>
+              <a:solidFill>
+                <a:schemeClr val="tx1"/>
+              </a:solidFill>
+            </a:ln>
+          </p:spPr>
+          <p:style>
+            <a:lnRef idx="2">
+              <a:schemeClr val="dk1">
+                <a:shade val="50000"/>
+              </a:schemeClr>
+            </a:lnRef>
+            <a:fillRef idx="1">
+              <a:schemeClr val="dk1"/>
+            </a:fillRef>
+            <a:effectRef idx="0">
+              <a:schemeClr val="dk1"/>
+            </a:effectRef>
+            <a:fontRef idx="minor">
+              <a:schemeClr val="lt1"/>
+            </a:fontRef>
+          </p:style>
+          <p:txBody>
+            <a:bodyPr rtlCol="0" anchor="ctr"/>
+            <a:lstStyle/>
+            <a:p>
+              <a:pPr algn="ctr"/>
+              <a:endParaRPr lang="zh-TW" altLang="en-US" sz="1630">
+                <a:solidFill>
+                  <a:schemeClr val="tx1"/>
+                </a:solidFill>
+                <a:latin typeface="Times New Roman" panose="02020603050405020304" pitchFamily="18" charset="0"/>
+                <a:cs typeface="Times New Roman" panose="02020603050405020304" pitchFamily="18" charset="0"/>
+              </a:endParaRPr>
+            </a:p>
+          </p:txBody>
+        </p:sp>
+        <p:sp>
+          <p:nvSpPr>
+            <p:cNvPr id="118" name="箭號: 向右 117">
+              <a:extLst>
+                <a:ext uri="{FF2B5EF4-FFF2-40B4-BE49-F238E27FC236}">
+                  <a16:creationId xmlns:a16="http://schemas.microsoft.com/office/drawing/2014/main" id="{B3462263-DD9C-42BC-B36A-8B9B88B1A8C8}"/>
+                </a:ext>
+              </a:extLst>
+            </p:cNvPr>
+            <p:cNvSpPr/>
+            <p:nvPr/>
+          </p:nvSpPr>
+          <p:spPr>
+            <a:xfrm rot="16200000">
+              <a:off x="-877012" y="1316853"/>
+              <a:ext cx="91764" cy="27808"/>
+            </a:xfrm>
+            <a:prstGeom prst="rightArrow">
+              <a:avLst>
+                <a:gd name="adj1" fmla="val 50000"/>
+                <a:gd name="adj2" fmla="val 99023"/>
+              </a:avLst>
+            </a:prstGeom>
+            <a:solidFill>
+              <a:schemeClr val="tx1"/>
+            </a:solidFill>
+            <a:ln>
+              <a:solidFill>
+                <a:schemeClr val="tx1"/>
+              </a:solidFill>
+            </a:ln>
+          </p:spPr>
+          <p:style>
+            <a:lnRef idx="2">
+              <a:schemeClr val="dk1">
+                <a:shade val="50000"/>
+              </a:schemeClr>
+            </a:lnRef>
+            <a:fillRef idx="1">
+              <a:schemeClr val="dk1"/>
+            </a:fillRef>
+            <a:effectRef idx="0">
+              <a:schemeClr val="dk1"/>
+            </a:effectRef>
+            <a:fontRef idx="minor">
+              <a:schemeClr val="lt1"/>
+            </a:fontRef>
+          </p:style>
+          <p:txBody>
+            <a:bodyPr rtlCol="0" anchor="ctr"/>
+            <a:lstStyle/>
+            <a:p>
+              <a:pPr algn="ctr"/>
+              <a:endParaRPr lang="zh-TW" altLang="en-US" sz="1630" dirty="0">
+                <a:solidFill>
+                  <a:schemeClr val="tx1"/>
+                </a:solidFill>
+                <a:latin typeface="Times New Roman" panose="02020603050405020304" pitchFamily="18" charset="0"/>
+                <a:cs typeface="Times New Roman" panose="02020603050405020304" pitchFamily="18" charset="0"/>
+              </a:endParaRPr>
+            </a:p>
+          </p:txBody>
+        </p:sp>
+      </p:grpSp>
+      <p:sp>
+        <p:nvSpPr>
+          <p:cNvPr id="119" name="矩形 118">
+            <a:extLst>
+              <a:ext uri="{FF2B5EF4-FFF2-40B4-BE49-F238E27FC236}">
+                <a16:creationId xmlns:a16="http://schemas.microsoft.com/office/drawing/2014/main" id="{4DFBEE7D-1A45-46FE-8255-F523F7D876CA}"/>
+              </a:ext>
+            </a:extLst>
+          </p:cNvPr>
+          <p:cNvSpPr/>
+          <p:nvPr/>
+        </p:nvSpPr>
+        <p:spPr>
+          <a:xfrm rot="5400000">
+            <a:off x="8717939" y="5159122"/>
+            <a:ext cx="1359668" cy="343171"/>
+          </a:xfrm>
+          <a:prstGeom prst="rect">
+            <a:avLst/>
+          </a:prstGeom>
+        </p:spPr>
+        <p:txBody>
+          <a:bodyPr wrap="none">
+            <a:spAutoFit/>
+          </a:bodyPr>
+          <a:lstStyle/>
+          <a:p>
+            <a:r>
+              <a:rPr lang="en-US" altLang="zh-TW" sz="1630" dirty="0">
+                <a:latin typeface="Times New Roman" panose="02020603050405020304" pitchFamily="18" charset="0"/>
+                <a:cs typeface="Times New Roman" panose="02020603050405020304" pitchFamily="18" charset="0"/>
+              </a:rPr>
+              <a:t>arbitrary units</a:t>
+            </a:r>
+            <a:endParaRPr lang="zh-TW" altLang="en-US" sz="1630" dirty="0">
+              <a:latin typeface="Times New Roman" panose="02020603050405020304" pitchFamily="18" charset="0"/>
+              <a:cs typeface="Times New Roman" panose="02020603050405020304" pitchFamily="18" charset="0"/>
+            </a:endParaRPr>
+          </a:p>
+        </p:txBody>
+      </p:sp>
+      <p:grpSp>
+        <p:nvGrpSpPr>
+          <p:cNvPr id="120" name="群組 119">
+            <a:extLst>
+              <a:ext uri="{FF2B5EF4-FFF2-40B4-BE49-F238E27FC236}">
+                <a16:creationId xmlns:a16="http://schemas.microsoft.com/office/drawing/2014/main" id="{335F656F-FA50-472B-B729-81BF2650313C}"/>
+              </a:ext>
+            </a:extLst>
+          </p:cNvPr>
+          <p:cNvGrpSpPr/>
+          <p:nvPr/>
+        </p:nvGrpSpPr>
+        <p:grpSpPr>
+          <a:xfrm>
+            <a:off x="7121208" y="3766030"/>
+            <a:ext cx="1718308" cy="343171"/>
+            <a:chOff x="10557418" y="6399554"/>
+            <a:chExt cx="2266734" cy="452699"/>
+          </a:xfrm>
+        </p:grpSpPr>
+        <mc:AlternateContent xmlns:mc="http://schemas.openxmlformats.org/markup-compatibility/2006" xmlns:a14="http://schemas.microsoft.com/office/drawing/2010/main">
+          <mc:Choice Requires="a14">
+            <p:sp>
+              <p:nvSpPr>
+                <p:cNvPr id="121" name="矩形 120">
+                  <a:extLst>
+                    <a:ext uri="{FF2B5EF4-FFF2-40B4-BE49-F238E27FC236}">
+                      <a16:creationId xmlns:a16="http://schemas.microsoft.com/office/drawing/2014/main" id="{BF324142-26FB-4303-A2B5-0000DAE79927}"/>
+                    </a:ext>
+                  </a:extLst>
+                </p:cNvPr>
+                <p:cNvSpPr/>
+                <p:nvPr/>
+              </p:nvSpPr>
+              <p:spPr>
+                <a:xfrm>
+                  <a:off x="10995506" y="6399554"/>
+                  <a:ext cx="1828646" cy="452699"/>
+                </a:xfrm>
+                <a:prstGeom prst="rect">
+                  <a:avLst/>
+                </a:prstGeom>
+              </p:spPr>
+              <p:txBody>
+                <a:bodyPr wrap="none">
+                  <a:spAutoFit/>
+                </a:bodyPr>
+                <a:lstStyle/>
+                <a:p>
+                  <a:pPr/>
+                  <a14:m>
+                    <m:oMathPara xmlns:m="http://schemas.openxmlformats.org/officeDocument/2006/math">
+                      <m:oMathParaPr>
+                        <m:jc m:val="centerGroup"/>
+                      </m:oMathParaPr>
+                      <m:oMath xmlns:m="http://schemas.openxmlformats.org/officeDocument/2006/math">
+                        <m:sSubSup>
+                          <m:sSubSupPr>
+                            <m:ctrlPr>
+                              <a:rPr lang="en-US" altLang="zh-TW" sz="1630" i="1">
+                                <a:latin typeface="Cambria Math" panose="02040503050406030204" pitchFamily="18" charset="0"/>
+                              </a:rPr>
+                            </m:ctrlPr>
+                          </m:sSubSupPr>
+                          <m:e>
+                            <m:r>
+                              <a:rPr lang="en-US" altLang="zh-TW" sz="1630" i="1">
+                                <a:latin typeface="Cambria Math" panose="02040503050406030204" pitchFamily="18" charset="0"/>
+                              </a:rPr>
+                              <m:t>𝑊</m:t>
+                            </m:r>
+                          </m:e>
+                          <m:sub>
+                            <m:r>
+                              <a:rPr lang="en-US" altLang="zh-TW" sz="1630" i="1">
+                                <a:latin typeface="Cambria Math" panose="02040503050406030204" pitchFamily="18" charset="0"/>
+                              </a:rPr>
+                              <m:t>0</m:t>
+                            </m:r>
+                          </m:sub>
+                          <m:sup>
+                            <m:r>
+                              <a:rPr lang="en-US" altLang="zh-TW" sz="1630" i="1">
+                                <a:latin typeface="Cambria Math" panose="02040503050406030204" pitchFamily="18" charset="0"/>
+                              </a:rPr>
+                              <m:t> </m:t>
+                            </m:r>
+                          </m:sup>
+                        </m:sSubSup>
+                        <m:r>
+                          <a:rPr lang="en-US" altLang="zh-TW" sz="1630" i="1">
+                            <a:latin typeface="Cambria Math" panose="02040503050406030204" pitchFamily="18" charset="0"/>
+                          </a:rPr>
+                          <m:t>=</m:t>
+                        </m:r>
+                        <m:r>
+                          <a:rPr lang="en-US" altLang="zh-TW" sz="1630" i="1">
+                            <a:latin typeface="Cambria Math" panose="02040503050406030204" pitchFamily="18" charset="0"/>
+                          </a:rPr>
+                          <m:t>1</m:t>
+                        </m:r>
+                        <m:r>
+                          <a:rPr lang="en-US" altLang="zh-TW" sz="1630" i="1">
+                            <a:latin typeface="Cambria Math" panose="02040503050406030204" pitchFamily="18" charset="0"/>
+                          </a:rPr>
+                          <m:t>.</m:t>
+                        </m:r>
+                        <m:r>
+                          <a:rPr lang="en-US" altLang="zh-TW" sz="1630" i="1">
+                            <a:latin typeface="Cambria Math" panose="02040503050406030204" pitchFamily="18" charset="0"/>
+                          </a:rPr>
+                          <m:t>5</m:t>
+                        </m:r>
+                        <m:r>
+                          <a:rPr lang="en-US" altLang="zh-TW" sz="1630" i="1">
+                            <a:latin typeface="Cambria Math" panose="02040503050406030204" pitchFamily="18" charset="0"/>
+                          </a:rPr>
+                          <m:t> </m:t>
+                        </m:r>
+                        <m:r>
+                          <a:rPr lang="en-US" altLang="zh-TW" sz="1630" i="1">
+                            <a:latin typeface="Cambria Math" panose="02040503050406030204" pitchFamily="18" charset="0"/>
+                          </a:rPr>
+                          <m:t>𝜇</m:t>
+                        </m:r>
+                        <m:r>
+                          <m:rPr>
+                            <m:sty m:val="p"/>
+                          </m:rPr>
+                          <a:rPr lang="en-US" altLang="zh-TW" sz="1630">
+                            <a:latin typeface="Cambria Math" panose="02040503050406030204" pitchFamily="18" charset="0"/>
+                          </a:rPr>
+                          <m:t>m</m:t>
+                        </m:r>
+                      </m:oMath>
+                    </m:oMathPara>
+                  </a14:m>
+                  <a:endParaRPr lang="zh-TW" altLang="en-US" sz="1630" dirty="0">
+                    <a:latin typeface="Times New Roman" panose="02020603050405020304" pitchFamily="18" charset="0"/>
+                    <a:cs typeface="Times New Roman" panose="02020603050405020304" pitchFamily="18" charset="0"/>
+                  </a:endParaRPr>
+                </a:p>
+              </p:txBody>
+            </p:sp>
+          </mc:Choice>
+          <mc:Fallback xmlns="">
+            <p:sp>
+              <p:nvSpPr>
+                <p:cNvPr id="6" name="矩形 5">
+                  <a:extLst>
+                    <a:ext uri="{FF2B5EF4-FFF2-40B4-BE49-F238E27FC236}">
+                      <a16:creationId xmlns:a16="http://schemas.microsoft.com/office/drawing/2014/main" id="{33615A92-2488-4DAF-823B-7ACEF3923D24}"/>
+                    </a:ext>
+                  </a:extLst>
+                </p:cNvPr>
+                <p:cNvSpPr>
+                  <a:spLocks noRot="1" noChangeAspect="1" noMove="1" noResize="1" noEditPoints="1" noAdjustHandles="1" noChangeArrowheads="1" noChangeShapeType="1" noTextEdit="1"/>
+                </p:cNvSpPr>
+                <p:nvPr/>
+              </p:nvSpPr>
+              <p:spPr>
+                <a:xfrm>
+                  <a:off x="10995506" y="6399554"/>
+                  <a:ext cx="1828646" cy="452699"/>
+                </a:xfrm>
+                <a:prstGeom prst="rect">
+                  <a:avLst/>
+                </a:prstGeom>
+                <a:blipFill>
+                  <a:blip r:embed="rId5"/>
+                  <a:stretch>
+                    <a:fillRect b="-5263"/>
+                  </a:stretch>
+                </a:blipFill>
+              </p:spPr>
+              <p:txBody>
+                <a:bodyPr/>
+                <a:lstStyle/>
+                <a:p>
+                  <a:r>
+                    <a:rPr lang="zh-TW" altLang="en-US">
+                      <a:noFill/>
+                    </a:rPr>
+                    <a:t> </a:t>
+                  </a:r>
+                </a:p>
+              </p:txBody>
+            </p:sp>
+          </mc:Fallback>
+        </mc:AlternateContent>
+        <p:pic>
+          <p:nvPicPr>
+            <p:cNvPr id="122" name="圖片 121">
+              <a:extLst>
+                <a:ext uri="{FF2B5EF4-FFF2-40B4-BE49-F238E27FC236}">
+                  <a16:creationId xmlns:a16="http://schemas.microsoft.com/office/drawing/2014/main" id="{2611E32E-A1A0-4605-A171-F58183CFCAA7}"/>
+                </a:ext>
+              </a:extLst>
+            </p:cNvPr>
+            <p:cNvPicPr>
+              <a:picLocks noChangeAspect="1"/>
+            </p:cNvPicPr>
+            <p:nvPr/>
+          </p:nvPicPr>
+          <p:blipFill>
+            <a:blip r:embed="rId6">
+              <a:clrChange>
+                <a:clrFrom>
+                  <a:srgbClr val="FFFFFF"/>
+                </a:clrFrom>
+                <a:clrTo>
+                  <a:srgbClr val="FFFFFF">
+                    <a:alpha val="0"/>
+                  </a:srgbClr>
+                </a:clrTo>
+              </a:clrChange>
+            </a:blip>
+            <a:stretch>
+              <a:fillRect/>
+            </a:stretch>
+          </p:blipFill>
+          <p:spPr>
+            <a:xfrm>
+              <a:off x="10557418" y="6619851"/>
+              <a:ext cx="476304" cy="136937"/>
+            </a:xfrm>
+            <a:prstGeom prst="rect">
+              <a:avLst/>
+            </a:prstGeom>
+          </p:spPr>
+        </p:pic>
+      </p:grpSp>
+      <p:pic>
+        <p:nvPicPr>
+          <p:cNvPr id="130" name="圖片 129">
+            <a:extLst>
+              <a:ext uri="{FF2B5EF4-FFF2-40B4-BE49-F238E27FC236}">
+                <a16:creationId xmlns:a16="http://schemas.microsoft.com/office/drawing/2014/main" id="{F555AF0C-3810-4679-8E01-402637068956}"/>
+              </a:ext>
+            </a:extLst>
+          </p:cNvPr>
+          <p:cNvPicPr>
+            <a:picLocks noChangeAspect="1"/>
+          </p:cNvPicPr>
+          <p:nvPr/>
+        </p:nvPicPr>
+        <p:blipFill rotWithShape="1">
+          <a:blip r:embed="rId38">
+            <a:clrChange>
+              <a:clrFrom>
+                <a:srgbClr val="FFFFFF"/>
+              </a:clrFrom>
+              <a:clrTo>
+                <a:srgbClr val="FFFFFF">
+                  <a:alpha val="0"/>
+                </a:srgbClr>
+              </a:clrTo>
+            </a:clrChange>
+            <a:extLst>
+              <a:ext uri="{28A0092B-C50C-407E-A947-70E740481C1C}">
+                <a14:useLocalDpi xmlns:a14="http://schemas.microsoft.com/office/drawing/2010/main" val="0"/>
+              </a:ext>
+            </a:extLst>
+          </a:blip>
+          <a:srcRect l="85053" r="8793"/>
+          <a:stretch/>
+        </p:blipFill>
+        <p:spPr>
+          <a:xfrm>
+            <a:off x="8814665" y="4491074"/>
+            <a:ext cx="609601" cy="1651000"/>
+          </a:xfrm>
+          <a:prstGeom prst="rect">
+            <a:avLst/>
+          </a:prstGeom>
+        </p:spPr>
+      </p:pic>
+      <mc:AlternateContent xmlns:mc="http://schemas.openxmlformats.org/markup-compatibility/2006">
+        <mc:Choice xmlns:a14="http://schemas.microsoft.com/office/drawing/2010/main" Requires="a14">
+          <p:sp>
+            <p:nvSpPr>
+              <p:cNvPr id="148" name="矩形 147">
+                <a:extLst>
+                  <a:ext uri="{FF2B5EF4-FFF2-40B4-BE49-F238E27FC236}">
+                    <a16:creationId xmlns:a16="http://schemas.microsoft.com/office/drawing/2014/main" id="{766A6797-B527-42E4-AAAE-D300A21D06BC}"/>
+                  </a:ext>
+                </a:extLst>
+              </p:cNvPr>
+              <p:cNvSpPr/>
+              <p:nvPr/>
+            </p:nvSpPr>
+            <p:spPr>
+              <a:xfrm>
+                <a:off x="2387758" y="5849802"/>
+                <a:ext cx="889154" cy="343171"/>
+              </a:xfrm>
+              <a:prstGeom prst="rect">
+                <a:avLst/>
+              </a:prstGeom>
+            </p:spPr>
+            <p:txBody>
+              <a:bodyPr wrap="none">
+                <a:spAutoFit/>
+              </a:bodyPr>
+              <a:lstStyle/>
+              <a:p>
+                <a:pPr/>
+                <a14:m>
+                  <m:oMathPara xmlns:m="http://schemas.openxmlformats.org/officeDocument/2006/math">
+                    <m:oMathParaPr>
+                      <m:jc m:val="centerGroup"/>
+                    </m:oMathParaPr>
+                    <m:oMath xmlns:m="http://schemas.openxmlformats.org/officeDocument/2006/math">
+                      <m:r>
+                        <a:rPr lang="en-US" altLang="zh-TW" sz="1630" i="1">
+                          <a:latin typeface="Cambria Math" panose="02040503050406030204" pitchFamily="18" charset="0"/>
+                        </a:rPr>
+                        <m:t>ℓ</m:t>
+                      </m:r>
+                      <m:r>
+                        <a:rPr lang="en-US" altLang="zh-TW" sz="1630" i="1">
+                          <a:latin typeface="Cambria Math" panose="02040503050406030204" pitchFamily="18" charset="0"/>
+                        </a:rPr>
+                        <m:t>=−</m:t>
+                      </m:r>
+                      <m:r>
+                        <a:rPr lang="en-US" altLang="zh-TW" sz="1630" i="1">
+                          <a:latin typeface="Cambria Math" panose="02040503050406030204" pitchFamily="18" charset="0"/>
+                        </a:rPr>
+                        <m:t>2</m:t>
+                      </m:r>
+                    </m:oMath>
+                  </m:oMathPara>
+                </a14:m>
+                <a:endParaRPr lang="zh-TW" altLang="en-US" sz="1630" dirty="0">
+                  <a:latin typeface="Times New Roman" panose="02020603050405020304" pitchFamily="18" charset="0"/>
+                  <a:cs typeface="Times New Roman" panose="02020603050405020304" pitchFamily="18" charset="0"/>
+                </a:endParaRPr>
+              </a:p>
+            </p:txBody>
+          </p:sp>
+        </mc:Choice>
+        <mc:Fallback>
+          <p:sp>
+            <p:nvSpPr>
+              <p:cNvPr id="148" name="矩形 147">
+                <a:extLst>
+                  <a:ext uri="{FF2B5EF4-FFF2-40B4-BE49-F238E27FC236}">
+                    <a16:creationId xmlns:a16="http://schemas.microsoft.com/office/drawing/2014/main" id="{766A6797-B527-42E4-AAAE-D300A21D06BC}"/>
+                  </a:ext>
+                </a:extLst>
+              </p:cNvPr>
+              <p:cNvSpPr>
+                <a:spLocks noRot="1" noChangeAspect="1" noMove="1" noResize="1" noEditPoints="1" noAdjustHandles="1" noChangeArrowheads="1" noChangeShapeType="1" noTextEdit="1"/>
+              </p:cNvSpPr>
+              <p:nvPr/>
+            </p:nvSpPr>
+            <p:spPr>
+              <a:xfrm>
+                <a:off x="2387758" y="5849802"/>
+                <a:ext cx="889154" cy="343171"/>
+              </a:xfrm>
+              <a:prstGeom prst="rect">
+                <a:avLst/>
+              </a:prstGeom>
+              <a:blipFill>
+                <a:blip r:embed="rId39"/>
+                <a:stretch>
+                  <a:fillRect/>
+                </a:stretch>
+              </a:blipFill>
+            </p:spPr>
+            <p:txBody>
+              <a:bodyPr/>
+              <a:lstStyle/>
+              <a:p>
+                <a:r>
+                  <a:rPr lang="zh-TW" altLang="en-US">
+                    <a:noFill/>
+                  </a:rPr>
+                  <a:t> </a:t>
+                </a:r>
+              </a:p>
+            </p:txBody>
+          </p:sp>
+        </mc:Fallback>
+      </mc:AlternateContent>
+      <mc:AlternateContent xmlns:mc="http://schemas.openxmlformats.org/markup-compatibility/2006">
+        <mc:Choice xmlns:a14="http://schemas.microsoft.com/office/drawing/2010/main" Requires="a14">
+          <p:sp>
+            <p:nvSpPr>
+              <p:cNvPr id="149" name="矩形 148">
+                <a:extLst>
+                  <a:ext uri="{FF2B5EF4-FFF2-40B4-BE49-F238E27FC236}">
+                    <a16:creationId xmlns:a16="http://schemas.microsoft.com/office/drawing/2014/main" id="{45D33A5D-2041-49C7-B8E4-FC63B6CA6197}"/>
+                  </a:ext>
+                </a:extLst>
+              </p:cNvPr>
+              <p:cNvSpPr/>
+              <p:nvPr/>
+            </p:nvSpPr>
+            <p:spPr>
+              <a:xfrm>
+                <a:off x="3800433" y="5849802"/>
+                <a:ext cx="889154" cy="343171"/>
+              </a:xfrm>
+              <a:prstGeom prst="rect">
+                <a:avLst/>
+              </a:prstGeom>
+            </p:spPr>
+            <p:txBody>
+              <a:bodyPr wrap="none">
+                <a:spAutoFit/>
+              </a:bodyPr>
+              <a:lstStyle/>
+              <a:p>
+                <a:pPr/>
+                <a14:m>
+                  <m:oMathPara xmlns:m="http://schemas.openxmlformats.org/officeDocument/2006/math">
+                    <m:oMathParaPr>
+                      <m:jc m:val="centerGroup"/>
+                    </m:oMathParaPr>
+                    <m:oMath xmlns:m="http://schemas.openxmlformats.org/officeDocument/2006/math">
+                      <m:r>
+                        <a:rPr lang="en-US" altLang="zh-TW" sz="1630" i="1">
+                          <a:latin typeface="Cambria Math" panose="02040503050406030204" pitchFamily="18" charset="0"/>
+                        </a:rPr>
+                        <m:t>ℓ</m:t>
+                      </m:r>
+                      <m:r>
+                        <a:rPr lang="en-US" altLang="zh-TW" sz="1630" i="1">
+                          <a:latin typeface="Cambria Math" panose="02040503050406030204" pitchFamily="18" charset="0"/>
+                        </a:rPr>
+                        <m:t>=−</m:t>
+                      </m:r>
+                      <m:r>
+                        <a:rPr lang="en-US" altLang="zh-TW" sz="1630" i="1">
+                          <a:latin typeface="Cambria Math" panose="02040503050406030204" pitchFamily="18" charset="0"/>
+                        </a:rPr>
+                        <m:t>1</m:t>
+                      </m:r>
+                    </m:oMath>
+                  </m:oMathPara>
+                </a14:m>
+                <a:endParaRPr lang="zh-TW" altLang="en-US" sz="1630" dirty="0">
+                  <a:latin typeface="Times New Roman" panose="02020603050405020304" pitchFamily="18" charset="0"/>
+                  <a:cs typeface="Times New Roman" panose="02020603050405020304" pitchFamily="18" charset="0"/>
+                </a:endParaRPr>
+              </a:p>
+            </p:txBody>
+          </p:sp>
+        </mc:Choice>
+        <mc:Fallback>
+          <p:sp>
+            <p:nvSpPr>
+              <p:cNvPr id="149" name="矩形 148">
+                <a:extLst>
+                  <a:ext uri="{FF2B5EF4-FFF2-40B4-BE49-F238E27FC236}">
+                    <a16:creationId xmlns:a16="http://schemas.microsoft.com/office/drawing/2014/main" id="{45D33A5D-2041-49C7-B8E4-FC63B6CA6197}"/>
+                  </a:ext>
+                </a:extLst>
+              </p:cNvPr>
+              <p:cNvSpPr>
+                <a:spLocks noRot="1" noChangeAspect="1" noMove="1" noResize="1" noEditPoints="1" noAdjustHandles="1" noChangeArrowheads="1" noChangeShapeType="1" noTextEdit="1"/>
+              </p:cNvSpPr>
+              <p:nvPr/>
+            </p:nvSpPr>
+            <p:spPr>
+              <a:xfrm>
+                <a:off x="3800433" y="5849802"/>
+                <a:ext cx="889154" cy="343171"/>
+              </a:xfrm>
+              <a:prstGeom prst="rect">
+                <a:avLst/>
+              </a:prstGeom>
+              <a:blipFill>
+                <a:blip r:embed="rId40"/>
+                <a:stretch>
+                  <a:fillRect/>
+                </a:stretch>
+              </a:blipFill>
+            </p:spPr>
+            <p:txBody>
+              <a:bodyPr/>
+              <a:lstStyle/>
+              <a:p>
+                <a:r>
+                  <a:rPr lang="zh-TW" altLang="en-US">
+                    <a:noFill/>
+                  </a:rPr>
+                  <a:t> </a:t>
+                </a:r>
+              </a:p>
+            </p:txBody>
+          </p:sp>
+        </mc:Fallback>
+      </mc:AlternateContent>
+      <mc:AlternateContent xmlns:mc="http://schemas.openxmlformats.org/markup-compatibility/2006">
+        <mc:Choice xmlns:a14="http://schemas.microsoft.com/office/drawing/2010/main" Requires="a14">
+          <p:sp>
+            <p:nvSpPr>
+              <p:cNvPr id="150" name="矩形 149">
+                <a:extLst>
+                  <a:ext uri="{FF2B5EF4-FFF2-40B4-BE49-F238E27FC236}">
+                    <a16:creationId xmlns:a16="http://schemas.microsoft.com/office/drawing/2014/main" id="{1A03566F-34DE-4C4D-B70A-2359579CE0E3}"/>
+                  </a:ext>
+                </a:extLst>
+              </p:cNvPr>
+              <p:cNvSpPr/>
+              <p:nvPr/>
+            </p:nvSpPr>
+            <p:spPr>
+              <a:xfrm>
+                <a:off x="5213108" y="5849802"/>
+                <a:ext cx="733662" cy="343171"/>
+              </a:xfrm>
+              <a:prstGeom prst="rect">
+                <a:avLst/>
+              </a:prstGeom>
+            </p:spPr>
+            <p:txBody>
+              <a:bodyPr wrap="none">
+                <a:spAutoFit/>
+              </a:bodyPr>
+              <a:lstStyle/>
+              <a:p>
+                <a:pPr/>
+                <a14:m>
+                  <m:oMathPara xmlns:m="http://schemas.openxmlformats.org/officeDocument/2006/math">
+                    <m:oMathParaPr>
+                      <m:jc m:val="centerGroup"/>
+                    </m:oMathParaPr>
+                    <m:oMath xmlns:m="http://schemas.openxmlformats.org/officeDocument/2006/math">
+                      <m:r>
+                        <a:rPr lang="en-US" altLang="zh-TW" sz="1630" i="1">
+                          <a:latin typeface="Cambria Math" panose="02040503050406030204" pitchFamily="18" charset="0"/>
+                        </a:rPr>
+                        <m:t>ℓ</m:t>
+                      </m:r>
+                      <m:r>
+                        <a:rPr lang="en-US" altLang="zh-TW" sz="1630" i="1">
+                          <a:latin typeface="Cambria Math" panose="02040503050406030204" pitchFamily="18" charset="0"/>
+                        </a:rPr>
+                        <m:t>=</m:t>
+                      </m:r>
+                      <m:r>
+                        <a:rPr lang="en-US" altLang="zh-TW" sz="1630" i="1">
+                          <a:latin typeface="Cambria Math" panose="02040503050406030204" pitchFamily="18" charset="0"/>
+                        </a:rPr>
+                        <m:t>0</m:t>
+                      </m:r>
+                    </m:oMath>
+                  </m:oMathPara>
+                </a14:m>
+                <a:endParaRPr lang="zh-TW" altLang="en-US" sz="1630" dirty="0">
+                  <a:latin typeface="Times New Roman" panose="02020603050405020304" pitchFamily="18" charset="0"/>
+                  <a:cs typeface="Times New Roman" panose="02020603050405020304" pitchFamily="18" charset="0"/>
+                </a:endParaRPr>
+              </a:p>
+            </p:txBody>
+          </p:sp>
+        </mc:Choice>
+        <mc:Fallback>
+          <p:sp>
+            <p:nvSpPr>
+              <p:cNvPr id="150" name="矩形 149">
+                <a:extLst>
+                  <a:ext uri="{FF2B5EF4-FFF2-40B4-BE49-F238E27FC236}">
+                    <a16:creationId xmlns:a16="http://schemas.microsoft.com/office/drawing/2014/main" id="{1A03566F-34DE-4C4D-B70A-2359579CE0E3}"/>
+                  </a:ext>
+                </a:extLst>
+              </p:cNvPr>
+              <p:cNvSpPr>
+                <a:spLocks noRot="1" noChangeAspect="1" noMove="1" noResize="1" noEditPoints="1" noAdjustHandles="1" noChangeArrowheads="1" noChangeShapeType="1" noTextEdit="1"/>
+              </p:cNvSpPr>
+              <p:nvPr/>
+            </p:nvSpPr>
+            <p:spPr>
+              <a:xfrm>
+                <a:off x="5213108" y="5849802"/>
+                <a:ext cx="733662" cy="343171"/>
+              </a:xfrm>
+              <a:prstGeom prst="rect">
+                <a:avLst/>
+              </a:prstGeom>
+              <a:blipFill>
+                <a:blip r:embed="rId41"/>
+                <a:stretch>
+                  <a:fillRect/>
+                </a:stretch>
+              </a:blipFill>
+            </p:spPr>
+            <p:txBody>
+              <a:bodyPr/>
+              <a:lstStyle/>
+              <a:p>
+                <a:r>
+                  <a:rPr lang="zh-TW" altLang="en-US">
+                    <a:noFill/>
+                  </a:rPr>
+                  <a:t> </a:t>
+                </a:r>
+              </a:p>
+            </p:txBody>
+          </p:sp>
+        </mc:Fallback>
+      </mc:AlternateContent>
+      <mc:AlternateContent xmlns:mc="http://schemas.openxmlformats.org/markup-compatibility/2006">
+        <mc:Choice xmlns:a14="http://schemas.microsoft.com/office/drawing/2010/main" Requires="a14">
+          <p:sp>
+            <p:nvSpPr>
+              <p:cNvPr id="151" name="矩形 150">
+                <a:extLst>
+                  <a:ext uri="{FF2B5EF4-FFF2-40B4-BE49-F238E27FC236}">
+                    <a16:creationId xmlns:a16="http://schemas.microsoft.com/office/drawing/2014/main" id="{42BD8D82-DCE9-4560-A18D-E0990D1AA76E}"/>
+                  </a:ext>
+                </a:extLst>
+              </p:cNvPr>
+              <p:cNvSpPr/>
+              <p:nvPr/>
+            </p:nvSpPr>
+            <p:spPr>
+              <a:xfrm>
+                <a:off x="6470291" y="5849802"/>
+                <a:ext cx="733662" cy="343171"/>
+              </a:xfrm>
+              <a:prstGeom prst="rect">
+                <a:avLst/>
+              </a:prstGeom>
+            </p:spPr>
+            <p:txBody>
+              <a:bodyPr wrap="none">
+                <a:spAutoFit/>
+              </a:bodyPr>
+              <a:lstStyle/>
+              <a:p>
+                <a:pPr/>
+                <a14:m>
+                  <m:oMathPara xmlns:m="http://schemas.openxmlformats.org/officeDocument/2006/math">
+                    <m:oMathParaPr>
+                      <m:jc m:val="centerGroup"/>
+                    </m:oMathParaPr>
+                    <m:oMath xmlns:m="http://schemas.openxmlformats.org/officeDocument/2006/math">
+                      <m:r>
+                        <a:rPr lang="en-US" altLang="zh-TW" sz="1630" i="1">
+                          <a:latin typeface="Cambria Math" panose="02040503050406030204" pitchFamily="18" charset="0"/>
+                        </a:rPr>
+                        <m:t>ℓ</m:t>
+                      </m:r>
+                      <m:r>
+                        <a:rPr lang="en-US" altLang="zh-TW" sz="1630" i="1">
+                          <a:latin typeface="Cambria Math" panose="02040503050406030204" pitchFamily="18" charset="0"/>
+                        </a:rPr>
+                        <m:t>=</m:t>
+                      </m:r>
+                      <m:r>
+                        <a:rPr lang="en-US" altLang="zh-TW" sz="1630" i="1">
+                          <a:latin typeface="Cambria Math" panose="02040503050406030204" pitchFamily="18" charset="0"/>
+                        </a:rPr>
+                        <m:t>1</m:t>
+                      </m:r>
+                    </m:oMath>
+                  </m:oMathPara>
+                </a14:m>
+                <a:endParaRPr lang="zh-TW" altLang="en-US" sz="1630" dirty="0">
+                  <a:latin typeface="Times New Roman" panose="02020603050405020304" pitchFamily="18" charset="0"/>
+                  <a:cs typeface="Times New Roman" panose="02020603050405020304" pitchFamily="18" charset="0"/>
+                </a:endParaRPr>
+              </a:p>
+            </p:txBody>
+          </p:sp>
+        </mc:Choice>
+        <mc:Fallback>
+          <p:sp>
+            <p:nvSpPr>
+              <p:cNvPr id="151" name="矩形 150">
+                <a:extLst>
+                  <a:ext uri="{FF2B5EF4-FFF2-40B4-BE49-F238E27FC236}">
+                    <a16:creationId xmlns:a16="http://schemas.microsoft.com/office/drawing/2014/main" id="{42BD8D82-DCE9-4560-A18D-E0990D1AA76E}"/>
+                  </a:ext>
+                </a:extLst>
+              </p:cNvPr>
+              <p:cNvSpPr>
+                <a:spLocks noRot="1" noChangeAspect="1" noMove="1" noResize="1" noEditPoints="1" noAdjustHandles="1" noChangeArrowheads="1" noChangeShapeType="1" noTextEdit="1"/>
+              </p:cNvSpPr>
+              <p:nvPr/>
+            </p:nvSpPr>
+            <p:spPr>
+              <a:xfrm>
+                <a:off x="6470291" y="5849802"/>
+                <a:ext cx="733662" cy="343171"/>
+              </a:xfrm>
+              <a:prstGeom prst="rect">
+                <a:avLst/>
+              </a:prstGeom>
+              <a:blipFill>
+                <a:blip r:embed="rId42"/>
+                <a:stretch>
+                  <a:fillRect/>
+                </a:stretch>
+              </a:blipFill>
+            </p:spPr>
+            <p:txBody>
+              <a:bodyPr/>
+              <a:lstStyle/>
+              <a:p>
+                <a:r>
+                  <a:rPr lang="zh-TW" altLang="en-US">
+                    <a:noFill/>
+                  </a:rPr>
+                  <a:t> </a:t>
+                </a:r>
+              </a:p>
+            </p:txBody>
+          </p:sp>
+        </mc:Fallback>
+      </mc:AlternateContent>
+      <mc:AlternateContent xmlns:mc="http://schemas.openxmlformats.org/markup-compatibility/2006">
+        <mc:Choice xmlns:a14="http://schemas.microsoft.com/office/drawing/2010/main" Requires="a14">
+          <p:sp>
+            <p:nvSpPr>
+              <p:cNvPr id="152" name="矩形 151">
+                <a:extLst>
+                  <a:ext uri="{FF2B5EF4-FFF2-40B4-BE49-F238E27FC236}">
+                    <a16:creationId xmlns:a16="http://schemas.microsoft.com/office/drawing/2014/main" id="{4C33AF4E-9F38-497C-ADDC-B3D40E9CE7FD}"/>
+                  </a:ext>
+                </a:extLst>
+              </p:cNvPr>
+              <p:cNvSpPr/>
+              <p:nvPr/>
+            </p:nvSpPr>
+            <p:spPr>
+              <a:xfrm>
+                <a:off x="7727474" y="5849802"/>
+                <a:ext cx="733662" cy="343171"/>
+              </a:xfrm>
+              <a:prstGeom prst="rect">
+                <a:avLst/>
+              </a:prstGeom>
+            </p:spPr>
+            <p:txBody>
+              <a:bodyPr wrap="none">
+                <a:spAutoFit/>
+              </a:bodyPr>
+              <a:lstStyle/>
+              <a:p>
+                <a:pPr/>
+                <a14:m>
+                  <m:oMathPara xmlns:m="http://schemas.openxmlformats.org/officeDocument/2006/math">
+                    <m:oMathParaPr>
+                      <m:jc m:val="centerGroup"/>
+                    </m:oMathParaPr>
+                    <m:oMath xmlns:m="http://schemas.openxmlformats.org/officeDocument/2006/math">
+                      <m:r>
+                        <a:rPr lang="en-US" altLang="zh-TW" sz="1630" i="1">
+                          <a:latin typeface="Cambria Math" panose="02040503050406030204" pitchFamily="18" charset="0"/>
+                        </a:rPr>
+                        <m:t>ℓ</m:t>
+                      </m:r>
+                      <m:r>
+                        <a:rPr lang="en-US" altLang="zh-TW" sz="1630" i="1">
+                          <a:latin typeface="Cambria Math" panose="02040503050406030204" pitchFamily="18" charset="0"/>
+                        </a:rPr>
+                        <m:t>=</m:t>
+                      </m:r>
+                      <m:r>
+                        <a:rPr lang="en-US" altLang="zh-TW" sz="1630" i="1">
+                          <a:latin typeface="Cambria Math" panose="02040503050406030204" pitchFamily="18" charset="0"/>
+                        </a:rPr>
+                        <m:t>2</m:t>
+                      </m:r>
+                    </m:oMath>
+                  </m:oMathPara>
+                </a14:m>
+                <a:endParaRPr lang="zh-TW" altLang="en-US" sz="1630" dirty="0">
+                  <a:latin typeface="Times New Roman" panose="02020603050405020304" pitchFamily="18" charset="0"/>
+                  <a:cs typeface="Times New Roman" panose="02020603050405020304" pitchFamily="18" charset="0"/>
+                </a:endParaRPr>
+              </a:p>
+            </p:txBody>
+          </p:sp>
+        </mc:Choice>
+        <mc:Fallback>
+          <p:sp>
+            <p:nvSpPr>
+              <p:cNvPr id="152" name="矩形 151">
+                <a:extLst>
+                  <a:ext uri="{FF2B5EF4-FFF2-40B4-BE49-F238E27FC236}">
+                    <a16:creationId xmlns:a16="http://schemas.microsoft.com/office/drawing/2014/main" id="{4C33AF4E-9F38-497C-ADDC-B3D40E9CE7FD}"/>
+                  </a:ext>
+                </a:extLst>
+              </p:cNvPr>
+              <p:cNvSpPr>
+                <a:spLocks noRot="1" noChangeAspect="1" noMove="1" noResize="1" noEditPoints="1" noAdjustHandles="1" noChangeArrowheads="1" noChangeShapeType="1" noTextEdit="1"/>
+              </p:cNvSpPr>
+              <p:nvPr/>
+            </p:nvSpPr>
+            <p:spPr>
+              <a:xfrm>
+                <a:off x="7727474" y="5849802"/>
+                <a:ext cx="733662" cy="343171"/>
+              </a:xfrm>
+              <a:prstGeom prst="rect">
+                <a:avLst/>
+              </a:prstGeom>
+              <a:blipFill>
+                <a:blip r:embed="rId43"/>
+                <a:stretch>
+                  <a:fillRect/>
+                </a:stretch>
+              </a:blipFill>
+            </p:spPr>
+            <p:txBody>
+              <a:bodyPr/>
+              <a:lstStyle/>
+              <a:p>
+                <a:r>
+                  <a:rPr lang="zh-TW" altLang="en-US">
+                    <a:noFill/>
+                  </a:rPr>
+                  <a:t> </a:t>
+                </a:r>
+              </a:p>
+            </p:txBody>
+          </p:sp>
+        </mc:Fallback>
+      </mc:AlternateContent>
+      <p:pic>
+        <p:nvPicPr>
+          <p:cNvPr id="50" name="圖片 49">
+            <a:extLst>
+              <a:ext uri="{FF2B5EF4-FFF2-40B4-BE49-F238E27FC236}">
+                <a16:creationId xmlns:a16="http://schemas.microsoft.com/office/drawing/2014/main" id="{9941990F-EDFD-42E2-BC7D-65C32F7AA87E}"/>
+              </a:ext>
+            </a:extLst>
+          </p:cNvPr>
+          <p:cNvPicPr>
+            <a:picLocks noChangeAspect="1"/>
+          </p:cNvPicPr>
+          <p:nvPr/>
+        </p:nvPicPr>
+        <p:blipFill rotWithShape="1">
+          <a:blip r:embed="rId2">
+            <a:clrChange>
+              <a:clrFrom>
+                <a:srgbClr val="FFFFFF"/>
+              </a:clrFrom>
+              <a:clrTo>
+                <a:srgbClr val="FFFFFF">
+                  <a:alpha val="0"/>
+                </a:srgbClr>
+              </a:clrTo>
+            </a:clrChange>
+            <a:extLst>
+              <a:ext uri="{28A0092B-C50C-407E-A947-70E740481C1C}">
+                <a14:useLocalDpi xmlns:a14="http://schemas.microsoft.com/office/drawing/2010/main" val="0"/>
+              </a:ext>
+            </a:extLst>
+          </a:blip>
+          <a:srcRect l="17332" r="67529"/>
+          <a:stretch/>
+        </p:blipFill>
+        <p:spPr>
+          <a:xfrm>
+            <a:off x="3264963" y="1967582"/>
+            <a:ext cx="1539683" cy="1695008"/>
+          </a:xfrm>
+          <a:prstGeom prst="rect">
+            <a:avLst/>
+          </a:prstGeom>
+        </p:spPr>
+      </p:pic>
+      <p:pic>
+        <p:nvPicPr>
+          <p:cNvPr id="51" name="圖片 50">
+            <a:extLst>
+              <a:ext uri="{FF2B5EF4-FFF2-40B4-BE49-F238E27FC236}">
+                <a16:creationId xmlns:a16="http://schemas.microsoft.com/office/drawing/2014/main" id="{07CF85F5-38E3-4CC9-86B5-74E2A83EDCE9}"/>
+              </a:ext>
+            </a:extLst>
+          </p:cNvPr>
+          <p:cNvPicPr>
+            <a:picLocks noChangeAspect="1"/>
+          </p:cNvPicPr>
+          <p:nvPr/>
+        </p:nvPicPr>
+        <p:blipFill rotWithShape="1">
+          <a:blip r:embed="rId3">
+            <a:clrChange>
+              <a:clrFrom>
+                <a:srgbClr val="FFFFFF"/>
+              </a:clrFrom>
+              <a:clrTo>
+                <a:srgbClr val="FFFFFF">
+                  <a:alpha val="0"/>
+                </a:srgbClr>
+              </a:clrTo>
+            </a:clrChange>
+            <a:extLst>
+              <a:ext uri="{28A0092B-C50C-407E-A947-70E740481C1C}">
+                <a14:useLocalDpi xmlns:a14="http://schemas.microsoft.com/office/drawing/2010/main" val="0"/>
+              </a:ext>
+            </a:extLst>
+          </a:blip>
+          <a:srcRect l="17225" r="67421"/>
+          <a:stretch/>
+        </p:blipFill>
+        <p:spPr>
+          <a:xfrm>
+            <a:off x="3340414" y="4392014"/>
+            <a:ext cx="1469205" cy="1594800"/>
+          </a:xfrm>
+          <a:prstGeom prst="rect">
+            <a:avLst/>
+          </a:prstGeom>
+        </p:spPr>
+      </p:pic>
+      <p:pic>
+        <p:nvPicPr>
+          <p:cNvPr id="52" name="圖片 51">
+            <a:extLst>
+              <a:ext uri="{FF2B5EF4-FFF2-40B4-BE49-F238E27FC236}">
+                <a16:creationId xmlns:a16="http://schemas.microsoft.com/office/drawing/2014/main" id="{80805C89-A09B-4AD9-A6CA-D73D43ED32F6}"/>
+              </a:ext>
+            </a:extLst>
+          </p:cNvPr>
+          <p:cNvPicPr>
+            <a:picLocks noChangeAspect="1"/>
+          </p:cNvPicPr>
+          <p:nvPr/>
+        </p:nvPicPr>
+        <p:blipFill rotWithShape="1">
+          <a:blip r:embed="rId4">
+            <a:clrChange>
+              <a:clrFrom>
+                <a:srgbClr val="FFFFFF"/>
+              </a:clrFrom>
+              <a:clrTo>
+                <a:srgbClr val="FFFFFF">
+                  <a:alpha val="0"/>
+                </a:srgbClr>
+              </a:clrTo>
+            </a:clrChange>
+            <a:extLst>
+              <a:ext uri="{28A0092B-C50C-407E-A947-70E740481C1C}">
+                <a14:useLocalDpi xmlns:a14="http://schemas.microsoft.com/office/drawing/2010/main" val="0"/>
+              </a:ext>
+            </a:extLst>
+          </a:blip>
+          <a:srcRect l="17869" r="68173"/>
+          <a:stretch/>
+        </p:blipFill>
+        <p:spPr>
+          <a:xfrm>
+            <a:off x="3316335" y="356049"/>
+            <a:ext cx="1419564" cy="1695009"/>
+          </a:xfrm>
+          <a:prstGeom prst="rect">
+            <a:avLst/>
+          </a:prstGeom>
+        </p:spPr>
+      </p:pic>
+      <p:pic>
+        <p:nvPicPr>
+          <p:cNvPr id="53" name="圖片 52">
+            <a:extLst>
+              <a:ext uri="{FF2B5EF4-FFF2-40B4-BE49-F238E27FC236}">
+                <a16:creationId xmlns:a16="http://schemas.microsoft.com/office/drawing/2014/main" id="{919D1125-A4A7-42D9-9B8A-E98DA487BA19}"/>
+              </a:ext>
+            </a:extLst>
+          </p:cNvPr>
+          <p:cNvPicPr>
+            <a:picLocks noChangeAspect="1"/>
+          </p:cNvPicPr>
+          <p:nvPr/>
+        </p:nvPicPr>
+        <p:blipFill rotWithShape="1">
+          <a:blip r:embed="rId2">
+            <a:clrChange>
+              <a:clrFrom>
+                <a:srgbClr val="FFFFFF"/>
+              </a:clrFrom>
+              <a:clrTo>
+                <a:srgbClr val="FFFFFF">
+                  <a:alpha val="0"/>
+                </a:srgbClr>
+              </a:clrTo>
+            </a:clrChange>
+            <a:extLst>
+              <a:ext uri="{28A0092B-C50C-407E-A947-70E740481C1C}">
+                <a14:useLocalDpi xmlns:a14="http://schemas.microsoft.com/office/drawing/2010/main" val="0"/>
+              </a:ext>
+            </a:extLst>
+          </a:blip>
+          <a:srcRect l="34297" r="51208"/>
+          <a:stretch/>
+        </p:blipFill>
+        <p:spPr>
+          <a:xfrm>
+            <a:off x="4652297" y="1967580"/>
+            <a:ext cx="1474164" cy="1695009"/>
+          </a:xfrm>
+          <a:prstGeom prst="rect">
+            <a:avLst/>
+          </a:prstGeom>
+        </p:spPr>
+      </p:pic>
+      <p:pic>
+        <p:nvPicPr>
+          <p:cNvPr id="67" name="圖片 66">
+            <a:extLst>
+              <a:ext uri="{FF2B5EF4-FFF2-40B4-BE49-F238E27FC236}">
+                <a16:creationId xmlns:a16="http://schemas.microsoft.com/office/drawing/2014/main" id="{114EAB8A-0921-43D1-B60E-A77DC6CA3489}"/>
+              </a:ext>
+            </a:extLst>
+          </p:cNvPr>
+          <p:cNvPicPr>
+            <a:picLocks noChangeAspect="1"/>
+          </p:cNvPicPr>
+          <p:nvPr/>
+        </p:nvPicPr>
+        <p:blipFill rotWithShape="1">
+          <a:blip r:embed="rId3">
+            <a:clrChange>
+              <a:clrFrom>
+                <a:srgbClr val="FFFFFF"/>
+              </a:clrFrom>
+              <a:clrTo>
+                <a:srgbClr val="FFFFFF">
+                  <a:alpha val="0"/>
+                </a:srgbClr>
+              </a:clrTo>
+            </a:clrChange>
+            <a:extLst>
+              <a:ext uri="{28A0092B-C50C-407E-A947-70E740481C1C}">
+                <a14:useLocalDpi xmlns:a14="http://schemas.microsoft.com/office/drawing/2010/main" val="0"/>
+              </a:ext>
+            </a:extLst>
+          </a:blip>
+          <a:srcRect l="34190" r="50564"/>
+          <a:stretch/>
+        </p:blipFill>
+        <p:spPr>
+          <a:xfrm>
+            <a:off x="4699173" y="4392014"/>
+            <a:ext cx="1458930" cy="1594800"/>
+          </a:xfrm>
+          <a:prstGeom prst="rect">
+            <a:avLst/>
+          </a:prstGeom>
+        </p:spPr>
+      </p:pic>
+      <p:pic>
+        <p:nvPicPr>
+          <p:cNvPr id="76" name="圖片 75">
+            <a:extLst>
+              <a:ext uri="{FF2B5EF4-FFF2-40B4-BE49-F238E27FC236}">
+                <a16:creationId xmlns:a16="http://schemas.microsoft.com/office/drawing/2014/main" id="{5A582E73-AA70-49B8-B03E-0CF3D8C1442F}"/>
+              </a:ext>
+            </a:extLst>
+          </p:cNvPr>
+          <p:cNvPicPr>
+            <a:picLocks noChangeAspect="1"/>
+          </p:cNvPicPr>
+          <p:nvPr/>
+        </p:nvPicPr>
+        <p:blipFill rotWithShape="1">
+          <a:blip r:embed="rId4">
+            <a:clrChange>
+              <a:clrFrom>
+                <a:srgbClr val="FFFFFF"/>
+              </a:clrFrom>
+              <a:clrTo>
+                <a:srgbClr val="FFFFFF">
+                  <a:alpha val="0"/>
+                </a:srgbClr>
+              </a:clrTo>
+            </a:clrChange>
+            <a:extLst>
+              <a:ext uri="{28A0092B-C50C-407E-A947-70E740481C1C}">
+                <a14:useLocalDpi xmlns:a14="http://schemas.microsoft.com/office/drawing/2010/main" val="0"/>
+              </a:ext>
+            </a:extLst>
+          </a:blip>
+          <a:srcRect l="34727" r="51100"/>
+          <a:stretch/>
+        </p:blipFill>
+        <p:spPr>
+          <a:xfrm>
+            <a:off x="4702916" y="356049"/>
+            <a:ext cx="1441405" cy="1695009"/>
+          </a:xfrm>
+          <a:prstGeom prst="rect">
+            <a:avLst/>
+          </a:prstGeom>
+        </p:spPr>
+      </p:pic>
+      <p:pic>
+        <p:nvPicPr>
+          <p:cNvPr id="85" name="圖片 84">
+            <a:extLst>
+              <a:ext uri="{FF2B5EF4-FFF2-40B4-BE49-F238E27FC236}">
+                <a16:creationId xmlns:a16="http://schemas.microsoft.com/office/drawing/2014/main" id="{66B8A3C7-F5DC-40CE-9E13-D42A0E9B7082}"/>
+              </a:ext>
+            </a:extLst>
+          </p:cNvPr>
+          <p:cNvPicPr>
+            <a:picLocks noChangeAspect="1"/>
+          </p:cNvPicPr>
+          <p:nvPr/>
+        </p:nvPicPr>
+        <p:blipFill rotWithShape="1">
+          <a:blip r:embed="rId2">
+            <a:clrChange>
+              <a:clrFrom>
+                <a:srgbClr val="FFFFFF"/>
+              </a:clrFrom>
+              <a:clrTo>
+                <a:srgbClr val="FFFFFF">
+                  <a:alpha val="0"/>
+                </a:srgbClr>
+              </a:clrTo>
+            </a:clrChange>
+            <a:extLst>
+              <a:ext uri="{28A0092B-C50C-407E-A947-70E740481C1C}">
+                <a14:useLocalDpi xmlns:a14="http://schemas.microsoft.com/office/drawing/2010/main" val="0"/>
+              </a:ext>
+            </a:extLst>
+          </a:blip>
+          <a:srcRect l="51262" r="34350"/>
+          <a:stretch/>
+        </p:blipFill>
+        <p:spPr>
+          <a:xfrm>
+            <a:off x="6047335" y="1967580"/>
+            <a:ext cx="1463244" cy="1695009"/>
+          </a:xfrm>
+          <a:prstGeom prst="rect">
+            <a:avLst/>
+          </a:prstGeom>
+        </p:spPr>
+      </p:pic>
+      <p:pic>
+        <p:nvPicPr>
+          <p:cNvPr id="86" name="圖片 85">
+            <a:extLst>
+              <a:ext uri="{FF2B5EF4-FFF2-40B4-BE49-F238E27FC236}">
+                <a16:creationId xmlns:a16="http://schemas.microsoft.com/office/drawing/2014/main" id="{219885DD-657C-4804-8CF3-431012488BAF}"/>
+              </a:ext>
+            </a:extLst>
+          </p:cNvPr>
+          <p:cNvPicPr>
+            <a:picLocks noChangeAspect="1"/>
+          </p:cNvPicPr>
+          <p:nvPr/>
+        </p:nvPicPr>
+        <p:blipFill rotWithShape="1">
+          <a:blip r:embed="rId3">
+            <a:clrChange>
+              <a:clrFrom>
+                <a:srgbClr val="FFFFFF"/>
+              </a:clrFrom>
+              <a:clrTo>
+                <a:srgbClr val="FFFFFF">
+                  <a:alpha val="0"/>
+                </a:srgbClr>
+              </a:clrTo>
+            </a:clrChange>
+            <a:extLst>
+              <a:ext uri="{28A0092B-C50C-407E-A947-70E740481C1C}">
+                <a14:useLocalDpi xmlns:a14="http://schemas.microsoft.com/office/drawing/2010/main" val="0"/>
+              </a:ext>
+            </a:extLst>
+          </a:blip>
+          <a:srcRect l="50617" r="33814"/>
+          <a:stretch/>
+        </p:blipFill>
+        <p:spPr>
+          <a:xfrm>
+            <a:off x="6014265" y="4392014"/>
+            <a:ext cx="1489754" cy="1594800"/>
+          </a:xfrm>
+          <a:prstGeom prst="rect">
+            <a:avLst/>
+          </a:prstGeom>
+        </p:spPr>
+      </p:pic>
+      <p:pic>
+        <p:nvPicPr>
+          <p:cNvPr id="87" name="圖片 86">
+            <a:extLst>
+              <a:ext uri="{FF2B5EF4-FFF2-40B4-BE49-F238E27FC236}">
+                <a16:creationId xmlns:a16="http://schemas.microsoft.com/office/drawing/2014/main" id="{F5CB16CB-E5EB-44F9-9347-7118514D5318}"/>
+              </a:ext>
+            </a:extLst>
+          </p:cNvPr>
+          <p:cNvPicPr>
+            <a:picLocks noChangeAspect="1"/>
+          </p:cNvPicPr>
+          <p:nvPr/>
+        </p:nvPicPr>
+        <p:blipFill rotWithShape="1">
+          <a:blip r:embed="rId4">
+            <a:clrChange>
+              <a:clrFrom>
+                <a:srgbClr val="FFFFFF"/>
+              </a:clrFrom>
+              <a:clrTo>
+                <a:srgbClr val="FFFFFF">
+                  <a:alpha val="0"/>
+                </a:srgbClr>
+              </a:clrTo>
+            </a:clrChange>
+            <a:extLst>
+              <a:ext uri="{28A0092B-C50C-407E-A947-70E740481C1C}">
+                <a14:useLocalDpi xmlns:a14="http://schemas.microsoft.com/office/drawing/2010/main" val="0"/>
+              </a:ext>
+            </a:extLst>
+          </a:blip>
+          <a:srcRect l="51155" r="34350"/>
+          <a:stretch/>
+        </p:blipFill>
+        <p:spPr>
+          <a:xfrm>
+            <a:off x="6027536" y="356049"/>
+            <a:ext cx="1474163" cy="1695009"/>
+          </a:xfrm>
+          <a:prstGeom prst="rect">
+            <a:avLst/>
+          </a:prstGeom>
+        </p:spPr>
+      </p:pic>
+      <p:pic>
+        <p:nvPicPr>
+          <p:cNvPr id="88" name="圖片 87">
+            <a:extLst>
+              <a:ext uri="{FF2B5EF4-FFF2-40B4-BE49-F238E27FC236}">
+                <a16:creationId xmlns:a16="http://schemas.microsoft.com/office/drawing/2014/main" id="{7696136E-F0F1-4D55-B922-76665211E370}"/>
+              </a:ext>
+            </a:extLst>
+          </p:cNvPr>
+          <p:cNvPicPr>
+            <a:picLocks noChangeAspect="1"/>
+          </p:cNvPicPr>
+          <p:nvPr/>
+        </p:nvPicPr>
+        <p:blipFill rotWithShape="1">
+          <a:blip r:embed="rId2">
+            <a:clrChange>
+              <a:clrFrom>
+                <a:srgbClr val="FFFFFF"/>
+              </a:clrFrom>
+              <a:clrTo>
+                <a:srgbClr val="FFFFFF">
+                  <a:alpha val="0"/>
+                </a:srgbClr>
+              </a:clrTo>
+            </a:clrChange>
+            <a:extLst>
+              <a:ext uri="{28A0092B-C50C-407E-A947-70E740481C1C}">
+                <a14:useLocalDpi xmlns:a14="http://schemas.microsoft.com/office/drawing/2010/main" val="0"/>
+              </a:ext>
+            </a:extLst>
+          </a:blip>
+          <a:srcRect l="67475" r="17051"/>
+          <a:stretch/>
+        </p:blipFill>
+        <p:spPr>
+          <a:xfrm>
+            <a:off x="7349904" y="1967580"/>
+            <a:ext cx="1573726" cy="1695009"/>
+          </a:xfrm>
+          <a:prstGeom prst="rect">
+            <a:avLst/>
+          </a:prstGeom>
+        </p:spPr>
+      </p:pic>
+      <p:pic>
+        <p:nvPicPr>
+          <p:cNvPr id="89" name="圖片 88">
+            <a:extLst>
+              <a:ext uri="{FF2B5EF4-FFF2-40B4-BE49-F238E27FC236}">
+                <a16:creationId xmlns:a16="http://schemas.microsoft.com/office/drawing/2014/main" id="{878533E0-617D-4B67-AF50-43CF926BE071}"/>
+              </a:ext>
+            </a:extLst>
+          </p:cNvPr>
+          <p:cNvPicPr>
+            <a:picLocks noChangeAspect="1"/>
+          </p:cNvPicPr>
+          <p:nvPr/>
+        </p:nvPicPr>
+        <p:blipFill rotWithShape="1">
+          <a:blip r:embed="rId3">
+            <a:clrChange>
+              <a:clrFrom>
+                <a:srgbClr val="FFFFFF"/>
+              </a:clrFrom>
+              <a:clrTo>
+                <a:srgbClr val="FFFFFF">
+                  <a:alpha val="0"/>
+                </a:srgbClr>
+              </a:clrTo>
+            </a:clrChange>
+            <a:extLst>
+              <a:ext uri="{28A0092B-C50C-407E-A947-70E740481C1C}">
+                <a14:useLocalDpi xmlns:a14="http://schemas.microsoft.com/office/drawing/2010/main" val="0"/>
+              </a:ext>
+            </a:extLst>
+          </a:blip>
+          <a:srcRect l="67474" r="17223"/>
+          <a:stretch/>
+        </p:blipFill>
+        <p:spPr>
+          <a:xfrm>
+            <a:off x="7359430" y="4392014"/>
+            <a:ext cx="1464300" cy="1594800"/>
+          </a:xfrm>
+          <a:prstGeom prst="rect">
+            <a:avLst/>
+          </a:prstGeom>
+        </p:spPr>
+      </p:pic>
+      <p:pic>
+        <p:nvPicPr>
+          <p:cNvPr id="90" name="圖片 89">
+            <a:extLst>
+              <a:ext uri="{FF2B5EF4-FFF2-40B4-BE49-F238E27FC236}">
+                <a16:creationId xmlns:a16="http://schemas.microsoft.com/office/drawing/2014/main" id="{6A619A0F-40AE-4B91-A63A-3C778E89B6CB}"/>
+              </a:ext>
+            </a:extLst>
+          </p:cNvPr>
+          <p:cNvPicPr>
+            <a:picLocks noChangeAspect="1"/>
+          </p:cNvPicPr>
+          <p:nvPr/>
+        </p:nvPicPr>
+        <p:blipFill rotWithShape="1">
+          <a:blip r:embed="rId4">
+            <a:clrChange>
+              <a:clrFrom>
+                <a:srgbClr val="FFFFFF"/>
+              </a:clrFrom>
+              <a:clrTo>
+                <a:srgbClr val="FFFFFF">
+                  <a:alpha val="0"/>
+                </a:srgbClr>
+              </a:clrTo>
+            </a:clrChange>
+            <a:extLst>
+              <a:ext uri="{28A0092B-C50C-407E-A947-70E740481C1C}">
+                <a14:useLocalDpi xmlns:a14="http://schemas.microsoft.com/office/drawing/2010/main" val="0"/>
+              </a:ext>
+            </a:extLst>
+          </a:blip>
+          <a:srcRect l="67475" r="17169"/>
+          <a:stretch/>
+        </p:blipFill>
+        <p:spPr>
+          <a:xfrm>
+            <a:off x="7349903" y="356049"/>
+            <a:ext cx="1561673" cy="1695009"/>
+          </a:xfrm>
+          <a:prstGeom prst="rect">
+            <a:avLst/>
+          </a:prstGeom>
+        </p:spPr>
+      </p:pic>
+    </p:spTree>
+    <p:extLst>
+      <p:ext uri="{BB962C8B-B14F-4D97-AF65-F5344CB8AC3E}">
+        <p14:creationId xmlns:p14="http://schemas.microsoft.com/office/powerpoint/2010/main" val="100079477"/>
+      </p:ext>
+    </p:extLst>
+  </p:cSld>
+  <p:clrMapOvr>
+    <a:masterClrMapping/>
+  </p:clrMapOvr>
+</p:sld>
+</file>
+
 <file path=ppt/theme/theme1.xml><?xml version="1.0" encoding="utf-8"?>
 <a:theme xmlns:a="http://schemas.openxmlformats.org/drawingml/2006/main" name="Office 佈景主題">
   <a:themeElements>

--- a/Final/Figures/ufig.pptx
+++ b/Final/Figures/ufig.pptx
@@ -7,6 +7,7 @@
   <p:sldIdLst>
     <p:sldId id="256" r:id="rId2"/>
     <p:sldId id="257" r:id="rId3"/>
+    <p:sldId id="258" r:id="rId4"/>
   </p:sldIdLst>
   <p:sldSz cx="9906000" cy="6480175"/>
   <p:notesSz cx="6858000" cy="9144000"/>
@@ -244,7 +245,7 @@
           <a:p>
             <a:fld id="{6A29EBDB-ED21-4F12-8F84-164F28F696EF}" type="datetimeFigureOut">
               <a:rPr lang="zh-TW" altLang="en-US" smtClean="0"/>
-              <a:t>2026/6/30</a:t>
+              <a:t>2026/7/2</a:t>
             </a:fld>
             <a:endParaRPr lang="zh-TW" altLang="en-US"/>
           </a:p>
@@ -414,7 +415,7 @@
           <a:p>
             <a:fld id="{6A29EBDB-ED21-4F12-8F84-164F28F696EF}" type="datetimeFigureOut">
               <a:rPr lang="zh-TW" altLang="en-US" smtClean="0"/>
-              <a:t>2026/6/30</a:t>
+              <a:t>2026/7/2</a:t>
             </a:fld>
             <a:endParaRPr lang="zh-TW" altLang="en-US"/>
           </a:p>
@@ -594,7 +595,7 @@
           <a:p>
             <a:fld id="{6A29EBDB-ED21-4F12-8F84-164F28F696EF}" type="datetimeFigureOut">
               <a:rPr lang="zh-TW" altLang="en-US" smtClean="0"/>
-              <a:t>2026/6/30</a:t>
+              <a:t>2026/7/2</a:t>
             </a:fld>
             <a:endParaRPr lang="zh-TW" altLang="en-US"/>
           </a:p>
@@ -764,7 +765,7 @@
           <a:p>
             <a:fld id="{6A29EBDB-ED21-4F12-8F84-164F28F696EF}" type="datetimeFigureOut">
               <a:rPr lang="zh-TW" altLang="en-US" smtClean="0"/>
-              <a:t>2026/6/30</a:t>
+              <a:t>2026/7/2</a:t>
             </a:fld>
             <a:endParaRPr lang="zh-TW" altLang="en-US"/>
           </a:p>
@@ -1008,7 +1009,7 @@
           <a:p>
             <a:fld id="{6A29EBDB-ED21-4F12-8F84-164F28F696EF}" type="datetimeFigureOut">
               <a:rPr lang="zh-TW" altLang="en-US" smtClean="0"/>
-              <a:t>2026/6/30</a:t>
+              <a:t>2026/7/2</a:t>
             </a:fld>
             <a:endParaRPr lang="zh-TW" altLang="en-US"/>
           </a:p>
@@ -1240,7 +1241,7 @@
           <a:p>
             <a:fld id="{6A29EBDB-ED21-4F12-8F84-164F28F696EF}" type="datetimeFigureOut">
               <a:rPr lang="zh-TW" altLang="en-US" smtClean="0"/>
-              <a:t>2026/6/30</a:t>
+              <a:t>2026/7/2</a:t>
             </a:fld>
             <a:endParaRPr lang="zh-TW" altLang="en-US"/>
           </a:p>
@@ -1607,7 +1608,7 @@
           <a:p>
             <a:fld id="{6A29EBDB-ED21-4F12-8F84-164F28F696EF}" type="datetimeFigureOut">
               <a:rPr lang="zh-TW" altLang="en-US" smtClean="0"/>
-              <a:t>2026/6/30</a:t>
+              <a:t>2026/7/2</a:t>
             </a:fld>
             <a:endParaRPr lang="zh-TW" altLang="en-US"/>
           </a:p>
@@ -1725,7 +1726,7 @@
           <a:p>
             <a:fld id="{6A29EBDB-ED21-4F12-8F84-164F28F696EF}" type="datetimeFigureOut">
               <a:rPr lang="zh-TW" altLang="en-US" smtClean="0"/>
-              <a:t>2026/6/30</a:t>
+              <a:t>2026/7/2</a:t>
             </a:fld>
             <a:endParaRPr lang="zh-TW" altLang="en-US"/>
           </a:p>
@@ -1820,7 +1821,7 @@
           <a:p>
             <a:fld id="{6A29EBDB-ED21-4F12-8F84-164F28F696EF}" type="datetimeFigureOut">
               <a:rPr lang="zh-TW" altLang="en-US" smtClean="0"/>
-              <a:t>2026/6/30</a:t>
+              <a:t>2026/7/2</a:t>
             </a:fld>
             <a:endParaRPr lang="zh-TW" altLang="en-US"/>
           </a:p>
@@ -2097,7 +2098,7 @@
           <a:p>
             <a:fld id="{6A29EBDB-ED21-4F12-8F84-164F28F696EF}" type="datetimeFigureOut">
               <a:rPr lang="zh-TW" altLang="en-US" smtClean="0"/>
-              <a:t>2026/6/30</a:t>
+              <a:t>2026/7/2</a:t>
             </a:fld>
             <a:endParaRPr lang="zh-TW" altLang="en-US"/>
           </a:p>
@@ -2354,7 +2355,7 @@
           <a:p>
             <a:fld id="{6A29EBDB-ED21-4F12-8F84-164F28F696EF}" type="datetimeFigureOut">
               <a:rPr lang="zh-TW" altLang="en-US" smtClean="0"/>
-              <a:t>2026/6/30</a:t>
+              <a:t>2026/7/2</a:t>
             </a:fld>
             <a:endParaRPr lang="zh-TW" altLang="en-US"/>
           </a:p>
@@ -2567,7 +2568,7 @@
           <a:p>
             <a:fld id="{6A29EBDB-ED21-4F12-8F84-164F28F696EF}" type="datetimeFigureOut">
               <a:rPr lang="zh-TW" altLang="en-US" smtClean="0"/>
-              <a:t>2026/6/30</a:t>
+              <a:t>2026/7/2</a:t>
             </a:fld>
             <a:endParaRPr lang="zh-TW" altLang="en-US"/>
           </a:p>
@@ -7031,51 +7032,6 @@
       </p:pic>
       <p:pic>
         <p:nvPicPr>
-          <p:cNvPr id="9" name="圖片 8">
-            <a:extLst>
-              <a:ext uri="{FF2B5EF4-FFF2-40B4-BE49-F238E27FC236}">
-                <a16:creationId xmlns:a16="http://schemas.microsoft.com/office/drawing/2014/main" id="{9E2CEEFC-EB1F-4232-89C9-D8854B65D16A}"/>
-              </a:ext>
-            </a:extLst>
-          </p:cNvPr>
-          <p:cNvPicPr>
-            <a:picLocks noChangeAspect="1"/>
-          </p:cNvPicPr>
-          <p:nvPr/>
-        </p:nvPicPr>
-        <p:blipFill rotWithShape="1">
-          <a:blip r:embed="rId3">
-            <a:clrChange>
-              <a:clrFrom>
-                <a:srgbClr val="FFFFFF"/>
-              </a:clrFrom>
-              <a:clrTo>
-                <a:srgbClr val="FFFFFF">
-                  <a:alpha val="0"/>
-                </a:srgbClr>
-              </a:clrTo>
-            </a:clrChange>
-            <a:extLst>
-              <a:ext uri="{28A0092B-C50C-407E-A947-70E740481C1C}">
-                <a14:useLocalDpi xmlns:a14="http://schemas.microsoft.com/office/drawing/2010/main" val="0"/>
-              </a:ext>
-            </a:extLst>
-          </a:blip>
-          <a:srcRect r="84278"/>
-          <a:stretch/>
-        </p:blipFill>
-        <p:spPr>
-          <a:xfrm>
-            <a:off x="1949389" y="4392014"/>
-            <a:ext cx="1504364" cy="1594800"/>
-          </a:xfrm>
-          <a:prstGeom prst="rect">
-            <a:avLst/>
-          </a:prstGeom>
-        </p:spPr>
-      </p:pic>
-      <p:pic>
-        <p:nvPicPr>
           <p:cNvPr id="11" name="圖片 10">
             <a:extLst>
               <a:ext uri="{FF2B5EF4-FFF2-40B4-BE49-F238E27FC236}">
@@ -7089,7 +7045,7 @@
           <p:nvPr/>
         </p:nvPicPr>
         <p:blipFill rotWithShape="1">
-          <a:blip r:embed="rId4">
+          <a:blip r:embed="rId3">
             <a:clrChange>
               <a:clrFrom>
                 <a:srgbClr val="FDFDFD"/>
@@ -7119,70 +7075,6 @@
           </a:prstGeom>
         </p:spPr>
       </p:pic>
-      <p:sp>
-        <p:nvSpPr>
-          <p:cNvPr id="54" name="矩形: 圓角 53">
-            <a:extLst>
-              <a:ext uri="{FF2B5EF4-FFF2-40B4-BE49-F238E27FC236}">
-                <a16:creationId xmlns:a16="http://schemas.microsoft.com/office/drawing/2014/main" id="{288E9896-9E4F-4C2C-A911-7FEF0722013B}"/>
-              </a:ext>
-            </a:extLst>
-          </p:cNvPr>
-          <p:cNvSpPr/>
-          <p:nvPr/>
-        </p:nvSpPr>
-        <p:spPr>
-          <a:xfrm>
-            <a:off x="1278832" y="4357006"/>
-            <a:ext cx="7555750" cy="1827150"/>
-          </a:xfrm>
-          <a:prstGeom prst="roundRect">
-            <a:avLst>
-              <a:gd name="adj" fmla="val 6163"/>
-            </a:avLst>
-          </a:prstGeom>
-          <a:noFill/>
-          <a:ln w="9525" cap="flat" cmpd="sng" algn="ctr">
-            <a:solidFill>
-              <a:schemeClr val="accent2"/>
-            </a:solidFill>
-            <a:prstDash val="solid"/>
-            <a:round/>
-            <a:headEnd type="none" w="med" len="med"/>
-            <a:tailEnd type="none" w="med" len="med"/>
-          </a:ln>
-        </p:spPr>
-        <p:style>
-          <a:lnRef idx="0">
-            <a:scrgbClr r="0" g="0" b="0"/>
-          </a:lnRef>
-          <a:fillRef idx="0">
-            <a:scrgbClr r="0" g="0" b="0"/>
-          </a:fillRef>
-          <a:effectRef idx="0">
-            <a:scrgbClr r="0" g="0" b="0"/>
-          </a:effectRef>
-          <a:fontRef idx="minor">
-            <a:schemeClr val="accent2"/>
-          </a:fontRef>
-        </p:style>
-        <p:txBody>
-          <a:bodyPr rot="0" spcFirstLastPara="0" vertOverflow="overflow" horzOverflow="overflow" vert="horz" wrap="square" lIns="91440" tIns="45720" rIns="91440" bIns="45720" numCol="1" spcCol="0" rtlCol="0" fromWordArt="0" anchor="ctr" anchorCtr="0" forceAA="0" compatLnSpc="1">
-            <a:prstTxWarp prst="textNoShape">
-              <a:avLst/>
-            </a:prstTxWarp>
-            <a:noAutofit/>
-          </a:bodyPr>
-          <a:lstStyle/>
-          <a:p>
-            <a:pPr algn="ctr"/>
-            <a:endParaRPr lang="zh-TW" altLang="en-US" sz="1900" dirty="0">
-              <a:latin typeface="Times New Roman" panose="02020603050405020304" pitchFamily="18" charset="0"/>
-              <a:cs typeface="Times New Roman" panose="02020603050405020304" pitchFamily="18" charset="0"/>
-            </a:endParaRPr>
-          </a:p>
-        </p:txBody>
-      </p:sp>
       <p:sp>
         <p:nvSpPr>
           <p:cNvPr id="55" name="矩形: 圓角 54">
@@ -7247,416 +7139,8 @@
           </a:p>
         </p:txBody>
       </p:sp>
-      <p:grpSp>
-        <p:nvGrpSpPr>
-          <p:cNvPr id="56" name="群組 55">
-            <a:extLst>
-              <a:ext uri="{FF2B5EF4-FFF2-40B4-BE49-F238E27FC236}">
-                <a16:creationId xmlns:a16="http://schemas.microsoft.com/office/drawing/2014/main" id="{16FEC379-B580-4556-AB9A-6B9F500A38DB}"/>
-              </a:ext>
-            </a:extLst>
-          </p:cNvPr>
-          <p:cNvGrpSpPr/>
-          <p:nvPr/>
-        </p:nvGrpSpPr>
-        <p:grpSpPr>
-          <a:xfrm>
-            <a:off x="7121208" y="6153964"/>
-            <a:ext cx="1718308" cy="343171"/>
-            <a:chOff x="10557418" y="6399554"/>
-            <a:chExt cx="2266734" cy="452699"/>
-          </a:xfrm>
-        </p:grpSpPr>
-        <mc:AlternateContent xmlns:mc="http://schemas.openxmlformats.org/markup-compatibility/2006" xmlns:a14="http://schemas.microsoft.com/office/drawing/2010/main">
-          <mc:Choice Requires="a14">
-            <p:sp>
-              <p:nvSpPr>
-                <p:cNvPr id="57" name="矩形 56">
-                  <a:extLst>
-                    <a:ext uri="{FF2B5EF4-FFF2-40B4-BE49-F238E27FC236}">
-                      <a16:creationId xmlns:a16="http://schemas.microsoft.com/office/drawing/2014/main" id="{6D3AE693-FAE4-4477-9E97-B705D2E634A1}"/>
-                    </a:ext>
-                  </a:extLst>
-                </p:cNvPr>
-                <p:cNvSpPr/>
-                <p:nvPr/>
-              </p:nvSpPr>
-              <p:spPr>
-                <a:xfrm>
-                  <a:off x="10995506" y="6399554"/>
-                  <a:ext cx="1828646" cy="452699"/>
-                </a:xfrm>
-                <a:prstGeom prst="rect">
-                  <a:avLst/>
-                </a:prstGeom>
-              </p:spPr>
-              <p:txBody>
-                <a:bodyPr wrap="none">
-                  <a:spAutoFit/>
-                </a:bodyPr>
-                <a:lstStyle/>
-                <a:p>
-                  <a:pPr/>
-                  <a14:m>
-                    <m:oMathPara xmlns:m="http://schemas.openxmlformats.org/officeDocument/2006/math">
-                      <m:oMathParaPr>
-                        <m:jc m:val="centerGroup"/>
-                      </m:oMathParaPr>
-                      <m:oMath xmlns:m="http://schemas.openxmlformats.org/officeDocument/2006/math">
-                        <m:sSubSup>
-                          <m:sSubSupPr>
-                            <m:ctrlPr>
-                              <a:rPr lang="en-US" altLang="zh-TW" sz="1630" i="1">
-                                <a:latin typeface="Cambria Math" panose="02040503050406030204" pitchFamily="18" charset="0"/>
-                              </a:rPr>
-                            </m:ctrlPr>
-                          </m:sSubSupPr>
-                          <m:e>
-                            <m:r>
-                              <a:rPr lang="en-US" altLang="zh-TW" sz="1630" i="1">
-                                <a:latin typeface="Cambria Math" panose="02040503050406030204" pitchFamily="18" charset="0"/>
-                              </a:rPr>
-                              <m:t>𝑊</m:t>
-                            </m:r>
-                          </m:e>
-                          <m:sub>
-                            <m:r>
-                              <a:rPr lang="en-US" altLang="zh-TW" sz="1630" i="1">
-                                <a:latin typeface="Cambria Math" panose="02040503050406030204" pitchFamily="18" charset="0"/>
-                              </a:rPr>
-                              <m:t>0</m:t>
-                            </m:r>
-                          </m:sub>
-                          <m:sup>
-                            <m:r>
-                              <a:rPr lang="en-US" altLang="zh-TW" sz="1630" i="1">
-                                <a:latin typeface="Cambria Math" panose="02040503050406030204" pitchFamily="18" charset="0"/>
-                              </a:rPr>
-                              <m:t> </m:t>
-                            </m:r>
-                          </m:sup>
-                        </m:sSubSup>
-                        <m:r>
-                          <a:rPr lang="en-US" altLang="zh-TW" sz="1630" i="1">
-                            <a:latin typeface="Cambria Math" panose="02040503050406030204" pitchFamily="18" charset="0"/>
-                          </a:rPr>
-                          <m:t>=</m:t>
-                        </m:r>
-                        <m:r>
-                          <a:rPr lang="en-US" altLang="zh-TW" sz="1630" i="1">
-                            <a:latin typeface="Cambria Math" panose="02040503050406030204" pitchFamily="18" charset="0"/>
-                          </a:rPr>
-                          <m:t>1</m:t>
-                        </m:r>
-                        <m:r>
-                          <a:rPr lang="en-US" altLang="zh-TW" sz="1630" i="1">
-                            <a:latin typeface="Cambria Math" panose="02040503050406030204" pitchFamily="18" charset="0"/>
-                          </a:rPr>
-                          <m:t>.</m:t>
-                        </m:r>
-                        <m:r>
-                          <a:rPr lang="en-US" altLang="zh-TW" sz="1630" i="1">
-                            <a:latin typeface="Cambria Math" panose="02040503050406030204" pitchFamily="18" charset="0"/>
-                          </a:rPr>
-                          <m:t>5</m:t>
-                        </m:r>
-                        <m:r>
-                          <a:rPr lang="en-US" altLang="zh-TW" sz="1630" i="1">
-                            <a:latin typeface="Cambria Math" panose="02040503050406030204" pitchFamily="18" charset="0"/>
-                          </a:rPr>
-                          <m:t> </m:t>
-                        </m:r>
-                        <m:r>
-                          <a:rPr lang="en-US" altLang="zh-TW" sz="1630" i="1">
-                            <a:latin typeface="Cambria Math" panose="02040503050406030204" pitchFamily="18" charset="0"/>
-                          </a:rPr>
-                          <m:t>𝜇</m:t>
-                        </m:r>
-                        <m:r>
-                          <m:rPr>
-                            <m:sty m:val="p"/>
-                          </m:rPr>
-                          <a:rPr lang="en-US" altLang="zh-TW" sz="1630">
-                            <a:latin typeface="Cambria Math" panose="02040503050406030204" pitchFamily="18" charset="0"/>
-                          </a:rPr>
-                          <m:t>m</m:t>
-                        </m:r>
-                      </m:oMath>
-                    </m:oMathPara>
-                  </a14:m>
-                  <a:endParaRPr lang="zh-TW" altLang="en-US" sz="1630" dirty="0">
-                    <a:latin typeface="Times New Roman" panose="02020603050405020304" pitchFamily="18" charset="0"/>
-                    <a:cs typeface="Times New Roman" panose="02020603050405020304" pitchFamily="18" charset="0"/>
-                  </a:endParaRPr>
-                </a:p>
-              </p:txBody>
-            </p:sp>
-          </mc:Choice>
-          <mc:Fallback xmlns="">
-            <p:sp>
-              <p:nvSpPr>
-                <p:cNvPr id="6" name="矩形 5">
-                  <a:extLst>
-                    <a:ext uri="{FF2B5EF4-FFF2-40B4-BE49-F238E27FC236}">
-                      <a16:creationId xmlns:a16="http://schemas.microsoft.com/office/drawing/2014/main" id="{33615A92-2488-4DAF-823B-7ACEF3923D24}"/>
-                    </a:ext>
-                  </a:extLst>
-                </p:cNvPr>
-                <p:cNvSpPr>
-                  <a:spLocks noRot="1" noChangeAspect="1" noMove="1" noResize="1" noEditPoints="1" noAdjustHandles="1" noChangeArrowheads="1" noChangeShapeType="1" noTextEdit="1"/>
-                </p:cNvSpPr>
-                <p:nvPr/>
-              </p:nvSpPr>
-              <p:spPr>
-                <a:xfrm>
-                  <a:off x="10995506" y="6399554"/>
-                  <a:ext cx="1828646" cy="452699"/>
-                </a:xfrm>
-                <a:prstGeom prst="rect">
-                  <a:avLst/>
-                </a:prstGeom>
-                <a:blipFill>
-                  <a:blip r:embed="rId5"/>
-                  <a:stretch>
-                    <a:fillRect b="-5263"/>
-                  </a:stretch>
-                </a:blipFill>
-              </p:spPr>
-              <p:txBody>
-                <a:bodyPr/>
-                <a:lstStyle/>
-                <a:p>
-                  <a:r>
-                    <a:rPr lang="zh-TW" altLang="en-US">
-                      <a:noFill/>
-                    </a:rPr>
-                    <a:t> </a:t>
-                  </a:r>
-                </a:p>
-              </p:txBody>
-            </p:sp>
-          </mc:Fallback>
-        </mc:AlternateContent>
-        <p:pic>
-          <p:nvPicPr>
-            <p:cNvPr id="58" name="圖片 57">
-              <a:extLst>
-                <a:ext uri="{FF2B5EF4-FFF2-40B4-BE49-F238E27FC236}">
-                  <a16:creationId xmlns:a16="http://schemas.microsoft.com/office/drawing/2014/main" id="{302A021D-6B28-487B-B28E-B5D67657CE5B}"/>
-                </a:ext>
-              </a:extLst>
-            </p:cNvPr>
-            <p:cNvPicPr>
-              <a:picLocks noChangeAspect="1"/>
-            </p:cNvPicPr>
-            <p:nvPr/>
-          </p:nvPicPr>
-          <p:blipFill>
-            <a:blip r:embed="rId6">
-              <a:clrChange>
-                <a:clrFrom>
-                  <a:srgbClr val="FFFFFF"/>
-                </a:clrFrom>
-                <a:clrTo>
-                  <a:srgbClr val="FFFFFF">
-                    <a:alpha val="0"/>
-                  </a:srgbClr>
-                </a:clrTo>
-              </a:clrChange>
-            </a:blip>
-            <a:stretch>
-              <a:fillRect/>
-            </a:stretch>
-          </p:blipFill>
-          <p:spPr>
-            <a:xfrm>
-              <a:off x="10557418" y="6619851"/>
-              <a:ext cx="476304" cy="136937"/>
-            </a:xfrm>
-            <a:prstGeom prst="rect">
-              <a:avLst/>
-            </a:prstGeom>
-          </p:spPr>
-        </p:pic>
-      </p:grpSp>
-      <mc:AlternateContent xmlns:mc="http://schemas.openxmlformats.org/markup-compatibility/2006">
-        <mc:Choice xmlns:a14="http://schemas.microsoft.com/office/drawing/2010/main" Requires="a14">
-          <p:sp>
-            <p:nvSpPr>
-              <p:cNvPr id="59" name="矩形 58">
-                <a:extLst>
-                  <a:ext uri="{FF2B5EF4-FFF2-40B4-BE49-F238E27FC236}">
-                    <a16:creationId xmlns:a16="http://schemas.microsoft.com/office/drawing/2014/main" id="{4EE619D1-FE5A-4904-9EF9-812D48C58D84}"/>
-                  </a:ext>
-                </a:extLst>
-              </p:cNvPr>
-              <p:cNvSpPr/>
-              <p:nvPr/>
-            </p:nvSpPr>
-            <p:spPr>
-              <a:xfrm>
-                <a:off x="1121156" y="3906164"/>
-                <a:ext cx="1495601" cy="456728"/>
-              </a:xfrm>
-              <a:prstGeom prst="rect">
-                <a:avLst/>
-              </a:prstGeom>
-            </p:spPr>
-            <p:txBody>
-              <a:bodyPr wrap="none">
-                <a:spAutoFit/>
-              </a:bodyPr>
-              <a:lstStyle/>
-              <a:p>
-                <a:pPr/>
-                <a14:m>
-                  <m:oMathPara xmlns:m="http://schemas.openxmlformats.org/officeDocument/2006/math">
-                    <m:oMathParaPr>
-                      <m:jc m:val="centerGroup"/>
-                    </m:oMathParaPr>
-                    <m:oMath xmlns:m="http://schemas.openxmlformats.org/officeDocument/2006/math">
-                      <m:r>
-                        <m:rPr>
-                          <m:sty m:val="p"/>
-                        </m:rPr>
-                        <a:rPr lang="en-US" altLang="zh-TW" sz="2000">
-                          <a:latin typeface="Cambria Math" panose="02040503050406030204" pitchFamily="18" charset="0"/>
-                        </a:rPr>
-                        <m:t>Re</m:t>
-                      </m:r>
-                      <m:d>
-                        <m:dPr>
-                          <m:begChr m:val="["/>
-                          <m:endChr m:val="]"/>
-                          <m:ctrlPr>
-                            <a:rPr lang="en-US" altLang="zh-TW" sz="2000" i="1">
-                              <a:latin typeface="Cambria Math" panose="02040503050406030204" pitchFamily="18" charset="0"/>
-                            </a:rPr>
-                          </m:ctrlPr>
-                        </m:dPr>
-                        <m:e>
-                          <m:sSubSup>
-                            <m:sSubSupPr>
-                              <m:ctrlPr>
-                                <a:rPr lang="en-US" altLang="zh-TW" sz="2000" i="1">
-                                  <a:latin typeface="Cambria Math" panose="02040503050406030204" pitchFamily="18" charset="0"/>
-                                </a:rPr>
-                              </m:ctrlPr>
-                            </m:sSubSupPr>
-                            <m:e>
-                              <m:r>
-                                <a:rPr lang="en-US" altLang="zh-TW" sz="2000" i="1">
-                                  <a:latin typeface="Cambria Math" panose="02040503050406030204" pitchFamily="18" charset="0"/>
-                                </a:rPr>
-                                <m:t>𝐴</m:t>
-                              </m:r>
-                            </m:e>
-                            <m:sub>
-                              <m:r>
-                                <a:rPr lang="en-US" altLang="zh-TW" sz="2000" i="1">
-                                  <a:latin typeface="Cambria Math" panose="02040503050406030204" pitchFamily="18" charset="0"/>
-                                </a:rPr>
-                                <m:t>ℓ</m:t>
-                              </m:r>
-                              <m:r>
-                                <a:rPr lang="en-US" altLang="zh-TW" sz="2000" i="1">
-                                  <a:latin typeface="Cambria Math" panose="02040503050406030204" pitchFamily="18" charset="0"/>
-                                </a:rPr>
-                                <m:t>,</m:t>
-                              </m:r>
-                              <m:r>
-                                <a:rPr lang="en-US" altLang="zh-TW" sz="2000" i="1">
-                                  <a:latin typeface="Cambria Math" panose="02040503050406030204" pitchFamily="18" charset="0"/>
-                                </a:rPr>
-                                <m:t>𝑝</m:t>
-                              </m:r>
-                            </m:sub>
-                            <m:sup>
-                              <m:r>
-                                <a:rPr lang="en-US" altLang="zh-TW" sz="2000" i="1">
-                                  <a:latin typeface="Cambria Math" panose="02040503050406030204" pitchFamily="18" charset="0"/>
-                                </a:rPr>
-                                <m:t>𝐿</m:t>
-                              </m:r>
-                            </m:sup>
-                          </m:sSubSup>
-                          <m:d>
-                            <m:dPr>
-                              <m:ctrlPr>
-                                <a:rPr lang="en-US" altLang="zh-TW" sz="2000" i="1">
-                                  <a:latin typeface="Cambria Math" panose="02040503050406030204" pitchFamily="18" charset="0"/>
-                                </a:rPr>
-                              </m:ctrlPr>
-                            </m:dPr>
-                            <m:e>
-                              <m:r>
-                                <a:rPr lang="en-US" altLang="zh-TW" sz="2000" b="1" i="1">
-                                  <a:latin typeface="Cambria Math" panose="02040503050406030204" pitchFamily="18" charset="0"/>
-                                </a:rPr>
-                                <m:t>𝒓</m:t>
-                              </m:r>
-                            </m:e>
-                          </m:d>
-                        </m:e>
-                      </m:d>
-                    </m:oMath>
-                  </m:oMathPara>
-                </a14:m>
-                <a:endParaRPr lang="zh-TW" altLang="en-US" sz="2000" dirty="0">
-                  <a:latin typeface="Times New Roman" panose="02020603050405020304" pitchFamily="18" charset="0"/>
-                  <a:cs typeface="Times New Roman" panose="02020603050405020304" pitchFamily="18" charset="0"/>
-                </a:endParaRPr>
-              </a:p>
-            </p:txBody>
-          </p:sp>
-        </mc:Choice>
-        <mc:Fallback>
-          <p:sp>
-            <p:nvSpPr>
-              <p:cNvPr id="59" name="矩形 58">
-                <a:extLst>
-                  <a:ext uri="{FF2B5EF4-FFF2-40B4-BE49-F238E27FC236}">
-                    <a16:creationId xmlns:a16="http://schemas.microsoft.com/office/drawing/2014/main" id="{4EE619D1-FE5A-4904-9EF9-812D48C58D84}"/>
-                  </a:ext>
-                </a:extLst>
-              </p:cNvPr>
-              <p:cNvSpPr>
-                <a:spLocks noRot="1" noChangeAspect="1" noMove="1" noResize="1" noEditPoints="1" noAdjustHandles="1" noChangeArrowheads="1" noChangeShapeType="1" noTextEdit="1"/>
-              </p:cNvSpPr>
-              <p:nvPr/>
-            </p:nvSpPr>
-            <p:spPr>
-              <a:xfrm>
-                <a:off x="1121156" y="3906164"/>
-                <a:ext cx="1495601" cy="456728"/>
-              </a:xfrm>
-              <a:prstGeom prst="rect">
-                <a:avLst/>
-              </a:prstGeom>
-              <a:blipFill>
-                <a:blip r:embed="rId7"/>
-                <a:stretch>
-                  <a:fillRect b="-4000"/>
-                </a:stretch>
-              </a:blipFill>
-            </p:spPr>
-            <p:txBody>
-              <a:bodyPr/>
-              <a:lstStyle/>
-              <a:p>
-                <a:r>
-                  <a:rPr lang="zh-TW" altLang="en-US">
-                    <a:noFill/>
-                  </a:rPr>
-                  <a:t> </a:t>
-                </a:r>
-              </a:p>
-            </p:txBody>
-          </p:sp>
-        </mc:Fallback>
-      </mc:AlternateContent>
-      <mc:AlternateContent xmlns:mc="http://schemas.openxmlformats.org/markup-compatibility/2006">
-        <mc:Choice xmlns:a14="http://schemas.microsoft.com/office/drawing/2010/main" Requires="a14">
+      <mc:AlternateContent xmlns:mc="http://schemas.openxmlformats.org/markup-compatibility/2006" xmlns:a14="http://schemas.microsoft.com/office/drawing/2010/main">
+        <mc:Choice Requires="a14">
           <p:sp>
             <p:nvSpPr>
               <p:cNvPr id="60" name="矩形 59">
@@ -7695,19 +7179,7 @@
                         <a:rPr lang="en-US" altLang="zh-TW" i="1">
                           <a:latin typeface="Cambria Math" panose="02040503050406030204" pitchFamily="18" charset="0"/>
                         </a:rPr>
-                        <m:t>ℓ</m:t>
-                      </m:r>
-                      <m:r>
-                        <a:rPr lang="en-US" altLang="zh-TW" i="1">
-                          <a:latin typeface="Cambria Math" panose="02040503050406030204" pitchFamily="18" charset="0"/>
-                        </a:rPr>
-                        <m:t>=</m:t>
-                      </m:r>
-                      <m:r>
-                        <a:rPr lang="en-US" altLang="zh-TW" i="1">
-                          <a:latin typeface="Cambria Math" panose="02040503050406030204" pitchFamily="18" charset="0"/>
-                        </a:rPr>
-                        <m:t>0</m:t>
+                        <m:t>ℓ=0</m:t>
                       </m:r>
                     </m:oMath>
                   </m:oMathPara>
@@ -7720,7 +7192,7 @@
             </p:txBody>
           </p:sp>
         </mc:Choice>
-        <mc:Fallback>
+        <mc:Fallback xmlns="">
           <p:sp>
             <p:nvSpPr>
               <p:cNvPr id="60" name="矩形 59">
@@ -7765,8 +7237,8 @@
           </p:sp>
         </mc:Fallback>
       </mc:AlternateContent>
-      <mc:AlternateContent xmlns:mc="http://schemas.openxmlformats.org/markup-compatibility/2006">
-        <mc:Choice xmlns:a14="http://schemas.microsoft.com/office/drawing/2010/main" Requires="a14">
+      <mc:AlternateContent xmlns:mc="http://schemas.openxmlformats.org/markup-compatibility/2006" xmlns:a14="http://schemas.microsoft.com/office/drawing/2010/main">
+        <mc:Choice Requires="a14">
           <p:sp>
             <p:nvSpPr>
               <p:cNvPr id="61" name="矩形 60">
@@ -7833,7 +7305,7 @@
             </p:txBody>
           </p:sp>
         </mc:Choice>
-        <mc:Fallback>
+        <mc:Fallback xmlns="">
           <p:sp>
             <p:nvSpPr>
               <p:cNvPr id="61" name="矩形 60">
@@ -7878,8 +7350,8 @@
           </p:sp>
         </mc:Fallback>
       </mc:AlternateContent>
-      <mc:AlternateContent xmlns:mc="http://schemas.openxmlformats.org/markup-compatibility/2006">
-        <mc:Choice xmlns:a14="http://schemas.microsoft.com/office/drawing/2010/main" Requires="a14">
+      <mc:AlternateContent xmlns:mc="http://schemas.openxmlformats.org/markup-compatibility/2006" xmlns:a14="http://schemas.microsoft.com/office/drawing/2010/main">
+        <mc:Choice Requires="a14">
           <p:sp>
             <p:nvSpPr>
               <p:cNvPr id="62" name="矩形 61">
@@ -7918,19 +7390,7 @@
                         <a:rPr lang="en-US" altLang="zh-TW" sz="1630" i="1">
                           <a:latin typeface="Cambria Math" panose="02040503050406030204" pitchFamily="18" charset="0"/>
                         </a:rPr>
-                        <m:t>ℓ</m:t>
-                      </m:r>
-                      <m:r>
-                        <a:rPr lang="en-US" altLang="zh-TW" sz="1630" i="1">
-                          <a:latin typeface="Cambria Math" panose="02040503050406030204" pitchFamily="18" charset="0"/>
-                        </a:rPr>
-                        <m:t>=−</m:t>
-                      </m:r>
-                      <m:r>
-                        <a:rPr lang="en-US" altLang="zh-TW" sz="1630" i="1">
-                          <a:latin typeface="Cambria Math" panose="02040503050406030204" pitchFamily="18" charset="0"/>
-                        </a:rPr>
-                        <m:t>2</m:t>
+                        <m:t>ℓ=−2</m:t>
                       </m:r>
                     </m:oMath>
                   </m:oMathPara>
@@ -7943,7 +7403,7 @@
             </p:txBody>
           </p:sp>
         </mc:Choice>
-        <mc:Fallback>
+        <mc:Fallback xmlns="">
           <p:sp>
             <p:nvSpPr>
               <p:cNvPr id="62" name="矩形 61">
@@ -7988,8 +7448,8 @@
           </p:sp>
         </mc:Fallback>
       </mc:AlternateContent>
-      <mc:AlternateContent xmlns:mc="http://schemas.openxmlformats.org/markup-compatibility/2006">
-        <mc:Choice xmlns:a14="http://schemas.microsoft.com/office/drawing/2010/main" Requires="a14">
+      <mc:AlternateContent xmlns:mc="http://schemas.openxmlformats.org/markup-compatibility/2006" xmlns:a14="http://schemas.microsoft.com/office/drawing/2010/main">
+        <mc:Choice Requires="a14">
           <p:sp>
             <p:nvSpPr>
               <p:cNvPr id="63" name="矩形 62">
@@ -8028,19 +7488,7 @@
                         <a:rPr lang="en-US" altLang="zh-TW" sz="1630" i="1">
                           <a:latin typeface="Cambria Math" panose="02040503050406030204" pitchFamily="18" charset="0"/>
                         </a:rPr>
-                        <m:t>ℓ</m:t>
-                      </m:r>
-                      <m:r>
-                        <a:rPr lang="en-US" altLang="zh-TW" sz="1630" i="1">
-                          <a:latin typeface="Cambria Math" panose="02040503050406030204" pitchFamily="18" charset="0"/>
-                        </a:rPr>
-                        <m:t>=−</m:t>
-                      </m:r>
-                      <m:r>
-                        <a:rPr lang="en-US" altLang="zh-TW" sz="1630" i="1">
-                          <a:latin typeface="Cambria Math" panose="02040503050406030204" pitchFamily="18" charset="0"/>
-                        </a:rPr>
-                        <m:t>1</m:t>
+                        <m:t>ℓ=−1</m:t>
                       </m:r>
                     </m:oMath>
                   </m:oMathPara>
@@ -8053,7 +7501,7 @@
             </p:txBody>
           </p:sp>
         </mc:Choice>
-        <mc:Fallback>
+        <mc:Fallback xmlns="">
           <p:sp>
             <p:nvSpPr>
               <p:cNvPr id="63" name="矩形 62">
@@ -8098,8 +7546,8 @@
           </p:sp>
         </mc:Fallback>
       </mc:AlternateContent>
-      <mc:AlternateContent xmlns:mc="http://schemas.openxmlformats.org/markup-compatibility/2006">
-        <mc:Choice xmlns:a14="http://schemas.microsoft.com/office/drawing/2010/main" Requires="a14">
+      <mc:AlternateContent xmlns:mc="http://schemas.openxmlformats.org/markup-compatibility/2006" xmlns:a14="http://schemas.microsoft.com/office/drawing/2010/main">
+        <mc:Choice Requires="a14">
           <p:sp>
             <p:nvSpPr>
               <p:cNvPr id="64" name="矩形 63">
@@ -8138,19 +7586,7 @@
                         <a:rPr lang="en-US" altLang="zh-TW" sz="1630" i="1">
                           <a:latin typeface="Cambria Math" panose="02040503050406030204" pitchFamily="18" charset="0"/>
                         </a:rPr>
-                        <m:t>ℓ</m:t>
-                      </m:r>
-                      <m:r>
-                        <a:rPr lang="en-US" altLang="zh-TW" sz="1630" i="1">
-                          <a:latin typeface="Cambria Math" panose="02040503050406030204" pitchFamily="18" charset="0"/>
-                        </a:rPr>
-                        <m:t>=</m:t>
-                      </m:r>
-                      <m:r>
-                        <a:rPr lang="en-US" altLang="zh-TW" sz="1630" i="1">
-                          <a:latin typeface="Cambria Math" panose="02040503050406030204" pitchFamily="18" charset="0"/>
-                        </a:rPr>
-                        <m:t>0</m:t>
+                        <m:t>ℓ=0</m:t>
                       </m:r>
                     </m:oMath>
                   </m:oMathPara>
@@ -8163,7 +7599,7 @@
             </p:txBody>
           </p:sp>
         </mc:Choice>
-        <mc:Fallback>
+        <mc:Fallback xmlns="">
           <p:sp>
             <p:nvSpPr>
               <p:cNvPr id="64" name="矩形 63">
@@ -8208,8 +7644,8 @@
           </p:sp>
         </mc:Fallback>
       </mc:AlternateContent>
-      <mc:AlternateContent xmlns:mc="http://schemas.openxmlformats.org/markup-compatibility/2006">
-        <mc:Choice xmlns:a14="http://schemas.microsoft.com/office/drawing/2010/main" Requires="a14">
+      <mc:AlternateContent xmlns:mc="http://schemas.openxmlformats.org/markup-compatibility/2006" xmlns:a14="http://schemas.microsoft.com/office/drawing/2010/main">
+        <mc:Choice Requires="a14">
           <p:sp>
             <p:nvSpPr>
               <p:cNvPr id="65" name="矩形 64">
@@ -8248,19 +7684,7 @@
                         <a:rPr lang="en-US" altLang="zh-TW" sz="1630" i="1">
                           <a:latin typeface="Cambria Math" panose="02040503050406030204" pitchFamily="18" charset="0"/>
                         </a:rPr>
-                        <m:t>ℓ</m:t>
-                      </m:r>
-                      <m:r>
-                        <a:rPr lang="en-US" altLang="zh-TW" sz="1630" i="1">
-                          <a:latin typeface="Cambria Math" panose="02040503050406030204" pitchFamily="18" charset="0"/>
-                        </a:rPr>
-                        <m:t>=</m:t>
-                      </m:r>
-                      <m:r>
-                        <a:rPr lang="en-US" altLang="zh-TW" sz="1630" i="1">
-                          <a:latin typeface="Cambria Math" panose="02040503050406030204" pitchFamily="18" charset="0"/>
-                        </a:rPr>
-                        <m:t>1</m:t>
+                        <m:t>ℓ=1</m:t>
                       </m:r>
                     </m:oMath>
                   </m:oMathPara>
@@ -8273,7 +7697,7 @@
             </p:txBody>
           </p:sp>
         </mc:Choice>
-        <mc:Fallback>
+        <mc:Fallback xmlns="">
           <p:sp>
             <p:nvSpPr>
               <p:cNvPr id="65" name="矩形 64">
@@ -8318,8 +7742,8 @@
           </p:sp>
         </mc:Fallback>
       </mc:AlternateContent>
-      <mc:AlternateContent xmlns:mc="http://schemas.openxmlformats.org/markup-compatibility/2006">
-        <mc:Choice xmlns:a14="http://schemas.microsoft.com/office/drawing/2010/main" Requires="a14">
+      <mc:AlternateContent xmlns:mc="http://schemas.openxmlformats.org/markup-compatibility/2006" xmlns:a14="http://schemas.microsoft.com/office/drawing/2010/main">
+        <mc:Choice Requires="a14">
           <p:sp>
             <p:nvSpPr>
               <p:cNvPr id="66" name="矩形 65">
@@ -8358,19 +7782,7 @@
                         <a:rPr lang="en-US" altLang="zh-TW" sz="1630" i="1">
                           <a:latin typeface="Cambria Math" panose="02040503050406030204" pitchFamily="18" charset="0"/>
                         </a:rPr>
-                        <m:t>ℓ</m:t>
-                      </m:r>
-                      <m:r>
-                        <a:rPr lang="en-US" altLang="zh-TW" sz="1630" i="1">
-                          <a:latin typeface="Cambria Math" panose="02040503050406030204" pitchFamily="18" charset="0"/>
-                        </a:rPr>
-                        <m:t>=</m:t>
-                      </m:r>
-                      <m:r>
-                        <a:rPr lang="en-US" altLang="zh-TW" sz="1630" i="1">
-                          <a:latin typeface="Cambria Math" panose="02040503050406030204" pitchFamily="18" charset="0"/>
-                        </a:rPr>
-                        <m:t>2</m:t>
+                        <m:t>ℓ=2</m:t>
                       </m:r>
                     </m:oMath>
                   </m:oMathPara>
@@ -8383,7 +7795,7 @@
             </p:txBody>
           </p:sp>
         </mc:Choice>
-        <mc:Fallback>
+        <mc:Fallback xmlns="">
           <p:sp>
             <p:nvSpPr>
               <p:cNvPr id="66" name="矩形 65">
@@ -8514,8 +7926,8 @@
           </a:prstGeom>
         </p:spPr>
       </p:pic>
-      <mc:AlternateContent xmlns:mc="http://schemas.openxmlformats.org/markup-compatibility/2006">
-        <mc:Choice xmlns:a14="http://schemas.microsoft.com/office/drawing/2010/main" Requires="a14">
+      <mc:AlternateContent xmlns:mc="http://schemas.openxmlformats.org/markup-compatibility/2006" xmlns:a14="http://schemas.microsoft.com/office/drawing/2010/main">
+        <mc:Choice Requires="a14">
           <p:sp>
             <p:nvSpPr>
               <p:cNvPr id="70" name="矩形 69">
@@ -8591,13 +8003,7 @@
                                     <a:rPr lang="en-US" altLang="zh-TW" sz="2000" i="1">
                                       <a:latin typeface="Cambria Math" panose="02040503050406030204" pitchFamily="18" charset="0"/>
                                     </a:rPr>
-                                    <m:t>ℓ</m:t>
-                                  </m:r>
-                                  <m:r>
-                                    <a:rPr lang="en-US" altLang="zh-TW" sz="2000" i="1">
-                                      <a:latin typeface="Cambria Math" panose="02040503050406030204" pitchFamily="18" charset="0"/>
-                                    </a:rPr>
-                                    <m:t>,</m:t>
+                                    <m:t>ℓ,</m:t>
                                   </m:r>
                                   <m:r>
                                     <a:rPr lang="en-US" altLang="zh-TW" sz="2000" i="1">
@@ -8655,7 +8061,7 @@
             </p:txBody>
           </p:sp>
         </mc:Choice>
-        <mc:Fallback>
+        <mc:Fallback xmlns="">
           <p:sp>
             <p:nvSpPr>
               <p:cNvPr id="70" name="矩形 69">
@@ -8700,8 +8106,8 @@
           </p:sp>
         </mc:Fallback>
       </mc:AlternateContent>
-      <mc:AlternateContent xmlns:mc="http://schemas.openxmlformats.org/markup-compatibility/2006">
-        <mc:Choice xmlns:a14="http://schemas.microsoft.com/office/drawing/2010/main" Requires="a14">
+      <mc:AlternateContent xmlns:mc="http://schemas.openxmlformats.org/markup-compatibility/2006" xmlns:a14="http://schemas.microsoft.com/office/drawing/2010/main">
+        <mc:Choice Requires="a14">
           <p:sp>
             <p:nvSpPr>
               <p:cNvPr id="71" name="矩形 70">
@@ -8746,13 +8152,7 @@
                         <a:rPr lang="en-US" altLang="zh-TW" sz="1630" i="1">
                           <a:latin typeface="Cambria Math" panose="02040503050406030204" pitchFamily="18" charset="0"/>
                         </a:rPr>
-                        <m:t>=</m:t>
-                      </m:r>
-                      <m:r>
-                        <a:rPr lang="en-US" altLang="zh-TW" sz="1630" i="1">
-                          <a:latin typeface="Cambria Math" panose="02040503050406030204" pitchFamily="18" charset="0"/>
-                        </a:rPr>
-                        <m:t>0</m:t>
+                        <m:t>=0</m:t>
                       </m:r>
                     </m:oMath>
                   </m:oMathPara>
@@ -8765,7 +8165,7 @@
             </p:txBody>
           </p:sp>
         </mc:Choice>
-        <mc:Fallback>
+        <mc:Fallback xmlns="">
           <p:sp>
             <p:nvSpPr>
               <p:cNvPr id="71" name="矩形 70">
@@ -8810,8 +8210,8 @@
           </p:sp>
         </mc:Fallback>
       </mc:AlternateContent>
-      <mc:AlternateContent xmlns:mc="http://schemas.openxmlformats.org/markup-compatibility/2006">
-        <mc:Choice xmlns:a14="http://schemas.microsoft.com/office/drawing/2010/main" Requires="a14">
+      <mc:AlternateContent xmlns:mc="http://schemas.openxmlformats.org/markup-compatibility/2006" xmlns:a14="http://schemas.microsoft.com/office/drawing/2010/main">
+        <mc:Choice Requires="a14">
           <p:sp>
             <p:nvSpPr>
               <p:cNvPr id="72" name="矩形 71">
@@ -8856,13 +8256,7 @@
                         <a:rPr lang="en-US" altLang="zh-TW" sz="1630" i="1">
                           <a:latin typeface="Cambria Math" panose="02040503050406030204" pitchFamily="18" charset="0"/>
                         </a:rPr>
-                        <m:t>=</m:t>
-                      </m:r>
-                      <m:r>
-                        <a:rPr lang="en-US" altLang="zh-TW" sz="1630" i="1">
-                          <a:latin typeface="Cambria Math" panose="02040503050406030204" pitchFamily="18" charset="0"/>
-                        </a:rPr>
-                        <m:t>1</m:t>
+                        <m:t>=1</m:t>
                       </m:r>
                     </m:oMath>
                   </m:oMathPara>
@@ -8875,7 +8269,7 @@
             </p:txBody>
           </p:sp>
         </mc:Choice>
-        <mc:Fallback>
+        <mc:Fallback xmlns="">
           <p:sp>
             <p:nvSpPr>
               <p:cNvPr id="72" name="矩形 71">
@@ -8920,8 +8314,8 @@
           </p:sp>
         </mc:Fallback>
       </mc:AlternateContent>
-      <mc:AlternateContent xmlns:mc="http://schemas.openxmlformats.org/markup-compatibility/2006">
-        <mc:Choice xmlns:a14="http://schemas.microsoft.com/office/drawing/2010/main" Requires="a14">
+      <mc:AlternateContent xmlns:mc="http://schemas.openxmlformats.org/markup-compatibility/2006" xmlns:a14="http://schemas.microsoft.com/office/drawing/2010/main">
+        <mc:Choice Requires="a14">
           <p:sp>
             <p:nvSpPr>
               <p:cNvPr id="73" name="矩形 72">
@@ -8966,13 +8360,7 @@
                         <a:rPr lang="en-US" altLang="zh-TW" sz="1630" i="1">
                           <a:latin typeface="Cambria Math" panose="02040503050406030204" pitchFamily="18" charset="0"/>
                         </a:rPr>
-                        <m:t>=</m:t>
-                      </m:r>
-                      <m:r>
-                        <a:rPr lang="en-US" altLang="zh-TW" sz="1630" i="1">
-                          <a:latin typeface="Cambria Math" panose="02040503050406030204" pitchFamily="18" charset="0"/>
-                        </a:rPr>
-                        <m:t>2</m:t>
+                        <m:t>=2</m:t>
                       </m:r>
                     </m:oMath>
                   </m:oMathPara>
@@ -8985,7 +8373,7 @@
             </p:txBody>
           </p:sp>
         </mc:Choice>
-        <mc:Fallback>
+        <mc:Fallback xmlns="">
           <p:sp>
             <p:nvSpPr>
               <p:cNvPr id="73" name="矩形 72">
@@ -9030,8 +8418,8 @@
           </p:sp>
         </mc:Fallback>
       </mc:AlternateContent>
-      <mc:AlternateContent xmlns:mc="http://schemas.openxmlformats.org/markup-compatibility/2006">
-        <mc:Choice xmlns:a14="http://schemas.microsoft.com/office/drawing/2010/main" Requires="a14">
+      <mc:AlternateContent xmlns:mc="http://schemas.openxmlformats.org/markup-compatibility/2006" xmlns:a14="http://schemas.microsoft.com/office/drawing/2010/main">
+        <mc:Choice Requires="a14">
           <p:sp>
             <p:nvSpPr>
               <p:cNvPr id="74" name="矩形 73">
@@ -9076,13 +8464,7 @@
                         <a:rPr lang="en-US" altLang="zh-TW" sz="1630" i="1">
                           <a:latin typeface="Cambria Math" panose="02040503050406030204" pitchFamily="18" charset="0"/>
                         </a:rPr>
-                        <m:t>=</m:t>
-                      </m:r>
-                      <m:r>
-                        <a:rPr lang="en-US" altLang="zh-TW" sz="1630" i="1">
-                          <a:latin typeface="Cambria Math" panose="02040503050406030204" pitchFamily="18" charset="0"/>
-                        </a:rPr>
-                        <m:t>3</m:t>
+                        <m:t>=3</m:t>
                       </m:r>
                     </m:oMath>
                   </m:oMathPara>
@@ -9095,7 +8477,7 @@
             </p:txBody>
           </p:sp>
         </mc:Choice>
-        <mc:Fallback>
+        <mc:Fallback xmlns="">
           <p:sp>
             <p:nvSpPr>
               <p:cNvPr id="74" name="矩形 73">
@@ -9140,8 +8522,8 @@
           </p:sp>
         </mc:Fallback>
       </mc:AlternateContent>
-      <mc:AlternateContent xmlns:mc="http://schemas.openxmlformats.org/markup-compatibility/2006">
-        <mc:Choice xmlns:a14="http://schemas.microsoft.com/office/drawing/2010/main" Requires="a14">
+      <mc:AlternateContent xmlns:mc="http://schemas.openxmlformats.org/markup-compatibility/2006" xmlns:a14="http://schemas.microsoft.com/office/drawing/2010/main">
+        <mc:Choice Requires="a14">
           <p:sp>
             <p:nvSpPr>
               <p:cNvPr id="75" name="矩形 74">
@@ -9186,13 +8568,7 @@
                         <a:rPr lang="en-US" altLang="zh-TW" sz="1630" i="1">
                           <a:latin typeface="Cambria Math" panose="02040503050406030204" pitchFamily="18" charset="0"/>
                         </a:rPr>
-                        <m:t>=</m:t>
-                      </m:r>
-                      <m:r>
-                        <a:rPr lang="en-US" altLang="zh-TW" sz="1630" i="1">
-                          <a:latin typeface="Cambria Math" panose="02040503050406030204" pitchFamily="18" charset="0"/>
-                        </a:rPr>
-                        <m:t>4</m:t>
+                        <m:t>=4</m:t>
                       </m:r>
                     </m:oMath>
                   </m:oMathPara>
@@ -9205,7 +8581,7 @@
             </p:txBody>
           </p:sp>
         </mc:Choice>
-        <mc:Fallback>
+        <mc:Fallback xmlns="">
           <p:sp>
             <p:nvSpPr>
               <p:cNvPr id="75" name="矩形 74">
@@ -9619,8 +8995,8 @@
           </p:txBody>
         </p:sp>
       </p:grpSp>
-      <mc:AlternateContent xmlns:mc="http://schemas.openxmlformats.org/markup-compatibility/2006">
-        <mc:Choice xmlns:a14="http://schemas.microsoft.com/office/drawing/2010/main" Requires="a14">
+      <mc:AlternateContent xmlns:mc="http://schemas.openxmlformats.org/markup-compatibility/2006" xmlns:a14="http://schemas.microsoft.com/office/drawing/2010/main">
+        <mc:Choice Requires="a14">
           <p:sp>
             <p:nvSpPr>
               <p:cNvPr id="82" name="矩形 81">
@@ -9665,13 +9041,7 @@
                         <a:rPr lang="en-US" altLang="zh-TW" i="1">
                           <a:latin typeface="Cambria Math" panose="02040503050406030204" pitchFamily="18" charset="0"/>
                         </a:rPr>
-                        <m:t>=</m:t>
-                      </m:r>
-                      <m:r>
-                        <a:rPr lang="en-US" altLang="zh-TW" i="1">
-                          <a:latin typeface="Cambria Math" panose="02040503050406030204" pitchFamily="18" charset="0"/>
-                        </a:rPr>
-                        <m:t>0</m:t>
+                        <m:t>=0</m:t>
                       </m:r>
                     </m:oMath>
                   </m:oMathPara>
@@ -9684,7 +9054,7 @@
             </p:txBody>
           </p:sp>
         </mc:Choice>
-        <mc:Fallback>
+        <mc:Fallback xmlns="">
           <p:sp>
             <p:nvSpPr>
               <p:cNvPr id="82" name="矩形 81">
@@ -9729,14 +9099,1069 @@
           </p:sp>
         </mc:Fallback>
       </mc:AlternateContent>
-      <mc:AlternateContent xmlns:mc="http://schemas.openxmlformats.org/markup-compatibility/2006">
-        <mc:Choice xmlns:a14="http://schemas.microsoft.com/office/drawing/2010/main" Requires="a14">
+      <p:grpSp>
+        <p:nvGrpSpPr>
+          <p:cNvPr id="120" name="群組 119">
+            <a:extLst>
+              <a:ext uri="{FF2B5EF4-FFF2-40B4-BE49-F238E27FC236}">
+                <a16:creationId xmlns:a16="http://schemas.microsoft.com/office/drawing/2014/main" id="{335F656F-FA50-472B-B729-81BF2650313C}"/>
+              </a:ext>
+            </a:extLst>
+          </p:cNvPr>
+          <p:cNvGrpSpPr/>
+          <p:nvPr/>
+        </p:nvGrpSpPr>
+        <p:grpSpPr>
+          <a:xfrm>
+            <a:off x="7121208" y="3766030"/>
+            <a:ext cx="1718308" cy="343171"/>
+            <a:chOff x="10557418" y="6399554"/>
+            <a:chExt cx="2266734" cy="452699"/>
+          </a:xfrm>
+        </p:grpSpPr>
+        <mc:AlternateContent xmlns:mc="http://schemas.openxmlformats.org/markup-compatibility/2006" xmlns:a14="http://schemas.microsoft.com/office/drawing/2010/main">
+          <mc:Choice Requires="a14">
+            <p:sp>
+              <p:nvSpPr>
+                <p:cNvPr id="121" name="矩形 120">
+                  <a:extLst>
+                    <a:ext uri="{FF2B5EF4-FFF2-40B4-BE49-F238E27FC236}">
+                      <a16:creationId xmlns:a16="http://schemas.microsoft.com/office/drawing/2014/main" id="{BF324142-26FB-4303-A2B5-0000DAE79927}"/>
+                    </a:ext>
+                  </a:extLst>
+                </p:cNvPr>
+                <p:cNvSpPr/>
+                <p:nvPr/>
+              </p:nvSpPr>
+              <p:spPr>
+                <a:xfrm>
+                  <a:off x="10995506" y="6399554"/>
+                  <a:ext cx="1828646" cy="452699"/>
+                </a:xfrm>
+                <a:prstGeom prst="rect">
+                  <a:avLst/>
+                </a:prstGeom>
+              </p:spPr>
+              <p:txBody>
+                <a:bodyPr wrap="none">
+                  <a:spAutoFit/>
+                </a:bodyPr>
+                <a:lstStyle/>
+                <a:p>
+                  <a:pPr/>
+                  <a14:m>
+                    <m:oMathPara xmlns:m="http://schemas.openxmlformats.org/officeDocument/2006/math">
+                      <m:oMathParaPr>
+                        <m:jc m:val="centerGroup"/>
+                      </m:oMathParaPr>
+                      <m:oMath xmlns:m="http://schemas.openxmlformats.org/officeDocument/2006/math">
+                        <m:sSubSup>
+                          <m:sSubSupPr>
+                            <m:ctrlPr>
+                              <a:rPr lang="en-US" altLang="zh-TW" sz="1630" i="1">
+                                <a:latin typeface="Cambria Math" panose="02040503050406030204" pitchFamily="18" charset="0"/>
+                              </a:rPr>
+                            </m:ctrlPr>
+                          </m:sSubSupPr>
+                          <m:e>
+                            <m:r>
+                              <a:rPr lang="en-US" altLang="zh-TW" sz="1630" i="1">
+                                <a:latin typeface="Cambria Math" panose="02040503050406030204" pitchFamily="18" charset="0"/>
+                              </a:rPr>
+                              <m:t>𝑊</m:t>
+                            </m:r>
+                          </m:e>
+                          <m:sub>
+                            <m:r>
+                              <a:rPr lang="en-US" altLang="zh-TW" sz="1630" i="1">
+                                <a:latin typeface="Cambria Math" panose="02040503050406030204" pitchFamily="18" charset="0"/>
+                              </a:rPr>
+                              <m:t>0</m:t>
+                            </m:r>
+                          </m:sub>
+                          <m:sup>
+                            <m:r>
+                              <a:rPr lang="en-US" altLang="zh-TW" sz="1630" i="1">
+                                <a:latin typeface="Cambria Math" panose="02040503050406030204" pitchFamily="18" charset="0"/>
+                              </a:rPr>
+                              <m:t> </m:t>
+                            </m:r>
+                          </m:sup>
+                        </m:sSubSup>
+                        <m:r>
+                          <a:rPr lang="en-US" altLang="zh-TW" sz="1630" i="1">
+                            <a:latin typeface="Cambria Math" panose="02040503050406030204" pitchFamily="18" charset="0"/>
+                          </a:rPr>
+                          <m:t>=1.5 </m:t>
+                        </m:r>
+                        <m:r>
+                          <a:rPr lang="en-US" altLang="zh-TW" sz="1630" i="1">
+                            <a:latin typeface="Cambria Math" panose="02040503050406030204" pitchFamily="18" charset="0"/>
+                          </a:rPr>
+                          <m:t>𝜇</m:t>
+                        </m:r>
+                        <m:r>
+                          <m:rPr>
+                            <m:sty m:val="p"/>
+                          </m:rPr>
+                          <a:rPr lang="en-US" altLang="zh-TW" sz="1630">
+                            <a:latin typeface="Cambria Math" panose="02040503050406030204" pitchFamily="18" charset="0"/>
+                          </a:rPr>
+                          <m:t>m</m:t>
+                        </m:r>
+                      </m:oMath>
+                    </m:oMathPara>
+                  </a14:m>
+                  <a:endParaRPr lang="zh-TW" altLang="en-US" sz="1630" dirty="0">
+                    <a:latin typeface="Times New Roman" panose="02020603050405020304" pitchFamily="18" charset="0"/>
+                    <a:cs typeface="Times New Roman" panose="02020603050405020304" pitchFamily="18" charset="0"/>
+                  </a:endParaRPr>
+                </a:p>
+              </p:txBody>
+            </p:sp>
+          </mc:Choice>
+          <mc:Fallback xmlns="">
+            <p:sp>
+              <p:nvSpPr>
+                <p:cNvPr id="6" name="矩形 5">
+                  <a:extLst>
+                    <a:ext uri="{FF2B5EF4-FFF2-40B4-BE49-F238E27FC236}">
+                      <a16:creationId xmlns:a16="http://schemas.microsoft.com/office/drawing/2014/main" id="{33615A92-2488-4DAF-823B-7ACEF3923D24}"/>
+                    </a:ext>
+                  </a:extLst>
+                </p:cNvPr>
+                <p:cNvSpPr>
+                  <a:spLocks noRot="1" noChangeAspect="1" noMove="1" noResize="1" noEditPoints="1" noAdjustHandles="1" noChangeArrowheads="1" noChangeShapeType="1" noTextEdit="1"/>
+                </p:cNvSpPr>
+                <p:nvPr/>
+              </p:nvSpPr>
+              <p:spPr>
+                <a:xfrm>
+                  <a:off x="10995506" y="6399554"/>
+                  <a:ext cx="1828646" cy="452699"/>
+                </a:xfrm>
+                <a:prstGeom prst="rect">
+                  <a:avLst/>
+                </a:prstGeom>
+                <a:blipFill>
+                  <a:blip r:embed="rId5"/>
+                  <a:stretch>
+                    <a:fillRect b="-5263"/>
+                  </a:stretch>
+                </a:blipFill>
+              </p:spPr>
+              <p:txBody>
+                <a:bodyPr/>
+                <a:lstStyle/>
+                <a:p>
+                  <a:r>
+                    <a:rPr lang="zh-TW" altLang="en-US">
+                      <a:noFill/>
+                    </a:rPr>
+                    <a:t> </a:t>
+                  </a:r>
+                </a:p>
+              </p:txBody>
+            </p:sp>
+          </mc:Fallback>
+        </mc:AlternateContent>
+        <p:pic>
+          <p:nvPicPr>
+            <p:cNvPr id="122" name="圖片 121">
+              <a:extLst>
+                <a:ext uri="{FF2B5EF4-FFF2-40B4-BE49-F238E27FC236}">
+                  <a16:creationId xmlns:a16="http://schemas.microsoft.com/office/drawing/2014/main" id="{2611E32E-A1A0-4605-A171-F58183CFCAA7}"/>
+                </a:ext>
+              </a:extLst>
+            </p:cNvPr>
+            <p:cNvPicPr>
+              <a:picLocks noChangeAspect="1"/>
+            </p:cNvPicPr>
+            <p:nvPr/>
+          </p:nvPicPr>
+          <p:blipFill>
+            <a:blip r:embed="rId36">
+              <a:clrChange>
+                <a:clrFrom>
+                  <a:srgbClr val="FFFFFF"/>
+                </a:clrFrom>
+                <a:clrTo>
+                  <a:srgbClr val="FFFFFF">
+                    <a:alpha val="0"/>
+                  </a:srgbClr>
+                </a:clrTo>
+              </a:clrChange>
+            </a:blip>
+            <a:stretch>
+              <a:fillRect/>
+            </a:stretch>
+          </p:blipFill>
+          <p:spPr>
+            <a:xfrm>
+              <a:off x="10557418" y="6619851"/>
+              <a:ext cx="476304" cy="136937"/>
+            </a:xfrm>
+            <a:prstGeom prst="rect">
+              <a:avLst/>
+            </a:prstGeom>
+          </p:spPr>
+        </p:pic>
+      </p:grpSp>
+      <p:pic>
+        <p:nvPicPr>
+          <p:cNvPr id="50" name="圖片 49">
+            <a:extLst>
+              <a:ext uri="{FF2B5EF4-FFF2-40B4-BE49-F238E27FC236}">
+                <a16:creationId xmlns:a16="http://schemas.microsoft.com/office/drawing/2014/main" id="{9941990F-EDFD-42E2-BC7D-65C32F7AA87E}"/>
+              </a:ext>
+            </a:extLst>
+          </p:cNvPr>
+          <p:cNvPicPr>
+            <a:picLocks noChangeAspect="1"/>
+          </p:cNvPicPr>
+          <p:nvPr/>
+        </p:nvPicPr>
+        <p:blipFill rotWithShape="1">
+          <a:blip r:embed="rId2">
+            <a:clrChange>
+              <a:clrFrom>
+                <a:srgbClr val="FFFFFF"/>
+              </a:clrFrom>
+              <a:clrTo>
+                <a:srgbClr val="FFFFFF">
+                  <a:alpha val="0"/>
+                </a:srgbClr>
+              </a:clrTo>
+            </a:clrChange>
+            <a:extLst>
+              <a:ext uri="{28A0092B-C50C-407E-A947-70E740481C1C}">
+                <a14:useLocalDpi xmlns:a14="http://schemas.microsoft.com/office/drawing/2010/main" val="0"/>
+              </a:ext>
+            </a:extLst>
+          </a:blip>
+          <a:srcRect l="17332" r="67529"/>
+          <a:stretch/>
+        </p:blipFill>
+        <p:spPr>
+          <a:xfrm>
+            <a:off x="3264963" y="1967582"/>
+            <a:ext cx="1539683" cy="1695008"/>
+          </a:xfrm>
+          <a:prstGeom prst="rect">
+            <a:avLst/>
+          </a:prstGeom>
+        </p:spPr>
+      </p:pic>
+      <p:pic>
+        <p:nvPicPr>
+          <p:cNvPr id="52" name="圖片 51">
+            <a:extLst>
+              <a:ext uri="{FF2B5EF4-FFF2-40B4-BE49-F238E27FC236}">
+                <a16:creationId xmlns:a16="http://schemas.microsoft.com/office/drawing/2014/main" id="{80805C89-A09B-4AD9-A6CA-D73D43ED32F6}"/>
+              </a:ext>
+            </a:extLst>
+          </p:cNvPr>
+          <p:cNvPicPr>
+            <a:picLocks noChangeAspect="1"/>
+          </p:cNvPicPr>
+          <p:nvPr/>
+        </p:nvPicPr>
+        <p:blipFill rotWithShape="1">
+          <a:blip r:embed="rId3">
+            <a:clrChange>
+              <a:clrFrom>
+                <a:srgbClr val="FFFFFF"/>
+              </a:clrFrom>
+              <a:clrTo>
+                <a:srgbClr val="FFFFFF">
+                  <a:alpha val="0"/>
+                </a:srgbClr>
+              </a:clrTo>
+            </a:clrChange>
+            <a:extLst>
+              <a:ext uri="{28A0092B-C50C-407E-A947-70E740481C1C}">
+                <a14:useLocalDpi xmlns:a14="http://schemas.microsoft.com/office/drawing/2010/main" val="0"/>
+              </a:ext>
+            </a:extLst>
+          </a:blip>
+          <a:srcRect l="17869" r="68173"/>
+          <a:stretch/>
+        </p:blipFill>
+        <p:spPr>
+          <a:xfrm>
+            <a:off x="3316335" y="356049"/>
+            <a:ext cx="1419564" cy="1695009"/>
+          </a:xfrm>
+          <a:prstGeom prst="rect">
+            <a:avLst/>
+          </a:prstGeom>
+        </p:spPr>
+      </p:pic>
+      <p:pic>
+        <p:nvPicPr>
+          <p:cNvPr id="53" name="圖片 52">
+            <a:extLst>
+              <a:ext uri="{FF2B5EF4-FFF2-40B4-BE49-F238E27FC236}">
+                <a16:creationId xmlns:a16="http://schemas.microsoft.com/office/drawing/2014/main" id="{919D1125-A4A7-42D9-9B8A-E98DA487BA19}"/>
+              </a:ext>
+            </a:extLst>
+          </p:cNvPr>
+          <p:cNvPicPr>
+            <a:picLocks noChangeAspect="1"/>
+          </p:cNvPicPr>
+          <p:nvPr/>
+        </p:nvPicPr>
+        <p:blipFill rotWithShape="1">
+          <a:blip r:embed="rId2">
+            <a:clrChange>
+              <a:clrFrom>
+                <a:srgbClr val="FFFFFF"/>
+              </a:clrFrom>
+              <a:clrTo>
+                <a:srgbClr val="FFFFFF">
+                  <a:alpha val="0"/>
+                </a:srgbClr>
+              </a:clrTo>
+            </a:clrChange>
+            <a:extLst>
+              <a:ext uri="{28A0092B-C50C-407E-A947-70E740481C1C}">
+                <a14:useLocalDpi xmlns:a14="http://schemas.microsoft.com/office/drawing/2010/main" val="0"/>
+              </a:ext>
+            </a:extLst>
+          </a:blip>
+          <a:srcRect l="34297" r="51208"/>
+          <a:stretch/>
+        </p:blipFill>
+        <p:spPr>
+          <a:xfrm>
+            <a:off x="4652297" y="1967580"/>
+            <a:ext cx="1474164" cy="1695009"/>
+          </a:xfrm>
+          <a:prstGeom prst="rect">
+            <a:avLst/>
+          </a:prstGeom>
+        </p:spPr>
+      </p:pic>
+      <p:pic>
+        <p:nvPicPr>
+          <p:cNvPr id="76" name="圖片 75">
+            <a:extLst>
+              <a:ext uri="{FF2B5EF4-FFF2-40B4-BE49-F238E27FC236}">
+                <a16:creationId xmlns:a16="http://schemas.microsoft.com/office/drawing/2014/main" id="{5A582E73-AA70-49B8-B03E-0CF3D8C1442F}"/>
+              </a:ext>
+            </a:extLst>
+          </p:cNvPr>
+          <p:cNvPicPr>
+            <a:picLocks noChangeAspect="1"/>
+          </p:cNvPicPr>
+          <p:nvPr/>
+        </p:nvPicPr>
+        <p:blipFill rotWithShape="1">
+          <a:blip r:embed="rId3">
+            <a:clrChange>
+              <a:clrFrom>
+                <a:srgbClr val="FFFFFF"/>
+              </a:clrFrom>
+              <a:clrTo>
+                <a:srgbClr val="FFFFFF">
+                  <a:alpha val="0"/>
+                </a:srgbClr>
+              </a:clrTo>
+            </a:clrChange>
+            <a:extLst>
+              <a:ext uri="{28A0092B-C50C-407E-A947-70E740481C1C}">
+                <a14:useLocalDpi xmlns:a14="http://schemas.microsoft.com/office/drawing/2010/main" val="0"/>
+              </a:ext>
+            </a:extLst>
+          </a:blip>
+          <a:srcRect l="34727" r="51100"/>
+          <a:stretch/>
+        </p:blipFill>
+        <p:spPr>
+          <a:xfrm>
+            <a:off x="4702916" y="356049"/>
+            <a:ext cx="1441405" cy="1695009"/>
+          </a:xfrm>
+          <a:prstGeom prst="rect">
+            <a:avLst/>
+          </a:prstGeom>
+        </p:spPr>
+      </p:pic>
+      <p:pic>
+        <p:nvPicPr>
+          <p:cNvPr id="85" name="圖片 84">
+            <a:extLst>
+              <a:ext uri="{FF2B5EF4-FFF2-40B4-BE49-F238E27FC236}">
+                <a16:creationId xmlns:a16="http://schemas.microsoft.com/office/drawing/2014/main" id="{66B8A3C7-F5DC-40CE-9E13-D42A0E9B7082}"/>
+              </a:ext>
+            </a:extLst>
+          </p:cNvPr>
+          <p:cNvPicPr>
+            <a:picLocks noChangeAspect="1"/>
+          </p:cNvPicPr>
+          <p:nvPr/>
+        </p:nvPicPr>
+        <p:blipFill rotWithShape="1">
+          <a:blip r:embed="rId2">
+            <a:clrChange>
+              <a:clrFrom>
+                <a:srgbClr val="FFFFFF"/>
+              </a:clrFrom>
+              <a:clrTo>
+                <a:srgbClr val="FFFFFF">
+                  <a:alpha val="0"/>
+                </a:srgbClr>
+              </a:clrTo>
+            </a:clrChange>
+            <a:extLst>
+              <a:ext uri="{28A0092B-C50C-407E-A947-70E740481C1C}">
+                <a14:useLocalDpi xmlns:a14="http://schemas.microsoft.com/office/drawing/2010/main" val="0"/>
+              </a:ext>
+            </a:extLst>
+          </a:blip>
+          <a:srcRect l="51262" r="34350"/>
+          <a:stretch/>
+        </p:blipFill>
+        <p:spPr>
+          <a:xfrm>
+            <a:off x="6047335" y="1967580"/>
+            <a:ext cx="1463244" cy="1695009"/>
+          </a:xfrm>
+          <a:prstGeom prst="rect">
+            <a:avLst/>
+          </a:prstGeom>
+        </p:spPr>
+      </p:pic>
+      <p:pic>
+        <p:nvPicPr>
+          <p:cNvPr id="87" name="圖片 86">
+            <a:extLst>
+              <a:ext uri="{FF2B5EF4-FFF2-40B4-BE49-F238E27FC236}">
+                <a16:creationId xmlns:a16="http://schemas.microsoft.com/office/drawing/2014/main" id="{F5CB16CB-E5EB-44F9-9347-7118514D5318}"/>
+              </a:ext>
+            </a:extLst>
+          </p:cNvPr>
+          <p:cNvPicPr>
+            <a:picLocks noChangeAspect="1"/>
+          </p:cNvPicPr>
+          <p:nvPr/>
+        </p:nvPicPr>
+        <p:blipFill rotWithShape="1">
+          <a:blip r:embed="rId3">
+            <a:clrChange>
+              <a:clrFrom>
+                <a:srgbClr val="FFFFFF"/>
+              </a:clrFrom>
+              <a:clrTo>
+                <a:srgbClr val="FFFFFF">
+                  <a:alpha val="0"/>
+                </a:srgbClr>
+              </a:clrTo>
+            </a:clrChange>
+            <a:extLst>
+              <a:ext uri="{28A0092B-C50C-407E-A947-70E740481C1C}">
+                <a14:useLocalDpi xmlns:a14="http://schemas.microsoft.com/office/drawing/2010/main" val="0"/>
+              </a:ext>
+            </a:extLst>
+          </a:blip>
+          <a:srcRect l="51155" r="34350"/>
+          <a:stretch/>
+        </p:blipFill>
+        <p:spPr>
+          <a:xfrm>
+            <a:off x="6027536" y="356049"/>
+            <a:ext cx="1474163" cy="1695009"/>
+          </a:xfrm>
+          <a:prstGeom prst="rect">
+            <a:avLst/>
+          </a:prstGeom>
+        </p:spPr>
+      </p:pic>
+      <p:pic>
+        <p:nvPicPr>
+          <p:cNvPr id="88" name="圖片 87">
+            <a:extLst>
+              <a:ext uri="{FF2B5EF4-FFF2-40B4-BE49-F238E27FC236}">
+                <a16:creationId xmlns:a16="http://schemas.microsoft.com/office/drawing/2014/main" id="{7696136E-F0F1-4D55-B922-76665211E370}"/>
+              </a:ext>
+            </a:extLst>
+          </p:cNvPr>
+          <p:cNvPicPr>
+            <a:picLocks noChangeAspect="1"/>
+          </p:cNvPicPr>
+          <p:nvPr/>
+        </p:nvPicPr>
+        <p:blipFill rotWithShape="1">
+          <a:blip r:embed="rId2">
+            <a:clrChange>
+              <a:clrFrom>
+                <a:srgbClr val="FFFFFF"/>
+              </a:clrFrom>
+              <a:clrTo>
+                <a:srgbClr val="FFFFFF">
+                  <a:alpha val="0"/>
+                </a:srgbClr>
+              </a:clrTo>
+            </a:clrChange>
+            <a:extLst>
+              <a:ext uri="{28A0092B-C50C-407E-A947-70E740481C1C}">
+                <a14:useLocalDpi xmlns:a14="http://schemas.microsoft.com/office/drawing/2010/main" val="0"/>
+              </a:ext>
+            </a:extLst>
+          </a:blip>
+          <a:srcRect l="67475" r="17051"/>
+          <a:stretch/>
+        </p:blipFill>
+        <p:spPr>
+          <a:xfrm>
+            <a:off x="7349904" y="1967580"/>
+            <a:ext cx="1573726" cy="1695009"/>
+          </a:xfrm>
+          <a:prstGeom prst="rect">
+            <a:avLst/>
+          </a:prstGeom>
+        </p:spPr>
+      </p:pic>
+      <p:pic>
+        <p:nvPicPr>
+          <p:cNvPr id="90" name="圖片 89">
+            <a:extLst>
+              <a:ext uri="{FF2B5EF4-FFF2-40B4-BE49-F238E27FC236}">
+                <a16:creationId xmlns:a16="http://schemas.microsoft.com/office/drawing/2014/main" id="{6A619A0F-40AE-4B91-A63A-3C778E89B6CB}"/>
+              </a:ext>
+            </a:extLst>
+          </p:cNvPr>
+          <p:cNvPicPr>
+            <a:picLocks noChangeAspect="1"/>
+          </p:cNvPicPr>
+          <p:nvPr/>
+        </p:nvPicPr>
+        <p:blipFill rotWithShape="1">
+          <a:blip r:embed="rId3">
+            <a:clrChange>
+              <a:clrFrom>
+                <a:srgbClr val="FFFFFF"/>
+              </a:clrFrom>
+              <a:clrTo>
+                <a:srgbClr val="FFFFFF">
+                  <a:alpha val="0"/>
+                </a:srgbClr>
+              </a:clrTo>
+            </a:clrChange>
+            <a:extLst>
+              <a:ext uri="{28A0092B-C50C-407E-A947-70E740481C1C}">
+                <a14:useLocalDpi xmlns:a14="http://schemas.microsoft.com/office/drawing/2010/main" val="0"/>
+              </a:ext>
+            </a:extLst>
+          </a:blip>
+          <a:srcRect l="67475" r="17169"/>
+          <a:stretch/>
+        </p:blipFill>
+        <p:spPr>
+          <a:xfrm>
+            <a:off x="7349903" y="356049"/>
+            <a:ext cx="1561673" cy="1695009"/>
+          </a:xfrm>
+          <a:prstGeom prst="rect">
+            <a:avLst/>
+          </a:prstGeom>
+        </p:spPr>
+      </p:pic>
+      <p:pic>
+        <p:nvPicPr>
+          <p:cNvPr id="93" name="圖片 92">
+            <a:extLst>
+              <a:ext uri="{FF2B5EF4-FFF2-40B4-BE49-F238E27FC236}">
+                <a16:creationId xmlns:a16="http://schemas.microsoft.com/office/drawing/2014/main" id="{8062FFDC-16EC-484E-AF52-585DDF499DE0}"/>
+              </a:ext>
+            </a:extLst>
+          </p:cNvPr>
+          <p:cNvPicPr>
+            <a:picLocks noChangeAspect="1"/>
+          </p:cNvPicPr>
+          <p:nvPr/>
+        </p:nvPicPr>
+        <p:blipFill rotWithShape="1">
+          <a:blip r:embed="rId37">
+            <a:clrChange>
+              <a:clrFrom>
+                <a:srgbClr val="FFFFFF"/>
+              </a:clrFrom>
+              <a:clrTo>
+                <a:srgbClr val="FFFFFF">
+                  <a:alpha val="0"/>
+                </a:srgbClr>
+              </a:clrTo>
+            </a:clrChange>
+            <a:extLst>
+              <a:ext uri="{28A0092B-C50C-407E-A947-70E740481C1C}">
+                <a14:useLocalDpi xmlns:a14="http://schemas.microsoft.com/office/drawing/2010/main" val="0"/>
+              </a:ext>
+            </a:extLst>
+          </a:blip>
+          <a:srcRect r="84278"/>
+          <a:stretch/>
+        </p:blipFill>
+        <p:spPr>
+          <a:xfrm>
+            <a:off x="1949389" y="4392014"/>
+            <a:ext cx="1504364" cy="1594800"/>
+          </a:xfrm>
+          <a:prstGeom prst="rect">
+            <a:avLst/>
+          </a:prstGeom>
+        </p:spPr>
+      </p:pic>
+      <p:sp>
+        <p:nvSpPr>
+          <p:cNvPr id="94" name="矩形: 圓角 93">
+            <a:extLst>
+              <a:ext uri="{FF2B5EF4-FFF2-40B4-BE49-F238E27FC236}">
+                <a16:creationId xmlns:a16="http://schemas.microsoft.com/office/drawing/2014/main" id="{656D87AA-E882-4DEB-B6E0-ADDD3D8553FA}"/>
+              </a:ext>
+            </a:extLst>
+          </p:cNvPr>
+          <p:cNvSpPr/>
+          <p:nvPr/>
+        </p:nvSpPr>
+        <p:spPr>
+          <a:xfrm>
+            <a:off x="1278832" y="4357006"/>
+            <a:ext cx="7555750" cy="1827150"/>
+          </a:xfrm>
+          <a:prstGeom prst="roundRect">
+            <a:avLst>
+              <a:gd name="adj" fmla="val 6163"/>
+            </a:avLst>
+          </a:prstGeom>
+          <a:noFill/>
+          <a:ln w="9525" cap="flat" cmpd="sng" algn="ctr">
+            <a:solidFill>
+              <a:schemeClr val="accent2"/>
+            </a:solidFill>
+            <a:prstDash val="solid"/>
+            <a:round/>
+            <a:headEnd type="none" w="med" len="med"/>
+            <a:tailEnd type="none" w="med" len="med"/>
+          </a:ln>
+        </p:spPr>
+        <p:style>
+          <a:lnRef idx="0">
+            <a:scrgbClr r="0" g="0" b="0"/>
+          </a:lnRef>
+          <a:fillRef idx="0">
+            <a:scrgbClr r="0" g="0" b="0"/>
+          </a:fillRef>
+          <a:effectRef idx="0">
+            <a:scrgbClr r="0" g="0" b="0"/>
+          </a:effectRef>
+          <a:fontRef idx="minor">
+            <a:schemeClr val="accent2"/>
+          </a:fontRef>
+        </p:style>
+        <p:txBody>
+          <a:bodyPr rot="0" spcFirstLastPara="0" vertOverflow="overflow" horzOverflow="overflow" vert="horz" wrap="square" lIns="91440" tIns="45720" rIns="91440" bIns="45720" numCol="1" spcCol="0" rtlCol="0" fromWordArt="0" anchor="ctr" anchorCtr="0" forceAA="0" compatLnSpc="1">
+            <a:prstTxWarp prst="textNoShape">
+              <a:avLst/>
+            </a:prstTxWarp>
+            <a:noAutofit/>
+          </a:bodyPr>
+          <a:lstStyle/>
+          <a:p>
+            <a:pPr algn="ctr"/>
+            <a:endParaRPr lang="zh-TW" altLang="en-US" sz="1900" dirty="0">
+              <a:latin typeface="Times New Roman" panose="02020603050405020304" pitchFamily="18" charset="0"/>
+              <a:cs typeface="Times New Roman" panose="02020603050405020304" pitchFamily="18" charset="0"/>
+            </a:endParaRPr>
+          </a:p>
+        </p:txBody>
+      </p:sp>
+      <p:grpSp>
+        <p:nvGrpSpPr>
+          <p:cNvPr id="96" name="群組 95">
+            <a:extLst>
+              <a:ext uri="{FF2B5EF4-FFF2-40B4-BE49-F238E27FC236}">
+                <a16:creationId xmlns:a16="http://schemas.microsoft.com/office/drawing/2014/main" id="{028FB8BC-4F3E-40A6-B87C-91DB333A844B}"/>
+              </a:ext>
+            </a:extLst>
+          </p:cNvPr>
+          <p:cNvGrpSpPr/>
+          <p:nvPr/>
+        </p:nvGrpSpPr>
+        <p:grpSpPr>
+          <a:xfrm>
+            <a:off x="7121208" y="6153964"/>
+            <a:ext cx="1718308" cy="343171"/>
+            <a:chOff x="10557418" y="6399554"/>
+            <a:chExt cx="2266734" cy="452699"/>
+          </a:xfrm>
+        </p:grpSpPr>
+        <mc:AlternateContent xmlns:mc="http://schemas.openxmlformats.org/markup-compatibility/2006" xmlns:a14="http://schemas.microsoft.com/office/drawing/2010/main">
+          <mc:Choice Requires="a14">
+            <p:sp>
+              <p:nvSpPr>
+                <p:cNvPr id="97" name="矩形 96">
+                  <a:extLst>
+                    <a:ext uri="{FF2B5EF4-FFF2-40B4-BE49-F238E27FC236}">
+                      <a16:creationId xmlns:a16="http://schemas.microsoft.com/office/drawing/2014/main" id="{68AD742F-7E41-41E5-91DA-135B74635ECE}"/>
+                    </a:ext>
+                  </a:extLst>
+                </p:cNvPr>
+                <p:cNvSpPr/>
+                <p:nvPr/>
+              </p:nvSpPr>
+              <p:spPr>
+                <a:xfrm>
+                  <a:off x="10995506" y="6399554"/>
+                  <a:ext cx="1828646" cy="452699"/>
+                </a:xfrm>
+                <a:prstGeom prst="rect">
+                  <a:avLst/>
+                </a:prstGeom>
+              </p:spPr>
+              <p:txBody>
+                <a:bodyPr wrap="none">
+                  <a:spAutoFit/>
+                </a:bodyPr>
+                <a:lstStyle/>
+                <a:p>
+                  <a:pPr/>
+                  <a14:m>
+                    <m:oMathPara xmlns:m="http://schemas.openxmlformats.org/officeDocument/2006/math">
+                      <m:oMathParaPr>
+                        <m:jc m:val="centerGroup"/>
+                      </m:oMathParaPr>
+                      <m:oMath xmlns:m="http://schemas.openxmlformats.org/officeDocument/2006/math">
+                        <m:sSubSup>
+                          <m:sSubSupPr>
+                            <m:ctrlPr>
+                              <a:rPr lang="en-US" altLang="zh-TW" sz="1630" i="1">
+                                <a:latin typeface="Cambria Math" panose="02040503050406030204" pitchFamily="18" charset="0"/>
+                              </a:rPr>
+                            </m:ctrlPr>
+                          </m:sSubSupPr>
+                          <m:e>
+                            <m:r>
+                              <a:rPr lang="en-US" altLang="zh-TW" sz="1630" i="1">
+                                <a:latin typeface="Cambria Math" panose="02040503050406030204" pitchFamily="18" charset="0"/>
+                              </a:rPr>
+                              <m:t>𝑊</m:t>
+                            </m:r>
+                          </m:e>
+                          <m:sub>
+                            <m:r>
+                              <a:rPr lang="en-US" altLang="zh-TW" sz="1630" i="1">
+                                <a:latin typeface="Cambria Math" panose="02040503050406030204" pitchFamily="18" charset="0"/>
+                              </a:rPr>
+                              <m:t>0</m:t>
+                            </m:r>
+                          </m:sub>
+                          <m:sup>
+                            <m:r>
+                              <a:rPr lang="en-US" altLang="zh-TW" sz="1630" i="1">
+                                <a:latin typeface="Cambria Math" panose="02040503050406030204" pitchFamily="18" charset="0"/>
+                              </a:rPr>
+                              <m:t> </m:t>
+                            </m:r>
+                          </m:sup>
+                        </m:sSubSup>
+                        <m:r>
+                          <a:rPr lang="en-US" altLang="zh-TW" sz="1630" i="1">
+                            <a:latin typeface="Cambria Math" panose="02040503050406030204" pitchFamily="18" charset="0"/>
+                          </a:rPr>
+                          <m:t>=1.5 </m:t>
+                        </m:r>
+                        <m:r>
+                          <a:rPr lang="en-US" altLang="zh-TW" sz="1630" i="1">
+                            <a:latin typeface="Cambria Math" panose="02040503050406030204" pitchFamily="18" charset="0"/>
+                          </a:rPr>
+                          <m:t>𝜇</m:t>
+                        </m:r>
+                        <m:r>
+                          <m:rPr>
+                            <m:sty m:val="p"/>
+                          </m:rPr>
+                          <a:rPr lang="en-US" altLang="zh-TW" sz="1630">
+                            <a:latin typeface="Cambria Math" panose="02040503050406030204" pitchFamily="18" charset="0"/>
+                          </a:rPr>
+                          <m:t>m</m:t>
+                        </m:r>
+                      </m:oMath>
+                    </m:oMathPara>
+                  </a14:m>
+                  <a:endParaRPr lang="zh-TW" altLang="en-US" sz="1630" dirty="0">
+                    <a:latin typeface="Times New Roman" panose="02020603050405020304" pitchFamily="18" charset="0"/>
+                    <a:cs typeface="Times New Roman" panose="02020603050405020304" pitchFamily="18" charset="0"/>
+                  </a:endParaRPr>
+                </a:p>
+              </p:txBody>
+            </p:sp>
+          </mc:Choice>
+          <mc:Fallback xmlns="">
+            <p:sp>
+              <p:nvSpPr>
+                <p:cNvPr id="6" name="矩形 5">
+                  <a:extLst>
+                    <a:ext uri="{FF2B5EF4-FFF2-40B4-BE49-F238E27FC236}">
+                      <a16:creationId xmlns:a16="http://schemas.microsoft.com/office/drawing/2014/main" id="{33615A92-2488-4DAF-823B-7ACEF3923D24}"/>
+                    </a:ext>
+                  </a:extLst>
+                </p:cNvPr>
+                <p:cNvSpPr>
+                  <a:spLocks noRot="1" noChangeAspect="1" noMove="1" noResize="1" noEditPoints="1" noAdjustHandles="1" noChangeArrowheads="1" noChangeShapeType="1" noTextEdit="1"/>
+                </p:cNvSpPr>
+                <p:nvPr/>
+              </p:nvSpPr>
+              <p:spPr>
+                <a:xfrm>
+                  <a:off x="10995506" y="6399554"/>
+                  <a:ext cx="1828646" cy="452699"/>
+                </a:xfrm>
+                <a:prstGeom prst="rect">
+                  <a:avLst/>
+                </a:prstGeom>
+                <a:blipFill>
+                  <a:blip r:embed="rId5"/>
+                  <a:stretch>
+                    <a:fillRect b="-5263"/>
+                  </a:stretch>
+                </a:blipFill>
+              </p:spPr>
+              <p:txBody>
+                <a:bodyPr/>
+                <a:lstStyle/>
+                <a:p>
+                  <a:r>
+                    <a:rPr lang="zh-TW" altLang="en-US">
+                      <a:noFill/>
+                    </a:rPr>
+                    <a:t> </a:t>
+                  </a:r>
+                </a:p>
+              </p:txBody>
+            </p:sp>
+          </mc:Fallback>
+        </mc:AlternateContent>
+        <p:pic>
+          <p:nvPicPr>
+            <p:cNvPr id="98" name="圖片 97">
+              <a:extLst>
+                <a:ext uri="{FF2B5EF4-FFF2-40B4-BE49-F238E27FC236}">
+                  <a16:creationId xmlns:a16="http://schemas.microsoft.com/office/drawing/2014/main" id="{B382353E-4620-45C9-BA4A-FB116C5FFF88}"/>
+                </a:ext>
+              </a:extLst>
+            </p:cNvPr>
+            <p:cNvPicPr>
+              <a:picLocks noChangeAspect="1"/>
+            </p:cNvPicPr>
+            <p:nvPr/>
+          </p:nvPicPr>
+          <p:blipFill>
+            <a:blip r:embed="rId36">
+              <a:clrChange>
+                <a:clrFrom>
+                  <a:srgbClr val="FFFFFF"/>
+                </a:clrFrom>
+                <a:clrTo>
+                  <a:srgbClr val="FFFFFF">
+                    <a:alpha val="0"/>
+                  </a:srgbClr>
+                </a:clrTo>
+              </a:clrChange>
+            </a:blip>
+            <a:stretch>
+              <a:fillRect/>
+            </a:stretch>
+          </p:blipFill>
+          <p:spPr>
+            <a:xfrm>
+              <a:off x="10557418" y="6619851"/>
+              <a:ext cx="476304" cy="136937"/>
+            </a:xfrm>
+            <a:prstGeom prst="rect">
+              <a:avLst/>
+            </a:prstGeom>
+          </p:spPr>
+        </p:pic>
+      </p:grpSp>
+      <mc:AlternateContent xmlns:mc="http://schemas.openxmlformats.org/markup-compatibility/2006" xmlns:a14="http://schemas.microsoft.com/office/drawing/2010/main">
+        <mc:Choice Requires="a14">
           <p:sp>
             <p:nvSpPr>
-              <p:cNvPr id="83" name="矩形 82">
+              <p:cNvPr id="99" name="矩形 98">
                 <a:extLst>
                   <a:ext uri="{FF2B5EF4-FFF2-40B4-BE49-F238E27FC236}">
-                    <a16:creationId xmlns:a16="http://schemas.microsoft.com/office/drawing/2014/main" id="{287FE308-8D4D-42B7-B8A9-E8CDF97468FD}"/>
+                    <a16:creationId xmlns:a16="http://schemas.microsoft.com/office/drawing/2014/main" id="{CCDFC17F-8CE5-4CD9-BDDC-9BDD40AFD416}"/>
+                  </a:ext>
+                </a:extLst>
+              </p:cNvPr>
+              <p:cNvSpPr/>
+              <p:nvPr/>
+            </p:nvSpPr>
+            <p:spPr>
+              <a:xfrm>
+                <a:off x="1121156" y="3906164"/>
+                <a:ext cx="1495601" cy="456728"/>
+              </a:xfrm>
+              <a:prstGeom prst="rect">
+                <a:avLst/>
+              </a:prstGeom>
+            </p:spPr>
+            <p:txBody>
+              <a:bodyPr wrap="none">
+                <a:spAutoFit/>
+              </a:bodyPr>
+              <a:lstStyle/>
+              <a:p>
+                <a:pPr/>
+                <a14:m>
+                  <m:oMathPara xmlns:m="http://schemas.openxmlformats.org/officeDocument/2006/math">
+                    <m:oMathParaPr>
+                      <m:jc m:val="centerGroup"/>
+                    </m:oMathParaPr>
+                    <m:oMath xmlns:m="http://schemas.openxmlformats.org/officeDocument/2006/math">
+                      <m:r>
+                        <m:rPr>
+                          <m:sty m:val="p"/>
+                        </m:rPr>
+                        <a:rPr lang="en-US" altLang="zh-TW" sz="2000">
+                          <a:latin typeface="Cambria Math" panose="02040503050406030204" pitchFamily="18" charset="0"/>
+                        </a:rPr>
+                        <m:t>Re</m:t>
+                      </m:r>
+                      <m:d>
+                        <m:dPr>
+                          <m:begChr m:val="["/>
+                          <m:endChr m:val="]"/>
+                          <m:ctrlPr>
+                            <a:rPr lang="en-US" altLang="zh-TW" sz="2000" i="1">
+                              <a:latin typeface="Cambria Math" panose="02040503050406030204" pitchFamily="18" charset="0"/>
+                            </a:rPr>
+                          </m:ctrlPr>
+                        </m:dPr>
+                        <m:e>
+                          <m:sSubSup>
+                            <m:sSubSupPr>
+                              <m:ctrlPr>
+                                <a:rPr lang="en-US" altLang="zh-TW" sz="2000" i="1">
+                                  <a:latin typeface="Cambria Math" panose="02040503050406030204" pitchFamily="18" charset="0"/>
+                                </a:rPr>
+                              </m:ctrlPr>
+                            </m:sSubSupPr>
+                            <m:e>
+                              <m:r>
+                                <a:rPr lang="en-US" altLang="zh-TW" sz="2000" i="1">
+                                  <a:latin typeface="Cambria Math" panose="02040503050406030204" pitchFamily="18" charset="0"/>
+                                </a:rPr>
+                                <m:t>𝐴</m:t>
+                              </m:r>
+                            </m:e>
+                            <m:sub>
+                              <m:r>
+                                <a:rPr lang="en-US" altLang="zh-TW" sz="2000" i="1">
+                                  <a:latin typeface="Cambria Math" panose="02040503050406030204" pitchFamily="18" charset="0"/>
+                                </a:rPr>
+                                <m:t>ℓ,</m:t>
+                              </m:r>
+                              <m:r>
+                                <a:rPr lang="en-US" altLang="zh-TW" sz="2000" i="1">
+                                  <a:latin typeface="Cambria Math" panose="02040503050406030204" pitchFamily="18" charset="0"/>
+                                </a:rPr>
+                                <m:t>𝑝</m:t>
+                              </m:r>
+                            </m:sub>
+                            <m:sup>
+                              <m:r>
+                                <a:rPr lang="en-US" altLang="zh-TW" sz="2000" i="1">
+                                  <a:latin typeface="Cambria Math" panose="02040503050406030204" pitchFamily="18" charset="0"/>
+                                </a:rPr>
+                                <m:t>𝐿</m:t>
+                              </m:r>
+                            </m:sup>
+                          </m:sSubSup>
+                          <m:d>
+                            <m:dPr>
+                              <m:ctrlPr>
+                                <a:rPr lang="en-US" altLang="zh-TW" sz="2000" i="1">
+                                  <a:latin typeface="Cambria Math" panose="02040503050406030204" pitchFamily="18" charset="0"/>
+                                </a:rPr>
+                              </m:ctrlPr>
+                            </m:dPr>
+                            <m:e>
+                              <m:r>
+                                <a:rPr lang="en-US" altLang="zh-TW" sz="2000" b="1" i="1">
+                                  <a:latin typeface="Cambria Math" panose="02040503050406030204" pitchFamily="18" charset="0"/>
+                                </a:rPr>
+                                <m:t>𝒓</m:t>
+                              </m:r>
+                            </m:e>
+                          </m:d>
+                        </m:e>
+                      </m:d>
+                    </m:oMath>
+                  </m:oMathPara>
+                </a14:m>
+                <a:endParaRPr lang="zh-TW" altLang="en-US" sz="2000" dirty="0">
+                  <a:latin typeface="Times New Roman" panose="02020603050405020304" pitchFamily="18" charset="0"/>
+                  <a:cs typeface="Times New Roman" panose="02020603050405020304" pitchFamily="18" charset="0"/>
+                </a:endParaRPr>
+              </a:p>
+            </p:txBody>
+          </p:sp>
+        </mc:Choice>
+        <mc:Fallback xmlns="">
+          <p:sp>
+            <p:nvSpPr>
+              <p:cNvPr id="99" name="矩形 98">
+                <a:extLst>
+                  <a:ext uri="{FF2B5EF4-FFF2-40B4-BE49-F238E27FC236}">
+                    <a16:creationId xmlns:a16="http://schemas.microsoft.com/office/drawing/2014/main" id="{CCDFC17F-8CE5-4CD9-BDDC-9BDD40AFD416}"/>
+                  </a:ext>
+                </a:extLst>
+              </p:cNvPr>
+              <p:cNvSpPr>
+                <a:spLocks noRot="1" noChangeAspect="1" noMove="1" noResize="1" noEditPoints="1" noAdjustHandles="1" noChangeArrowheads="1" noChangeShapeType="1" noTextEdit="1"/>
+              </p:cNvSpPr>
+              <p:nvPr/>
+            </p:nvSpPr>
+            <p:spPr>
+              <a:xfrm>
+                <a:off x="1121156" y="3906164"/>
+                <a:ext cx="1495601" cy="456728"/>
+              </a:xfrm>
+              <a:prstGeom prst="rect">
+                <a:avLst/>
+              </a:prstGeom>
+              <a:blipFill>
+                <a:blip r:embed="rId38"/>
+                <a:stretch>
+                  <a:fillRect b="-4000"/>
+                </a:stretch>
+              </a:blipFill>
+            </p:spPr>
+            <p:txBody>
+              <a:bodyPr/>
+              <a:lstStyle/>
+              <a:p>
+                <a:r>
+                  <a:rPr lang="zh-TW" altLang="en-US">
+                    <a:noFill/>
+                  </a:rPr>
+                  <a:t> </a:t>
+                </a:r>
+              </a:p>
+            </p:txBody>
+          </p:sp>
+        </mc:Fallback>
+      </mc:AlternateContent>
+      <mc:AlternateContent xmlns:mc="http://schemas.openxmlformats.org/markup-compatibility/2006" xmlns:a14="http://schemas.microsoft.com/office/drawing/2010/main">
+        <mc:Choice Requires="a14">
+          <p:sp>
+            <p:nvSpPr>
+              <p:cNvPr id="101" name="矩形 100">
+                <a:extLst>
+                  <a:ext uri="{FF2B5EF4-FFF2-40B4-BE49-F238E27FC236}">
+                    <a16:creationId xmlns:a16="http://schemas.microsoft.com/office/drawing/2014/main" id="{5350D42C-0061-44AB-A6FD-6537AA87F885}"/>
                   </a:ext>
                 </a:extLst>
               </p:cNvPr>
@@ -9775,13 +10200,7 @@
                         <a:rPr lang="en-US" altLang="zh-TW" i="1">
                           <a:latin typeface="Cambria Math" panose="02040503050406030204" pitchFamily="18" charset="0"/>
                         </a:rPr>
-                        <m:t>=</m:t>
-                      </m:r>
-                      <m:r>
-                        <a:rPr lang="en-US" altLang="zh-TW" i="1">
-                          <a:latin typeface="Cambria Math" panose="02040503050406030204" pitchFamily="18" charset="0"/>
-                        </a:rPr>
-                        <m:t>0</m:t>
+                        <m:t>=0</m:t>
                       </m:r>
                     </m:oMath>
                   </m:oMathPara>
@@ -9794,13 +10213,13 @@
             </p:txBody>
           </p:sp>
         </mc:Choice>
-        <mc:Fallback>
+        <mc:Fallback xmlns="">
           <p:sp>
             <p:nvSpPr>
-              <p:cNvPr id="83" name="矩形 82">
+              <p:cNvPr id="101" name="矩形 100">
                 <a:extLst>
                   <a:ext uri="{FF2B5EF4-FFF2-40B4-BE49-F238E27FC236}">
-                    <a16:creationId xmlns:a16="http://schemas.microsoft.com/office/drawing/2014/main" id="{287FE308-8D4D-42B7-B8A9-E8CDF97468FD}"/>
+                    <a16:creationId xmlns:a16="http://schemas.microsoft.com/office/drawing/2014/main" id="{5350D42C-0061-44AB-A6FD-6537AA87F885}"/>
                   </a:ext>
                 </a:extLst>
               </p:cNvPr>
@@ -9818,7 +10237,7 @@
                 <a:avLst/>
               </a:prstGeom>
               <a:blipFill>
-                <a:blip r:embed="rId36"/>
+                <a:blip r:embed="rId39"/>
                 <a:stretch>
                   <a:fillRect b="-8197"/>
                 </a:stretch>
@@ -9839,14 +10258,14 @@
           </p:sp>
         </mc:Fallback>
       </mc:AlternateContent>
-      <mc:AlternateContent xmlns:mc="http://schemas.openxmlformats.org/markup-compatibility/2006">
-        <mc:Choice xmlns:a14="http://schemas.microsoft.com/office/drawing/2010/main" Requires="a14">
+      <mc:AlternateContent xmlns:mc="http://schemas.openxmlformats.org/markup-compatibility/2006" xmlns:a14="http://schemas.microsoft.com/office/drawing/2010/main">
+        <mc:Choice Requires="a14">
           <p:sp>
             <p:nvSpPr>
-              <p:cNvPr id="84" name="矩形 83">
+              <p:cNvPr id="102" name="矩形 101">
                 <a:extLst>
                   <a:ext uri="{FF2B5EF4-FFF2-40B4-BE49-F238E27FC236}">
-                    <a16:creationId xmlns:a16="http://schemas.microsoft.com/office/drawing/2014/main" id="{65E3A63F-4D89-41B4-B9E7-ED2A3B2D83B3}"/>
+                    <a16:creationId xmlns:a16="http://schemas.microsoft.com/office/drawing/2014/main" id="{C6A9F499-88C2-4A42-9E6C-0A60EEFB352A}"/>
                   </a:ext>
                 </a:extLst>
               </p:cNvPr>
@@ -9879,13 +10298,7 @@
                         <a:rPr lang="en-US" altLang="zh-TW" sz="1630" i="1">
                           <a:latin typeface="Cambria Math" panose="02040503050406030204" pitchFamily="18" charset="0"/>
                         </a:rPr>
-                        <m:t>1</m:t>
-                      </m:r>
-                      <m:r>
-                        <a:rPr lang="en-US" altLang="zh-TW" sz="1630" i="1">
-                          <a:latin typeface="Cambria Math" panose="02040503050406030204" pitchFamily="18" charset="0"/>
-                        </a:rPr>
-                        <m:t> </m:t>
+                        <m:t>1 </m:t>
                       </m:r>
                       <m:r>
                         <a:rPr lang="en-US" altLang="zh-TW" sz="1630" i="1">
@@ -9913,13 +10326,13 @@
             </p:txBody>
           </p:sp>
         </mc:Choice>
-        <mc:Fallback>
+        <mc:Fallback xmlns="">
           <p:sp>
             <p:nvSpPr>
-              <p:cNvPr id="84" name="矩形 83">
+              <p:cNvPr id="102" name="矩形 101">
                 <a:extLst>
                   <a:ext uri="{FF2B5EF4-FFF2-40B4-BE49-F238E27FC236}">
-                    <a16:creationId xmlns:a16="http://schemas.microsoft.com/office/drawing/2014/main" id="{65E3A63F-4D89-41B4-B9E7-ED2A3B2D83B3}"/>
+                    <a16:creationId xmlns:a16="http://schemas.microsoft.com/office/drawing/2014/main" id="{C6A9F499-88C2-4A42-9E6C-0A60EEFB352A}"/>
                   </a:ext>
                 </a:extLst>
               </p:cNvPr>
@@ -9937,7 +10350,7 @@
                 <a:avLst/>
               </a:prstGeom>
               <a:blipFill>
-                <a:blip r:embed="rId37"/>
+                <a:blip r:embed="rId40"/>
                 <a:stretch>
                   <a:fillRect b="-5263"/>
                 </a:stretch>
@@ -9960,10 +10373,10 @@
       </mc:AlternateContent>
       <p:grpSp>
         <p:nvGrpSpPr>
-          <p:cNvPr id="91" name="群組 90">
+          <p:cNvPr id="103" name="群組 102">
             <a:extLst>
               <a:ext uri="{FF2B5EF4-FFF2-40B4-BE49-F238E27FC236}">
-                <a16:creationId xmlns:a16="http://schemas.microsoft.com/office/drawing/2014/main" id="{3A0BB8D0-0BD8-440C-854D-8B897490D785}"/>
+                <a16:creationId xmlns:a16="http://schemas.microsoft.com/office/drawing/2014/main" id="{8C4C4C6F-3736-49D5-9E57-59F5D2782B00}"/>
               </a:ext>
             </a:extLst>
           </p:cNvPr>
@@ -9982,10 +10395,10 @@
           <mc:Choice Requires="a14">
             <p:sp>
               <p:nvSpPr>
-                <p:cNvPr id="92" name="文字方塊 91">
+                <p:cNvPr id="104" name="文字方塊 103">
                   <a:extLst>
                     <a:ext uri="{FF2B5EF4-FFF2-40B4-BE49-F238E27FC236}">
-                      <a16:creationId xmlns:a16="http://schemas.microsoft.com/office/drawing/2014/main" id="{A535CFE8-1251-45EE-BB8B-E1894B468772}"/>
+                      <a16:creationId xmlns:a16="http://schemas.microsoft.com/office/drawing/2014/main" id="{7902BC07-72A6-475A-B460-886E80236F90}"/>
                     </a:ext>
                   </a:extLst>
                 </p:cNvPr>
@@ -10093,10 +10506,10 @@
           <mc:Choice Requires="a14">
             <p:sp>
               <p:nvSpPr>
-                <p:cNvPr id="95" name="文字方塊 94">
+                <p:cNvPr id="105" name="文字方塊 104">
                   <a:extLst>
                     <a:ext uri="{FF2B5EF4-FFF2-40B4-BE49-F238E27FC236}">
-                      <a16:creationId xmlns:a16="http://schemas.microsoft.com/office/drawing/2014/main" id="{463C40B9-DE99-4F6D-882C-ECBE1952202D}"/>
+                      <a16:creationId xmlns:a16="http://schemas.microsoft.com/office/drawing/2014/main" id="{564F2B1A-3189-4A19-811A-9C3E28670919}"/>
                     </a:ext>
                   </a:extLst>
                 </p:cNvPr>
@@ -10202,10 +10615,10 @@
         </mc:AlternateContent>
         <p:sp>
           <p:nvSpPr>
-            <p:cNvPr id="100" name="箭號: 向右 99">
+            <p:cNvPr id="106" name="箭號: 向右 105">
               <a:extLst>
                 <a:ext uri="{FF2B5EF4-FFF2-40B4-BE49-F238E27FC236}">
-                  <a16:creationId xmlns:a16="http://schemas.microsoft.com/office/drawing/2014/main" id="{B3AB2D38-FC86-4126-A3D7-6A0087F848FE}"/>
+                  <a16:creationId xmlns:a16="http://schemas.microsoft.com/office/drawing/2014/main" id="{6573FC33-013C-4C93-B7FA-21C524D99D39}"/>
                 </a:ext>
               </a:extLst>
             </p:cNvPr>
@@ -10265,10 +10678,10 @@
         </p:sp>
         <p:sp>
           <p:nvSpPr>
-            <p:cNvPr id="118" name="箭號: 向右 117">
+            <p:cNvPr id="107" name="箭號: 向右 106">
               <a:extLst>
                 <a:ext uri="{FF2B5EF4-FFF2-40B4-BE49-F238E27FC236}">
-                  <a16:creationId xmlns:a16="http://schemas.microsoft.com/office/drawing/2014/main" id="{B3462263-DD9C-42BC-B36A-8B9B88B1A8C8}"/>
+                  <a16:creationId xmlns:a16="http://schemas.microsoft.com/office/drawing/2014/main" id="{D0D33CFE-70D9-4A4A-8EFF-97E30FFA784E}"/>
                 </a:ext>
               </a:extLst>
             </p:cNvPr>
@@ -10329,10 +10742,10 @@
       </p:grpSp>
       <p:sp>
         <p:nvSpPr>
-          <p:cNvPr id="119" name="矩形 118">
+          <p:cNvPr id="108" name="矩形 107">
             <a:extLst>
               <a:ext uri="{FF2B5EF4-FFF2-40B4-BE49-F238E27FC236}">
-                <a16:creationId xmlns:a16="http://schemas.microsoft.com/office/drawing/2014/main" id="{4DFBEE7D-1A45-46FE-8255-F523F7D876CA}"/>
+                <a16:creationId xmlns:a16="http://schemas.microsoft.com/office/drawing/2014/main" id="{036E5104-5C13-443B-BDDD-07DCEF8E90BD}"/>
               </a:ext>
             </a:extLst>
           </p:cNvPr>
@@ -10370,10 +10783,10 @@
       </p:sp>
       <p:grpSp>
         <p:nvGrpSpPr>
-          <p:cNvPr id="120" name="群組 119">
+          <p:cNvPr id="109" name="群組 108">
             <a:extLst>
               <a:ext uri="{FF2B5EF4-FFF2-40B4-BE49-F238E27FC236}">
-                <a16:creationId xmlns:a16="http://schemas.microsoft.com/office/drawing/2014/main" id="{335F656F-FA50-472B-B729-81BF2650313C}"/>
+                <a16:creationId xmlns:a16="http://schemas.microsoft.com/office/drawing/2014/main" id="{C4C985B0-C879-48BD-BCCD-A235F5FEF147}"/>
               </a:ext>
             </a:extLst>
           </p:cNvPr>
@@ -10392,10 +10805,10 @@
           <mc:Choice Requires="a14">
             <p:sp>
               <p:nvSpPr>
-                <p:cNvPr id="121" name="矩形 120">
+                <p:cNvPr id="110" name="矩形 109">
                   <a:extLst>
                     <a:ext uri="{FF2B5EF4-FFF2-40B4-BE49-F238E27FC236}">
-                      <a16:creationId xmlns:a16="http://schemas.microsoft.com/office/drawing/2014/main" id="{BF324142-26FB-4303-A2B5-0000DAE79927}"/>
+                      <a16:creationId xmlns:a16="http://schemas.microsoft.com/office/drawing/2014/main" id="{EBC29B61-F0D3-4950-B2B4-182FB0496461}"/>
                     </a:ext>
                   </a:extLst>
                 </p:cNvPr>
@@ -10461,31 +10874,7 @@
                           <a:rPr lang="en-US" altLang="zh-TW" sz="1630" i="1">
                             <a:latin typeface="Cambria Math" panose="02040503050406030204" pitchFamily="18" charset="0"/>
                           </a:rPr>
-                          <m:t>=</m:t>
-                        </m:r>
-                        <m:r>
-                          <a:rPr lang="en-US" altLang="zh-TW" sz="1630" i="1">
-                            <a:latin typeface="Cambria Math" panose="02040503050406030204" pitchFamily="18" charset="0"/>
-                          </a:rPr>
-                          <m:t>1</m:t>
-                        </m:r>
-                        <m:r>
-                          <a:rPr lang="en-US" altLang="zh-TW" sz="1630" i="1">
-                            <a:latin typeface="Cambria Math" panose="02040503050406030204" pitchFamily="18" charset="0"/>
-                          </a:rPr>
-                          <m:t>.</m:t>
-                        </m:r>
-                        <m:r>
-                          <a:rPr lang="en-US" altLang="zh-TW" sz="1630" i="1">
-                            <a:latin typeface="Cambria Math" panose="02040503050406030204" pitchFamily="18" charset="0"/>
-                          </a:rPr>
-                          <m:t>5</m:t>
-                        </m:r>
-                        <m:r>
-                          <a:rPr lang="en-US" altLang="zh-TW" sz="1630" i="1">
-                            <a:latin typeface="Cambria Math" panose="02040503050406030204" pitchFamily="18" charset="0"/>
-                          </a:rPr>
-                          <m:t> </m:t>
+                          <m:t>=1.5 </m:t>
                         </m:r>
                         <m:r>
                           <a:rPr lang="en-US" altLang="zh-TW" sz="1630" i="1">
@@ -10560,10 +10949,10 @@
         </mc:AlternateContent>
         <p:pic>
           <p:nvPicPr>
-            <p:cNvPr id="122" name="圖片 121">
+            <p:cNvPr id="111" name="圖片 110">
               <a:extLst>
                 <a:ext uri="{FF2B5EF4-FFF2-40B4-BE49-F238E27FC236}">
-                  <a16:creationId xmlns:a16="http://schemas.microsoft.com/office/drawing/2014/main" id="{2611E32E-A1A0-4605-A171-F58183CFCAA7}"/>
+                  <a16:creationId xmlns:a16="http://schemas.microsoft.com/office/drawing/2014/main" id="{56F2958E-C52B-4A64-B882-21A3EF78BC2D}"/>
                 </a:ext>
               </a:extLst>
             </p:cNvPr>
@@ -10573,7 +10962,7 @@
             <p:nvPr/>
           </p:nvPicPr>
           <p:blipFill>
-            <a:blip r:embed="rId6">
+            <a:blip r:embed="rId36">
               <a:clrChange>
                 <a:clrFrom>
                   <a:srgbClr val="FFFFFF"/>
@@ -10602,10 +10991,10 @@
       </p:grpSp>
       <p:pic>
         <p:nvPicPr>
-          <p:cNvPr id="130" name="圖片 129">
+          <p:cNvPr id="112" name="圖片 111">
             <a:extLst>
               <a:ext uri="{FF2B5EF4-FFF2-40B4-BE49-F238E27FC236}">
-                <a16:creationId xmlns:a16="http://schemas.microsoft.com/office/drawing/2014/main" id="{F555AF0C-3810-4679-8E01-402637068956}"/>
+                <a16:creationId xmlns:a16="http://schemas.microsoft.com/office/drawing/2014/main" id="{B1531D21-9AF9-4A4B-8857-E00A8399A7DD}"/>
               </a:ext>
             </a:extLst>
           </p:cNvPr>
@@ -10615,7 +11004,7 @@
           <p:nvPr/>
         </p:nvPicPr>
         <p:blipFill rotWithShape="1">
-          <a:blip r:embed="rId38">
+          <a:blip r:embed="rId41">
             <a:clrChange>
               <a:clrFrom>
                 <a:srgbClr val="FFFFFF"/>
@@ -10645,14 +11034,14 @@
           </a:prstGeom>
         </p:spPr>
       </p:pic>
-      <mc:AlternateContent xmlns:mc="http://schemas.openxmlformats.org/markup-compatibility/2006">
-        <mc:Choice xmlns:a14="http://schemas.microsoft.com/office/drawing/2010/main" Requires="a14">
+      <mc:AlternateContent xmlns:mc="http://schemas.openxmlformats.org/markup-compatibility/2006" xmlns:a14="http://schemas.microsoft.com/office/drawing/2010/main">
+        <mc:Choice Requires="a14">
           <p:sp>
             <p:nvSpPr>
-              <p:cNvPr id="148" name="矩形 147">
+              <p:cNvPr id="113" name="矩形 112">
                 <a:extLst>
                   <a:ext uri="{FF2B5EF4-FFF2-40B4-BE49-F238E27FC236}">
-                    <a16:creationId xmlns:a16="http://schemas.microsoft.com/office/drawing/2014/main" id="{766A6797-B527-42E4-AAAE-D300A21D06BC}"/>
+                    <a16:creationId xmlns:a16="http://schemas.microsoft.com/office/drawing/2014/main" id="{9DEC81DF-6031-49D2-9CD1-E732851FF766}"/>
                   </a:ext>
                 </a:extLst>
               </p:cNvPr>
@@ -10685,19 +11074,7 @@
                         <a:rPr lang="en-US" altLang="zh-TW" sz="1630" i="1">
                           <a:latin typeface="Cambria Math" panose="02040503050406030204" pitchFamily="18" charset="0"/>
                         </a:rPr>
-                        <m:t>ℓ</m:t>
-                      </m:r>
-                      <m:r>
-                        <a:rPr lang="en-US" altLang="zh-TW" sz="1630" i="1">
-                          <a:latin typeface="Cambria Math" panose="02040503050406030204" pitchFamily="18" charset="0"/>
-                        </a:rPr>
-                        <m:t>=−</m:t>
-                      </m:r>
-                      <m:r>
-                        <a:rPr lang="en-US" altLang="zh-TW" sz="1630" i="1">
-                          <a:latin typeface="Cambria Math" panose="02040503050406030204" pitchFamily="18" charset="0"/>
-                        </a:rPr>
-                        <m:t>2</m:t>
+                        <m:t>ℓ=−2</m:t>
                       </m:r>
                     </m:oMath>
                   </m:oMathPara>
@@ -10710,13 +11087,13 @@
             </p:txBody>
           </p:sp>
         </mc:Choice>
-        <mc:Fallback>
+        <mc:Fallback xmlns="">
           <p:sp>
             <p:nvSpPr>
-              <p:cNvPr id="148" name="矩形 147">
+              <p:cNvPr id="113" name="矩形 112">
                 <a:extLst>
                   <a:ext uri="{FF2B5EF4-FFF2-40B4-BE49-F238E27FC236}">
-                    <a16:creationId xmlns:a16="http://schemas.microsoft.com/office/drawing/2014/main" id="{766A6797-B527-42E4-AAAE-D300A21D06BC}"/>
+                    <a16:creationId xmlns:a16="http://schemas.microsoft.com/office/drawing/2014/main" id="{9DEC81DF-6031-49D2-9CD1-E732851FF766}"/>
                   </a:ext>
                 </a:extLst>
               </p:cNvPr>
@@ -10734,7 +11111,7 @@
                 <a:avLst/>
               </a:prstGeom>
               <a:blipFill>
-                <a:blip r:embed="rId39"/>
+                <a:blip r:embed="rId42"/>
                 <a:stretch>
                   <a:fillRect/>
                 </a:stretch>
@@ -10755,14 +11132,14 @@
           </p:sp>
         </mc:Fallback>
       </mc:AlternateContent>
-      <mc:AlternateContent xmlns:mc="http://schemas.openxmlformats.org/markup-compatibility/2006">
-        <mc:Choice xmlns:a14="http://schemas.microsoft.com/office/drawing/2010/main" Requires="a14">
+      <mc:AlternateContent xmlns:mc="http://schemas.openxmlformats.org/markup-compatibility/2006" xmlns:a14="http://schemas.microsoft.com/office/drawing/2010/main">
+        <mc:Choice Requires="a14">
           <p:sp>
             <p:nvSpPr>
-              <p:cNvPr id="149" name="矩形 148">
+              <p:cNvPr id="114" name="矩形 113">
                 <a:extLst>
                   <a:ext uri="{FF2B5EF4-FFF2-40B4-BE49-F238E27FC236}">
-                    <a16:creationId xmlns:a16="http://schemas.microsoft.com/office/drawing/2014/main" id="{45D33A5D-2041-49C7-B8E4-FC63B6CA6197}"/>
+                    <a16:creationId xmlns:a16="http://schemas.microsoft.com/office/drawing/2014/main" id="{E6EAA432-1643-452A-9AC3-23AB910C519F}"/>
                   </a:ext>
                 </a:extLst>
               </p:cNvPr>
@@ -10795,19 +11172,7 @@
                         <a:rPr lang="en-US" altLang="zh-TW" sz="1630" i="1">
                           <a:latin typeface="Cambria Math" panose="02040503050406030204" pitchFamily="18" charset="0"/>
                         </a:rPr>
-                        <m:t>ℓ</m:t>
-                      </m:r>
-                      <m:r>
-                        <a:rPr lang="en-US" altLang="zh-TW" sz="1630" i="1">
-                          <a:latin typeface="Cambria Math" panose="02040503050406030204" pitchFamily="18" charset="0"/>
-                        </a:rPr>
-                        <m:t>=−</m:t>
-                      </m:r>
-                      <m:r>
-                        <a:rPr lang="en-US" altLang="zh-TW" sz="1630" i="1">
-                          <a:latin typeface="Cambria Math" panose="02040503050406030204" pitchFamily="18" charset="0"/>
-                        </a:rPr>
-                        <m:t>1</m:t>
+                        <m:t>ℓ=−1</m:t>
                       </m:r>
                     </m:oMath>
                   </m:oMathPara>
@@ -10820,13 +11185,13 @@
             </p:txBody>
           </p:sp>
         </mc:Choice>
-        <mc:Fallback>
+        <mc:Fallback xmlns="">
           <p:sp>
             <p:nvSpPr>
-              <p:cNvPr id="149" name="矩形 148">
+              <p:cNvPr id="114" name="矩形 113">
                 <a:extLst>
                   <a:ext uri="{FF2B5EF4-FFF2-40B4-BE49-F238E27FC236}">
-                    <a16:creationId xmlns:a16="http://schemas.microsoft.com/office/drawing/2014/main" id="{45D33A5D-2041-49C7-B8E4-FC63B6CA6197}"/>
+                    <a16:creationId xmlns:a16="http://schemas.microsoft.com/office/drawing/2014/main" id="{E6EAA432-1643-452A-9AC3-23AB910C519F}"/>
                   </a:ext>
                 </a:extLst>
               </p:cNvPr>
@@ -10844,7 +11209,7 @@
                 <a:avLst/>
               </a:prstGeom>
               <a:blipFill>
-                <a:blip r:embed="rId40"/>
+                <a:blip r:embed="rId43"/>
                 <a:stretch>
                   <a:fillRect/>
                 </a:stretch>
@@ -10865,14 +11230,14 @@
           </p:sp>
         </mc:Fallback>
       </mc:AlternateContent>
-      <mc:AlternateContent xmlns:mc="http://schemas.openxmlformats.org/markup-compatibility/2006">
-        <mc:Choice xmlns:a14="http://schemas.microsoft.com/office/drawing/2010/main" Requires="a14">
+      <mc:AlternateContent xmlns:mc="http://schemas.openxmlformats.org/markup-compatibility/2006" xmlns:a14="http://schemas.microsoft.com/office/drawing/2010/main">
+        <mc:Choice Requires="a14">
           <p:sp>
             <p:nvSpPr>
-              <p:cNvPr id="150" name="矩形 149">
+              <p:cNvPr id="115" name="矩形 114">
                 <a:extLst>
                   <a:ext uri="{FF2B5EF4-FFF2-40B4-BE49-F238E27FC236}">
-                    <a16:creationId xmlns:a16="http://schemas.microsoft.com/office/drawing/2014/main" id="{1A03566F-34DE-4C4D-B70A-2359579CE0E3}"/>
+                    <a16:creationId xmlns:a16="http://schemas.microsoft.com/office/drawing/2014/main" id="{1E52D081-4BD4-4D63-8029-E5567872D5B0}"/>
                   </a:ext>
                 </a:extLst>
               </p:cNvPr>
@@ -10905,19 +11270,7 @@
                         <a:rPr lang="en-US" altLang="zh-TW" sz="1630" i="1">
                           <a:latin typeface="Cambria Math" panose="02040503050406030204" pitchFamily="18" charset="0"/>
                         </a:rPr>
-                        <m:t>ℓ</m:t>
-                      </m:r>
-                      <m:r>
-                        <a:rPr lang="en-US" altLang="zh-TW" sz="1630" i="1">
-                          <a:latin typeface="Cambria Math" panose="02040503050406030204" pitchFamily="18" charset="0"/>
-                        </a:rPr>
-                        <m:t>=</m:t>
-                      </m:r>
-                      <m:r>
-                        <a:rPr lang="en-US" altLang="zh-TW" sz="1630" i="1">
-                          <a:latin typeface="Cambria Math" panose="02040503050406030204" pitchFamily="18" charset="0"/>
-                        </a:rPr>
-                        <m:t>0</m:t>
+                        <m:t>ℓ=0</m:t>
                       </m:r>
                     </m:oMath>
                   </m:oMathPara>
@@ -10930,13 +11283,13 @@
             </p:txBody>
           </p:sp>
         </mc:Choice>
-        <mc:Fallback>
+        <mc:Fallback xmlns="">
           <p:sp>
             <p:nvSpPr>
-              <p:cNvPr id="150" name="矩形 149">
+              <p:cNvPr id="115" name="矩形 114">
                 <a:extLst>
                   <a:ext uri="{FF2B5EF4-FFF2-40B4-BE49-F238E27FC236}">
-                    <a16:creationId xmlns:a16="http://schemas.microsoft.com/office/drawing/2014/main" id="{1A03566F-34DE-4C4D-B70A-2359579CE0E3}"/>
+                    <a16:creationId xmlns:a16="http://schemas.microsoft.com/office/drawing/2014/main" id="{1E52D081-4BD4-4D63-8029-E5567872D5B0}"/>
                   </a:ext>
                 </a:extLst>
               </p:cNvPr>
@@ -10954,7 +11307,7 @@
                 <a:avLst/>
               </a:prstGeom>
               <a:blipFill>
-                <a:blip r:embed="rId41"/>
+                <a:blip r:embed="rId44"/>
                 <a:stretch>
                   <a:fillRect/>
                 </a:stretch>
@@ -10975,14 +11328,14 @@
           </p:sp>
         </mc:Fallback>
       </mc:AlternateContent>
-      <mc:AlternateContent xmlns:mc="http://schemas.openxmlformats.org/markup-compatibility/2006">
-        <mc:Choice xmlns:a14="http://schemas.microsoft.com/office/drawing/2010/main" Requires="a14">
+      <mc:AlternateContent xmlns:mc="http://schemas.openxmlformats.org/markup-compatibility/2006" xmlns:a14="http://schemas.microsoft.com/office/drawing/2010/main">
+        <mc:Choice Requires="a14">
           <p:sp>
             <p:nvSpPr>
-              <p:cNvPr id="151" name="矩形 150">
+              <p:cNvPr id="116" name="矩形 115">
                 <a:extLst>
                   <a:ext uri="{FF2B5EF4-FFF2-40B4-BE49-F238E27FC236}">
-                    <a16:creationId xmlns:a16="http://schemas.microsoft.com/office/drawing/2014/main" id="{42BD8D82-DCE9-4560-A18D-E0990D1AA76E}"/>
+                    <a16:creationId xmlns:a16="http://schemas.microsoft.com/office/drawing/2014/main" id="{4821C43D-677F-4466-A460-32B3CD264391}"/>
                   </a:ext>
                 </a:extLst>
               </p:cNvPr>
@@ -11015,19 +11368,7 @@
                         <a:rPr lang="en-US" altLang="zh-TW" sz="1630" i="1">
                           <a:latin typeface="Cambria Math" panose="02040503050406030204" pitchFamily="18" charset="0"/>
                         </a:rPr>
-                        <m:t>ℓ</m:t>
-                      </m:r>
-                      <m:r>
-                        <a:rPr lang="en-US" altLang="zh-TW" sz="1630" i="1">
-                          <a:latin typeface="Cambria Math" panose="02040503050406030204" pitchFamily="18" charset="0"/>
-                        </a:rPr>
-                        <m:t>=</m:t>
-                      </m:r>
-                      <m:r>
-                        <a:rPr lang="en-US" altLang="zh-TW" sz="1630" i="1">
-                          <a:latin typeface="Cambria Math" panose="02040503050406030204" pitchFamily="18" charset="0"/>
-                        </a:rPr>
-                        <m:t>1</m:t>
+                        <m:t>ℓ=1</m:t>
                       </m:r>
                     </m:oMath>
                   </m:oMathPara>
@@ -11040,13 +11381,13 @@
             </p:txBody>
           </p:sp>
         </mc:Choice>
-        <mc:Fallback>
+        <mc:Fallback xmlns="">
           <p:sp>
             <p:nvSpPr>
-              <p:cNvPr id="151" name="矩形 150">
+              <p:cNvPr id="116" name="矩形 115">
                 <a:extLst>
                   <a:ext uri="{FF2B5EF4-FFF2-40B4-BE49-F238E27FC236}">
-                    <a16:creationId xmlns:a16="http://schemas.microsoft.com/office/drawing/2014/main" id="{42BD8D82-DCE9-4560-A18D-E0990D1AA76E}"/>
+                    <a16:creationId xmlns:a16="http://schemas.microsoft.com/office/drawing/2014/main" id="{4821C43D-677F-4466-A460-32B3CD264391}"/>
                   </a:ext>
                 </a:extLst>
               </p:cNvPr>
@@ -11064,7 +11405,7 @@
                 <a:avLst/>
               </a:prstGeom>
               <a:blipFill>
-                <a:blip r:embed="rId42"/>
+                <a:blip r:embed="rId45"/>
                 <a:stretch>
                   <a:fillRect/>
                 </a:stretch>
@@ -11085,14 +11426,14 @@
           </p:sp>
         </mc:Fallback>
       </mc:AlternateContent>
-      <mc:AlternateContent xmlns:mc="http://schemas.openxmlformats.org/markup-compatibility/2006">
-        <mc:Choice xmlns:a14="http://schemas.microsoft.com/office/drawing/2010/main" Requires="a14">
+      <mc:AlternateContent xmlns:mc="http://schemas.openxmlformats.org/markup-compatibility/2006" xmlns:a14="http://schemas.microsoft.com/office/drawing/2010/main">
+        <mc:Choice Requires="a14">
           <p:sp>
             <p:nvSpPr>
-              <p:cNvPr id="152" name="矩形 151">
+              <p:cNvPr id="117" name="矩形 116">
                 <a:extLst>
                   <a:ext uri="{FF2B5EF4-FFF2-40B4-BE49-F238E27FC236}">
-                    <a16:creationId xmlns:a16="http://schemas.microsoft.com/office/drawing/2014/main" id="{4C33AF4E-9F38-497C-ADDC-B3D40E9CE7FD}"/>
+                    <a16:creationId xmlns:a16="http://schemas.microsoft.com/office/drawing/2014/main" id="{5F7400E2-F586-4724-8F83-C92277C4EFE7}"/>
                   </a:ext>
                 </a:extLst>
               </p:cNvPr>
@@ -11125,19 +11466,7 @@
                         <a:rPr lang="en-US" altLang="zh-TW" sz="1630" i="1">
                           <a:latin typeface="Cambria Math" panose="02040503050406030204" pitchFamily="18" charset="0"/>
                         </a:rPr>
-                        <m:t>ℓ</m:t>
-                      </m:r>
-                      <m:r>
-                        <a:rPr lang="en-US" altLang="zh-TW" sz="1630" i="1">
-                          <a:latin typeface="Cambria Math" panose="02040503050406030204" pitchFamily="18" charset="0"/>
-                        </a:rPr>
-                        <m:t>=</m:t>
-                      </m:r>
-                      <m:r>
-                        <a:rPr lang="en-US" altLang="zh-TW" sz="1630" i="1">
-                          <a:latin typeface="Cambria Math" panose="02040503050406030204" pitchFamily="18" charset="0"/>
-                        </a:rPr>
-                        <m:t>2</m:t>
+                        <m:t>ℓ=2</m:t>
                       </m:r>
                     </m:oMath>
                   </m:oMathPara>
@@ -11150,13 +11479,13 @@
             </p:txBody>
           </p:sp>
         </mc:Choice>
-        <mc:Fallback>
+        <mc:Fallback xmlns="">
           <p:sp>
             <p:nvSpPr>
-              <p:cNvPr id="152" name="矩形 151">
+              <p:cNvPr id="117" name="矩形 116">
                 <a:extLst>
                   <a:ext uri="{FF2B5EF4-FFF2-40B4-BE49-F238E27FC236}">
-                    <a16:creationId xmlns:a16="http://schemas.microsoft.com/office/drawing/2014/main" id="{4C33AF4E-9F38-497C-ADDC-B3D40E9CE7FD}"/>
+                    <a16:creationId xmlns:a16="http://schemas.microsoft.com/office/drawing/2014/main" id="{5F7400E2-F586-4724-8F83-C92277C4EFE7}"/>
                   </a:ext>
                 </a:extLst>
               </p:cNvPr>
@@ -11174,7 +11503,7 @@
                 <a:avLst/>
               </a:prstGeom>
               <a:blipFill>
-                <a:blip r:embed="rId43"/>
+                <a:blip r:embed="rId46"/>
                 <a:stretch>
                   <a:fillRect/>
                 </a:stretch>
@@ -11197,10 +11526,355 @@
       </mc:AlternateContent>
       <p:pic>
         <p:nvPicPr>
-          <p:cNvPr id="50" name="圖片 49">
+          <p:cNvPr id="123" name="圖片 122">
             <a:extLst>
               <a:ext uri="{FF2B5EF4-FFF2-40B4-BE49-F238E27FC236}">
-                <a16:creationId xmlns:a16="http://schemas.microsoft.com/office/drawing/2014/main" id="{9941990F-EDFD-42E2-BC7D-65C32F7AA87E}"/>
+                <a16:creationId xmlns:a16="http://schemas.microsoft.com/office/drawing/2014/main" id="{30BE35BA-D894-41C9-A128-410E4E9F4129}"/>
+              </a:ext>
+            </a:extLst>
+          </p:cNvPr>
+          <p:cNvPicPr>
+            <a:picLocks noChangeAspect="1"/>
+          </p:cNvPicPr>
+          <p:nvPr/>
+        </p:nvPicPr>
+        <p:blipFill rotWithShape="1">
+          <a:blip r:embed="rId37">
+            <a:clrChange>
+              <a:clrFrom>
+                <a:srgbClr val="FFFFFF"/>
+              </a:clrFrom>
+              <a:clrTo>
+                <a:srgbClr val="FFFFFF">
+                  <a:alpha val="0"/>
+                </a:srgbClr>
+              </a:clrTo>
+            </a:clrChange>
+            <a:extLst>
+              <a:ext uri="{28A0092B-C50C-407E-A947-70E740481C1C}">
+                <a14:useLocalDpi xmlns:a14="http://schemas.microsoft.com/office/drawing/2010/main" val="0"/>
+              </a:ext>
+            </a:extLst>
+          </a:blip>
+          <a:srcRect l="17225" r="67421"/>
+          <a:stretch/>
+        </p:blipFill>
+        <p:spPr>
+          <a:xfrm>
+            <a:off x="3340414" y="4392014"/>
+            <a:ext cx="1469205" cy="1594800"/>
+          </a:xfrm>
+          <a:prstGeom prst="rect">
+            <a:avLst/>
+          </a:prstGeom>
+        </p:spPr>
+      </p:pic>
+      <p:pic>
+        <p:nvPicPr>
+          <p:cNvPr id="124" name="圖片 123">
+            <a:extLst>
+              <a:ext uri="{FF2B5EF4-FFF2-40B4-BE49-F238E27FC236}">
+                <a16:creationId xmlns:a16="http://schemas.microsoft.com/office/drawing/2014/main" id="{AAED66B1-6CFF-4038-8CEE-02DA5DC18B69}"/>
+              </a:ext>
+            </a:extLst>
+          </p:cNvPr>
+          <p:cNvPicPr>
+            <a:picLocks noChangeAspect="1"/>
+          </p:cNvPicPr>
+          <p:nvPr/>
+        </p:nvPicPr>
+        <p:blipFill rotWithShape="1">
+          <a:blip r:embed="rId37">
+            <a:clrChange>
+              <a:clrFrom>
+                <a:srgbClr val="FFFFFF"/>
+              </a:clrFrom>
+              <a:clrTo>
+                <a:srgbClr val="FFFFFF">
+                  <a:alpha val="0"/>
+                </a:srgbClr>
+              </a:clrTo>
+            </a:clrChange>
+            <a:extLst>
+              <a:ext uri="{28A0092B-C50C-407E-A947-70E740481C1C}">
+                <a14:useLocalDpi xmlns:a14="http://schemas.microsoft.com/office/drawing/2010/main" val="0"/>
+              </a:ext>
+            </a:extLst>
+          </a:blip>
+          <a:srcRect l="34190" r="50564"/>
+          <a:stretch/>
+        </p:blipFill>
+        <p:spPr>
+          <a:xfrm>
+            <a:off x="4699173" y="4392014"/>
+            <a:ext cx="1458930" cy="1594800"/>
+          </a:xfrm>
+          <a:prstGeom prst="rect">
+            <a:avLst/>
+          </a:prstGeom>
+        </p:spPr>
+      </p:pic>
+      <p:pic>
+        <p:nvPicPr>
+          <p:cNvPr id="125" name="圖片 124">
+            <a:extLst>
+              <a:ext uri="{FF2B5EF4-FFF2-40B4-BE49-F238E27FC236}">
+                <a16:creationId xmlns:a16="http://schemas.microsoft.com/office/drawing/2014/main" id="{32A7021F-663B-448A-8378-C8F095901872}"/>
+              </a:ext>
+            </a:extLst>
+          </p:cNvPr>
+          <p:cNvPicPr>
+            <a:picLocks noChangeAspect="1"/>
+          </p:cNvPicPr>
+          <p:nvPr/>
+        </p:nvPicPr>
+        <p:blipFill rotWithShape="1">
+          <a:blip r:embed="rId37">
+            <a:clrChange>
+              <a:clrFrom>
+                <a:srgbClr val="FFFFFF"/>
+              </a:clrFrom>
+              <a:clrTo>
+                <a:srgbClr val="FFFFFF">
+                  <a:alpha val="0"/>
+                </a:srgbClr>
+              </a:clrTo>
+            </a:clrChange>
+            <a:extLst>
+              <a:ext uri="{28A0092B-C50C-407E-A947-70E740481C1C}">
+                <a14:useLocalDpi xmlns:a14="http://schemas.microsoft.com/office/drawing/2010/main" val="0"/>
+              </a:ext>
+            </a:extLst>
+          </a:blip>
+          <a:srcRect l="50617" r="33814"/>
+          <a:stretch/>
+        </p:blipFill>
+        <p:spPr>
+          <a:xfrm>
+            <a:off x="6014265" y="4392014"/>
+            <a:ext cx="1489754" cy="1594800"/>
+          </a:xfrm>
+          <a:prstGeom prst="rect">
+            <a:avLst/>
+          </a:prstGeom>
+        </p:spPr>
+      </p:pic>
+      <p:pic>
+        <p:nvPicPr>
+          <p:cNvPr id="126" name="圖片 125">
+            <a:extLst>
+              <a:ext uri="{FF2B5EF4-FFF2-40B4-BE49-F238E27FC236}">
+                <a16:creationId xmlns:a16="http://schemas.microsoft.com/office/drawing/2014/main" id="{AE47195B-22CC-480E-A1E2-15EFA861DD19}"/>
+              </a:ext>
+            </a:extLst>
+          </p:cNvPr>
+          <p:cNvPicPr>
+            <a:picLocks noChangeAspect="1"/>
+          </p:cNvPicPr>
+          <p:nvPr/>
+        </p:nvPicPr>
+        <p:blipFill rotWithShape="1">
+          <a:blip r:embed="rId37">
+            <a:clrChange>
+              <a:clrFrom>
+                <a:srgbClr val="FFFFFF"/>
+              </a:clrFrom>
+              <a:clrTo>
+                <a:srgbClr val="FFFFFF">
+                  <a:alpha val="0"/>
+                </a:srgbClr>
+              </a:clrTo>
+            </a:clrChange>
+            <a:extLst>
+              <a:ext uri="{28A0092B-C50C-407E-A947-70E740481C1C}">
+                <a14:useLocalDpi xmlns:a14="http://schemas.microsoft.com/office/drawing/2010/main" val="0"/>
+              </a:ext>
+            </a:extLst>
+          </a:blip>
+          <a:srcRect l="67474" r="17223"/>
+          <a:stretch/>
+        </p:blipFill>
+        <p:spPr>
+          <a:xfrm>
+            <a:off x="7359430" y="4392014"/>
+            <a:ext cx="1464300" cy="1594800"/>
+          </a:xfrm>
+          <a:prstGeom prst="rect">
+            <a:avLst/>
+          </a:prstGeom>
+        </p:spPr>
+      </p:pic>
+    </p:spTree>
+    <p:extLst>
+      <p:ext uri="{BB962C8B-B14F-4D97-AF65-F5344CB8AC3E}">
+        <p14:creationId xmlns:p14="http://schemas.microsoft.com/office/powerpoint/2010/main" val="100079477"/>
+      </p:ext>
+    </p:extLst>
+  </p:cSld>
+  <p:clrMapOvr>
+    <a:masterClrMapping/>
+  </p:clrMapOvr>
+</p:sld>
+</file>
+
+<file path=ppt/slides/slide3.xml><?xml version="1.0" encoding="utf-8"?>
+<p:sld xmlns:a="http://schemas.openxmlformats.org/drawingml/2006/main" xmlns:r="http://schemas.openxmlformats.org/officeDocument/2006/relationships" xmlns:p="http://schemas.openxmlformats.org/presentationml/2006/main" show="0">
+  <p:cSld>
+    <p:spTree>
+      <p:nvGrpSpPr>
+        <p:cNvPr id="1" name=""/>
+        <p:cNvGrpSpPr/>
+        <p:nvPr/>
+      </p:nvGrpSpPr>
+      <p:grpSpPr>
+        <a:xfrm>
+          <a:off x="0" y="0"/>
+          <a:ext cx="0" cy="0"/>
+          <a:chOff x="0" y="0"/>
+          <a:chExt cx="0" cy="0"/>
+        </a:xfrm>
+      </p:grpSpPr>
+      <p:pic>
+        <p:nvPicPr>
+          <p:cNvPr id="240" name="圖片 239">
+            <a:extLst>
+              <a:ext uri="{FF2B5EF4-FFF2-40B4-BE49-F238E27FC236}">
+                <a16:creationId xmlns:a16="http://schemas.microsoft.com/office/drawing/2014/main" id="{E4ABF8C9-BDD5-4FDC-B525-F363264D5DAA}"/>
+              </a:ext>
+            </a:extLst>
+          </p:cNvPr>
+          <p:cNvPicPr>
+            <a:picLocks noChangeAspect="1"/>
+          </p:cNvPicPr>
+          <p:nvPr/>
+        </p:nvPicPr>
+        <p:blipFill rotWithShape="1">
+          <a:blip r:embed="rId2">
+            <a:clrChange>
+              <a:clrFrom>
+                <a:srgbClr val="FFFFFF"/>
+              </a:clrFrom>
+              <a:clrTo>
+                <a:srgbClr val="FFFFFF">
+                  <a:alpha val="0"/>
+                </a:srgbClr>
+              </a:clrTo>
+            </a:clrChange>
+            <a:extLst>
+              <a:ext uri="{28A0092B-C50C-407E-A947-70E740481C1C}">
+                <a14:useLocalDpi xmlns:a14="http://schemas.microsoft.com/office/drawing/2010/main" val="0"/>
+              </a:ext>
+            </a:extLst>
+          </a:blip>
+          <a:srcRect l="34297" r="51208"/>
+          <a:stretch/>
+        </p:blipFill>
+        <p:spPr>
+          <a:xfrm>
+            <a:off x="4044403" y="813435"/>
+            <a:ext cx="1437816" cy="1653215"/>
+          </a:xfrm>
+          <a:prstGeom prst="rect">
+            <a:avLst/>
+          </a:prstGeom>
+        </p:spPr>
+      </p:pic>
+      <p:pic>
+        <p:nvPicPr>
+          <p:cNvPr id="241" name="圖片 240">
+            <a:extLst>
+              <a:ext uri="{FF2B5EF4-FFF2-40B4-BE49-F238E27FC236}">
+                <a16:creationId xmlns:a16="http://schemas.microsoft.com/office/drawing/2014/main" id="{4A57137C-AD2A-4A95-B92B-9F1AE34C4258}"/>
+              </a:ext>
+            </a:extLst>
+          </p:cNvPr>
+          <p:cNvPicPr>
+            <a:picLocks noChangeAspect="1"/>
+          </p:cNvPicPr>
+          <p:nvPr/>
+        </p:nvPicPr>
+        <p:blipFill rotWithShape="1">
+          <a:blip r:embed="rId2">
+            <a:clrChange>
+              <a:clrFrom>
+                <a:srgbClr val="FFFFFF"/>
+              </a:clrFrom>
+              <a:clrTo>
+                <a:srgbClr val="FFFFFF">
+                  <a:alpha val="0"/>
+                </a:srgbClr>
+              </a:clrTo>
+            </a:clrChange>
+            <a:extLst>
+              <a:ext uri="{28A0092B-C50C-407E-A947-70E740481C1C}">
+                <a14:useLocalDpi xmlns:a14="http://schemas.microsoft.com/office/drawing/2010/main" val="0"/>
+              </a:ext>
+            </a:extLst>
+          </a:blip>
+          <a:srcRect l="51262" r="34350"/>
+          <a:stretch/>
+        </p:blipFill>
+        <p:spPr>
+          <a:xfrm>
+            <a:off x="5396681" y="809856"/>
+            <a:ext cx="1427165" cy="1653215"/>
+          </a:xfrm>
+          <a:prstGeom prst="rect">
+            <a:avLst/>
+          </a:prstGeom>
+        </p:spPr>
+      </p:pic>
+      <p:pic>
+        <p:nvPicPr>
+          <p:cNvPr id="242" name="圖片 241">
+            <a:extLst>
+              <a:ext uri="{FF2B5EF4-FFF2-40B4-BE49-F238E27FC236}">
+                <a16:creationId xmlns:a16="http://schemas.microsoft.com/office/drawing/2014/main" id="{4EAF5B16-037E-457E-88EE-903BED6D7734}"/>
+              </a:ext>
+            </a:extLst>
+          </p:cNvPr>
+          <p:cNvPicPr>
+            <a:picLocks noChangeAspect="1"/>
+          </p:cNvPicPr>
+          <p:nvPr/>
+        </p:nvPicPr>
+        <p:blipFill rotWithShape="1">
+          <a:blip r:embed="rId2">
+            <a:clrChange>
+              <a:clrFrom>
+                <a:srgbClr val="FFFFFF"/>
+              </a:clrFrom>
+              <a:clrTo>
+                <a:srgbClr val="FFFFFF">
+                  <a:alpha val="0"/>
+                </a:srgbClr>
+              </a:clrTo>
+            </a:clrChange>
+            <a:extLst>
+              <a:ext uri="{28A0092B-C50C-407E-A947-70E740481C1C}">
+                <a14:useLocalDpi xmlns:a14="http://schemas.microsoft.com/office/drawing/2010/main" val="0"/>
+              </a:ext>
+            </a:extLst>
+          </a:blip>
+          <a:srcRect l="67475" r="17051"/>
+          <a:stretch/>
+        </p:blipFill>
+        <p:spPr>
+          <a:xfrm>
+            <a:off x="6669084" y="812595"/>
+            <a:ext cx="1534923" cy="1653215"/>
+          </a:xfrm>
+          <a:prstGeom prst="rect">
+            <a:avLst/>
+          </a:prstGeom>
+        </p:spPr>
+      </p:pic>
+      <p:pic>
+        <p:nvPicPr>
+          <p:cNvPr id="250" name="圖片 249">
+            <a:extLst>
+              <a:ext uri="{FF2B5EF4-FFF2-40B4-BE49-F238E27FC236}">
+                <a16:creationId xmlns:a16="http://schemas.microsoft.com/office/drawing/2014/main" id="{E5EF5287-B535-4B53-AB19-E5673B8EF502}"/>
               </a:ext>
             </a:extLst>
           </p:cNvPr>
@@ -11232,8 +11906,8 @@
         </p:blipFill>
         <p:spPr>
           <a:xfrm>
-            <a:off x="3264963" y="1967582"/>
-            <a:ext cx="1539683" cy="1695008"/>
+            <a:off x="2690768" y="813197"/>
+            <a:ext cx="1501719" cy="1653214"/>
           </a:xfrm>
           <a:prstGeom prst="rect">
             <a:avLst/>
@@ -11242,100 +11916,10 @@
       </p:pic>
       <p:pic>
         <p:nvPicPr>
-          <p:cNvPr id="51" name="圖片 50">
+          <p:cNvPr id="243" name="圖片 242">
             <a:extLst>
               <a:ext uri="{FF2B5EF4-FFF2-40B4-BE49-F238E27FC236}">
-                <a16:creationId xmlns:a16="http://schemas.microsoft.com/office/drawing/2014/main" id="{07CF85F5-38E3-4CC9-86B5-74E2A83EDCE9}"/>
-              </a:ext>
-            </a:extLst>
-          </p:cNvPr>
-          <p:cNvPicPr>
-            <a:picLocks noChangeAspect="1"/>
-          </p:cNvPicPr>
-          <p:nvPr/>
-        </p:nvPicPr>
-        <p:blipFill rotWithShape="1">
-          <a:blip r:embed="rId3">
-            <a:clrChange>
-              <a:clrFrom>
-                <a:srgbClr val="FFFFFF"/>
-              </a:clrFrom>
-              <a:clrTo>
-                <a:srgbClr val="FFFFFF">
-                  <a:alpha val="0"/>
-                </a:srgbClr>
-              </a:clrTo>
-            </a:clrChange>
-            <a:extLst>
-              <a:ext uri="{28A0092B-C50C-407E-A947-70E740481C1C}">
-                <a14:useLocalDpi xmlns:a14="http://schemas.microsoft.com/office/drawing/2010/main" val="0"/>
-              </a:ext>
-            </a:extLst>
-          </a:blip>
-          <a:srcRect l="17225" r="67421"/>
-          <a:stretch/>
-        </p:blipFill>
-        <p:spPr>
-          <a:xfrm>
-            <a:off x="3340414" y="4392014"/>
-            <a:ext cx="1469205" cy="1594800"/>
-          </a:xfrm>
-          <a:prstGeom prst="rect">
-            <a:avLst/>
-          </a:prstGeom>
-        </p:spPr>
-      </p:pic>
-      <p:pic>
-        <p:nvPicPr>
-          <p:cNvPr id="52" name="圖片 51">
-            <a:extLst>
-              <a:ext uri="{FF2B5EF4-FFF2-40B4-BE49-F238E27FC236}">
-                <a16:creationId xmlns:a16="http://schemas.microsoft.com/office/drawing/2014/main" id="{80805C89-A09B-4AD9-A6CA-D73D43ED32F6}"/>
-              </a:ext>
-            </a:extLst>
-          </p:cNvPr>
-          <p:cNvPicPr>
-            <a:picLocks noChangeAspect="1"/>
-          </p:cNvPicPr>
-          <p:nvPr/>
-        </p:nvPicPr>
-        <p:blipFill rotWithShape="1">
-          <a:blip r:embed="rId4">
-            <a:clrChange>
-              <a:clrFrom>
-                <a:srgbClr val="FFFFFF"/>
-              </a:clrFrom>
-              <a:clrTo>
-                <a:srgbClr val="FFFFFF">
-                  <a:alpha val="0"/>
-                </a:srgbClr>
-              </a:clrTo>
-            </a:clrChange>
-            <a:extLst>
-              <a:ext uri="{28A0092B-C50C-407E-A947-70E740481C1C}">
-                <a14:useLocalDpi xmlns:a14="http://schemas.microsoft.com/office/drawing/2010/main" val="0"/>
-              </a:ext>
-            </a:extLst>
-          </a:blip>
-          <a:srcRect l="17869" r="68173"/>
-          <a:stretch/>
-        </p:blipFill>
-        <p:spPr>
-          <a:xfrm>
-            <a:off x="3316335" y="356049"/>
-            <a:ext cx="1419564" cy="1695009"/>
-          </a:xfrm>
-          <a:prstGeom prst="rect">
-            <a:avLst/>
-          </a:prstGeom>
-        </p:spPr>
-      </p:pic>
-      <p:pic>
-        <p:nvPicPr>
-          <p:cNvPr id="53" name="圖片 52">
-            <a:extLst>
-              <a:ext uri="{FF2B5EF4-FFF2-40B4-BE49-F238E27FC236}">
-                <a16:creationId xmlns:a16="http://schemas.microsoft.com/office/drawing/2014/main" id="{919D1125-A4A7-42D9-9B8A-E98DA487BA19}"/>
+                <a16:creationId xmlns:a16="http://schemas.microsoft.com/office/drawing/2014/main" id="{3AB6BEB7-054D-4263-BEB6-A75427E15919}"/>
               </a:ext>
             </a:extLst>
           </p:cNvPr>
@@ -11362,25 +11946,507 @@
               </a:ext>
             </a:extLst>
           </a:blip>
-          <a:srcRect l="34297" r="51208"/>
+          <a:srcRect r="84386"/>
           <a:stretch/>
         </p:blipFill>
         <p:spPr>
           <a:xfrm>
-            <a:off x="4652297" y="1967580"/>
-            <a:ext cx="1474164" cy="1695009"/>
+            <a:off x="1308700" y="808045"/>
+            <a:ext cx="1548815" cy="1653215"/>
           </a:xfrm>
           <a:prstGeom prst="rect">
             <a:avLst/>
           </a:prstGeom>
         </p:spPr>
       </p:pic>
+      <mc:AlternateContent xmlns:mc="http://schemas.openxmlformats.org/markup-compatibility/2006">
+        <mc:Choice xmlns:a14="http://schemas.microsoft.com/office/drawing/2010/main" Requires="a14">
+          <p:sp>
+            <p:nvSpPr>
+              <p:cNvPr id="244" name="矩形 243">
+                <a:extLst>
+                  <a:ext uri="{FF2B5EF4-FFF2-40B4-BE49-F238E27FC236}">
+                    <a16:creationId xmlns:a16="http://schemas.microsoft.com/office/drawing/2014/main" id="{9803DA60-4D17-420D-9F49-3158D55FB955}"/>
+                  </a:ext>
+                </a:extLst>
+              </p:cNvPr>
+              <p:cNvSpPr/>
+              <p:nvPr/>
+            </p:nvSpPr>
+            <p:spPr>
+              <a:xfrm>
+                <a:off x="1621731" y="1957198"/>
+                <a:ext cx="638167" cy="341376"/>
+              </a:xfrm>
+              <a:prstGeom prst="rect">
+                <a:avLst/>
+              </a:prstGeom>
+            </p:spPr>
+            <p:txBody>
+              <a:bodyPr wrap="square">
+                <a:spAutoFit/>
+              </a:bodyPr>
+              <a:lstStyle/>
+              <a:p>
+                <a:pPr/>
+                <a14:m>
+                  <m:oMathPara xmlns:m="http://schemas.openxmlformats.org/officeDocument/2006/math">
+                    <m:oMathParaPr>
+                      <m:jc m:val="centerGroup"/>
+                    </m:oMathParaPr>
+                    <m:oMath xmlns:m="http://schemas.openxmlformats.org/officeDocument/2006/math">
+                      <m:r>
+                        <a:rPr lang="en-US" altLang="zh-TW" sz="1630" i="1">
+                          <a:latin typeface="Cambria Math" panose="02040503050406030204" pitchFamily="18" charset="0"/>
+                        </a:rPr>
+                        <m:t>1</m:t>
+                      </m:r>
+                      <m:r>
+                        <a:rPr lang="en-US" altLang="zh-TW" sz="1630" i="1">
+                          <a:latin typeface="Cambria Math" panose="02040503050406030204" pitchFamily="18" charset="0"/>
+                        </a:rPr>
+                        <m:t>𝜇</m:t>
+                      </m:r>
+                      <m:r>
+                        <m:rPr>
+                          <m:sty m:val="p"/>
+                        </m:rPr>
+                        <a:rPr lang="en-US" altLang="zh-TW" sz="1630">
+                          <a:latin typeface="Cambria Math" panose="02040503050406030204" pitchFamily="18" charset="0"/>
+                        </a:rPr>
+                        <m:t>m</m:t>
+                      </m:r>
+                    </m:oMath>
+                  </m:oMathPara>
+                </a14:m>
+                <a:endParaRPr lang="zh-TW" altLang="en-US" sz="1630" dirty="0">
+                  <a:latin typeface="Times New Roman" panose="02020603050405020304" pitchFamily="18" charset="0"/>
+                  <a:cs typeface="Times New Roman" panose="02020603050405020304" pitchFamily="18" charset="0"/>
+                </a:endParaRPr>
+              </a:p>
+            </p:txBody>
+          </p:sp>
+        </mc:Choice>
+        <mc:Fallback>
+          <p:sp>
+            <p:nvSpPr>
+              <p:cNvPr id="244" name="矩形 243">
+                <a:extLst>
+                  <a:ext uri="{FF2B5EF4-FFF2-40B4-BE49-F238E27FC236}">
+                    <a16:creationId xmlns:a16="http://schemas.microsoft.com/office/drawing/2014/main" id="{9803DA60-4D17-420D-9F49-3158D55FB955}"/>
+                  </a:ext>
+                </a:extLst>
+              </p:cNvPr>
+              <p:cNvSpPr>
+                <a:spLocks noRot="1" noChangeAspect="1" noMove="1" noResize="1" noEditPoints="1" noAdjustHandles="1" noChangeArrowheads="1" noChangeShapeType="1" noTextEdit="1"/>
+              </p:cNvSpPr>
+              <p:nvPr/>
+            </p:nvSpPr>
+            <p:spPr>
+              <a:xfrm>
+                <a:off x="1621731" y="1957198"/>
+                <a:ext cx="638167" cy="341376"/>
+              </a:xfrm>
+              <a:prstGeom prst="rect">
+                <a:avLst/>
+              </a:prstGeom>
+              <a:blipFill>
+                <a:blip r:embed="rId3"/>
+                <a:stretch>
+                  <a:fillRect b="-12500"/>
+                </a:stretch>
+              </a:blipFill>
+            </p:spPr>
+            <p:txBody>
+              <a:bodyPr/>
+              <a:lstStyle/>
+              <a:p>
+                <a:r>
+                  <a:rPr lang="zh-TW" altLang="en-US">
+                    <a:noFill/>
+                  </a:rPr>
+                  <a:t> </a:t>
+                </a:r>
+              </a:p>
+            </p:txBody>
+          </p:sp>
+        </mc:Fallback>
+      </mc:AlternateContent>
+      <p:grpSp>
+        <p:nvGrpSpPr>
+          <p:cNvPr id="245" name="群組 244">
+            <a:extLst>
+              <a:ext uri="{FF2B5EF4-FFF2-40B4-BE49-F238E27FC236}">
+                <a16:creationId xmlns:a16="http://schemas.microsoft.com/office/drawing/2014/main" id="{981E025F-F8E1-473F-9275-46E38E26D45E}"/>
+              </a:ext>
+            </a:extLst>
+          </p:cNvPr>
+          <p:cNvGrpSpPr/>
+          <p:nvPr/>
+        </p:nvGrpSpPr>
+        <p:grpSpPr>
+          <a:xfrm>
+            <a:off x="1943813" y="1266297"/>
+            <a:ext cx="547133" cy="589513"/>
+            <a:chOff x="-988088" y="945710"/>
+            <a:chExt cx="550009" cy="592612"/>
+          </a:xfrm>
+        </p:grpSpPr>
+        <mc:AlternateContent xmlns:mc="http://schemas.openxmlformats.org/markup-compatibility/2006" xmlns:a14="http://schemas.microsoft.com/office/drawing/2010/main">
+          <mc:Choice Requires="a14">
+            <p:sp>
+              <p:nvSpPr>
+                <p:cNvPr id="246" name="文字方塊 245">
+                  <a:extLst>
+                    <a:ext uri="{FF2B5EF4-FFF2-40B4-BE49-F238E27FC236}">
+                      <a16:creationId xmlns:a16="http://schemas.microsoft.com/office/drawing/2014/main" id="{164E4BDC-DA51-41C1-9707-8864C6CC3791}"/>
+                    </a:ext>
+                  </a:extLst>
+                </p:cNvPr>
+                <p:cNvSpPr txBox="1"/>
+                <p:nvPr/>
+              </p:nvSpPr>
+              <p:spPr>
+                <a:xfrm>
+                  <a:off x="-988088" y="945710"/>
+                  <a:ext cx="323386" cy="343171"/>
+                </a:xfrm>
+                <a:prstGeom prst="rect">
+                  <a:avLst/>
+                </a:prstGeom>
+                <a:noFill/>
+              </p:spPr>
+              <p:txBody>
+                <a:bodyPr wrap="square" rtlCol="0">
+                  <a:spAutoFit/>
+                </a:bodyPr>
+                <a:lstStyle/>
+                <a:p>
+                  <a:pPr/>
+                  <a14:m>
+                    <m:oMathPara xmlns:m="http://schemas.openxmlformats.org/officeDocument/2006/math">
+                      <m:oMathParaPr>
+                        <m:jc m:val="centerGroup"/>
+                      </m:oMathParaPr>
+                      <m:oMath xmlns:m="http://schemas.openxmlformats.org/officeDocument/2006/math">
+                        <m:acc>
+                          <m:accPr>
+                            <m:chr m:val="̂"/>
+                            <m:ctrlPr>
+                              <a:rPr lang="en-US" altLang="zh-TW" sz="1630" i="1">
+                                <a:latin typeface="Cambria Math" panose="02040503050406030204" pitchFamily="18" charset="0"/>
+                              </a:rPr>
+                            </m:ctrlPr>
+                          </m:accPr>
+                          <m:e>
+                            <m:r>
+                              <a:rPr lang="en-US" altLang="zh-TW" sz="1630" b="1" i="1">
+                                <a:latin typeface="Cambria Math" panose="02040503050406030204" pitchFamily="18" charset="0"/>
+                              </a:rPr>
+                              <m:t>𝒚</m:t>
+                            </m:r>
+                          </m:e>
+                        </m:acc>
+                      </m:oMath>
+                    </m:oMathPara>
+                  </a14:m>
+                  <a:endParaRPr lang="en-US" altLang="zh-TW" sz="1630" dirty="0">
+                    <a:latin typeface="Times New Roman" panose="02020603050405020304" pitchFamily="18" charset="0"/>
+                    <a:cs typeface="Times New Roman" panose="02020603050405020304" pitchFamily="18" charset="0"/>
+                  </a:endParaRPr>
+                </a:p>
+              </p:txBody>
+            </p:sp>
+          </mc:Choice>
+          <mc:Fallback xmlns="">
+            <p:sp>
+              <p:nvSpPr>
+                <p:cNvPr id="76" name="文字方塊 75">
+                  <a:extLst>
+                    <a:ext uri="{FF2B5EF4-FFF2-40B4-BE49-F238E27FC236}">
+                      <a16:creationId xmlns:a16="http://schemas.microsoft.com/office/drawing/2014/main" id="{DA635BAA-EFD7-435B-BCE4-F0FC3026F2A5}"/>
+                    </a:ext>
+                  </a:extLst>
+                </p:cNvPr>
+                <p:cNvSpPr txBox="1">
+                  <a:spLocks noRot="1" noChangeAspect="1" noMove="1" noResize="1" noEditPoints="1" noAdjustHandles="1" noChangeArrowheads="1" noChangeShapeType="1" noTextEdit="1"/>
+                </p:cNvSpPr>
+                <p:nvPr/>
+              </p:nvSpPr>
+              <p:spPr>
+                <a:xfrm>
+                  <a:off x="-988088" y="945710"/>
+                  <a:ext cx="323386" cy="343171"/>
+                </a:xfrm>
+                <a:prstGeom prst="rect">
+                  <a:avLst/>
+                </a:prstGeom>
+                <a:blipFill>
+                  <a:blip r:embed="rId33"/>
+                  <a:stretch>
+                    <a:fillRect b="-7143"/>
+                  </a:stretch>
+                </a:blipFill>
+              </p:spPr>
+              <p:txBody>
+                <a:bodyPr/>
+                <a:lstStyle/>
+                <a:p>
+                  <a:r>
+                    <a:rPr lang="zh-TW" altLang="en-US">
+                      <a:noFill/>
+                    </a:rPr>
+                    <a:t> </a:t>
+                  </a:r>
+                </a:p>
+              </p:txBody>
+            </p:sp>
+          </mc:Fallback>
+        </mc:AlternateContent>
+        <mc:AlternateContent xmlns:mc="http://schemas.openxmlformats.org/markup-compatibility/2006" xmlns:a14="http://schemas.microsoft.com/office/drawing/2010/main">
+          <mc:Choice Requires="a14">
+            <p:sp>
+              <p:nvSpPr>
+                <p:cNvPr id="247" name="文字方塊 246">
+                  <a:extLst>
+                    <a:ext uri="{FF2B5EF4-FFF2-40B4-BE49-F238E27FC236}">
+                      <a16:creationId xmlns:a16="http://schemas.microsoft.com/office/drawing/2014/main" id="{E972B4EF-A20D-427C-9573-FC5F5C014C23}"/>
+                    </a:ext>
+                  </a:extLst>
+                </p:cNvPr>
+                <p:cNvSpPr txBox="1"/>
+                <p:nvPr/>
+              </p:nvSpPr>
+              <p:spPr>
+                <a:xfrm>
+                  <a:off x="-844998" y="1195151"/>
+                  <a:ext cx="406919" cy="343171"/>
+                </a:xfrm>
+                <a:prstGeom prst="rect">
+                  <a:avLst/>
+                </a:prstGeom>
+                <a:noFill/>
+              </p:spPr>
+              <p:txBody>
+                <a:bodyPr wrap="square" rtlCol="0">
+                  <a:spAutoFit/>
+                </a:bodyPr>
+                <a:lstStyle/>
+                <a:p>
+                  <a:pPr/>
+                  <a14:m>
+                    <m:oMathPara xmlns:m="http://schemas.openxmlformats.org/officeDocument/2006/math">
+                      <m:oMathParaPr>
+                        <m:jc m:val="centerGroup"/>
+                      </m:oMathParaPr>
+                      <m:oMath xmlns:m="http://schemas.openxmlformats.org/officeDocument/2006/math">
+                        <m:acc>
+                          <m:accPr>
+                            <m:chr m:val="̂"/>
+                            <m:ctrlPr>
+                              <a:rPr lang="en-US" altLang="zh-TW" sz="1630" i="1">
+                                <a:latin typeface="Cambria Math" panose="02040503050406030204" pitchFamily="18" charset="0"/>
+                              </a:rPr>
+                            </m:ctrlPr>
+                          </m:accPr>
+                          <m:e>
+                            <m:r>
+                              <a:rPr lang="en-US" altLang="zh-TW" sz="1630" b="1" i="1">
+                                <a:latin typeface="Cambria Math" panose="02040503050406030204" pitchFamily="18" charset="0"/>
+                              </a:rPr>
+                              <m:t>𝒙</m:t>
+                            </m:r>
+                          </m:e>
+                        </m:acc>
+                      </m:oMath>
+                    </m:oMathPara>
+                  </a14:m>
+                  <a:endParaRPr lang="en-US" altLang="zh-TW" sz="1630" dirty="0">
+                    <a:latin typeface="Times New Roman" panose="02020603050405020304" pitchFamily="18" charset="0"/>
+                    <a:cs typeface="Times New Roman" panose="02020603050405020304" pitchFamily="18" charset="0"/>
+                  </a:endParaRPr>
+                </a:p>
+              </p:txBody>
+            </p:sp>
+          </mc:Choice>
+          <mc:Fallback xmlns="">
+            <p:sp>
+              <p:nvSpPr>
+                <p:cNvPr id="77" name="文字方塊 76">
+                  <a:extLst>
+                    <a:ext uri="{FF2B5EF4-FFF2-40B4-BE49-F238E27FC236}">
+                      <a16:creationId xmlns:a16="http://schemas.microsoft.com/office/drawing/2014/main" id="{70E789C9-D068-48AA-8926-92B85661596A}"/>
+                    </a:ext>
+                  </a:extLst>
+                </p:cNvPr>
+                <p:cNvSpPr txBox="1">
+                  <a:spLocks noRot="1" noChangeAspect="1" noMove="1" noResize="1" noEditPoints="1" noAdjustHandles="1" noChangeArrowheads="1" noChangeShapeType="1" noTextEdit="1"/>
+                </p:cNvSpPr>
+                <p:nvPr/>
+              </p:nvSpPr>
+              <p:spPr>
+                <a:xfrm>
+                  <a:off x="-844998" y="1195151"/>
+                  <a:ext cx="406919" cy="343171"/>
+                </a:xfrm>
+                <a:prstGeom prst="rect">
+                  <a:avLst/>
+                </a:prstGeom>
+                <a:blipFill>
+                  <a:blip r:embed="rId34"/>
+                  <a:stretch>
+                    <a:fillRect r="-11940"/>
+                  </a:stretch>
+                </a:blipFill>
+              </p:spPr>
+              <p:txBody>
+                <a:bodyPr/>
+                <a:lstStyle/>
+                <a:p>
+                  <a:r>
+                    <a:rPr lang="zh-TW" altLang="en-US">
+                      <a:noFill/>
+                    </a:rPr>
+                    <a:t> </a:t>
+                  </a:r>
+                </a:p>
+              </p:txBody>
+            </p:sp>
+          </mc:Fallback>
+        </mc:AlternateContent>
+        <p:sp>
+          <p:nvSpPr>
+            <p:cNvPr id="248" name="箭號: 向右 247">
+              <a:extLst>
+                <a:ext uri="{FF2B5EF4-FFF2-40B4-BE49-F238E27FC236}">
+                  <a16:creationId xmlns:a16="http://schemas.microsoft.com/office/drawing/2014/main" id="{D132410C-D406-4069-8C32-A2613DAD9AFD}"/>
+                </a:ext>
+              </a:extLst>
+            </p:cNvPr>
+            <p:cNvSpPr/>
+            <p:nvPr/>
+          </p:nvSpPr>
+          <p:spPr>
+            <a:xfrm>
+              <a:off x="-837092" y="1356364"/>
+              <a:ext cx="92654" cy="27541"/>
+            </a:xfrm>
+            <a:prstGeom prst="rightArrow">
+              <a:avLst>
+                <a:gd name="adj1" fmla="val 50000"/>
+                <a:gd name="adj2" fmla="val 99023"/>
+              </a:avLst>
+            </a:prstGeom>
+            <a:solidFill>
+              <a:schemeClr val="tx1"/>
+            </a:solidFill>
+            <a:ln>
+              <a:solidFill>
+                <a:schemeClr val="tx1"/>
+              </a:solidFill>
+            </a:ln>
+          </p:spPr>
+          <p:style>
+            <a:lnRef idx="2">
+              <a:schemeClr val="dk1">
+                <a:shade val="50000"/>
+              </a:schemeClr>
+            </a:lnRef>
+            <a:fillRef idx="1">
+              <a:schemeClr val="dk1"/>
+            </a:fillRef>
+            <a:effectRef idx="0">
+              <a:schemeClr val="dk1"/>
+            </a:effectRef>
+            <a:fontRef idx="minor">
+              <a:schemeClr val="lt1"/>
+            </a:fontRef>
+          </p:style>
+          <p:txBody>
+            <a:bodyPr rtlCol="0" anchor="ctr"/>
+            <a:lstStyle/>
+            <a:p>
+              <a:pPr algn="ctr"/>
+              <a:endParaRPr lang="zh-TW" altLang="en-US" sz="1630">
+                <a:solidFill>
+                  <a:schemeClr val="tx1"/>
+                </a:solidFill>
+                <a:latin typeface="Times New Roman" panose="02020603050405020304" pitchFamily="18" charset="0"/>
+                <a:cs typeface="Times New Roman" panose="02020603050405020304" pitchFamily="18" charset="0"/>
+              </a:endParaRPr>
+            </a:p>
+          </p:txBody>
+        </p:sp>
+        <p:sp>
+          <p:nvSpPr>
+            <p:cNvPr id="249" name="箭號: 向右 248">
+              <a:extLst>
+                <a:ext uri="{FF2B5EF4-FFF2-40B4-BE49-F238E27FC236}">
+                  <a16:creationId xmlns:a16="http://schemas.microsoft.com/office/drawing/2014/main" id="{EFDCAD22-6987-40D2-B778-462652F4816C}"/>
+                </a:ext>
+              </a:extLst>
+            </p:cNvPr>
+            <p:cNvSpPr/>
+            <p:nvPr/>
+          </p:nvSpPr>
+          <p:spPr>
+            <a:xfrm rot="16200000">
+              <a:off x="-877012" y="1316853"/>
+              <a:ext cx="91764" cy="27808"/>
+            </a:xfrm>
+            <a:prstGeom prst="rightArrow">
+              <a:avLst>
+                <a:gd name="adj1" fmla="val 50000"/>
+                <a:gd name="adj2" fmla="val 99023"/>
+              </a:avLst>
+            </a:prstGeom>
+            <a:solidFill>
+              <a:schemeClr val="tx1"/>
+            </a:solidFill>
+            <a:ln>
+              <a:solidFill>
+                <a:schemeClr val="tx1"/>
+              </a:solidFill>
+            </a:ln>
+          </p:spPr>
+          <p:style>
+            <a:lnRef idx="2">
+              <a:schemeClr val="dk1">
+                <a:shade val="50000"/>
+              </a:schemeClr>
+            </a:lnRef>
+            <a:fillRef idx="1">
+              <a:schemeClr val="dk1"/>
+            </a:fillRef>
+            <a:effectRef idx="0">
+              <a:schemeClr val="dk1"/>
+            </a:effectRef>
+            <a:fontRef idx="minor">
+              <a:schemeClr val="lt1"/>
+            </a:fontRef>
+          </p:style>
+          <p:txBody>
+            <a:bodyPr rtlCol="0" anchor="ctr"/>
+            <a:lstStyle/>
+            <a:p>
+              <a:pPr algn="ctr"/>
+              <a:endParaRPr lang="zh-TW" altLang="en-US" sz="1630" dirty="0">
+                <a:solidFill>
+                  <a:schemeClr val="tx1"/>
+                </a:solidFill>
+                <a:latin typeface="Times New Roman" panose="02020603050405020304" pitchFamily="18" charset="0"/>
+                <a:cs typeface="Times New Roman" panose="02020603050405020304" pitchFamily="18" charset="0"/>
+              </a:endParaRPr>
+            </a:p>
+          </p:txBody>
+        </p:sp>
+      </p:grpSp>
       <p:pic>
         <p:nvPicPr>
-          <p:cNvPr id="67" name="圖片 66">
+          <p:cNvPr id="221" name="圖片 220">
             <a:extLst>
               <a:ext uri="{FF2B5EF4-FFF2-40B4-BE49-F238E27FC236}">
-                <a16:creationId xmlns:a16="http://schemas.microsoft.com/office/drawing/2014/main" id="{114EAB8A-0921-43D1-B60E-A77DC6CA3489}"/>
+                <a16:creationId xmlns:a16="http://schemas.microsoft.com/office/drawing/2014/main" id="{9062F56B-8BDE-4A44-8A82-191077FF726C}"/>
               </a:ext>
             </a:extLst>
           </p:cNvPr>
@@ -11390,7 +12456,579 @@
           <p:nvPr/>
         </p:nvPicPr>
         <p:blipFill rotWithShape="1">
-          <a:blip r:embed="rId3">
+          <a:blip r:embed="rId35">
+            <a:clrChange>
+              <a:clrFrom>
+                <a:srgbClr val="FFFFFF"/>
+              </a:clrFrom>
+              <a:clrTo>
+                <a:srgbClr val="FFFFFF">
+                  <a:alpha val="0"/>
+                </a:srgbClr>
+              </a:clrTo>
+            </a:clrChange>
+            <a:extLst>
+              <a:ext uri="{28A0092B-C50C-407E-A947-70E740481C1C}">
+                <a14:useLocalDpi xmlns:a14="http://schemas.microsoft.com/office/drawing/2010/main" val="0"/>
+              </a:ext>
+            </a:extLst>
+          </a:blip>
+          <a:srcRect r="84278"/>
+          <a:stretch/>
+        </p:blipFill>
+        <p:spPr>
+          <a:xfrm>
+            <a:off x="1327089" y="2753714"/>
+            <a:ext cx="1504364" cy="1594800"/>
+          </a:xfrm>
+          <a:prstGeom prst="rect">
+            <a:avLst/>
+          </a:prstGeom>
+        </p:spPr>
+      </p:pic>
+      <mc:AlternateContent xmlns:mc="http://schemas.openxmlformats.org/markup-compatibility/2006">
+        <mc:Choice xmlns:a14="http://schemas.microsoft.com/office/drawing/2010/main" Requires="a14">
+          <p:sp>
+            <p:nvSpPr>
+              <p:cNvPr id="222" name="矩形 221">
+                <a:extLst>
+                  <a:ext uri="{FF2B5EF4-FFF2-40B4-BE49-F238E27FC236}">
+                    <a16:creationId xmlns:a16="http://schemas.microsoft.com/office/drawing/2014/main" id="{0762649D-4ACF-4647-AD67-87E68438E902}"/>
+                  </a:ext>
+                </a:extLst>
+              </p:cNvPr>
+              <p:cNvSpPr/>
+              <p:nvPr/>
+            </p:nvSpPr>
+            <p:spPr>
+              <a:xfrm>
+                <a:off x="1596810" y="3916329"/>
+                <a:ext cx="688009" cy="343171"/>
+              </a:xfrm>
+              <a:prstGeom prst="rect">
+                <a:avLst/>
+              </a:prstGeom>
+            </p:spPr>
+            <p:txBody>
+              <a:bodyPr wrap="none">
+                <a:spAutoFit/>
+              </a:bodyPr>
+              <a:lstStyle/>
+              <a:p>
+                <a:pPr/>
+                <a14:m>
+                  <m:oMathPara xmlns:m="http://schemas.openxmlformats.org/officeDocument/2006/math">
+                    <m:oMathParaPr>
+                      <m:jc m:val="centerGroup"/>
+                    </m:oMathParaPr>
+                    <m:oMath xmlns:m="http://schemas.openxmlformats.org/officeDocument/2006/math">
+                      <m:r>
+                        <a:rPr lang="en-US" altLang="zh-TW" sz="1630" i="1">
+                          <a:latin typeface="Cambria Math" panose="02040503050406030204" pitchFamily="18" charset="0"/>
+                        </a:rPr>
+                        <m:t>1 </m:t>
+                      </m:r>
+                      <m:r>
+                        <a:rPr lang="en-US" altLang="zh-TW" sz="1630" i="1">
+                          <a:latin typeface="Cambria Math" panose="02040503050406030204" pitchFamily="18" charset="0"/>
+                        </a:rPr>
+                        <m:t>𝜇</m:t>
+                      </m:r>
+                      <m:r>
+                        <m:rPr>
+                          <m:sty m:val="p"/>
+                        </m:rPr>
+                        <a:rPr lang="en-US" altLang="zh-TW" sz="1630">
+                          <a:latin typeface="Cambria Math" panose="02040503050406030204" pitchFamily="18" charset="0"/>
+                        </a:rPr>
+                        <m:t>m</m:t>
+                      </m:r>
+                    </m:oMath>
+                  </m:oMathPara>
+                </a14:m>
+                <a:endParaRPr lang="zh-TW" altLang="en-US" sz="1630" dirty="0">
+                  <a:latin typeface="Times New Roman" panose="02020603050405020304" pitchFamily="18" charset="0"/>
+                  <a:cs typeface="Times New Roman" panose="02020603050405020304" pitchFamily="18" charset="0"/>
+                </a:endParaRPr>
+              </a:p>
+            </p:txBody>
+          </p:sp>
+        </mc:Choice>
+        <mc:Fallback>
+          <p:sp>
+            <p:nvSpPr>
+              <p:cNvPr id="222" name="矩形 221">
+                <a:extLst>
+                  <a:ext uri="{FF2B5EF4-FFF2-40B4-BE49-F238E27FC236}">
+                    <a16:creationId xmlns:a16="http://schemas.microsoft.com/office/drawing/2014/main" id="{0762649D-4ACF-4647-AD67-87E68438E902}"/>
+                  </a:ext>
+                </a:extLst>
+              </p:cNvPr>
+              <p:cNvSpPr>
+                <a:spLocks noRot="1" noChangeAspect="1" noMove="1" noResize="1" noEditPoints="1" noAdjustHandles="1" noChangeArrowheads="1" noChangeShapeType="1" noTextEdit="1"/>
+              </p:cNvSpPr>
+              <p:nvPr/>
+            </p:nvSpPr>
+            <p:spPr>
+              <a:xfrm>
+                <a:off x="1596810" y="3916329"/>
+                <a:ext cx="688009" cy="343171"/>
+              </a:xfrm>
+              <a:prstGeom prst="rect">
+                <a:avLst/>
+              </a:prstGeom>
+              <a:blipFill>
+                <a:blip r:embed="rId36"/>
+                <a:stretch>
+                  <a:fillRect b="-5263"/>
+                </a:stretch>
+              </a:blipFill>
+            </p:spPr>
+            <p:txBody>
+              <a:bodyPr/>
+              <a:lstStyle/>
+              <a:p>
+                <a:r>
+                  <a:rPr lang="zh-TW" altLang="en-US">
+                    <a:noFill/>
+                  </a:rPr>
+                  <a:t> </a:t>
+                </a:r>
+              </a:p>
+            </p:txBody>
+          </p:sp>
+        </mc:Fallback>
+      </mc:AlternateContent>
+      <p:grpSp>
+        <p:nvGrpSpPr>
+          <p:cNvPr id="223" name="群組 222">
+            <a:extLst>
+              <a:ext uri="{FF2B5EF4-FFF2-40B4-BE49-F238E27FC236}">
+                <a16:creationId xmlns:a16="http://schemas.microsoft.com/office/drawing/2014/main" id="{719691A9-5B92-49BA-A48B-37D6E7B06756}"/>
+              </a:ext>
+            </a:extLst>
+          </p:cNvPr>
+          <p:cNvGrpSpPr/>
+          <p:nvPr/>
+        </p:nvGrpSpPr>
+        <p:grpSpPr>
+          <a:xfrm>
+            <a:off x="1946989" y="3072995"/>
+            <a:ext cx="550009" cy="592612"/>
+            <a:chOff x="-988088" y="945710"/>
+            <a:chExt cx="550009" cy="592612"/>
+          </a:xfrm>
+        </p:grpSpPr>
+        <mc:AlternateContent xmlns:mc="http://schemas.openxmlformats.org/markup-compatibility/2006" xmlns:a14="http://schemas.microsoft.com/office/drawing/2010/main">
+          <mc:Choice Requires="a14">
+            <p:sp>
+              <p:nvSpPr>
+                <p:cNvPr id="224" name="文字方塊 223">
+                  <a:extLst>
+                    <a:ext uri="{FF2B5EF4-FFF2-40B4-BE49-F238E27FC236}">
+                      <a16:creationId xmlns:a16="http://schemas.microsoft.com/office/drawing/2014/main" id="{CB348BB9-D3AF-4D13-85BA-2D8AF80CBA42}"/>
+                    </a:ext>
+                  </a:extLst>
+                </p:cNvPr>
+                <p:cNvSpPr txBox="1"/>
+                <p:nvPr/>
+              </p:nvSpPr>
+              <p:spPr>
+                <a:xfrm>
+                  <a:off x="-988088" y="945710"/>
+                  <a:ext cx="323386" cy="343171"/>
+                </a:xfrm>
+                <a:prstGeom prst="rect">
+                  <a:avLst/>
+                </a:prstGeom>
+                <a:noFill/>
+              </p:spPr>
+              <p:txBody>
+                <a:bodyPr wrap="square" rtlCol="0">
+                  <a:spAutoFit/>
+                </a:bodyPr>
+                <a:lstStyle/>
+                <a:p>
+                  <a:pPr/>
+                  <a14:m>
+                    <m:oMathPara xmlns:m="http://schemas.openxmlformats.org/officeDocument/2006/math">
+                      <m:oMathParaPr>
+                        <m:jc m:val="centerGroup"/>
+                      </m:oMathParaPr>
+                      <m:oMath xmlns:m="http://schemas.openxmlformats.org/officeDocument/2006/math">
+                        <m:acc>
+                          <m:accPr>
+                            <m:chr m:val="̂"/>
+                            <m:ctrlPr>
+                              <a:rPr lang="en-US" altLang="zh-TW" sz="1630" i="1">
+                                <a:latin typeface="Cambria Math" panose="02040503050406030204" pitchFamily="18" charset="0"/>
+                              </a:rPr>
+                            </m:ctrlPr>
+                          </m:accPr>
+                          <m:e>
+                            <m:r>
+                              <a:rPr lang="en-US" altLang="zh-TW" sz="1630" b="1" i="1">
+                                <a:latin typeface="Cambria Math" panose="02040503050406030204" pitchFamily="18" charset="0"/>
+                              </a:rPr>
+                              <m:t>𝒚</m:t>
+                            </m:r>
+                          </m:e>
+                        </m:acc>
+                      </m:oMath>
+                    </m:oMathPara>
+                  </a14:m>
+                  <a:endParaRPr lang="en-US" altLang="zh-TW" sz="1630" dirty="0">
+                    <a:latin typeface="Times New Roman" panose="02020603050405020304" pitchFamily="18" charset="0"/>
+                    <a:cs typeface="Times New Roman" panose="02020603050405020304" pitchFamily="18" charset="0"/>
+                  </a:endParaRPr>
+                </a:p>
+              </p:txBody>
+            </p:sp>
+          </mc:Choice>
+          <mc:Fallback xmlns="">
+            <p:sp>
+              <p:nvSpPr>
+                <p:cNvPr id="76" name="文字方塊 75">
+                  <a:extLst>
+                    <a:ext uri="{FF2B5EF4-FFF2-40B4-BE49-F238E27FC236}">
+                      <a16:creationId xmlns:a16="http://schemas.microsoft.com/office/drawing/2014/main" id="{DA635BAA-EFD7-435B-BCE4-F0FC3026F2A5}"/>
+                    </a:ext>
+                  </a:extLst>
+                </p:cNvPr>
+                <p:cNvSpPr txBox="1">
+                  <a:spLocks noRot="1" noChangeAspect="1" noMove="1" noResize="1" noEditPoints="1" noAdjustHandles="1" noChangeArrowheads="1" noChangeShapeType="1" noTextEdit="1"/>
+                </p:cNvSpPr>
+                <p:nvPr/>
+              </p:nvSpPr>
+              <p:spPr>
+                <a:xfrm>
+                  <a:off x="-988088" y="945710"/>
+                  <a:ext cx="323386" cy="343171"/>
+                </a:xfrm>
+                <a:prstGeom prst="rect">
+                  <a:avLst/>
+                </a:prstGeom>
+                <a:blipFill>
+                  <a:blip r:embed="rId33"/>
+                  <a:stretch>
+                    <a:fillRect b="-7143"/>
+                  </a:stretch>
+                </a:blipFill>
+              </p:spPr>
+              <p:txBody>
+                <a:bodyPr/>
+                <a:lstStyle/>
+                <a:p>
+                  <a:r>
+                    <a:rPr lang="zh-TW" altLang="en-US">
+                      <a:noFill/>
+                    </a:rPr>
+                    <a:t> </a:t>
+                  </a:r>
+                </a:p>
+              </p:txBody>
+            </p:sp>
+          </mc:Fallback>
+        </mc:AlternateContent>
+        <mc:AlternateContent xmlns:mc="http://schemas.openxmlformats.org/markup-compatibility/2006" xmlns:a14="http://schemas.microsoft.com/office/drawing/2010/main">
+          <mc:Choice Requires="a14">
+            <p:sp>
+              <p:nvSpPr>
+                <p:cNvPr id="225" name="文字方塊 224">
+                  <a:extLst>
+                    <a:ext uri="{FF2B5EF4-FFF2-40B4-BE49-F238E27FC236}">
+                      <a16:creationId xmlns:a16="http://schemas.microsoft.com/office/drawing/2014/main" id="{984D9FC3-753B-4A02-B4F8-B0B94AEB1642}"/>
+                    </a:ext>
+                  </a:extLst>
+                </p:cNvPr>
+                <p:cNvSpPr txBox="1"/>
+                <p:nvPr/>
+              </p:nvSpPr>
+              <p:spPr>
+                <a:xfrm>
+                  <a:off x="-844998" y="1195151"/>
+                  <a:ext cx="406919" cy="343171"/>
+                </a:xfrm>
+                <a:prstGeom prst="rect">
+                  <a:avLst/>
+                </a:prstGeom>
+                <a:noFill/>
+              </p:spPr>
+              <p:txBody>
+                <a:bodyPr wrap="square" rtlCol="0">
+                  <a:spAutoFit/>
+                </a:bodyPr>
+                <a:lstStyle/>
+                <a:p>
+                  <a:pPr/>
+                  <a14:m>
+                    <m:oMathPara xmlns:m="http://schemas.openxmlformats.org/officeDocument/2006/math">
+                      <m:oMathParaPr>
+                        <m:jc m:val="centerGroup"/>
+                      </m:oMathParaPr>
+                      <m:oMath xmlns:m="http://schemas.openxmlformats.org/officeDocument/2006/math">
+                        <m:acc>
+                          <m:accPr>
+                            <m:chr m:val="̂"/>
+                            <m:ctrlPr>
+                              <a:rPr lang="en-US" altLang="zh-TW" sz="1630" i="1">
+                                <a:latin typeface="Cambria Math" panose="02040503050406030204" pitchFamily="18" charset="0"/>
+                              </a:rPr>
+                            </m:ctrlPr>
+                          </m:accPr>
+                          <m:e>
+                            <m:r>
+                              <a:rPr lang="en-US" altLang="zh-TW" sz="1630" b="1" i="1">
+                                <a:latin typeface="Cambria Math" panose="02040503050406030204" pitchFamily="18" charset="0"/>
+                              </a:rPr>
+                              <m:t>𝒙</m:t>
+                            </m:r>
+                          </m:e>
+                        </m:acc>
+                      </m:oMath>
+                    </m:oMathPara>
+                  </a14:m>
+                  <a:endParaRPr lang="en-US" altLang="zh-TW" sz="1630" dirty="0">
+                    <a:latin typeface="Times New Roman" panose="02020603050405020304" pitchFamily="18" charset="0"/>
+                    <a:cs typeface="Times New Roman" panose="02020603050405020304" pitchFamily="18" charset="0"/>
+                  </a:endParaRPr>
+                </a:p>
+              </p:txBody>
+            </p:sp>
+          </mc:Choice>
+          <mc:Fallback xmlns="">
+            <p:sp>
+              <p:nvSpPr>
+                <p:cNvPr id="77" name="文字方塊 76">
+                  <a:extLst>
+                    <a:ext uri="{FF2B5EF4-FFF2-40B4-BE49-F238E27FC236}">
+                      <a16:creationId xmlns:a16="http://schemas.microsoft.com/office/drawing/2014/main" id="{70E789C9-D068-48AA-8926-92B85661596A}"/>
+                    </a:ext>
+                  </a:extLst>
+                </p:cNvPr>
+                <p:cNvSpPr txBox="1">
+                  <a:spLocks noRot="1" noChangeAspect="1" noMove="1" noResize="1" noEditPoints="1" noAdjustHandles="1" noChangeArrowheads="1" noChangeShapeType="1" noTextEdit="1"/>
+                </p:cNvSpPr>
+                <p:nvPr/>
+              </p:nvSpPr>
+              <p:spPr>
+                <a:xfrm>
+                  <a:off x="-844998" y="1195151"/>
+                  <a:ext cx="406919" cy="343171"/>
+                </a:xfrm>
+                <a:prstGeom prst="rect">
+                  <a:avLst/>
+                </a:prstGeom>
+                <a:blipFill>
+                  <a:blip r:embed="rId34"/>
+                  <a:stretch>
+                    <a:fillRect r="-11940"/>
+                  </a:stretch>
+                </a:blipFill>
+              </p:spPr>
+              <p:txBody>
+                <a:bodyPr/>
+                <a:lstStyle/>
+                <a:p>
+                  <a:r>
+                    <a:rPr lang="zh-TW" altLang="en-US">
+                      <a:noFill/>
+                    </a:rPr>
+                    <a:t> </a:t>
+                  </a:r>
+                </a:p>
+              </p:txBody>
+            </p:sp>
+          </mc:Fallback>
+        </mc:AlternateContent>
+        <p:sp>
+          <p:nvSpPr>
+            <p:cNvPr id="226" name="箭號: 向右 225">
+              <a:extLst>
+                <a:ext uri="{FF2B5EF4-FFF2-40B4-BE49-F238E27FC236}">
+                  <a16:creationId xmlns:a16="http://schemas.microsoft.com/office/drawing/2014/main" id="{F53FDFCE-8E66-4891-B9BD-FCA604BB352F}"/>
+                </a:ext>
+              </a:extLst>
+            </p:cNvPr>
+            <p:cNvSpPr/>
+            <p:nvPr/>
+          </p:nvSpPr>
+          <p:spPr>
+            <a:xfrm>
+              <a:off x="-837092" y="1356364"/>
+              <a:ext cx="92654" cy="27541"/>
+            </a:xfrm>
+            <a:prstGeom prst="rightArrow">
+              <a:avLst>
+                <a:gd name="adj1" fmla="val 50000"/>
+                <a:gd name="adj2" fmla="val 99023"/>
+              </a:avLst>
+            </a:prstGeom>
+            <a:solidFill>
+              <a:schemeClr val="tx1"/>
+            </a:solidFill>
+            <a:ln>
+              <a:solidFill>
+                <a:schemeClr val="tx1"/>
+              </a:solidFill>
+            </a:ln>
+          </p:spPr>
+          <p:style>
+            <a:lnRef idx="2">
+              <a:schemeClr val="dk1">
+                <a:shade val="50000"/>
+              </a:schemeClr>
+            </a:lnRef>
+            <a:fillRef idx="1">
+              <a:schemeClr val="dk1"/>
+            </a:fillRef>
+            <a:effectRef idx="0">
+              <a:schemeClr val="dk1"/>
+            </a:effectRef>
+            <a:fontRef idx="minor">
+              <a:schemeClr val="lt1"/>
+            </a:fontRef>
+          </p:style>
+          <p:txBody>
+            <a:bodyPr rtlCol="0" anchor="ctr"/>
+            <a:lstStyle/>
+            <a:p>
+              <a:pPr algn="ctr"/>
+              <a:endParaRPr lang="zh-TW" altLang="en-US" sz="1630">
+                <a:solidFill>
+                  <a:schemeClr val="tx1"/>
+                </a:solidFill>
+                <a:latin typeface="Times New Roman" panose="02020603050405020304" pitchFamily="18" charset="0"/>
+                <a:cs typeface="Times New Roman" panose="02020603050405020304" pitchFamily="18" charset="0"/>
+              </a:endParaRPr>
+            </a:p>
+          </p:txBody>
+        </p:sp>
+        <p:sp>
+          <p:nvSpPr>
+            <p:cNvPr id="227" name="箭號: 向右 226">
+              <a:extLst>
+                <a:ext uri="{FF2B5EF4-FFF2-40B4-BE49-F238E27FC236}">
+                  <a16:creationId xmlns:a16="http://schemas.microsoft.com/office/drawing/2014/main" id="{154FE730-F265-4876-A44B-B6821A9DF058}"/>
+                </a:ext>
+              </a:extLst>
+            </p:cNvPr>
+            <p:cNvSpPr/>
+            <p:nvPr/>
+          </p:nvSpPr>
+          <p:spPr>
+            <a:xfrm rot="16200000">
+              <a:off x="-877012" y="1316853"/>
+              <a:ext cx="91764" cy="27808"/>
+            </a:xfrm>
+            <a:prstGeom prst="rightArrow">
+              <a:avLst>
+                <a:gd name="adj1" fmla="val 50000"/>
+                <a:gd name="adj2" fmla="val 99023"/>
+              </a:avLst>
+            </a:prstGeom>
+            <a:solidFill>
+              <a:schemeClr val="tx1"/>
+            </a:solidFill>
+            <a:ln>
+              <a:solidFill>
+                <a:schemeClr val="tx1"/>
+              </a:solidFill>
+            </a:ln>
+          </p:spPr>
+          <p:style>
+            <a:lnRef idx="2">
+              <a:schemeClr val="dk1">
+                <a:shade val="50000"/>
+              </a:schemeClr>
+            </a:lnRef>
+            <a:fillRef idx="1">
+              <a:schemeClr val="dk1"/>
+            </a:fillRef>
+            <a:effectRef idx="0">
+              <a:schemeClr val="dk1"/>
+            </a:effectRef>
+            <a:fontRef idx="minor">
+              <a:schemeClr val="lt1"/>
+            </a:fontRef>
+          </p:style>
+          <p:txBody>
+            <a:bodyPr rtlCol="0" anchor="ctr"/>
+            <a:lstStyle/>
+            <a:p>
+              <a:pPr algn="ctr"/>
+              <a:endParaRPr lang="zh-TW" altLang="en-US" sz="1630" dirty="0">
+                <a:solidFill>
+                  <a:schemeClr val="tx1"/>
+                </a:solidFill>
+                <a:latin typeface="Times New Roman" panose="02020603050405020304" pitchFamily="18" charset="0"/>
+                <a:cs typeface="Times New Roman" panose="02020603050405020304" pitchFamily="18" charset="0"/>
+              </a:endParaRPr>
+            </a:p>
+          </p:txBody>
+        </p:sp>
+      </p:grpSp>
+      <p:pic>
+        <p:nvPicPr>
+          <p:cNvPr id="228" name="圖片 227">
+            <a:extLst>
+              <a:ext uri="{FF2B5EF4-FFF2-40B4-BE49-F238E27FC236}">
+                <a16:creationId xmlns:a16="http://schemas.microsoft.com/office/drawing/2014/main" id="{791856D3-FB09-4816-B497-A4B106581B53}"/>
+              </a:ext>
+            </a:extLst>
+          </p:cNvPr>
+          <p:cNvPicPr>
+            <a:picLocks noChangeAspect="1"/>
+          </p:cNvPicPr>
+          <p:nvPr/>
+        </p:nvPicPr>
+        <p:blipFill rotWithShape="1">
+          <a:blip r:embed="rId35">
+            <a:clrChange>
+              <a:clrFrom>
+                <a:srgbClr val="FFFFFF"/>
+              </a:clrFrom>
+              <a:clrTo>
+                <a:srgbClr val="FFFFFF">
+                  <a:alpha val="0"/>
+                </a:srgbClr>
+              </a:clrTo>
+            </a:clrChange>
+            <a:extLst>
+              <a:ext uri="{28A0092B-C50C-407E-A947-70E740481C1C}">
+                <a14:useLocalDpi xmlns:a14="http://schemas.microsoft.com/office/drawing/2010/main" val="0"/>
+              </a:ext>
+            </a:extLst>
+          </a:blip>
+          <a:srcRect l="17225" r="67421"/>
+          <a:stretch/>
+        </p:blipFill>
+        <p:spPr>
+          <a:xfrm>
+            <a:off x="2718114" y="2753714"/>
+            <a:ext cx="1469205" cy="1594800"/>
+          </a:xfrm>
+          <a:prstGeom prst="rect">
+            <a:avLst/>
+          </a:prstGeom>
+        </p:spPr>
+      </p:pic>
+      <p:pic>
+        <p:nvPicPr>
+          <p:cNvPr id="229" name="圖片 228">
+            <a:extLst>
+              <a:ext uri="{FF2B5EF4-FFF2-40B4-BE49-F238E27FC236}">
+                <a16:creationId xmlns:a16="http://schemas.microsoft.com/office/drawing/2014/main" id="{34763A44-946B-40AE-BBC9-696A33FFE6E9}"/>
+              </a:ext>
+            </a:extLst>
+          </p:cNvPr>
+          <p:cNvPicPr>
+            <a:picLocks noChangeAspect="1"/>
+          </p:cNvPicPr>
+          <p:nvPr/>
+        </p:nvPicPr>
+        <p:blipFill rotWithShape="1">
+          <a:blip r:embed="rId35">
             <a:clrChange>
               <a:clrFrom>
                 <a:srgbClr val="FFFFFF"/>
@@ -11412,7 +13050,7 @@
         </p:blipFill>
         <p:spPr>
           <a:xfrm>
-            <a:off x="4699173" y="4392014"/>
+            <a:off x="4076873" y="2753714"/>
             <a:ext cx="1458930" cy="1594800"/>
           </a:xfrm>
           <a:prstGeom prst="rect">
@@ -11422,10 +13060,10 @@
       </p:pic>
       <p:pic>
         <p:nvPicPr>
-          <p:cNvPr id="76" name="圖片 75">
+          <p:cNvPr id="230" name="圖片 229">
             <a:extLst>
               <a:ext uri="{FF2B5EF4-FFF2-40B4-BE49-F238E27FC236}">
-                <a16:creationId xmlns:a16="http://schemas.microsoft.com/office/drawing/2014/main" id="{5A582E73-AA70-49B8-B03E-0CF3D8C1442F}"/>
+                <a16:creationId xmlns:a16="http://schemas.microsoft.com/office/drawing/2014/main" id="{009FCB5C-21A9-4122-AE88-948E33792833}"/>
               </a:ext>
             </a:extLst>
           </p:cNvPr>
@@ -11435,97 +13073,7 @@
           <p:nvPr/>
         </p:nvPicPr>
         <p:blipFill rotWithShape="1">
-          <a:blip r:embed="rId4">
-            <a:clrChange>
-              <a:clrFrom>
-                <a:srgbClr val="FFFFFF"/>
-              </a:clrFrom>
-              <a:clrTo>
-                <a:srgbClr val="FFFFFF">
-                  <a:alpha val="0"/>
-                </a:srgbClr>
-              </a:clrTo>
-            </a:clrChange>
-            <a:extLst>
-              <a:ext uri="{28A0092B-C50C-407E-A947-70E740481C1C}">
-                <a14:useLocalDpi xmlns:a14="http://schemas.microsoft.com/office/drawing/2010/main" val="0"/>
-              </a:ext>
-            </a:extLst>
-          </a:blip>
-          <a:srcRect l="34727" r="51100"/>
-          <a:stretch/>
-        </p:blipFill>
-        <p:spPr>
-          <a:xfrm>
-            <a:off x="4702916" y="356049"/>
-            <a:ext cx="1441405" cy="1695009"/>
-          </a:xfrm>
-          <a:prstGeom prst="rect">
-            <a:avLst/>
-          </a:prstGeom>
-        </p:spPr>
-      </p:pic>
-      <p:pic>
-        <p:nvPicPr>
-          <p:cNvPr id="85" name="圖片 84">
-            <a:extLst>
-              <a:ext uri="{FF2B5EF4-FFF2-40B4-BE49-F238E27FC236}">
-                <a16:creationId xmlns:a16="http://schemas.microsoft.com/office/drawing/2014/main" id="{66B8A3C7-F5DC-40CE-9E13-D42A0E9B7082}"/>
-              </a:ext>
-            </a:extLst>
-          </p:cNvPr>
-          <p:cNvPicPr>
-            <a:picLocks noChangeAspect="1"/>
-          </p:cNvPicPr>
-          <p:nvPr/>
-        </p:nvPicPr>
-        <p:blipFill rotWithShape="1">
-          <a:blip r:embed="rId2">
-            <a:clrChange>
-              <a:clrFrom>
-                <a:srgbClr val="FFFFFF"/>
-              </a:clrFrom>
-              <a:clrTo>
-                <a:srgbClr val="FFFFFF">
-                  <a:alpha val="0"/>
-                </a:srgbClr>
-              </a:clrTo>
-            </a:clrChange>
-            <a:extLst>
-              <a:ext uri="{28A0092B-C50C-407E-A947-70E740481C1C}">
-                <a14:useLocalDpi xmlns:a14="http://schemas.microsoft.com/office/drawing/2010/main" val="0"/>
-              </a:ext>
-            </a:extLst>
-          </a:blip>
-          <a:srcRect l="51262" r="34350"/>
-          <a:stretch/>
-        </p:blipFill>
-        <p:spPr>
-          <a:xfrm>
-            <a:off x="6047335" y="1967580"/>
-            <a:ext cx="1463244" cy="1695009"/>
-          </a:xfrm>
-          <a:prstGeom prst="rect">
-            <a:avLst/>
-          </a:prstGeom>
-        </p:spPr>
-      </p:pic>
-      <p:pic>
-        <p:nvPicPr>
-          <p:cNvPr id="86" name="圖片 85">
-            <a:extLst>
-              <a:ext uri="{FF2B5EF4-FFF2-40B4-BE49-F238E27FC236}">
-                <a16:creationId xmlns:a16="http://schemas.microsoft.com/office/drawing/2014/main" id="{219885DD-657C-4804-8CF3-431012488BAF}"/>
-              </a:ext>
-            </a:extLst>
-          </p:cNvPr>
-          <p:cNvPicPr>
-            <a:picLocks noChangeAspect="1"/>
-          </p:cNvPicPr>
-          <p:nvPr/>
-        </p:nvPicPr>
-        <p:blipFill rotWithShape="1">
-          <a:blip r:embed="rId3">
+          <a:blip r:embed="rId35">
             <a:clrChange>
               <a:clrFrom>
                 <a:srgbClr val="FFFFFF"/>
@@ -11547,7 +13095,7 @@
         </p:blipFill>
         <p:spPr>
           <a:xfrm>
-            <a:off x="6014265" y="4392014"/>
+            <a:off x="5391965" y="2753714"/>
             <a:ext cx="1489754" cy="1594800"/>
           </a:xfrm>
           <a:prstGeom prst="rect">
@@ -11557,10 +13105,10 @@
       </p:pic>
       <p:pic>
         <p:nvPicPr>
-          <p:cNvPr id="87" name="圖片 86">
+          <p:cNvPr id="231" name="圖片 230">
             <a:extLst>
               <a:ext uri="{FF2B5EF4-FFF2-40B4-BE49-F238E27FC236}">
-                <a16:creationId xmlns:a16="http://schemas.microsoft.com/office/drawing/2014/main" id="{F5CB16CB-E5EB-44F9-9347-7118514D5318}"/>
+                <a16:creationId xmlns:a16="http://schemas.microsoft.com/office/drawing/2014/main" id="{561E6830-F9BA-4AF7-B12F-932A60D522A7}"/>
               </a:ext>
             </a:extLst>
           </p:cNvPr>
@@ -11570,97 +13118,7 @@
           <p:nvPr/>
         </p:nvPicPr>
         <p:blipFill rotWithShape="1">
-          <a:blip r:embed="rId4">
-            <a:clrChange>
-              <a:clrFrom>
-                <a:srgbClr val="FFFFFF"/>
-              </a:clrFrom>
-              <a:clrTo>
-                <a:srgbClr val="FFFFFF">
-                  <a:alpha val="0"/>
-                </a:srgbClr>
-              </a:clrTo>
-            </a:clrChange>
-            <a:extLst>
-              <a:ext uri="{28A0092B-C50C-407E-A947-70E740481C1C}">
-                <a14:useLocalDpi xmlns:a14="http://schemas.microsoft.com/office/drawing/2010/main" val="0"/>
-              </a:ext>
-            </a:extLst>
-          </a:blip>
-          <a:srcRect l="51155" r="34350"/>
-          <a:stretch/>
-        </p:blipFill>
-        <p:spPr>
-          <a:xfrm>
-            <a:off x="6027536" y="356049"/>
-            <a:ext cx="1474163" cy="1695009"/>
-          </a:xfrm>
-          <a:prstGeom prst="rect">
-            <a:avLst/>
-          </a:prstGeom>
-        </p:spPr>
-      </p:pic>
-      <p:pic>
-        <p:nvPicPr>
-          <p:cNvPr id="88" name="圖片 87">
-            <a:extLst>
-              <a:ext uri="{FF2B5EF4-FFF2-40B4-BE49-F238E27FC236}">
-                <a16:creationId xmlns:a16="http://schemas.microsoft.com/office/drawing/2014/main" id="{7696136E-F0F1-4D55-B922-76665211E370}"/>
-              </a:ext>
-            </a:extLst>
-          </p:cNvPr>
-          <p:cNvPicPr>
-            <a:picLocks noChangeAspect="1"/>
-          </p:cNvPicPr>
-          <p:nvPr/>
-        </p:nvPicPr>
-        <p:blipFill rotWithShape="1">
-          <a:blip r:embed="rId2">
-            <a:clrChange>
-              <a:clrFrom>
-                <a:srgbClr val="FFFFFF"/>
-              </a:clrFrom>
-              <a:clrTo>
-                <a:srgbClr val="FFFFFF">
-                  <a:alpha val="0"/>
-                </a:srgbClr>
-              </a:clrTo>
-            </a:clrChange>
-            <a:extLst>
-              <a:ext uri="{28A0092B-C50C-407E-A947-70E740481C1C}">
-                <a14:useLocalDpi xmlns:a14="http://schemas.microsoft.com/office/drawing/2010/main" val="0"/>
-              </a:ext>
-            </a:extLst>
-          </a:blip>
-          <a:srcRect l="67475" r="17051"/>
-          <a:stretch/>
-        </p:blipFill>
-        <p:spPr>
-          <a:xfrm>
-            <a:off x="7349904" y="1967580"/>
-            <a:ext cx="1573726" cy="1695009"/>
-          </a:xfrm>
-          <a:prstGeom prst="rect">
-            <a:avLst/>
-          </a:prstGeom>
-        </p:spPr>
-      </p:pic>
-      <p:pic>
-        <p:nvPicPr>
-          <p:cNvPr id="89" name="圖片 88">
-            <a:extLst>
-              <a:ext uri="{FF2B5EF4-FFF2-40B4-BE49-F238E27FC236}">
-                <a16:creationId xmlns:a16="http://schemas.microsoft.com/office/drawing/2014/main" id="{878533E0-617D-4B67-AF50-43CF926BE071}"/>
-              </a:ext>
-            </a:extLst>
-          </p:cNvPr>
-          <p:cNvPicPr>
-            <a:picLocks noChangeAspect="1"/>
-          </p:cNvPicPr>
-          <p:nvPr/>
-        </p:nvPicPr>
-        <p:blipFill rotWithShape="1">
-          <a:blip r:embed="rId3">
+          <a:blip r:embed="rId35">
             <a:clrChange>
               <a:clrFrom>
                 <a:srgbClr val="FFFFFF"/>
@@ -11682,7 +13140,7 @@
         </p:blipFill>
         <p:spPr>
           <a:xfrm>
-            <a:off x="7359430" y="4392014"/>
+            <a:off x="6737130" y="2753714"/>
             <a:ext cx="1464300" cy="1594800"/>
           </a:xfrm>
           <a:prstGeom prst="rect">
@@ -11690,12 +13148,222 @@
           </a:prstGeom>
         </p:spPr>
       </p:pic>
+      <p:sp>
+        <p:nvSpPr>
+          <p:cNvPr id="155" name="矩形: 圓角 154">
+            <a:extLst>
+              <a:ext uri="{FF2B5EF4-FFF2-40B4-BE49-F238E27FC236}">
+                <a16:creationId xmlns:a16="http://schemas.microsoft.com/office/drawing/2014/main" id="{3D78B5F8-F682-43E1-BE1D-F6967D1B45A0}"/>
+              </a:ext>
+            </a:extLst>
+          </p:cNvPr>
+          <p:cNvSpPr/>
+          <p:nvPr/>
+        </p:nvSpPr>
+        <p:spPr>
+          <a:xfrm>
+            <a:off x="1424763" y="2858022"/>
+            <a:ext cx="6717600" cy="1458000"/>
+          </a:xfrm>
+          <a:prstGeom prst="roundRect">
+            <a:avLst>
+              <a:gd name="adj" fmla="val 6163"/>
+            </a:avLst>
+          </a:prstGeom>
+          <a:noFill/>
+          <a:ln w="9525" cap="flat" cmpd="sng" algn="ctr">
+            <a:solidFill>
+              <a:schemeClr val="accent2"/>
+            </a:solidFill>
+            <a:prstDash val="solid"/>
+            <a:round/>
+            <a:headEnd type="none" w="med" len="med"/>
+            <a:tailEnd type="none" w="med" len="med"/>
+          </a:ln>
+        </p:spPr>
+        <p:style>
+          <a:lnRef idx="0">
+            <a:scrgbClr r="0" g="0" b="0"/>
+          </a:lnRef>
+          <a:fillRef idx="0">
+            <a:scrgbClr r="0" g="0" b="0"/>
+          </a:fillRef>
+          <a:effectRef idx="0">
+            <a:scrgbClr r="0" g="0" b="0"/>
+          </a:effectRef>
+          <a:fontRef idx="minor">
+            <a:schemeClr val="accent2"/>
+          </a:fontRef>
+        </p:style>
+        <p:txBody>
+          <a:bodyPr rot="0" spcFirstLastPara="0" vertOverflow="overflow" horzOverflow="overflow" vert="horz" wrap="square" lIns="91440" tIns="45720" rIns="91440" bIns="45720" numCol="1" spcCol="0" rtlCol="0" fromWordArt="0" anchor="ctr" anchorCtr="0" forceAA="0" compatLnSpc="1">
+            <a:prstTxWarp prst="textNoShape">
+              <a:avLst/>
+            </a:prstTxWarp>
+            <a:noAutofit/>
+          </a:bodyPr>
+          <a:lstStyle/>
+          <a:p>
+            <a:pPr algn="ctr"/>
+            <a:endParaRPr lang="zh-TW" altLang="en-US" sz="1900" dirty="0">
+              <a:latin typeface="Times New Roman" panose="02020603050405020304" pitchFamily="18" charset="0"/>
+              <a:cs typeface="Times New Roman" panose="02020603050405020304" pitchFamily="18" charset="0"/>
+            </a:endParaRPr>
+          </a:p>
+        </p:txBody>
+      </p:sp>
+      <p:sp>
+        <p:nvSpPr>
+          <p:cNvPr id="156" name="矩形: 圓角 155">
+            <a:extLst>
+              <a:ext uri="{FF2B5EF4-FFF2-40B4-BE49-F238E27FC236}">
+                <a16:creationId xmlns:a16="http://schemas.microsoft.com/office/drawing/2014/main" id="{925F3798-9827-4801-A7A6-B7B2F0DED723}"/>
+              </a:ext>
+            </a:extLst>
+          </p:cNvPr>
+          <p:cNvSpPr/>
+          <p:nvPr/>
+        </p:nvSpPr>
+        <p:spPr>
+          <a:xfrm>
+            <a:off x="1424763" y="911563"/>
+            <a:ext cx="6717600" cy="1458000"/>
+          </a:xfrm>
+          <a:prstGeom prst="roundRect">
+            <a:avLst>
+              <a:gd name="adj" fmla="val 6163"/>
+            </a:avLst>
+          </a:prstGeom>
+          <a:noFill/>
+          <a:ln w="9525" cap="flat" cmpd="sng" algn="ctr">
+            <a:solidFill>
+              <a:schemeClr val="accent1"/>
+            </a:solidFill>
+            <a:prstDash val="solid"/>
+            <a:round/>
+            <a:headEnd type="none" w="med" len="med"/>
+            <a:tailEnd type="none" w="med" len="med"/>
+          </a:ln>
+        </p:spPr>
+        <p:style>
+          <a:lnRef idx="0">
+            <a:scrgbClr r="0" g="0" b="0"/>
+          </a:lnRef>
+          <a:fillRef idx="0">
+            <a:scrgbClr r="0" g="0" b="0"/>
+          </a:fillRef>
+          <a:effectRef idx="0">
+            <a:scrgbClr r="0" g="0" b="0"/>
+          </a:effectRef>
+          <a:fontRef idx="minor">
+            <a:schemeClr val="accent1"/>
+          </a:fontRef>
+        </p:style>
+        <p:txBody>
+          <a:bodyPr rot="0" spcFirstLastPara="0" vertOverflow="overflow" horzOverflow="overflow" vert="horz" wrap="square" lIns="91440" tIns="45720" rIns="91440" bIns="45720" numCol="1" spcCol="0" rtlCol="0" fromWordArt="0" anchor="ctr" anchorCtr="0" forceAA="0" compatLnSpc="1">
+            <a:prstTxWarp prst="textNoShape">
+              <a:avLst/>
+            </a:prstTxWarp>
+            <a:noAutofit/>
+          </a:bodyPr>
+          <a:lstStyle/>
+          <a:p>
+            <a:pPr algn="ctr"/>
+            <a:endParaRPr lang="zh-TW" altLang="en-US" sz="1900" dirty="0">
+              <a:latin typeface="Times New Roman" panose="02020603050405020304" pitchFamily="18" charset="0"/>
+              <a:cs typeface="Times New Roman" panose="02020603050405020304" pitchFamily="18" charset="0"/>
+            </a:endParaRPr>
+          </a:p>
+        </p:txBody>
+      </p:sp>
+      <p:sp>
+        <p:nvSpPr>
+          <p:cNvPr id="159" name="矩形 158">
+            <a:extLst>
+              <a:ext uri="{FF2B5EF4-FFF2-40B4-BE49-F238E27FC236}">
+                <a16:creationId xmlns:a16="http://schemas.microsoft.com/office/drawing/2014/main" id="{303F359A-0868-4109-80BE-C1349A96A532}"/>
+              </a:ext>
+            </a:extLst>
+          </p:cNvPr>
+          <p:cNvSpPr/>
+          <p:nvPr/>
+        </p:nvSpPr>
+        <p:spPr>
+          <a:xfrm>
+            <a:off x="8160260" y="2194314"/>
+            <a:ext cx="487634" cy="343171"/>
+          </a:xfrm>
+          <a:prstGeom prst="rect">
+            <a:avLst/>
+          </a:prstGeom>
+        </p:spPr>
+        <p:txBody>
+          <a:bodyPr wrap="none">
+            <a:spAutoFit/>
+          </a:bodyPr>
+          <a:lstStyle/>
+          <a:p>
+            <a:r>
+              <a:rPr lang="en-US" altLang="zh-TW" sz="1630" dirty="0">
+                <a:latin typeface="Times New Roman" panose="02020603050405020304" pitchFamily="18" charset="0"/>
+                <a:cs typeface="Times New Roman" panose="02020603050405020304" pitchFamily="18" charset="0"/>
+              </a:rPr>
+              <a:t>a.u.</a:t>
+            </a:r>
+            <a:endParaRPr lang="zh-TW" altLang="en-US" sz="1630" dirty="0">
+              <a:latin typeface="Times New Roman" panose="02020603050405020304" pitchFamily="18" charset="0"/>
+              <a:cs typeface="Times New Roman" panose="02020603050405020304" pitchFamily="18" charset="0"/>
+            </a:endParaRPr>
+          </a:p>
+        </p:txBody>
+      </p:sp>
+      <p:sp>
+        <p:nvSpPr>
+          <p:cNvPr id="160" name="矩形 159">
+            <a:extLst>
+              <a:ext uri="{FF2B5EF4-FFF2-40B4-BE49-F238E27FC236}">
+                <a16:creationId xmlns:a16="http://schemas.microsoft.com/office/drawing/2014/main" id="{1DE638A3-8BB0-4516-8569-56E92209AD1E}"/>
+              </a:ext>
+            </a:extLst>
+          </p:cNvPr>
+          <p:cNvSpPr/>
+          <p:nvPr/>
+        </p:nvSpPr>
+        <p:spPr>
+          <a:xfrm>
+            <a:off x="8135689" y="4076479"/>
+            <a:ext cx="487634" cy="343171"/>
+          </a:xfrm>
+          <a:prstGeom prst="rect">
+            <a:avLst/>
+          </a:prstGeom>
+        </p:spPr>
+        <p:txBody>
+          <a:bodyPr wrap="none">
+            <a:spAutoFit/>
+          </a:bodyPr>
+          <a:lstStyle/>
+          <a:p>
+            <a:r>
+              <a:rPr lang="en-US" altLang="zh-TW" sz="1630" dirty="0">
+                <a:latin typeface="Times New Roman" panose="02020603050405020304" pitchFamily="18" charset="0"/>
+                <a:cs typeface="Times New Roman" panose="02020603050405020304" pitchFamily="18" charset="0"/>
+              </a:rPr>
+              <a:t>a.u.</a:t>
+            </a:r>
+            <a:endParaRPr lang="zh-TW" altLang="en-US" sz="1630" dirty="0">
+              <a:latin typeface="Times New Roman" panose="02020603050405020304" pitchFamily="18" charset="0"/>
+              <a:cs typeface="Times New Roman" panose="02020603050405020304" pitchFamily="18" charset="0"/>
+            </a:endParaRPr>
+          </a:p>
+        </p:txBody>
+      </p:sp>
       <p:pic>
         <p:nvPicPr>
-          <p:cNvPr id="90" name="圖片 89">
+          <p:cNvPr id="178" name="圖片 177">
             <a:extLst>
               <a:ext uri="{FF2B5EF4-FFF2-40B4-BE49-F238E27FC236}">
-                <a16:creationId xmlns:a16="http://schemas.microsoft.com/office/drawing/2014/main" id="{6A619A0F-40AE-4B91-A63A-3C778E89B6CB}"/>
+                <a16:creationId xmlns:a16="http://schemas.microsoft.com/office/drawing/2014/main" id="{93CA0CC9-C323-43A2-943A-1A295F3F96A4}"/>
               </a:ext>
             </a:extLst>
           </p:cNvPr>
@@ -11705,7 +13373,7 @@
           <p:nvPr/>
         </p:nvPicPr>
         <p:blipFill rotWithShape="1">
-          <a:blip r:embed="rId4">
+          <a:blip r:embed="rId37">
             <a:clrChange>
               <a:clrFrom>
                 <a:srgbClr val="FFFFFF"/>
@@ -11716,19 +13384,1560 @@
                 </a:srgbClr>
               </a:clrTo>
             </a:clrChange>
-            <a:extLst>
-              <a:ext uri="{28A0092B-C50C-407E-A947-70E740481C1C}">
-                <a14:useLocalDpi xmlns:a14="http://schemas.microsoft.com/office/drawing/2010/main" val="0"/>
-              </a:ext>
-            </a:extLst>
           </a:blip>
-          <a:srcRect l="67475" r="17169"/>
+          <a:srcRect r="32321"/>
           <a:stretch/>
         </p:blipFill>
         <p:spPr>
           <a:xfrm>
-            <a:off x="7349903" y="356049"/>
-            <a:ext cx="1561673" cy="1695009"/>
+            <a:off x="8165045" y="2903493"/>
+            <a:ext cx="407456" cy="1328804"/>
+          </a:xfrm>
+          <a:prstGeom prst="rect">
+            <a:avLst/>
+          </a:prstGeom>
+        </p:spPr>
+      </p:pic>
+      <p:sp>
+        <p:nvSpPr>
+          <p:cNvPr id="180" name="矩形 179">
+            <a:extLst>
+              <a:ext uri="{FF2B5EF4-FFF2-40B4-BE49-F238E27FC236}">
+                <a16:creationId xmlns:a16="http://schemas.microsoft.com/office/drawing/2014/main" id="{C2ECF718-33F2-4E2C-A318-57364F701A8D}"/>
+              </a:ext>
+            </a:extLst>
+          </p:cNvPr>
+          <p:cNvSpPr/>
+          <p:nvPr/>
+        </p:nvSpPr>
+        <p:spPr>
+          <a:xfrm>
+            <a:off x="8463801" y="797525"/>
+            <a:ext cx="288862" cy="343171"/>
+          </a:xfrm>
+          <a:prstGeom prst="rect">
+            <a:avLst/>
+          </a:prstGeom>
+        </p:spPr>
+        <p:txBody>
+          <a:bodyPr wrap="none">
+            <a:spAutoFit/>
+          </a:bodyPr>
+          <a:lstStyle/>
+          <a:p>
+            <a:r>
+              <a:rPr lang="en-US" altLang="zh-TW" sz="1630" dirty="0">
+                <a:latin typeface="Times New Roman" panose="02020603050405020304" pitchFamily="18" charset="0"/>
+                <a:cs typeface="Times New Roman" panose="02020603050405020304" pitchFamily="18" charset="0"/>
+              </a:rPr>
+              <a:t>1</a:t>
+            </a:r>
+            <a:endParaRPr lang="zh-TW" altLang="en-US" sz="1630" dirty="0">
+              <a:latin typeface="Times New Roman" panose="02020603050405020304" pitchFamily="18" charset="0"/>
+              <a:cs typeface="Times New Roman" panose="02020603050405020304" pitchFamily="18" charset="0"/>
+            </a:endParaRPr>
+          </a:p>
+        </p:txBody>
+      </p:sp>
+      <p:sp>
+        <p:nvSpPr>
+          <p:cNvPr id="181" name="矩形 180">
+            <a:extLst>
+              <a:ext uri="{FF2B5EF4-FFF2-40B4-BE49-F238E27FC236}">
+                <a16:creationId xmlns:a16="http://schemas.microsoft.com/office/drawing/2014/main" id="{FB404701-AAB7-4BD8-B2A4-9BE0DD467677}"/>
+              </a:ext>
+            </a:extLst>
+          </p:cNvPr>
+          <p:cNvSpPr/>
+          <p:nvPr/>
+        </p:nvSpPr>
+        <p:spPr>
+          <a:xfrm>
+            <a:off x="8482851" y="2064350"/>
+            <a:ext cx="288862" cy="343171"/>
+          </a:xfrm>
+          <a:prstGeom prst="rect">
+            <a:avLst/>
+          </a:prstGeom>
+        </p:spPr>
+        <p:txBody>
+          <a:bodyPr wrap="none">
+            <a:spAutoFit/>
+          </a:bodyPr>
+          <a:lstStyle/>
+          <a:p>
+            <a:r>
+              <a:rPr lang="en-US" altLang="zh-TW" sz="1630" dirty="0">
+                <a:latin typeface="Times New Roman" panose="02020603050405020304" pitchFamily="18" charset="0"/>
+                <a:cs typeface="Times New Roman" panose="02020603050405020304" pitchFamily="18" charset="0"/>
+              </a:rPr>
+              <a:t>0</a:t>
+            </a:r>
+            <a:endParaRPr lang="zh-TW" altLang="en-US" sz="1630" dirty="0">
+              <a:latin typeface="Times New Roman" panose="02020603050405020304" pitchFamily="18" charset="0"/>
+              <a:cs typeface="Times New Roman" panose="02020603050405020304" pitchFamily="18" charset="0"/>
+            </a:endParaRPr>
+          </a:p>
+        </p:txBody>
+      </p:sp>
+      <p:sp>
+        <p:nvSpPr>
+          <p:cNvPr id="182" name="矩形 181">
+            <a:extLst>
+              <a:ext uri="{FF2B5EF4-FFF2-40B4-BE49-F238E27FC236}">
+                <a16:creationId xmlns:a16="http://schemas.microsoft.com/office/drawing/2014/main" id="{A8C52134-6557-48E2-A151-DA03DEB70544}"/>
+              </a:ext>
+            </a:extLst>
+          </p:cNvPr>
+          <p:cNvSpPr/>
+          <p:nvPr/>
+        </p:nvSpPr>
+        <p:spPr>
+          <a:xfrm>
+            <a:off x="8473326" y="2751030"/>
+            <a:ext cx="288862" cy="343171"/>
+          </a:xfrm>
+          <a:prstGeom prst="rect">
+            <a:avLst/>
+          </a:prstGeom>
+        </p:spPr>
+        <p:txBody>
+          <a:bodyPr wrap="none">
+            <a:spAutoFit/>
+          </a:bodyPr>
+          <a:lstStyle/>
+          <a:p>
+            <a:r>
+              <a:rPr lang="en-US" altLang="zh-TW" sz="1630" dirty="0">
+                <a:latin typeface="Times New Roman" panose="02020603050405020304" pitchFamily="18" charset="0"/>
+                <a:cs typeface="Times New Roman" panose="02020603050405020304" pitchFamily="18" charset="0"/>
+              </a:rPr>
+              <a:t>1</a:t>
+            </a:r>
+            <a:endParaRPr lang="zh-TW" altLang="en-US" sz="1630" dirty="0">
+              <a:latin typeface="Times New Roman" panose="02020603050405020304" pitchFamily="18" charset="0"/>
+              <a:cs typeface="Times New Roman" panose="02020603050405020304" pitchFamily="18" charset="0"/>
+            </a:endParaRPr>
+          </a:p>
+        </p:txBody>
+      </p:sp>
+      <p:sp>
+        <p:nvSpPr>
+          <p:cNvPr id="183" name="矩形 182">
+            <a:extLst>
+              <a:ext uri="{FF2B5EF4-FFF2-40B4-BE49-F238E27FC236}">
+                <a16:creationId xmlns:a16="http://schemas.microsoft.com/office/drawing/2014/main" id="{C7EFE756-5E38-43BF-96A1-8A61973C490F}"/>
+              </a:ext>
+            </a:extLst>
+          </p:cNvPr>
+          <p:cNvSpPr/>
+          <p:nvPr/>
+        </p:nvSpPr>
+        <p:spPr>
+          <a:xfrm>
+            <a:off x="8492376" y="3989280"/>
+            <a:ext cx="357790" cy="343171"/>
+          </a:xfrm>
+          <a:prstGeom prst="rect">
+            <a:avLst/>
+          </a:prstGeom>
+        </p:spPr>
+        <p:txBody>
+          <a:bodyPr wrap="none">
+            <a:spAutoFit/>
+          </a:bodyPr>
+          <a:lstStyle/>
+          <a:p>
+            <a:r>
+              <a:rPr lang="en-US" altLang="zh-TW" sz="1630" dirty="0">
+                <a:latin typeface="Times New Roman" panose="02020603050405020304" pitchFamily="18" charset="0"/>
+                <a:cs typeface="Times New Roman" panose="02020603050405020304" pitchFamily="18" charset="0"/>
+              </a:rPr>
+              <a:t>-1</a:t>
+            </a:r>
+            <a:endParaRPr lang="zh-TW" altLang="en-US" sz="1630" dirty="0">
+              <a:latin typeface="Times New Roman" panose="02020603050405020304" pitchFamily="18" charset="0"/>
+              <a:cs typeface="Times New Roman" panose="02020603050405020304" pitchFamily="18" charset="0"/>
+            </a:endParaRPr>
+          </a:p>
+        </p:txBody>
+      </p:sp>
+      <mc:AlternateContent xmlns:mc="http://schemas.openxmlformats.org/markup-compatibility/2006" xmlns:a14="http://schemas.microsoft.com/office/drawing/2010/main">
+        <mc:Choice Requires="a14">
+          <p:sp>
+            <p:nvSpPr>
+              <p:cNvPr id="184" name="矩形 183">
+                <a:extLst>
+                  <a:ext uri="{FF2B5EF4-FFF2-40B4-BE49-F238E27FC236}">
+                    <a16:creationId xmlns:a16="http://schemas.microsoft.com/office/drawing/2014/main" id="{33E2B86C-A084-4896-8EE7-FA115B79155C}"/>
+                  </a:ext>
+                </a:extLst>
+              </p:cNvPr>
+              <p:cNvSpPr/>
+              <p:nvPr/>
+            </p:nvSpPr>
+            <p:spPr>
+              <a:xfrm>
+                <a:off x="1623084" y="935011"/>
+                <a:ext cx="889154" cy="343171"/>
+              </a:xfrm>
+              <a:prstGeom prst="rect">
+                <a:avLst/>
+              </a:prstGeom>
+            </p:spPr>
+            <p:txBody>
+              <a:bodyPr wrap="square">
+                <a:spAutoFit/>
+              </a:bodyPr>
+              <a:lstStyle/>
+              <a:p>
+                <a:pPr/>
+                <a14:m>
+                  <m:oMathPara xmlns:m="http://schemas.openxmlformats.org/officeDocument/2006/math">
+                    <m:oMathParaPr>
+                      <m:jc m:val="centerGroup"/>
+                    </m:oMathParaPr>
+                    <m:oMath xmlns:m="http://schemas.openxmlformats.org/officeDocument/2006/math">
+                      <m:r>
+                        <a:rPr lang="en-US" altLang="zh-TW" sz="1630" i="1">
+                          <a:latin typeface="Cambria Math" panose="02040503050406030204" pitchFamily="18" charset="0"/>
+                        </a:rPr>
+                        <m:t>ℓ=−2</m:t>
+                      </m:r>
+                    </m:oMath>
+                  </m:oMathPara>
+                </a14:m>
+                <a:endParaRPr lang="zh-TW" altLang="en-US" sz="1630" dirty="0">
+                  <a:latin typeface="Times New Roman" panose="02020603050405020304" pitchFamily="18" charset="0"/>
+                  <a:cs typeface="Times New Roman" panose="02020603050405020304" pitchFamily="18" charset="0"/>
+                </a:endParaRPr>
+              </a:p>
+            </p:txBody>
+          </p:sp>
+        </mc:Choice>
+        <mc:Fallback xmlns="">
+          <p:sp>
+            <p:nvSpPr>
+              <p:cNvPr id="184" name="矩形 183">
+                <a:extLst>
+                  <a:ext uri="{FF2B5EF4-FFF2-40B4-BE49-F238E27FC236}">
+                    <a16:creationId xmlns:a16="http://schemas.microsoft.com/office/drawing/2014/main" id="{33E2B86C-A084-4896-8EE7-FA115B79155C}"/>
+                  </a:ext>
+                </a:extLst>
+              </p:cNvPr>
+              <p:cNvSpPr>
+                <a:spLocks noRot="1" noChangeAspect="1" noMove="1" noResize="1" noEditPoints="1" noAdjustHandles="1" noChangeArrowheads="1" noChangeShapeType="1" noTextEdit="1"/>
+              </p:cNvSpPr>
+              <p:nvPr/>
+            </p:nvSpPr>
+            <p:spPr>
+              <a:xfrm>
+                <a:off x="1623084" y="935011"/>
+                <a:ext cx="889154" cy="343171"/>
+              </a:xfrm>
+              <a:prstGeom prst="rect">
+                <a:avLst/>
+              </a:prstGeom>
+              <a:blipFill>
+                <a:blip r:embed="rId38"/>
+                <a:stretch>
+                  <a:fillRect/>
+                </a:stretch>
+              </a:blipFill>
+            </p:spPr>
+            <p:txBody>
+              <a:bodyPr/>
+              <a:lstStyle/>
+              <a:p>
+                <a:r>
+                  <a:rPr lang="zh-TW" altLang="en-US">
+                    <a:noFill/>
+                  </a:rPr>
+                  <a:t> </a:t>
+                </a:r>
+              </a:p>
+            </p:txBody>
+          </p:sp>
+        </mc:Fallback>
+      </mc:AlternateContent>
+      <mc:AlternateContent xmlns:mc="http://schemas.openxmlformats.org/markup-compatibility/2006" xmlns:a14="http://schemas.microsoft.com/office/drawing/2010/main">
+        <mc:Choice Requires="a14">
+          <p:sp>
+            <p:nvSpPr>
+              <p:cNvPr id="185" name="矩形 184">
+                <a:extLst>
+                  <a:ext uri="{FF2B5EF4-FFF2-40B4-BE49-F238E27FC236}">
+                    <a16:creationId xmlns:a16="http://schemas.microsoft.com/office/drawing/2014/main" id="{46E4B8A7-96DC-4BB5-9110-C662649FB0C4}"/>
+                  </a:ext>
+                </a:extLst>
+              </p:cNvPr>
+              <p:cNvSpPr/>
+              <p:nvPr/>
+            </p:nvSpPr>
+            <p:spPr>
+              <a:xfrm>
+                <a:off x="3052942" y="935011"/>
+                <a:ext cx="889154" cy="343171"/>
+              </a:xfrm>
+              <a:prstGeom prst="rect">
+                <a:avLst/>
+              </a:prstGeom>
+            </p:spPr>
+            <p:txBody>
+              <a:bodyPr wrap="square">
+                <a:spAutoFit/>
+              </a:bodyPr>
+              <a:lstStyle/>
+              <a:p>
+                <a:pPr/>
+                <a14:m>
+                  <m:oMathPara xmlns:m="http://schemas.openxmlformats.org/officeDocument/2006/math">
+                    <m:oMathParaPr>
+                      <m:jc m:val="centerGroup"/>
+                    </m:oMathParaPr>
+                    <m:oMath xmlns:m="http://schemas.openxmlformats.org/officeDocument/2006/math">
+                      <m:r>
+                        <a:rPr lang="en-US" altLang="zh-TW" sz="1630" i="1">
+                          <a:latin typeface="Cambria Math" panose="02040503050406030204" pitchFamily="18" charset="0"/>
+                        </a:rPr>
+                        <m:t>ℓ=−1</m:t>
+                      </m:r>
+                    </m:oMath>
+                  </m:oMathPara>
+                </a14:m>
+                <a:endParaRPr lang="zh-TW" altLang="en-US" sz="1630" dirty="0">
+                  <a:latin typeface="Times New Roman" panose="02020603050405020304" pitchFamily="18" charset="0"/>
+                  <a:cs typeface="Times New Roman" panose="02020603050405020304" pitchFamily="18" charset="0"/>
+                </a:endParaRPr>
+              </a:p>
+            </p:txBody>
+          </p:sp>
+        </mc:Choice>
+        <mc:Fallback xmlns="">
+          <p:sp>
+            <p:nvSpPr>
+              <p:cNvPr id="185" name="矩形 184">
+                <a:extLst>
+                  <a:ext uri="{FF2B5EF4-FFF2-40B4-BE49-F238E27FC236}">
+                    <a16:creationId xmlns:a16="http://schemas.microsoft.com/office/drawing/2014/main" id="{46E4B8A7-96DC-4BB5-9110-C662649FB0C4}"/>
+                  </a:ext>
+                </a:extLst>
+              </p:cNvPr>
+              <p:cNvSpPr>
+                <a:spLocks noRot="1" noChangeAspect="1" noMove="1" noResize="1" noEditPoints="1" noAdjustHandles="1" noChangeArrowheads="1" noChangeShapeType="1" noTextEdit="1"/>
+              </p:cNvSpPr>
+              <p:nvPr/>
+            </p:nvSpPr>
+            <p:spPr>
+              <a:xfrm>
+                <a:off x="3052942" y="935011"/>
+                <a:ext cx="889154" cy="343171"/>
+              </a:xfrm>
+              <a:prstGeom prst="rect">
+                <a:avLst/>
+              </a:prstGeom>
+              <a:blipFill>
+                <a:blip r:embed="rId39"/>
+                <a:stretch>
+                  <a:fillRect/>
+                </a:stretch>
+              </a:blipFill>
+            </p:spPr>
+            <p:txBody>
+              <a:bodyPr/>
+              <a:lstStyle/>
+              <a:p>
+                <a:r>
+                  <a:rPr lang="zh-TW" altLang="en-US">
+                    <a:noFill/>
+                  </a:rPr>
+                  <a:t> </a:t>
+                </a:r>
+              </a:p>
+            </p:txBody>
+          </p:sp>
+        </mc:Fallback>
+      </mc:AlternateContent>
+      <mc:AlternateContent xmlns:mc="http://schemas.openxmlformats.org/markup-compatibility/2006" xmlns:a14="http://schemas.microsoft.com/office/drawing/2010/main">
+        <mc:Choice Requires="a14">
+          <p:sp>
+            <p:nvSpPr>
+              <p:cNvPr id="186" name="矩形 185">
+                <a:extLst>
+                  <a:ext uri="{FF2B5EF4-FFF2-40B4-BE49-F238E27FC236}">
+                    <a16:creationId xmlns:a16="http://schemas.microsoft.com/office/drawing/2014/main" id="{76F95031-8E6F-40C7-AF08-8C9090FF69BD}"/>
+                  </a:ext>
+                </a:extLst>
+              </p:cNvPr>
+              <p:cNvSpPr/>
+              <p:nvPr/>
+            </p:nvSpPr>
+            <p:spPr>
+              <a:xfrm>
+                <a:off x="4482800" y="935011"/>
+                <a:ext cx="733662" cy="343171"/>
+              </a:xfrm>
+              <a:prstGeom prst="rect">
+                <a:avLst/>
+              </a:prstGeom>
+            </p:spPr>
+            <p:txBody>
+              <a:bodyPr wrap="square">
+                <a:spAutoFit/>
+              </a:bodyPr>
+              <a:lstStyle/>
+              <a:p>
+                <a:pPr/>
+                <a14:m>
+                  <m:oMathPara xmlns:m="http://schemas.openxmlformats.org/officeDocument/2006/math">
+                    <m:oMathParaPr>
+                      <m:jc m:val="centerGroup"/>
+                    </m:oMathParaPr>
+                    <m:oMath xmlns:m="http://schemas.openxmlformats.org/officeDocument/2006/math">
+                      <m:r>
+                        <a:rPr lang="en-US" altLang="zh-TW" sz="1630" i="1">
+                          <a:latin typeface="Cambria Math" panose="02040503050406030204" pitchFamily="18" charset="0"/>
+                        </a:rPr>
+                        <m:t>ℓ=0</m:t>
+                      </m:r>
+                    </m:oMath>
+                  </m:oMathPara>
+                </a14:m>
+                <a:endParaRPr lang="zh-TW" altLang="en-US" sz="1630" dirty="0">
+                  <a:latin typeface="Times New Roman" panose="02020603050405020304" pitchFamily="18" charset="0"/>
+                  <a:cs typeface="Times New Roman" panose="02020603050405020304" pitchFamily="18" charset="0"/>
+                </a:endParaRPr>
+              </a:p>
+            </p:txBody>
+          </p:sp>
+        </mc:Choice>
+        <mc:Fallback xmlns="">
+          <p:sp>
+            <p:nvSpPr>
+              <p:cNvPr id="186" name="矩形 185">
+                <a:extLst>
+                  <a:ext uri="{FF2B5EF4-FFF2-40B4-BE49-F238E27FC236}">
+                    <a16:creationId xmlns:a16="http://schemas.microsoft.com/office/drawing/2014/main" id="{76F95031-8E6F-40C7-AF08-8C9090FF69BD}"/>
+                  </a:ext>
+                </a:extLst>
+              </p:cNvPr>
+              <p:cNvSpPr>
+                <a:spLocks noRot="1" noChangeAspect="1" noMove="1" noResize="1" noEditPoints="1" noAdjustHandles="1" noChangeArrowheads="1" noChangeShapeType="1" noTextEdit="1"/>
+              </p:cNvSpPr>
+              <p:nvPr/>
+            </p:nvSpPr>
+            <p:spPr>
+              <a:xfrm>
+                <a:off x="4482800" y="935011"/>
+                <a:ext cx="733662" cy="343171"/>
+              </a:xfrm>
+              <a:prstGeom prst="rect">
+                <a:avLst/>
+              </a:prstGeom>
+              <a:blipFill>
+                <a:blip r:embed="rId40"/>
+                <a:stretch>
+                  <a:fillRect/>
+                </a:stretch>
+              </a:blipFill>
+            </p:spPr>
+            <p:txBody>
+              <a:bodyPr/>
+              <a:lstStyle/>
+              <a:p>
+                <a:r>
+                  <a:rPr lang="zh-TW" altLang="en-US">
+                    <a:noFill/>
+                  </a:rPr>
+                  <a:t> </a:t>
+                </a:r>
+              </a:p>
+            </p:txBody>
+          </p:sp>
+        </mc:Fallback>
+      </mc:AlternateContent>
+      <mc:AlternateContent xmlns:mc="http://schemas.openxmlformats.org/markup-compatibility/2006" xmlns:a14="http://schemas.microsoft.com/office/drawing/2010/main">
+        <mc:Choice Requires="a14">
+          <p:sp>
+            <p:nvSpPr>
+              <p:cNvPr id="187" name="矩形 186">
+                <a:extLst>
+                  <a:ext uri="{FF2B5EF4-FFF2-40B4-BE49-F238E27FC236}">
+                    <a16:creationId xmlns:a16="http://schemas.microsoft.com/office/drawing/2014/main" id="{B881B78E-D62F-402E-8FF6-E622C6CEAD3A}"/>
+                  </a:ext>
+                </a:extLst>
+              </p:cNvPr>
+              <p:cNvSpPr/>
+              <p:nvPr/>
+            </p:nvSpPr>
+            <p:spPr>
+              <a:xfrm>
+                <a:off x="5757166" y="935011"/>
+                <a:ext cx="733662" cy="343171"/>
+              </a:xfrm>
+              <a:prstGeom prst="rect">
+                <a:avLst/>
+              </a:prstGeom>
+            </p:spPr>
+            <p:txBody>
+              <a:bodyPr wrap="square">
+                <a:spAutoFit/>
+              </a:bodyPr>
+              <a:lstStyle/>
+              <a:p>
+                <a:pPr/>
+                <a14:m>
+                  <m:oMathPara xmlns:m="http://schemas.openxmlformats.org/officeDocument/2006/math">
+                    <m:oMathParaPr>
+                      <m:jc m:val="centerGroup"/>
+                    </m:oMathParaPr>
+                    <m:oMath xmlns:m="http://schemas.openxmlformats.org/officeDocument/2006/math">
+                      <m:r>
+                        <a:rPr lang="en-US" altLang="zh-TW" sz="1630" i="1">
+                          <a:latin typeface="Cambria Math" panose="02040503050406030204" pitchFamily="18" charset="0"/>
+                        </a:rPr>
+                        <m:t>ℓ=1</m:t>
+                      </m:r>
+                    </m:oMath>
+                  </m:oMathPara>
+                </a14:m>
+                <a:endParaRPr lang="zh-TW" altLang="en-US" sz="1630" dirty="0">
+                  <a:latin typeface="Times New Roman" panose="02020603050405020304" pitchFamily="18" charset="0"/>
+                  <a:cs typeface="Times New Roman" panose="02020603050405020304" pitchFamily="18" charset="0"/>
+                </a:endParaRPr>
+              </a:p>
+            </p:txBody>
+          </p:sp>
+        </mc:Choice>
+        <mc:Fallback xmlns="">
+          <p:sp>
+            <p:nvSpPr>
+              <p:cNvPr id="187" name="矩形 186">
+                <a:extLst>
+                  <a:ext uri="{FF2B5EF4-FFF2-40B4-BE49-F238E27FC236}">
+                    <a16:creationId xmlns:a16="http://schemas.microsoft.com/office/drawing/2014/main" id="{B881B78E-D62F-402E-8FF6-E622C6CEAD3A}"/>
+                  </a:ext>
+                </a:extLst>
+              </p:cNvPr>
+              <p:cNvSpPr>
+                <a:spLocks noRot="1" noChangeAspect="1" noMove="1" noResize="1" noEditPoints="1" noAdjustHandles="1" noChangeArrowheads="1" noChangeShapeType="1" noTextEdit="1"/>
+              </p:cNvSpPr>
+              <p:nvPr/>
+            </p:nvSpPr>
+            <p:spPr>
+              <a:xfrm>
+                <a:off x="5757166" y="935011"/>
+                <a:ext cx="733662" cy="343171"/>
+              </a:xfrm>
+              <a:prstGeom prst="rect">
+                <a:avLst/>
+              </a:prstGeom>
+              <a:blipFill>
+                <a:blip r:embed="rId41"/>
+                <a:stretch>
+                  <a:fillRect/>
+                </a:stretch>
+              </a:blipFill>
+            </p:spPr>
+            <p:txBody>
+              <a:bodyPr/>
+              <a:lstStyle/>
+              <a:p>
+                <a:r>
+                  <a:rPr lang="zh-TW" altLang="en-US">
+                    <a:noFill/>
+                  </a:rPr>
+                  <a:t> </a:t>
+                </a:r>
+              </a:p>
+            </p:txBody>
+          </p:sp>
+        </mc:Fallback>
+      </mc:AlternateContent>
+      <mc:AlternateContent xmlns:mc="http://schemas.openxmlformats.org/markup-compatibility/2006" xmlns:a14="http://schemas.microsoft.com/office/drawing/2010/main">
+        <mc:Choice Requires="a14">
+          <p:sp>
+            <p:nvSpPr>
+              <p:cNvPr id="188" name="矩形 187">
+                <a:extLst>
+                  <a:ext uri="{FF2B5EF4-FFF2-40B4-BE49-F238E27FC236}">
+                    <a16:creationId xmlns:a16="http://schemas.microsoft.com/office/drawing/2014/main" id="{BE70C4E9-570B-4E92-A732-B28DB6CE6804}"/>
+                  </a:ext>
+                </a:extLst>
+              </p:cNvPr>
+              <p:cNvSpPr/>
+              <p:nvPr/>
+            </p:nvSpPr>
+            <p:spPr>
+              <a:xfrm>
+                <a:off x="7031532" y="935011"/>
+                <a:ext cx="733662" cy="343171"/>
+              </a:xfrm>
+              <a:prstGeom prst="rect">
+                <a:avLst/>
+              </a:prstGeom>
+            </p:spPr>
+            <p:txBody>
+              <a:bodyPr wrap="square">
+                <a:spAutoFit/>
+              </a:bodyPr>
+              <a:lstStyle/>
+              <a:p>
+                <a:pPr/>
+                <a14:m>
+                  <m:oMathPara xmlns:m="http://schemas.openxmlformats.org/officeDocument/2006/math">
+                    <m:oMathParaPr>
+                      <m:jc m:val="centerGroup"/>
+                    </m:oMathParaPr>
+                    <m:oMath xmlns:m="http://schemas.openxmlformats.org/officeDocument/2006/math">
+                      <m:r>
+                        <a:rPr lang="en-US" altLang="zh-TW" sz="1630" i="1">
+                          <a:latin typeface="Cambria Math" panose="02040503050406030204" pitchFamily="18" charset="0"/>
+                        </a:rPr>
+                        <m:t>ℓ=2</m:t>
+                      </m:r>
+                    </m:oMath>
+                  </m:oMathPara>
+                </a14:m>
+                <a:endParaRPr lang="zh-TW" altLang="en-US" sz="1630" dirty="0">
+                  <a:latin typeface="Times New Roman" panose="02020603050405020304" pitchFamily="18" charset="0"/>
+                  <a:cs typeface="Times New Roman" panose="02020603050405020304" pitchFamily="18" charset="0"/>
+                </a:endParaRPr>
+              </a:p>
+            </p:txBody>
+          </p:sp>
+        </mc:Choice>
+        <mc:Fallback xmlns="">
+          <p:sp>
+            <p:nvSpPr>
+              <p:cNvPr id="188" name="矩形 187">
+                <a:extLst>
+                  <a:ext uri="{FF2B5EF4-FFF2-40B4-BE49-F238E27FC236}">
+                    <a16:creationId xmlns:a16="http://schemas.microsoft.com/office/drawing/2014/main" id="{BE70C4E9-570B-4E92-A732-B28DB6CE6804}"/>
+                  </a:ext>
+                </a:extLst>
+              </p:cNvPr>
+              <p:cNvSpPr>
+                <a:spLocks noRot="1" noChangeAspect="1" noMove="1" noResize="1" noEditPoints="1" noAdjustHandles="1" noChangeArrowheads="1" noChangeShapeType="1" noTextEdit="1"/>
+              </p:cNvSpPr>
+              <p:nvPr/>
+            </p:nvSpPr>
+            <p:spPr>
+              <a:xfrm>
+                <a:off x="7031532" y="935011"/>
+                <a:ext cx="733662" cy="343171"/>
+              </a:xfrm>
+              <a:prstGeom prst="rect">
+                <a:avLst/>
+              </a:prstGeom>
+              <a:blipFill>
+                <a:blip r:embed="rId42"/>
+                <a:stretch>
+                  <a:fillRect/>
+                </a:stretch>
+              </a:blipFill>
+            </p:spPr>
+            <p:txBody>
+              <a:bodyPr/>
+              <a:lstStyle/>
+              <a:p>
+                <a:r>
+                  <a:rPr lang="zh-TW" altLang="en-US">
+                    <a:noFill/>
+                  </a:rPr>
+                  <a:t> </a:t>
+                </a:r>
+              </a:p>
+            </p:txBody>
+          </p:sp>
+        </mc:Fallback>
+      </mc:AlternateContent>
+      <mc:AlternateContent xmlns:mc="http://schemas.openxmlformats.org/markup-compatibility/2006" xmlns:a14="http://schemas.microsoft.com/office/drawing/2010/main">
+        <mc:Choice Requires="a14">
+          <p:sp>
+            <p:nvSpPr>
+              <p:cNvPr id="189" name="矩形 188">
+                <a:extLst>
+                  <a:ext uri="{FF2B5EF4-FFF2-40B4-BE49-F238E27FC236}">
+                    <a16:creationId xmlns:a16="http://schemas.microsoft.com/office/drawing/2014/main" id="{60575900-638F-4CA4-8087-C2F6EF1866A8}"/>
+                  </a:ext>
+                </a:extLst>
+              </p:cNvPr>
+              <p:cNvSpPr/>
+              <p:nvPr/>
+            </p:nvSpPr>
+            <p:spPr>
+              <a:xfrm>
+                <a:off x="1623084" y="2879587"/>
+                <a:ext cx="889154" cy="343171"/>
+              </a:xfrm>
+              <a:prstGeom prst="rect">
+                <a:avLst/>
+              </a:prstGeom>
+            </p:spPr>
+            <p:txBody>
+              <a:bodyPr wrap="square">
+                <a:spAutoFit/>
+              </a:bodyPr>
+              <a:lstStyle/>
+              <a:p>
+                <a:pPr/>
+                <a14:m>
+                  <m:oMathPara xmlns:m="http://schemas.openxmlformats.org/officeDocument/2006/math">
+                    <m:oMathParaPr>
+                      <m:jc m:val="centerGroup"/>
+                    </m:oMathParaPr>
+                    <m:oMath xmlns:m="http://schemas.openxmlformats.org/officeDocument/2006/math">
+                      <m:r>
+                        <a:rPr lang="en-US" altLang="zh-TW" sz="1630" i="1">
+                          <a:latin typeface="Cambria Math" panose="02040503050406030204" pitchFamily="18" charset="0"/>
+                        </a:rPr>
+                        <m:t>ℓ=−2</m:t>
+                      </m:r>
+                    </m:oMath>
+                  </m:oMathPara>
+                </a14:m>
+                <a:endParaRPr lang="zh-TW" altLang="en-US" sz="1630" dirty="0">
+                  <a:latin typeface="Times New Roman" panose="02020603050405020304" pitchFamily="18" charset="0"/>
+                  <a:cs typeface="Times New Roman" panose="02020603050405020304" pitchFamily="18" charset="0"/>
+                </a:endParaRPr>
+              </a:p>
+            </p:txBody>
+          </p:sp>
+        </mc:Choice>
+        <mc:Fallback xmlns="">
+          <p:sp>
+            <p:nvSpPr>
+              <p:cNvPr id="189" name="矩形 188">
+                <a:extLst>
+                  <a:ext uri="{FF2B5EF4-FFF2-40B4-BE49-F238E27FC236}">
+                    <a16:creationId xmlns:a16="http://schemas.microsoft.com/office/drawing/2014/main" id="{60575900-638F-4CA4-8087-C2F6EF1866A8}"/>
+                  </a:ext>
+                </a:extLst>
+              </p:cNvPr>
+              <p:cNvSpPr>
+                <a:spLocks noRot="1" noChangeAspect="1" noMove="1" noResize="1" noEditPoints="1" noAdjustHandles="1" noChangeArrowheads="1" noChangeShapeType="1" noTextEdit="1"/>
+              </p:cNvSpPr>
+              <p:nvPr/>
+            </p:nvSpPr>
+            <p:spPr>
+              <a:xfrm>
+                <a:off x="1623084" y="2879587"/>
+                <a:ext cx="889154" cy="343171"/>
+              </a:xfrm>
+              <a:prstGeom prst="rect">
+                <a:avLst/>
+              </a:prstGeom>
+              <a:blipFill>
+                <a:blip r:embed="rId43"/>
+                <a:stretch>
+                  <a:fillRect/>
+                </a:stretch>
+              </a:blipFill>
+            </p:spPr>
+            <p:txBody>
+              <a:bodyPr/>
+              <a:lstStyle/>
+              <a:p>
+                <a:r>
+                  <a:rPr lang="zh-TW" altLang="en-US">
+                    <a:noFill/>
+                  </a:rPr>
+                  <a:t> </a:t>
+                </a:r>
+              </a:p>
+            </p:txBody>
+          </p:sp>
+        </mc:Fallback>
+      </mc:AlternateContent>
+      <mc:AlternateContent xmlns:mc="http://schemas.openxmlformats.org/markup-compatibility/2006" xmlns:a14="http://schemas.microsoft.com/office/drawing/2010/main">
+        <mc:Choice Requires="a14">
+          <p:sp>
+            <p:nvSpPr>
+              <p:cNvPr id="190" name="矩形 189">
+                <a:extLst>
+                  <a:ext uri="{FF2B5EF4-FFF2-40B4-BE49-F238E27FC236}">
+                    <a16:creationId xmlns:a16="http://schemas.microsoft.com/office/drawing/2014/main" id="{E767A449-E26E-4726-8DFF-9677104AC5DA}"/>
+                  </a:ext>
+                </a:extLst>
+              </p:cNvPr>
+              <p:cNvSpPr/>
+              <p:nvPr/>
+            </p:nvSpPr>
+            <p:spPr>
+              <a:xfrm>
+                <a:off x="3052942" y="2879588"/>
+                <a:ext cx="889154" cy="343171"/>
+              </a:xfrm>
+              <a:prstGeom prst="rect">
+                <a:avLst/>
+              </a:prstGeom>
+            </p:spPr>
+            <p:txBody>
+              <a:bodyPr wrap="square">
+                <a:spAutoFit/>
+              </a:bodyPr>
+              <a:lstStyle/>
+              <a:p>
+                <a:pPr/>
+                <a14:m>
+                  <m:oMathPara xmlns:m="http://schemas.openxmlformats.org/officeDocument/2006/math">
+                    <m:oMathParaPr>
+                      <m:jc m:val="centerGroup"/>
+                    </m:oMathParaPr>
+                    <m:oMath xmlns:m="http://schemas.openxmlformats.org/officeDocument/2006/math">
+                      <m:r>
+                        <a:rPr lang="en-US" altLang="zh-TW" sz="1630" i="1">
+                          <a:latin typeface="Cambria Math" panose="02040503050406030204" pitchFamily="18" charset="0"/>
+                        </a:rPr>
+                        <m:t>ℓ=−1</m:t>
+                      </m:r>
+                    </m:oMath>
+                  </m:oMathPara>
+                </a14:m>
+                <a:endParaRPr lang="zh-TW" altLang="en-US" sz="1630" dirty="0">
+                  <a:latin typeface="Times New Roman" panose="02020603050405020304" pitchFamily="18" charset="0"/>
+                  <a:cs typeface="Times New Roman" panose="02020603050405020304" pitchFamily="18" charset="0"/>
+                </a:endParaRPr>
+              </a:p>
+            </p:txBody>
+          </p:sp>
+        </mc:Choice>
+        <mc:Fallback xmlns="">
+          <p:sp>
+            <p:nvSpPr>
+              <p:cNvPr id="190" name="矩形 189">
+                <a:extLst>
+                  <a:ext uri="{FF2B5EF4-FFF2-40B4-BE49-F238E27FC236}">
+                    <a16:creationId xmlns:a16="http://schemas.microsoft.com/office/drawing/2014/main" id="{E767A449-E26E-4726-8DFF-9677104AC5DA}"/>
+                  </a:ext>
+                </a:extLst>
+              </p:cNvPr>
+              <p:cNvSpPr>
+                <a:spLocks noRot="1" noChangeAspect="1" noMove="1" noResize="1" noEditPoints="1" noAdjustHandles="1" noChangeArrowheads="1" noChangeShapeType="1" noTextEdit="1"/>
+              </p:cNvSpPr>
+              <p:nvPr/>
+            </p:nvSpPr>
+            <p:spPr>
+              <a:xfrm>
+                <a:off x="3052942" y="2879588"/>
+                <a:ext cx="889154" cy="343171"/>
+              </a:xfrm>
+              <a:prstGeom prst="rect">
+                <a:avLst/>
+              </a:prstGeom>
+              <a:blipFill>
+                <a:blip r:embed="rId44"/>
+                <a:stretch>
+                  <a:fillRect/>
+                </a:stretch>
+              </a:blipFill>
+            </p:spPr>
+            <p:txBody>
+              <a:bodyPr/>
+              <a:lstStyle/>
+              <a:p>
+                <a:r>
+                  <a:rPr lang="zh-TW" altLang="en-US">
+                    <a:noFill/>
+                  </a:rPr>
+                  <a:t> </a:t>
+                </a:r>
+              </a:p>
+            </p:txBody>
+          </p:sp>
+        </mc:Fallback>
+      </mc:AlternateContent>
+      <mc:AlternateContent xmlns:mc="http://schemas.openxmlformats.org/markup-compatibility/2006" xmlns:a14="http://schemas.microsoft.com/office/drawing/2010/main">
+        <mc:Choice Requires="a14">
+          <p:sp>
+            <p:nvSpPr>
+              <p:cNvPr id="191" name="矩形 190">
+                <a:extLst>
+                  <a:ext uri="{FF2B5EF4-FFF2-40B4-BE49-F238E27FC236}">
+                    <a16:creationId xmlns:a16="http://schemas.microsoft.com/office/drawing/2014/main" id="{74B26087-255A-4B06-A1E6-EAAB6689F43E}"/>
+                  </a:ext>
+                </a:extLst>
+              </p:cNvPr>
+              <p:cNvSpPr/>
+              <p:nvPr/>
+            </p:nvSpPr>
+            <p:spPr>
+              <a:xfrm>
+                <a:off x="4482800" y="2879588"/>
+                <a:ext cx="733662" cy="343171"/>
+              </a:xfrm>
+              <a:prstGeom prst="rect">
+                <a:avLst/>
+              </a:prstGeom>
+            </p:spPr>
+            <p:txBody>
+              <a:bodyPr wrap="square">
+                <a:spAutoFit/>
+              </a:bodyPr>
+              <a:lstStyle/>
+              <a:p>
+                <a:pPr/>
+                <a14:m>
+                  <m:oMathPara xmlns:m="http://schemas.openxmlformats.org/officeDocument/2006/math">
+                    <m:oMathParaPr>
+                      <m:jc m:val="centerGroup"/>
+                    </m:oMathParaPr>
+                    <m:oMath xmlns:m="http://schemas.openxmlformats.org/officeDocument/2006/math">
+                      <m:r>
+                        <a:rPr lang="en-US" altLang="zh-TW" sz="1630" i="1">
+                          <a:latin typeface="Cambria Math" panose="02040503050406030204" pitchFamily="18" charset="0"/>
+                        </a:rPr>
+                        <m:t>ℓ=0</m:t>
+                      </m:r>
+                    </m:oMath>
+                  </m:oMathPara>
+                </a14:m>
+                <a:endParaRPr lang="zh-TW" altLang="en-US" sz="1630" dirty="0">
+                  <a:latin typeface="Times New Roman" panose="02020603050405020304" pitchFamily="18" charset="0"/>
+                  <a:cs typeface="Times New Roman" panose="02020603050405020304" pitchFamily="18" charset="0"/>
+                </a:endParaRPr>
+              </a:p>
+            </p:txBody>
+          </p:sp>
+        </mc:Choice>
+        <mc:Fallback xmlns="">
+          <p:sp>
+            <p:nvSpPr>
+              <p:cNvPr id="191" name="矩形 190">
+                <a:extLst>
+                  <a:ext uri="{FF2B5EF4-FFF2-40B4-BE49-F238E27FC236}">
+                    <a16:creationId xmlns:a16="http://schemas.microsoft.com/office/drawing/2014/main" id="{74B26087-255A-4B06-A1E6-EAAB6689F43E}"/>
+                  </a:ext>
+                </a:extLst>
+              </p:cNvPr>
+              <p:cNvSpPr>
+                <a:spLocks noRot="1" noChangeAspect="1" noMove="1" noResize="1" noEditPoints="1" noAdjustHandles="1" noChangeArrowheads="1" noChangeShapeType="1" noTextEdit="1"/>
+              </p:cNvSpPr>
+              <p:nvPr/>
+            </p:nvSpPr>
+            <p:spPr>
+              <a:xfrm>
+                <a:off x="4482800" y="2879588"/>
+                <a:ext cx="733662" cy="343171"/>
+              </a:xfrm>
+              <a:prstGeom prst="rect">
+                <a:avLst/>
+              </a:prstGeom>
+              <a:blipFill>
+                <a:blip r:embed="rId45"/>
+                <a:stretch>
+                  <a:fillRect/>
+                </a:stretch>
+              </a:blipFill>
+            </p:spPr>
+            <p:txBody>
+              <a:bodyPr/>
+              <a:lstStyle/>
+              <a:p>
+                <a:r>
+                  <a:rPr lang="zh-TW" altLang="en-US">
+                    <a:noFill/>
+                  </a:rPr>
+                  <a:t> </a:t>
+                </a:r>
+              </a:p>
+            </p:txBody>
+          </p:sp>
+        </mc:Fallback>
+      </mc:AlternateContent>
+      <mc:AlternateContent xmlns:mc="http://schemas.openxmlformats.org/markup-compatibility/2006" xmlns:a14="http://schemas.microsoft.com/office/drawing/2010/main">
+        <mc:Choice Requires="a14">
+          <p:sp>
+            <p:nvSpPr>
+              <p:cNvPr id="192" name="矩形 191">
+                <a:extLst>
+                  <a:ext uri="{FF2B5EF4-FFF2-40B4-BE49-F238E27FC236}">
+                    <a16:creationId xmlns:a16="http://schemas.microsoft.com/office/drawing/2014/main" id="{F61D4A4B-C92D-4118-8551-5302DD874E0A}"/>
+                  </a:ext>
+                </a:extLst>
+              </p:cNvPr>
+              <p:cNvSpPr/>
+              <p:nvPr/>
+            </p:nvSpPr>
+            <p:spPr>
+              <a:xfrm>
+                <a:off x="5757166" y="2879588"/>
+                <a:ext cx="733662" cy="343171"/>
+              </a:xfrm>
+              <a:prstGeom prst="rect">
+                <a:avLst/>
+              </a:prstGeom>
+            </p:spPr>
+            <p:txBody>
+              <a:bodyPr wrap="square">
+                <a:spAutoFit/>
+              </a:bodyPr>
+              <a:lstStyle/>
+              <a:p>
+                <a:pPr/>
+                <a14:m>
+                  <m:oMathPara xmlns:m="http://schemas.openxmlformats.org/officeDocument/2006/math">
+                    <m:oMathParaPr>
+                      <m:jc m:val="centerGroup"/>
+                    </m:oMathParaPr>
+                    <m:oMath xmlns:m="http://schemas.openxmlformats.org/officeDocument/2006/math">
+                      <m:r>
+                        <a:rPr lang="en-US" altLang="zh-TW" sz="1630" i="1">
+                          <a:latin typeface="Cambria Math" panose="02040503050406030204" pitchFamily="18" charset="0"/>
+                        </a:rPr>
+                        <m:t>ℓ=1</m:t>
+                      </m:r>
+                    </m:oMath>
+                  </m:oMathPara>
+                </a14:m>
+                <a:endParaRPr lang="zh-TW" altLang="en-US" sz="1630" dirty="0">
+                  <a:latin typeface="Times New Roman" panose="02020603050405020304" pitchFamily="18" charset="0"/>
+                  <a:cs typeface="Times New Roman" panose="02020603050405020304" pitchFamily="18" charset="0"/>
+                </a:endParaRPr>
+              </a:p>
+            </p:txBody>
+          </p:sp>
+        </mc:Choice>
+        <mc:Fallback xmlns="">
+          <p:sp>
+            <p:nvSpPr>
+              <p:cNvPr id="192" name="矩形 191">
+                <a:extLst>
+                  <a:ext uri="{FF2B5EF4-FFF2-40B4-BE49-F238E27FC236}">
+                    <a16:creationId xmlns:a16="http://schemas.microsoft.com/office/drawing/2014/main" id="{F61D4A4B-C92D-4118-8551-5302DD874E0A}"/>
+                  </a:ext>
+                </a:extLst>
+              </p:cNvPr>
+              <p:cNvSpPr>
+                <a:spLocks noRot="1" noChangeAspect="1" noMove="1" noResize="1" noEditPoints="1" noAdjustHandles="1" noChangeArrowheads="1" noChangeShapeType="1" noTextEdit="1"/>
+              </p:cNvSpPr>
+              <p:nvPr/>
+            </p:nvSpPr>
+            <p:spPr>
+              <a:xfrm>
+                <a:off x="5757166" y="2879588"/>
+                <a:ext cx="733662" cy="343171"/>
+              </a:xfrm>
+              <a:prstGeom prst="rect">
+                <a:avLst/>
+              </a:prstGeom>
+              <a:blipFill>
+                <a:blip r:embed="rId46"/>
+                <a:stretch>
+                  <a:fillRect/>
+                </a:stretch>
+              </a:blipFill>
+            </p:spPr>
+            <p:txBody>
+              <a:bodyPr/>
+              <a:lstStyle/>
+              <a:p>
+                <a:r>
+                  <a:rPr lang="zh-TW" altLang="en-US">
+                    <a:noFill/>
+                  </a:rPr>
+                  <a:t> </a:t>
+                </a:r>
+              </a:p>
+            </p:txBody>
+          </p:sp>
+        </mc:Fallback>
+      </mc:AlternateContent>
+      <mc:AlternateContent xmlns:mc="http://schemas.openxmlformats.org/markup-compatibility/2006" xmlns:a14="http://schemas.microsoft.com/office/drawing/2010/main">
+        <mc:Choice Requires="a14">
+          <p:sp>
+            <p:nvSpPr>
+              <p:cNvPr id="193" name="矩形 192">
+                <a:extLst>
+                  <a:ext uri="{FF2B5EF4-FFF2-40B4-BE49-F238E27FC236}">
+                    <a16:creationId xmlns:a16="http://schemas.microsoft.com/office/drawing/2014/main" id="{9DE260DA-0080-4990-BAAC-BDEC6FE012AA}"/>
+                  </a:ext>
+                </a:extLst>
+              </p:cNvPr>
+              <p:cNvSpPr/>
+              <p:nvPr/>
+            </p:nvSpPr>
+            <p:spPr>
+              <a:xfrm>
+                <a:off x="7031532" y="2879588"/>
+                <a:ext cx="733662" cy="343171"/>
+              </a:xfrm>
+              <a:prstGeom prst="rect">
+                <a:avLst/>
+              </a:prstGeom>
+            </p:spPr>
+            <p:txBody>
+              <a:bodyPr wrap="square">
+                <a:spAutoFit/>
+              </a:bodyPr>
+              <a:lstStyle/>
+              <a:p>
+                <a:pPr/>
+                <a14:m>
+                  <m:oMathPara xmlns:m="http://schemas.openxmlformats.org/officeDocument/2006/math">
+                    <m:oMathParaPr>
+                      <m:jc m:val="centerGroup"/>
+                    </m:oMathParaPr>
+                    <m:oMath xmlns:m="http://schemas.openxmlformats.org/officeDocument/2006/math">
+                      <m:r>
+                        <a:rPr lang="en-US" altLang="zh-TW" sz="1630" i="1">
+                          <a:latin typeface="Cambria Math" panose="02040503050406030204" pitchFamily="18" charset="0"/>
+                        </a:rPr>
+                        <m:t>ℓ=2</m:t>
+                      </m:r>
+                    </m:oMath>
+                  </m:oMathPara>
+                </a14:m>
+                <a:endParaRPr lang="zh-TW" altLang="en-US" sz="1630" dirty="0">
+                  <a:latin typeface="Times New Roman" panose="02020603050405020304" pitchFamily="18" charset="0"/>
+                  <a:cs typeface="Times New Roman" panose="02020603050405020304" pitchFamily="18" charset="0"/>
+                </a:endParaRPr>
+              </a:p>
+            </p:txBody>
+          </p:sp>
+        </mc:Choice>
+        <mc:Fallback xmlns="">
+          <p:sp>
+            <p:nvSpPr>
+              <p:cNvPr id="193" name="矩形 192">
+                <a:extLst>
+                  <a:ext uri="{FF2B5EF4-FFF2-40B4-BE49-F238E27FC236}">
+                    <a16:creationId xmlns:a16="http://schemas.microsoft.com/office/drawing/2014/main" id="{9DE260DA-0080-4990-BAAC-BDEC6FE012AA}"/>
+                  </a:ext>
+                </a:extLst>
+              </p:cNvPr>
+              <p:cNvSpPr>
+                <a:spLocks noRot="1" noChangeAspect="1" noMove="1" noResize="1" noEditPoints="1" noAdjustHandles="1" noChangeArrowheads="1" noChangeShapeType="1" noTextEdit="1"/>
+              </p:cNvSpPr>
+              <p:nvPr/>
+            </p:nvSpPr>
+            <p:spPr>
+              <a:xfrm>
+                <a:off x="7031532" y="2879588"/>
+                <a:ext cx="733662" cy="343171"/>
+              </a:xfrm>
+              <a:prstGeom prst="rect">
+                <a:avLst/>
+              </a:prstGeom>
+              <a:blipFill>
+                <a:blip r:embed="rId47"/>
+                <a:stretch>
+                  <a:fillRect/>
+                </a:stretch>
+              </a:blipFill>
+            </p:spPr>
+            <p:txBody>
+              <a:bodyPr/>
+              <a:lstStyle/>
+              <a:p>
+                <a:r>
+                  <a:rPr lang="zh-TW" altLang="en-US">
+                    <a:noFill/>
+                  </a:rPr>
+                  <a:t> </a:t>
+                </a:r>
+              </a:p>
+            </p:txBody>
+          </p:sp>
+        </mc:Fallback>
+      </mc:AlternateContent>
+      <mc:AlternateContent xmlns:mc="http://schemas.openxmlformats.org/markup-compatibility/2006">
+        <mc:Choice xmlns:a14="http://schemas.microsoft.com/office/drawing/2010/main" Requires="a14">
+          <p:sp>
+            <p:nvSpPr>
+              <p:cNvPr id="196" name="矩形 195">
+                <a:extLst>
+                  <a:ext uri="{FF2B5EF4-FFF2-40B4-BE49-F238E27FC236}">
+                    <a16:creationId xmlns:a16="http://schemas.microsoft.com/office/drawing/2014/main" id="{1ED8499A-FFA3-48E1-A361-DA6D3B98A280}"/>
+                  </a:ext>
+                </a:extLst>
+              </p:cNvPr>
+              <p:cNvSpPr/>
+              <p:nvPr/>
+            </p:nvSpPr>
+            <p:spPr>
+              <a:xfrm>
+                <a:off x="1343810" y="360411"/>
+                <a:ext cx="1556516" cy="517514"/>
+              </a:xfrm>
+              <a:prstGeom prst="rect">
+                <a:avLst/>
+              </a:prstGeom>
+            </p:spPr>
+            <p:txBody>
+              <a:bodyPr wrap="none">
+                <a:spAutoFit/>
+              </a:bodyPr>
+              <a:lstStyle/>
+              <a:p>
+                <a:pPr/>
+                <a14:m>
+                  <m:oMathPara xmlns:m="http://schemas.openxmlformats.org/officeDocument/2006/math">
+                    <m:oMathParaPr>
+                      <m:jc m:val="centerGroup"/>
+                    </m:oMathParaPr>
+                    <m:oMath xmlns:m="http://schemas.openxmlformats.org/officeDocument/2006/math">
+                      <m:sSup>
+                        <m:sSupPr>
+                          <m:ctrlPr>
+                            <a:rPr lang="en-US" altLang="zh-TW" sz="2000" i="1" smtClean="0">
+                              <a:latin typeface="Cambria Math" panose="02040503050406030204" pitchFamily="18" charset="0"/>
+                            </a:rPr>
+                          </m:ctrlPr>
+                        </m:sSupPr>
+                        <m:e>
+                          <m:d>
+                            <m:dPr>
+                              <m:begChr m:val="|"/>
+                              <m:endChr m:val="|"/>
+                              <m:ctrlPr>
+                                <a:rPr lang="en-US" altLang="zh-TW" sz="2000" i="1">
+                                  <a:latin typeface="Cambria Math" panose="02040503050406030204" pitchFamily="18" charset="0"/>
+                                </a:rPr>
+                              </m:ctrlPr>
+                            </m:dPr>
+                            <m:e>
+                              <m:sSubSup>
+                                <m:sSubSupPr>
+                                  <m:ctrlPr>
+                                    <a:rPr lang="en-US" altLang="zh-TW" sz="2000" i="1">
+                                      <a:latin typeface="Cambria Math" panose="02040503050406030204" pitchFamily="18" charset="0"/>
+                                    </a:rPr>
+                                  </m:ctrlPr>
+                                </m:sSubSupPr>
+                                <m:e>
+                                  <m:r>
+                                    <a:rPr lang="en-US" altLang="zh-TW" sz="2000" i="1">
+                                      <a:latin typeface="Cambria Math" panose="02040503050406030204" pitchFamily="18" charset="0"/>
+                                    </a:rPr>
+                                    <m:t>𝐴</m:t>
+                                  </m:r>
+                                </m:e>
+                                <m:sub>
+                                  <m:r>
+                                    <a:rPr lang="en-US" altLang="zh-TW" sz="2000" i="1">
+                                      <a:latin typeface="Cambria Math" panose="02040503050406030204" pitchFamily="18" charset="0"/>
+                                    </a:rPr>
+                                    <m:t>ℓ,</m:t>
+                                  </m:r>
+                                  <m:r>
+                                    <a:rPr lang="en-US" altLang="zh-TW" sz="2000" i="1">
+                                      <a:latin typeface="Cambria Math" panose="02040503050406030204" pitchFamily="18" charset="0"/>
+                                    </a:rPr>
+                                    <m:t>𝑝</m:t>
+                                  </m:r>
+                                  <m:r>
+                                    <a:rPr lang="en-US" altLang="zh-TW" sz="2000" b="0" i="1" smtClean="0">
+                                      <a:latin typeface="Cambria Math" panose="02040503050406030204" pitchFamily="18" charset="0"/>
+                                    </a:rPr>
+                                    <m:t>=0</m:t>
+                                  </m:r>
+                                </m:sub>
+                                <m:sup>
+                                  <m:r>
+                                    <a:rPr lang="en-US" altLang="zh-TW" sz="2000" i="1">
+                                      <a:latin typeface="Cambria Math" panose="02040503050406030204" pitchFamily="18" charset="0"/>
+                                    </a:rPr>
+                                    <m:t>𝐿</m:t>
+                                  </m:r>
+                                </m:sup>
+                              </m:sSubSup>
+                              <m:d>
+                                <m:dPr>
+                                  <m:ctrlPr>
+                                    <a:rPr lang="en-US" altLang="zh-TW" sz="2000" i="1">
+                                      <a:latin typeface="Cambria Math" panose="02040503050406030204" pitchFamily="18" charset="0"/>
+                                    </a:rPr>
+                                  </m:ctrlPr>
+                                </m:dPr>
+                                <m:e>
+                                  <m:r>
+                                    <a:rPr lang="en-US" altLang="zh-TW" sz="2000" b="1" i="1">
+                                      <a:latin typeface="Cambria Math" panose="02040503050406030204" pitchFamily="18" charset="0"/>
+                                    </a:rPr>
+                                    <m:t>𝒓</m:t>
+                                  </m:r>
+                                </m:e>
+                              </m:d>
+                            </m:e>
+                          </m:d>
+                        </m:e>
+                        <m:sup>
+                          <m:r>
+                            <a:rPr lang="en-US" altLang="zh-TW" sz="2000" i="1">
+                              <a:latin typeface="Cambria Math" panose="02040503050406030204" pitchFamily="18" charset="0"/>
+                            </a:rPr>
+                            <m:t>2</m:t>
+                          </m:r>
+                        </m:sup>
+                      </m:sSup>
+                    </m:oMath>
+                  </m:oMathPara>
+                </a14:m>
+                <a:endParaRPr lang="zh-TW" altLang="en-US" sz="2000" dirty="0">
+                  <a:latin typeface="Times New Roman" panose="02020603050405020304" pitchFamily="18" charset="0"/>
+                  <a:cs typeface="Times New Roman" panose="02020603050405020304" pitchFamily="18" charset="0"/>
+                </a:endParaRPr>
+              </a:p>
+            </p:txBody>
+          </p:sp>
+        </mc:Choice>
+        <mc:Fallback>
+          <p:sp>
+            <p:nvSpPr>
+              <p:cNvPr id="196" name="矩形 195">
+                <a:extLst>
+                  <a:ext uri="{FF2B5EF4-FFF2-40B4-BE49-F238E27FC236}">
+                    <a16:creationId xmlns:a16="http://schemas.microsoft.com/office/drawing/2014/main" id="{1ED8499A-FFA3-48E1-A361-DA6D3B98A280}"/>
+                  </a:ext>
+                </a:extLst>
+              </p:cNvPr>
+              <p:cNvSpPr>
+                <a:spLocks noRot="1" noChangeAspect="1" noMove="1" noResize="1" noEditPoints="1" noAdjustHandles="1" noChangeArrowheads="1" noChangeShapeType="1" noTextEdit="1"/>
+              </p:cNvSpPr>
+              <p:nvPr/>
+            </p:nvSpPr>
+            <p:spPr>
+              <a:xfrm>
+                <a:off x="1343810" y="360411"/>
+                <a:ext cx="1556516" cy="517514"/>
+              </a:xfrm>
+              <a:prstGeom prst="rect">
+                <a:avLst/>
+              </a:prstGeom>
+              <a:blipFill>
+                <a:blip r:embed="rId48"/>
+                <a:stretch>
+                  <a:fillRect/>
+                </a:stretch>
+              </a:blipFill>
+            </p:spPr>
+            <p:txBody>
+              <a:bodyPr/>
+              <a:lstStyle/>
+              <a:p>
+                <a:r>
+                  <a:rPr lang="zh-TW" altLang="en-US">
+                    <a:noFill/>
+                  </a:rPr>
+                  <a:t> </a:t>
+                </a:r>
+              </a:p>
+            </p:txBody>
+          </p:sp>
+        </mc:Fallback>
+      </mc:AlternateContent>
+      <mc:AlternateContent xmlns:mc="http://schemas.openxmlformats.org/markup-compatibility/2006">
+        <mc:Choice xmlns:a14="http://schemas.microsoft.com/office/drawing/2010/main" Requires="a14">
+          <p:sp>
+            <p:nvSpPr>
+              <p:cNvPr id="197" name="矩形 196">
+                <a:extLst>
+                  <a:ext uri="{FF2B5EF4-FFF2-40B4-BE49-F238E27FC236}">
+                    <a16:creationId xmlns:a16="http://schemas.microsoft.com/office/drawing/2014/main" id="{1F70F799-7021-4B0C-8F9E-27C76519BF43}"/>
+                  </a:ext>
+                </a:extLst>
+              </p:cNvPr>
+              <p:cNvSpPr/>
+              <p:nvPr/>
+            </p:nvSpPr>
+            <p:spPr>
+              <a:xfrm>
+                <a:off x="1338870" y="2425707"/>
+                <a:ext cx="1740861" cy="456728"/>
+              </a:xfrm>
+              <a:prstGeom prst="rect">
+                <a:avLst/>
+              </a:prstGeom>
+            </p:spPr>
+            <p:txBody>
+              <a:bodyPr wrap="none">
+                <a:spAutoFit/>
+              </a:bodyPr>
+              <a:lstStyle/>
+              <a:p>
+                <a:pPr/>
+                <a14:m>
+                  <m:oMathPara xmlns:m="http://schemas.openxmlformats.org/officeDocument/2006/math">
+                    <m:oMathParaPr>
+                      <m:jc m:val="centerGroup"/>
+                    </m:oMathParaPr>
+                    <m:oMath xmlns:m="http://schemas.openxmlformats.org/officeDocument/2006/math">
+                      <m:r>
+                        <m:rPr>
+                          <m:sty m:val="p"/>
+                        </m:rPr>
+                        <a:rPr lang="en-US" altLang="zh-TW" sz="2000" smtClean="0">
+                          <a:latin typeface="Cambria Math" panose="02040503050406030204" pitchFamily="18" charset="0"/>
+                        </a:rPr>
+                        <m:t>Re</m:t>
+                      </m:r>
+                      <m:d>
+                        <m:dPr>
+                          <m:begChr m:val="["/>
+                          <m:endChr m:val="]"/>
+                          <m:ctrlPr>
+                            <a:rPr lang="en-US" altLang="zh-TW" sz="2000" i="1">
+                              <a:latin typeface="Cambria Math" panose="02040503050406030204" pitchFamily="18" charset="0"/>
+                            </a:rPr>
+                          </m:ctrlPr>
+                        </m:dPr>
+                        <m:e>
+                          <m:sSubSup>
+                            <m:sSubSupPr>
+                              <m:ctrlPr>
+                                <a:rPr lang="en-US" altLang="zh-TW" sz="2000" i="1">
+                                  <a:latin typeface="Cambria Math" panose="02040503050406030204" pitchFamily="18" charset="0"/>
+                                </a:rPr>
+                              </m:ctrlPr>
+                            </m:sSubSupPr>
+                            <m:e>
+                              <m:r>
+                                <a:rPr lang="en-US" altLang="zh-TW" sz="2000" i="1">
+                                  <a:latin typeface="Cambria Math" panose="02040503050406030204" pitchFamily="18" charset="0"/>
+                                </a:rPr>
+                                <m:t>𝐴</m:t>
+                              </m:r>
+                            </m:e>
+                            <m:sub>
+                              <m:r>
+                                <a:rPr lang="en-US" altLang="zh-TW" sz="2000" i="1">
+                                  <a:latin typeface="Cambria Math" panose="02040503050406030204" pitchFamily="18" charset="0"/>
+                                </a:rPr>
+                                <m:t>ℓ,</m:t>
+                              </m:r>
+                              <m:r>
+                                <a:rPr lang="en-US" altLang="zh-TW" sz="2000" i="1">
+                                  <a:latin typeface="Cambria Math" panose="02040503050406030204" pitchFamily="18" charset="0"/>
+                                </a:rPr>
+                                <m:t>𝑝</m:t>
+                              </m:r>
+                              <m:r>
+                                <a:rPr lang="en-US" altLang="zh-TW" sz="2000" b="0" i="1" smtClean="0">
+                                  <a:latin typeface="Cambria Math" panose="02040503050406030204" pitchFamily="18" charset="0"/>
+                                </a:rPr>
+                                <m:t>=0</m:t>
+                              </m:r>
+                            </m:sub>
+                            <m:sup>
+                              <m:r>
+                                <a:rPr lang="en-US" altLang="zh-TW" sz="2000" i="1">
+                                  <a:latin typeface="Cambria Math" panose="02040503050406030204" pitchFamily="18" charset="0"/>
+                                </a:rPr>
+                                <m:t>𝐿</m:t>
+                              </m:r>
+                            </m:sup>
+                          </m:sSubSup>
+                          <m:d>
+                            <m:dPr>
+                              <m:ctrlPr>
+                                <a:rPr lang="en-US" altLang="zh-TW" sz="2000" i="1">
+                                  <a:latin typeface="Cambria Math" panose="02040503050406030204" pitchFamily="18" charset="0"/>
+                                </a:rPr>
+                              </m:ctrlPr>
+                            </m:dPr>
+                            <m:e>
+                              <m:r>
+                                <a:rPr lang="en-US" altLang="zh-TW" sz="2000" b="1" i="1">
+                                  <a:latin typeface="Cambria Math" panose="02040503050406030204" pitchFamily="18" charset="0"/>
+                                </a:rPr>
+                                <m:t>𝒓</m:t>
+                              </m:r>
+                            </m:e>
+                          </m:d>
+                        </m:e>
+                      </m:d>
+                    </m:oMath>
+                  </m:oMathPara>
+                </a14:m>
+                <a:endParaRPr lang="zh-TW" altLang="en-US" sz="2000" dirty="0">
+                  <a:latin typeface="Times New Roman" panose="02020603050405020304" pitchFamily="18" charset="0"/>
+                  <a:cs typeface="Times New Roman" panose="02020603050405020304" pitchFamily="18" charset="0"/>
+                </a:endParaRPr>
+              </a:p>
+            </p:txBody>
+          </p:sp>
+        </mc:Choice>
+        <mc:Fallback>
+          <p:sp>
+            <p:nvSpPr>
+              <p:cNvPr id="197" name="矩形 196">
+                <a:extLst>
+                  <a:ext uri="{FF2B5EF4-FFF2-40B4-BE49-F238E27FC236}">
+                    <a16:creationId xmlns:a16="http://schemas.microsoft.com/office/drawing/2014/main" id="{1F70F799-7021-4B0C-8F9E-27C76519BF43}"/>
+                  </a:ext>
+                </a:extLst>
+              </p:cNvPr>
+              <p:cNvSpPr>
+                <a:spLocks noRot="1" noChangeAspect="1" noMove="1" noResize="1" noEditPoints="1" noAdjustHandles="1" noChangeArrowheads="1" noChangeShapeType="1" noTextEdit="1"/>
+              </p:cNvSpPr>
+              <p:nvPr/>
+            </p:nvSpPr>
+            <p:spPr>
+              <a:xfrm>
+                <a:off x="1338870" y="2425707"/>
+                <a:ext cx="1740861" cy="456728"/>
+              </a:xfrm>
+              <a:prstGeom prst="rect">
+                <a:avLst/>
+              </a:prstGeom>
+              <a:blipFill>
+                <a:blip r:embed="rId49"/>
+                <a:stretch>
+                  <a:fillRect b="-4000"/>
+                </a:stretch>
+              </a:blipFill>
+            </p:spPr>
+            <p:txBody>
+              <a:bodyPr/>
+              <a:lstStyle/>
+              <a:p>
+                <a:r>
+                  <a:rPr lang="zh-TW" altLang="en-US">
+                    <a:noFill/>
+                  </a:rPr>
+                  <a:t> </a:t>
+                </a:r>
+              </a:p>
+            </p:txBody>
+          </p:sp>
+        </mc:Fallback>
+      </mc:AlternateContent>
+      <p:pic>
+        <p:nvPicPr>
+          <p:cNvPr id="198" name="圖片 197">
+            <a:extLst>
+              <a:ext uri="{FF2B5EF4-FFF2-40B4-BE49-F238E27FC236}">
+                <a16:creationId xmlns:a16="http://schemas.microsoft.com/office/drawing/2014/main" id="{3C328688-BC2D-4C22-B96C-C9B7514EB829}"/>
+              </a:ext>
+            </a:extLst>
+          </p:cNvPr>
+          <p:cNvPicPr>
+            <a:picLocks noChangeAspect="1"/>
+          </p:cNvPicPr>
+          <p:nvPr/>
+        </p:nvPicPr>
+        <p:blipFill rotWithShape="1">
+          <a:blip r:embed="rId50">
+            <a:clrChange>
+              <a:clrFrom>
+                <a:srgbClr val="FFFFFF"/>
+              </a:clrFrom>
+              <a:clrTo>
+                <a:srgbClr val="FFFFFF">
+                  <a:alpha val="0"/>
+                </a:srgbClr>
+              </a:clrTo>
+            </a:clrChange>
+          </a:blip>
+          <a:srcRect r="26374"/>
+          <a:stretch/>
+        </p:blipFill>
+        <p:spPr>
+          <a:xfrm>
+            <a:off x="8193838" y="929640"/>
+            <a:ext cx="363590" cy="1350241"/>
           </a:xfrm>
           <a:prstGeom prst="rect">
             <a:avLst/>
@@ -11738,7 +14947,7 @@
     </p:spTree>
     <p:extLst>
       <p:ext uri="{BB962C8B-B14F-4D97-AF65-F5344CB8AC3E}">
-        <p14:creationId xmlns:p14="http://schemas.microsoft.com/office/powerpoint/2010/main" val="100079477"/>
+        <p14:creationId xmlns:p14="http://schemas.microsoft.com/office/powerpoint/2010/main" val="548855793"/>
       </p:ext>
     </p:extLst>
   </p:cSld>

--- a/Final/Figures/ufig.pptx
+++ b/Final/Figures/ufig.pptx
@@ -245,7 +245,7 @@
           <a:p>
             <a:fld id="{6A29EBDB-ED21-4F12-8F84-164F28F696EF}" type="datetimeFigureOut">
               <a:rPr lang="zh-TW" altLang="en-US" smtClean="0"/>
-              <a:t>2026/7/2</a:t>
+              <a:t>2026/7/18</a:t>
             </a:fld>
             <a:endParaRPr lang="zh-TW" altLang="en-US"/>
           </a:p>
@@ -415,7 +415,7 @@
           <a:p>
             <a:fld id="{6A29EBDB-ED21-4F12-8F84-164F28F696EF}" type="datetimeFigureOut">
               <a:rPr lang="zh-TW" altLang="en-US" smtClean="0"/>
-              <a:t>2026/7/2</a:t>
+              <a:t>2026/7/18</a:t>
             </a:fld>
             <a:endParaRPr lang="zh-TW" altLang="en-US"/>
           </a:p>
@@ -595,7 +595,7 @@
           <a:p>
             <a:fld id="{6A29EBDB-ED21-4F12-8F84-164F28F696EF}" type="datetimeFigureOut">
               <a:rPr lang="zh-TW" altLang="en-US" smtClean="0"/>
-              <a:t>2026/7/2</a:t>
+              <a:t>2026/7/18</a:t>
             </a:fld>
             <a:endParaRPr lang="zh-TW" altLang="en-US"/>
           </a:p>
@@ -765,7 +765,7 @@
           <a:p>
             <a:fld id="{6A29EBDB-ED21-4F12-8F84-164F28F696EF}" type="datetimeFigureOut">
               <a:rPr lang="zh-TW" altLang="en-US" smtClean="0"/>
-              <a:t>2026/7/2</a:t>
+              <a:t>2026/7/18</a:t>
             </a:fld>
             <a:endParaRPr lang="zh-TW" altLang="en-US"/>
           </a:p>
@@ -1009,7 +1009,7 @@
           <a:p>
             <a:fld id="{6A29EBDB-ED21-4F12-8F84-164F28F696EF}" type="datetimeFigureOut">
               <a:rPr lang="zh-TW" altLang="en-US" smtClean="0"/>
-              <a:t>2026/7/2</a:t>
+              <a:t>2026/7/18</a:t>
             </a:fld>
             <a:endParaRPr lang="zh-TW" altLang="en-US"/>
           </a:p>
@@ -1241,7 +1241,7 @@
           <a:p>
             <a:fld id="{6A29EBDB-ED21-4F12-8F84-164F28F696EF}" type="datetimeFigureOut">
               <a:rPr lang="zh-TW" altLang="en-US" smtClean="0"/>
-              <a:t>2026/7/2</a:t>
+              <a:t>2026/7/18</a:t>
             </a:fld>
             <a:endParaRPr lang="zh-TW" altLang="en-US"/>
           </a:p>
@@ -1608,7 +1608,7 @@
           <a:p>
             <a:fld id="{6A29EBDB-ED21-4F12-8F84-164F28F696EF}" type="datetimeFigureOut">
               <a:rPr lang="zh-TW" altLang="en-US" smtClean="0"/>
-              <a:t>2026/7/2</a:t>
+              <a:t>2026/7/18</a:t>
             </a:fld>
             <a:endParaRPr lang="zh-TW" altLang="en-US"/>
           </a:p>
@@ -1726,7 +1726,7 @@
           <a:p>
             <a:fld id="{6A29EBDB-ED21-4F12-8F84-164F28F696EF}" type="datetimeFigureOut">
               <a:rPr lang="zh-TW" altLang="en-US" smtClean="0"/>
-              <a:t>2026/7/2</a:t>
+              <a:t>2026/7/18</a:t>
             </a:fld>
             <a:endParaRPr lang="zh-TW" altLang="en-US"/>
           </a:p>
@@ -1821,7 +1821,7 @@
           <a:p>
             <a:fld id="{6A29EBDB-ED21-4F12-8F84-164F28F696EF}" type="datetimeFigureOut">
               <a:rPr lang="zh-TW" altLang="en-US" smtClean="0"/>
-              <a:t>2026/7/2</a:t>
+              <a:t>2026/7/18</a:t>
             </a:fld>
             <a:endParaRPr lang="zh-TW" altLang="en-US"/>
           </a:p>
@@ -2098,7 +2098,7 @@
           <a:p>
             <a:fld id="{6A29EBDB-ED21-4F12-8F84-164F28F696EF}" type="datetimeFigureOut">
               <a:rPr lang="zh-TW" altLang="en-US" smtClean="0"/>
-              <a:t>2026/7/2</a:t>
+              <a:t>2026/7/18</a:t>
             </a:fld>
             <a:endParaRPr lang="zh-TW" altLang="en-US"/>
           </a:p>
@@ -2355,7 +2355,7 @@
           <a:p>
             <a:fld id="{6A29EBDB-ED21-4F12-8F84-164F28F696EF}" type="datetimeFigureOut">
               <a:rPr lang="zh-TW" altLang="en-US" smtClean="0"/>
-              <a:t>2026/7/2</a:t>
+              <a:t>2026/7/18</a:t>
             </a:fld>
             <a:endParaRPr lang="zh-TW" altLang="en-US"/>
           </a:p>
@@ -2568,7 +2568,7 @@
           <a:p>
             <a:fld id="{6A29EBDB-ED21-4F12-8F84-164F28F696EF}" type="datetimeFigureOut">
               <a:rPr lang="zh-TW" altLang="en-US" smtClean="0"/>
-              <a:t>2026/7/2</a:t>
+              <a:t>2026/7/18</a:t>
             </a:fld>
             <a:endParaRPr lang="zh-TW" altLang="en-US"/>
           </a:p>
@@ -11959,8 +11959,8 @@
           </a:prstGeom>
         </p:spPr>
       </p:pic>
-      <mc:AlternateContent xmlns:mc="http://schemas.openxmlformats.org/markup-compatibility/2006">
-        <mc:Choice xmlns:a14="http://schemas.microsoft.com/office/drawing/2010/main" Requires="a14">
+      <mc:AlternateContent xmlns:mc="http://schemas.openxmlformats.org/markup-compatibility/2006" xmlns:a14="http://schemas.microsoft.com/office/drawing/2010/main">
+        <mc:Choice Requires="a14">
           <p:sp>
             <p:nvSpPr>
               <p:cNvPr id="244" name="矩形 243">
@@ -12027,7 +12027,7 @@
             </p:txBody>
           </p:sp>
         </mc:Choice>
-        <mc:Fallback>
+        <mc:Fallback xmlns="">
           <p:sp>
             <p:nvSpPr>
               <p:cNvPr id="244" name="矩形 243">
@@ -12486,8 +12486,8 @@
           </a:prstGeom>
         </p:spPr>
       </p:pic>
-      <mc:AlternateContent xmlns:mc="http://schemas.openxmlformats.org/markup-compatibility/2006">
-        <mc:Choice xmlns:a14="http://schemas.microsoft.com/office/drawing/2010/main" Requires="a14">
+      <mc:AlternateContent xmlns:mc="http://schemas.openxmlformats.org/markup-compatibility/2006" xmlns:a14="http://schemas.microsoft.com/office/drawing/2010/main">
+        <mc:Choice Requires="a14">
           <p:sp>
             <p:nvSpPr>
               <p:cNvPr id="222" name="矩形 221">
@@ -12554,7 +12554,7 @@
             </p:txBody>
           </p:sp>
         </mc:Choice>
-        <mc:Fallback>
+        <mc:Fallback xmlns="">
           <p:sp>
             <p:nvSpPr>
               <p:cNvPr id="222" name="矩形 221">
@@ -12613,7 +12613,7 @@
         </p:nvGrpSpPr>
         <p:grpSpPr>
           <a:xfrm>
-            <a:off x="1946989" y="3072995"/>
+            <a:off x="1946989" y="3154638"/>
             <a:ext cx="550009" cy="592612"/>
             <a:chOff x="-988088" y="945710"/>
             <a:chExt cx="550009" cy="592612"/>
@@ -14542,8 +14542,8 @@
           </p:sp>
         </mc:Fallback>
       </mc:AlternateContent>
-      <mc:AlternateContent xmlns:mc="http://schemas.openxmlformats.org/markup-compatibility/2006">
-        <mc:Choice xmlns:a14="http://schemas.microsoft.com/office/drawing/2010/main" Requires="a14">
+      <mc:AlternateContent xmlns:mc="http://schemas.openxmlformats.org/markup-compatibility/2006" xmlns:a14="http://schemas.microsoft.com/office/drawing/2010/main">
+        <mc:Choice Requires="a14">
           <p:sp>
             <p:nvSpPr>
               <p:cNvPr id="196" name="矩形 195">
@@ -14683,7 +14683,7 @@
             </p:txBody>
           </p:sp>
         </mc:Choice>
-        <mc:Fallback>
+        <mc:Fallback xmlns="">
           <p:sp>
             <p:nvSpPr>
               <p:cNvPr id="196" name="矩形 195">
@@ -14728,8 +14728,8 @@
           </p:sp>
         </mc:Fallback>
       </mc:AlternateContent>
-      <mc:AlternateContent xmlns:mc="http://schemas.openxmlformats.org/markup-compatibility/2006">
-        <mc:Choice xmlns:a14="http://schemas.microsoft.com/office/drawing/2010/main" Requires="a14">
+      <mc:AlternateContent xmlns:mc="http://schemas.openxmlformats.org/markup-compatibility/2006" xmlns:a14="http://schemas.microsoft.com/office/drawing/2010/main">
+        <mc:Choice Requires="a14">
           <p:sp>
             <p:nvSpPr>
               <p:cNvPr id="197" name="矩形 196">
@@ -14859,7 +14859,7 @@
             </p:txBody>
           </p:sp>
         </mc:Choice>
-        <mc:Fallback>
+        <mc:Fallback xmlns="">
           <p:sp>
             <p:nvSpPr>
               <p:cNvPr id="197" name="矩形 196">
